--- a/downloads/presentations/modules/anl-350.pptx
+++ b/downloads/presentations/modules/anl-350.pptx
@@ -614,7 +614,8 @@
               <a:t>Technical and Operational Deep Dive
 Model communication begins with the decision context. The same model output may be communicated differently to a technical team, health officer, program manager, community partner, or public audience. Technical users may need details about metrics and data limitations, while executives may need decision implications, confidence, and recommended actions.
 Uncertainty should be explained visually and verbally. Trend lines, ranges, maps, and risk categories can help, but they can also imply precision that the model does not have. Labels should avoid unsupported certainty. Words such as likely, possible, estimated, preliminary, and subject to change can be helpful when used consistently.
-Subgroup findings require special care. If model performance differs by age, race, ethnicity, language, geography, disability, housing status, or data source, communications should avoid presenting aggregate performance as universal. Decision-makers need to know whether a model is less reliable for some populations.</a:t>
+Subgroup findings require special care. If model performance differs by age, race, ethnicity, language, geography, disability, housing status, or data source, communications should avoid presenting aggregate performance as universal. Decision-makers need to know whether a model is less reliable for some populations.
+Application guidance: Connect the concept to data quality, model performance, validation evidence, monitoring measures, and decisions that remain under human control.</a:t>
             </a:r>
             <a:endParaRPr lang="en-US" dirty="0"/>
           </a:p>
@@ -704,7 +705,8 @@
               <a:rPr lang="en-US" dirty="0"/>
               <a:t>Risks, Failure Modes, and Guardrails
 A major failure mode is false precision. A model may produce a number such as 82.4 percent risk, but the data and validation may not support that level of exactness. A guardrail is to use appropriate rounding, risk categories, and uncertainty statements.
-Another failure mode is hiding limitations to make results look more actionable. This can erode trust if the model later performs poorly. A guardrail is to include a standard limitations section in model briefs and require review before results are shared outside the technical team.</a:t>
+Another failure mode is hiding limitations to make results look more actionable. This can erode trust if the model later performs poorly. A guardrail is to include a standard limitations section in model briefs and require review before results are shared outside the technical team.
+Application guidance: Identify what could go wrong, who could be affected, what safeguards are needed, and what evidence should be reviewed before use expands.</a:t>
             </a:r>
             <a:endParaRPr lang="en-US" dirty="0"/>
           </a:p>
@@ -793,7 +795,8 @@
             <a:r>
               <a:rPr lang="en-US" dirty="0"/>
               <a:t>Application to AI-Supported Workflows
-Generative AI can help draft summaries of model findings, but the draft must be checked by analysts who understand the model. Predictive analytics, outbreak forecasts, risk stratification tools, and geospatial models all require communication practices that preserve uncertainty. RAG systems used for briefings should cite source reports and validation evidence.</a:t>
+Generative AI can help draft summaries of model findings, but the draft must be checked by analysts who understand the model. Predictive analytics, outbreak forecasts, risk stratification tools, and geospatial models all require communication practices that preserve uncertainty. RAG systems used for briefings should cite source reports and validation evidence.
+Application guidance: Connect the concept to data quality, model performance, validation evidence, monitoring measures, and decisions that remain under human control.</a:t>
             </a:r>
             <a:endParaRPr lang="en-US" dirty="0"/>
           </a:p>
@@ -884,7 +887,8 @@
               <a:t>Reflection Questions
 Who needs to understand this model result?
 What decision will the result support?
-What uncertainty or limitation could change the decision?</a:t>
+What uncertainty or limitation could change the decision?
+Application guidance: Connect the concept to data quality, model performance, validation evidence, monitoring measures, and decisions that remain under human control.</a:t>
             </a:r>
             <a:endParaRPr lang="en-US" dirty="0"/>
           </a:p>
@@ -974,7 +978,8 @@
               <a:rPr lang="en-US" dirty="0"/>
               <a:t>Reflection Questions
 Are there subgroup performance concerns?
-What wording would prevent overclaiming?</a:t>
+What wording would prevent overclaiming?
+Application guidance: Connect the concept to data quality, model performance, validation evidence, monitoring measures, and decisions that remain under human control.</a:t>
             </a:r>
             <a:endParaRPr lang="en-US" dirty="0"/>
           </a:p>
@@ -1063,7 +1068,8 @@
             <a:r>
               <a:rPr lang="en-US" dirty="0"/>
               <a:t>Practical Exercise
-Create a one-page model communication brief. Include the decision question, model result, uncertainty, validation status, limitations, subgroup considerations, recommended use, prohibited use, and next review date.</a:t>
+Create a one-page model communication brief. Include the decision question, model result, uncertainty, validation status, limitations, subgroup considerations, recommended use, prohibited use, and next review date.
+Application guidance: Use the assignment to test whether you can explain the concept, apply it to a realistic public health situation, and identify what would need review before the work moves forward.</a:t>
             </a:r>
             <a:endParaRPr lang="en-US" dirty="0"/>
           </a:p>
@@ -1154,7 +1160,8 @@
               <a:t>Expected Artifact or Evidence
 Model communication brief
 Plain-language uncertainty statement
-Subgroup caveat if relevant</a:t>
+Subgroup caveat if relevant
+Application guidance: Connect the concept to data quality, model performance, validation evidence, monitoring measures, and decisions that remain under human control.</a:t>
             </a:r>
             <a:endParaRPr lang="en-US" dirty="0"/>
           </a:p>
@@ -1243,7 +1250,8 @@
             <a:r>
               <a:rPr lang="en-US" dirty="0"/>
               <a:t>Expected Artifact or Evidence
-Review sign-off note</a:t>
+Review sign-off note
+Application guidance: Connect the concept to data quality, model performance, validation evidence, monitoring measures, and decisions that remain under human control.</a:t>
             </a:r>
             <a:endParaRPr lang="en-US" dirty="0"/>
           </a:p>
@@ -1335,7 +1343,8 @@
 Model communication brief
 Plain-language uncertainty statement
 Subgroup caveat if relevant
-Review sign-off note</a:t>
+Review sign-off note
+Application guidance: Use the assignment to test whether you can explain the concept, apply it to a realistic public health situation, and identify what would need review before the work moves forward.</a:t>
             </a:r>
             <a:endParaRPr lang="en-US" dirty="0"/>
           </a:p>
@@ -1428,7 +1437,8 @@
 2. What is the best reason to assign an accountability owner?
 3. When should an AI-supported workflow be escalated for review?
 4. Which practice best supports public accountability?
-5. What should happen when data sources, policy, vendor configuration, or workflow use changes?</a:t>
+5. What should happen when data sources, policy, vendor configuration, or workflow use changes?
+Application guidance: Use the assignment to test whether you can explain the concept, apply it to a realistic public health situation, and identify what would need review before the work moves forward.</a:t>
             </a:r>
             <a:endParaRPr lang="en-US" dirty="0"/>
           </a:p>
@@ -1613,7 +1623,8 @@
 NIST Artificial Intelligence Risk Management Framework and NIST Generative AI Profile: https://www.nist.gov/publications/artificial-intelligence-risk-management-framework-generative-artificial-intelligence
 WHO Ethics and Governance of Artificial Intelligence for Health guidance: https://www.who.int/publications/i/item/9789240029200
 OWASP Top 10 for Large Language Model Applications: https://owasp.org/www-project-top-10-for-large-language-model-applications/
-ONC health IT, interoperability, and information blocking resources: https://www.healthit.gov/</a:t>
+ONC health IT, interoperability, and information blocking resources: https://www.healthit.gov/
+Application guidance: Connect the concept to data quality, model performance, validation evidence, monitoring measures, and decisions that remain under human control.</a:t>
             </a:r>
             <a:endParaRPr lang="en-US" dirty="0"/>
           </a:p>
@@ -1702,7 +1713,8 @@
             <a:r>
               <a:rPr lang="en-US" dirty="0"/>
               <a:t>References and Resources
-Agency policies for privacy, public records, cybersecurity, procurement, civil rights, accessibility, language access, and emergency communications</a:t>
+Agency policies for privacy, public records, cybersecurity, procurement, civil rights, accessibility, language access, and emergency communications
+Application guidance: Connect the concept to data quality, model performance, validation evidence, monitoring measures, and decisions that remain under human control.</a:t>
             </a:r>
             <a:endParaRPr lang="en-US" dirty="0"/>
           </a:p>
@@ -1981,7 +1993,8 @@
 Distinguish uncertainty, variability, error, bias, and data limitations.
 Identify when model results should include confidence intervals, prediction intervals, caveats, or subgroup findings.
 Avoid overclaiming, causal overreach, and false precision in AI communications.
-Create a model communication brief for a public health decision-maker.</a:t>
+Create a model communication brief for a public health decision-maker.
+Application guidance: Use the assignment to test whether you can explain the concept, apply it to a realistic public health situation, and identify what would need review before the work moves forward.</a:t>
             </a:r>
             <a:endParaRPr lang="en-US" dirty="0"/>
           </a:p>
@@ -2071,7 +2084,8 @@
               <a:rPr lang="en-US" dirty="0"/>
               <a:t>Module Overview
 Public health staff often need to communicate AI or model results to leaders, partners, the public, or operational teams. This module teaches learners how to explain model outputs, uncertainty, limitations, and appropriate use without overstating precision or creating false confidence.
-The module focuses on practical communication. Learners translate metrics, confidence, caveats, and validation findings into language that supports responsible decisions. The goal is to ensure that model results inform judgment rather than replace it.</a:t>
+The module focuses on practical communication. Learners translate metrics, confidence, caveats, and validation findings into language that supports responsible decisions. The goal is to ensure that model results inform judgment rather than replace it.
+Application guidance: Connect the concept to data quality, model performance, validation evidence, monitoring measures, and decisions that remain under human control.</a:t>
             </a:r>
             <a:endParaRPr lang="en-US" dirty="0"/>
           </a:p>
@@ -2164,7 +2178,8 @@
 Prediction interval: A range that estimates where a future observation may fall.
 Confidence interval: A range that expresses uncertainty around an estimated parameter.
 Calibration: How closely predicted probabilities match observed outcomes.
-Caveat: A clear statement of limitation, condition, or caution.</a:t>
+Caveat: A clear statement of limitation, condition, or caution.
+Application guidance: Connect the concept to data quality, model performance, validation evidence, monitoring measures, and decisions that remain under human control.</a:t>
             </a:r>
             <a:endParaRPr lang="en-US" dirty="0"/>
           </a:p>
@@ -2254,7 +2269,8 @@
               <a:rPr lang="en-US" dirty="0"/>
               <a:t>Why This Topic Matters for Public Health AI
 Model outputs can influence urgent decisions. A forecast may affect staffing, a risk score may affect outreach, and a hotspot map may affect deployment of field teams. If uncertainty is not explained clearly, decision-makers may treat estimates as facts or ignore important limitations.
-Public health communication must balance clarity and caution. Too much technical detail can obscure the message, but too little detail can hide uncertainty. A strong communication product explains what the model suggests, what it does not show, how reliable it is, and what human judgment or additional evidence is needed.</a:t>
+Public health communication must balance clarity and caution. Too much technical detail can obscure the message, but too little detail can hide uncertainty. A strong communication product explains what the model suggests, what it does not show, how reliable it is, and what human judgment or additional evidence is needed.
+Application guidance: Connect the concept to data quality, model performance, validation evidence, monitoring measures, and decisions that remain under human control.</a:t>
             </a:r>
             <a:endParaRPr lang="en-US" dirty="0"/>
           </a:p>
@@ -2344,7 +2360,8 @@
               <a:rPr lang="en-US" dirty="0"/>
               <a:t>Public Health Example
 An epidemiology team uses a time-series model to forecast emergency department visits for respiratory illness. The forecast shows a possible increase over the next two weeks, but the prediction interval is wide because reporting patterns changed after a holiday. A strong communication brief would state that visits may rise, explain the uncertainty, identify possible reasons for reduced confidence, and recommend preparedness actions that are proportional to the evidence.
-The brief should not say that the model proves an outbreak is occurring. It should present the forecast as one input into surveillance judgment, alongside laboratory data, provider reports, syndromic trends, and field intelligence.</a:t>
+The brief should not say that the model proves an outbreak is occurring. It should present the forecast as one input into surveillance judgment, alongside laboratory data, provider reports, syndromic trends, and field intelligence.
+Application guidance: Connect the concept to data quality, model performance, validation evidence, monitoring measures, and decisions that remain under human control.</a:t>
             </a:r>
             <a:endParaRPr lang="en-US" dirty="0"/>
           </a:p>
@@ -3115,8 +3132,8 @@
         </p:nvSpPr>
         <p:spPr>
           <a:xfrm>
-            <a:off x="9966960" y="6537960"/>
-            <a:ext cx="1645920" cy="201168"/>
+            <a:off x="9646920" y="6537960"/>
+            <a:ext cx="1965960" cy="201168"/>
           </a:xfrm>
           <a:prstGeom prst="rect">
             <a:avLst/>
@@ -3140,7 +3157,7 @@
                 <a:ea typeface="Aptos" pitchFamily="34" charset="-122"/>
                 <a:cs typeface="Aptos" pitchFamily="34" charset="-120"/>
               </a:rPr>
-              <a:t>Â© Paula Soper</a:t>
+              <a:t>Copyright Paula Soper</a:t>
             </a:r>
             <a:endParaRPr lang="en-US" sz="800" dirty="0"/>
           </a:p>
@@ -3187,77 +3204,13 @@
       </p:sp>
       <p:sp>
         <p:nvSpPr>
-          <p:cNvPr id="8" name="Shape 6"/>
+          <p:cNvPr id="8" name="Text 6"/>
           <p:cNvSpPr/>
           <p:nvPr/>
         </p:nvSpPr>
         <p:spPr>
           <a:xfrm>
             <a:off x="640080" y="658368"/>
-            <a:ext cx="420624" cy="420624"/>
-          </a:xfrm>
-          <a:prstGeom prst="ellipse">
-            <a:avLst/>
-          </a:prstGeom>
-          <a:solidFill>
-            <a:srgbClr val="0068B7"/>
-          </a:solidFill>
-          <a:ln w="12700">
-            <a:solidFill>
-              <a:srgbClr val="0068B7"/>
-            </a:solidFill>
-            <a:prstDash val="solid"/>
-          </a:ln>
-        </p:spPr>
-      </p:sp>
-      <p:sp>
-        <p:nvSpPr>
-          <p:cNvPr id="9" name="Text 7"/>
-          <p:cNvSpPr/>
-          <p:nvPr/>
-        </p:nvSpPr>
-        <p:spPr>
-          <a:xfrm>
-            <a:off x="640080" y="731520"/>
-            <a:ext cx="420624" cy="164592"/>
-          </a:xfrm>
-          <a:prstGeom prst="rect">
-            <a:avLst/>
-          </a:prstGeom>
-          <a:noFill/>
-          <a:ln/>
-        </p:spPr>
-        <p:txBody>
-          <a:bodyPr wrap="square" lIns="0" tIns="0" rIns="0" bIns="0" rtlCol="0" anchor="ctr"/>
-          <a:lstStyle/>
-          <a:p>
-            <a:pPr algn="ctr" indent="0" marL="0">
-              <a:buNone/>
-            </a:pPr>
-            <a:r>
-              <a:rPr lang="en-US" sz="1100" b="1" dirty="0">
-                <a:solidFill>
-                  <a:srgbClr val="FFFFFF"/>
-                </a:solidFill>
-                <a:latin typeface="Aptos" pitchFamily="34" charset="0"/>
-                <a:ea typeface="Aptos" pitchFamily="34" charset="-122"/>
-                <a:cs typeface="Aptos" pitchFamily="34" charset="-120"/>
-              </a:rPr>
-              <a:t>6</a:t>
-            </a:r>
-            <a:endParaRPr lang="en-US" sz="1100" dirty="0"/>
-          </a:p>
-        </p:txBody>
-      </p:sp>
-      <p:sp>
-        <p:nvSpPr>
-          <p:cNvPr id="10" name="Text 8"/>
-          <p:cNvSpPr/>
-          <p:nvPr/>
-        </p:nvSpPr>
-        <p:spPr>
-          <a:xfrm>
-            <a:off x="640080" y="621792"/>
             <a:ext cx="10881360" cy="713232"/>
           </a:xfrm>
           <a:prstGeom prst="rect">
@@ -3292,14 +3245,14 @@
       </p:sp>
       <p:sp>
         <p:nvSpPr>
-          <p:cNvPr id="11" name="Text 9"/>
+          <p:cNvPr id="9" name="Text 7"/>
           <p:cNvSpPr/>
           <p:nvPr/>
         </p:nvSpPr>
         <p:spPr>
           <a:xfrm>
             <a:off x="868680" y="1508760"/>
-            <a:ext cx="6537960" cy="4160520"/>
+            <a:ext cx="6309360" cy="4160520"/>
           </a:xfrm>
           <a:prstGeom prst="rect">
             <a:avLst/>
@@ -3358,18 +3311,18 @@
       </p:sp>
       <p:sp>
         <p:nvSpPr>
-          <p:cNvPr id="12" name="Shape 10"/>
-          <p:cNvSpPr/>
-          <p:nvPr/>
-        </p:nvSpPr>
-        <p:spPr>
-          <a:xfrm>
-            <a:off x="7909560" y="1417320"/>
-            <a:ext cx="3154680" cy="1828800"/>
+          <p:cNvPr id="10" name="Shape 8"/>
+          <p:cNvSpPr/>
+          <p:nvPr/>
+        </p:nvSpPr>
+        <p:spPr>
+          <a:xfrm>
+            <a:off x="7635240" y="1325880"/>
+            <a:ext cx="3474720" cy="1325880"/>
           </a:xfrm>
           <a:prstGeom prst="roundRect">
             <a:avLst>
-              <a:gd name="adj" fmla="val 6000"/>
+              <a:gd name="adj" fmla="val 8276"/>
             </a:avLst>
           </a:prstGeom>
           <a:solidFill>
@@ -3385,14 +3338,14 @@
       </p:sp>
       <p:sp>
         <p:nvSpPr>
-          <p:cNvPr id="13" name="Text 11"/>
-          <p:cNvSpPr/>
-          <p:nvPr/>
-        </p:nvSpPr>
-        <p:spPr>
-          <a:xfrm>
-            <a:off x="8074152" y="1563624"/>
-            <a:ext cx="2825496" cy="256032"/>
+          <p:cNvPr id="11" name="Text 9"/>
+          <p:cNvSpPr/>
+          <p:nvPr/>
+        </p:nvSpPr>
+        <p:spPr>
+          <a:xfrm>
+            <a:off x="7799832" y="1472184"/>
+            <a:ext cx="3145536" cy="256032"/>
           </a:xfrm>
           <a:prstGeom prst="rect">
             <a:avLst/>
@@ -3416,7 +3369,7 @@
                 <a:ea typeface="Aptos" pitchFamily="34" charset="-122"/>
                 <a:cs typeface="Aptos" pitchFamily="34" charset="-120"/>
               </a:rPr>
-              <a:t>Key idea</a:t>
+              <a:t>Data decision</a:t>
             </a:r>
             <a:endParaRPr lang="en-US" sz="1300" dirty="0"/>
           </a:p>
@@ -3424,14 +3377,14 @@
       </p:sp>
       <p:sp>
         <p:nvSpPr>
-          <p:cNvPr id="14" name="Text 12"/>
-          <p:cNvSpPr/>
-          <p:nvPr/>
-        </p:nvSpPr>
-        <p:spPr>
-          <a:xfrm>
-            <a:off x="8074152" y="1920240"/>
-            <a:ext cx="2825496" cy="1188720"/>
+          <p:cNvPr id="12" name="Text 10"/>
+          <p:cNvSpPr/>
+          <p:nvPr/>
+        </p:nvSpPr>
+        <p:spPr>
+          <a:xfrm>
+            <a:off x="7799832" y="1828800"/>
+            <a:ext cx="3145536" cy="685800"/>
           </a:xfrm>
           <a:prstGeom prst="rect">
             <a:avLst/>
@@ -3465,21 +3418,212 @@
       </p:sp>
       <p:sp>
         <p:nvSpPr>
-          <p:cNvPr id="15" name="Shape 13"/>
-          <p:cNvSpPr/>
-          <p:nvPr/>
-        </p:nvSpPr>
-        <p:spPr>
-          <a:xfrm>
-            <a:off x="7909560" y="3520440"/>
-            <a:ext cx="3154680" cy="1737360"/>
+          <p:cNvPr id="13" name="Shape 11"/>
+          <p:cNvSpPr/>
+          <p:nvPr/>
+        </p:nvSpPr>
+        <p:spPr>
+          <a:xfrm>
+            <a:off x="7635240" y="2788920"/>
+            <a:ext cx="3474720" cy="1536192"/>
           </a:xfrm>
           <a:prstGeom prst="roundRect">
             <a:avLst>
-              <a:gd name="adj" fmla="val 6316"/>
+              <a:gd name="adj" fmla="val 7143"/>
             </a:avLst>
           </a:prstGeom>
           <a:solidFill>
+            <a:srgbClr val="FFFFFF">
+              <a:alpha val="88000"/>
+            </a:srgbClr>
+          </a:solidFill>
+          <a:ln w="12700">
+            <a:solidFill>
+              <a:srgbClr val="D6E8F2"/>
+            </a:solidFill>
+            <a:prstDash val="solid"/>
+          </a:ln>
+        </p:spPr>
+      </p:sp>
+      <p:sp>
+        <p:nvSpPr>
+          <p:cNvPr id="14" name="Shape 12"/>
+          <p:cNvSpPr/>
+          <p:nvPr/>
+        </p:nvSpPr>
+        <p:spPr>
+          <a:xfrm>
+            <a:off x="8138160" y="3474720"/>
+            <a:ext cx="256032" cy="411480"/>
+          </a:xfrm>
+          <a:prstGeom prst="rect">
+            <a:avLst/>
+          </a:prstGeom>
+          <a:solidFill>
+            <a:srgbClr val="0068B7"/>
+          </a:solidFill>
+          <a:ln w="12700">
+            <a:solidFill>
+              <a:srgbClr val="0068B7"/>
+            </a:solidFill>
+            <a:prstDash val="solid"/>
+          </a:ln>
+        </p:spPr>
+      </p:sp>
+      <p:sp>
+        <p:nvSpPr>
+          <p:cNvPr id="15" name="Shape 13"/>
+          <p:cNvSpPr/>
+          <p:nvPr/>
+        </p:nvSpPr>
+        <p:spPr>
+          <a:xfrm>
+            <a:off x="8577072" y="3172968"/>
+            <a:ext cx="256032" cy="713232"/>
+          </a:xfrm>
+          <a:prstGeom prst="rect">
+            <a:avLst/>
+          </a:prstGeom>
+          <a:solidFill>
+            <a:srgbClr val="2F8A28"/>
+          </a:solidFill>
+          <a:ln w="12700">
+            <a:solidFill>
+              <a:srgbClr val="2F8A28"/>
+            </a:solidFill>
+            <a:prstDash val="solid"/>
+          </a:ln>
+        </p:spPr>
+      </p:sp>
+      <p:sp>
+        <p:nvSpPr>
+          <p:cNvPr id="16" name="Shape 14"/>
+          <p:cNvSpPr/>
+          <p:nvPr/>
+        </p:nvSpPr>
+        <p:spPr>
+          <a:xfrm>
+            <a:off x="9015984" y="2880360"/>
+            <a:ext cx="256032" cy="1005840"/>
+          </a:xfrm>
+          <a:prstGeom prst="rect">
+            <a:avLst/>
+          </a:prstGeom>
+          <a:solidFill>
+            <a:srgbClr val="D69A2D"/>
+          </a:solidFill>
+          <a:ln w="12700">
+            <a:solidFill>
+              <a:srgbClr val="D69A2D"/>
+            </a:solidFill>
+            <a:prstDash val="solid"/>
+          </a:ln>
+        </p:spPr>
+      </p:sp>
+      <p:sp>
+        <p:nvSpPr>
+          <p:cNvPr id="17" name="Shape 15"/>
+          <p:cNvSpPr/>
+          <p:nvPr/>
+        </p:nvSpPr>
+        <p:spPr>
+          <a:xfrm>
+            <a:off x="9454896" y="3319272"/>
+            <a:ext cx="256032" cy="566928"/>
+          </a:xfrm>
+          <a:prstGeom prst="rect">
+            <a:avLst/>
+          </a:prstGeom>
+          <a:solidFill>
+            <a:srgbClr val="6A4CA3"/>
+          </a:solidFill>
+          <a:ln w="12700">
+            <a:solidFill>
+              <a:srgbClr val="6A4CA3"/>
+            </a:solidFill>
+            <a:prstDash val="solid"/>
+          </a:ln>
+        </p:spPr>
+      </p:sp>
+      <p:sp>
+        <p:nvSpPr>
+          <p:cNvPr id="18" name="Shape 16"/>
+          <p:cNvSpPr/>
+          <p:nvPr/>
+        </p:nvSpPr>
+        <p:spPr>
+          <a:xfrm>
+            <a:off x="8019288" y="3886200"/>
+            <a:ext cx="2706624" cy="0"/>
+          </a:xfrm>
+          <a:prstGeom prst="line">
+            <a:avLst/>
+          </a:prstGeom>
+          <a:noFill/>
+          <a:ln w="15240">
+            <a:solidFill>
+              <a:srgbClr val="003A63"/>
+            </a:solidFill>
+            <a:prstDash val="solid"/>
+          </a:ln>
+        </p:spPr>
+      </p:sp>
+      <p:sp>
+        <p:nvSpPr>
+          <p:cNvPr id="19" name="Text 17"/>
+          <p:cNvSpPr/>
+          <p:nvPr/>
+        </p:nvSpPr>
+        <p:spPr>
+          <a:xfrm>
+            <a:off x="7863840" y="3017520"/>
+            <a:ext cx="3017520" cy="201168"/>
+          </a:xfrm>
+          <a:prstGeom prst="rect">
+            <a:avLst/>
+          </a:prstGeom>
+          <a:noFill/>
+          <a:ln/>
+        </p:spPr>
+        <p:txBody>
+          <a:bodyPr wrap="square" lIns="0" tIns="0" rIns="0" bIns="0" rtlCol="0" anchor="ctr"/>
+          <a:lstStyle/>
+          <a:p>
+            <a:pPr algn="ctr" indent="0" marL="0">
+              <a:buNone/>
+            </a:pPr>
+            <a:r>
+              <a:rPr lang="en-US" sz="1050" b="1" dirty="0">
+                <a:solidFill>
+                  <a:srgbClr val="003A63"/>
+                </a:solidFill>
+                <a:latin typeface="Aptos" pitchFamily="34" charset="0"/>
+                <a:ea typeface="Aptos" pitchFamily="34" charset="-122"/>
+                <a:cs typeface="Aptos" pitchFamily="34" charset="-120"/>
+              </a:rPr>
+              <a:t>Measure and monitor</a:t>
+            </a:r>
+            <a:endParaRPr lang="en-US" sz="1050" dirty="0"/>
+          </a:p>
+        </p:txBody>
+      </p:sp>
+      <p:sp>
+        <p:nvSpPr>
+          <p:cNvPr id="20" name="Shape 18"/>
+          <p:cNvSpPr/>
+          <p:nvPr/>
+        </p:nvSpPr>
+        <p:spPr>
+          <a:xfrm>
+            <a:off x="7635240" y="4498848"/>
+            <a:ext cx="3474720" cy="1143000"/>
+          </a:xfrm>
+          <a:prstGeom prst="roundRect">
+            <a:avLst>
+              <a:gd name="adj" fmla="val 9600"/>
+            </a:avLst>
+          </a:prstGeom>
+          <a:solidFill>
             <a:srgbClr val="EAF6F8"/>
           </a:solidFill>
           <a:ln w="12700">
@@ -3492,14 +3636,14 @@
       </p:sp>
       <p:sp>
         <p:nvSpPr>
-          <p:cNvPr id="16" name="Text 14"/>
-          <p:cNvSpPr/>
-          <p:nvPr/>
-        </p:nvSpPr>
-        <p:spPr>
-          <a:xfrm>
-            <a:off x="8074152" y="3666744"/>
-            <a:ext cx="2825496" cy="256032"/>
+          <p:cNvPr id="21" name="Text 19"/>
+          <p:cNvSpPr/>
+          <p:nvPr/>
+        </p:nvSpPr>
+        <p:spPr>
+          <a:xfrm>
+            <a:off x="7799832" y="4645152"/>
+            <a:ext cx="3145536" cy="256032"/>
           </a:xfrm>
           <a:prstGeom prst="rect">
             <a:avLst/>
@@ -3523,7 +3667,7 @@
                 <a:ea typeface="Aptos" pitchFamily="34" charset="-122"/>
                 <a:cs typeface="Aptos" pitchFamily="34" charset="-120"/>
               </a:rPr>
-              <a:t>Use this for</a:t>
+              <a:t>How to validate</a:t>
             </a:r>
             <a:endParaRPr lang="en-US" sz="1300" dirty="0"/>
           </a:p>
@@ -3531,14 +3675,14 @@
       </p:sp>
       <p:sp>
         <p:nvSpPr>
-          <p:cNvPr id="17" name="Text 15"/>
-          <p:cNvSpPr/>
-          <p:nvPr/>
-        </p:nvSpPr>
-        <p:spPr>
-          <a:xfrm>
-            <a:off x="8074152" y="4023360"/>
-            <a:ext cx="2825496" cy="1097280"/>
+          <p:cNvPr id="22" name="Text 20"/>
+          <p:cNvSpPr/>
+          <p:nvPr/>
+        </p:nvSpPr>
+        <p:spPr>
+          <a:xfrm>
+            <a:off x="7799832" y="5001768"/>
+            <a:ext cx="3145536" cy="502920"/>
           </a:xfrm>
           <a:prstGeom prst="rect">
             <a:avLst/>
@@ -3564,7 +3708,7 @@
                 <a:ea typeface="Aptos" pitchFamily="34" charset="-122"/>
                 <a:cs typeface="Aptos" pitchFamily="34" charset="-120"/>
               </a:rPr>
-              <a:t>Connect the concept to public health decisions, safeguards, documentation, or implementation work.</a:t>
+              <a:t>Connect the concept to data quality, model performance, validation evidence, monitoring measures, and decisions that remain under human control.</a:t>
             </a:r>
             <a:endParaRPr lang="en-US" sz="1550" dirty="0"/>
           </a:p>
@@ -3738,8 +3882,8 @@
         </p:nvSpPr>
         <p:spPr>
           <a:xfrm>
-            <a:off x="9966960" y="6537960"/>
-            <a:ext cx="1645920" cy="201168"/>
+            <a:off x="9646920" y="6537960"/>
+            <a:ext cx="1965960" cy="201168"/>
           </a:xfrm>
           <a:prstGeom prst="rect">
             <a:avLst/>
@@ -3763,7 +3907,7 @@
                 <a:ea typeface="Aptos" pitchFamily="34" charset="-122"/>
                 <a:cs typeface="Aptos" pitchFamily="34" charset="-120"/>
               </a:rPr>
-              <a:t>Â© Paula Soper</a:t>
+              <a:t>Copyright Paula Soper</a:t>
             </a:r>
             <a:endParaRPr lang="en-US" sz="800" dirty="0"/>
           </a:p>
@@ -3810,77 +3954,13 @@
       </p:sp>
       <p:sp>
         <p:nvSpPr>
-          <p:cNvPr id="8" name="Shape 6"/>
+          <p:cNvPr id="8" name="Text 6"/>
           <p:cNvSpPr/>
           <p:nvPr/>
         </p:nvSpPr>
         <p:spPr>
           <a:xfrm>
             <a:off x="640080" y="658368"/>
-            <a:ext cx="420624" cy="420624"/>
-          </a:xfrm>
-          <a:prstGeom prst="ellipse">
-            <a:avLst/>
-          </a:prstGeom>
-          <a:solidFill>
-            <a:srgbClr val="0068B7"/>
-          </a:solidFill>
-          <a:ln w="12700">
-            <a:solidFill>
-              <a:srgbClr val="0068B7"/>
-            </a:solidFill>
-            <a:prstDash val="solid"/>
-          </a:ln>
-        </p:spPr>
-      </p:sp>
-      <p:sp>
-        <p:nvSpPr>
-          <p:cNvPr id="9" name="Text 7"/>
-          <p:cNvSpPr/>
-          <p:nvPr/>
-        </p:nvSpPr>
-        <p:spPr>
-          <a:xfrm>
-            <a:off x="640080" y="731520"/>
-            <a:ext cx="420624" cy="164592"/>
-          </a:xfrm>
-          <a:prstGeom prst="rect">
-            <a:avLst/>
-          </a:prstGeom>
-          <a:noFill/>
-          <a:ln/>
-        </p:spPr>
-        <p:txBody>
-          <a:bodyPr wrap="square" lIns="0" tIns="0" rIns="0" bIns="0" rtlCol="0" anchor="ctr"/>
-          <a:lstStyle/>
-          <a:p>
-            <a:pPr algn="ctr" indent="0" marL="0">
-              <a:buNone/>
-            </a:pPr>
-            <a:r>
-              <a:rPr lang="en-US" sz="1100" b="1" dirty="0">
-                <a:solidFill>
-                  <a:srgbClr val="FFFFFF"/>
-                </a:solidFill>
-                <a:latin typeface="Aptos" pitchFamily="34" charset="0"/>
-                <a:ea typeface="Aptos" pitchFamily="34" charset="-122"/>
-                <a:cs typeface="Aptos" pitchFamily="34" charset="-120"/>
-              </a:rPr>
-              <a:t>7</a:t>
-            </a:r>
-            <a:endParaRPr lang="en-US" sz="1100" dirty="0"/>
-          </a:p>
-        </p:txBody>
-      </p:sp>
-      <p:sp>
-        <p:nvSpPr>
-          <p:cNvPr id="10" name="Text 8"/>
-          <p:cNvSpPr/>
-          <p:nvPr/>
-        </p:nvSpPr>
-        <p:spPr>
-          <a:xfrm>
-            <a:off x="640080" y="621792"/>
             <a:ext cx="10881360" cy="713232"/>
           </a:xfrm>
           <a:prstGeom prst="rect">
@@ -3915,14 +3995,14 @@
       </p:sp>
       <p:sp>
         <p:nvSpPr>
-          <p:cNvPr id="11" name="Text 9"/>
+          <p:cNvPr id="9" name="Text 7"/>
           <p:cNvSpPr/>
           <p:nvPr/>
         </p:nvSpPr>
         <p:spPr>
           <a:xfrm>
             <a:off x="868680" y="1508760"/>
-            <a:ext cx="6537960" cy="4160520"/>
+            <a:ext cx="6309360" cy="4160520"/>
           </a:xfrm>
           <a:prstGeom prst="rect">
             <a:avLst/>
@@ -3981,18 +4061,18 @@
       </p:sp>
       <p:sp>
         <p:nvSpPr>
-          <p:cNvPr id="12" name="Shape 10"/>
-          <p:cNvSpPr/>
-          <p:nvPr/>
-        </p:nvSpPr>
-        <p:spPr>
-          <a:xfrm>
-            <a:off x="7909560" y="1417320"/>
-            <a:ext cx="3154680" cy="1828800"/>
+          <p:cNvPr id="10" name="Shape 8"/>
+          <p:cNvSpPr/>
+          <p:nvPr/>
+        </p:nvSpPr>
+        <p:spPr>
+          <a:xfrm>
+            <a:off x="7635240" y="1325880"/>
+            <a:ext cx="3474720" cy="1325880"/>
           </a:xfrm>
           <a:prstGeom prst="roundRect">
             <a:avLst>
-              <a:gd name="adj" fmla="val 6000"/>
+              <a:gd name="adj" fmla="val 8276"/>
             </a:avLst>
           </a:prstGeom>
           <a:solidFill>
@@ -4008,14 +4088,14 @@
       </p:sp>
       <p:sp>
         <p:nvSpPr>
-          <p:cNvPr id="13" name="Text 11"/>
-          <p:cNvSpPr/>
-          <p:nvPr/>
-        </p:nvSpPr>
-        <p:spPr>
-          <a:xfrm>
-            <a:off x="8074152" y="1563624"/>
-            <a:ext cx="2825496" cy="256032"/>
+          <p:cNvPr id="11" name="Text 9"/>
+          <p:cNvSpPr/>
+          <p:nvPr/>
+        </p:nvSpPr>
+        <p:spPr>
+          <a:xfrm>
+            <a:off x="7799832" y="1472184"/>
+            <a:ext cx="3145536" cy="256032"/>
           </a:xfrm>
           <a:prstGeom prst="rect">
             <a:avLst/>
@@ -4039,7 +4119,7 @@
                 <a:ea typeface="Aptos" pitchFamily="34" charset="-122"/>
                 <a:cs typeface="Aptos" pitchFamily="34" charset="-120"/>
               </a:rPr>
-              <a:t>Key idea</a:t>
+              <a:t>Risk check</a:t>
             </a:r>
             <a:endParaRPr lang="en-US" sz="1300" dirty="0"/>
           </a:p>
@@ -4047,14 +4127,14 @@
       </p:sp>
       <p:sp>
         <p:nvSpPr>
-          <p:cNvPr id="14" name="Text 12"/>
-          <p:cNvSpPr/>
-          <p:nvPr/>
-        </p:nvSpPr>
-        <p:spPr>
-          <a:xfrm>
-            <a:off x="8074152" y="1920240"/>
-            <a:ext cx="2825496" cy="1188720"/>
+          <p:cNvPr id="12" name="Text 10"/>
+          <p:cNvSpPr/>
+          <p:nvPr/>
+        </p:nvSpPr>
+        <p:spPr>
+          <a:xfrm>
+            <a:off x="7799832" y="1828800"/>
+            <a:ext cx="3145536" cy="685800"/>
           </a:xfrm>
           <a:prstGeom prst="rect">
             <a:avLst/>
@@ -4088,21 +4168,174 @@
       </p:sp>
       <p:sp>
         <p:nvSpPr>
-          <p:cNvPr id="15" name="Shape 13"/>
-          <p:cNvSpPr/>
-          <p:nvPr/>
-        </p:nvSpPr>
-        <p:spPr>
-          <a:xfrm>
-            <a:off x="7909560" y="3520440"/>
-            <a:ext cx="3154680" cy="1737360"/>
+          <p:cNvPr id="13" name="Shape 11"/>
+          <p:cNvSpPr/>
+          <p:nvPr/>
+        </p:nvSpPr>
+        <p:spPr>
+          <a:xfrm>
+            <a:off x="7635240" y="2788920"/>
+            <a:ext cx="3474720" cy="1536192"/>
           </a:xfrm>
           <a:prstGeom prst="roundRect">
             <a:avLst>
-              <a:gd name="adj" fmla="val 6316"/>
+              <a:gd name="adj" fmla="val 7143"/>
             </a:avLst>
           </a:prstGeom>
           <a:solidFill>
+            <a:srgbClr val="FFFFFF">
+              <a:alpha val="88000"/>
+            </a:srgbClr>
+          </a:solidFill>
+          <a:ln w="12700">
+            <a:solidFill>
+              <a:srgbClr val="D6E8F2"/>
+            </a:solidFill>
+            <a:prstDash val="solid"/>
+          </a:ln>
+        </p:spPr>
+      </p:sp>
+      <p:sp>
+        <p:nvSpPr>
+          <p:cNvPr id="14" name="Shape 12"/>
+          <p:cNvSpPr/>
+          <p:nvPr/>
+        </p:nvSpPr>
+        <p:spPr>
+          <a:xfrm>
+            <a:off x="8046720" y="3108960"/>
+            <a:ext cx="2651760" cy="896112"/>
+          </a:xfrm>
+          <a:prstGeom prst="arc">
+            <a:avLst/>
+          </a:prstGeom>
+          <a:noFill/>
+          <a:ln w="25400">
+            <a:solidFill>
+              <a:srgbClr val="0068B7"/>
+            </a:solidFill>
+            <a:prstDash val="solid"/>
+          </a:ln>
+        </p:spPr>
+      </p:sp>
+      <p:sp>
+        <p:nvSpPr>
+          <p:cNvPr id="15" name="Text 13"/>
+          <p:cNvSpPr/>
+          <p:nvPr/>
+        </p:nvSpPr>
+        <p:spPr>
+          <a:xfrm>
+            <a:off x="7909560" y="3099816"/>
+            <a:ext cx="2926080" cy="256032"/>
+          </a:xfrm>
+          <a:prstGeom prst="rect">
+            <a:avLst/>
+          </a:prstGeom>
+          <a:noFill/>
+          <a:ln/>
+        </p:spPr>
+        <p:txBody>
+          <a:bodyPr wrap="square" lIns="0" tIns="0" rIns="0" bIns="0" rtlCol="0" anchor="ctr"/>
+          <a:lstStyle/>
+          <a:p>
+            <a:pPr algn="ctr" indent="0" marL="0">
+              <a:buNone/>
+            </a:pPr>
+            <a:r>
+              <a:rPr lang="en-US" sz="1500" b="1" dirty="0">
+                <a:solidFill>
+                  <a:srgbClr val="003A63"/>
+                </a:solidFill>
+                <a:latin typeface="Aptos" pitchFamily="34" charset="0"/>
+                <a:ea typeface="Aptos" pitchFamily="34" charset="-122"/>
+                <a:cs typeface="Aptos" pitchFamily="34" charset="-120"/>
+              </a:rPr>
+              <a:t>Risk</a:t>
+            </a:r>
+            <a:endParaRPr lang="en-US" sz="1500" dirty="0"/>
+          </a:p>
+        </p:txBody>
+      </p:sp>
+      <p:sp>
+        <p:nvSpPr>
+          <p:cNvPr id="16" name="Shape 14"/>
+          <p:cNvSpPr/>
+          <p:nvPr/>
+        </p:nvSpPr>
+        <p:spPr>
+          <a:xfrm>
+            <a:off x="8366760" y="3639312"/>
+            <a:ext cx="2011680" cy="0"/>
+          </a:xfrm>
+          <a:prstGeom prst="line">
+            <a:avLst/>
+          </a:prstGeom>
+          <a:noFill/>
+          <a:ln w="63500">
+            <a:solidFill>
+              <a:srgbClr val="2F8A28"/>
+            </a:solidFill>
+            <a:prstDash val="solid"/>
+          </a:ln>
+        </p:spPr>
+      </p:sp>
+      <p:sp>
+        <p:nvSpPr>
+          <p:cNvPr id="17" name="Text 15"/>
+          <p:cNvSpPr/>
+          <p:nvPr/>
+        </p:nvSpPr>
+        <p:spPr>
+          <a:xfrm>
+            <a:off x="7909560" y="3849624"/>
+            <a:ext cx="2926080" cy="164592"/>
+          </a:xfrm>
+          <a:prstGeom prst="rect">
+            <a:avLst/>
+          </a:prstGeom>
+          <a:noFill/>
+          <a:ln/>
+        </p:spPr>
+        <p:txBody>
+          <a:bodyPr wrap="square" lIns="0" tIns="0" rIns="0" bIns="0" rtlCol="0" anchor="ctr"/>
+          <a:lstStyle/>
+          <a:p>
+            <a:pPr algn="ctr" indent="0" marL="0">
+              <a:buNone/>
+            </a:pPr>
+            <a:r>
+              <a:rPr lang="en-US" sz="900" dirty="0">
+                <a:solidFill>
+                  <a:srgbClr val="003A63"/>
+                </a:solidFill>
+                <a:latin typeface="Aptos" pitchFamily="34" charset="0"/>
+                <a:ea typeface="Aptos" pitchFamily="34" charset="-122"/>
+                <a:cs typeface="Aptos" pitchFamily="34" charset="-120"/>
+              </a:rPr>
+              <a:t>Human review</a:t>
+            </a:r>
+            <a:endParaRPr lang="en-US" sz="900" dirty="0"/>
+          </a:p>
+        </p:txBody>
+      </p:sp>
+      <p:sp>
+        <p:nvSpPr>
+          <p:cNvPr id="18" name="Shape 16"/>
+          <p:cNvSpPr/>
+          <p:nvPr/>
+        </p:nvSpPr>
+        <p:spPr>
+          <a:xfrm>
+            <a:off x="7635240" y="4498848"/>
+            <a:ext cx="3474720" cy="1143000"/>
+          </a:xfrm>
+          <a:prstGeom prst="roundRect">
+            <a:avLst>
+              <a:gd name="adj" fmla="val 9600"/>
+            </a:avLst>
+          </a:prstGeom>
+          <a:solidFill>
             <a:srgbClr val="EAF6F8"/>
           </a:solidFill>
           <a:ln w="12700">
@@ -4115,14 +4348,14 @@
       </p:sp>
       <p:sp>
         <p:nvSpPr>
-          <p:cNvPr id="16" name="Text 14"/>
-          <p:cNvSpPr/>
-          <p:nvPr/>
-        </p:nvSpPr>
-        <p:spPr>
-          <a:xfrm>
-            <a:off x="8074152" y="3666744"/>
-            <a:ext cx="2825496" cy="256032"/>
+          <p:cNvPr id="19" name="Text 17"/>
+          <p:cNvSpPr/>
+          <p:nvPr/>
+        </p:nvSpPr>
+        <p:spPr>
+          <a:xfrm>
+            <a:off x="7799832" y="4645152"/>
+            <a:ext cx="3145536" cy="256032"/>
           </a:xfrm>
           <a:prstGeom prst="rect">
             <a:avLst/>
@@ -4146,7 +4379,7 @@
                 <a:ea typeface="Aptos" pitchFamily="34" charset="-122"/>
                 <a:cs typeface="Aptos" pitchFamily="34" charset="-120"/>
               </a:rPr>
-              <a:t>Use this for</a:t>
+              <a:t>Safeguard to plan</a:t>
             </a:r>
             <a:endParaRPr lang="en-US" sz="1300" dirty="0"/>
           </a:p>
@@ -4154,14 +4387,14 @@
       </p:sp>
       <p:sp>
         <p:nvSpPr>
-          <p:cNvPr id="17" name="Text 15"/>
-          <p:cNvSpPr/>
-          <p:nvPr/>
-        </p:nvSpPr>
-        <p:spPr>
-          <a:xfrm>
-            <a:off x="8074152" y="4023360"/>
-            <a:ext cx="2825496" cy="1097280"/>
+          <p:cNvPr id="20" name="Text 18"/>
+          <p:cNvSpPr/>
+          <p:nvPr/>
+        </p:nvSpPr>
+        <p:spPr>
+          <a:xfrm>
+            <a:off x="7799832" y="5001768"/>
+            <a:ext cx="3145536" cy="502920"/>
           </a:xfrm>
           <a:prstGeom prst="rect">
             <a:avLst/>
@@ -4187,7 +4420,7 @@
                 <a:ea typeface="Aptos" pitchFamily="34" charset="-122"/>
                 <a:cs typeface="Aptos" pitchFamily="34" charset="-120"/>
               </a:rPr>
-              <a:t>Connect the concept to public health decisions, safeguards, documentation, or implementation work.</a:t>
+              <a:t>Identify what could go wrong, who could be affected, what safeguards are needed, and what evidence should be reviewed before use expands.</a:t>
             </a:r>
             <a:endParaRPr lang="en-US" sz="1550" dirty="0"/>
           </a:p>
@@ -4361,8 +4594,8 @@
         </p:nvSpPr>
         <p:spPr>
           <a:xfrm>
-            <a:off x="9966960" y="6537960"/>
-            <a:ext cx="1645920" cy="201168"/>
+            <a:off x="9646920" y="6537960"/>
+            <a:ext cx="1965960" cy="201168"/>
           </a:xfrm>
           <a:prstGeom prst="rect">
             <a:avLst/>
@@ -4386,7 +4619,7 @@
                 <a:ea typeface="Aptos" pitchFamily="34" charset="-122"/>
                 <a:cs typeface="Aptos" pitchFamily="34" charset="-120"/>
               </a:rPr>
-              <a:t>Â© Paula Soper</a:t>
+              <a:t>Copyright Paula Soper</a:t>
             </a:r>
             <a:endParaRPr lang="en-US" sz="800" dirty="0"/>
           </a:p>
@@ -4433,77 +4666,13 @@
       </p:sp>
       <p:sp>
         <p:nvSpPr>
-          <p:cNvPr id="8" name="Shape 6"/>
+          <p:cNvPr id="8" name="Text 6"/>
           <p:cNvSpPr/>
           <p:nvPr/>
         </p:nvSpPr>
         <p:spPr>
           <a:xfrm>
             <a:off x="640080" y="658368"/>
-            <a:ext cx="420624" cy="420624"/>
-          </a:xfrm>
-          <a:prstGeom prst="ellipse">
-            <a:avLst/>
-          </a:prstGeom>
-          <a:solidFill>
-            <a:srgbClr val="0068B7"/>
-          </a:solidFill>
-          <a:ln w="12700">
-            <a:solidFill>
-              <a:srgbClr val="0068B7"/>
-            </a:solidFill>
-            <a:prstDash val="solid"/>
-          </a:ln>
-        </p:spPr>
-      </p:sp>
-      <p:sp>
-        <p:nvSpPr>
-          <p:cNvPr id="9" name="Text 7"/>
-          <p:cNvSpPr/>
-          <p:nvPr/>
-        </p:nvSpPr>
-        <p:spPr>
-          <a:xfrm>
-            <a:off x="640080" y="731520"/>
-            <a:ext cx="420624" cy="164592"/>
-          </a:xfrm>
-          <a:prstGeom prst="rect">
-            <a:avLst/>
-          </a:prstGeom>
-          <a:noFill/>
-          <a:ln/>
-        </p:spPr>
-        <p:txBody>
-          <a:bodyPr wrap="square" lIns="0" tIns="0" rIns="0" bIns="0" rtlCol="0" anchor="ctr"/>
-          <a:lstStyle/>
-          <a:p>
-            <a:pPr algn="ctr" indent="0" marL="0">
-              <a:buNone/>
-            </a:pPr>
-            <a:r>
-              <a:rPr lang="en-US" sz="1100" b="1" dirty="0">
-                <a:solidFill>
-                  <a:srgbClr val="FFFFFF"/>
-                </a:solidFill>
-                <a:latin typeface="Aptos" pitchFamily="34" charset="0"/>
-                <a:ea typeface="Aptos" pitchFamily="34" charset="-122"/>
-                <a:cs typeface="Aptos" pitchFamily="34" charset="-120"/>
-              </a:rPr>
-              <a:t>8</a:t>
-            </a:r>
-            <a:endParaRPr lang="en-US" sz="1100" dirty="0"/>
-          </a:p>
-        </p:txBody>
-      </p:sp>
-      <p:sp>
-        <p:nvSpPr>
-          <p:cNvPr id="10" name="Text 8"/>
-          <p:cNvSpPr/>
-          <p:nvPr/>
-        </p:nvSpPr>
-        <p:spPr>
-          <a:xfrm>
-            <a:off x="640080" y="621792"/>
             <a:ext cx="10881360" cy="713232"/>
           </a:xfrm>
           <a:prstGeom prst="rect">
@@ -4538,14 +4707,14 @@
       </p:sp>
       <p:sp>
         <p:nvSpPr>
-          <p:cNvPr id="11" name="Text 9"/>
+          <p:cNvPr id="9" name="Text 7"/>
           <p:cNvSpPr/>
           <p:nvPr/>
         </p:nvSpPr>
         <p:spPr>
           <a:xfrm>
             <a:off x="868680" y="1508760"/>
-            <a:ext cx="6537960" cy="4160520"/>
+            <a:ext cx="6309360" cy="4160520"/>
           </a:xfrm>
           <a:prstGeom prst="rect">
             <a:avLst/>
@@ -4604,18 +4773,18 @@
       </p:sp>
       <p:sp>
         <p:nvSpPr>
-          <p:cNvPr id="12" name="Shape 10"/>
-          <p:cNvSpPr/>
-          <p:nvPr/>
-        </p:nvSpPr>
-        <p:spPr>
-          <a:xfrm>
-            <a:off x="7909560" y="1417320"/>
-            <a:ext cx="3154680" cy="1828800"/>
+          <p:cNvPr id="10" name="Shape 8"/>
+          <p:cNvSpPr/>
+          <p:nvPr/>
+        </p:nvSpPr>
+        <p:spPr>
+          <a:xfrm>
+            <a:off x="7635240" y="1325880"/>
+            <a:ext cx="3474720" cy="1325880"/>
           </a:xfrm>
           <a:prstGeom prst="roundRect">
             <a:avLst>
-              <a:gd name="adj" fmla="val 6000"/>
+              <a:gd name="adj" fmla="val 8276"/>
             </a:avLst>
           </a:prstGeom>
           <a:solidFill>
@@ -4631,14 +4800,14 @@
       </p:sp>
       <p:sp>
         <p:nvSpPr>
-          <p:cNvPr id="13" name="Text 11"/>
-          <p:cNvSpPr/>
-          <p:nvPr/>
-        </p:nvSpPr>
-        <p:spPr>
-          <a:xfrm>
-            <a:off x="8074152" y="1563624"/>
-            <a:ext cx="2825496" cy="256032"/>
+          <p:cNvPr id="11" name="Text 9"/>
+          <p:cNvSpPr/>
+          <p:nvPr/>
+        </p:nvSpPr>
+        <p:spPr>
+          <a:xfrm>
+            <a:off x="7799832" y="1472184"/>
+            <a:ext cx="3145536" cy="256032"/>
           </a:xfrm>
           <a:prstGeom prst="rect">
             <a:avLst/>
@@ -4662,7 +4831,7 @@
                 <a:ea typeface="Aptos" pitchFamily="34" charset="-122"/>
                 <a:cs typeface="Aptos" pitchFamily="34" charset="-120"/>
               </a:rPr>
-              <a:t>Key idea</a:t>
+              <a:t>Data decision</a:t>
             </a:r>
             <a:endParaRPr lang="en-US" sz="1300" dirty="0"/>
           </a:p>
@@ -4670,14 +4839,14 @@
       </p:sp>
       <p:sp>
         <p:nvSpPr>
-          <p:cNvPr id="14" name="Text 12"/>
-          <p:cNvSpPr/>
-          <p:nvPr/>
-        </p:nvSpPr>
-        <p:spPr>
-          <a:xfrm>
-            <a:off x="8074152" y="1920240"/>
-            <a:ext cx="2825496" cy="1188720"/>
+          <p:cNvPr id="12" name="Text 10"/>
+          <p:cNvSpPr/>
+          <p:nvPr/>
+        </p:nvSpPr>
+        <p:spPr>
+          <a:xfrm>
+            <a:off x="7799832" y="1828800"/>
+            <a:ext cx="3145536" cy="685800"/>
           </a:xfrm>
           <a:prstGeom prst="rect">
             <a:avLst/>
@@ -4711,21 +4880,212 @@
       </p:sp>
       <p:sp>
         <p:nvSpPr>
-          <p:cNvPr id="15" name="Shape 13"/>
-          <p:cNvSpPr/>
-          <p:nvPr/>
-        </p:nvSpPr>
-        <p:spPr>
-          <a:xfrm>
-            <a:off x="7909560" y="3520440"/>
-            <a:ext cx="3154680" cy="1737360"/>
+          <p:cNvPr id="13" name="Shape 11"/>
+          <p:cNvSpPr/>
+          <p:nvPr/>
+        </p:nvSpPr>
+        <p:spPr>
+          <a:xfrm>
+            <a:off x="7635240" y="2788920"/>
+            <a:ext cx="3474720" cy="1536192"/>
           </a:xfrm>
           <a:prstGeom prst="roundRect">
             <a:avLst>
-              <a:gd name="adj" fmla="val 6316"/>
+              <a:gd name="adj" fmla="val 7143"/>
             </a:avLst>
           </a:prstGeom>
           <a:solidFill>
+            <a:srgbClr val="FFFFFF">
+              <a:alpha val="88000"/>
+            </a:srgbClr>
+          </a:solidFill>
+          <a:ln w="12700">
+            <a:solidFill>
+              <a:srgbClr val="D6E8F2"/>
+            </a:solidFill>
+            <a:prstDash val="solid"/>
+          </a:ln>
+        </p:spPr>
+      </p:sp>
+      <p:sp>
+        <p:nvSpPr>
+          <p:cNvPr id="14" name="Shape 12"/>
+          <p:cNvSpPr/>
+          <p:nvPr/>
+        </p:nvSpPr>
+        <p:spPr>
+          <a:xfrm>
+            <a:off x="8138160" y="3474720"/>
+            <a:ext cx="256032" cy="411480"/>
+          </a:xfrm>
+          <a:prstGeom prst="rect">
+            <a:avLst/>
+          </a:prstGeom>
+          <a:solidFill>
+            <a:srgbClr val="0068B7"/>
+          </a:solidFill>
+          <a:ln w="12700">
+            <a:solidFill>
+              <a:srgbClr val="0068B7"/>
+            </a:solidFill>
+            <a:prstDash val="solid"/>
+          </a:ln>
+        </p:spPr>
+      </p:sp>
+      <p:sp>
+        <p:nvSpPr>
+          <p:cNvPr id="15" name="Shape 13"/>
+          <p:cNvSpPr/>
+          <p:nvPr/>
+        </p:nvSpPr>
+        <p:spPr>
+          <a:xfrm>
+            <a:off x="8577072" y="3172968"/>
+            <a:ext cx="256032" cy="713232"/>
+          </a:xfrm>
+          <a:prstGeom prst="rect">
+            <a:avLst/>
+          </a:prstGeom>
+          <a:solidFill>
+            <a:srgbClr val="2F8A28"/>
+          </a:solidFill>
+          <a:ln w="12700">
+            <a:solidFill>
+              <a:srgbClr val="2F8A28"/>
+            </a:solidFill>
+            <a:prstDash val="solid"/>
+          </a:ln>
+        </p:spPr>
+      </p:sp>
+      <p:sp>
+        <p:nvSpPr>
+          <p:cNvPr id="16" name="Shape 14"/>
+          <p:cNvSpPr/>
+          <p:nvPr/>
+        </p:nvSpPr>
+        <p:spPr>
+          <a:xfrm>
+            <a:off x="9015984" y="2880360"/>
+            <a:ext cx="256032" cy="1005840"/>
+          </a:xfrm>
+          <a:prstGeom prst="rect">
+            <a:avLst/>
+          </a:prstGeom>
+          <a:solidFill>
+            <a:srgbClr val="D69A2D"/>
+          </a:solidFill>
+          <a:ln w="12700">
+            <a:solidFill>
+              <a:srgbClr val="D69A2D"/>
+            </a:solidFill>
+            <a:prstDash val="solid"/>
+          </a:ln>
+        </p:spPr>
+      </p:sp>
+      <p:sp>
+        <p:nvSpPr>
+          <p:cNvPr id="17" name="Shape 15"/>
+          <p:cNvSpPr/>
+          <p:nvPr/>
+        </p:nvSpPr>
+        <p:spPr>
+          <a:xfrm>
+            <a:off x="9454896" y="3319272"/>
+            <a:ext cx="256032" cy="566928"/>
+          </a:xfrm>
+          <a:prstGeom prst="rect">
+            <a:avLst/>
+          </a:prstGeom>
+          <a:solidFill>
+            <a:srgbClr val="6A4CA3"/>
+          </a:solidFill>
+          <a:ln w="12700">
+            <a:solidFill>
+              <a:srgbClr val="6A4CA3"/>
+            </a:solidFill>
+            <a:prstDash val="solid"/>
+          </a:ln>
+        </p:spPr>
+      </p:sp>
+      <p:sp>
+        <p:nvSpPr>
+          <p:cNvPr id="18" name="Shape 16"/>
+          <p:cNvSpPr/>
+          <p:nvPr/>
+        </p:nvSpPr>
+        <p:spPr>
+          <a:xfrm>
+            <a:off x="8019288" y="3886200"/>
+            <a:ext cx="2706624" cy="0"/>
+          </a:xfrm>
+          <a:prstGeom prst="line">
+            <a:avLst/>
+          </a:prstGeom>
+          <a:noFill/>
+          <a:ln w="15240">
+            <a:solidFill>
+              <a:srgbClr val="003A63"/>
+            </a:solidFill>
+            <a:prstDash val="solid"/>
+          </a:ln>
+        </p:spPr>
+      </p:sp>
+      <p:sp>
+        <p:nvSpPr>
+          <p:cNvPr id="19" name="Text 17"/>
+          <p:cNvSpPr/>
+          <p:nvPr/>
+        </p:nvSpPr>
+        <p:spPr>
+          <a:xfrm>
+            <a:off x="7863840" y="3017520"/>
+            <a:ext cx="3017520" cy="201168"/>
+          </a:xfrm>
+          <a:prstGeom prst="rect">
+            <a:avLst/>
+          </a:prstGeom>
+          <a:noFill/>
+          <a:ln/>
+        </p:spPr>
+        <p:txBody>
+          <a:bodyPr wrap="square" lIns="0" tIns="0" rIns="0" bIns="0" rtlCol="0" anchor="ctr"/>
+          <a:lstStyle/>
+          <a:p>
+            <a:pPr algn="ctr" indent="0" marL="0">
+              <a:buNone/>
+            </a:pPr>
+            <a:r>
+              <a:rPr lang="en-US" sz="1050" b="1" dirty="0">
+                <a:solidFill>
+                  <a:srgbClr val="003A63"/>
+                </a:solidFill>
+                <a:latin typeface="Aptos" pitchFamily="34" charset="0"/>
+                <a:ea typeface="Aptos" pitchFamily="34" charset="-122"/>
+                <a:cs typeface="Aptos" pitchFamily="34" charset="-120"/>
+              </a:rPr>
+              <a:t>Measure and monitor</a:t>
+            </a:r>
+            <a:endParaRPr lang="en-US" sz="1050" dirty="0"/>
+          </a:p>
+        </p:txBody>
+      </p:sp>
+      <p:sp>
+        <p:nvSpPr>
+          <p:cNvPr id="20" name="Shape 18"/>
+          <p:cNvSpPr/>
+          <p:nvPr/>
+        </p:nvSpPr>
+        <p:spPr>
+          <a:xfrm>
+            <a:off x="7635240" y="4498848"/>
+            <a:ext cx="3474720" cy="1143000"/>
+          </a:xfrm>
+          <a:prstGeom prst="roundRect">
+            <a:avLst>
+              <a:gd name="adj" fmla="val 9600"/>
+            </a:avLst>
+          </a:prstGeom>
+          <a:solidFill>
             <a:srgbClr val="EAF6F8"/>
           </a:solidFill>
           <a:ln w="12700">
@@ -4738,14 +5098,14 @@
       </p:sp>
       <p:sp>
         <p:nvSpPr>
-          <p:cNvPr id="16" name="Text 14"/>
-          <p:cNvSpPr/>
-          <p:nvPr/>
-        </p:nvSpPr>
-        <p:spPr>
-          <a:xfrm>
-            <a:off x="8074152" y="3666744"/>
-            <a:ext cx="2825496" cy="256032"/>
+          <p:cNvPr id="21" name="Text 19"/>
+          <p:cNvSpPr/>
+          <p:nvPr/>
+        </p:nvSpPr>
+        <p:spPr>
+          <a:xfrm>
+            <a:off x="7799832" y="4645152"/>
+            <a:ext cx="3145536" cy="256032"/>
           </a:xfrm>
           <a:prstGeom prst="rect">
             <a:avLst/>
@@ -4769,7 +5129,7 @@
                 <a:ea typeface="Aptos" pitchFamily="34" charset="-122"/>
                 <a:cs typeface="Aptos" pitchFamily="34" charset="-120"/>
               </a:rPr>
-              <a:t>Use this for</a:t>
+              <a:t>How to validate</a:t>
             </a:r>
             <a:endParaRPr lang="en-US" sz="1300" dirty="0"/>
           </a:p>
@@ -4777,14 +5137,14 @@
       </p:sp>
       <p:sp>
         <p:nvSpPr>
-          <p:cNvPr id="17" name="Text 15"/>
-          <p:cNvSpPr/>
-          <p:nvPr/>
-        </p:nvSpPr>
-        <p:spPr>
-          <a:xfrm>
-            <a:off x="8074152" y="4023360"/>
-            <a:ext cx="2825496" cy="1097280"/>
+          <p:cNvPr id="22" name="Text 20"/>
+          <p:cNvSpPr/>
+          <p:nvPr/>
+        </p:nvSpPr>
+        <p:spPr>
+          <a:xfrm>
+            <a:off x="7799832" y="5001768"/>
+            <a:ext cx="3145536" cy="502920"/>
           </a:xfrm>
           <a:prstGeom prst="rect">
             <a:avLst/>
@@ -4810,7 +5170,7 @@
                 <a:ea typeface="Aptos" pitchFamily="34" charset="-122"/>
                 <a:cs typeface="Aptos" pitchFamily="34" charset="-120"/>
               </a:rPr>
-              <a:t>Connect the concept to public health decisions, safeguards, documentation, or implementation work.</a:t>
+              <a:t>Connect the concept to data quality, model performance, validation evidence, monitoring measures, and decisions that remain under human control.</a:t>
             </a:r>
             <a:endParaRPr lang="en-US" sz="1550" dirty="0"/>
           </a:p>
@@ -4984,8 +5344,8 @@
         </p:nvSpPr>
         <p:spPr>
           <a:xfrm>
-            <a:off x="9966960" y="6537960"/>
-            <a:ext cx="1645920" cy="201168"/>
+            <a:off x="9646920" y="6537960"/>
+            <a:ext cx="1965960" cy="201168"/>
           </a:xfrm>
           <a:prstGeom prst="rect">
             <a:avLst/>
@@ -5009,7 +5369,7 @@
                 <a:ea typeface="Aptos" pitchFamily="34" charset="-122"/>
                 <a:cs typeface="Aptos" pitchFamily="34" charset="-120"/>
               </a:rPr>
-              <a:t>Â© Paula Soper</a:t>
+              <a:t>Copyright Paula Soper</a:t>
             </a:r>
             <a:endParaRPr lang="en-US" sz="800" dirty="0"/>
           </a:p>
@@ -5056,77 +5416,13 @@
       </p:sp>
       <p:sp>
         <p:nvSpPr>
-          <p:cNvPr id="8" name="Shape 6"/>
+          <p:cNvPr id="8" name="Text 6"/>
           <p:cNvSpPr/>
           <p:nvPr/>
         </p:nvSpPr>
         <p:spPr>
           <a:xfrm>
             <a:off x="640080" y="658368"/>
-            <a:ext cx="420624" cy="420624"/>
-          </a:xfrm>
-          <a:prstGeom prst="ellipse">
-            <a:avLst/>
-          </a:prstGeom>
-          <a:solidFill>
-            <a:srgbClr val="0068B7"/>
-          </a:solidFill>
-          <a:ln w="12700">
-            <a:solidFill>
-              <a:srgbClr val="0068B7"/>
-            </a:solidFill>
-            <a:prstDash val="solid"/>
-          </a:ln>
-        </p:spPr>
-      </p:sp>
-      <p:sp>
-        <p:nvSpPr>
-          <p:cNvPr id="9" name="Text 7"/>
-          <p:cNvSpPr/>
-          <p:nvPr/>
-        </p:nvSpPr>
-        <p:spPr>
-          <a:xfrm>
-            <a:off x="640080" y="731520"/>
-            <a:ext cx="420624" cy="164592"/>
-          </a:xfrm>
-          <a:prstGeom prst="rect">
-            <a:avLst/>
-          </a:prstGeom>
-          <a:noFill/>
-          <a:ln/>
-        </p:spPr>
-        <p:txBody>
-          <a:bodyPr wrap="square" lIns="0" tIns="0" rIns="0" bIns="0" rtlCol="0" anchor="ctr"/>
-          <a:lstStyle/>
-          <a:p>
-            <a:pPr algn="ctr" indent="0" marL="0">
-              <a:buNone/>
-            </a:pPr>
-            <a:r>
-              <a:rPr lang="en-US" sz="1100" b="1" dirty="0">
-                <a:solidFill>
-                  <a:srgbClr val="FFFFFF"/>
-                </a:solidFill>
-                <a:latin typeface="Aptos" pitchFamily="34" charset="0"/>
-                <a:ea typeface="Aptos" pitchFamily="34" charset="-122"/>
-                <a:cs typeface="Aptos" pitchFamily="34" charset="-120"/>
-              </a:rPr>
-              <a:t>9</a:t>
-            </a:r>
-            <a:endParaRPr lang="en-US" sz="1100" dirty="0"/>
-          </a:p>
-        </p:txBody>
-      </p:sp>
-      <p:sp>
-        <p:nvSpPr>
-          <p:cNvPr id="10" name="Text 8"/>
-          <p:cNvSpPr/>
-          <p:nvPr/>
-        </p:nvSpPr>
-        <p:spPr>
-          <a:xfrm>
-            <a:off x="640080" y="621792"/>
             <a:ext cx="10881360" cy="713232"/>
           </a:xfrm>
           <a:prstGeom prst="rect">
@@ -5161,14 +5457,14 @@
       </p:sp>
       <p:sp>
         <p:nvSpPr>
-          <p:cNvPr id="11" name="Text 9"/>
+          <p:cNvPr id="9" name="Text 7"/>
           <p:cNvSpPr/>
           <p:nvPr/>
         </p:nvSpPr>
         <p:spPr>
           <a:xfrm>
             <a:off x="868680" y="1508760"/>
-            <a:ext cx="6537960" cy="4160520"/>
+            <a:ext cx="6309360" cy="4160520"/>
           </a:xfrm>
           <a:prstGeom prst="rect">
             <a:avLst/>
@@ -5227,18 +5523,18 @@
       </p:sp>
       <p:sp>
         <p:nvSpPr>
-          <p:cNvPr id="12" name="Shape 10"/>
-          <p:cNvSpPr/>
-          <p:nvPr/>
-        </p:nvSpPr>
-        <p:spPr>
-          <a:xfrm>
-            <a:off x="7909560" y="1417320"/>
-            <a:ext cx="3154680" cy="1828800"/>
+          <p:cNvPr id="10" name="Shape 8"/>
+          <p:cNvSpPr/>
+          <p:nvPr/>
+        </p:nvSpPr>
+        <p:spPr>
+          <a:xfrm>
+            <a:off x="7635240" y="1325880"/>
+            <a:ext cx="3474720" cy="1325880"/>
           </a:xfrm>
           <a:prstGeom prst="roundRect">
             <a:avLst>
-              <a:gd name="adj" fmla="val 6000"/>
+              <a:gd name="adj" fmla="val 8276"/>
             </a:avLst>
           </a:prstGeom>
           <a:solidFill>
@@ -5254,14 +5550,14 @@
       </p:sp>
       <p:sp>
         <p:nvSpPr>
-          <p:cNvPr id="13" name="Text 11"/>
-          <p:cNvSpPr/>
-          <p:nvPr/>
-        </p:nvSpPr>
-        <p:spPr>
-          <a:xfrm>
-            <a:off x="8074152" y="1563624"/>
-            <a:ext cx="2825496" cy="256032"/>
+          <p:cNvPr id="11" name="Text 9"/>
+          <p:cNvSpPr/>
+          <p:nvPr/>
+        </p:nvSpPr>
+        <p:spPr>
+          <a:xfrm>
+            <a:off x="7799832" y="1472184"/>
+            <a:ext cx="3145536" cy="256032"/>
           </a:xfrm>
           <a:prstGeom prst="rect">
             <a:avLst/>
@@ -5285,7 +5581,7 @@
                 <a:ea typeface="Aptos" pitchFamily="34" charset="-122"/>
                 <a:cs typeface="Aptos" pitchFamily="34" charset="-120"/>
               </a:rPr>
-              <a:t>Key idea</a:t>
+              <a:t>Data decision</a:t>
             </a:r>
             <a:endParaRPr lang="en-US" sz="1300" dirty="0"/>
           </a:p>
@@ -5293,14 +5589,14 @@
       </p:sp>
       <p:sp>
         <p:nvSpPr>
-          <p:cNvPr id="14" name="Text 12"/>
-          <p:cNvSpPr/>
-          <p:nvPr/>
-        </p:nvSpPr>
-        <p:spPr>
-          <a:xfrm>
-            <a:off x="8074152" y="1920240"/>
-            <a:ext cx="2825496" cy="1188720"/>
+          <p:cNvPr id="12" name="Text 10"/>
+          <p:cNvSpPr/>
+          <p:nvPr/>
+        </p:nvSpPr>
+        <p:spPr>
+          <a:xfrm>
+            <a:off x="7799832" y="1828800"/>
+            <a:ext cx="3145536" cy="685800"/>
           </a:xfrm>
           <a:prstGeom prst="rect">
             <a:avLst/>
@@ -5334,21 +5630,212 @@
       </p:sp>
       <p:sp>
         <p:nvSpPr>
-          <p:cNvPr id="15" name="Shape 13"/>
-          <p:cNvSpPr/>
-          <p:nvPr/>
-        </p:nvSpPr>
-        <p:spPr>
-          <a:xfrm>
-            <a:off x="7909560" y="3520440"/>
-            <a:ext cx="3154680" cy="1737360"/>
+          <p:cNvPr id="13" name="Shape 11"/>
+          <p:cNvSpPr/>
+          <p:nvPr/>
+        </p:nvSpPr>
+        <p:spPr>
+          <a:xfrm>
+            <a:off x="7635240" y="2788920"/>
+            <a:ext cx="3474720" cy="1536192"/>
           </a:xfrm>
           <a:prstGeom prst="roundRect">
             <a:avLst>
-              <a:gd name="adj" fmla="val 6316"/>
+              <a:gd name="adj" fmla="val 7143"/>
             </a:avLst>
           </a:prstGeom>
           <a:solidFill>
+            <a:srgbClr val="FFFFFF">
+              <a:alpha val="88000"/>
+            </a:srgbClr>
+          </a:solidFill>
+          <a:ln w="12700">
+            <a:solidFill>
+              <a:srgbClr val="D6E8F2"/>
+            </a:solidFill>
+            <a:prstDash val="solid"/>
+          </a:ln>
+        </p:spPr>
+      </p:sp>
+      <p:sp>
+        <p:nvSpPr>
+          <p:cNvPr id="14" name="Shape 12"/>
+          <p:cNvSpPr/>
+          <p:nvPr/>
+        </p:nvSpPr>
+        <p:spPr>
+          <a:xfrm>
+            <a:off x="8138160" y="3474720"/>
+            <a:ext cx="256032" cy="411480"/>
+          </a:xfrm>
+          <a:prstGeom prst="rect">
+            <a:avLst/>
+          </a:prstGeom>
+          <a:solidFill>
+            <a:srgbClr val="0068B7"/>
+          </a:solidFill>
+          <a:ln w="12700">
+            <a:solidFill>
+              <a:srgbClr val="0068B7"/>
+            </a:solidFill>
+            <a:prstDash val="solid"/>
+          </a:ln>
+        </p:spPr>
+      </p:sp>
+      <p:sp>
+        <p:nvSpPr>
+          <p:cNvPr id="15" name="Shape 13"/>
+          <p:cNvSpPr/>
+          <p:nvPr/>
+        </p:nvSpPr>
+        <p:spPr>
+          <a:xfrm>
+            <a:off x="8577072" y="3172968"/>
+            <a:ext cx="256032" cy="713232"/>
+          </a:xfrm>
+          <a:prstGeom prst="rect">
+            <a:avLst/>
+          </a:prstGeom>
+          <a:solidFill>
+            <a:srgbClr val="2F8A28"/>
+          </a:solidFill>
+          <a:ln w="12700">
+            <a:solidFill>
+              <a:srgbClr val="2F8A28"/>
+            </a:solidFill>
+            <a:prstDash val="solid"/>
+          </a:ln>
+        </p:spPr>
+      </p:sp>
+      <p:sp>
+        <p:nvSpPr>
+          <p:cNvPr id="16" name="Shape 14"/>
+          <p:cNvSpPr/>
+          <p:nvPr/>
+        </p:nvSpPr>
+        <p:spPr>
+          <a:xfrm>
+            <a:off x="9015984" y="2880360"/>
+            <a:ext cx="256032" cy="1005840"/>
+          </a:xfrm>
+          <a:prstGeom prst="rect">
+            <a:avLst/>
+          </a:prstGeom>
+          <a:solidFill>
+            <a:srgbClr val="D69A2D"/>
+          </a:solidFill>
+          <a:ln w="12700">
+            <a:solidFill>
+              <a:srgbClr val="D69A2D"/>
+            </a:solidFill>
+            <a:prstDash val="solid"/>
+          </a:ln>
+        </p:spPr>
+      </p:sp>
+      <p:sp>
+        <p:nvSpPr>
+          <p:cNvPr id="17" name="Shape 15"/>
+          <p:cNvSpPr/>
+          <p:nvPr/>
+        </p:nvSpPr>
+        <p:spPr>
+          <a:xfrm>
+            <a:off x="9454896" y="3319272"/>
+            <a:ext cx="256032" cy="566928"/>
+          </a:xfrm>
+          <a:prstGeom prst="rect">
+            <a:avLst/>
+          </a:prstGeom>
+          <a:solidFill>
+            <a:srgbClr val="6A4CA3"/>
+          </a:solidFill>
+          <a:ln w="12700">
+            <a:solidFill>
+              <a:srgbClr val="6A4CA3"/>
+            </a:solidFill>
+            <a:prstDash val="solid"/>
+          </a:ln>
+        </p:spPr>
+      </p:sp>
+      <p:sp>
+        <p:nvSpPr>
+          <p:cNvPr id="18" name="Shape 16"/>
+          <p:cNvSpPr/>
+          <p:nvPr/>
+        </p:nvSpPr>
+        <p:spPr>
+          <a:xfrm>
+            <a:off x="8019288" y="3886200"/>
+            <a:ext cx="2706624" cy="0"/>
+          </a:xfrm>
+          <a:prstGeom prst="line">
+            <a:avLst/>
+          </a:prstGeom>
+          <a:noFill/>
+          <a:ln w="15240">
+            <a:solidFill>
+              <a:srgbClr val="003A63"/>
+            </a:solidFill>
+            <a:prstDash val="solid"/>
+          </a:ln>
+        </p:spPr>
+      </p:sp>
+      <p:sp>
+        <p:nvSpPr>
+          <p:cNvPr id="19" name="Text 17"/>
+          <p:cNvSpPr/>
+          <p:nvPr/>
+        </p:nvSpPr>
+        <p:spPr>
+          <a:xfrm>
+            <a:off x="7863840" y="3017520"/>
+            <a:ext cx="3017520" cy="201168"/>
+          </a:xfrm>
+          <a:prstGeom prst="rect">
+            <a:avLst/>
+          </a:prstGeom>
+          <a:noFill/>
+          <a:ln/>
+        </p:spPr>
+        <p:txBody>
+          <a:bodyPr wrap="square" lIns="0" tIns="0" rIns="0" bIns="0" rtlCol="0" anchor="ctr"/>
+          <a:lstStyle/>
+          <a:p>
+            <a:pPr algn="ctr" indent="0" marL="0">
+              <a:buNone/>
+            </a:pPr>
+            <a:r>
+              <a:rPr lang="en-US" sz="1050" b="1" dirty="0">
+                <a:solidFill>
+                  <a:srgbClr val="003A63"/>
+                </a:solidFill>
+                <a:latin typeface="Aptos" pitchFamily="34" charset="0"/>
+                <a:ea typeface="Aptos" pitchFamily="34" charset="-122"/>
+                <a:cs typeface="Aptos" pitchFamily="34" charset="-120"/>
+              </a:rPr>
+              <a:t>Measure and monitor</a:t>
+            </a:r>
+            <a:endParaRPr lang="en-US" sz="1050" dirty="0"/>
+          </a:p>
+        </p:txBody>
+      </p:sp>
+      <p:sp>
+        <p:nvSpPr>
+          <p:cNvPr id="20" name="Shape 18"/>
+          <p:cNvSpPr/>
+          <p:nvPr/>
+        </p:nvSpPr>
+        <p:spPr>
+          <a:xfrm>
+            <a:off x="7635240" y="4498848"/>
+            <a:ext cx="3474720" cy="1143000"/>
+          </a:xfrm>
+          <a:prstGeom prst="roundRect">
+            <a:avLst>
+              <a:gd name="adj" fmla="val 9600"/>
+            </a:avLst>
+          </a:prstGeom>
+          <a:solidFill>
             <a:srgbClr val="EAF6F8"/>
           </a:solidFill>
           <a:ln w="12700">
@@ -5361,14 +5848,14 @@
       </p:sp>
       <p:sp>
         <p:nvSpPr>
-          <p:cNvPr id="16" name="Text 14"/>
-          <p:cNvSpPr/>
-          <p:nvPr/>
-        </p:nvSpPr>
-        <p:spPr>
-          <a:xfrm>
-            <a:off x="8074152" y="3666744"/>
-            <a:ext cx="2825496" cy="256032"/>
+          <p:cNvPr id="21" name="Text 19"/>
+          <p:cNvSpPr/>
+          <p:nvPr/>
+        </p:nvSpPr>
+        <p:spPr>
+          <a:xfrm>
+            <a:off x="7799832" y="4645152"/>
+            <a:ext cx="3145536" cy="256032"/>
           </a:xfrm>
           <a:prstGeom prst="rect">
             <a:avLst/>
@@ -5392,7 +5879,7 @@
                 <a:ea typeface="Aptos" pitchFamily="34" charset="-122"/>
                 <a:cs typeface="Aptos" pitchFamily="34" charset="-120"/>
               </a:rPr>
-              <a:t>Use this for</a:t>
+              <a:t>How to validate</a:t>
             </a:r>
             <a:endParaRPr lang="en-US" sz="1300" dirty="0"/>
           </a:p>
@@ -5400,14 +5887,14 @@
       </p:sp>
       <p:sp>
         <p:nvSpPr>
-          <p:cNvPr id="17" name="Text 15"/>
-          <p:cNvSpPr/>
-          <p:nvPr/>
-        </p:nvSpPr>
-        <p:spPr>
-          <a:xfrm>
-            <a:off x="8074152" y="4023360"/>
-            <a:ext cx="2825496" cy="1097280"/>
+          <p:cNvPr id="22" name="Text 20"/>
+          <p:cNvSpPr/>
+          <p:nvPr/>
+        </p:nvSpPr>
+        <p:spPr>
+          <a:xfrm>
+            <a:off x="7799832" y="5001768"/>
+            <a:ext cx="3145536" cy="502920"/>
           </a:xfrm>
           <a:prstGeom prst="rect">
             <a:avLst/>
@@ -5433,7 +5920,7 @@
                 <a:ea typeface="Aptos" pitchFamily="34" charset="-122"/>
                 <a:cs typeface="Aptos" pitchFamily="34" charset="-120"/>
               </a:rPr>
-              <a:t>Connect the concept to public health decisions, safeguards, documentation, or implementation work.</a:t>
+              <a:t>Connect the concept to data quality, model performance, validation evidence, monitoring measures, and decisions that remain under human control.</a:t>
             </a:r>
             <a:endParaRPr lang="en-US" sz="1550" dirty="0"/>
           </a:p>
@@ -5607,8 +6094,8 @@
         </p:nvSpPr>
         <p:spPr>
           <a:xfrm>
-            <a:off x="9966960" y="6537960"/>
-            <a:ext cx="1645920" cy="201168"/>
+            <a:off x="9646920" y="6537960"/>
+            <a:ext cx="1965960" cy="201168"/>
           </a:xfrm>
           <a:prstGeom prst="rect">
             <a:avLst/>
@@ -5632,7 +6119,7 @@
                 <a:ea typeface="Aptos" pitchFamily="34" charset="-122"/>
                 <a:cs typeface="Aptos" pitchFamily="34" charset="-120"/>
               </a:rPr>
-              <a:t>Â© Paula Soper</a:t>
+              <a:t>Copyright Paula Soper</a:t>
             </a:r>
             <a:endParaRPr lang="en-US" sz="800" dirty="0"/>
           </a:p>
@@ -5727,7 +6214,7 @@
         <p:spPr>
           <a:xfrm>
             <a:off x="868680" y="1508760"/>
-            <a:ext cx="6537960" cy="4160520"/>
+            <a:ext cx="6309360" cy="4160520"/>
           </a:xfrm>
           <a:prstGeom prst="rect">
             <a:avLst/>
@@ -5778,12 +6265,12 @@
         </p:nvSpPr>
         <p:spPr>
           <a:xfrm>
-            <a:off x="7909560" y="1417320"/>
-            <a:ext cx="3154680" cy="1828800"/>
+            <a:off x="7635240" y="1325880"/>
+            <a:ext cx="3474720" cy="1325880"/>
           </a:xfrm>
           <a:prstGeom prst="roundRect">
             <a:avLst>
-              <a:gd name="adj" fmla="val 6000"/>
+              <a:gd name="adj" fmla="val 8276"/>
             </a:avLst>
           </a:prstGeom>
           <a:solidFill>
@@ -5805,8 +6292,8 @@
         </p:nvSpPr>
         <p:spPr>
           <a:xfrm>
-            <a:off x="8074152" y="1563624"/>
-            <a:ext cx="2825496" cy="256032"/>
+            <a:off x="7799832" y="1472184"/>
+            <a:ext cx="3145536" cy="256032"/>
           </a:xfrm>
           <a:prstGeom prst="rect">
             <a:avLst/>
@@ -5830,7 +6317,7 @@
                 <a:ea typeface="Aptos" pitchFamily="34" charset="-122"/>
                 <a:cs typeface="Aptos" pitchFamily="34" charset="-120"/>
               </a:rPr>
-              <a:t>Key idea</a:t>
+              <a:t>Data decision</a:t>
             </a:r>
             <a:endParaRPr lang="en-US" sz="1300" dirty="0"/>
           </a:p>
@@ -5844,8 +6331,8 @@
         </p:nvSpPr>
         <p:spPr>
           <a:xfrm>
-            <a:off x="8074152" y="1920240"/>
-            <a:ext cx="2825496" cy="1188720"/>
+            <a:off x="7799832" y="1828800"/>
+            <a:ext cx="3145536" cy="685800"/>
           </a:xfrm>
           <a:prstGeom prst="rect">
             <a:avLst/>
@@ -5885,15 +6372,206 @@
         </p:nvSpPr>
         <p:spPr>
           <a:xfrm>
-            <a:off x="7909560" y="3520440"/>
-            <a:ext cx="3154680" cy="1737360"/>
+            <a:off x="7635240" y="2788920"/>
+            <a:ext cx="3474720" cy="1536192"/>
           </a:xfrm>
           <a:prstGeom prst="roundRect">
             <a:avLst>
-              <a:gd name="adj" fmla="val 6316"/>
+              <a:gd name="adj" fmla="val 7143"/>
             </a:avLst>
           </a:prstGeom>
           <a:solidFill>
+            <a:srgbClr val="FFFFFF">
+              <a:alpha val="88000"/>
+            </a:srgbClr>
+          </a:solidFill>
+          <a:ln w="12700">
+            <a:solidFill>
+              <a:srgbClr val="D6E8F2"/>
+            </a:solidFill>
+            <a:prstDash val="solid"/>
+          </a:ln>
+        </p:spPr>
+      </p:sp>
+      <p:sp>
+        <p:nvSpPr>
+          <p:cNvPr id="14" name="Shape 12"/>
+          <p:cNvSpPr/>
+          <p:nvPr/>
+        </p:nvSpPr>
+        <p:spPr>
+          <a:xfrm>
+            <a:off x="8138160" y="3474720"/>
+            <a:ext cx="256032" cy="411480"/>
+          </a:xfrm>
+          <a:prstGeom prst="rect">
+            <a:avLst/>
+          </a:prstGeom>
+          <a:solidFill>
+            <a:srgbClr val="0068B7"/>
+          </a:solidFill>
+          <a:ln w="12700">
+            <a:solidFill>
+              <a:srgbClr val="0068B7"/>
+            </a:solidFill>
+            <a:prstDash val="solid"/>
+          </a:ln>
+        </p:spPr>
+      </p:sp>
+      <p:sp>
+        <p:nvSpPr>
+          <p:cNvPr id="15" name="Shape 13"/>
+          <p:cNvSpPr/>
+          <p:nvPr/>
+        </p:nvSpPr>
+        <p:spPr>
+          <a:xfrm>
+            <a:off x="8577072" y="3172968"/>
+            <a:ext cx="256032" cy="713232"/>
+          </a:xfrm>
+          <a:prstGeom prst="rect">
+            <a:avLst/>
+          </a:prstGeom>
+          <a:solidFill>
+            <a:srgbClr val="2F8A28"/>
+          </a:solidFill>
+          <a:ln w="12700">
+            <a:solidFill>
+              <a:srgbClr val="2F8A28"/>
+            </a:solidFill>
+            <a:prstDash val="solid"/>
+          </a:ln>
+        </p:spPr>
+      </p:sp>
+      <p:sp>
+        <p:nvSpPr>
+          <p:cNvPr id="16" name="Shape 14"/>
+          <p:cNvSpPr/>
+          <p:nvPr/>
+        </p:nvSpPr>
+        <p:spPr>
+          <a:xfrm>
+            <a:off x="9015984" y="2880360"/>
+            <a:ext cx="256032" cy="1005840"/>
+          </a:xfrm>
+          <a:prstGeom prst="rect">
+            <a:avLst/>
+          </a:prstGeom>
+          <a:solidFill>
+            <a:srgbClr val="D69A2D"/>
+          </a:solidFill>
+          <a:ln w="12700">
+            <a:solidFill>
+              <a:srgbClr val="D69A2D"/>
+            </a:solidFill>
+            <a:prstDash val="solid"/>
+          </a:ln>
+        </p:spPr>
+      </p:sp>
+      <p:sp>
+        <p:nvSpPr>
+          <p:cNvPr id="17" name="Shape 15"/>
+          <p:cNvSpPr/>
+          <p:nvPr/>
+        </p:nvSpPr>
+        <p:spPr>
+          <a:xfrm>
+            <a:off x="9454896" y="3319272"/>
+            <a:ext cx="256032" cy="566928"/>
+          </a:xfrm>
+          <a:prstGeom prst="rect">
+            <a:avLst/>
+          </a:prstGeom>
+          <a:solidFill>
+            <a:srgbClr val="6A4CA3"/>
+          </a:solidFill>
+          <a:ln w="12700">
+            <a:solidFill>
+              <a:srgbClr val="6A4CA3"/>
+            </a:solidFill>
+            <a:prstDash val="solid"/>
+          </a:ln>
+        </p:spPr>
+      </p:sp>
+      <p:sp>
+        <p:nvSpPr>
+          <p:cNvPr id="18" name="Shape 16"/>
+          <p:cNvSpPr/>
+          <p:nvPr/>
+        </p:nvSpPr>
+        <p:spPr>
+          <a:xfrm>
+            <a:off x="8019288" y="3886200"/>
+            <a:ext cx="2706624" cy="0"/>
+          </a:xfrm>
+          <a:prstGeom prst="line">
+            <a:avLst/>
+          </a:prstGeom>
+          <a:noFill/>
+          <a:ln w="15240">
+            <a:solidFill>
+              <a:srgbClr val="003A63"/>
+            </a:solidFill>
+            <a:prstDash val="solid"/>
+          </a:ln>
+        </p:spPr>
+      </p:sp>
+      <p:sp>
+        <p:nvSpPr>
+          <p:cNvPr id="19" name="Text 17"/>
+          <p:cNvSpPr/>
+          <p:nvPr/>
+        </p:nvSpPr>
+        <p:spPr>
+          <a:xfrm>
+            <a:off x="7863840" y="3017520"/>
+            <a:ext cx="3017520" cy="201168"/>
+          </a:xfrm>
+          <a:prstGeom prst="rect">
+            <a:avLst/>
+          </a:prstGeom>
+          <a:noFill/>
+          <a:ln/>
+        </p:spPr>
+        <p:txBody>
+          <a:bodyPr wrap="square" lIns="0" tIns="0" rIns="0" bIns="0" rtlCol="0" anchor="ctr"/>
+          <a:lstStyle/>
+          <a:p>
+            <a:pPr algn="ctr" indent="0" marL="0">
+              <a:buNone/>
+            </a:pPr>
+            <a:r>
+              <a:rPr lang="en-US" sz="1050" b="1" dirty="0">
+                <a:solidFill>
+                  <a:srgbClr val="003A63"/>
+                </a:solidFill>
+                <a:latin typeface="Aptos" pitchFamily="34" charset="0"/>
+                <a:ea typeface="Aptos" pitchFamily="34" charset="-122"/>
+                <a:cs typeface="Aptos" pitchFamily="34" charset="-120"/>
+              </a:rPr>
+              <a:t>Measure and monitor</a:t>
+            </a:r>
+            <a:endParaRPr lang="en-US" sz="1050" dirty="0"/>
+          </a:p>
+        </p:txBody>
+      </p:sp>
+      <p:sp>
+        <p:nvSpPr>
+          <p:cNvPr id="20" name="Shape 18"/>
+          <p:cNvSpPr/>
+          <p:nvPr/>
+        </p:nvSpPr>
+        <p:spPr>
+          <a:xfrm>
+            <a:off x="7635240" y="4498848"/>
+            <a:ext cx="3474720" cy="1143000"/>
+          </a:xfrm>
+          <a:prstGeom prst="roundRect">
+            <a:avLst>
+              <a:gd name="adj" fmla="val 9600"/>
+            </a:avLst>
+          </a:prstGeom>
+          <a:solidFill>
             <a:srgbClr val="EAF6F8"/>
           </a:solidFill>
           <a:ln w="12700">
@@ -5906,14 +6584,14 @@
       </p:sp>
       <p:sp>
         <p:nvSpPr>
-          <p:cNvPr id="14" name="Text 12"/>
-          <p:cNvSpPr/>
-          <p:nvPr/>
-        </p:nvSpPr>
-        <p:spPr>
-          <a:xfrm>
-            <a:off x="8074152" y="3666744"/>
-            <a:ext cx="2825496" cy="256032"/>
+          <p:cNvPr id="21" name="Text 19"/>
+          <p:cNvSpPr/>
+          <p:nvPr/>
+        </p:nvSpPr>
+        <p:spPr>
+          <a:xfrm>
+            <a:off x="7799832" y="4645152"/>
+            <a:ext cx="3145536" cy="256032"/>
           </a:xfrm>
           <a:prstGeom prst="rect">
             <a:avLst/>
@@ -5937,7 +6615,7 @@
                 <a:ea typeface="Aptos" pitchFamily="34" charset="-122"/>
                 <a:cs typeface="Aptos" pitchFamily="34" charset="-120"/>
               </a:rPr>
-              <a:t>Use this for</a:t>
+              <a:t>How to validate</a:t>
             </a:r>
             <a:endParaRPr lang="en-US" sz="1300" dirty="0"/>
           </a:p>
@@ -5945,14 +6623,14 @@
       </p:sp>
       <p:sp>
         <p:nvSpPr>
-          <p:cNvPr id="15" name="Text 13"/>
-          <p:cNvSpPr/>
-          <p:nvPr/>
-        </p:nvSpPr>
-        <p:spPr>
-          <a:xfrm>
-            <a:off x="8074152" y="4023360"/>
-            <a:ext cx="2825496" cy="1097280"/>
+          <p:cNvPr id="22" name="Text 20"/>
+          <p:cNvSpPr/>
+          <p:nvPr/>
+        </p:nvSpPr>
+        <p:spPr>
+          <a:xfrm>
+            <a:off x="7799832" y="5001768"/>
+            <a:ext cx="3145536" cy="502920"/>
           </a:xfrm>
           <a:prstGeom prst="rect">
             <a:avLst/>
@@ -5978,7 +6656,7 @@
                 <a:ea typeface="Aptos" pitchFamily="34" charset="-122"/>
                 <a:cs typeface="Aptos" pitchFamily="34" charset="-120"/>
               </a:rPr>
-              <a:t>Connect the concept to public health decisions, safeguards, documentation, or implementation work.</a:t>
+              <a:t>Connect the concept to data quality, model performance, validation evidence, monitoring measures, and decisions that remain under human control.</a:t>
             </a:r>
             <a:endParaRPr lang="en-US" sz="1550" dirty="0"/>
           </a:p>
@@ -6152,8 +6830,8 @@
         </p:nvSpPr>
         <p:spPr>
           <a:xfrm>
-            <a:off x="9966960" y="6537960"/>
-            <a:ext cx="1645920" cy="201168"/>
+            <a:off x="9646920" y="6537960"/>
+            <a:ext cx="1965960" cy="201168"/>
           </a:xfrm>
           <a:prstGeom prst="rect">
             <a:avLst/>
@@ -6177,7 +6855,7 @@
                 <a:ea typeface="Aptos" pitchFamily="34" charset="-122"/>
                 <a:cs typeface="Aptos" pitchFamily="34" charset="-120"/>
               </a:rPr>
-              <a:t>Â© Paula Soper</a:t>
+              <a:t>Copyright Paula Soper</a:t>
             </a:r>
             <a:endParaRPr lang="en-US" sz="800" dirty="0"/>
           </a:p>
@@ -6224,77 +6902,13 @@
       </p:sp>
       <p:sp>
         <p:nvSpPr>
-          <p:cNvPr id="8" name="Shape 6"/>
+          <p:cNvPr id="8" name="Text 6"/>
           <p:cNvSpPr/>
           <p:nvPr/>
         </p:nvSpPr>
         <p:spPr>
           <a:xfrm>
             <a:off x="640080" y="658368"/>
-            <a:ext cx="420624" cy="420624"/>
-          </a:xfrm>
-          <a:prstGeom prst="ellipse">
-            <a:avLst/>
-          </a:prstGeom>
-          <a:solidFill>
-            <a:srgbClr val="0068B7"/>
-          </a:solidFill>
-          <a:ln w="12700">
-            <a:solidFill>
-              <a:srgbClr val="0068B7"/>
-            </a:solidFill>
-            <a:prstDash val="solid"/>
-          </a:ln>
-        </p:spPr>
-      </p:sp>
-      <p:sp>
-        <p:nvSpPr>
-          <p:cNvPr id="9" name="Text 7"/>
-          <p:cNvSpPr/>
-          <p:nvPr/>
-        </p:nvSpPr>
-        <p:spPr>
-          <a:xfrm>
-            <a:off x="640080" y="731520"/>
-            <a:ext cx="420624" cy="164592"/>
-          </a:xfrm>
-          <a:prstGeom prst="rect">
-            <a:avLst/>
-          </a:prstGeom>
-          <a:noFill/>
-          <a:ln/>
-        </p:spPr>
-        <p:txBody>
-          <a:bodyPr wrap="square" lIns="0" tIns="0" rIns="0" bIns="0" rtlCol="0" anchor="ctr"/>
-          <a:lstStyle/>
-          <a:p>
-            <a:pPr algn="ctr" indent="0" marL="0">
-              <a:buNone/>
-            </a:pPr>
-            <a:r>
-              <a:rPr lang="en-US" sz="1100" b="1" dirty="0">
-                <a:solidFill>
-                  <a:srgbClr val="FFFFFF"/>
-                </a:solidFill>
-                <a:latin typeface="Aptos" pitchFamily="34" charset="0"/>
-                <a:ea typeface="Aptos" pitchFamily="34" charset="-122"/>
-                <a:cs typeface="Aptos" pitchFamily="34" charset="-120"/>
-              </a:rPr>
-              <a:t>10</a:t>
-            </a:r>
-            <a:endParaRPr lang="en-US" sz="1100" dirty="0"/>
-          </a:p>
-        </p:txBody>
-      </p:sp>
-      <p:sp>
-        <p:nvSpPr>
-          <p:cNvPr id="10" name="Text 8"/>
-          <p:cNvSpPr/>
-          <p:nvPr/>
-        </p:nvSpPr>
-        <p:spPr>
-          <a:xfrm>
-            <a:off x="640080" y="621792"/>
             <a:ext cx="10881360" cy="713232"/>
           </a:xfrm>
           <a:prstGeom prst="rect">
@@ -6329,14 +6943,14 @@
       </p:sp>
       <p:sp>
         <p:nvSpPr>
-          <p:cNvPr id="11" name="Text 9"/>
+          <p:cNvPr id="9" name="Text 7"/>
           <p:cNvSpPr/>
           <p:nvPr/>
         </p:nvSpPr>
         <p:spPr>
           <a:xfrm>
             <a:off x="868680" y="1508760"/>
-            <a:ext cx="6537960" cy="4160520"/>
+            <a:ext cx="6309360" cy="4160520"/>
           </a:xfrm>
           <a:prstGeom prst="rect">
             <a:avLst/>
@@ -6381,18 +6995,18 @@
       </p:sp>
       <p:sp>
         <p:nvSpPr>
-          <p:cNvPr id="12" name="Shape 10"/>
-          <p:cNvSpPr/>
-          <p:nvPr/>
-        </p:nvSpPr>
-        <p:spPr>
-          <a:xfrm>
-            <a:off x="7909560" y="1417320"/>
-            <a:ext cx="3154680" cy="1828800"/>
+          <p:cNvPr id="10" name="Shape 8"/>
+          <p:cNvSpPr/>
+          <p:nvPr/>
+        </p:nvSpPr>
+        <p:spPr>
+          <a:xfrm>
+            <a:off x="7635240" y="1325880"/>
+            <a:ext cx="3474720" cy="1325880"/>
           </a:xfrm>
           <a:prstGeom prst="roundRect">
             <a:avLst>
-              <a:gd name="adj" fmla="val 6000"/>
+              <a:gd name="adj" fmla="val 8276"/>
             </a:avLst>
           </a:prstGeom>
           <a:solidFill>
@@ -6408,14 +7022,14 @@
       </p:sp>
       <p:sp>
         <p:nvSpPr>
-          <p:cNvPr id="13" name="Text 11"/>
-          <p:cNvSpPr/>
-          <p:nvPr/>
-        </p:nvSpPr>
-        <p:spPr>
-          <a:xfrm>
-            <a:off x="8074152" y="1563624"/>
-            <a:ext cx="2825496" cy="256032"/>
+          <p:cNvPr id="11" name="Text 9"/>
+          <p:cNvSpPr/>
+          <p:nvPr/>
+        </p:nvSpPr>
+        <p:spPr>
+          <a:xfrm>
+            <a:off x="7799832" y="1472184"/>
+            <a:ext cx="3145536" cy="256032"/>
           </a:xfrm>
           <a:prstGeom prst="rect">
             <a:avLst/>
@@ -6439,7 +7053,7 @@
                 <a:ea typeface="Aptos" pitchFamily="34" charset="-122"/>
                 <a:cs typeface="Aptos" pitchFamily="34" charset="-120"/>
               </a:rPr>
-              <a:t>Key idea</a:t>
+              <a:t>Data decision</a:t>
             </a:r>
             <a:endParaRPr lang="en-US" sz="1300" dirty="0"/>
           </a:p>
@@ -6447,14 +7061,14 @@
       </p:sp>
       <p:sp>
         <p:nvSpPr>
-          <p:cNvPr id="14" name="Text 12"/>
-          <p:cNvSpPr/>
-          <p:nvPr/>
-        </p:nvSpPr>
-        <p:spPr>
-          <a:xfrm>
-            <a:off x="8074152" y="1920240"/>
-            <a:ext cx="2825496" cy="1188720"/>
+          <p:cNvPr id="12" name="Text 10"/>
+          <p:cNvSpPr/>
+          <p:nvPr/>
+        </p:nvSpPr>
+        <p:spPr>
+          <a:xfrm>
+            <a:off x="7799832" y="1828800"/>
+            <a:ext cx="3145536" cy="685800"/>
           </a:xfrm>
           <a:prstGeom prst="rect">
             <a:avLst/>
@@ -6488,21 +7102,212 @@
       </p:sp>
       <p:sp>
         <p:nvSpPr>
-          <p:cNvPr id="15" name="Shape 13"/>
-          <p:cNvSpPr/>
-          <p:nvPr/>
-        </p:nvSpPr>
-        <p:spPr>
-          <a:xfrm>
-            <a:off x="7909560" y="3520440"/>
-            <a:ext cx="3154680" cy="1737360"/>
+          <p:cNvPr id="13" name="Shape 11"/>
+          <p:cNvSpPr/>
+          <p:nvPr/>
+        </p:nvSpPr>
+        <p:spPr>
+          <a:xfrm>
+            <a:off x="7635240" y="2788920"/>
+            <a:ext cx="3474720" cy="1536192"/>
           </a:xfrm>
           <a:prstGeom prst="roundRect">
             <a:avLst>
-              <a:gd name="adj" fmla="val 6316"/>
+              <a:gd name="adj" fmla="val 7143"/>
             </a:avLst>
           </a:prstGeom>
           <a:solidFill>
+            <a:srgbClr val="FFFFFF">
+              <a:alpha val="88000"/>
+            </a:srgbClr>
+          </a:solidFill>
+          <a:ln w="12700">
+            <a:solidFill>
+              <a:srgbClr val="D6E8F2"/>
+            </a:solidFill>
+            <a:prstDash val="solid"/>
+          </a:ln>
+        </p:spPr>
+      </p:sp>
+      <p:sp>
+        <p:nvSpPr>
+          <p:cNvPr id="14" name="Shape 12"/>
+          <p:cNvSpPr/>
+          <p:nvPr/>
+        </p:nvSpPr>
+        <p:spPr>
+          <a:xfrm>
+            <a:off x="8138160" y="3474720"/>
+            <a:ext cx="256032" cy="411480"/>
+          </a:xfrm>
+          <a:prstGeom prst="rect">
+            <a:avLst/>
+          </a:prstGeom>
+          <a:solidFill>
+            <a:srgbClr val="0068B7"/>
+          </a:solidFill>
+          <a:ln w="12700">
+            <a:solidFill>
+              <a:srgbClr val="0068B7"/>
+            </a:solidFill>
+            <a:prstDash val="solid"/>
+          </a:ln>
+        </p:spPr>
+      </p:sp>
+      <p:sp>
+        <p:nvSpPr>
+          <p:cNvPr id="15" name="Shape 13"/>
+          <p:cNvSpPr/>
+          <p:nvPr/>
+        </p:nvSpPr>
+        <p:spPr>
+          <a:xfrm>
+            <a:off x="8577072" y="3172968"/>
+            <a:ext cx="256032" cy="713232"/>
+          </a:xfrm>
+          <a:prstGeom prst="rect">
+            <a:avLst/>
+          </a:prstGeom>
+          <a:solidFill>
+            <a:srgbClr val="2F8A28"/>
+          </a:solidFill>
+          <a:ln w="12700">
+            <a:solidFill>
+              <a:srgbClr val="2F8A28"/>
+            </a:solidFill>
+            <a:prstDash val="solid"/>
+          </a:ln>
+        </p:spPr>
+      </p:sp>
+      <p:sp>
+        <p:nvSpPr>
+          <p:cNvPr id="16" name="Shape 14"/>
+          <p:cNvSpPr/>
+          <p:nvPr/>
+        </p:nvSpPr>
+        <p:spPr>
+          <a:xfrm>
+            <a:off x="9015984" y="2880360"/>
+            <a:ext cx="256032" cy="1005840"/>
+          </a:xfrm>
+          <a:prstGeom prst="rect">
+            <a:avLst/>
+          </a:prstGeom>
+          <a:solidFill>
+            <a:srgbClr val="D69A2D"/>
+          </a:solidFill>
+          <a:ln w="12700">
+            <a:solidFill>
+              <a:srgbClr val="D69A2D"/>
+            </a:solidFill>
+            <a:prstDash val="solid"/>
+          </a:ln>
+        </p:spPr>
+      </p:sp>
+      <p:sp>
+        <p:nvSpPr>
+          <p:cNvPr id="17" name="Shape 15"/>
+          <p:cNvSpPr/>
+          <p:nvPr/>
+        </p:nvSpPr>
+        <p:spPr>
+          <a:xfrm>
+            <a:off x="9454896" y="3319272"/>
+            <a:ext cx="256032" cy="566928"/>
+          </a:xfrm>
+          <a:prstGeom prst="rect">
+            <a:avLst/>
+          </a:prstGeom>
+          <a:solidFill>
+            <a:srgbClr val="6A4CA3"/>
+          </a:solidFill>
+          <a:ln w="12700">
+            <a:solidFill>
+              <a:srgbClr val="6A4CA3"/>
+            </a:solidFill>
+            <a:prstDash val="solid"/>
+          </a:ln>
+        </p:spPr>
+      </p:sp>
+      <p:sp>
+        <p:nvSpPr>
+          <p:cNvPr id="18" name="Shape 16"/>
+          <p:cNvSpPr/>
+          <p:nvPr/>
+        </p:nvSpPr>
+        <p:spPr>
+          <a:xfrm>
+            <a:off x="8019288" y="3886200"/>
+            <a:ext cx="2706624" cy="0"/>
+          </a:xfrm>
+          <a:prstGeom prst="line">
+            <a:avLst/>
+          </a:prstGeom>
+          <a:noFill/>
+          <a:ln w="15240">
+            <a:solidFill>
+              <a:srgbClr val="003A63"/>
+            </a:solidFill>
+            <a:prstDash val="solid"/>
+          </a:ln>
+        </p:spPr>
+      </p:sp>
+      <p:sp>
+        <p:nvSpPr>
+          <p:cNvPr id="19" name="Text 17"/>
+          <p:cNvSpPr/>
+          <p:nvPr/>
+        </p:nvSpPr>
+        <p:spPr>
+          <a:xfrm>
+            <a:off x="7863840" y="3017520"/>
+            <a:ext cx="3017520" cy="201168"/>
+          </a:xfrm>
+          <a:prstGeom prst="rect">
+            <a:avLst/>
+          </a:prstGeom>
+          <a:noFill/>
+          <a:ln/>
+        </p:spPr>
+        <p:txBody>
+          <a:bodyPr wrap="square" lIns="0" tIns="0" rIns="0" bIns="0" rtlCol="0" anchor="ctr"/>
+          <a:lstStyle/>
+          <a:p>
+            <a:pPr algn="ctr" indent="0" marL="0">
+              <a:buNone/>
+            </a:pPr>
+            <a:r>
+              <a:rPr lang="en-US" sz="1050" b="1" dirty="0">
+                <a:solidFill>
+                  <a:srgbClr val="003A63"/>
+                </a:solidFill>
+                <a:latin typeface="Aptos" pitchFamily="34" charset="0"/>
+                <a:ea typeface="Aptos" pitchFamily="34" charset="-122"/>
+                <a:cs typeface="Aptos" pitchFamily="34" charset="-120"/>
+              </a:rPr>
+              <a:t>Measure and monitor</a:t>
+            </a:r>
+            <a:endParaRPr lang="en-US" sz="1050" dirty="0"/>
+          </a:p>
+        </p:txBody>
+      </p:sp>
+      <p:sp>
+        <p:nvSpPr>
+          <p:cNvPr id="20" name="Shape 18"/>
+          <p:cNvSpPr/>
+          <p:nvPr/>
+        </p:nvSpPr>
+        <p:spPr>
+          <a:xfrm>
+            <a:off x="7635240" y="4498848"/>
+            <a:ext cx="3474720" cy="1143000"/>
+          </a:xfrm>
+          <a:prstGeom prst="roundRect">
+            <a:avLst>
+              <a:gd name="adj" fmla="val 9600"/>
+            </a:avLst>
+          </a:prstGeom>
+          <a:solidFill>
             <a:srgbClr val="EAF6F8"/>
           </a:solidFill>
           <a:ln w="12700">
@@ -6515,14 +7320,14 @@
       </p:sp>
       <p:sp>
         <p:nvSpPr>
-          <p:cNvPr id="16" name="Text 14"/>
-          <p:cNvSpPr/>
-          <p:nvPr/>
-        </p:nvSpPr>
-        <p:spPr>
-          <a:xfrm>
-            <a:off x="8074152" y="3666744"/>
-            <a:ext cx="2825496" cy="256032"/>
+          <p:cNvPr id="21" name="Text 19"/>
+          <p:cNvSpPr/>
+          <p:nvPr/>
+        </p:nvSpPr>
+        <p:spPr>
+          <a:xfrm>
+            <a:off x="7799832" y="4645152"/>
+            <a:ext cx="3145536" cy="256032"/>
           </a:xfrm>
           <a:prstGeom prst="rect">
             <a:avLst/>
@@ -6546,7 +7351,7 @@
                 <a:ea typeface="Aptos" pitchFamily="34" charset="-122"/>
                 <a:cs typeface="Aptos" pitchFamily="34" charset="-120"/>
               </a:rPr>
-              <a:t>Use this for</a:t>
+              <a:t>How to validate</a:t>
             </a:r>
             <a:endParaRPr lang="en-US" sz="1300" dirty="0"/>
           </a:p>
@@ -6554,14 +7359,14 @@
       </p:sp>
       <p:sp>
         <p:nvSpPr>
-          <p:cNvPr id="17" name="Text 15"/>
-          <p:cNvSpPr/>
-          <p:nvPr/>
-        </p:nvSpPr>
-        <p:spPr>
-          <a:xfrm>
-            <a:off x="8074152" y="4023360"/>
-            <a:ext cx="2825496" cy="1097280"/>
+          <p:cNvPr id="22" name="Text 20"/>
+          <p:cNvSpPr/>
+          <p:nvPr/>
+        </p:nvSpPr>
+        <p:spPr>
+          <a:xfrm>
+            <a:off x="7799832" y="5001768"/>
+            <a:ext cx="3145536" cy="502920"/>
           </a:xfrm>
           <a:prstGeom prst="rect">
             <a:avLst/>
@@ -6587,7 +7392,7 @@
                 <a:ea typeface="Aptos" pitchFamily="34" charset="-122"/>
                 <a:cs typeface="Aptos" pitchFamily="34" charset="-120"/>
               </a:rPr>
-              <a:t>Connect the concept to public health decisions, safeguards, documentation, or implementation work.</a:t>
+              <a:t>Use the assignment to test whether you can explain the concept, apply it to a realistic public health situation, and identify what would need review before the work moves forward.</a:t>
             </a:r>
             <a:endParaRPr lang="en-US" sz="1550" dirty="0"/>
           </a:p>
@@ -6761,8 +7566,8 @@
         </p:nvSpPr>
         <p:spPr>
           <a:xfrm>
-            <a:off x="9966960" y="6537960"/>
-            <a:ext cx="1645920" cy="201168"/>
+            <a:off x="9646920" y="6537960"/>
+            <a:ext cx="1965960" cy="201168"/>
           </a:xfrm>
           <a:prstGeom prst="rect">
             <a:avLst/>
@@ -6786,7 +7591,7 @@
                 <a:ea typeface="Aptos" pitchFamily="34" charset="-122"/>
                 <a:cs typeface="Aptos" pitchFamily="34" charset="-120"/>
               </a:rPr>
-              <a:t>Â© Paula Soper</a:t>
+              <a:t>Copyright Paula Soper</a:t>
             </a:r>
             <a:endParaRPr lang="en-US" sz="800" dirty="0"/>
           </a:p>
@@ -6833,77 +7638,13 @@
       </p:sp>
       <p:sp>
         <p:nvSpPr>
-          <p:cNvPr id="8" name="Shape 6"/>
+          <p:cNvPr id="8" name="Text 6"/>
           <p:cNvSpPr/>
           <p:nvPr/>
         </p:nvSpPr>
         <p:spPr>
           <a:xfrm>
             <a:off x="640080" y="658368"/>
-            <a:ext cx="420624" cy="420624"/>
-          </a:xfrm>
-          <a:prstGeom prst="ellipse">
-            <a:avLst/>
-          </a:prstGeom>
-          <a:solidFill>
-            <a:srgbClr val="0068B7"/>
-          </a:solidFill>
-          <a:ln w="12700">
-            <a:solidFill>
-              <a:srgbClr val="0068B7"/>
-            </a:solidFill>
-            <a:prstDash val="solid"/>
-          </a:ln>
-        </p:spPr>
-      </p:sp>
-      <p:sp>
-        <p:nvSpPr>
-          <p:cNvPr id="9" name="Text 7"/>
-          <p:cNvSpPr/>
-          <p:nvPr/>
-        </p:nvSpPr>
-        <p:spPr>
-          <a:xfrm>
-            <a:off x="640080" y="731520"/>
-            <a:ext cx="420624" cy="164592"/>
-          </a:xfrm>
-          <a:prstGeom prst="rect">
-            <a:avLst/>
-          </a:prstGeom>
-          <a:noFill/>
-          <a:ln/>
-        </p:spPr>
-        <p:txBody>
-          <a:bodyPr wrap="square" lIns="0" tIns="0" rIns="0" bIns="0" rtlCol="0" anchor="ctr"/>
-          <a:lstStyle/>
-          <a:p>
-            <a:pPr algn="ctr" indent="0" marL="0">
-              <a:buNone/>
-            </a:pPr>
-            <a:r>
-              <a:rPr lang="en-US" sz="1100" b="1" dirty="0">
-                <a:solidFill>
-                  <a:srgbClr val="FFFFFF"/>
-                </a:solidFill>
-                <a:latin typeface="Aptos" pitchFamily="34" charset="0"/>
-                <a:ea typeface="Aptos" pitchFamily="34" charset="-122"/>
-                <a:cs typeface="Aptos" pitchFamily="34" charset="-120"/>
-              </a:rPr>
-              <a:t>11</a:t>
-            </a:r>
-            <a:endParaRPr lang="en-US" sz="1100" dirty="0"/>
-          </a:p>
-        </p:txBody>
-      </p:sp>
-      <p:sp>
-        <p:nvSpPr>
-          <p:cNvPr id="10" name="Text 8"/>
-          <p:cNvSpPr/>
-          <p:nvPr/>
-        </p:nvSpPr>
-        <p:spPr>
-          <a:xfrm>
-            <a:off x="640080" y="621792"/>
             <a:ext cx="10881360" cy="713232"/>
           </a:xfrm>
           <a:prstGeom prst="rect">
@@ -6938,14 +7679,14 @@
       </p:sp>
       <p:sp>
         <p:nvSpPr>
-          <p:cNvPr id="11" name="Text 9"/>
+          <p:cNvPr id="9" name="Text 7"/>
           <p:cNvSpPr/>
           <p:nvPr/>
         </p:nvSpPr>
         <p:spPr>
           <a:xfrm>
             <a:off x="868680" y="1508760"/>
-            <a:ext cx="6537960" cy="4160520"/>
+            <a:ext cx="6309360" cy="4160520"/>
           </a:xfrm>
           <a:prstGeom prst="rect">
             <a:avLst/>
@@ -7004,18 +7745,18 @@
       </p:sp>
       <p:sp>
         <p:nvSpPr>
-          <p:cNvPr id="12" name="Shape 10"/>
-          <p:cNvSpPr/>
-          <p:nvPr/>
-        </p:nvSpPr>
-        <p:spPr>
-          <a:xfrm>
-            <a:off x="7909560" y="1417320"/>
-            <a:ext cx="3154680" cy="1828800"/>
+          <p:cNvPr id="10" name="Shape 8"/>
+          <p:cNvSpPr/>
+          <p:nvPr/>
+        </p:nvSpPr>
+        <p:spPr>
+          <a:xfrm>
+            <a:off x="7635240" y="1325880"/>
+            <a:ext cx="3474720" cy="1325880"/>
           </a:xfrm>
           <a:prstGeom prst="roundRect">
             <a:avLst>
-              <a:gd name="adj" fmla="val 6000"/>
+              <a:gd name="adj" fmla="val 8276"/>
             </a:avLst>
           </a:prstGeom>
           <a:solidFill>
@@ -7031,14 +7772,14 @@
       </p:sp>
       <p:sp>
         <p:nvSpPr>
-          <p:cNvPr id="13" name="Text 11"/>
-          <p:cNvSpPr/>
-          <p:nvPr/>
-        </p:nvSpPr>
-        <p:spPr>
-          <a:xfrm>
-            <a:off x="8074152" y="1563624"/>
-            <a:ext cx="2825496" cy="256032"/>
+          <p:cNvPr id="11" name="Text 9"/>
+          <p:cNvSpPr/>
+          <p:nvPr/>
+        </p:nvSpPr>
+        <p:spPr>
+          <a:xfrm>
+            <a:off x="7799832" y="1472184"/>
+            <a:ext cx="3145536" cy="256032"/>
           </a:xfrm>
           <a:prstGeom prst="rect">
             <a:avLst/>
@@ -7062,7 +7803,7 @@
                 <a:ea typeface="Aptos" pitchFamily="34" charset="-122"/>
                 <a:cs typeface="Aptos" pitchFamily="34" charset="-120"/>
               </a:rPr>
-              <a:t>Key idea</a:t>
+              <a:t>Data decision</a:t>
             </a:r>
             <a:endParaRPr lang="en-US" sz="1300" dirty="0"/>
           </a:p>
@@ -7070,14 +7811,14 @@
       </p:sp>
       <p:sp>
         <p:nvSpPr>
-          <p:cNvPr id="14" name="Text 12"/>
-          <p:cNvSpPr/>
-          <p:nvPr/>
-        </p:nvSpPr>
-        <p:spPr>
-          <a:xfrm>
-            <a:off x="8074152" y="1920240"/>
-            <a:ext cx="2825496" cy="1188720"/>
+          <p:cNvPr id="12" name="Text 10"/>
+          <p:cNvSpPr/>
+          <p:nvPr/>
+        </p:nvSpPr>
+        <p:spPr>
+          <a:xfrm>
+            <a:off x="7799832" y="1828800"/>
+            <a:ext cx="3145536" cy="685800"/>
           </a:xfrm>
           <a:prstGeom prst="rect">
             <a:avLst/>
@@ -7111,21 +7852,212 @@
       </p:sp>
       <p:sp>
         <p:nvSpPr>
-          <p:cNvPr id="15" name="Shape 13"/>
-          <p:cNvSpPr/>
-          <p:nvPr/>
-        </p:nvSpPr>
-        <p:spPr>
-          <a:xfrm>
-            <a:off x="7909560" y="3520440"/>
-            <a:ext cx="3154680" cy="1737360"/>
+          <p:cNvPr id="13" name="Shape 11"/>
+          <p:cNvSpPr/>
+          <p:nvPr/>
+        </p:nvSpPr>
+        <p:spPr>
+          <a:xfrm>
+            <a:off x="7635240" y="2788920"/>
+            <a:ext cx="3474720" cy="1536192"/>
           </a:xfrm>
           <a:prstGeom prst="roundRect">
             <a:avLst>
-              <a:gd name="adj" fmla="val 6316"/>
+              <a:gd name="adj" fmla="val 7143"/>
             </a:avLst>
           </a:prstGeom>
           <a:solidFill>
+            <a:srgbClr val="FFFFFF">
+              <a:alpha val="88000"/>
+            </a:srgbClr>
+          </a:solidFill>
+          <a:ln w="12700">
+            <a:solidFill>
+              <a:srgbClr val="D6E8F2"/>
+            </a:solidFill>
+            <a:prstDash val="solid"/>
+          </a:ln>
+        </p:spPr>
+      </p:sp>
+      <p:sp>
+        <p:nvSpPr>
+          <p:cNvPr id="14" name="Shape 12"/>
+          <p:cNvSpPr/>
+          <p:nvPr/>
+        </p:nvSpPr>
+        <p:spPr>
+          <a:xfrm>
+            <a:off x="8138160" y="3474720"/>
+            <a:ext cx="256032" cy="411480"/>
+          </a:xfrm>
+          <a:prstGeom prst="rect">
+            <a:avLst/>
+          </a:prstGeom>
+          <a:solidFill>
+            <a:srgbClr val="0068B7"/>
+          </a:solidFill>
+          <a:ln w="12700">
+            <a:solidFill>
+              <a:srgbClr val="0068B7"/>
+            </a:solidFill>
+            <a:prstDash val="solid"/>
+          </a:ln>
+        </p:spPr>
+      </p:sp>
+      <p:sp>
+        <p:nvSpPr>
+          <p:cNvPr id="15" name="Shape 13"/>
+          <p:cNvSpPr/>
+          <p:nvPr/>
+        </p:nvSpPr>
+        <p:spPr>
+          <a:xfrm>
+            <a:off x="8577072" y="3172968"/>
+            <a:ext cx="256032" cy="713232"/>
+          </a:xfrm>
+          <a:prstGeom prst="rect">
+            <a:avLst/>
+          </a:prstGeom>
+          <a:solidFill>
+            <a:srgbClr val="2F8A28"/>
+          </a:solidFill>
+          <a:ln w="12700">
+            <a:solidFill>
+              <a:srgbClr val="2F8A28"/>
+            </a:solidFill>
+            <a:prstDash val="solid"/>
+          </a:ln>
+        </p:spPr>
+      </p:sp>
+      <p:sp>
+        <p:nvSpPr>
+          <p:cNvPr id="16" name="Shape 14"/>
+          <p:cNvSpPr/>
+          <p:nvPr/>
+        </p:nvSpPr>
+        <p:spPr>
+          <a:xfrm>
+            <a:off x="9015984" y="2880360"/>
+            <a:ext cx="256032" cy="1005840"/>
+          </a:xfrm>
+          <a:prstGeom prst="rect">
+            <a:avLst/>
+          </a:prstGeom>
+          <a:solidFill>
+            <a:srgbClr val="D69A2D"/>
+          </a:solidFill>
+          <a:ln w="12700">
+            <a:solidFill>
+              <a:srgbClr val="D69A2D"/>
+            </a:solidFill>
+            <a:prstDash val="solid"/>
+          </a:ln>
+        </p:spPr>
+      </p:sp>
+      <p:sp>
+        <p:nvSpPr>
+          <p:cNvPr id="17" name="Shape 15"/>
+          <p:cNvSpPr/>
+          <p:nvPr/>
+        </p:nvSpPr>
+        <p:spPr>
+          <a:xfrm>
+            <a:off x="9454896" y="3319272"/>
+            <a:ext cx="256032" cy="566928"/>
+          </a:xfrm>
+          <a:prstGeom prst="rect">
+            <a:avLst/>
+          </a:prstGeom>
+          <a:solidFill>
+            <a:srgbClr val="6A4CA3"/>
+          </a:solidFill>
+          <a:ln w="12700">
+            <a:solidFill>
+              <a:srgbClr val="6A4CA3"/>
+            </a:solidFill>
+            <a:prstDash val="solid"/>
+          </a:ln>
+        </p:spPr>
+      </p:sp>
+      <p:sp>
+        <p:nvSpPr>
+          <p:cNvPr id="18" name="Shape 16"/>
+          <p:cNvSpPr/>
+          <p:nvPr/>
+        </p:nvSpPr>
+        <p:spPr>
+          <a:xfrm>
+            <a:off x="8019288" y="3886200"/>
+            <a:ext cx="2706624" cy="0"/>
+          </a:xfrm>
+          <a:prstGeom prst="line">
+            <a:avLst/>
+          </a:prstGeom>
+          <a:noFill/>
+          <a:ln w="15240">
+            <a:solidFill>
+              <a:srgbClr val="003A63"/>
+            </a:solidFill>
+            <a:prstDash val="solid"/>
+          </a:ln>
+        </p:spPr>
+      </p:sp>
+      <p:sp>
+        <p:nvSpPr>
+          <p:cNvPr id="19" name="Text 17"/>
+          <p:cNvSpPr/>
+          <p:nvPr/>
+        </p:nvSpPr>
+        <p:spPr>
+          <a:xfrm>
+            <a:off x="7863840" y="3017520"/>
+            <a:ext cx="3017520" cy="201168"/>
+          </a:xfrm>
+          <a:prstGeom prst="rect">
+            <a:avLst/>
+          </a:prstGeom>
+          <a:noFill/>
+          <a:ln/>
+        </p:spPr>
+        <p:txBody>
+          <a:bodyPr wrap="square" lIns="0" tIns="0" rIns="0" bIns="0" rtlCol="0" anchor="ctr"/>
+          <a:lstStyle/>
+          <a:p>
+            <a:pPr algn="ctr" indent="0" marL="0">
+              <a:buNone/>
+            </a:pPr>
+            <a:r>
+              <a:rPr lang="en-US" sz="1050" b="1" dirty="0">
+                <a:solidFill>
+                  <a:srgbClr val="003A63"/>
+                </a:solidFill>
+                <a:latin typeface="Aptos" pitchFamily="34" charset="0"/>
+                <a:ea typeface="Aptos" pitchFamily="34" charset="-122"/>
+                <a:cs typeface="Aptos" pitchFamily="34" charset="-120"/>
+              </a:rPr>
+              <a:t>Measure and monitor</a:t>
+            </a:r>
+            <a:endParaRPr lang="en-US" sz="1050" dirty="0"/>
+          </a:p>
+        </p:txBody>
+      </p:sp>
+      <p:sp>
+        <p:nvSpPr>
+          <p:cNvPr id="20" name="Shape 18"/>
+          <p:cNvSpPr/>
+          <p:nvPr/>
+        </p:nvSpPr>
+        <p:spPr>
+          <a:xfrm>
+            <a:off x="7635240" y="4498848"/>
+            <a:ext cx="3474720" cy="1143000"/>
+          </a:xfrm>
+          <a:prstGeom prst="roundRect">
+            <a:avLst>
+              <a:gd name="adj" fmla="val 9600"/>
+            </a:avLst>
+          </a:prstGeom>
+          <a:solidFill>
             <a:srgbClr val="EAF6F8"/>
           </a:solidFill>
           <a:ln w="12700">
@@ -7138,14 +8070,14 @@
       </p:sp>
       <p:sp>
         <p:nvSpPr>
-          <p:cNvPr id="16" name="Text 14"/>
-          <p:cNvSpPr/>
-          <p:nvPr/>
-        </p:nvSpPr>
-        <p:spPr>
-          <a:xfrm>
-            <a:off x="8074152" y="3666744"/>
-            <a:ext cx="2825496" cy="256032"/>
+          <p:cNvPr id="21" name="Text 19"/>
+          <p:cNvSpPr/>
+          <p:nvPr/>
+        </p:nvSpPr>
+        <p:spPr>
+          <a:xfrm>
+            <a:off x="7799832" y="4645152"/>
+            <a:ext cx="3145536" cy="256032"/>
           </a:xfrm>
           <a:prstGeom prst="rect">
             <a:avLst/>
@@ -7169,7 +8101,7 @@
                 <a:ea typeface="Aptos" pitchFamily="34" charset="-122"/>
                 <a:cs typeface="Aptos" pitchFamily="34" charset="-120"/>
               </a:rPr>
-              <a:t>Use this for</a:t>
+              <a:t>How to validate</a:t>
             </a:r>
             <a:endParaRPr lang="en-US" sz="1300" dirty="0"/>
           </a:p>
@@ -7177,14 +8109,14 @@
       </p:sp>
       <p:sp>
         <p:nvSpPr>
-          <p:cNvPr id="17" name="Text 15"/>
-          <p:cNvSpPr/>
-          <p:nvPr/>
-        </p:nvSpPr>
-        <p:spPr>
-          <a:xfrm>
-            <a:off x="8074152" y="4023360"/>
-            <a:ext cx="2825496" cy="1097280"/>
+          <p:cNvPr id="22" name="Text 20"/>
+          <p:cNvSpPr/>
+          <p:nvPr/>
+        </p:nvSpPr>
+        <p:spPr>
+          <a:xfrm>
+            <a:off x="7799832" y="5001768"/>
+            <a:ext cx="3145536" cy="502920"/>
           </a:xfrm>
           <a:prstGeom prst="rect">
             <a:avLst/>
@@ -7210,7 +8142,7 @@
                 <a:ea typeface="Aptos" pitchFamily="34" charset="-122"/>
                 <a:cs typeface="Aptos" pitchFamily="34" charset="-120"/>
               </a:rPr>
-              <a:t>Connect the concept to public health decisions, safeguards, documentation, or implementation work.</a:t>
+              <a:t>Connect the concept to data quality, model performance, validation evidence, monitoring measures, and decisions that remain under human control.</a:t>
             </a:r>
             <a:endParaRPr lang="en-US" sz="1550" dirty="0"/>
           </a:p>
@@ -7384,8 +8316,8 @@
         </p:nvSpPr>
         <p:spPr>
           <a:xfrm>
-            <a:off x="9966960" y="6537960"/>
-            <a:ext cx="1645920" cy="201168"/>
+            <a:off x="9646920" y="6537960"/>
+            <a:ext cx="1965960" cy="201168"/>
           </a:xfrm>
           <a:prstGeom prst="rect">
             <a:avLst/>
@@ -7409,7 +8341,7 @@
                 <a:ea typeface="Aptos" pitchFamily="34" charset="-122"/>
                 <a:cs typeface="Aptos" pitchFamily="34" charset="-120"/>
               </a:rPr>
-              <a:t>Â© Paula Soper</a:t>
+              <a:t>Copyright Paula Soper</a:t>
             </a:r>
             <a:endParaRPr lang="en-US" sz="800" dirty="0"/>
           </a:p>
@@ -7504,7 +8436,7 @@
         <p:spPr>
           <a:xfrm>
             <a:off x="868680" y="1508760"/>
-            <a:ext cx="6537960" cy="4160520"/>
+            <a:ext cx="6309360" cy="4160520"/>
           </a:xfrm>
           <a:prstGeom prst="rect">
             <a:avLst/>
@@ -7541,12 +8473,12 @@
         </p:nvSpPr>
         <p:spPr>
           <a:xfrm>
-            <a:off x="7909560" y="1417320"/>
-            <a:ext cx="3154680" cy="1828800"/>
+            <a:off x="7635240" y="1325880"/>
+            <a:ext cx="3474720" cy="1325880"/>
           </a:xfrm>
           <a:prstGeom prst="roundRect">
             <a:avLst>
-              <a:gd name="adj" fmla="val 6000"/>
+              <a:gd name="adj" fmla="val 8276"/>
             </a:avLst>
           </a:prstGeom>
           <a:solidFill>
@@ -7568,8 +8500,8 @@
         </p:nvSpPr>
         <p:spPr>
           <a:xfrm>
-            <a:off x="8074152" y="1563624"/>
-            <a:ext cx="2825496" cy="256032"/>
+            <a:off x="7799832" y="1472184"/>
+            <a:ext cx="3145536" cy="256032"/>
           </a:xfrm>
           <a:prstGeom prst="rect">
             <a:avLst/>
@@ -7593,7 +8525,7 @@
                 <a:ea typeface="Aptos" pitchFamily="34" charset="-122"/>
                 <a:cs typeface="Aptos" pitchFamily="34" charset="-120"/>
               </a:rPr>
-              <a:t>Key idea</a:t>
+              <a:t>Data decision</a:t>
             </a:r>
             <a:endParaRPr lang="en-US" sz="1300" dirty="0"/>
           </a:p>
@@ -7607,8 +8539,8 @@
         </p:nvSpPr>
         <p:spPr>
           <a:xfrm>
-            <a:off x="8074152" y="1920240"/>
-            <a:ext cx="2825496" cy="1188720"/>
+            <a:off x="7799832" y="1828800"/>
+            <a:ext cx="3145536" cy="685800"/>
           </a:xfrm>
           <a:prstGeom prst="rect">
             <a:avLst/>
@@ -7648,15 +8580,206 @@
         </p:nvSpPr>
         <p:spPr>
           <a:xfrm>
-            <a:off x="7909560" y="3520440"/>
-            <a:ext cx="3154680" cy="1737360"/>
+            <a:off x="7635240" y="2788920"/>
+            <a:ext cx="3474720" cy="1536192"/>
           </a:xfrm>
           <a:prstGeom prst="roundRect">
             <a:avLst>
-              <a:gd name="adj" fmla="val 6316"/>
+              <a:gd name="adj" fmla="val 7143"/>
             </a:avLst>
           </a:prstGeom>
           <a:solidFill>
+            <a:srgbClr val="FFFFFF">
+              <a:alpha val="88000"/>
+            </a:srgbClr>
+          </a:solidFill>
+          <a:ln w="12700">
+            <a:solidFill>
+              <a:srgbClr val="D6E8F2"/>
+            </a:solidFill>
+            <a:prstDash val="solid"/>
+          </a:ln>
+        </p:spPr>
+      </p:sp>
+      <p:sp>
+        <p:nvSpPr>
+          <p:cNvPr id="14" name="Shape 12"/>
+          <p:cNvSpPr/>
+          <p:nvPr/>
+        </p:nvSpPr>
+        <p:spPr>
+          <a:xfrm>
+            <a:off x="8138160" y="3474720"/>
+            <a:ext cx="256032" cy="411480"/>
+          </a:xfrm>
+          <a:prstGeom prst="rect">
+            <a:avLst/>
+          </a:prstGeom>
+          <a:solidFill>
+            <a:srgbClr val="0068B7"/>
+          </a:solidFill>
+          <a:ln w="12700">
+            <a:solidFill>
+              <a:srgbClr val="0068B7"/>
+            </a:solidFill>
+            <a:prstDash val="solid"/>
+          </a:ln>
+        </p:spPr>
+      </p:sp>
+      <p:sp>
+        <p:nvSpPr>
+          <p:cNvPr id="15" name="Shape 13"/>
+          <p:cNvSpPr/>
+          <p:nvPr/>
+        </p:nvSpPr>
+        <p:spPr>
+          <a:xfrm>
+            <a:off x="8577072" y="3172968"/>
+            <a:ext cx="256032" cy="713232"/>
+          </a:xfrm>
+          <a:prstGeom prst="rect">
+            <a:avLst/>
+          </a:prstGeom>
+          <a:solidFill>
+            <a:srgbClr val="2F8A28"/>
+          </a:solidFill>
+          <a:ln w="12700">
+            <a:solidFill>
+              <a:srgbClr val="2F8A28"/>
+            </a:solidFill>
+            <a:prstDash val="solid"/>
+          </a:ln>
+        </p:spPr>
+      </p:sp>
+      <p:sp>
+        <p:nvSpPr>
+          <p:cNvPr id="16" name="Shape 14"/>
+          <p:cNvSpPr/>
+          <p:nvPr/>
+        </p:nvSpPr>
+        <p:spPr>
+          <a:xfrm>
+            <a:off x="9015984" y="2880360"/>
+            <a:ext cx="256032" cy="1005840"/>
+          </a:xfrm>
+          <a:prstGeom prst="rect">
+            <a:avLst/>
+          </a:prstGeom>
+          <a:solidFill>
+            <a:srgbClr val="D69A2D"/>
+          </a:solidFill>
+          <a:ln w="12700">
+            <a:solidFill>
+              <a:srgbClr val="D69A2D"/>
+            </a:solidFill>
+            <a:prstDash val="solid"/>
+          </a:ln>
+        </p:spPr>
+      </p:sp>
+      <p:sp>
+        <p:nvSpPr>
+          <p:cNvPr id="17" name="Shape 15"/>
+          <p:cNvSpPr/>
+          <p:nvPr/>
+        </p:nvSpPr>
+        <p:spPr>
+          <a:xfrm>
+            <a:off x="9454896" y="3319272"/>
+            <a:ext cx="256032" cy="566928"/>
+          </a:xfrm>
+          <a:prstGeom prst="rect">
+            <a:avLst/>
+          </a:prstGeom>
+          <a:solidFill>
+            <a:srgbClr val="6A4CA3"/>
+          </a:solidFill>
+          <a:ln w="12700">
+            <a:solidFill>
+              <a:srgbClr val="6A4CA3"/>
+            </a:solidFill>
+            <a:prstDash val="solid"/>
+          </a:ln>
+        </p:spPr>
+      </p:sp>
+      <p:sp>
+        <p:nvSpPr>
+          <p:cNvPr id="18" name="Shape 16"/>
+          <p:cNvSpPr/>
+          <p:nvPr/>
+        </p:nvSpPr>
+        <p:spPr>
+          <a:xfrm>
+            <a:off x="8019288" y="3886200"/>
+            <a:ext cx="2706624" cy="0"/>
+          </a:xfrm>
+          <a:prstGeom prst="line">
+            <a:avLst/>
+          </a:prstGeom>
+          <a:noFill/>
+          <a:ln w="15240">
+            <a:solidFill>
+              <a:srgbClr val="003A63"/>
+            </a:solidFill>
+            <a:prstDash val="solid"/>
+          </a:ln>
+        </p:spPr>
+      </p:sp>
+      <p:sp>
+        <p:nvSpPr>
+          <p:cNvPr id="19" name="Text 17"/>
+          <p:cNvSpPr/>
+          <p:nvPr/>
+        </p:nvSpPr>
+        <p:spPr>
+          <a:xfrm>
+            <a:off x="7863840" y="3017520"/>
+            <a:ext cx="3017520" cy="201168"/>
+          </a:xfrm>
+          <a:prstGeom prst="rect">
+            <a:avLst/>
+          </a:prstGeom>
+          <a:noFill/>
+          <a:ln/>
+        </p:spPr>
+        <p:txBody>
+          <a:bodyPr wrap="square" lIns="0" tIns="0" rIns="0" bIns="0" rtlCol="0" anchor="ctr"/>
+          <a:lstStyle/>
+          <a:p>
+            <a:pPr algn="ctr" indent="0" marL="0">
+              <a:buNone/>
+            </a:pPr>
+            <a:r>
+              <a:rPr lang="en-US" sz="1050" b="1" dirty="0">
+                <a:solidFill>
+                  <a:srgbClr val="003A63"/>
+                </a:solidFill>
+                <a:latin typeface="Aptos" pitchFamily="34" charset="0"/>
+                <a:ea typeface="Aptos" pitchFamily="34" charset="-122"/>
+                <a:cs typeface="Aptos" pitchFamily="34" charset="-120"/>
+              </a:rPr>
+              <a:t>Measure and monitor</a:t>
+            </a:r>
+            <a:endParaRPr lang="en-US" sz="1050" dirty="0"/>
+          </a:p>
+        </p:txBody>
+      </p:sp>
+      <p:sp>
+        <p:nvSpPr>
+          <p:cNvPr id="20" name="Shape 18"/>
+          <p:cNvSpPr/>
+          <p:nvPr/>
+        </p:nvSpPr>
+        <p:spPr>
+          <a:xfrm>
+            <a:off x="7635240" y="4498848"/>
+            <a:ext cx="3474720" cy="1143000"/>
+          </a:xfrm>
+          <a:prstGeom prst="roundRect">
+            <a:avLst>
+              <a:gd name="adj" fmla="val 9600"/>
+            </a:avLst>
+          </a:prstGeom>
+          <a:solidFill>
             <a:srgbClr val="EAF6F8"/>
           </a:solidFill>
           <a:ln w="12700">
@@ -7669,14 +8792,14 @@
       </p:sp>
       <p:sp>
         <p:nvSpPr>
-          <p:cNvPr id="14" name="Text 12"/>
-          <p:cNvSpPr/>
-          <p:nvPr/>
-        </p:nvSpPr>
-        <p:spPr>
-          <a:xfrm>
-            <a:off x="8074152" y="3666744"/>
-            <a:ext cx="2825496" cy="256032"/>
+          <p:cNvPr id="21" name="Text 19"/>
+          <p:cNvSpPr/>
+          <p:nvPr/>
+        </p:nvSpPr>
+        <p:spPr>
+          <a:xfrm>
+            <a:off x="7799832" y="4645152"/>
+            <a:ext cx="3145536" cy="256032"/>
           </a:xfrm>
           <a:prstGeom prst="rect">
             <a:avLst/>
@@ -7700,7 +8823,7 @@
                 <a:ea typeface="Aptos" pitchFamily="34" charset="-122"/>
                 <a:cs typeface="Aptos" pitchFamily="34" charset="-120"/>
               </a:rPr>
-              <a:t>Use this for</a:t>
+              <a:t>How to validate</a:t>
             </a:r>
             <a:endParaRPr lang="en-US" sz="1300" dirty="0"/>
           </a:p>
@@ -7708,14 +8831,14 @@
       </p:sp>
       <p:sp>
         <p:nvSpPr>
-          <p:cNvPr id="15" name="Text 13"/>
-          <p:cNvSpPr/>
-          <p:nvPr/>
-        </p:nvSpPr>
-        <p:spPr>
-          <a:xfrm>
-            <a:off x="8074152" y="4023360"/>
-            <a:ext cx="2825496" cy="1097280"/>
+          <p:cNvPr id="22" name="Text 20"/>
+          <p:cNvSpPr/>
+          <p:nvPr/>
+        </p:nvSpPr>
+        <p:spPr>
+          <a:xfrm>
+            <a:off x="7799832" y="5001768"/>
+            <a:ext cx="3145536" cy="502920"/>
           </a:xfrm>
           <a:prstGeom prst="rect">
             <a:avLst/>
@@ -7741,7 +8864,7 @@
                 <a:ea typeface="Aptos" pitchFamily="34" charset="-122"/>
                 <a:cs typeface="Aptos" pitchFamily="34" charset="-120"/>
               </a:rPr>
-              <a:t>Connect the concept to public health decisions, safeguards, documentation, or implementation work.</a:t>
+              <a:t>Connect the concept to data quality, model performance, validation evidence, monitoring measures, and decisions that remain under human control.</a:t>
             </a:r>
             <a:endParaRPr lang="en-US" sz="1550" dirty="0"/>
           </a:p>
@@ -7915,8 +9038,8 @@
         </p:nvSpPr>
         <p:spPr>
           <a:xfrm>
-            <a:off x="9966960" y="6537960"/>
-            <a:ext cx="1645920" cy="201168"/>
+            <a:off x="9646920" y="6537960"/>
+            <a:ext cx="1965960" cy="201168"/>
           </a:xfrm>
           <a:prstGeom prst="rect">
             <a:avLst/>
@@ -7940,7 +9063,7 @@
                 <a:ea typeface="Aptos" pitchFamily="34" charset="-122"/>
                 <a:cs typeface="Aptos" pitchFamily="34" charset="-120"/>
               </a:rPr>
-              <a:t>Â© Paula Soper</a:t>
+              <a:t>Copyright Paula Soper</a:t>
             </a:r>
             <a:endParaRPr lang="en-US" sz="800" dirty="0"/>
           </a:p>
@@ -7987,77 +9110,13 @@
       </p:sp>
       <p:sp>
         <p:nvSpPr>
-          <p:cNvPr id="8" name="Shape 6"/>
+          <p:cNvPr id="8" name="Text 6"/>
           <p:cNvSpPr/>
           <p:nvPr/>
         </p:nvSpPr>
         <p:spPr>
           <a:xfrm>
             <a:off x="640080" y="658368"/>
-            <a:ext cx="420624" cy="420624"/>
-          </a:xfrm>
-          <a:prstGeom prst="ellipse">
-            <a:avLst/>
-          </a:prstGeom>
-          <a:solidFill>
-            <a:srgbClr val="0068B7"/>
-          </a:solidFill>
-          <a:ln w="12700">
-            <a:solidFill>
-              <a:srgbClr val="0068B7"/>
-            </a:solidFill>
-            <a:prstDash val="solid"/>
-          </a:ln>
-        </p:spPr>
-      </p:sp>
-      <p:sp>
-        <p:nvSpPr>
-          <p:cNvPr id="9" name="Text 7"/>
-          <p:cNvSpPr/>
-          <p:nvPr/>
-        </p:nvSpPr>
-        <p:spPr>
-          <a:xfrm>
-            <a:off x="640080" y="731520"/>
-            <a:ext cx="420624" cy="164592"/>
-          </a:xfrm>
-          <a:prstGeom prst="rect">
-            <a:avLst/>
-          </a:prstGeom>
-          <a:noFill/>
-          <a:ln/>
-        </p:spPr>
-        <p:txBody>
-          <a:bodyPr wrap="square" lIns="0" tIns="0" rIns="0" bIns="0" rtlCol="0" anchor="ctr"/>
-          <a:lstStyle/>
-          <a:p>
-            <a:pPr algn="ctr" indent="0" marL="0">
-              <a:buNone/>
-            </a:pPr>
-            <a:r>
-              <a:rPr lang="en-US" sz="1100" b="1" dirty="0">
-                <a:solidFill>
-                  <a:srgbClr val="FFFFFF"/>
-                </a:solidFill>
-                <a:latin typeface="Aptos" pitchFamily="34" charset="0"/>
-                <a:ea typeface="Aptos" pitchFamily="34" charset="-122"/>
-                <a:cs typeface="Aptos" pitchFamily="34" charset="-120"/>
-              </a:rPr>
-              <a:t>12</a:t>
-            </a:r>
-            <a:endParaRPr lang="en-US" sz="1100" dirty="0"/>
-          </a:p>
-        </p:txBody>
-      </p:sp>
-      <p:sp>
-        <p:nvSpPr>
-          <p:cNvPr id="10" name="Text 8"/>
-          <p:cNvSpPr/>
-          <p:nvPr/>
-        </p:nvSpPr>
-        <p:spPr>
-          <a:xfrm>
-            <a:off x="640080" y="621792"/>
             <a:ext cx="10881360" cy="713232"/>
           </a:xfrm>
           <a:prstGeom prst="rect">
@@ -8092,14 +9151,14 @@
       </p:sp>
       <p:sp>
         <p:nvSpPr>
-          <p:cNvPr id="11" name="Text 9"/>
+          <p:cNvPr id="9" name="Text 7"/>
           <p:cNvSpPr/>
           <p:nvPr/>
         </p:nvSpPr>
         <p:spPr>
           <a:xfrm>
             <a:off x="868680" y="1508760"/>
-            <a:ext cx="6537960" cy="4160520"/>
+            <a:ext cx="6309360" cy="4160520"/>
           </a:xfrm>
           <a:prstGeom prst="rect">
             <a:avLst/>
@@ -8158,18 +9217,18 @@
       </p:sp>
       <p:sp>
         <p:nvSpPr>
-          <p:cNvPr id="12" name="Shape 10"/>
-          <p:cNvSpPr/>
-          <p:nvPr/>
-        </p:nvSpPr>
-        <p:spPr>
-          <a:xfrm>
-            <a:off x="7909560" y="1417320"/>
-            <a:ext cx="3154680" cy="1828800"/>
+          <p:cNvPr id="10" name="Shape 8"/>
+          <p:cNvSpPr/>
+          <p:nvPr/>
+        </p:nvSpPr>
+        <p:spPr>
+          <a:xfrm>
+            <a:off x="7635240" y="1325880"/>
+            <a:ext cx="3474720" cy="1325880"/>
           </a:xfrm>
           <a:prstGeom prst="roundRect">
             <a:avLst>
-              <a:gd name="adj" fmla="val 6000"/>
+              <a:gd name="adj" fmla="val 8276"/>
             </a:avLst>
           </a:prstGeom>
           <a:solidFill>
@@ -8185,14 +9244,14 @@
       </p:sp>
       <p:sp>
         <p:nvSpPr>
-          <p:cNvPr id="13" name="Text 11"/>
-          <p:cNvSpPr/>
-          <p:nvPr/>
-        </p:nvSpPr>
-        <p:spPr>
-          <a:xfrm>
-            <a:off x="8074152" y="1563624"/>
-            <a:ext cx="2825496" cy="256032"/>
+          <p:cNvPr id="11" name="Text 9"/>
+          <p:cNvSpPr/>
+          <p:nvPr/>
+        </p:nvSpPr>
+        <p:spPr>
+          <a:xfrm>
+            <a:off x="7799832" y="1472184"/>
+            <a:ext cx="3145536" cy="256032"/>
           </a:xfrm>
           <a:prstGeom prst="rect">
             <a:avLst/>
@@ -8216,7 +9275,7 @@
                 <a:ea typeface="Aptos" pitchFamily="34" charset="-122"/>
                 <a:cs typeface="Aptos" pitchFamily="34" charset="-120"/>
               </a:rPr>
-              <a:t>Key idea</a:t>
+              <a:t>Data decision</a:t>
             </a:r>
             <a:endParaRPr lang="en-US" sz="1300" dirty="0"/>
           </a:p>
@@ -8224,14 +9283,14 @@
       </p:sp>
       <p:sp>
         <p:nvSpPr>
-          <p:cNvPr id="14" name="Text 12"/>
-          <p:cNvSpPr/>
-          <p:nvPr/>
-        </p:nvSpPr>
-        <p:spPr>
-          <a:xfrm>
-            <a:off x="8074152" y="1920240"/>
-            <a:ext cx="2825496" cy="1188720"/>
+          <p:cNvPr id="12" name="Text 10"/>
+          <p:cNvSpPr/>
+          <p:nvPr/>
+        </p:nvSpPr>
+        <p:spPr>
+          <a:xfrm>
+            <a:off x="7799832" y="1828800"/>
+            <a:ext cx="3145536" cy="685800"/>
           </a:xfrm>
           <a:prstGeom prst="rect">
             <a:avLst/>
@@ -8265,21 +9324,212 @@
       </p:sp>
       <p:sp>
         <p:nvSpPr>
-          <p:cNvPr id="15" name="Shape 13"/>
-          <p:cNvSpPr/>
-          <p:nvPr/>
-        </p:nvSpPr>
-        <p:spPr>
-          <a:xfrm>
-            <a:off x="7909560" y="3520440"/>
-            <a:ext cx="3154680" cy="1737360"/>
+          <p:cNvPr id="13" name="Shape 11"/>
+          <p:cNvSpPr/>
+          <p:nvPr/>
+        </p:nvSpPr>
+        <p:spPr>
+          <a:xfrm>
+            <a:off x="7635240" y="2788920"/>
+            <a:ext cx="3474720" cy="1536192"/>
           </a:xfrm>
           <a:prstGeom prst="roundRect">
             <a:avLst>
-              <a:gd name="adj" fmla="val 6316"/>
+              <a:gd name="adj" fmla="val 7143"/>
             </a:avLst>
           </a:prstGeom>
           <a:solidFill>
+            <a:srgbClr val="FFFFFF">
+              <a:alpha val="88000"/>
+            </a:srgbClr>
+          </a:solidFill>
+          <a:ln w="12700">
+            <a:solidFill>
+              <a:srgbClr val="D6E8F2"/>
+            </a:solidFill>
+            <a:prstDash val="solid"/>
+          </a:ln>
+        </p:spPr>
+      </p:sp>
+      <p:sp>
+        <p:nvSpPr>
+          <p:cNvPr id="14" name="Shape 12"/>
+          <p:cNvSpPr/>
+          <p:nvPr/>
+        </p:nvSpPr>
+        <p:spPr>
+          <a:xfrm>
+            <a:off x="8138160" y="3474720"/>
+            <a:ext cx="256032" cy="411480"/>
+          </a:xfrm>
+          <a:prstGeom prst="rect">
+            <a:avLst/>
+          </a:prstGeom>
+          <a:solidFill>
+            <a:srgbClr val="0068B7"/>
+          </a:solidFill>
+          <a:ln w="12700">
+            <a:solidFill>
+              <a:srgbClr val="0068B7"/>
+            </a:solidFill>
+            <a:prstDash val="solid"/>
+          </a:ln>
+        </p:spPr>
+      </p:sp>
+      <p:sp>
+        <p:nvSpPr>
+          <p:cNvPr id="15" name="Shape 13"/>
+          <p:cNvSpPr/>
+          <p:nvPr/>
+        </p:nvSpPr>
+        <p:spPr>
+          <a:xfrm>
+            <a:off x="8577072" y="3172968"/>
+            <a:ext cx="256032" cy="713232"/>
+          </a:xfrm>
+          <a:prstGeom prst="rect">
+            <a:avLst/>
+          </a:prstGeom>
+          <a:solidFill>
+            <a:srgbClr val="2F8A28"/>
+          </a:solidFill>
+          <a:ln w="12700">
+            <a:solidFill>
+              <a:srgbClr val="2F8A28"/>
+            </a:solidFill>
+            <a:prstDash val="solid"/>
+          </a:ln>
+        </p:spPr>
+      </p:sp>
+      <p:sp>
+        <p:nvSpPr>
+          <p:cNvPr id="16" name="Shape 14"/>
+          <p:cNvSpPr/>
+          <p:nvPr/>
+        </p:nvSpPr>
+        <p:spPr>
+          <a:xfrm>
+            <a:off x="9015984" y="2880360"/>
+            <a:ext cx="256032" cy="1005840"/>
+          </a:xfrm>
+          <a:prstGeom prst="rect">
+            <a:avLst/>
+          </a:prstGeom>
+          <a:solidFill>
+            <a:srgbClr val="D69A2D"/>
+          </a:solidFill>
+          <a:ln w="12700">
+            <a:solidFill>
+              <a:srgbClr val="D69A2D"/>
+            </a:solidFill>
+            <a:prstDash val="solid"/>
+          </a:ln>
+        </p:spPr>
+      </p:sp>
+      <p:sp>
+        <p:nvSpPr>
+          <p:cNvPr id="17" name="Shape 15"/>
+          <p:cNvSpPr/>
+          <p:nvPr/>
+        </p:nvSpPr>
+        <p:spPr>
+          <a:xfrm>
+            <a:off x="9454896" y="3319272"/>
+            <a:ext cx="256032" cy="566928"/>
+          </a:xfrm>
+          <a:prstGeom prst="rect">
+            <a:avLst/>
+          </a:prstGeom>
+          <a:solidFill>
+            <a:srgbClr val="6A4CA3"/>
+          </a:solidFill>
+          <a:ln w="12700">
+            <a:solidFill>
+              <a:srgbClr val="6A4CA3"/>
+            </a:solidFill>
+            <a:prstDash val="solid"/>
+          </a:ln>
+        </p:spPr>
+      </p:sp>
+      <p:sp>
+        <p:nvSpPr>
+          <p:cNvPr id="18" name="Shape 16"/>
+          <p:cNvSpPr/>
+          <p:nvPr/>
+        </p:nvSpPr>
+        <p:spPr>
+          <a:xfrm>
+            <a:off x="8019288" y="3886200"/>
+            <a:ext cx="2706624" cy="0"/>
+          </a:xfrm>
+          <a:prstGeom prst="line">
+            <a:avLst/>
+          </a:prstGeom>
+          <a:noFill/>
+          <a:ln w="15240">
+            <a:solidFill>
+              <a:srgbClr val="003A63"/>
+            </a:solidFill>
+            <a:prstDash val="solid"/>
+          </a:ln>
+        </p:spPr>
+      </p:sp>
+      <p:sp>
+        <p:nvSpPr>
+          <p:cNvPr id="19" name="Text 17"/>
+          <p:cNvSpPr/>
+          <p:nvPr/>
+        </p:nvSpPr>
+        <p:spPr>
+          <a:xfrm>
+            <a:off x="7863840" y="3017520"/>
+            <a:ext cx="3017520" cy="201168"/>
+          </a:xfrm>
+          <a:prstGeom prst="rect">
+            <a:avLst/>
+          </a:prstGeom>
+          <a:noFill/>
+          <a:ln/>
+        </p:spPr>
+        <p:txBody>
+          <a:bodyPr wrap="square" lIns="0" tIns="0" rIns="0" bIns="0" rtlCol="0" anchor="ctr"/>
+          <a:lstStyle/>
+          <a:p>
+            <a:pPr algn="ctr" indent="0" marL="0">
+              <a:buNone/>
+            </a:pPr>
+            <a:r>
+              <a:rPr lang="en-US" sz="1050" b="1" dirty="0">
+                <a:solidFill>
+                  <a:srgbClr val="003A63"/>
+                </a:solidFill>
+                <a:latin typeface="Aptos" pitchFamily="34" charset="0"/>
+                <a:ea typeface="Aptos" pitchFamily="34" charset="-122"/>
+                <a:cs typeface="Aptos" pitchFamily="34" charset="-120"/>
+              </a:rPr>
+              <a:t>Measure and monitor</a:t>
+            </a:r>
+            <a:endParaRPr lang="en-US" sz="1050" dirty="0"/>
+          </a:p>
+        </p:txBody>
+      </p:sp>
+      <p:sp>
+        <p:nvSpPr>
+          <p:cNvPr id="20" name="Shape 18"/>
+          <p:cNvSpPr/>
+          <p:nvPr/>
+        </p:nvSpPr>
+        <p:spPr>
+          <a:xfrm>
+            <a:off x="7635240" y="4498848"/>
+            <a:ext cx="3474720" cy="1143000"/>
+          </a:xfrm>
+          <a:prstGeom prst="roundRect">
+            <a:avLst>
+              <a:gd name="adj" fmla="val 9600"/>
+            </a:avLst>
+          </a:prstGeom>
+          <a:solidFill>
             <a:srgbClr val="EAF6F8"/>
           </a:solidFill>
           <a:ln w="12700">
@@ -8292,14 +9542,14 @@
       </p:sp>
       <p:sp>
         <p:nvSpPr>
-          <p:cNvPr id="16" name="Text 14"/>
-          <p:cNvSpPr/>
-          <p:nvPr/>
-        </p:nvSpPr>
-        <p:spPr>
-          <a:xfrm>
-            <a:off x="8074152" y="3666744"/>
-            <a:ext cx="2825496" cy="256032"/>
+          <p:cNvPr id="21" name="Text 19"/>
+          <p:cNvSpPr/>
+          <p:nvPr/>
+        </p:nvSpPr>
+        <p:spPr>
+          <a:xfrm>
+            <a:off x="7799832" y="4645152"/>
+            <a:ext cx="3145536" cy="256032"/>
           </a:xfrm>
           <a:prstGeom prst="rect">
             <a:avLst/>
@@ -8323,7 +9573,7 @@
                 <a:ea typeface="Aptos" pitchFamily="34" charset="-122"/>
                 <a:cs typeface="Aptos" pitchFamily="34" charset="-120"/>
               </a:rPr>
-              <a:t>Use this for</a:t>
+              <a:t>How to validate</a:t>
             </a:r>
             <a:endParaRPr lang="en-US" sz="1300" dirty="0"/>
           </a:p>
@@ -8331,14 +9581,14 @@
       </p:sp>
       <p:sp>
         <p:nvSpPr>
-          <p:cNvPr id="17" name="Text 15"/>
-          <p:cNvSpPr/>
-          <p:nvPr/>
-        </p:nvSpPr>
-        <p:spPr>
-          <a:xfrm>
-            <a:off x="8074152" y="4023360"/>
-            <a:ext cx="2825496" cy="1097280"/>
+          <p:cNvPr id="22" name="Text 20"/>
+          <p:cNvSpPr/>
+          <p:nvPr/>
+        </p:nvSpPr>
+        <p:spPr>
+          <a:xfrm>
+            <a:off x="7799832" y="5001768"/>
+            <a:ext cx="3145536" cy="502920"/>
           </a:xfrm>
           <a:prstGeom prst="rect">
             <a:avLst/>
@@ -8364,7 +9614,7 @@
                 <a:ea typeface="Aptos" pitchFamily="34" charset="-122"/>
                 <a:cs typeface="Aptos" pitchFamily="34" charset="-120"/>
               </a:rPr>
-              <a:t>Connect the concept to public health decisions, safeguards, documentation, or implementation work.</a:t>
+              <a:t>Use the assignment to test whether you can explain the concept, apply it to a realistic public health situation, and identify what would need review before the work moves forward.</a:t>
             </a:r>
             <a:endParaRPr lang="en-US" sz="1550" dirty="0"/>
           </a:p>
@@ -8538,8 +9788,8 @@
         </p:nvSpPr>
         <p:spPr>
           <a:xfrm>
-            <a:off x="9966960" y="6537960"/>
-            <a:ext cx="1645920" cy="201168"/>
+            <a:off x="9646920" y="6537960"/>
+            <a:ext cx="1965960" cy="201168"/>
           </a:xfrm>
           <a:prstGeom prst="rect">
             <a:avLst/>
@@ -8563,7 +9813,7 @@
                 <a:ea typeface="Aptos" pitchFamily="34" charset="-122"/>
                 <a:cs typeface="Aptos" pitchFamily="34" charset="-120"/>
               </a:rPr>
-              <a:t>Â© Paula Soper</a:t>
+              <a:t>Copyright Paula Soper</a:t>
             </a:r>
             <a:endParaRPr lang="en-US" sz="800" dirty="0"/>
           </a:p>
@@ -8610,77 +9860,13 @@
       </p:sp>
       <p:sp>
         <p:nvSpPr>
-          <p:cNvPr id="8" name="Shape 6"/>
+          <p:cNvPr id="8" name="Text 6"/>
           <p:cNvSpPr/>
           <p:nvPr/>
         </p:nvSpPr>
         <p:spPr>
           <a:xfrm>
             <a:off x="640080" y="658368"/>
-            <a:ext cx="420624" cy="420624"/>
-          </a:xfrm>
-          <a:prstGeom prst="ellipse">
-            <a:avLst/>
-          </a:prstGeom>
-          <a:solidFill>
-            <a:srgbClr val="0068B7"/>
-          </a:solidFill>
-          <a:ln w="12700">
-            <a:solidFill>
-              <a:srgbClr val="0068B7"/>
-            </a:solidFill>
-            <a:prstDash val="solid"/>
-          </a:ln>
-        </p:spPr>
-      </p:sp>
-      <p:sp>
-        <p:nvSpPr>
-          <p:cNvPr id="9" name="Text 7"/>
-          <p:cNvSpPr/>
-          <p:nvPr/>
-        </p:nvSpPr>
-        <p:spPr>
-          <a:xfrm>
-            <a:off x="640080" y="731520"/>
-            <a:ext cx="420624" cy="164592"/>
-          </a:xfrm>
-          <a:prstGeom prst="rect">
-            <a:avLst/>
-          </a:prstGeom>
-          <a:noFill/>
-          <a:ln/>
-        </p:spPr>
-        <p:txBody>
-          <a:bodyPr wrap="square" lIns="0" tIns="0" rIns="0" bIns="0" rtlCol="0" anchor="ctr"/>
-          <a:lstStyle/>
-          <a:p>
-            <a:pPr algn="ctr" indent="0" marL="0">
-              <a:buNone/>
-            </a:pPr>
-            <a:r>
-              <a:rPr lang="en-US" sz="1100" b="1" dirty="0">
-                <a:solidFill>
-                  <a:srgbClr val="FFFFFF"/>
-                </a:solidFill>
-                <a:latin typeface="Aptos" pitchFamily="34" charset="0"/>
-                <a:ea typeface="Aptos" pitchFamily="34" charset="-122"/>
-                <a:cs typeface="Aptos" pitchFamily="34" charset="-120"/>
-              </a:rPr>
-              <a:t>13</a:t>
-            </a:r>
-            <a:endParaRPr lang="en-US" sz="1100" dirty="0"/>
-          </a:p>
-        </p:txBody>
-      </p:sp>
-      <p:sp>
-        <p:nvSpPr>
-          <p:cNvPr id="10" name="Text 8"/>
-          <p:cNvSpPr/>
-          <p:nvPr/>
-        </p:nvSpPr>
-        <p:spPr>
-          <a:xfrm>
-            <a:off x="640080" y="621792"/>
             <a:ext cx="10881360" cy="713232"/>
           </a:xfrm>
           <a:prstGeom prst="rect">
@@ -8715,14 +9901,14 @@
       </p:sp>
       <p:sp>
         <p:nvSpPr>
-          <p:cNvPr id="11" name="Text 9"/>
+          <p:cNvPr id="9" name="Text 7"/>
           <p:cNvSpPr/>
           <p:nvPr/>
         </p:nvSpPr>
         <p:spPr>
           <a:xfrm>
             <a:off x="868680" y="1508760"/>
-            <a:ext cx="6537960" cy="4160520"/>
+            <a:ext cx="6309360" cy="4160520"/>
           </a:xfrm>
           <a:prstGeom prst="rect">
             <a:avLst/>
@@ -8781,18 +9967,18 @@
       </p:sp>
       <p:sp>
         <p:nvSpPr>
-          <p:cNvPr id="12" name="Shape 10"/>
-          <p:cNvSpPr/>
-          <p:nvPr/>
-        </p:nvSpPr>
-        <p:spPr>
-          <a:xfrm>
-            <a:off x="7909560" y="1417320"/>
-            <a:ext cx="3154680" cy="1828800"/>
+          <p:cNvPr id="10" name="Shape 8"/>
+          <p:cNvSpPr/>
+          <p:nvPr/>
+        </p:nvSpPr>
+        <p:spPr>
+          <a:xfrm>
+            <a:off x="7635240" y="1325880"/>
+            <a:ext cx="3474720" cy="1325880"/>
           </a:xfrm>
           <a:prstGeom prst="roundRect">
             <a:avLst>
-              <a:gd name="adj" fmla="val 6000"/>
+              <a:gd name="adj" fmla="val 8276"/>
             </a:avLst>
           </a:prstGeom>
           <a:solidFill>
@@ -8808,14 +9994,14 @@
       </p:sp>
       <p:sp>
         <p:nvSpPr>
-          <p:cNvPr id="13" name="Text 11"/>
-          <p:cNvSpPr/>
-          <p:nvPr/>
-        </p:nvSpPr>
-        <p:spPr>
-          <a:xfrm>
-            <a:off x="8074152" y="1563624"/>
-            <a:ext cx="2825496" cy="256032"/>
+          <p:cNvPr id="11" name="Text 9"/>
+          <p:cNvSpPr/>
+          <p:nvPr/>
+        </p:nvSpPr>
+        <p:spPr>
+          <a:xfrm>
+            <a:off x="7799832" y="1472184"/>
+            <a:ext cx="3145536" cy="256032"/>
           </a:xfrm>
           <a:prstGeom prst="rect">
             <a:avLst/>
@@ -8839,7 +10025,7 @@
                 <a:ea typeface="Aptos" pitchFamily="34" charset="-122"/>
                 <a:cs typeface="Aptos" pitchFamily="34" charset="-120"/>
               </a:rPr>
-              <a:t>Key idea</a:t>
+              <a:t>Data decision</a:t>
             </a:r>
             <a:endParaRPr lang="en-US" sz="1300" dirty="0"/>
           </a:p>
@@ -8847,14 +10033,14 @@
       </p:sp>
       <p:sp>
         <p:nvSpPr>
-          <p:cNvPr id="14" name="Text 12"/>
-          <p:cNvSpPr/>
-          <p:nvPr/>
-        </p:nvSpPr>
-        <p:spPr>
-          <a:xfrm>
-            <a:off x="8074152" y="1920240"/>
-            <a:ext cx="2825496" cy="1188720"/>
+          <p:cNvPr id="12" name="Text 10"/>
+          <p:cNvSpPr/>
+          <p:nvPr/>
+        </p:nvSpPr>
+        <p:spPr>
+          <a:xfrm>
+            <a:off x="7799832" y="1828800"/>
+            <a:ext cx="3145536" cy="685800"/>
           </a:xfrm>
           <a:prstGeom prst="rect">
             <a:avLst/>
@@ -8888,21 +10074,212 @@
       </p:sp>
       <p:sp>
         <p:nvSpPr>
-          <p:cNvPr id="15" name="Shape 13"/>
-          <p:cNvSpPr/>
-          <p:nvPr/>
-        </p:nvSpPr>
-        <p:spPr>
-          <a:xfrm>
-            <a:off x="7909560" y="3520440"/>
-            <a:ext cx="3154680" cy="1737360"/>
+          <p:cNvPr id="13" name="Shape 11"/>
+          <p:cNvSpPr/>
+          <p:nvPr/>
+        </p:nvSpPr>
+        <p:spPr>
+          <a:xfrm>
+            <a:off x="7635240" y="2788920"/>
+            <a:ext cx="3474720" cy="1536192"/>
           </a:xfrm>
           <a:prstGeom prst="roundRect">
             <a:avLst>
-              <a:gd name="adj" fmla="val 6316"/>
+              <a:gd name="adj" fmla="val 7143"/>
             </a:avLst>
           </a:prstGeom>
           <a:solidFill>
+            <a:srgbClr val="FFFFFF">
+              <a:alpha val="88000"/>
+            </a:srgbClr>
+          </a:solidFill>
+          <a:ln w="12700">
+            <a:solidFill>
+              <a:srgbClr val="D6E8F2"/>
+            </a:solidFill>
+            <a:prstDash val="solid"/>
+          </a:ln>
+        </p:spPr>
+      </p:sp>
+      <p:sp>
+        <p:nvSpPr>
+          <p:cNvPr id="14" name="Shape 12"/>
+          <p:cNvSpPr/>
+          <p:nvPr/>
+        </p:nvSpPr>
+        <p:spPr>
+          <a:xfrm>
+            <a:off x="8138160" y="3474720"/>
+            <a:ext cx="256032" cy="411480"/>
+          </a:xfrm>
+          <a:prstGeom prst="rect">
+            <a:avLst/>
+          </a:prstGeom>
+          <a:solidFill>
+            <a:srgbClr val="0068B7"/>
+          </a:solidFill>
+          <a:ln w="12700">
+            <a:solidFill>
+              <a:srgbClr val="0068B7"/>
+            </a:solidFill>
+            <a:prstDash val="solid"/>
+          </a:ln>
+        </p:spPr>
+      </p:sp>
+      <p:sp>
+        <p:nvSpPr>
+          <p:cNvPr id="15" name="Shape 13"/>
+          <p:cNvSpPr/>
+          <p:nvPr/>
+        </p:nvSpPr>
+        <p:spPr>
+          <a:xfrm>
+            <a:off x="8577072" y="3172968"/>
+            <a:ext cx="256032" cy="713232"/>
+          </a:xfrm>
+          <a:prstGeom prst="rect">
+            <a:avLst/>
+          </a:prstGeom>
+          <a:solidFill>
+            <a:srgbClr val="2F8A28"/>
+          </a:solidFill>
+          <a:ln w="12700">
+            <a:solidFill>
+              <a:srgbClr val="2F8A28"/>
+            </a:solidFill>
+            <a:prstDash val="solid"/>
+          </a:ln>
+        </p:spPr>
+      </p:sp>
+      <p:sp>
+        <p:nvSpPr>
+          <p:cNvPr id="16" name="Shape 14"/>
+          <p:cNvSpPr/>
+          <p:nvPr/>
+        </p:nvSpPr>
+        <p:spPr>
+          <a:xfrm>
+            <a:off x="9015984" y="2880360"/>
+            <a:ext cx="256032" cy="1005840"/>
+          </a:xfrm>
+          <a:prstGeom prst="rect">
+            <a:avLst/>
+          </a:prstGeom>
+          <a:solidFill>
+            <a:srgbClr val="D69A2D"/>
+          </a:solidFill>
+          <a:ln w="12700">
+            <a:solidFill>
+              <a:srgbClr val="D69A2D"/>
+            </a:solidFill>
+            <a:prstDash val="solid"/>
+          </a:ln>
+        </p:spPr>
+      </p:sp>
+      <p:sp>
+        <p:nvSpPr>
+          <p:cNvPr id="17" name="Shape 15"/>
+          <p:cNvSpPr/>
+          <p:nvPr/>
+        </p:nvSpPr>
+        <p:spPr>
+          <a:xfrm>
+            <a:off x="9454896" y="3319272"/>
+            <a:ext cx="256032" cy="566928"/>
+          </a:xfrm>
+          <a:prstGeom prst="rect">
+            <a:avLst/>
+          </a:prstGeom>
+          <a:solidFill>
+            <a:srgbClr val="6A4CA3"/>
+          </a:solidFill>
+          <a:ln w="12700">
+            <a:solidFill>
+              <a:srgbClr val="6A4CA3"/>
+            </a:solidFill>
+            <a:prstDash val="solid"/>
+          </a:ln>
+        </p:spPr>
+      </p:sp>
+      <p:sp>
+        <p:nvSpPr>
+          <p:cNvPr id="18" name="Shape 16"/>
+          <p:cNvSpPr/>
+          <p:nvPr/>
+        </p:nvSpPr>
+        <p:spPr>
+          <a:xfrm>
+            <a:off x="8019288" y="3886200"/>
+            <a:ext cx="2706624" cy="0"/>
+          </a:xfrm>
+          <a:prstGeom prst="line">
+            <a:avLst/>
+          </a:prstGeom>
+          <a:noFill/>
+          <a:ln w="15240">
+            <a:solidFill>
+              <a:srgbClr val="003A63"/>
+            </a:solidFill>
+            <a:prstDash val="solid"/>
+          </a:ln>
+        </p:spPr>
+      </p:sp>
+      <p:sp>
+        <p:nvSpPr>
+          <p:cNvPr id="19" name="Text 17"/>
+          <p:cNvSpPr/>
+          <p:nvPr/>
+        </p:nvSpPr>
+        <p:spPr>
+          <a:xfrm>
+            <a:off x="7863840" y="3017520"/>
+            <a:ext cx="3017520" cy="201168"/>
+          </a:xfrm>
+          <a:prstGeom prst="rect">
+            <a:avLst/>
+          </a:prstGeom>
+          <a:noFill/>
+          <a:ln/>
+        </p:spPr>
+        <p:txBody>
+          <a:bodyPr wrap="square" lIns="0" tIns="0" rIns="0" bIns="0" rtlCol="0" anchor="ctr"/>
+          <a:lstStyle/>
+          <a:p>
+            <a:pPr algn="ctr" indent="0" marL="0">
+              <a:buNone/>
+            </a:pPr>
+            <a:r>
+              <a:rPr lang="en-US" sz="1050" b="1" dirty="0">
+                <a:solidFill>
+                  <a:srgbClr val="003A63"/>
+                </a:solidFill>
+                <a:latin typeface="Aptos" pitchFamily="34" charset="0"/>
+                <a:ea typeface="Aptos" pitchFamily="34" charset="-122"/>
+                <a:cs typeface="Aptos" pitchFamily="34" charset="-120"/>
+              </a:rPr>
+              <a:t>Measure and monitor</a:t>
+            </a:r>
+            <a:endParaRPr lang="en-US" sz="1050" dirty="0"/>
+          </a:p>
+        </p:txBody>
+      </p:sp>
+      <p:sp>
+        <p:nvSpPr>
+          <p:cNvPr id="20" name="Shape 18"/>
+          <p:cNvSpPr/>
+          <p:nvPr/>
+        </p:nvSpPr>
+        <p:spPr>
+          <a:xfrm>
+            <a:off x="7635240" y="4498848"/>
+            <a:ext cx="3474720" cy="1143000"/>
+          </a:xfrm>
+          <a:prstGeom prst="roundRect">
+            <a:avLst>
+              <a:gd name="adj" fmla="val 9600"/>
+            </a:avLst>
+          </a:prstGeom>
+          <a:solidFill>
             <a:srgbClr val="EAF6F8"/>
           </a:solidFill>
           <a:ln w="12700">
@@ -8915,14 +10292,14 @@
       </p:sp>
       <p:sp>
         <p:nvSpPr>
-          <p:cNvPr id="16" name="Text 14"/>
-          <p:cNvSpPr/>
-          <p:nvPr/>
-        </p:nvSpPr>
-        <p:spPr>
-          <a:xfrm>
-            <a:off x="8074152" y="3666744"/>
-            <a:ext cx="2825496" cy="256032"/>
+          <p:cNvPr id="21" name="Text 19"/>
+          <p:cNvSpPr/>
+          <p:nvPr/>
+        </p:nvSpPr>
+        <p:spPr>
+          <a:xfrm>
+            <a:off x="7799832" y="4645152"/>
+            <a:ext cx="3145536" cy="256032"/>
           </a:xfrm>
           <a:prstGeom prst="rect">
             <a:avLst/>
@@ -8946,7 +10323,7 @@
                 <a:ea typeface="Aptos" pitchFamily="34" charset="-122"/>
                 <a:cs typeface="Aptos" pitchFamily="34" charset="-120"/>
               </a:rPr>
-              <a:t>Use this for</a:t>
+              <a:t>How to validate</a:t>
             </a:r>
             <a:endParaRPr lang="en-US" sz="1300" dirty="0"/>
           </a:p>
@@ -8954,14 +10331,14 @@
       </p:sp>
       <p:sp>
         <p:nvSpPr>
-          <p:cNvPr id="17" name="Text 15"/>
-          <p:cNvSpPr/>
-          <p:nvPr/>
-        </p:nvSpPr>
-        <p:spPr>
-          <a:xfrm>
-            <a:off x="8074152" y="4023360"/>
-            <a:ext cx="2825496" cy="1097280"/>
+          <p:cNvPr id="22" name="Text 20"/>
+          <p:cNvSpPr/>
+          <p:nvPr/>
+        </p:nvSpPr>
+        <p:spPr>
+          <a:xfrm>
+            <a:off x="7799832" y="5001768"/>
+            <a:ext cx="3145536" cy="502920"/>
           </a:xfrm>
           <a:prstGeom prst="rect">
             <a:avLst/>
@@ -8987,7 +10364,7 @@
                 <a:ea typeface="Aptos" pitchFamily="34" charset="-122"/>
                 <a:cs typeface="Aptos" pitchFamily="34" charset="-120"/>
               </a:rPr>
-              <a:t>Connect the concept to public health decisions, safeguards, documentation, or implementation work.</a:t>
+              <a:t>Use the assignment to test whether you can explain the concept, apply it to a realistic public health situation, and identify what would need review before the work moves forward.</a:t>
             </a:r>
             <a:endParaRPr lang="en-US" sz="1550" dirty="0"/>
           </a:p>
@@ -9161,8 +10538,8 @@
         </p:nvSpPr>
         <p:spPr>
           <a:xfrm>
-            <a:off x="9966960" y="6537960"/>
-            <a:ext cx="1645920" cy="201168"/>
+            <a:off x="9646920" y="6537960"/>
+            <a:ext cx="1965960" cy="201168"/>
           </a:xfrm>
           <a:prstGeom prst="rect">
             <a:avLst/>
@@ -9186,7 +10563,7 @@
                 <a:ea typeface="Aptos" pitchFamily="34" charset="-122"/>
                 <a:cs typeface="Aptos" pitchFamily="34" charset="-120"/>
               </a:rPr>
-              <a:t>Â© Paula Soper</a:t>
+              <a:t>Copyright Paula Soper</a:t>
             </a:r>
             <a:endParaRPr lang="en-US" sz="800" dirty="0"/>
           </a:p>
@@ -9549,46 +10926,7 @@
       </p:sp>
       <p:sp>
         <p:nvSpPr>
-          <p:cNvPr id="15" name="Text 13"/>
-          <p:cNvSpPr/>
-          <p:nvPr/>
-        </p:nvSpPr>
-        <p:spPr>
-          <a:xfrm>
-            <a:off x="8695944" y="3941064"/>
-            <a:ext cx="201168" cy="256032"/>
-          </a:xfrm>
-          <a:prstGeom prst="rect">
-            <a:avLst/>
-          </a:prstGeom>
-          <a:noFill/>
-          <a:ln/>
-        </p:spPr>
-        <p:txBody>
-          <a:bodyPr wrap="square" lIns="0" tIns="0" rIns="0" bIns="0" rtlCol="0" anchor="ctr"/>
-          <a:lstStyle/>
-          <a:p>
-            <a:pPr algn="ctr" indent="0" marL="0">
-              <a:buNone/>
-            </a:pPr>
-            <a:r>
-              <a:rPr lang="en-US" sz="1800" b="1" dirty="0">
-                <a:solidFill>
-                  <a:srgbClr val="0068B7"/>
-                </a:solidFill>
-                <a:latin typeface="Aptos" pitchFamily="34" charset="0"/>
-                <a:ea typeface="Aptos" pitchFamily="34" charset="-122"/>
-                <a:cs typeface="Aptos" pitchFamily="34" charset="-120"/>
-              </a:rPr>
-              <a:t>â†’</a:t>
-            </a:r>
-            <a:endParaRPr lang="en-US" sz="1800" dirty="0"/>
-          </a:p>
-        </p:txBody>
-      </p:sp>
-      <p:sp>
-        <p:nvSpPr>
-          <p:cNvPr id="16" name="Shape 14"/>
+          <p:cNvPr id="15" name="Shape 13"/>
           <p:cNvSpPr/>
           <p:nvPr/>
         </p:nvSpPr>
@@ -9615,7 +10953,7 @@
       </p:sp>
       <p:sp>
         <p:nvSpPr>
-          <p:cNvPr id="17" name="Text 15"/>
+          <p:cNvPr id="16" name="Text 14"/>
           <p:cNvSpPr/>
           <p:nvPr/>
         </p:nvSpPr>
@@ -9656,46 +10994,7 @@
       </p:sp>
       <p:sp>
         <p:nvSpPr>
-          <p:cNvPr id="18" name="Text 16"/>
-          <p:cNvSpPr/>
-          <p:nvPr/>
-        </p:nvSpPr>
-        <p:spPr>
-          <a:xfrm>
-            <a:off x="9985248" y="3941064"/>
-            <a:ext cx="201168" cy="256032"/>
-          </a:xfrm>
-          <a:prstGeom prst="rect">
-            <a:avLst/>
-          </a:prstGeom>
-          <a:noFill/>
-          <a:ln/>
-        </p:spPr>
-        <p:txBody>
-          <a:bodyPr wrap="square" lIns="0" tIns="0" rIns="0" bIns="0" rtlCol="0" anchor="ctr"/>
-          <a:lstStyle/>
-          <a:p>
-            <a:pPr algn="ctr" indent="0" marL="0">
-              <a:buNone/>
-            </a:pPr>
-            <a:r>
-              <a:rPr lang="en-US" sz="1800" b="1" dirty="0">
-                <a:solidFill>
-                  <a:srgbClr val="0068B7"/>
-                </a:solidFill>
-                <a:latin typeface="Aptos" pitchFamily="34" charset="0"/>
-                <a:ea typeface="Aptos" pitchFamily="34" charset="-122"/>
-                <a:cs typeface="Aptos" pitchFamily="34" charset="-120"/>
-              </a:rPr>
-              <a:t>â†’</a:t>
-            </a:r>
-            <a:endParaRPr lang="en-US" sz="1800" dirty="0"/>
-          </a:p>
-        </p:txBody>
-      </p:sp>
-      <p:sp>
-        <p:nvSpPr>
-          <p:cNvPr id="19" name="Shape 17"/>
+          <p:cNvPr id="17" name="Shape 15"/>
           <p:cNvSpPr/>
           <p:nvPr/>
         </p:nvSpPr>
@@ -9722,7 +11021,7 @@
       </p:sp>
       <p:sp>
         <p:nvSpPr>
-          <p:cNvPr id="20" name="Text 18"/>
+          <p:cNvPr id="18" name="Text 16"/>
           <p:cNvSpPr/>
           <p:nvPr/>
         </p:nvSpPr>
@@ -9929,8 +11228,8 @@
         </p:nvSpPr>
         <p:spPr>
           <a:xfrm>
-            <a:off x="9966960" y="6537960"/>
-            <a:ext cx="1645920" cy="201168"/>
+            <a:off x="9646920" y="6537960"/>
+            <a:ext cx="1965960" cy="201168"/>
           </a:xfrm>
           <a:prstGeom prst="rect">
             <a:avLst/>
@@ -9954,7 +11253,7 @@
                 <a:ea typeface="Aptos" pitchFamily="34" charset="-122"/>
                 <a:cs typeface="Aptos" pitchFamily="34" charset="-120"/>
               </a:rPr>
-              <a:t>Â© Paula Soper</a:t>
+              <a:t>Copyright Paula Soper</a:t>
             </a:r>
             <a:endParaRPr lang="en-US" sz="800" dirty="0"/>
           </a:p>
@@ -10001,77 +11300,13 @@
       </p:sp>
       <p:sp>
         <p:nvSpPr>
-          <p:cNvPr id="8" name="Shape 6"/>
+          <p:cNvPr id="8" name="Text 6"/>
           <p:cNvSpPr/>
           <p:nvPr/>
         </p:nvSpPr>
         <p:spPr>
           <a:xfrm>
             <a:off x="640080" y="658368"/>
-            <a:ext cx="420624" cy="420624"/>
-          </a:xfrm>
-          <a:prstGeom prst="ellipse">
-            <a:avLst/>
-          </a:prstGeom>
-          <a:solidFill>
-            <a:srgbClr val="0068B7"/>
-          </a:solidFill>
-          <a:ln w="12700">
-            <a:solidFill>
-              <a:srgbClr val="0068B7"/>
-            </a:solidFill>
-            <a:prstDash val="solid"/>
-          </a:ln>
-        </p:spPr>
-      </p:sp>
-      <p:sp>
-        <p:nvSpPr>
-          <p:cNvPr id="9" name="Text 7"/>
-          <p:cNvSpPr/>
-          <p:nvPr/>
-        </p:nvSpPr>
-        <p:spPr>
-          <a:xfrm>
-            <a:off x="640080" y="731520"/>
-            <a:ext cx="420624" cy="164592"/>
-          </a:xfrm>
-          <a:prstGeom prst="rect">
-            <a:avLst/>
-          </a:prstGeom>
-          <a:noFill/>
-          <a:ln/>
-        </p:spPr>
-        <p:txBody>
-          <a:bodyPr wrap="square" lIns="0" tIns="0" rIns="0" bIns="0" rtlCol="0" anchor="ctr"/>
-          <a:lstStyle/>
-          <a:p>
-            <a:pPr algn="ctr" indent="0" marL="0">
-              <a:buNone/>
-            </a:pPr>
-            <a:r>
-              <a:rPr lang="en-US" sz="1100" b="1" dirty="0">
-                <a:solidFill>
-                  <a:srgbClr val="FFFFFF"/>
-                </a:solidFill>
-                <a:latin typeface="Aptos" pitchFamily="34" charset="0"/>
-                <a:ea typeface="Aptos" pitchFamily="34" charset="-122"/>
-                <a:cs typeface="Aptos" pitchFamily="34" charset="-120"/>
-              </a:rPr>
-              <a:t>14</a:t>
-            </a:r>
-            <a:endParaRPr lang="en-US" sz="1100" dirty="0"/>
-          </a:p>
-        </p:txBody>
-      </p:sp>
-      <p:sp>
-        <p:nvSpPr>
-          <p:cNvPr id="10" name="Text 8"/>
-          <p:cNvSpPr/>
-          <p:nvPr/>
-        </p:nvSpPr>
-        <p:spPr>
-          <a:xfrm>
-            <a:off x="640080" y="621792"/>
             <a:ext cx="10881360" cy="713232"/>
           </a:xfrm>
           <a:prstGeom prst="rect">
@@ -10106,14 +11341,14 @@
       </p:sp>
       <p:sp>
         <p:nvSpPr>
-          <p:cNvPr id="11" name="Text 9"/>
+          <p:cNvPr id="9" name="Text 7"/>
           <p:cNvSpPr/>
           <p:nvPr/>
         </p:nvSpPr>
         <p:spPr>
           <a:xfrm>
             <a:off x="868680" y="1508760"/>
-            <a:ext cx="6537960" cy="4160520"/>
+            <a:ext cx="6309360" cy="4160520"/>
           </a:xfrm>
           <a:prstGeom prst="rect">
             <a:avLst/>
@@ -10172,18 +11407,18 @@
       </p:sp>
       <p:sp>
         <p:nvSpPr>
-          <p:cNvPr id="12" name="Shape 10"/>
-          <p:cNvSpPr/>
-          <p:nvPr/>
-        </p:nvSpPr>
-        <p:spPr>
-          <a:xfrm>
-            <a:off x="7909560" y="1417320"/>
-            <a:ext cx="3154680" cy="1828800"/>
+          <p:cNvPr id="10" name="Shape 8"/>
+          <p:cNvSpPr/>
+          <p:nvPr/>
+        </p:nvSpPr>
+        <p:spPr>
+          <a:xfrm>
+            <a:off x="7635240" y="1325880"/>
+            <a:ext cx="3474720" cy="1325880"/>
           </a:xfrm>
           <a:prstGeom prst="roundRect">
             <a:avLst>
-              <a:gd name="adj" fmla="val 6000"/>
+              <a:gd name="adj" fmla="val 8276"/>
             </a:avLst>
           </a:prstGeom>
           <a:solidFill>
@@ -10199,14 +11434,14 @@
       </p:sp>
       <p:sp>
         <p:nvSpPr>
-          <p:cNvPr id="13" name="Text 11"/>
-          <p:cNvSpPr/>
-          <p:nvPr/>
-        </p:nvSpPr>
-        <p:spPr>
-          <a:xfrm>
-            <a:off x="8074152" y="1563624"/>
-            <a:ext cx="2825496" cy="256032"/>
+          <p:cNvPr id="11" name="Text 9"/>
+          <p:cNvSpPr/>
+          <p:nvPr/>
+        </p:nvSpPr>
+        <p:spPr>
+          <a:xfrm>
+            <a:off x="7799832" y="1472184"/>
+            <a:ext cx="3145536" cy="256032"/>
           </a:xfrm>
           <a:prstGeom prst="rect">
             <a:avLst/>
@@ -10230,7 +11465,7 @@
                 <a:ea typeface="Aptos" pitchFamily="34" charset="-122"/>
                 <a:cs typeface="Aptos" pitchFamily="34" charset="-120"/>
               </a:rPr>
-              <a:t>Key idea</a:t>
+              <a:t>Data decision</a:t>
             </a:r>
             <a:endParaRPr lang="en-US" sz="1300" dirty="0"/>
           </a:p>
@@ -10238,14 +11473,14 @@
       </p:sp>
       <p:sp>
         <p:nvSpPr>
-          <p:cNvPr id="14" name="Text 12"/>
-          <p:cNvSpPr/>
-          <p:nvPr/>
-        </p:nvSpPr>
-        <p:spPr>
-          <a:xfrm>
-            <a:off x="8074152" y="1920240"/>
-            <a:ext cx="2825496" cy="1188720"/>
+          <p:cNvPr id="12" name="Text 10"/>
+          <p:cNvSpPr/>
+          <p:nvPr/>
+        </p:nvSpPr>
+        <p:spPr>
+          <a:xfrm>
+            <a:off x="7799832" y="1828800"/>
+            <a:ext cx="3145536" cy="685800"/>
           </a:xfrm>
           <a:prstGeom prst="rect">
             <a:avLst/>
@@ -10279,21 +11514,212 @@
       </p:sp>
       <p:sp>
         <p:nvSpPr>
-          <p:cNvPr id="15" name="Shape 13"/>
-          <p:cNvSpPr/>
-          <p:nvPr/>
-        </p:nvSpPr>
-        <p:spPr>
-          <a:xfrm>
-            <a:off x="7909560" y="3520440"/>
-            <a:ext cx="3154680" cy="1737360"/>
+          <p:cNvPr id="13" name="Shape 11"/>
+          <p:cNvSpPr/>
+          <p:nvPr/>
+        </p:nvSpPr>
+        <p:spPr>
+          <a:xfrm>
+            <a:off x="7635240" y="2788920"/>
+            <a:ext cx="3474720" cy="1536192"/>
           </a:xfrm>
           <a:prstGeom prst="roundRect">
             <a:avLst>
-              <a:gd name="adj" fmla="val 6316"/>
+              <a:gd name="adj" fmla="val 7143"/>
             </a:avLst>
           </a:prstGeom>
           <a:solidFill>
+            <a:srgbClr val="FFFFFF">
+              <a:alpha val="88000"/>
+            </a:srgbClr>
+          </a:solidFill>
+          <a:ln w="12700">
+            <a:solidFill>
+              <a:srgbClr val="D6E8F2"/>
+            </a:solidFill>
+            <a:prstDash val="solid"/>
+          </a:ln>
+        </p:spPr>
+      </p:sp>
+      <p:sp>
+        <p:nvSpPr>
+          <p:cNvPr id="14" name="Shape 12"/>
+          <p:cNvSpPr/>
+          <p:nvPr/>
+        </p:nvSpPr>
+        <p:spPr>
+          <a:xfrm>
+            <a:off x="8138160" y="3474720"/>
+            <a:ext cx="256032" cy="411480"/>
+          </a:xfrm>
+          <a:prstGeom prst="rect">
+            <a:avLst/>
+          </a:prstGeom>
+          <a:solidFill>
+            <a:srgbClr val="0068B7"/>
+          </a:solidFill>
+          <a:ln w="12700">
+            <a:solidFill>
+              <a:srgbClr val="0068B7"/>
+            </a:solidFill>
+            <a:prstDash val="solid"/>
+          </a:ln>
+        </p:spPr>
+      </p:sp>
+      <p:sp>
+        <p:nvSpPr>
+          <p:cNvPr id="15" name="Shape 13"/>
+          <p:cNvSpPr/>
+          <p:nvPr/>
+        </p:nvSpPr>
+        <p:spPr>
+          <a:xfrm>
+            <a:off x="8577072" y="3172968"/>
+            <a:ext cx="256032" cy="713232"/>
+          </a:xfrm>
+          <a:prstGeom prst="rect">
+            <a:avLst/>
+          </a:prstGeom>
+          <a:solidFill>
+            <a:srgbClr val="2F8A28"/>
+          </a:solidFill>
+          <a:ln w="12700">
+            <a:solidFill>
+              <a:srgbClr val="2F8A28"/>
+            </a:solidFill>
+            <a:prstDash val="solid"/>
+          </a:ln>
+        </p:spPr>
+      </p:sp>
+      <p:sp>
+        <p:nvSpPr>
+          <p:cNvPr id="16" name="Shape 14"/>
+          <p:cNvSpPr/>
+          <p:nvPr/>
+        </p:nvSpPr>
+        <p:spPr>
+          <a:xfrm>
+            <a:off x="9015984" y="2880360"/>
+            <a:ext cx="256032" cy="1005840"/>
+          </a:xfrm>
+          <a:prstGeom prst="rect">
+            <a:avLst/>
+          </a:prstGeom>
+          <a:solidFill>
+            <a:srgbClr val="D69A2D"/>
+          </a:solidFill>
+          <a:ln w="12700">
+            <a:solidFill>
+              <a:srgbClr val="D69A2D"/>
+            </a:solidFill>
+            <a:prstDash val="solid"/>
+          </a:ln>
+        </p:spPr>
+      </p:sp>
+      <p:sp>
+        <p:nvSpPr>
+          <p:cNvPr id="17" name="Shape 15"/>
+          <p:cNvSpPr/>
+          <p:nvPr/>
+        </p:nvSpPr>
+        <p:spPr>
+          <a:xfrm>
+            <a:off x="9454896" y="3319272"/>
+            <a:ext cx="256032" cy="566928"/>
+          </a:xfrm>
+          <a:prstGeom prst="rect">
+            <a:avLst/>
+          </a:prstGeom>
+          <a:solidFill>
+            <a:srgbClr val="6A4CA3"/>
+          </a:solidFill>
+          <a:ln w="12700">
+            <a:solidFill>
+              <a:srgbClr val="6A4CA3"/>
+            </a:solidFill>
+            <a:prstDash val="solid"/>
+          </a:ln>
+        </p:spPr>
+      </p:sp>
+      <p:sp>
+        <p:nvSpPr>
+          <p:cNvPr id="18" name="Shape 16"/>
+          <p:cNvSpPr/>
+          <p:nvPr/>
+        </p:nvSpPr>
+        <p:spPr>
+          <a:xfrm>
+            <a:off x="8019288" y="3886200"/>
+            <a:ext cx="2706624" cy="0"/>
+          </a:xfrm>
+          <a:prstGeom prst="line">
+            <a:avLst/>
+          </a:prstGeom>
+          <a:noFill/>
+          <a:ln w="15240">
+            <a:solidFill>
+              <a:srgbClr val="003A63"/>
+            </a:solidFill>
+            <a:prstDash val="solid"/>
+          </a:ln>
+        </p:spPr>
+      </p:sp>
+      <p:sp>
+        <p:nvSpPr>
+          <p:cNvPr id="19" name="Text 17"/>
+          <p:cNvSpPr/>
+          <p:nvPr/>
+        </p:nvSpPr>
+        <p:spPr>
+          <a:xfrm>
+            <a:off x="7863840" y="3017520"/>
+            <a:ext cx="3017520" cy="201168"/>
+          </a:xfrm>
+          <a:prstGeom prst="rect">
+            <a:avLst/>
+          </a:prstGeom>
+          <a:noFill/>
+          <a:ln/>
+        </p:spPr>
+        <p:txBody>
+          <a:bodyPr wrap="square" lIns="0" tIns="0" rIns="0" bIns="0" rtlCol="0" anchor="ctr"/>
+          <a:lstStyle/>
+          <a:p>
+            <a:pPr algn="ctr" indent="0" marL="0">
+              <a:buNone/>
+            </a:pPr>
+            <a:r>
+              <a:rPr lang="en-US" sz="1050" b="1" dirty="0">
+                <a:solidFill>
+                  <a:srgbClr val="003A63"/>
+                </a:solidFill>
+                <a:latin typeface="Aptos" pitchFamily="34" charset="0"/>
+                <a:ea typeface="Aptos" pitchFamily="34" charset="-122"/>
+                <a:cs typeface="Aptos" pitchFamily="34" charset="-120"/>
+              </a:rPr>
+              <a:t>Measure and monitor</a:t>
+            </a:r>
+            <a:endParaRPr lang="en-US" sz="1050" dirty="0"/>
+          </a:p>
+        </p:txBody>
+      </p:sp>
+      <p:sp>
+        <p:nvSpPr>
+          <p:cNvPr id="20" name="Shape 18"/>
+          <p:cNvSpPr/>
+          <p:nvPr/>
+        </p:nvSpPr>
+        <p:spPr>
+          <a:xfrm>
+            <a:off x="7635240" y="4498848"/>
+            <a:ext cx="3474720" cy="1143000"/>
+          </a:xfrm>
+          <a:prstGeom prst="roundRect">
+            <a:avLst>
+              <a:gd name="adj" fmla="val 9600"/>
+            </a:avLst>
+          </a:prstGeom>
+          <a:solidFill>
             <a:srgbClr val="EAF6F8"/>
           </a:solidFill>
           <a:ln w="12700">
@@ -10306,14 +11732,14 @@
       </p:sp>
       <p:sp>
         <p:nvSpPr>
-          <p:cNvPr id="16" name="Text 14"/>
-          <p:cNvSpPr/>
-          <p:nvPr/>
-        </p:nvSpPr>
-        <p:spPr>
-          <a:xfrm>
-            <a:off x="8074152" y="3666744"/>
-            <a:ext cx="2825496" cy="256032"/>
+          <p:cNvPr id="21" name="Text 19"/>
+          <p:cNvSpPr/>
+          <p:nvPr/>
+        </p:nvSpPr>
+        <p:spPr>
+          <a:xfrm>
+            <a:off x="7799832" y="4645152"/>
+            <a:ext cx="3145536" cy="256032"/>
           </a:xfrm>
           <a:prstGeom prst="rect">
             <a:avLst/>
@@ -10337,7 +11763,7 @@
                 <a:ea typeface="Aptos" pitchFamily="34" charset="-122"/>
                 <a:cs typeface="Aptos" pitchFamily="34" charset="-120"/>
               </a:rPr>
-              <a:t>Use this for</a:t>
+              <a:t>How to validate</a:t>
             </a:r>
             <a:endParaRPr lang="en-US" sz="1300" dirty="0"/>
           </a:p>
@@ -10345,14 +11771,14 @@
       </p:sp>
       <p:sp>
         <p:nvSpPr>
-          <p:cNvPr id="17" name="Text 15"/>
-          <p:cNvSpPr/>
-          <p:nvPr/>
-        </p:nvSpPr>
-        <p:spPr>
-          <a:xfrm>
-            <a:off x="8074152" y="4023360"/>
-            <a:ext cx="2825496" cy="1097280"/>
+          <p:cNvPr id="22" name="Text 20"/>
+          <p:cNvSpPr/>
+          <p:nvPr/>
+        </p:nvSpPr>
+        <p:spPr>
+          <a:xfrm>
+            <a:off x="7799832" y="5001768"/>
+            <a:ext cx="3145536" cy="502920"/>
           </a:xfrm>
           <a:prstGeom prst="rect">
             <a:avLst/>
@@ -10378,7 +11804,7 @@
                 <a:ea typeface="Aptos" pitchFamily="34" charset="-122"/>
                 <a:cs typeface="Aptos" pitchFamily="34" charset="-120"/>
               </a:rPr>
-              <a:t>Connect the concept to public health decisions, safeguards, documentation, or implementation work.</a:t>
+              <a:t>Connect the concept to data quality, model performance, validation evidence, monitoring measures, and decisions that remain under human control.</a:t>
             </a:r>
             <a:endParaRPr lang="en-US" sz="1550" dirty="0"/>
           </a:p>
@@ -10552,8 +11978,8 @@
         </p:nvSpPr>
         <p:spPr>
           <a:xfrm>
-            <a:off x="9966960" y="6537960"/>
-            <a:ext cx="1645920" cy="201168"/>
+            <a:off x="9646920" y="6537960"/>
+            <a:ext cx="1965960" cy="201168"/>
           </a:xfrm>
           <a:prstGeom prst="rect">
             <a:avLst/>
@@ -10577,7 +12003,7 @@
                 <a:ea typeface="Aptos" pitchFamily="34" charset="-122"/>
                 <a:cs typeface="Aptos" pitchFamily="34" charset="-120"/>
               </a:rPr>
-              <a:t>Â© Paula Soper</a:t>
+              <a:t>Copyright Paula Soper</a:t>
             </a:r>
             <a:endParaRPr lang="en-US" sz="800" dirty="0"/>
           </a:p>
@@ -10672,7 +12098,7 @@
         <p:spPr>
           <a:xfrm>
             <a:off x="868680" y="1508760"/>
-            <a:ext cx="6537960" cy="4160520"/>
+            <a:ext cx="6309360" cy="4160520"/>
           </a:xfrm>
           <a:prstGeom prst="rect">
             <a:avLst/>
@@ -10709,12 +12135,12 @@
         </p:nvSpPr>
         <p:spPr>
           <a:xfrm>
-            <a:off x="7909560" y="1417320"/>
-            <a:ext cx="3154680" cy="1828800"/>
+            <a:off x="7635240" y="1325880"/>
+            <a:ext cx="3474720" cy="1325880"/>
           </a:xfrm>
           <a:prstGeom prst="roundRect">
             <a:avLst>
-              <a:gd name="adj" fmla="val 6000"/>
+              <a:gd name="adj" fmla="val 8276"/>
             </a:avLst>
           </a:prstGeom>
           <a:solidFill>
@@ -10736,8 +12162,8 @@
         </p:nvSpPr>
         <p:spPr>
           <a:xfrm>
-            <a:off x="8074152" y="1563624"/>
-            <a:ext cx="2825496" cy="256032"/>
+            <a:off x="7799832" y="1472184"/>
+            <a:ext cx="3145536" cy="256032"/>
           </a:xfrm>
           <a:prstGeom prst="rect">
             <a:avLst/>
@@ -10761,7 +12187,7 @@
                 <a:ea typeface="Aptos" pitchFamily="34" charset="-122"/>
                 <a:cs typeface="Aptos" pitchFamily="34" charset="-120"/>
               </a:rPr>
-              <a:t>Key idea</a:t>
+              <a:t>Data decision</a:t>
             </a:r>
             <a:endParaRPr lang="en-US" sz="1300" dirty="0"/>
           </a:p>
@@ -10775,8 +12201,8 @@
         </p:nvSpPr>
         <p:spPr>
           <a:xfrm>
-            <a:off x="8074152" y="1920240"/>
-            <a:ext cx="2825496" cy="1188720"/>
+            <a:off x="7799832" y="1828800"/>
+            <a:ext cx="3145536" cy="685800"/>
           </a:xfrm>
           <a:prstGeom prst="rect">
             <a:avLst/>
@@ -10816,15 +12242,206 @@
         </p:nvSpPr>
         <p:spPr>
           <a:xfrm>
-            <a:off x="7909560" y="3520440"/>
-            <a:ext cx="3154680" cy="1737360"/>
+            <a:off x="7635240" y="2788920"/>
+            <a:ext cx="3474720" cy="1536192"/>
           </a:xfrm>
           <a:prstGeom prst="roundRect">
             <a:avLst>
-              <a:gd name="adj" fmla="val 6316"/>
+              <a:gd name="adj" fmla="val 7143"/>
             </a:avLst>
           </a:prstGeom>
           <a:solidFill>
+            <a:srgbClr val="FFFFFF">
+              <a:alpha val="88000"/>
+            </a:srgbClr>
+          </a:solidFill>
+          <a:ln w="12700">
+            <a:solidFill>
+              <a:srgbClr val="D6E8F2"/>
+            </a:solidFill>
+            <a:prstDash val="solid"/>
+          </a:ln>
+        </p:spPr>
+      </p:sp>
+      <p:sp>
+        <p:nvSpPr>
+          <p:cNvPr id="14" name="Shape 12"/>
+          <p:cNvSpPr/>
+          <p:nvPr/>
+        </p:nvSpPr>
+        <p:spPr>
+          <a:xfrm>
+            <a:off x="8138160" y="3474720"/>
+            <a:ext cx="256032" cy="411480"/>
+          </a:xfrm>
+          <a:prstGeom prst="rect">
+            <a:avLst/>
+          </a:prstGeom>
+          <a:solidFill>
+            <a:srgbClr val="0068B7"/>
+          </a:solidFill>
+          <a:ln w="12700">
+            <a:solidFill>
+              <a:srgbClr val="0068B7"/>
+            </a:solidFill>
+            <a:prstDash val="solid"/>
+          </a:ln>
+        </p:spPr>
+      </p:sp>
+      <p:sp>
+        <p:nvSpPr>
+          <p:cNvPr id="15" name="Shape 13"/>
+          <p:cNvSpPr/>
+          <p:nvPr/>
+        </p:nvSpPr>
+        <p:spPr>
+          <a:xfrm>
+            <a:off x="8577072" y="3172968"/>
+            <a:ext cx="256032" cy="713232"/>
+          </a:xfrm>
+          <a:prstGeom prst="rect">
+            <a:avLst/>
+          </a:prstGeom>
+          <a:solidFill>
+            <a:srgbClr val="2F8A28"/>
+          </a:solidFill>
+          <a:ln w="12700">
+            <a:solidFill>
+              <a:srgbClr val="2F8A28"/>
+            </a:solidFill>
+            <a:prstDash val="solid"/>
+          </a:ln>
+        </p:spPr>
+      </p:sp>
+      <p:sp>
+        <p:nvSpPr>
+          <p:cNvPr id="16" name="Shape 14"/>
+          <p:cNvSpPr/>
+          <p:nvPr/>
+        </p:nvSpPr>
+        <p:spPr>
+          <a:xfrm>
+            <a:off x="9015984" y="2880360"/>
+            <a:ext cx="256032" cy="1005840"/>
+          </a:xfrm>
+          <a:prstGeom prst="rect">
+            <a:avLst/>
+          </a:prstGeom>
+          <a:solidFill>
+            <a:srgbClr val="D69A2D"/>
+          </a:solidFill>
+          <a:ln w="12700">
+            <a:solidFill>
+              <a:srgbClr val="D69A2D"/>
+            </a:solidFill>
+            <a:prstDash val="solid"/>
+          </a:ln>
+        </p:spPr>
+      </p:sp>
+      <p:sp>
+        <p:nvSpPr>
+          <p:cNvPr id="17" name="Shape 15"/>
+          <p:cNvSpPr/>
+          <p:nvPr/>
+        </p:nvSpPr>
+        <p:spPr>
+          <a:xfrm>
+            <a:off x="9454896" y="3319272"/>
+            <a:ext cx="256032" cy="566928"/>
+          </a:xfrm>
+          <a:prstGeom prst="rect">
+            <a:avLst/>
+          </a:prstGeom>
+          <a:solidFill>
+            <a:srgbClr val="6A4CA3"/>
+          </a:solidFill>
+          <a:ln w="12700">
+            <a:solidFill>
+              <a:srgbClr val="6A4CA3"/>
+            </a:solidFill>
+            <a:prstDash val="solid"/>
+          </a:ln>
+        </p:spPr>
+      </p:sp>
+      <p:sp>
+        <p:nvSpPr>
+          <p:cNvPr id="18" name="Shape 16"/>
+          <p:cNvSpPr/>
+          <p:nvPr/>
+        </p:nvSpPr>
+        <p:spPr>
+          <a:xfrm>
+            <a:off x="8019288" y="3886200"/>
+            <a:ext cx="2706624" cy="0"/>
+          </a:xfrm>
+          <a:prstGeom prst="line">
+            <a:avLst/>
+          </a:prstGeom>
+          <a:noFill/>
+          <a:ln w="15240">
+            <a:solidFill>
+              <a:srgbClr val="003A63"/>
+            </a:solidFill>
+            <a:prstDash val="solid"/>
+          </a:ln>
+        </p:spPr>
+      </p:sp>
+      <p:sp>
+        <p:nvSpPr>
+          <p:cNvPr id="19" name="Text 17"/>
+          <p:cNvSpPr/>
+          <p:nvPr/>
+        </p:nvSpPr>
+        <p:spPr>
+          <a:xfrm>
+            <a:off x="7863840" y="3017520"/>
+            <a:ext cx="3017520" cy="201168"/>
+          </a:xfrm>
+          <a:prstGeom prst="rect">
+            <a:avLst/>
+          </a:prstGeom>
+          <a:noFill/>
+          <a:ln/>
+        </p:spPr>
+        <p:txBody>
+          <a:bodyPr wrap="square" lIns="0" tIns="0" rIns="0" bIns="0" rtlCol="0" anchor="ctr"/>
+          <a:lstStyle/>
+          <a:p>
+            <a:pPr algn="ctr" indent="0" marL="0">
+              <a:buNone/>
+            </a:pPr>
+            <a:r>
+              <a:rPr lang="en-US" sz="1050" b="1" dirty="0">
+                <a:solidFill>
+                  <a:srgbClr val="003A63"/>
+                </a:solidFill>
+                <a:latin typeface="Aptos" pitchFamily="34" charset="0"/>
+                <a:ea typeface="Aptos" pitchFamily="34" charset="-122"/>
+                <a:cs typeface="Aptos" pitchFamily="34" charset="-120"/>
+              </a:rPr>
+              <a:t>Measure and monitor</a:t>
+            </a:r>
+            <a:endParaRPr lang="en-US" sz="1050" dirty="0"/>
+          </a:p>
+        </p:txBody>
+      </p:sp>
+      <p:sp>
+        <p:nvSpPr>
+          <p:cNvPr id="20" name="Shape 18"/>
+          <p:cNvSpPr/>
+          <p:nvPr/>
+        </p:nvSpPr>
+        <p:spPr>
+          <a:xfrm>
+            <a:off x="7635240" y="4498848"/>
+            <a:ext cx="3474720" cy="1143000"/>
+          </a:xfrm>
+          <a:prstGeom prst="roundRect">
+            <a:avLst>
+              <a:gd name="adj" fmla="val 9600"/>
+            </a:avLst>
+          </a:prstGeom>
+          <a:solidFill>
             <a:srgbClr val="EAF6F8"/>
           </a:solidFill>
           <a:ln w="12700">
@@ -10837,14 +12454,14 @@
       </p:sp>
       <p:sp>
         <p:nvSpPr>
-          <p:cNvPr id="14" name="Text 12"/>
-          <p:cNvSpPr/>
-          <p:nvPr/>
-        </p:nvSpPr>
-        <p:spPr>
-          <a:xfrm>
-            <a:off x="8074152" y="3666744"/>
-            <a:ext cx="2825496" cy="256032"/>
+          <p:cNvPr id="21" name="Text 19"/>
+          <p:cNvSpPr/>
+          <p:nvPr/>
+        </p:nvSpPr>
+        <p:spPr>
+          <a:xfrm>
+            <a:off x="7799832" y="4645152"/>
+            <a:ext cx="3145536" cy="256032"/>
           </a:xfrm>
           <a:prstGeom prst="rect">
             <a:avLst/>
@@ -10868,7 +12485,7 @@
                 <a:ea typeface="Aptos" pitchFamily="34" charset="-122"/>
                 <a:cs typeface="Aptos" pitchFamily="34" charset="-120"/>
               </a:rPr>
-              <a:t>Use this for</a:t>
+              <a:t>How to validate</a:t>
             </a:r>
             <a:endParaRPr lang="en-US" sz="1300" dirty="0"/>
           </a:p>
@@ -10876,14 +12493,14 @@
       </p:sp>
       <p:sp>
         <p:nvSpPr>
-          <p:cNvPr id="15" name="Text 13"/>
-          <p:cNvSpPr/>
-          <p:nvPr/>
-        </p:nvSpPr>
-        <p:spPr>
-          <a:xfrm>
-            <a:off x="8074152" y="4023360"/>
-            <a:ext cx="2825496" cy="1097280"/>
+          <p:cNvPr id="22" name="Text 20"/>
+          <p:cNvSpPr/>
+          <p:nvPr/>
+        </p:nvSpPr>
+        <p:spPr>
+          <a:xfrm>
+            <a:off x="7799832" y="5001768"/>
+            <a:ext cx="3145536" cy="502920"/>
           </a:xfrm>
           <a:prstGeom prst="rect">
             <a:avLst/>
@@ -10909,7 +12526,7 @@
                 <a:ea typeface="Aptos" pitchFamily="34" charset="-122"/>
                 <a:cs typeface="Aptos" pitchFamily="34" charset="-120"/>
               </a:rPr>
-              <a:t>Connect the concept to public health decisions, safeguards, documentation, or implementation work.</a:t>
+              <a:t>Connect the concept to data quality, model performance, validation evidence, monitoring measures, and decisions that remain under human control.</a:t>
             </a:r>
             <a:endParaRPr lang="en-US" sz="1550" dirty="0"/>
           </a:p>
@@ -11083,8 +12700,8 @@
         </p:nvSpPr>
         <p:spPr>
           <a:xfrm>
-            <a:off x="9966960" y="6537960"/>
-            <a:ext cx="1645920" cy="201168"/>
+            <a:off x="9646920" y="6537960"/>
+            <a:ext cx="1965960" cy="201168"/>
           </a:xfrm>
           <a:prstGeom prst="rect">
             <a:avLst/>
@@ -11108,7 +12725,7 @@
                 <a:ea typeface="Aptos" pitchFamily="34" charset="-122"/>
                 <a:cs typeface="Aptos" pitchFamily="34" charset="-120"/>
               </a:rPr>
-              <a:t>Â© Paula Soper</a:t>
+              <a:t>Copyright Paula Soper</a:t>
             </a:r>
             <a:endParaRPr lang="en-US" sz="800" dirty="0"/>
           </a:p>
@@ -11451,46 +13068,7 @@
       </p:sp>
       <p:sp>
         <p:nvSpPr>
-          <p:cNvPr id="15" name="Text 13"/>
-          <p:cNvSpPr/>
-          <p:nvPr/>
-        </p:nvSpPr>
-        <p:spPr>
-          <a:xfrm>
-            <a:off x="8817864" y="4187952"/>
-            <a:ext cx="201168" cy="256032"/>
-          </a:xfrm>
-          <a:prstGeom prst="rect">
-            <a:avLst/>
-          </a:prstGeom>
-          <a:noFill/>
-          <a:ln/>
-        </p:spPr>
-        <p:txBody>
-          <a:bodyPr wrap="square" lIns="0" tIns="0" rIns="0" bIns="0" rtlCol="0" anchor="ctr"/>
-          <a:lstStyle/>
-          <a:p>
-            <a:pPr algn="ctr" indent="0" marL="0">
-              <a:buNone/>
-            </a:pPr>
-            <a:r>
-              <a:rPr lang="en-US" sz="1800" b="1" dirty="0">
-                <a:solidFill>
-                  <a:srgbClr val="0068B7"/>
-                </a:solidFill>
-                <a:latin typeface="Aptos" pitchFamily="34" charset="0"/>
-                <a:ea typeface="Aptos" pitchFamily="34" charset="-122"/>
-                <a:cs typeface="Aptos" pitchFamily="34" charset="-120"/>
-              </a:rPr>
-              <a:t>â†’</a:t>
-            </a:r>
-            <a:endParaRPr lang="en-US" sz="1800" dirty="0"/>
-          </a:p>
-        </p:txBody>
-      </p:sp>
-      <p:sp>
-        <p:nvSpPr>
-          <p:cNvPr id="16" name="Shape 14"/>
+          <p:cNvPr id="15" name="Shape 13"/>
           <p:cNvSpPr/>
           <p:nvPr/>
         </p:nvSpPr>
@@ -11517,7 +13095,7 @@
       </p:sp>
       <p:sp>
         <p:nvSpPr>
-          <p:cNvPr id="17" name="Text 15"/>
+          <p:cNvPr id="16" name="Text 14"/>
           <p:cNvSpPr/>
           <p:nvPr/>
         </p:nvSpPr>
@@ -11558,46 +13136,7 @@
       </p:sp>
       <p:sp>
         <p:nvSpPr>
-          <p:cNvPr id="18" name="Text 16"/>
-          <p:cNvSpPr/>
-          <p:nvPr/>
-        </p:nvSpPr>
-        <p:spPr>
-          <a:xfrm>
-            <a:off x="10046208" y="4187952"/>
-            <a:ext cx="201168" cy="256032"/>
-          </a:xfrm>
-          <a:prstGeom prst="rect">
-            <a:avLst/>
-          </a:prstGeom>
-          <a:noFill/>
-          <a:ln/>
-        </p:spPr>
-        <p:txBody>
-          <a:bodyPr wrap="square" lIns="0" tIns="0" rIns="0" bIns="0" rtlCol="0" anchor="ctr"/>
-          <a:lstStyle/>
-          <a:p>
-            <a:pPr algn="ctr" indent="0" marL="0">
-              <a:buNone/>
-            </a:pPr>
-            <a:r>
-              <a:rPr lang="en-US" sz="1800" b="1" dirty="0">
-                <a:solidFill>
-                  <a:srgbClr val="0068B7"/>
-                </a:solidFill>
-                <a:latin typeface="Aptos" pitchFamily="34" charset="0"/>
-                <a:ea typeface="Aptos" pitchFamily="34" charset="-122"/>
-                <a:cs typeface="Aptos" pitchFamily="34" charset="-120"/>
-              </a:rPr>
-              <a:t>â†’</a:t>
-            </a:r>
-            <a:endParaRPr lang="en-US" sz="1800" dirty="0"/>
-          </a:p>
-        </p:txBody>
-      </p:sp>
-      <p:sp>
-        <p:nvSpPr>
-          <p:cNvPr id="19" name="Shape 17"/>
+          <p:cNvPr id="17" name="Shape 15"/>
           <p:cNvSpPr/>
           <p:nvPr/>
         </p:nvSpPr>
@@ -11624,7 +13163,7 @@
       </p:sp>
       <p:sp>
         <p:nvSpPr>
-          <p:cNvPr id="20" name="Text 18"/>
+          <p:cNvPr id="18" name="Text 16"/>
           <p:cNvSpPr/>
           <p:nvPr/>
         </p:nvSpPr>
@@ -11831,8 +13370,8 @@
         </p:nvSpPr>
         <p:spPr>
           <a:xfrm>
-            <a:off x="9966960" y="6537960"/>
-            <a:ext cx="1645920" cy="201168"/>
+            <a:off x="9646920" y="6537960"/>
+            <a:ext cx="1965960" cy="201168"/>
           </a:xfrm>
           <a:prstGeom prst="rect">
             <a:avLst/>
@@ -11856,7 +13395,7 @@
                 <a:ea typeface="Aptos" pitchFamily="34" charset="-122"/>
                 <a:cs typeface="Aptos" pitchFamily="34" charset="-120"/>
               </a:rPr>
-              <a:t>Â© Paula Soper</a:t>
+              <a:t>Copyright Paula Soper</a:t>
             </a:r>
             <a:endParaRPr lang="en-US" sz="800" dirty="0"/>
           </a:p>
@@ -12199,46 +13738,7 @@
       </p:sp>
       <p:sp>
         <p:nvSpPr>
-          <p:cNvPr id="15" name="Text 13"/>
-          <p:cNvSpPr/>
-          <p:nvPr/>
-        </p:nvSpPr>
-        <p:spPr>
-          <a:xfrm>
-            <a:off x="8817864" y="4187952"/>
-            <a:ext cx="201168" cy="256032"/>
-          </a:xfrm>
-          <a:prstGeom prst="rect">
-            <a:avLst/>
-          </a:prstGeom>
-          <a:noFill/>
-          <a:ln/>
-        </p:spPr>
-        <p:txBody>
-          <a:bodyPr wrap="square" lIns="0" tIns="0" rIns="0" bIns="0" rtlCol="0" anchor="ctr"/>
-          <a:lstStyle/>
-          <a:p>
-            <a:pPr algn="ctr" indent="0" marL="0">
-              <a:buNone/>
-            </a:pPr>
-            <a:r>
-              <a:rPr lang="en-US" sz="1800" b="1" dirty="0">
-                <a:solidFill>
-                  <a:srgbClr val="0068B7"/>
-                </a:solidFill>
-                <a:latin typeface="Aptos" pitchFamily="34" charset="0"/>
-                <a:ea typeface="Aptos" pitchFamily="34" charset="-122"/>
-                <a:cs typeface="Aptos" pitchFamily="34" charset="-120"/>
-              </a:rPr>
-              <a:t>â†’</a:t>
-            </a:r>
-            <a:endParaRPr lang="en-US" sz="1800" dirty="0"/>
-          </a:p>
-        </p:txBody>
-      </p:sp>
-      <p:sp>
-        <p:nvSpPr>
-          <p:cNvPr id="16" name="Shape 14"/>
+          <p:cNvPr id="15" name="Shape 13"/>
           <p:cNvSpPr/>
           <p:nvPr/>
         </p:nvSpPr>
@@ -12265,7 +13765,7 @@
       </p:sp>
       <p:sp>
         <p:nvSpPr>
-          <p:cNvPr id="17" name="Text 15"/>
+          <p:cNvPr id="16" name="Text 14"/>
           <p:cNvSpPr/>
           <p:nvPr/>
         </p:nvSpPr>
@@ -12306,46 +13806,7 @@
       </p:sp>
       <p:sp>
         <p:nvSpPr>
-          <p:cNvPr id="18" name="Text 16"/>
-          <p:cNvSpPr/>
-          <p:nvPr/>
-        </p:nvSpPr>
-        <p:spPr>
-          <a:xfrm>
-            <a:off x="10046208" y="4187952"/>
-            <a:ext cx="201168" cy="256032"/>
-          </a:xfrm>
-          <a:prstGeom prst="rect">
-            <a:avLst/>
-          </a:prstGeom>
-          <a:noFill/>
-          <a:ln/>
-        </p:spPr>
-        <p:txBody>
-          <a:bodyPr wrap="square" lIns="0" tIns="0" rIns="0" bIns="0" rtlCol="0" anchor="ctr"/>
-          <a:lstStyle/>
-          <a:p>
-            <a:pPr algn="ctr" indent="0" marL="0">
-              <a:buNone/>
-            </a:pPr>
-            <a:r>
-              <a:rPr lang="en-US" sz="1800" b="1" dirty="0">
-                <a:solidFill>
-                  <a:srgbClr val="0068B7"/>
-                </a:solidFill>
-                <a:latin typeface="Aptos" pitchFamily="34" charset="0"/>
-                <a:ea typeface="Aptos" pitchFamily="34" charset="-122"/>
-                <a:cs typeface="Aptos" pitchFamily="34" charset="-120"/>
-              </a:rPr>
-              <a:t>â†’</a:t>
-            </a:r>
-            <a:endParaRPr lang="en-US" sz="1800" dirty="0"/>
-          </a:p>
-        </p:txBody>
-      </p:sp>
-      <p:sp>
-        <p:nvSpPr>
-          <p:cNvPr id="19" name="Shape 17"/>
+          <p:cNvPr id="17" name="Shape 15"/>
           <p:cNvSpPr/>
           <p:nvPr/>
         </p:nvSpPr>
@@ -12372,7 +13833,7 @@
       </p:sp>
       <p:sp>
         <p:nvSpPr>
-          <p:cNvPr id="20" name="Text 18"/>
+          <p:cNvPr id="18" name="Text 16"/>
           <p:cNvSpPr/>
           <p:nvPr/>
         </p:nvSpPr>
@@ -12579,8 +14040,8 @@
         </p:nvSpPr>
         <p:spPr>
           <a:xfrm>
-            <a:off x="9966960" y="6537960"/>
-            <a:ext cx="1645920" cy="201168"/>
+            <a:off x="9646920" y="6537960"/>
+            <a:ext cx="1965960" cy="201168"/>
           </a:xfrm>
           <a:prstGeom prst="rect">
             <a:avLst/>
@@ -12604,7 +14065,7 @@
                 <a:ea typeface="Aptos" pitchFamily="34" charset="-122"/>
                 <a:cs typeface="Aptos" pitchFamily="34" charset="-120"/>
               </a:rPr>
-              <a:t>Â© Paula Soper</a:t>
+              <a:t>Copyright Paula Soper</a:t>
             </a:r>
             <a:endParaRPr lang="en-US" sz="800" dirty="0"/>
           </a:p>
@@ -12651,77 +14112,13 @@
       </p:sp>
       <p:sp>
         <p:nvSpPr>
-          <p:cNvPr id="8" name="Shape 6"/>
+          <p:cNvPr id="8" name="Text 6"/>
           <p:cNvSpPr/>
           <p:nvPr/>
         </p:nvSpPr>
         <p:spPr>
           <a:xfrm>
             <a:off x="640080" y="658368"/>
-            <a:ext cx="420624" cy="420624"/>
-          </a:xfrm>
-          <a:prstGeom prst="ellipse">
-            <a:avLst/>
-          </a:prstGeom>
-          <a:solidFill>
-            <a:srgbClr val="0068B7"/>
-          </a:solidFill>
-          <a:ln w="12700">
-            <a:solidFill>
-              <a:srgbClr val="0068B7"/>
-            </a:solidFill>
-            <a:prstDash val="solid"/>
-          </a:ln>
-        </p:spPr>
-      </p:sp>
-      <p:sp>
-        <p:nvSpPr>
-          <p:cNvPr id="9" name="Text 7"/>
-          <p:cNvSpPr/>
-          <p:nvPr/>
-        </p:nvSpPr>
-        <p:spPr>
-          <a:xfrm>
-            <a:off x="640080" y="731520"/>
-            <a:ext cx="420624" cy="164592"/>
-          </a:xfrm>
-          <a:prstGeom prst="rect">
-            <a:avLst/>
-          </a:prstGeom>
-          <a:noFill/>
-          <a:ln/>
-        </p:spPr>
-        <p:txBody>
-          <a:bodyPr wrap="square" lIns="0" tIns="0" rIns="0" bIns="0" rtlCol="0" anchor="ctr"/>
-          <a:lstStyle/>
-          <a:p>
-            <a:pPr algn="ctr" indent="0" marL="0">
-              <a:buNone/>
-            </a:pPr>
-            <a:r>
-              <a:rPr lang="en-US" sz="1100" b="1" dirty="0">
-                <a:solidFill>
-                  <a:srgbClr val="FFFFFF"/>
-                </a:solidFill>
-                <a:latin typeface="Aptos" pitchFamily="34" charset="0"/>
-                <a:ea typeface="Aptos" pitchFamily="34" charset="-122"/>
-                <a:cs typeface="Aptos" pitchFamily="34" charset="-120"/>
-              </a:rPr>
-              <a:t>1</a:t>
-            </a:r>
-            <a:endParaRPr lang="en-US" sz="1100" dirty="0"/>
-          </a:p>
-        </p:txBody>
-      </p:sp>
-      <p:sp>
-        <p:nvSpPr>
-          <p:cNvPr id="10" name="Text 8"/>
-          <p:cNvSpPr/>
-          <p:nvPr/>
-        </p:nvSpPr>
-        <p:spPr>
-          <a:xfrm>
-            <a:off x="640080" y="621792"/>
             <a:ext cx="10881360" cy="713232"/>
           </a:xfrm>
           <a:prstGeom prst="rect">
@@ -12756,14 +14153,14 @@
       </p:sp>
       <p:sp>
         <p:nvSpPr>
-          <p:cNvPr id="11" name="Text 9"/>
+          <p:cNvPr id="9" name="Text 7"/>
           <p:cNvSpPr/>
           <p:nvPr/>
         </p:nvSpPr>
         <p:spPr>
           <a:xfrm>
             <a:off x="868680" y="1508760"/>
-            <a:ext cx="6537960" cy="4160520"/>
+            <a:ext cx="6309360" cy="4160520"/>
           </a:xfrm>
           <a:prstGeom prst="rect">
             <a:avLst/>
@@ -12822,18 +14219,18 @@
       </p:sp>
       <p:sp>
         <p:nvSpPr>
-          <p:cNvPr id="12" name="Shape 10"/>
-          <p:cNvSpPr/>
-          <p:nvPr/>
-        </p:nvSpPr>
-        <p:spPr>
-          <a:xfrm>
-            <a:off x="7909560" y="1417320"/>
-            <a:ext cx="3154680" cy="1828800"/>
+          <p:cNvPr id="10" name="Shape 8"/>
+          <p:cNvSpPr/>
+          <p:nvPr/>
+        </p:nvSpPr>
+        <p:spPr>
+          <a:xfrm>
+            <a:off x="7635240" y="1325880"/>
+            <a:ext cx="3474720" cy="1325880"/>
           </a:xfrm>
           <a:prstGeom prst="roundRect">
             <a:avLst>
-              <a:gd name="adj" fmla="val 6000"/>
+              <a:gd name="adj" fmla="val 8276"/>
             </a:avLst>
           </a:prstGeom>
           <a:solidFill>
@@ -12849,14 +14246,14 @@
       </p:sp>
       <p:sp>
         <p:nvSpPr>
-          <p:cNvPr id="13" name="Text 11"/>
-          <p:cNvSpPr/>
-          <p:nvPr/>
-        </p:nvSpPr>
-        <p:spPr>
-          <a:xfrm>
-            <a:off x="8074152" y="1563624"/>
-            <a:ext cx="2825496" cy="256032"/>
+          <p:cNvPr id="11" name="Text 9"/>
+          <p:cNvSpPr/>
+          <p:nvPr/>
+        </p:nvSpPr>
+        <p:spPr>
+          <a:xfrm>
+            <a:off x="7799832" y="1472184"/>
+            <a:ext cx="3145536" cy="256032"/>
           </a:xfrm>
           <a:prstGeom prst="rect">
             <a:avLst/>
@@ -12880,7 +14277,7 @@
                 <a:ea typeface="Aptos" pitchFamily="34" charset="-122"/>
                 <a:cs typeface="Aptos" pitchFamily="34" charset="-120"/>
               </a:rPr>
-              <a:t>Key idea</a:t>
+              <a:t>Data decision</a:t>
             </a:r>
             <a:endParaRPr lang="en-US" sz="1300" dirty="0"/>
           </a:p>
@@ -12888,14 +14285,14 @@
       </p:sp>
       <p:sp>
         <p:nvSpPr>
-          <p:cNvPr id="14" name="Text 12"/>
-          <p:cNvSpPr/>
-          <p:nvPr/>
-        </p:nvSpPr>
-        <p:spPr>
-          <a:xfrm>
-            <a:off x="8074152" y="1920240"/>
-            <a:ext cx="2825496" cy="1188720"/>
+          <p:cNvPr id="12" name="Text 10"/>
+          <p:cNvSpPr/>
+          <p:nvPr/>
+        </p:nvSpPr>
+        <p:spPr>
+          <a:xfrm>
+            <a:off x="7799832" y="1828800"/>
+            <a:ext cx="3145536" cy="685800"/>
           </a:xfrm>
           <a:prstGeom prst="rect">
             <a:avLst/>
@@ -12929,21 +14326,212 @@
       </p:sp>
       <p:sp>
         <p:nvSpPr>
-          <p:cNvPr id="15" name="Shape 13"/>
-          <p:cNvSpPr/>
-          <p:nvPr/>
-        </p:nvSpPr>
-        <p:spPr>
-          <a:xfrm>
-            <a:off x="7909560" y="3520440"/>
-            <a:ext cx="3154680" cy="1737360"/>
+          <p:cNvPr id="13" name="Shape 11"/>
+          <p:cNvSpPr/>
+          <p:nvPr/>
+        </p:nvSpPr>
+        <p:spPr>
+          <a:xfrm>
+            <a:off x="7635240" y="2788920"/>
+            <a:ext cx="3474720" cy="1536192"/>
           </a:xfrm>
           <a:prstGeom prst="roundRect">
             <a:avLst>
-              <a:gd name="adj" fmla="val 6316"/>
+              <a:gd name="adj" fmla="val 7143"/>
             </a:avLst>
           </a:prstGeom>
           <a:solidFill>
+            <a:srgbClr val="FFFFFF">
+              <a:alpha val="88000"/>
+            </a:srgbClr>
+          </a:solidFill>
+          <a:ln w="12700">
+            <a:solidFill>
+              <a:srgbClr val="D6E8F2"/>
+            </a:solidFill>
+            <a:prstDash val="solid"/>
+          </a:ln>
+        </p:spPr>
+      </p:sp>
+      <p:sp>
+        <p:nvSpPr>
+          <p:cNvPr id="14" name="Shape 12"/>
+          <p:cNvSpPr/>
+          <p:nvPr/>
+        </p:nvSpPr>
+        <p:spPr>
+          <a:xfrm>
+            <a:off x="8138160" y="3474720"/>
+            <a:ext cx="256032" cy="411480"/>
+          </a:xfrm>
+          <a:prstGeom prst="rect">
+            <a:avLst/>
+          </a:prstGeom>
+          <a:solidFill>
+            <a:srgbClr val="0068B7"/>
+          </a:solidFill>
+          <a:ln w="12700">
+            <a:solidFill>
+              <a:srgbClr val="0068B7"/>
+            </a:solidFill>
+            <a:prstDash val="solid"/>
+          </a:ln>
+        </p:spPr>
+      </p:sp>
+      <p:sp>
+        <p:nvSpPr>
+          <p:cNvPr id="15" name="Shape 13"/>
+          <p:cNvSpPr/>
+          <p:nvPr/>
+        </p:nvSpPr>
+        <p:spPr>
+          <a:xfrm>
+            <a:off x="8577072" y="3172968"/>
+            <a:ext cx="256032" cy="713232"/>
+          </a:xfrm>
+          <a:prstGeom prst="rect">
+            <a:avLst/>
+          </a:prstGeom>
+          <a:solidFill>
+            <a:srgbClr val="2F8A28"/>
+          </a:solidFill>
+          <a:ln w="12700">
+            <a:solidFill>
+              <a:srgbClr val="2F8A28"/>
+            </a:solidFill>
+            <a:prstDash val="solid"/>
+          </a:ln>
+        </p:spPr>
+      </p:sp>
+      <p:sp>
+        <p:nvSpPr>
+          <p:cNvPr id="16" name="Shape 14"/>
+          <p:cNvSpPr/>
+          <p:nvPr/>
+        </p:nvSpPr>
+        <p:spPr>
+          <a:xfrm>
+            <a:off x="9015984" y="2880360"/>
+            <a:ext cx="256032" cy="1005840"/>
+          </a:xfrm>
+          <a:prstGeom prst="rect">
+            <a:avLst/>
+          </a:prstGeom>
+          <a:solidFill>
+            <a:srgbClr val="D69A2D"/>
+          </a:solidFill>
+          <a:ln w="12700">
+            <a:solidFill>
+              <a:srgbClr val="D69A2D"/>
+            </a:solidFill>
+            <a:prstDash val="solid"/>
+          </a:ln>
+        </p:spPr>
+      </p:sp>
+      <p:sp>
+        <p:nvSpPr>
+          <p:cNvPr id="17" name="Shape 15"/>
+          <p:cNvSpPr/>
+          <p:nvPr/>
+        </p:nvSpPr>
+        <p:spPr>
+          <a:xfrm>
+            <a:off x="9454896" y="3319272"/>
+            <a:ext cx="256032" cy="566928"/>
+          </a:xfrm>
+          <a:prstGeom prst="rect">
+            <a:avLst/>
+          </a:prstGeom>
+          <a:solidFill>
+            <a:srgbClr val="6A4CA3"/>
+          </a:solidFill>
+          <a:ln w="12700">
+            <a:solidFill>
+              <a:srgbClr val="6A4CA3"/>
+            </a:solidFill>
+            <a:prstDash val="solid"/>
+          </a:ln>
+        </p:spPr>
+      </p:sp>
+      <p:sp>
+        <p:nvSpPr>
+          <p:cNvPr id="18" name="Shape 16"/>
+          <p:cNvSpPr/>
+          <p:nvPr/>
+        </p:nvSpPr>
+        <p:spPr>
+          <a:xfrm>
+            <a:off x="8019288" y="3886200"/>
+            <a:ext cx="2706624" cy="0"/>
+          </a:xfrm>
+          <a:prstGeom prst="line">
+            <a:avLst/>
+          </a:prstGeom>
+          <a:noFill/>
+          <a:ln w="15240">
+            <a:solidFill>
+              <a:srgbClr val="003A63"/>
+            </a:solidFill>
+            <a:prstDash val="solid"/>
+          </a:ln>
+        </p:spPr>
+      </p:sp>
+      <p:sp>
+        <p:nvSpPr>
+          <p:cNvPr id="19" name="Text 17"/>
+          <p:cNvSpPr/>
+          <p:nvPr/>
+        </p:nvSpPr>
+        <p:spPr>
+          <a:xfrm>
+            <a:off x="7863840" y="3017520"/>
+            <a:ext cx="3017520" cy="201168"/>
+          </a:xfrm>
+          <a:prstGeom prst="rect">
+            <a:avLst/>
+          </a:prstGeom>
+          <a:noFill/>
+          <a:ln/>
+        </p:spPr>
+        <p:txBody>
+          <a:bodyPr wrap="square" lIns="0" tIns="0" rIns="0" bIns="0" rtlCol="0" anchor="ctr"/>
+          <a:lstStyle/>
+          <a:p>
+            <a:pPr algn="ctr" indent="0" marL="0">
+              <a:buNone/>
+            </a:pPr>
+            <a:r>
+              <a:rPr lang="en-US" sz="1050" b="1" dirty="0">
+                <a:solidFill>
+                  <a:srgbClr val="003A63"/>
+                </a:solidFill>
+                <a:latin typeface="Aptos" pitchFamily="34" charset="0"/>
+                <a:ea typeface="Aptos" pitchFamily="34" charset="-122"/>
+                <a:cs typeface="Aptos" pitchFamily="34" charset="-120"/>
+              </a:rPr>
+              <a:t>Measure and monitor</a:t>
+            </a:r>
+            <a:endParaRPr lang="en-US" sz="1050" dirty="0"/>
+          </a:p>
+        </p:txBody>
+      </p:sp>
+      <p:sp>
+        <p:nvSpPr>
+          <p:cNvPr id="20" name="Shape 18"/>
+          <p:cNvSpPr/>
+          <p:nvPr/>
+        </p:nvSpPr>
+        <p:spPr>
+          <a:xfrm>
+            <a:off x="7635240" y="4498848"/>
+            <a:ext cx="3474720" cy="1143000"/>
+          </a:xfrm>
+          <a:prstGeom prst="roundRect">
+            <a:avLst>
+              <a:gd name="adj" fmla="val 9600"/>
+            </a:avLst>
+          </a:prstGeom>
+          <a:solidFill>
             <a:srgbClr val="EAF6F8"/>
           </a:solidFill>
           <a:ln w="12700">
@@ -12956,14 +14544,14 @@
       </p:sp>
       <p:sp>
         <p:nvSpPr>
-          <p:cNvPr id="16" name="Text 14"/>
-          <p:cNvSpPr/>
-          <p:nvPr/>
-        </p:nvSpPr>
-        <p:spPr>
-          <a:xfrm>
-            <a:off x="8074152" y="3666744"/>
-            <a:ext cx="2825496" cy="256032"/>
+          <p:cNvPr id="21" name="Text 19"/>
+          <p:cNvSpPr/>
+          <p:nvPr/>
+        </p:nvSpPr>
+        <p:spPr>
+          <a:xfrm>
+            <a:off x="7799832" y="4645152"/>
+            <a:ext cx="3145536" cy="256032"/>
           </a:xfrm>
           <a:prstGeom prst="rect">
             <a:avLst/>
@@ -12987,7 +14575,7 @@
                 <a:ea typeface="Aptos" pitchFamily="34" charset="-122"/>
                 <a:cs typeface="Aptos" pitchFamily="34" charset="-120"/>
               </a:rPr>
-              <a:t>Use this for</a:t>
+              <a:t>How to validate</a:t>
             </a:r>
             <a:endParaRPr lang="en-US" sz="1300" dirty="0"/>
           </a:p>
@@ -12995,14 +14583,14 @@
       </p:sp>
       <p:sp>
         <p:nvSpPr>
-          <p:cNvPr id="17" name="Text 15"/>
-          <p:cNvSpPr/>
-          <p:nvPr/>
-        </p:nvSpPr>
-        <p:spPr>
-          <a:xfrm>
-            <a:off x="8074152" y="4023360"/>
-            <a:ext cx="2825496" cy="1097280"/>
+          <p:cNvPr id="22" name="Text 20"/>
+          <p:cNvSpPr/>
+          <p:nvPr/>
+        </p:nvSpPr>
+        <p:spPr>
+          <a:xfrm>
+            <a:off x="7799832" y="5001768"/>
+            <a:ext cx="3145536" cy="502920"/>
           </a:xfrm>
           <a:prstGeom prst="rect">
             <a:avLst/>
@@ -13028,7 +14616,7 @@
                 <a:ea typeface="Aptos" pitchFamily="34" charset="-122"/>
                 <a:cs typeface="Aptos" pitchFamily="34" charset="-120"/>
               </a:rPr>
-              <a:t>Connect the concept to public health decisions, safeguards, documentation, or implementation work.</a:t>
+              <a:t>Use the assignment to test whether you can explain the concept, apply it to a realistic public health situation, and identify what would need review before the work moves forward.</a:t>
             </a:r>
             <a:endParaRPr lang="en-US" sz="1550" dirty="0"/>
           </a:p>
@@ -13202,8 +14790,8 @@
         </p:nvSpPr>
         <p:spPr>
           <a:xfrm>
-            <a:off x="9966960" y="6537960"/>
-            <a:ext cx="1645920" cy="201168"/>
+            <a:off x="9646920" y="6537960"/>
+            <a:ext cx="1965960" cy="201168"/>
           </a:xfrm>
           <a:prstGeom prst="rect">
             <a:avLst/>
@@ -13227,7 +14815,7 @@
                 <a:ea typeface="Aptos" pitchFamily="34" charset="-122"/>
                 <a:cs typeface="Aptos" pitchFamily="34" charset="-120"/>
               </a:rPr>
-              <a:t>Â© Paula Soper</a:t>
+              <a:t>Copyright Paula Soper</a:t>
             </a:r>
             <a:endParaRPr lang="en-US" sz="800" dirty="0"/>
           </a:p>
@@ -13274,77 +14862,13 @@
       </p:sp>
       <p:sp>
         <p:nvSpPr>
-          <p:cNvPr id="8" name="Shape 6"/>
+          <p:cNvPr id="8" name="Text 6"/>
           <p:cNvSpPr/>
           <p:nvPr/>
         </p:nvSpPr>
         <p:spPr>
           <a:xfrm>
             <a:off x="640080" y="658368"/>
-            <a:ext cx="420624" cy="420624"/>
-          </a:xfrm>
-          <a:prstGeom prst="ellipse">
-            <a:avLst/>
-          </a:prstGeom>
-          <a:solidFill>
-            <a:srgbClr val="0068B7"/>
-          </a:solidFill>
-          <a:ln w="12700">
-            <a:solidFill>
-              <a:srgbClr val="0068B7"/>
-            </a:solidFill>
-            <a:prstDash val="solid"/>
-          </a:ln>
-        </p:spPr>
-      </p:sp>
-      <p:sp>
-        <p:nvSpPr>
-          <p:cNvPr id="9" name="Text 7"/>
-          <p:cNvSpPr/>
-          <p:nvPr/>
-        </p:nvSpPr>
-        <p:spPr>
-          <a:xfrm>
-            <a:off x="640080" y="731520"/>
-            <a:ext cx="420624" cy="164592"/>
-          </a:xfrm>
-          <a:prstGeom prst="rect">
-            <a:avLst/>
-          </a:prstGeom>
-          <a:noFill/>
-          <a:ln/>
-        </p:spPr>
-        <p:txBody>
-          <a:bodyPr wrap="square" lIns="0" tIns="0" rIns="0" bIns="0" rtlCol="0" anchor="ctr"/>
-          <a:lstStyle/>
-          <a:p>
-            <a:pPr algn="ctr" indent="0" marL="0">
-              <a:buNone/>
-            </a:pPr>
-            <a:r>
-              <a:rPr lang="en-US" sz="1100" b="1" dirty="0">
-                <a:solidFill>
-                  <a:srgbClr val="FFFFFF"/>
-                </a:solidFill>
-                <a:latin typeface="Aptos" pitchFamily="34" charset="0"/>
-                <a:ea typeface="Aptos" pitchFamily="34" charset="-122"/>
-                <a:cs typeface="Aptos" pitchFamily="34" charset="-120"/>
-              </a:rPr>
-              <a:t>2</a:t>
-            </a:r>
-            <a:endParaRPr lang="en-US" sz="1100" dirty="0"/>
-          </a:p>
-        </p:txBody>
-      </p:sp>
-      <p:sp>
-        <p:nvSpPr>
-          <p:cNvPr id="10" name="Text 8"/>
-          <p:cNvSpPr/>
-          <p:nvPr/>
-        </p:nvSpPr>
-        <p:spPr>
-          <a:xfrm>
-            <a:off x="640080" y="621792"/>
             <a:ext cx="10881360" cy="713232"/>
           </a:xfrm>
           <a:prstGeom prst="rect">
@@ -13379,14 +14903,14 @@
       </p:sp>
       <p:sp>
         <p:nvSpPr>
-          <p:cNvPr id="11" name="Text 9"/>
+          <p:cNvPr id="9" name="Text 7"/>
           <p:cNvSpPr/>
           <p:nvPr/>
         </p:nvSpPr>
         <p:spPr>
           <a:xfrm>
             <a:off x="868680" y="1508760"/>
-            <a:ext cx="6537960" cy="4160520"/>
+            <a:ext cx="6309360" cy="4160520"/>
           </a:xfrm>
           <a:prstGeom prst="rect">
             <a:avLst/>
@@ -13445,18 +14969,18 @@
       </p:sp>
       <p:sp>
         <p:nvSpPr>
-          <p:cNvPr id="12" name="Shape 10"/>
-          <p:cNvSpPr/>
-          <p:nvPr/>
-        </p:nvSpPr>
-        <p:spPr>
-          <a:xfrm>
-            <a:off x="7909560" y="1417320"/>
-            <a:ext cx="3154680" cy="1828800"/>
+          <p:cNvPr id="10" name="Shape 8"/>
+          <p:cNvSpPr/>
+          <p:nvPr/>
+        </p:nvSpPr>
+        <p:spPr>
+          <a:xfrm>
+            <a:off x="7635240" y="1325880"/>
+            <a:ext cx="3474720" cy="1325880"/>
           </a:xfrm>
           <a:prstGeom prst="roundRect">
             <a:avLst>
-              <a:gd name="adj" fmla="val 6000"/>
+              <a:gd name="adj" fmla="val 8276"/>
             </a:avLst>
           </a:prstGeom>
           <a:solidFill>
@@ -13472,14 +14996,14 @@
       </p:sp>
       <p:sp>
         <p:nvSpPr>
-          <p:cNvPr id="13" name="Text 11"/>
-          <p:cNvSpPr/>
-          <p:nvPr/>
-        </p:nvSpPr>
-        <p:spPr>
-          <a:xfrm>
-            <a:off x="8074152" y="1563624"/>
-            <a:ext cx="2825496" cy="256032"/>
+          <p:cNvPr id="11" name="Text 9"/>
+          <p:cNvSpPr/>
+          <p:nvPr/>
+        </p:nvSpPr>
+        <p:spPr>
+          <a:xfrm>
+            <a:off x="7799832" y="1472184"/>
+            <a:ext cx="3145536" cy="256032"/>
           </a:xfrm>
           <a:prstGeom prst="rect">
             <a:avLst/>
@@ -13503,7 +15027,7 @@
                 <a:ea typeface="Aptos" pitchFamily="34" charset="-122"/>
                 <a:cs typeface="Aptos" pitchFamily="34" charset="-120"/>
               </a:rPr>
-              <a:t>Key idea</a:t>
+              <a:t>Data decision</a:t>
             </a:r>
             <a:endParaRPr lang="en-US" sz="1300" dirty="0"/>
           </a:p>
@@ -13511,14 +15035,14 @@
       </p:sp>
       <p:sp>
         <p:nvSpPr>
-          <p:cNvPr id="14" name="Text 12"/>
-          <p:cNvSpPr/>
-          <p:nvPr/>
-        </p:nvSpPr>
-        <p:spPr>
-          <a:xfrm>
-            <a:off x="8074152" y="1920240"/>
-            <a:ext cx="2825496" cy="1188720"/>
+          <p:cNvPr id="12" name="Text 10"/>
+          <p:cNvSpPr/>
+          <p:nvPr/>
+        </p:nvSpPr>
+        <p:spPr>
+          <a:xfrm>
+            <a:off x="7799832" y="1828800"/>
+            <a:ext cx="3145536" cy="685800"/>
           </a:xfrm>
           <a:prstGeom prst="rect">
             <a:avLst/>
@@ -13552,21 +15076,212 @@
       </p:sp>
       <p:sp>
         <p:nvSpPr>
-          <p:cNvPr id="15" name="Shape 13"/>
-          <p:cNvSpPr/>
-          <p:nvPr/>
-        </p:nvSpPr>
-        <p:spPr>
-          <a:xfrm>
-            <a:off x="7909560" y="3520440"/>
-            <a:ext cx="3154680" cy="1737360"/>
+          <p:cNvPr id="13" name="Shape 11"/>
+          <p:cNvSpPr/>
+          <p:nvPr/>
+        </p:nvSpPr>
+        <p:spPr>
+          <a:xfrm>
+            <a:off x="7635240" y="2788920"/>
+            <a:ext cx="3474720" cy="1536192"/>
           </a:xfrm>
           <a:prstGeom prst="roundRect">
             <a:avLst>
-              <a:gd name="adj" fmla="val 6316"/>
+              <a:gd name="adj" fmla="val 7143"/>
             </a:avLst>
           </a:prstGeom>
           <a:solidFill>
+            <a:srgbClr val="FFFFFF">
+              <a:alpha val="88000"/>
+            </a:srgbClr>
+          </a:solidFill>
+          <a:ln w="12700">
+            <a:solidFill>
+              <a:srgbClr val="D6E8F2"/>
+            </a:solidFill>
+            <a:prstDash val="solid"/>
+          </a:ln>
+        </p:spPr>
+      </p:sp>
+      <p:sp>
+        <p:nvSpPr>
+          <p:cNvPr id="14" name="Shape 12"/>
+          <p:cNvSpPr/>
+          <p:nvPr/>
+        </p:nvSpPr>
+        <p:spPr>
+          <a:xfrm>
+            <a:off x="8138160" y="3474720"/>
+            <a:ext cx="256032" cy="411480"/>
+          </a:xfrm>
+          <a:prstGeom prst="rect">
+            <a:avLst/>
+          </a:prstGeom>
+          <a:solidFill>
+            <a:srgbClr val="0068B7"/>
+          </a:solidFill>
+          <a:ln w="12700">
+            <a:solidFill>
+              <a:srgbClr val="0068B7"/>
+            </a:solidFill>
+            <a:prstDash val="solid"/>
+          </a:ln>
+        </p:spPr>
+      </p:sp>
+      <p:sp>
+        <p:nvSpPr>
+          <p:cNvPr id="15" name="Shape 13"/>
+          <p:cNvSpPr/>
+          <p:nvPr/>
+        </p:nvSpPr>
+        <p:spPr>
+          <a:xfrm>
+            <a:off x="8577072" y="3172968"/>
+            <a:ext cx="256032" cy="713232"/>
+          </a:xfrm>
+          <a:prstGeom prst="rect">
+            <a:avLst/>
+          </a:prstGeom>
+          <a:solidFill>
+            <a:srgbClr val="2F8A28"/>
+          </a:solidFill>
+          <a:ln w="12700">
+            <a:solidFill>
+              <a:srgbClr val="2F8A28"/>
+            </a:solidFill>
+            <a:prstDash val="solid"/>
+          </a:ln>
+        </p:spPr>
+      </p:sp>
+      <p:sp>
+        <p:nvSpPr>
+          <p:cNvPr id="16" name="Shape 14"/>
+          <p:cNvSpPr/>
+          <p:nvPr/>
+        </p:nvSpPr>
+        <p:spPr>
+          <a:xfrm>
+            <a:off x="9015984" y="2880360"/>
+            <a:ext cx="256032" cy="1005840"/>
+          </a:xfrm>
+          <a:prstGeom prst="rect">
+            <a:avLst/>
+          </a:prstGeom>
+          <a:solidFill>
+            <a:srgbClr val="D69A2D"/>
+          </a:solidFill>
+          <a:ln w="12700">
+            <a:solidFill>
+              <a:srgbClr val="D69A2D"/>
+            </a:solidFill>
+            <a:prstDash val="solid"/>
+          </a:ln>
+        </p:spPr>
+      </p:sp>
+      <p:sp>
+        <p:nvSpPr>
+          <p:cNvPr id="17" name="Shape 15"/>
+          <p:cNvSpPr/>
+          <p:nvPr/>
+        </p:nvSpPr>
+        <p:spPr>
+          <a:xfrm>
+            <a:off x="9454896" y="3319272"/>
+            <a:ext cx="256032" cy="566928"/>
+          </a:xfrm>
+          <a:prstGeom prst="rect">
+            <a:avLst/>
+          </a:prstGeom>
+          <a:solidFill>
+            <a:srgbClr val="6A4CA3"/>
+          </a:solidFill>
+          <a:ln w="12700">
+            <a:solidFill>
+              <a:srgbClr val="6A4CA3"/>
+            </a:solidFill>
+            <a:prstDash val="solid"/>
+          </a:ln>
+        </p:spPr>
+      </p:sp>
+      <p:sp>
+        <p:nvSpPr>
+          <p:cNvPr id="18" name="Shape 16"/>
+          <p:cNvSpPr/>
+          <p:nvPr/>
+        </p:nvSpPr>
+        <p:spPr>
+          <a:xfrm>
+            <a:off x="8019288" y="3886200"/>
+            <a:ext cx="2706624" cy="0"/>
+          </a:xfrm>
+          <a:prstGeom prst="line">
+            <a:avLst/>
+          </a:prstGeom>
+          <a:noFill/>
+          <a:ln w="15240">
+            <a:solidFill>
+              <a:srgbClr val="003A63"/>
+            </a:solidFill>
+            <a:prstDash val="solid"/>
+          </a:ln>
+        </p:spPr>
+      </p:sp>
+      <p:sp>
+        <p:nvSpPr>
+          <p:cNvPr id="19" name="Text 17"/>
+          <p:cNvSpPr/>
+          <p:nvPr/>
+        </p:nvSpPr>
+        <p:spPr>
+          <a:xfrm>
+            <a:off x="7863840" y="3017520"/>
+            <a:ext cx="3017520" cy="201168"/>
+          </a:xfrm>
+          <a:prstGeom prst="rect">
+            <a:avLst/>
+          </a:prstGeom>
+          <a:noFill/>
+          <a:ln/>
+        </p:spPr>
+        <p:txBody>
+          <a:bodyPr wrap="square" lIns="0" tIns="0" rIns="0" bIns="0" rtlCol="0" anchor="ctr"/>
+          <a:lstStyle/>
+          <a:p>
+            <a:pPr algn="ctr" indent="0" marL="0">
+              <a:buNone/>
+            </a:pPr>
+            <a:r>
+              <a:rPr lang="en-US" sz="1050" b="1" dirty="0">
+                <a:solidFill>
+                  <a:srgbClr val="003A63"/>
+                </a:solidFill>
+                <a:latin typeface="Aptos" pitchFamily="34" charset="0"/>
+                <a:ea typeface="Aptos" pitchFamily="34" charset="-122"/>
+                <a:cs typeface="Aptos" pitchFamily="34" charset="-120"/>
+              </a:rPr>
+              <a:t>Measure and monitor</a:t>
+            </a:r>
+            <a:endParaRPr lang="en-US" sz="1050" dirty="0"/>
+          </a:p>
+        </p:txBody>
+      </p:sp>
+      <p:sp>
+        <p:nvSpPr>
+          <p:cNvPr id="20" name="Shape 18"/>
+          <p:cNvSpPr/>
+          <p:nvPr/>
+        </p:nvSpPr>
+        <p:spPr>
+          <a:xfrm>
+            <a:off x="7635240" y="4498848"/>
+            <a:ext cx="3474720" cy="1143000"/>
+          </a:xfrm>
+          <a:prstGeom prst="roundRect">
+            <a:avLst>
+              <a:gd name="adj" fmla="val 9600"/>
+            </a:avLst>
+          </a:prstGeom>
+          <a:solidFill>
             <a:srgbClr val="EAF6F8"/>
           </a:solidFill>
           <a:ln w="12700">
@@ -13579,14 +15294,14 @@
       </p:sp>
       <p:sp>
         <p:nvSpPr>
-          <p:cNvPr id="16" name="Text 14"/>
-          <p:cNvSpPr/>
-          <p:nvPr/>
-        </p:nvSpPr>
-        <p:spPr>
-          <a:xfrm>
-            <a:off x="8074152" y="3666744"/>
-            <a:ext cx="2825496" cy="256032"/>
+          <p:cNvPr id="21" name="Text 19"/>
+          <p:cNvSpPr/>
+          <p:nvPr/>
+        </p:nvSpPr>
+        <p:spPr>
+          <a:xfrm>
+            <a:off x="7799832" y="4645152"/>
+            <a:ext cx="3145536" cy="256032"/>
           </a:xfrm>
           <a:prstGeom prst="rect">
             <a:avLst/>
@@ -13610,7 +15325,7 @@
                 <a:ea typeface="Aptos" pitchFamily="34" charset="-122"/>
                 <a:cs typeface="Aptos" pitchFamily="34" charset="-120"/>
               </a:rPr>
-              <a:t>Use this for</a:t>
+              <a:t>How to validate</a:t>
             </a:r>
             <a:endParaRPr lang="en-US" sz="1300" dirty="0"/>
           </a:p>
@@ -13618,14 +15333,14 @@
       </p:sp>
       <p:sp>
         <p:nvSpPr>
-          <p:cNvPr id="17" name="Text 15"/>
-          <p:cNvSpPr/>
-          <p:nvPr/>
-        </p:nvSpPr>
-        <p:spPr>
-          <a:xfrm>
-            <a:off x="8074152" y="4023360"/>
-            <a:ext cx="2825496" cy="1097280"/>
+          <p:cNvPr id="22" name="Text 20"/>
+          <p:cNvSpPr/>
+          <p:nvPr/>
+        </p:nvSpPr>
+        <p:spPr>
+          <a:xfrm>
+            <a:off x="7799832" y="5001768"/>
+            <a:ext cx="3145536" cy="502920"/>
           </a:xfrm>
           <a:prstGeom prst="rect">
             <a:avLst/>
@@ -13651,7 +15366,7 @@
                 <a:ea typeface="Aptos" pitchFamily="34" charset="-122"/>
                 <a:cs typeface="Aptos" pitchFamily="34" charset="-120"/>
               </a:rPr>
-              <a:t>Connect the concept to public health decisions, safeguards, documentation, or implementation work.</a:t>
+              <a:t>Connect the concept to data quality, model performance, validation evidence, monitoring measures, and decisions that remain under human control.</a:t>
             </a:r>
             <a:endParaRPr lang="en-US" sz="1550" dirty="0"/>
           </a:p>
@@ -13825,8 +15540,8 @@
         </p:nvSpPr>
         <p:spPr>
           <a:xfrm>
-            <a:off x="9966960" y="6537960"/>
-            <a:ext cx="1645920" cy="201168"/>
+            <a:off x="9646920" y="6537960"/>
+            <a:ext cx="1965960" cy="201168"/>
           </a:xfrm>
           <a:prstGeom prst="rect">
             <a:avLst/>
@@ -13850,7 +15565,7 @@
                 <a:ea typeface="Aptos" pitchFamily="34" charset="-122"/>
                 <a:cs typeface="Aptos" pitchFamily="34" charset="-120"/>
               </a:rPr>
-              <a:t>Â© Paula Soper</a:t>
+              <a:t>Copyright Paula Soper</a:t>
             </a:r>
             <a:endParaRPr lang="en-US" sz="800" dirty="0"/>
           </a:p>
@@ -13897,77 +15612,13 @@
       </p:sp>
       <p:sp>
         <p:nvSpPr>
-          <p:cNvPr id="8" name="Shape 6"/>
+          <p:cNvPr id="8" name="Text 6"/>
           <p:cNvSpPr/>
           <p:nvPr/>
         </p:nvSpPr>
         <p:spPr>
           <a:xfrm>
             <a:off x="640080" y="658368"/>
-            <a:ext cx="420624" cy="420624"/>
-          </a:xfrm>
-          <a:prstGeom prst="ellipse">
-            <a:avLst/>
-          </a:prstGeom>
-          <a:solidFill>
-            <a:srgbClr val="0068B7"/>
-          </a:solidFill>
-          <a:ln w="12700">
-            <a:solidFill>
-              <a:srgbClr val="0068B7"/>
-            </a:solidFill>
-            <a:prstDash val="solid"/>
-          </a:ln>
-        </p:spPr>
-      </p:sp>
-      <p:sp>
-        <p:nvSpPr>
-          <p:cNvPr id="9" name="Text 7"/>
-          <p:cNvSpPr/>
-          <p:nvPr/>
-        </p:nvSpPr>
-        <p:spPr>
-          <a:xfrm>
-            <a:off x="640080" y="731520"/>
-            <a:ext cx="420624" cy="164592"/>
-          </a:xfrm>
-          <a:prstGeom prst="rect">
-            <a:avLst/>
-          </a:prstGeom>
-          <a:noFill/>
-          <a:ln/>
-        </p:spPr>
-        <p:txBody>
-          <a:bodyPr wrap="square" lIns="0" tIns="0" rIns="0" bIns="0" rtlCol="0" anchor="ctr"/>
-          <a:lstStyle/>
-          <a:p>
-            <a:pPr algn="ctr" indent="0" marL="0">
-              <a:buNone/>
-            </a:pPr>
-            <a:r>
-              <a:rPr lang="en-US" sz="1100" b="1" dirty="0">
-                <a:solidFill>
-                  <a:srgbClr val="FFFFFF"/>
-                </a:solidFill>
-                <a:latin typeface="Aptos" pitchFamily="34" charset="0"/>
-                <a:ea typeface="Aptos" pitchFamily="34" charset="-122"/>
-                <a:cs typeface="Aptos" pitchFamily="34" charset="-120"/>
-              </a:rPr>
-              <a:t>3</a:t>
-            </a:r>
-            <a:endParaRPr lang="en-US" sz="1100" dirty="0"/>
-          </a:p>
-        </p:txBody>
-      </p:sp>
-      <p:sp>
-        <p:nvSpPr>
-          <p:cNvPr id="10" name="Text 8"/>
-          <p:cNvSpPr/>
-          <p:nvPr/>
-        </p:nvSpPr>
-        <p:spPr>
-          <a:xfrm>
-            <a:off x="640080" y="621792"/>
             <a:ext cx="10881360" cy="713232"/>
           </a:xfrm>
           <a:prstGeom prst="rect">
@@ -14002,14 +15653,14 @@
       </p:sp>
       <p:sp>
         <p:nvSpPr>
-          <p:cNvPr id="11" name="Text 9"/>
+          <p:cNvPr id="9" name="Text 7"/>
           <p:cNvSpPr/>
           <p:nvPr/>
         </p:nvSpPr>
         <p:spPr>
           <a:xfrm>
             <a:off x="868680" y="1508760"/>
-            <a:ext cx="6537960" cy="4160520"/>
+            <a:ext cx="6309360" cy="4160520"/>
           </a:xfrm>
           <a:prstGeom prst="rect">
             <a:avLst/>
@@ -14068,18 +15719,18 @@
       </p:sp>
       <p:sp>
         <p:nvSpPr>
-          <p:cNvPr id="12" name="Shape 10"/>
-          <p:cNvSpPr/>
-          <p:nvPr/>
-        </p:nvSpPr>
-        <p:spPr>
-          <a:xfrm>
-            <a:off x="7909560" y="1417320"/>
-            <a:ext cx="3154680" cy="1828800"/>
+          <p:cNvPr id="10" name="Shape 8"/>
+          <p:cNvSpPr/>
+          <p:nvPr/>
+        </p:nvSpPr>
+        <p:spPr>
+          <a:xfrm>
+            <a:off x="7635240" y="1325880"/>
+            <a:ext cx="3474720" cy="1325880"/>
           </a:xfrm>
           <a:prstGeom prst="roundRect">
             <a:avLst>
-              <a:gd name="adj" fmla="val 6000"/>
+              <a:gd name="adj" fmla="val 8276"/>
             </a:avLst>
           </a:prstGeom>
           <a:solidFill>
@@ -14095,14 +15746,14 @@
       </p:sp>
       <p:sp>
         <p:nvSpPr>
-          <p:cNvPr id="13" name="Text 11"/>
-          <p:cNvSpPr/>
-          <p:nvPr/>
-        </p:nvSpPr>
-        <p:spPr>
-          <a:xfrm>
-            <a:off x="8074152" y="1563624"/>
-            <a:ext cx="2825496" cy="256032"/>
+          <p:cNvPr id="11" name="Text 9"/>
+          <p:cNvSpPr/>
+          <p:nvPr/>
+        </p:nvSpPr>
+        <p:spPr>
+          <a:xfrm>
+            <a:off x="7799832" y="1472184"/>
+            <a:ext cx="3145536" cy="256032"/>
           </a:xfrm>
           <a:prstGeom prst="rect">
             <a:avLst/>
@@ -14126,7 +15777,7 @@
                 <a:ea typeface="Aptos" pitchFamily="34" charset="-122"/>
                 <a:cs typeface="Aptos" pitchFamily="34" charset="-120"/>
               </a:rPr>
-              <a:t>Key idea</a:t>
+              <a:t>Data decision</a:t>
             </a:r>
             <a:endParaRPr lang="en-US" sz="1300" dirty="0"/>
           </a:p>
@@ -14134,14 +15785,14 @@
       </p:sp>
       <p:sp>
         <p:nvSpPr>
-          <p:cNvPr id="14" name="Text 12"/>
-          <p:cNvSpPr/>
-          <p:nvPr/>
-        </p:nvSpPr>
-        <p:spPr>
-          <a:xfrm>
-            <a:off x="8074152" y="1920240"/>
-            <a:ext cx="2825496" cy="1188720"/>
+          <p:cNvPr id="12" name="Text 10"/>
+          <p:cNvSpPr/>
+          <p:nvPr/>
+        </p:nvSpPr>
+        <p:spPr>
+          <a:xfrm>
+            <a:off x="7799832" y="1828800"/>
+            <a:ext cx="3145536" cy="685800"/>
           </a:xfrm>
           <a:prstGeom prst="rect">
             <a:avLst/>
@@ -14175,21 +15826,212 @@
       </p:sp>
       <p:sp>
         <p:nvSpPr>
-          <p:cNvPr id="15" name="Shape 13"/>
-          <p:cNvSpPr/>
-          <p:nvPr/>
-        </p:nvSpPr>
-        <p:spPr>
-          <a:xfrm>
-            <a:off x="7909560" y="3520440"/>
-            <a:ext cx="3154680" cy="1737360"/>
+          <p:cNvPr id="13" name="Shape 11"/>
+          <p:cNvSpPr/>
+          <p:nvPr/>
+        </p:nvSpPr>
+        <p:spPr>
+          <a:xfrm>
+            <a:off x="7635240" y="2788920"/>
+            <a:ext cx="3474720" cy="1536192"/>
           </a:xfrm>
           <a:prstGeom prst="roundRect">
             <a:avLst>
-              <a:gd name="adj" fmla="val 6316"/>
+              <a:gd name="adj" fmla="val 7143"/>
             </a:avLst>
           </a:prstGeom>
           <a:solidFill>
+            <a:srgbClr val="FFFFFF">
+              <a:alpha val="88000"/>
+            </a:srgbClr>
+          </a:solidFill>
+          <a:ln w="12700">
+            <a:solidFill>
+              <a:srgbClr val="D6E8F2"/>
+            </a:solidFill>
+            <a:prstDash val="solid"/>
+          </a:ln>
+        </p:spPr>
+      </p:sp>
+      <p:sp>
+        <p:nvSpPr>
+          <p:cNvPr id="14" name="Shape 12"/>
+          <p:cNvSpPr/>
+          <p:nvPr/>
+        </p:nvSpPr>
+        <p:spPr>
+          <a:xfrm>
+            <a:off x="8138160" y="3474720"/>
+            <a:ext cx="256032" cy="411480"/>
+          </a:xfrm>
+          <a:prstGeom prst="rect">
+            <a:avLst/>
+          </a:prstGeom>
+          <a:solidFill>
+            <a:srgbClr val="0068B7"/>
+          </a:solidFill>
+          <a:ln w="12700">
+            <a:solidFill>
+              <a:srgbClr val="0068B7"/>
+            </a:solidFill>
+            <a:prstDash val="solid"/>
+          </a:ln>
+        </p:spPr>
+      </p:sp>
+      <p:sp>
+        <p:nvSpPr>
+          <p:cNvPr id="15" name="Shape 13"/>
+          <p:cNvSpPr/>
+          <p:nvPr/>
+        </p:nvSpPr>
+        <p:spPr>
+          <a:xfrm>
+            <a:off x="8577072" y="3172968"/>
+            <a:ext cx="256032" cy="713232"/>
+          </a:xfrm>
+          <a:prstGeom prst="rect">
+            <a:avLst/>
+          </a:prstGeom>
+          <a:solidFill>
+            <a:srgbClr val="2F8A28"/>
+          </a:solidFill>
+          <a:ln w="12700">
+            <a:solidFill>
+              <a:srgbClr val="2F8A28"/>
+            </a:solidFill>
+            <a:prstDash val="solid"/>
+          </a:ln>
+        </p:spPr>
+      </p:sp>
+      <p:sp>
+        <p:nvSpPr>
+          <p:cNvPr id="16" name="Shape 14"/>
+          <p:cNvSpPr/>
+          <p:nvPr/>
+        </p:nvSpPr>
+        <p:spPr>
+          <a:xfrm>
+            <a:off x="9015984" y="2880360"/>
+            <a:ext cx="256032" cy="1005840"/>
+          </a:xfrm>
+          <a:prstGeom prst="rect">
+            <a:avLst/>
+          </a:prstGeom>
+          <a:solidFill>
+            <a:srgbClr val="D69A2D"/>
+          </a:solidFill>
+          <a:ln w="12700">
+            <a:solidFill>
+              <a:srgbClr val="D69A2D"/>
+            </a:solidFill>
+            <a:prstDash val="solid"/>
+          </a:ln>
+        </p:spPr>
+      </p:sp>
+      <p:sp>
+        <p:nvSpPr>
+          <p:cNvPr id="17" name="Shape 15"/>
+          <p:cNvSpPr/>
+          <p:nvPr/>
+        </p:nvSpPr>
+        <p:spPr>
+          <a:xfrm>
+            <a:off x="9454896" y="3319272"/>
+            <a:ext cx="256032" cy="566928"/>
+          </a:xfrm>
+          <a:prstGeom prst="rect">
+            <a:avLst/>
+          </a:prstGeom>
+          <a:solidFill>
+            <a:srgbClr val="6A4CA3"/>
+          </a:solidFill>
+          <a:ln w="12700">
+            <a:solidFill>
+              <a:srgbClr val="6A4CA3"/>
+            </a:solidFill>
+            <a:prstDash val="solid"/>
+          </a:ln>
+        </p:spPr>
+      </p:sp>
+      <p:sp>
+        <p:nvSpPr>
+          <p:cNvPr id="18" name="Shape 16"/>
+          <p:cNvSpPr/>
+          <p:nvPr/>
+        </p:nvSpPr>
+        <p:spPr>
+          <a:xfrm>
+            <a:off x="8019288" y="3886200"/>
+            <a:ext cx="2706624" cy="0"/>
+          </a:xfrm>
+          <a:prstGeom prst="line">
+            <a:avLst/>
+          </a:prstGeom>
+          <a:noFill/>
+          <a:ln w="15240">
+            <a:solidFill>
+              <a:srgbClr val="003A63"/>
+            </a:solidFill>
+            <a:prstDash val="solid"/>
+          </a:ln>
+        </p:spPr>
+      </p:sp>
+      <p:sp>
+        <p:nvSpPr>
+          <p:cNvPr id="19" name="Text 17"/>
+          <p:cNvSpPr/>
+          <p:nvPr/>
+        </p:nvSpPr>
+        <p:spPr>
+          <a:xfrm>
+            <a:off x="7863840" y="3017520"/>
+            <a:ext cx="3017520" cy="201168"/>
+          </a:xfrm>
+          <a:prstGeom prst="rect">
+            <a:avLst/>
+          </a:prstGeom>
+          <a:noFill/>
+          <a:ln/>
+        </p:spPr>
+        <p:txBody>
+          <a:bodyPr wrap="square" lIns="0" tIns="0" rIns="0" bIns="0" rtlCol="0" anchor="ctr"/>
+          <a:lstStyle/>
+          <a:p>
+            <a:pPr algn="ctr" indent="0" marL="0">
+              <a:buNone/>
+            </a:pPr>
+            <a:r>
+              <a:rPr lang="en-US" sz="1050" b="1" dirty="0">
+                <a:solidFill>
+                  <a:srgbClr val="003A63"/>
+                </a:solidFill>
+                <a:latin typeface="Aptos" pitchFamily="34" charset="0"/>
+                <a:ea typeface="Aptos" pitchFamily="34" charset="-122"/>
+                <a:cs typeface="Aptos" pitchFamily="34" charset="-120"/>
+              </a:rPr>
+              <a:t>Measure and monitor</a:t>
+            </a:r>
+            <a:endParaRPr lang="en-US" sz="1050" dirty="0"/>
+          </a:p>
+        </p:txBody>
+      </p:sp>
+      <p:sp>
+        <p:nvSpPr>
+          <p:cNvPr id="20" name="Shape 18"/>
+          <p:cNvSpPr/>
+          <p:nvPr/>
+        </p:nvSpPr>
+        <p:spPr>
+          <a:xfrm>
+            <a:off x="7635240" y="4498848"/>
+            <a:ext cx="3474720" cy="1143000"/>
+          </a:xfrm>
+          <a:prstGeom prst="roundRect">
+            <a:avLst>
+              <a:gd name="adj" fmla="val 9600"/>
+            </a:avLst>
+          </a:prstGeom>
+          <a:solidFill>
             <a:srgbClr val="EAF6F8"/>
           </a:solidFill>
           <a:ln w="12700">
@@ -14202,14 +16044,14 @@
       </p:sp>
       <p:sp>
         <p:nvSpPr>
-          <p:cNvPr id="16" name="Text 14"/>
-          <p:cNvSpPr/>
-          <p:nvPr/>
-        </p:nvSpPr>
-        <p:spPr>
-          <a:xfrm>
-            <a:off x="8074152" y="3666744"/>
-            <a:ext cx="2825496" cy="256032"/>
+          <p:cNvPr id="21" name="Text 19"/>
+          <p:cNvSpPr/>
+          <p:nvPr/>
+        </p:nvSpPr>
+        <p:spPr>
+          <a:xfrm>
+            <a:off x="7799832" y="4645152"/>
+            <a:ext cx="3145536" cy="256032"/>
           </a:xfrm>
           <a:prstGeom prst="rect">
             <a:avLst/>
@@ -14233,7 +16075,7 @@
                 <a:ea typeface="Aptos" pitchFamily="34" charset="-122"/>
                 <a:cs typeface="Aptos" pitchFamily="34" charset="-120"/>
               </a:rPr>
-              <a:t>Use this for</a:t>
+              <a:t>How to validate</a:t>
             </a:r>
             <a:endParaRPr lang="en-US" sz="1300" dirty="0"/>
           </a:p>
@@ -14241,14 +16083,14 @@
       </p:sp>
       <p:sp>
         <p:nvSpPr>
-          <p:cNvPr id="17" name="Text 15"/>
-          <p:cNvSpPr/>
-          <p:nvPr/>
-        </p:nvSpPr>
-        <p:spPr>
-          <a:xfrm>
-            <a:off x="8074152" y="4023360"/>
-            <a:ext cx="2825496" cy="1097280"/>
+          <p:cNvPr id="22" name="Text 20"/>
+          <p:cNvSpPr/>
+          <p:nvPr/>
+        </p:nvSpPr>
+        <p:spPr>
+          <a:xfrm>
+            <a:off x="7799832" y="5001768"/>
+            <a:ext cx="3145536" cy="502920"/>
           </a:xfrm>
           <a:prstGeom prst="rect">
             <a:avLst/>
@@ -14274,7 +16116,7 @@
                 <a:ea typeface="Aptos" pitchFamily="34" charset="-122"/>
                 <a:cs typeface="Aptos" pitchFamily="34" charset="-120"/>
               </a:rPr>
-              <a:t>Connect the concept to public health decisions, safeguards, documentation, or implementation work.</a:t>
+              <a:t>Connect the concept to data quality, model performance, validation evidence, monitoring measures, and decisions that remain under human control.</a:t>
             </a:r>
             <a:endParaRPr lang="en-US" sz="1550" dirty="0"/>
           </a:p>
@@ -14448,8 +16290,8 @@
         </p:nvSpPr>
         <p:spPr>
           <a:xfrm>
-            <a:off x="9966960" y="6537960"/>
-            <a:ext cx="1645920" cy="201168"/>
+            <a:off x="9646920" y="6537960"/>
+            <a:ext cx="1965960" cy="201168"/>
           </a:xfrm>
           <a:prstGeom prst="rect">
             <a:avLst/>
@@ -14473,7 +16315,7 @@
                 <a:ea typeface="Aptos" pitchFamily="34" charset="-122"/>
                 <a:cs typeface="Aptos" pitchFamily="34" charset="-120"/>
               </a:rPr>
-              <a:t>Â© Paula Soper</a:t>
+              <a:t>Copyright Paula Soper</a:t>
             </a:r>
             <a:endParaRPr lang="en-US" sz="800" dirty="0"/>
           </a:p>
@@ -14520,77 +16362,13 @@
       </p:sp>
       <p:sp>
         <p:nvSpPr>
-          <p:cNvPr id="8" name="Shape 6"/>
+          <p:cNvPr id="8" name="Text 6"/>
           <p:cNvSpPr/>
           <p:nvPr/>
         </p:nvSpPr>
         <p:spPr>
           <a:xfrm>
             <a:off x="640080" y="658368"/>
-            <a:ext cx="420624" cy="420624"/>
-          </a:xfrm>
-          <a:prstGeom prst="ellipse">
-            <a:avLst/>
-          </a:prstGeom>
-          <a:solidFill>
-            <a:srgbClr val="0068B7"/>
-          </a:solidFill>
-          <a:ln w="12700">
-            <a:solidFill>
-              <a:srgbClr val="0068B7"/>
-            </a:solidFill>
-            <a:prstDash val="solid"/>
-          </a:ln>
-        </p:spPr>
-      </p:sp>
-      <p:sp>
-        <p:nvSpPr>
-          <p:cNvPr id="9" name="Text 7"/>
-          <p:cNvSpPr/>
-          <p:nvPr/>
-        </p:nvSpPr>
-        <p:spPr>
-          <a:xfrm>
-            <a:off x="640080" y="731520"/>
-            <a:ext cx="420624" cy="164592"/>
-          </a:xfrm>
-          <a:prstGeom prst="rect">
-            <a:avLst/>
-          </a:prstGeom>
-          <a:noFill/>
-          <a:ln/>
-        </p:spPr>
-        <p:txBody>
-          <a:bodyPr wrap="square" lIns="0" tIns="0" rIns="0" bIns="0" rtlCol="0" anchor="ctr"/>
-          <a:lstStyle/>
-          <a:p>
-            <a:pPr algn="ctr" indent="0" marL="0">
-              <a:buNone/>
-            </a:pPr>
-            <a:r>
-              <a:rPr lang="en-US" sz="1100" b="1" dirty="0">
-                <a:solidFill>
-                  <a:srgbClr val="FFFFFF"/>
-                </a:solidFill>
-                <a:latin typeface="Aptos" pitchFamily="34" charset="0"/>
-                <a:ea typeface="Aptos" pitchFamily="34" charset="-122"/>
-                <a:cs typeface="Aptos" pitchFamily="34" charset="-120"/>
-              </a:rPr>
-              <a:t>4</a:t>
-            </a:r>
-            <a:endParaRPr lang="en-US" sz="1100" dirty="0"/>
-          </a:p>
-        </p:txBody>
-      </p:sp>
-      <p:sp>
-        <p:nvSpPr>
-          <p:cNvPr id="10" name="Text 8"/>
-          <p:cNvSpPr/>
-          <p:nvPr/>
-        </p:nvSpPr>
-        <p:spPr>
-          <a:xfrm>
-            <a:off x="640080" y="621792"/>
             <a:ext cx="10881360" cy="713232"/>
           </a:xfrm>
           <a:prstGeom prst="rect">
@@ -14625,14 +16403,14 @@
       </p:sp>
       <p:sp>
         <p:nvSpPr>
-          <p:cNvPr id="11" name="Text 9"/>
+          <p:cNvPr id="9" name="Text 7"/>
           <p:cNvSpPr/>
           <p:nvPr/>
         </p:nvSpPr>
         <p:spPr>
           <a:xfrm>
             <a:off x="868680" y="1508760"/>
-            <a:ext cx="6537960" cy="4160520"/>
+            <a:ext cx="6309360" cy="4160520"/>
           </a:xfrm>
           <a:prstGeom prst="rect">
             <a:avLst/>
@@ -14691,18 +16469,18 @@
       </p:sp>
       <p:sp>
         <p:nvSpPr>
-          <p:cNvPr id="12" name="Shape 10"/>
-          <p:cNvSpPr/>
-          <p:nvPr/>
-        </p:nvSpPr>
-        <p:spPr>
-          <a:xfrm>
-            <a:off x="7909560" y="1417320"/>
-            <a:ext cx="3154680" cy="1828800"/>
+          <p:cNvPr id="10" name="Shape 8"/>
+          <p:cNvSpPr/>
+          <p:nvPr/>
+        </p:nvSpPr>
+        <p:spPr>
+          <a:xfrm>
+            <a:off x="7635240" y="1325880"/>
+            <a:ext cx="3474720" cy="1325880"/>
           </a:xfrm>
           <a:prstGeom prst="roundRect">
             <a:avLst>
-              <a:gd name="adj" fmla="val 6000"/>
+              <a:gd name="adj" fmla="val 8276"/>
             </a:avLst>
           </a:prstGeom>
           <a:solidFill>
@@ -14718,14 +16496,14 @@
       </p:sp>
       <p:sp>
         <p:nvSpPr>
-          <p:cNvPr id="13" name="Text 11"/>
-          <p:cNvSpPr/>
-          <p:nvPr/>
-        </p:nvSpPr>
-        <p:spPr>
-          <a:xfrm>
-            <a:off x="8074152" y="1563624"/>
-            <a:ext cx="2825496" cy="256032"/>
+          <p:cNvPr id="11" name="Text 9"/>
+          <p:cNvSpPr/>
+          <p:nvPr/>
+        </p:nvSpPr>
+        <p:spPr>
+          <a:xfrm>
+            <a:off x="7799832" y="1472184"/>
+            <a:ext cx="3145536" cy="256032"/>
           </a:xfrm>
           <a:prstGeom prst="rect">
             <a:avLst/>
@@ -14749,7 +16527,7 @@
                 <a:ea typeface="Aptos" pitchFamily="34" charset="-122"/>
                 <a:cs typeface="Aptos" pitchFamily="34" charset="-120"/>
               </a:rPr>
-              <a:t>Key idea</a:t>
+              <a:t>Data decision</a:t>
             </a:r>
             <a:endParaRPr lang="en-US" sz="1300" dirty="0"/>
           </a:p>
@@ -14757,14 +16535,14 @@
       </p:sp>
       <p:sp>
         <p:nvSpPr>
-          <p:cNvPr id="14" name="Text 12"/>
-          <p:cNvSpPr/>
-          <p:nvPr/>
-        </p:nvSpPr>
-        <p:spPr>
-          <a:xfrm>
-            <a:off x="8074152" y="1920240"/>
-            <a:ext cx="2825496" cy="1188720"/>
+          <p:cNvPr id="12" name="Text 10"/>
+          <p:cNvSpPr/>
+          <p:nvPr/>
+        </p:nvSpPr>
+        <p:spPr>
+          <a:xfrm>
+            <a:off x="7799832" y="1828800"/>
+            <a:ext cx="3145536" cy="685800"/>
           </a:xfrm>
           <a:prstGeom prst="rect">
             <a:avLst/>
@@ -14798,21 +16576,212 @@
       </p:sp>
       <p:sp>
         <p:nvSpPr>
-          <p:cNvPr id="15" name="Shape 13"/>
-          <p:cNvSpPr/>
-          <p:nvPr/>
-        </p:nvSpPr>
-        <p:spPr>
-          <a:xfrm>
-            <a:off x="7909560" y="3520440"/>
-            <a:ext cx="3154680" cy="1737360"/>
+          <p:cNvPr id="13" name="Shape 11"/>
+          <p:cNvSpPr/>
+          <p:nvPr/>
+        </p:nvSpPr>
+        <p:spPr>
+          <a:xfrm>
+            <a:off x="7635240" y="2788920"/>
+            <a:ext cx="3474720" cy="1536192"/>
           </a:xfrm>
           <a:prstGeom prst="roundRect">
             <a:avLst>
-              <a:gd name="adj" fmla="val 6316"/>
+              <a:gd name="adj" fmla="val 7143"/>
             </a:avLst>
           </a:prstGeom>
           <a:solidFill>
+            <a:srgbClr val="FFFFFF">
+              <a:alpha val="88000"/>
+            </a:srgbClr>
+          </a:solidFill>
+          <a:ln w="12700">
+            <a:solidFill>
+              <a:srgbClr val="D6E8F2"/>
+            </a:solidFill>
+            <a:prstDash val="solid"/>
+          </a:ln>
+        </p:spPr>
+      </p:sp>
+      <p:sp>
+        <p:nvSpPr>
+          <p:cNvPr id="14" name="Shape 12"/>
+          <p:cNvSpPr/>
+          <p:nvPr/>
+        </p:nvSpPr>
+        <p:spPr>
+          <a:xfrm>
+            <a:off x="8138160" y="3474720"/>
+            <a:ext cx="256032" cy="411480"/>
+          </a:xfrm>
+          <a:prstGeom prst="rect">
+            <a:avLst/>
+          </a:prstGeom>
+          <a:solidFill>
+            <a:srgbClr val="0068B7"/>
+          </a:solidFill>
+          <a:ln w="12700">
+            <a:solidFill>
+              <a:srgbClr val="0068B7"/>
+            </a:solidFill>
+            <a:prstDash val="solid"/>
+          </a:ln>
+        </p:spPr>
+      </p:sp>
+      <p:sp>
+        <p:nvSpPr>
+          <p:cNvPr id="15" name="Shape 13"/>
+          <p:cNvSpPr/>
+          <p:nvPr/>
+        </p:nvSpPr>
+        <p:spPr>
+          <a:xfrm>
+            <a:off x="8577072" y="3172968"/>
+            <a:ext cx="256032" cy="713232"/>
+          </a:xfrm>
+          <a:prstGeom prst="rect">
+            <a:avLst/>
+          </a:prstGeom>
+          <a:solidFill>
+            <a:srgbClr val="2F8A28"/>
+          </a:solidFill>
+          <a:ln w="12700">
+            <a:solidFill>
+              <a:srgbClr val="2F8A28"/>
+            </a:solidFill>
+            <a:prstDash val="solid"/>
+          </a:ln>
+        </p:spPr>
+      </p:sp>
+      <p:sp>
+        <p:nvSpPr>
+          <p:cNvPr id="16" name="Shape 14"/>
+          <p:cNvSpPr/>
+          <p:nvPr/>
+        </p:nvSpPr>
+        <p:spPr>
+          <a:xfrm>
+            <a:off x="9015984" y="2880360"/>
+            <a:ext cx="256032" cy="1005840"/>
+          </a:xfrm>
+          <a:prstGeom prst="rect">
+            <a:avLst/>
+          </a:prstGeom>
+          <a:solidFill>
+            <a:srgbClr val="D69A2D"/>
+          </a:solidFill>
+          <a:ln w="12700">
+            <a:solidFill>
+              <a:srgbClr val="D69A2D"/>
+            </a:solidFill>
+            <a:prstDash val="solid"/>
+          </a:ln>
+        </p:spPr>
+      </p:sp>
+      <p:sp>
+        <p:nvSpPr>
+          <p:cNvPr id="17" name="Shape 15"/>
+          <p:cNvSpPr/>
+          <p:nvPr/>
+        </p:nvSpPr>
+        <p:spPr>
+          <a:xfrm>
+            <a:off x="9454896" y="3319272"/>
+            <a:ext cx="256032" cy="566928"/>
+          </a:xfrm>
+          <a:prstGeom prst="rect">
+            <a:avLst/>
+          </a:prstGeom>
+          <a:solidFill>
+            <a:srgbClr val="6A4CA3"/>
+          </a:solidFill>
+          <a:ln w="12700">
+            <a:solidFill>
+              <a:srgbClr val="6A4CA3"/>
+            </a:solidFill>
+            <a:prstDash val="solid"/>
+          </a:ln>
+        </p:spPr>
+      </p:sp>
+      <p:sp>
+        <p:nvSpPr>
+          <p:cNvPr id="18" name="Shape 16"/>
+          <p:cNvSpPr/>
+          <p:nvPr/>
+        </p:nvSpPr>
+        <p:spPr>
+          <a:xfrm>
+            <a:off x="8019288" y="3886200"/>
+            <a:ext cx="2706624" cy="0"/>
+          </a:xfrm>
+          <a:prstGeom prst="line">
+            <a:avLst/>
+          </a:prstGeom>
+          <a:noFill/>
+          <a:ln w="15240">
+            <a:solidFill>
+              <a:srgbClr val="003A63"/>
+            </a:solidFill>
+            <a:prstDash val="solid"/>
+          </a:ln>
+        </p:spPr>
+      </p:sp>
+      <p:sp>
+        <p:nvSpPr>
+          <p:cNvPr id="19" name="Text 17"/>
+          <p:cNvSpPr/>
+          <p:nvPr/>
+        </p:nvSpPr>
+        <p:spPr>
+          <a:xfrm>
+            <a:off x="7863840" y="3017520"/>
+            <a:ext cx="3017520" cy="201168"/>
+          </a:xfrm>
+          <a:prstGeom prst="rect">
+            <a:avLst/>
+          </a:prstGeom>
+          <a:noFill/>
+          <a:ln/>
+        </p:spPr>
+        <p:txBody>
+          <a:bodyPr wrap="square" lIns="0" tIns="0" rIns="0" bIns="0" rtlCol="0" anchor="ctr"/>
+          <a:lstStyle/>
+          <a:p>
+            <a:pPr algn="ctr" indent="0" marL="0">
+              <a:buNone/>
+            </a:pPr>
+            <a:r>
+              <a:rPr lang="en-US" sz="1050" b="1" dirty="0">
+                <a:solidFill>
+                  <a:srgbClr val="003A63"/>
+                </a:solidFill>
+                <a:latin typeface="Aptos" pitchFamily="34" charset="0"/>
+                <a:ea typeface="Aptos" pitchFamily="34" charset="-122"/>
+                <a:cs typeface="Aptos" pitchFamily="34" charset="-120"/>
+              </a:rPr>
+              <a:t>Measure and monitor</a:t>
+            </a:r>
+            <a:endParaRPr lang="en-US" sz="1050" dirty="0"/>
+          </a:p>
+        </p:txBody>
+      </p:sp>
+      <p:sp>
+        <p:nvSpPr>
+          <p:cNvPr id="20" name="Shape 18"/>
+          <p:cNvSpPr/>
+          <p:nvPr/>
+        </p:nvSpPr>
+        <p:spPr>
+          <a:xfrm>
+            <a:off x="7635240" y="4498848"/>
+            <a:ext cx="3474720" cy="1143000"/>
+          </a:xfrm>
+          <a:prstGeom prst="roundRect">
+            <a:avLst>
+              <a:gd name="adj" fmla="val 9600"/>
+            </a:avLst>
+          </a:prstGeom>
+          <a:solidFill>
             <a:srgbClr val="EAF6F8"/>
           </a:solidFill>
           <a:ln w="12700">
@@ -14825,14 +16794,14 @@
       </p:sp>
       <p:sp>
         <p:nvSpPr>
-          <p:cNvPr id="16" name="Text 14"/>
-          <p:cNvSpPr/>
-          <p:nvPr/>
-        </p:nvSpPr>
-        <p:spPr>
-          <a:xfrm>
-            <a:off x="8074152" y="3666744"/>
-            <a:ext cx="2825496" cy="256032"/>
+          <p:cNvPr id="21" name="Text 19"/>
+          <p:cNvSpPr/>
+          <p:nvPr/>
+        </p:nvSpPr>
+        <p:spPr>
+          <a:xfrm>
+            <a:off x="7799832" y="4645152"/>
+            <a:ext cx="3145536" cy="256032"/>
           </a:xfrm>
           <a:prstGeom prst="rect">
             <a:avLst/>
@@ -14856,7 +16825,7 @@
                 <a:ea typeface="Aptos" pitchFamily="34" charset="-122"/>
                 <a:cs typeface="Aptos" pitchFamily="34" charset="-120"/>
               </a:rPr>
-              <a:t>Use this for</a:t>
+              <a:t>How to validate</a:t>
             </a:r>
             <a:endParaRPr lang="en-US" sz="1300" dirty="0"/>
           </a:p>
@@ -14864,14 +16833,14 @@
       </p:sp>
       <p:sp>
         <p:nvSpPr>
-          <p:cNvPr id="17" name="Text 15"/>
-          <p:cNvSpPr/>
-          <p:nvPr/>
-        </p:nvSpPr>
-        <p:spPr>
-          <a:xfrm>
-            <a:off x="8074152" y="4023360"/>
-            <a:ext cx="2825496" cy="1097280"/>
+          <p:cNvPr id="22" name="Text 20"/>
+          <p:cNvSpPr/>
+          <p:nvPr/>
+        </p:nvSpPr>
+        <p:spPr>
+          <a:xfrm>
+            <a:off x="7799832" y="5001768"/>
+            <a:ext cx="3145536" cy="502920"/>
           </a:xfrm>
           <a:prstGeom prst="rect">
             <a:avLst/>
@@ -14897,7 +16866,7 @@
                 <a:ea typeface="Aptos" pitchFamily="34" charset="-122"/>
                 <a:cs typeface="Aptos" pitchFamily="34" charset="-120"/>
               </a:rPr>
-              <a:t>Connect the concept to public health decisions, safeguards, documentation, or implementation work.</a:t>
+              <a:t>Connect the concept to data quality, model performance, validation evidence, monitoring measures, and decisions that remain under human control.</a:t>
             </a:r>
             <a:endParaRPr lang="en-US" sz="1550" dirty="0"/>
           </a:p>
@@ -15071,8 +17040,8 @@
         </p:nvSpPr>
         <p:spPr>
           <a:xfrm>
-            <a:off x="9966960" y="6537960"/>
-            <a:ext cx="1645920" cy="201168"/>
+            <a:off x="9646920" y="6537960"/>
+            <a:ext cx="1965960" cy="201168"/>
           </a:xfrm>
           <a:prstGeom prst="rect">
             <a:avLst/>
@@ -15096,7 +17065,7 @@
                 <a:ea typeface="Aptos" pitchFamily="34" charset="-122"/>
                 <a:cs typeface="Aptos" pitchFamily="34" charset="-120"/>
               </a:rPr>
-              <a:t>Â© Paula Soper</a:t>
+              <a:t>Copyright Paula Soper</a:t>
             </a:r>
             <a:endParaRPr lang="en-US" sz="800" dirty="0"/>
           </a:p>
@@ -15143,77 +17112,13 @@
       </p:sp>
       <p:sp>
         <p:nvSpPr>
-          <p:cNvPr id="8" name="Shape 6"/>
+          <p:cNvPr id="8" name="Text 6"/>
           <p:cNvSpPr/>
           <p:nvPr/>
         </p:nvSpPr>
         <p:spPr>
           <a:xfrm>
             <a:off x="640080" y="658368"/>
-            <a:ext cx="420624" cy="420624"/>
-          </a:xfrm>
-          <a:prstGeom prst="ellipse">
-            <a:avLst/>
-          </a:prstGeom>
-          <a:solidFill>
-            <a:srgbClr val="0068B7"/>
-          </a:solidFill>
-          <a:ln w="12700">
-            <a:solidFill>
-              <a:srgbClr val="0068B7"/>
-            </a:solidFill>
-            <a:prstDash val="solid"/>
-          </a:ln>
-        </p:spPr>
-      </p:sp>
-      <p:sp>
-        <p:nvSpPr>
-          <p:cNvPr id="9" name="Text 7"/>
-          <p:cNvSpPr/>
-          <p:nvPr/>
-        </p:nvSpPr>
-        <p:spPr>
-          <a:xfrm>
-            <a:off x="640080" y="731520"/>
-            <a:ext cx="420624" cy="164592"/>
-          </a:xfrm>
-          <a:prstGeom prst="rect">
-            <a:avLst/>
-          </a:prstGeom>
-          <a:noFill/>
-          <a:ln/>
-        </p:spPr>
-        <p:txBody>
-          <a:bodyPr wrap="square" lIns="0" tIns="0" rIns="0" bIns="0" rtlCol="0" anchor="ctr"/>
-          <a:lstStyle/>
-          <a:p>
-            <a:pPr algn="ctr" indent="0" marL="0">
-              <a:buNone/>
-            </a:pPr>
-            <a:r>
-              <a:rPr lang="en-US" sz="1100" b="1" dirty="0">
-                <a:solidFill>
-                  <a:srgbClr val="FFFFFF"/>
-                </a:solidFill>
-                <a:latin typeface="Aptos" pitchFamily="34" charset="0"/>
-                <a:ea typeface="Aptos" pitchFamily="34" charset="-122"/>
-                <a:cs typeface="Aptos" pitchFamily="34" charset="-120"/>
-              </a:rPr>
-              <a:t>5</a:t>
-            </a:r>
-            <a:endParaRPr lang="en-US" sz="1100" dirty="0"/>
-          </a:p>
-        </p:txBody>
-      </p:sp>
-      <p:sp>
-        <p:nvSpPr>
-          <p:cNvPr id="10" name="Text 8"/>
-          <p:cNvSpPr/>
-          <p:nvPr/>
-        </p:nvSpPr>
-        <p:spPr>
-          <a:xfrm>
-            <a:off x="640080" y="621792"/>
             <a:ext cx="10881360" cy="713232"/>
           </a:xfrm>
           <a:prstGeom prst="rect">
@@ -15248,14 +17153,14 @@
       </p:sp>
       <p:sp>
         <p:nvSpPr>
-          <p:cNvPr id="11" name="Text 9"/>
+          <p:cNvPr id="9" name="Text 7"/>
           <p:cNvSpPr/>
           <p:nvPr/>
         </p:nvSpPr>
         <p:spPr>
           <a:xfrm>
             <a:off x="868680" y="1508760"/>
-            <a:ext cx="6537960" cy="4160520"/>
+            <a:ext cx="6309360" cy="4160520"/>
           </a:xfrm>
           <a:prstGeom prst="rect">
             <a:avLst/>
@@ -15314,18 +17219,18 @@
       </p:sp>
       <p:sp>
         <p:nvSpPr>
-          <p:cNvPr id="12" name="Shape 10"/>
-          <p:cNvSpPr/>
-          <p:nvPr/>
-        </p:nvSpPr>
-        <p:spPr>
-          <a:xfrm>
-            <a:off x="7909560" y="1417320"/>
-            <a:ext cx="3154680" cy="1828800"/>
+          <p:cNvPr id="10" name="Shape 8"/>
+          <p:cNvSpPr/>
+          <p:nvPr/>
+        </p:nvSpPr>
+        <p:spPr>
+          <a:xfrm>
+            <a:off x="7635240" y="1325880"/>
+            <a:ext cx="3474720" cy="1325880"/>
           </a:xfrm>
           <a:prstGeom prst="roundRect">
             <a:avLst>
-              <a:gd name="adj" fmla="val 6000"/>
+              <a:gd name="adj" fmla="val 8276"/>
             </a:avLst>
           </a:prstGeom>
           <a:solidFill>
@@ -15341,14 +17246,14 @@
       </p:sp>
       <p:sp>
         <p:nvSpPr>
-          <p:cNvPr id="13" name="Text 11"/>
-          <p:cNvSpPr/>
-          <p:nvPr/>
-        </p:nvSpPr>
-        <p:spPr>
-          <a:xfrm>
-            <a:off x="8074152" y="1563624"/>
-            <a:ext cx="2825496" cy="256032"/>
+          <p:cNvPr id="11" name="Text 9"/>
+          <p:cNvSpPr/>
+          <p:nvPr/>
+        </p:nvSpPr>
+        <p:spPr>
+          <a:xfrm>
+            <a:off x="7799832" y="1472184"/>
+            <a:ext cx="3145536" cy="256032"/>
           </a:xfrm>
           <a:prstGeom prst="rect">
             <a:avLst/>
@@ -15372,7 +17277,7 @@
                 <a:ea typeface="Aptos" pitchFamily="34" charset="-122"/>
                 <a:cs typeface="Aptos" pitchFamily="34" charset="-120"/>
               </a:rPr>
-              <a:t>Key idea</a:t>
+              <a:t>Data decision</a:t>
             </a:r>
             <a:endParaRPr lang="en-US" sz="1300" dirty="0"/>
           </a:p>
@@ -15380,14 +17285,14 @@
       </p:sp>
       <p:sp>
         <p:nvSpPr>
-          <p:cNvPr id="14" name="Text 12"/>
-          <p:cNvSpPr/>
-          <p:nvPr/>
-        </p:nvSpPr>
-        <p:spPr>
-          <a:xfrm>
-            <a:off x="8074152" y="1920240"/>
-            <a:ext cx="2825496" cy="1188720"/>
+          <p:cNvPr id="12" name="Text 10"/>
+          <p:cNvSpPr/>
+          <p:nvPr/>
+        </p:nvSpPr>
+        <p:spPr>
+          <a:xfrm>
+            <a:off x="7799832" y="1828800"/>
+            <a:ext cx="3145536" cy="685800"/>
           </a:xfrm>
           <a:prstGeom prst="rect">
             <a:avLst/>
@@ -15421,21 +17326,212 @@
       </p:sp>
       <p:sp>
         <p:nvSpPr>
-          <p:cNvPr id="15" name="Shape 13"/>
-          <p:cNvSpPr/>
-          <p:nvPr/>
-        </p:nvSpPr>
-        <p:spPr>
-          <a:xfrm>
-            <a:off x="7909560" y="3520440"/>
-            <a:ext cx="3154680" cy="1737360"/>
+          <p:cNvPr id="13" name="Shape 11"/>
+          <p:cNvSpPr/>
+          <p:nvPr/>
+        </p:nvSpPr>
+        <p:spPr>
+          <a:xfrm>
+            <a:off x="7635240" y="2788920"/>
+            <a:ext cx="3474720" cy="1536192"/>
           </a:xfrm>
           <a:prstGeom prst="roundRect">
             <a:avLst>
-              <a:gd name="adj" fmla="val 6316"/>
+              <a:gd name="adj" fmla="val 7143"/>
             </a:avLst>
           </a:prstGeom>
           <a:solidFill>
+            <a:srgbClr val="FFFFFF">
+              <a:alpha val="88000"/>
+            </a:srgbClr>
+          </a:solidFill>
+          <a:ln w="12700">
+            <a:solidFill>
+              <a:srgbClr val="D6E8F2"/>
+            </a:solidFill>
+            <a:prstDash val="solid"/>
+          </a:ln>
+        </p:spPr>
+      </p:sp>
+      <p:sp>
+        <p:nvSpPr>
+          <p:cNvPr id="14" name="Shape 12"/>
+          <p:cNvSpPr/>
+          <p:nvPr/>
+        </p:nvSpPr>
+        <p:spPr>
+          <a:xfrm>
+            <a:off x="8138160" y="3474720"/>
+            <a:ext cx="256032" cy="411480"/>
+          </a:xfrm>
+          <a:prstGeom prst="rect">
+            <a:avLst/>
+          </a:prstGeom>
+          <a:solidFill>
+            <a:srgbClr val="0068B7"/>
+          </a:solidFill>
+          <a:ln w="12700">
+            <a:solidFill>
+              <a:srgbClr val="0068B7"/>
+            </a:solidFill>
+            <a:prstDash val="solid"/>
+          </a:ln>
+        </p:spPr>
+      </p:sp>
+      <p:sp>
+        <p:nvSpPr>
+          <p:cNvPr id="15" name="Shape 13"/>
+          <p:cNvSpPr/>
+          <p:nvPr/>
+        </p:nvSpPr>
+        <p:spPr>
+          <a:xfrm>
+            <a:off x="8577072" y="3172968"/>
+            <a:ext cx="256032" cy="713232"/>
+          </a:xfrm>
+          <a:prstGeom prst="rect">
+            <a:avLst/>
+          </a:prstGeom>
+          <a:solidFill>
+            <a:srgbClr val="2F8A28"/>
+          </a:solidFill>
+          <a:ln w="12700">
+            <a:solidFill>
+              <a:srgbClr val="2F8A28"/>
+            </a:solidFill>
+            <a:prstDash val="solid"/>
+          </a:ln>
+        </p:spPr>
+      </p:sp>
+      <p:sp>
+        <p:nvSpPr>
+          <p:cNvPr id="16" name="Shape 14"/>
+          <p:cNvSpPr/>
+          <p:nvPr/>
+        </p:nvSpPr>
+        <p:spPr>
+          <a:xfrm>
+            <a:off x="9015984" y="2880360"/>
+            <a:ext cx="256032" cy="1005840"/>
+          </a:xfrm>
+          <a:prstGeom prst="rect">
+            <a:avLst/>
+          </a:prstGeom>
+          <a:solidFill>
+            <a:srgbClr val="D69A2D"/>
+          </a:solidFill>
+          <a:ln w="12700">
+            <a:solidFill>
+              <a:srgbClr val="D69A2D"/>
+            </a:solidFill>
+            <a:prstDash val="solid"/>
+          </a:ln>
+        </p:spPr>
+      </p:sp>
+      <p:sp>
+        <p:nvSpPr>
+          <p:cNvPr id="17" name="Shape 15"/>
+          <p:cNvSpPr/>
+          <p:nvPr/>
+        </p:nvSpPr>
+        <p:spPr>
+          <a:xfrm>
+            <a:off x="9454896" y="3319272"/>
+            <a:ext cx="256032" cy="566928"/>
+          </a:xfrm>
+          <a:prstGeom prst="rect">
+            <a:avLst/>
+          </a:prstGeom>
+          <a:solidFill>
+            <a:srgbClr val="6A4CA3"/>
+          </a:solidFill>
+          <a:ln w="12700">
+            <a:solidFill>
+              <a:srgbClr val="6A4CA3"/>
+            </a:solidFill>
+            <a:prstDash val="solid"/>
+          </a:ln>
+        </p:spPr>
+      </p:sp>
+      <p:sp>
+        <p:nvSpPr>
+          <p:cNvPr id="18" name="Shape 16"/>
+          <p:cNvSpPr/>
+          <p:nvPr/>
+        </p:nvSpPr>
+        <p:spPr>
+          <a:xfrm>
+            <a:off x="8019288" y="3886200"/>
+            <a:ext cx="2706624" cy="0"/>
+          </a:xfrm>
+          <a:prstGeom prst="line">
+            <a:avLst/>
+          </a:prstGeom>
+          <a:noFill/>
+          <a:ln w="15240">
+            <a:solidFill>
+              <a:srgbClr val="003A63"/>
+            </a:solidFill>
+            <a:prstDash val="solid"/>
+          </a:ln>
+        </p:spPr>
+      </p:sp>
+      <p:sp>
+        <p:nvSpPr>
+          <p:cNvPr id="19" name="Text 17"/>
+          <p:cNvSpPr/>
+          <p:nvPr/>
+        </p:nvSpPr>
+        <p:spPr>
+          <a:xfrm>
+            <a:off x="7863840" y="3017520"/>
+            <a:ext cx="3017520" cy="201168"/>
+          </a:xfrm>
+          <a:prstGeom prst="rect">
+            <a:avLst/>
+          </a:prstGeom>
+          <a:noFill/>
+          <a:ln/>
+        </p:spPr>
+        <p:txBody>
+          <a:bodyPr wrap="square" lIns="0" tIns="0" rIns="0" bIns="0" rtlCol="0" anchor="ctr"/>
+          <a:lstStyle/>
+          <a:p>
+            <a:pPr algn="ctr" indent="0" marL="0">
+              <a:buNone/>
+            </a:pPr>
+            <a:r>
+              <a:rPr lang="en-US" sz="1050" b="1" dirty="0">
+                <a:solidFill>
+                  <a:srgbClr val="003A63"/>
+                </a:solidFill>
+                <a:latin typeface="Aptos" pitchFamily="34" charset="0"/>
+                <a:ea typeface="Aptos" pitchFamily="34" charset="-122"/>
+                <a:cs typeface="Aptos" pitchFamily="34" charset="-120"/>
+              </a:rPr>
+              <a:t>Measure and monitor</a:t>
+            </a:r>
+            <a:endParaRPr lang="en-US" sz="1050" dirty="0"/>
+          </a:p>
+        </p:txBody>
+      </p:sp>
+      <p:sp>
+        <p:nvSpPr>
+          <p:cNvPr id="20" name="Shape 18"/>
+          <p:cNvSpPr/>
+          <p:nvPr/>
+        </p:nvSpPr>
+        <p:spPr>
+          <a:xfrm>
+            <a:off x="7635240" y="4498848"/>
+            <a:ext cx="3474720" cy="1143000"/>
+          </a:xfrm>
+          <a:prstGeom prst="roundRect">
+            <a:avLst>
+              <a:gd name="adj" fmla="val 9600"/>
+            </a:avLst>
+          </a:prstGeom>
+          <a:solidFill>
             <a:srgbClr val="EAF6F8"/>
           </a:solidFill>
           <a:ln w="12700">
@@ -15448,14 +17544,14 @@
       </p:sp>
       <p:sp>
         <p:nvSpPr>
-          <p:cNvPr id="16" name="Text 14"/>
-          <p:cNvSpPr/>
-          <p:nvPr/>
-        </p:nvSpPr>
-        <p:spPr>
-          <a:xfrm>
-            <a:off x="8074152" y="3666744"/>
-            <a:ext cx="2825496" cy="256032"/>
+          <p:cNvPr id="21" name="Text 19"/>
+          <p:cNvSpPr/>
+          <p:nvPr/>
+        </p:nvSpPr>
+        <p:spPr>
+          <a:xfrm>
+            <a:off x="7799832" y="4645152"/>
+            <a:ext cx="3145536" cy="256032"/>
           </a:xfrm>
           <a:prstGeom prst="rect">
             <a:avLst/>
@@ -15479,7 +17575,7 @@
                 <a:ea typeface="Aptos" pitchFamily="34" charset="-122"/>
                 <a:cs typeface="Aptos" pitchFamily="34" charset="-120"/>
               </a:rPr>
-              <a:t>Use this for</a:t>
+              <a:t>How to validate</a:t>
             </a:r>
             <a:endParaRPr lang="en-US" sz="1300" dirty="0"/>
           </a:p>
@@ -15487,14 +17583,14 @@
       </p:sp>
       <p:sp>
         <p:nvSpPr>
-          <p:cNvPr id="17" name="Text 15"/>
-          <p:cNvSpPr/>
-          <p:nvPr/>
-        </p:nvSpPr>
-        <p:spPr>
-          <a:xfrm>
-            <a:off x="8074152" y="4023360"/>
-            <a:ext cx="2825496" cy="1097280"/>
+          <p:cNvPr id="22" name="Text 20"/>
+          <p:cNvSpPr/>
+          <p:nvPr/>
+        </p:nvSpPr>
+        <p:spPr>
+          <a:xfrm>
+            <a:off x="7799832" y="5001768"/>
+            <a:ext cx="3145536" cy="502920"/>
           </a:xfrm>
           <a:prstGeom prst="rect">
             <a:avLst/>
@@ -15520,7 +17616,7 @@
                 <a:ea typeface="Aptos" pitchFamily="34" charset="-122"/>
                 <a:cs typeface="Aptos" pitchFamily="34" charset="-120"/>
               </a:rPr>
-              <a:t>Connect the concept to public health decisions, safeguards, documentation, or implementation work.</a:t>
+              <a:t>Connect the concept to data quality, model performance, validation evidence, monitoring measures, and decisions that remain under human control.</a:t>
             </a:r>
             <a:endParaRPr lang="en-US" sz="1550" dirty="0"/>
           </a:p>

--- a/downloads/presentations/modules/anl-350.pptx
+++ b/downloads/presentations/modules/anl-350.pptx
@@ -3433,13 +3433,11 @@
             </a:avLst>
           </a:prstGeom>
           <a:solidFill>
-            <a:srgbClr val="FFFFFF">
-              <a:alpha val="88000"/>
-            </a:srgbClr>
+            <a:srgbClr val="FFFFFF"/>
           </a:solidFill>
           <a:ln w="12700">
             <a:solidFill>
-              <a:srgbClr val="D6E8F2"/>
+              <a:srgbClr val="B9D7E6"/>
             </a:solidFill>
             <a:prstDash val="solid"/>
           </a:ln>
@@ -3447,169 +3445,112 @@
       </p:sp>
       <p:sp>
         <p:nvSpPr>
-          <p:cNvPr id="14" name="Shape 12"/>
-          <p:cNvSpPr/>
-          <p:nvPr/>
-        </p:nvSpPr>
-        <p:spPr>
-          <a:xfrm>
-            <a:off x="8138160" y="3474720"/>
-            <a:ext cx="256032" cy="411480"/>
-          </a:xfrm>
-          <a:prstGeom prst="rect">
-            <a:avLst/>
-          </a:prstGeom>
-          <a:solidFill>
-            <a:srgbClr val="0068B7"/>
-          </a:solidFill>
-          <a:ln w="12700">
-            <a:solidFill>
-              <a:srgbClr val="0068B7"/>
-            </a:solidFill>
-            <a:prstDash val="solid"/>
-          </a:ln>
-        </p:spPr>
-      </p:sp>
-      <p:sp>
-        <p:nvSpPr>
-          <p:cNvPr id="15" name="Shape 13"/>
-          <p:cNvSpPr/>
-          <p:nvPr/>
-        </p:nvSpPr>
-        <p:spPr>
-          <a:xfrm>
-            <a:off x="8577072" y="3172968"/>
-            <a:ext cx="256032" cy="713232"/>
-          </a:xfrm>
-          <a:prstGeom prst="rect">
-            <a:avLst/>
-          </a:prstGeom>
-          <a:solidFill>
-            <a:srgbClr val="2F8A28"/>
-          </a:solidFill>
-          <a:ln w="12700">
-            <a:solidFill>
-              <a:srgbClr val="2F8A28"/>
-            </a:solidFill>
-            <a:prstDash val="solid"/>
-          </a:ln>
-        </p:spPr>
+          <p:cNvPr id="14" name="Text 12"/>
+          <p:cNvSpPr/>
+          <p:nvPr/>
+        </p:nvSpPr>
+        <p:spPr>
+          <a:xfrm>
+            <a:off x="7799832" y="2935224"/>
+            <a:ext cx="3145536" cy="256032"/>
+          </a:xfrm>
+          <a:prstGeom prst="rect">
+            <a:avLst/>
+          </a:prstGeom>
+          <a:noFill/>
+          <a:ln/>
+        </p:spPr>
+        <p:txBody>
+          <a:bodyPr wrap="square" lIns="0" tIns="0" rIns="0" bIns="0" rtlCol="0" anchor="ctr"/>
+          <a:lstStyle/>
+          <a:p>
+            <a:pPr indent="0" marL="0">
+              <a:buNone/>
+            </a:pPr>
+            <a:r>
+              <a:rPr lang="en-US" sz="1300" b="1" dirty="0">
+                <a:solidFill>
+                  <a:srgbClr val="0068B7"/>
+                </a:solidFill>
+                <a:latin typeface="Aptos" pitchFamily="34" charset="0"/>
+                <a:ea typeface="Aptos" pitchFamily="34" charset="-122"/>
+                <a:cs typeface="Aptos" pitchFamily="34" charset="-120"/>
+              </a:rPr>
+              <a:t>Concept checkpoints</a:t>
+            </a:r>
+            <a:endParaRPr lang="en-US" sz="1300" dirty="0"/>
+          </a:p>
+        </p:txBody>
+      </p:sp>
+      <p:sp>
+        <p:nvSpPr>
+          <p:cNvPr id="15" name="Text 13"/>
+          <p:cNvSpPr/>
+          <p:nvPr/>
+        </p:nvSpPr>
+        <p:spPr>
+          <a:xfrm>
+            <a:off x="7818120" y="3300984"/>
+            <a:ext cx="3090672" cy="877824"/>
+          </a:xfrm>
+          <a:prstGeom prst="rect">
+            <a:avLst/>
+          </a:prstGeom>
+          <a:noFill/>
+          <a:ln/>
+        </p:spPr>
+        <p:txBody>
+          <a:bodyPr wrap="square" lIns="254" tIns="254" rIns="254" bIns="254" rtlCol="0" anchor="t">
+            <a:normAutofit/>
+          </a:bodyPr>
+          <a:lstStyle/>
+          <a:p>
+            <a:r>
+              <a:rPr lang="en-US" sz="1380" dirty="0">
+                <a:solidFill>
+                  <a:srgbClr val="17364A"/>
+                </a:solidFill>
+                <a:latin typeface="Aptos" pitchFamily="34" charset="0"/>
+                <a:ea typeface="Aptos" pitchFamily="34" charset="-122"/>
+                <a:cs typeface="Aptos" pitchFamily="34" charset="-120"/>
+              </a:rPr>
+              <a:t>The same model output may be communicated differently to a technical team, health officer,.</a:t>
+            </a:r>
+            <a:endParaRPr lang="en-US" sz="1380" dirty="0"/>
+          </a:p>
+          <a:p>
+            <a:r>
+              <a:rPr lang="en-US" sz="1380" dirty="0">
+                <a:solidFill>
+                  <a:srgbClr val="17364A"/>
+                </a:solidFill>
+                <a:latin typeface="Aptos" pitchFamily="34" charset="0"/>
+                <a:ea typeface="Aptos" pitchFamily="34" charset="-122"/>
+                <a:cs typeface="Aptos" pitchFamily="34" charset="-120"/>
+              </a:rPr>
+              <a:t>Technical users may need details about metrics and data limitations, while executives may.</a:t>
+            </a:r>
+            <a:endParaRPr lang="en-US" sz="1380" dirty="0"/>
+          </a:p>
+          <a:p>
+            <a:r>
+              <a:rPr lang="en-US" sz="1380" dirty="0">
+                <a:solidFill>
+                  <a:srgbClr val="17364A"/>
+                </a:solidFill>
+                <a:latin typeface="Aptos" pitchFamily="34" charset="0"/>
+                <a:ea typeface="Aptos" pitchFamily="34" charset="-122"/>
+                <a:cs typeface="Aptos" pitchFamily="34" charset="-120"/>
+              </a:rPr>
+              <a:t>Uncertainty should be explained visually and verbally.</a:t>
+            </a:r>
+            <a:endParaRPr lang="en-US" sz="1380" dirty="0"/>
+          </a:p>
+        </p:txBody>
       </p:sp>
       <p:sp>
         <p:nvSpPr>
           <p:cNvPr id="16" name="Shape 14"/>
-          <p:cNvSpPr/>
-          <p:nvPr/>
-        </p:nvSpPr>
-        <p:spPr>
-          <a:xfrm>
-            <a:off x="9015984" y="2880360"/>
-            <a:ext cx="256032" cy="1005840"/>
-          </a:xfrm>
-          <a:prstGeom prst="rect">
-            <a:avLst/>
-          </a:prstGeom>
-          <a:solidFill>
-            <a:srgbClr val="D69A2D"/>
-          </a:solidFill>
-          <a:ln w="12700">
-            <a:solidFill>
-              <a:srgbClr val="D69A2D"/>
-            </a:solidFill>
-            <a:prstDash val="solid"/>
-          </a:ln>
-        </p:spPr>
-      </p:sp>
-      <p:sp>
-        <p:nvSpPr>
-          <p:cNvPr id="17" name="Shape 15"/>
-          <p:cNvSpPr/>
-          <p:nvPr/>
-        </p:nvSpPr>
-        <p:spPr>
-          <a:xfrm>
-            <a:off x="9454896" y="3319272"/>
-            <a:ext cx="256032" cy="566928"/>
-          </a:xfrm>
-          <a:prstGeom prst="rect">
-            <a:avLst/>
-          </a:prstGeom>
-          <a:solidFill>
-            <a:srgbClr val="6A4CA3"/>
-          </a:solidFill>
-          <a:ln w="12700">
-            <a:solidFill>
-              <a:srgbClr val="6A4CA3"/>
-            </a:solidFill>
-            <a:prstDash val="solid"/>
-          </a:ln>
-        </p:spPr>
-      </p:sp>
-      <p:sp>
-        <p:nvSpPr>
-          <p:cNvPr id="18" name="Shape 16"/>
-          <p:cNvSpPr/>
-          <p:nvPr/>
-        </p:nvSpPr>
-        <p:spPr>
-          <a:xfrm>
-            <a:off x="8019288" y="3886200"/>
-            <a:ext cx="2706624" cy="0"/>
-          </a:xfrm>
-          <a:prstGeom prst="line">
-            <a:avLst/>
-          </a:prstGeom>
-          <a:noFill/>
-          <a:ln w="15240">
-            <a:solidFill>
-              <a:srgbClr val="003A63"/>
-            </a:solidFill>
-            <a:prstDash val="solid"/>
-          </a:ln>
-        </p:spPr>
-      </p:sp>
-      <p:sp>
-        <p:nvSpPr>
-          <p:cNvPr id="19" name="Text 17"/>
-          <p:cNvSpPr/>
-          <p:nvPr/>
-        </p:nvSpPr>
-        <p:spPr>
-          <a:xfrm>
-            <a:off x="7863840" y="3017520"/>
-            <a:ext cx="3017520" cy="201168"/>
-          </a:xfrm>
-          <a:prstGeom prst="rect">
-            <a:avLst/>
-          </a:prstGeom>
-          <a:noFill/>
-          <a:ln/>
-        </p:spPr>
-        <p:txBody>
-          <a:bodyPr wrap="square" lIns="0" tIns="0" rIns="0" bIns="0" rtlCol="0" anchor="ctr"/>
-          <a:lstStyle/>
-          <a:p>
-            <a:pPr algn="ctr" indent="0" marL="0">
-              <a:buNone/>
-            </a:pPr>
-            <a:r>
-              <a:rPr lang="en-US" sz="1050" b="1" dirty="0">
-                <a:solidFill>
-                  <a:srgbClr val="003A63"/>
-                </a:solidFill>
-                <a:latin typeface="Aptos" pitchFamily="34" charset="0"/>
-                <a:ea typeface="Aptos" pitchFamily="34" charset="-122"/>
-                <a:cs typeface="Aptos" pitchFamily="34" charset="-120"/>
-              </a:rPr>
-              <a:t>Measure and monitor</a:t>
-            </a:r>
-            <a:endParaRPr lang="en-US" sz="1050" dirty="0"/>
-          </a:p>
-        </p:txBody>
-      </p:sp>
-      <p:sp>
-        <p:nvSpPr>
-          <p:cNvPr id="20" name="Shape 18"/>
           <p:cNvSpPr/>
           <p:nvPr/>
         </p:nvSpPr>
@@ -3636,7 +3577,7 @@
       </p:sp>
       <p:sp>
         <p:nvSpPr>
-          <p:cNvPr id="21" name="Text 19"/>
+          <p:cNvPr id="17" name="Text 15"/>
           <p:cNvSpPr/>
           <p:nvPr/>
         </p:nvSpPr>
@@ -3675,7 +3616,7 @@
       </p:sp>
       <p:sp>
         <p:nvSpPr>
-          <p:cNvPr id="22" name="Text 20"/>
+          <p:cNvPr id="18" name="Text 16"/>
           <p:cNvSpPr/>
           <p:nvPr/>
         </p:nvSpPr>
@@ -4183,13 +4124,11 @@
             </a:avLst>
           </a:prstGeom>
           <a:solidFill>
-            <a:srgbClr val="FFFFFF">
-              <a:alpha val="88000"/>
-            </a:srgbClr>
+            <a:srgbClr val="FFFFFF"/>
           </a:solidFill>
           <a:ln w="12700">
             <a:solidFill>
-              <a:srgbClr val="D6E8F2"/>
+              <a:srgbClr val="B9D7E6"/>
             </a:solidFill>
             <a:prstDash val="solid"/>
           </a:ln>
@@ -4197,26 +4136,42 @@
       </p:sp>
       <p:sp>
         <p:nvSpPr>
-          <p:cNvPr id="14" name="Shape 12"/>
-          <p:cNvSpPr/>
-          <p:nvPr/>
-        </p:nvSpPr>
-        <p:spPr>
-          <a:xfrm>
-            <a:off x="8046720" y="3108960"/>
-            <a:ext cx="2651760" cy="896112"/>
-          </a:xfrm>
-          <a:prstGeom prst="arc">
-            <a:avLst/>
-          </a:prstGeom>
-          <a:noFill/>
-          <a:ln w="25400">
-            <a:solidFill>
-              <a:srgbClr val="0068B7"/>
-            </a:solidFill>
-            <a:prstDash val="solid"/>
-          </a:ln>
-        </p:spPr>
+          <p:cNvPr id="14" name="Text 12"/>
+          <p:cNvSpPr/>
+          <p:nvPr/>
+        </p:nvSpPr>
+        <p:spPr>
+          <a:xfrm>
+            <a:off x="7799832" y="2935224"/>
+            <a:ext cx="3145536" cy="256032"/>
+          </a:xfrm>
+          <a:prstGeom prst="rect">
+            <a:avLst/>
+          </a:prstGeom>
+          <a:noFill/>
+          <a:ln/>
+        </p:spPr>
+        <p:txBody>
+          <a:bodyPr wrap="square" lIns="0" tIns="0" rIns="0" bIns="0" rtlCol="0" anchor="ctr"/>
+          <a:lstStyle/>
+          <a:p>
+            <a:pPr indent="0" marL="0">
+              <a:buNone/>
+            </a:pPr>
+            <a:r>
+              <a:rPr lang="en-US" sz="1300" b="1" dirty="0">
+                <a:solidFill>
+                  <a:srgbClr val="0068B7"/>
+                </a:solidFill>
+                <a:latin typeface="Aptos" pitchFamily="34" charset="0"/>
+                <a:ea typeface="Aptos" pitchFamily="34" charset="-122"/>
+                <a:cs typeface="Aptos" pitchFamily="34" charset="-120"/>
+              </a:rPr>
+              <a:t>Concept checkpoints</a:t>
+            </a:r>
+            <a:endParaRPr lang="en-US" sz="1300" dirty="0"/>
+          </a:p>
+        </p:txBody>
       </p:sp>
       <p:sp>
         <p:nvSpPr>
@@ -4226,102 +4181,67 @@
         </p:nvSpPr>
         <p:spPr>
           <a:xfrm>
-            <a:off x="7909560" y="3099816"/>
-            <a:ext cx="2926080" cy="256032"/>
-          </a:xfrm>
-          <a:prstGeom prst="rect">
-            <a:avLst/>
-          </a:prstGeom>
-          <a:noFill/>
-          <a:ln/>
-        </p:spPr>
-        <p:txBody>
-          <a:bodyPr wrap="square" lIns="0" tIns="0" rIns="0" bIns="0" rtlCol="0" anchor="ctr"/>
-          <a:lstStyle/>
-          <a:p>
-            <a:pPr algn="ctr" indent="0" marL="0">
-              <a:buNone/>
-            </a:pPr>
-            <a:r>
-              <a:rPr lang="en-US" sz="1500" b="1" dirty="0">
-                <a:solidFill>
-                  <a:srgbClr val="003A63"/>
-                </a:solidFill>
-                <a:latin typeface="Aptos" pitchFamily="34" charset="0"/>
-                <a:ea typeface="Aptos" pitchFamily="34" charset="-122"/>
-                <a:cs typeface="Aptos" pitchFamily="34" charset="-120"/>
-              </a:rPr>
-              <a:t>Risk</a:t>
-            </a:r>
-            <a:endParaRPr lang="en-US" sz="1500" dirty="0"/>
+            <a:off x="7818120" y="3300984"/>
+            <a:ext cx="3090672" cy="877824"/>
+          </a:xfrm>
+          <a:prstGeom prst="rect">
+            <a:avLst/>
+          </a:prstGeom>
+          <a:noFill/>
+          <a:ln/>
+        </p:spPr>
+        <p:txBody>
+          <a:bodyPr wrap="square" lIns="254" tIns="254" rIns="254" bIns="254" rtlCol="0" anchor="t">
+            <a:normAutofit/>
+          </a:bodyPr>
+          <a:lstStyle/>
+          <a:p>
+            <a:r>
+              <a:rPr lang="en-US" sz="1380" dirty="0">
+                <a:solidFill>
+                  <a:srgbClr val="17364A"/>
+                </a:solidFill>
+                <a:latin typeface="Aptos" pitchFamily="34" charset="0"/>
+                <a:ea typeface="Aptos" pitchFamily="34" charset="-122"/>
+                <a:cs typeface="Aptos" pitchFamily="34" charset="-120"/>
+              </a:rPr>
+              <a:t>A model may produce a number such as 82.4 percent risk, but the data and validation may.</a:t>
+            </a:r>
+            <a:endParaRPr lang="en-US" sz="1380" dirty="0"/>
+          </a:p>
+          <a:p>
+            <a:r>
+              <a:rPr lang="en-US" sz="1380" dirty="0">
+                <a:solidFill>
+                  <a:srgbClr val="17364A"/>
+                </a:solidFill>
+                <a:latin typeface="Aptos" pitchFamily="34" charset="0"/>
+                <a:ea typeface="Aptos" pitchFamily="34" charset="-122"/>
+                <a:cs typeface="Aptos" pitchFamily="34" charset="-120"/>
+              </a:rPr>
+              <a:t>Another failure mode is hiding limitations to make results look more actionable.</a:t>
+            </a:r>
+            <a:endParaRPr lang="en-US" sz="1380" dirty="0"/>
+          </a:p>
+          <a:p>
+            <a:r>
+              <a:rPr lang="en-US" sz="1380" dirty="0">
+                <a:solidFill>
+                  <a:srgbClr val="17364A"/>
+                </a:solidFill>
+                <a:latin typeface="Aptos" pitchFamily="34" charset="0"/>
+                <a:ea typeface="Aptos" pitchFamily="34" charset="-122"/>
+                <a:cs typeface="Aptos" pitchFamily="34" charset="-120"/>
+              </a:rPr>
+              <a:t>This can erode trust if the model later performs poorly.</a:t>
+            </a:r>
+            <a:endParaRPr lang="en-US" sz="1380" dirty="0"/>
           </a:p>
         </p:txBody>
       </p:sp>
       <p:sp>
         <p:nvSpPr>
           <p:cNvPr id="16" name="Shape 14"/>
-          <p:cNvSpPr/>
-          <p:nvPr/>
-        </p:nvSpPr>
-        <p:spPr>
-          <a:xfrm>
-            <a:off x="8366760" y="3639312"/>
-            <a:ext cx="2011680" cy="0"/>
-          </a:xfrm>
-          <a:prstGeom prst="line">
-            <a:avLst/>
-          </a:prstGeom>
-          <a:noFill/>
-          <a:ln w="63500">
-            <a:solidFill>
-              <a:srgbClr val="2F8A28"/>
-            </a:solidFill>
-            <a:prstDash val="solid"/>
-          </a:ln>
-        </p:spPr>
-      </p:sp>
-      <p:sp>
-        <p:nvSpPr>
-          <p:cNvPr id="17" name="Text 15"/>
-          <p:cNvSpPr/>
-          <p:nvPr/>
-        </p:nvSpPr>
-        <p:spPr>
-          <a:xfrm>
-            <a:off x="7909560" y="3849624"/>
-            <a:ext cx="2926080" cy="164592"/>
-          </a:xfrm>
-          <a:prstGeom prst="rect">
-            <a:avLst/>
-          </a:prstGeom>
-          <a:noFill/>
-          <a:ln/>
-        </p:spPr>
-        <p:txBody>
-          <a:bodyPr wrap="square" lIns="0" tIns="0" rIns="0" bIns="0" rtlCol="0" anchor="ctr"/>
-          <a:lstStyle/>
-          <a:p>
-            <a:pPr algn="ctr" indent="0" marL="0">
-              <a:buNone/>
-            </a:pPr>
-            <a:r>
-              <a:rPr lang="en-US" sz="900" dirty="0">
-                <a:solidFill>
-                  <a:srgbClr val="003A63"/>
-                </a:solidFill>
-                <a:latin typeface="Aptos" pitchFamily="34" charset="0"/>
-                <a:ea typeface="Aptos" pitchFamily="34" charset="-122"/>
-                <a:cs typeface="Aptos" pitchFamily="34" charset="-120"/>
-              </a:rPr>
-              <a:t>Human review</a:t>
-            </a:r>
-            <a:endParaRPr lang="en-US" sz="900" dirty="0"/>
-          </a:p>
-        </p:txBody>
-      </p:sp>
-      <p:sp>
-        <p:nvSpPr>
-          <p:cNvPr id="18" name="Shape 16"/>
           <p:cNvSpPr/>
           <p:nvPr/>
         </p:nvSpPr>
@@ -4348,7 +4268,7 @@
       </p:sp>
       <p:sp>
         <p:nvSpPr>
-          <p:cNvPr id="19" name="Text 17"/>
+          <p:cNvPr id="17" name="Text 15"/>
           <p:cNvSpPr/>
           <p:nvPr/>
         </p:nvSpPr>
@@ -4387,7 +4307,7 @@
       </p:sp>
       <p:sp>
         <p:nvSpPr>
-          <p:cNvPr id="20" name="Text 18"/>
+          <p:cNvPr id="18" name="Text 16"/>
           <p:cNvSpPr/>
           <p:nvPr/>
         </p:nvSpPr>
@@ -4895,13 +4815,11 @@
             </a:avLst>
           </a:prstGeom>
           <a:solidFill>
-            <a:srgbClr val="FFFFFF">
-              <a:alpha val="88000"/>
-            </a:srgbClr>
+            <a:srgbClr val="FFFFFF"/>
           </a:solidFill>
           <a:ln w="12700">
             <a:solidFill>
-              <a:srgbClr val="D6E8F2"/>
+              <a:srgbClr val="B9D7E6"/>
             </a:solidFill>
             <a:prstDash val="solid"/>
           </a:ln>
@@ -4909,169 +4827,98 @@
       </p:sp>
       <p:sp>
         <p:nvSpPr>
-          <p:cNvPr id="14" name="Shape 12"/>
-          <p:cNvSpPr/>
-          <p:nvPr/>
-        </p:nvSpPr>
-        <p:spPr>
-          <a:xfrm>
-            <a:off x="8138160" y="3474720"/>
-            <a:ext cx="256032" cy="411480"/>
-          </a:xfrm>
-          <a:prstGeom prst="rect">
-            <a:avLst/>
-          </a:prstGeom>
-          <a:solidFill>
-            <a:srgbClr val="0068B7"/>
-          </a:solidFill>
-          <a:ln w="12700">
-            <a:solidFill>
-              <a:srgbClr val="0068B7"/>
-            </a:solidFill>
-            <a:prstDash val="solid"/>
-          </a:ln>
-        </p:spPr>
-      </p:sp>
-      <p:sp>
-        <p:nvSpPr>
-          <p:cNvPr id="15" name="Shape 13"/>
-          <p:cNvSpPr/>
-          <p:nvPr/>
-        </p:nvSpPr>
-        <p:spPr>
-          <a:xfrm>
-            <a:off x="8577072" y="3172968"/>
-            <a:ext cx="256032" cy="713232"/>
-          </a:xfrm>
-          <a:prstGeom prst="rect">
-            <a:avLst/>
-          </a:prstGeom>
-          <a:solidFill>
-            <a:srgbClr val="2F8A28"/>
-          </a:solidFill>
-          <a:ln w="12700">
-            <a:solidFill>
-              <a:srgbClr val="2F8A28"/>
-            </a:solidFill>
-            <a:prstDash val="solid"/>
-          </a:ln>
-        </p:spPr>
+          <p:cNvPr id="14" name="Text 12"/>
+          <p:cNvSpPr/>
+          <p:nvPr/>
+        </p:nvSpPr>
+        <p:spPr>
+          <a:xfrm>
+            <a:off x="7799832" y="2935224"/>
+            <a:ext cx="3145536" cy="256032"/>
+          </a:xfrm>
+          <a:prstGeom prst="rect">
+            <a:avLst/>
+          </a:prstGeom>
+          <a:noFill/>
+          <a:ln/>
+        </p:spPr>
+        <p:txBody>
+          <a:bodyPr wrap="square" lIns="0" tIns="0" rIns="0" bIns="0" rtlCol="0" anchor="ctr"/>
+          <a:lstStyle/>
+          <a:p>
+            <a:pPr indent="0" marL="0">
+              <a:buNone/>
+            </a:pPr>
+            <a:r>
+              <a:rPr lang="en-US" sz="1300" b="1" dirty="0">
+                <a:solidFill>
+                  <a:srgbClr val="0068B7"/>
+                </a:solidFill>
+                <a:latin typeface="Aptos" pitchFamily="34" charset="0"/>
+                <a:ea typeface="Aptos" pitchFamily="34" charset="-122"/>
+                <a:cs typeface="Aptos" pitchFamily="34" charset="-120"/>
+              </a:rPr>
+              <a:t>Concept checkpoints</a:t>
+            </a:r>
+            <a:endParaRPr lang="en-US" sz="1300" dirty="0"/>
+          </a:p>
+        </p:txBody>
+      </p:sp>
+      <p:sp>
+        <p:nvSpPr>
+          <p:cNvPr id="15" name="Text 13"/>
+          <p:cNvSpPr/>
+          <p:nvPr/>
+        </p:nvSpPr>
+        <p:spPr>
+          <a:xfrm>
+            <a:off x="7818120" y="3300984"/>
+            <a:ext cx="3090672" cy="877824"/>
+          </a:xfrm>
+          <a:prstGeom prst="rect">
+            <a:avLst/>
+          </a:prstGeom>
+          <a:noFill/>
+          <a:ln/>
+        </p:spPr>
+        <p:txBody>
+          <a:bodyPr wrap="square" lIns="254" tIns="254" rIns="254" bIns="254" rtlCol="0" anchor="t">
+            <a:normAutofit/>
+          </a:bodyPr>
+          <a:lstStyle/>
+          <a:p>
+            <a:r>
+              <a:rPr lang="en-US" sz="1380" dirty="0">
+                <a:solidFill>
+                  <a:srgbClr val="17364A"/>
+                </a:solidFill>
+                <a:latin typeface="Aptos" pitchFamily="34" charset="0"/>
+                <a:ea typeface="Aptos" pitchFamily="34" charset="-122"/>
+                <a:cs typeface="Aptos" pitchFamily="34" charset="-120"/>
+              </a:rPr>
+              <a:t>Generative AI can help draft summaries of model findings, but the draft must be checked by.</a:t>
+            </a:r>
+            <a:endParaRPr lang="en-US" sz="1380" dirty="0"/>
+          </a:p>
+          <a:p>
+            <a:r>
+              <a:rPr lang="en-US" sz="1380" dirty="0">
+                <a:solidFill>
+                  <a:srgbClr val="17364A"/>
+                </a:solidFill>
+                <a:latin typeface="Aptos" pitchFamily="34" charset="0"/>
+                <a:ea typeface="Aptos" pitchFamily="34" charset="-122"/>
+                <a:cs typeface="Aptos" pitchFamily="34" charset="-120"/>
+              </a:rPr>
+              <a:t>Predictive analytics, outbreak forecasts, risk stratification tools, and geospatial models.</a:t>
+            </a:r>
+            <a:endParaRPr lang="en-US" sz="1380" dirty="0"/>
+          </a:p>
+        </p:txBody>
       </p:sp>
       <p:sp>
         <p:nvSpPr>
           <p:cNvPr id="16" name="Shape 14"/>
-          <p:cNvSpPr/>
-          <p:nvPr/>
-        </p:nvSpPr>
-        <p:spPr>
-          <a:xfrm>
-            <a:off x="9015984" y="2880360"/>
-            <a:ext cx="256032" cy="1005840"/>
-          </a:xfrm>
-          <a:prstGeom prst="rect">
-            <a:avLst/>
-          </a:prstGeom>
-          <a:solidFill>
-            <a:srgbClr val="D69A2D"/>
-          </a:solidFill>
-          <a:ln w="12700">
-            <a:solidFill>
-              <a:srgbClr val="D69A2D"/>
-            </a:solidFill>
-            <a:prstDash val="solid"/>
-          </a:ln>
-        </p:spPr>
-      </p:sp>
-      <p:sp>
-        <p:nvSpPr>
-          <p:cNvPr id="17" name="Shape 15"/>
-          <p:cNvSpPr/>
-          <p:nvPr/>
-        </p:nvSpPr>
-        <p:spPr>
-          <a:xfrm>
-            <a:off x="9454896" y="3319272"/>
-            <a:ext cx="256032" cy="566928"/>
-          </a:xfrm>
-          <a:prstGeom prst="rect">
-            <a:avLst/>
-          </a:prstGeom>
-          <a:solidFill>
-            <a:srgbClr val="6A4CA3"/>
-          </a:solidFill>
-          <a:ln w="12700">
-            <a:solidFill>
-              <a:srgbClr val="6A4CA3"/>
-            </a:solidFill>
-            <a:prstDash val="solid"/>
-          </a:ln>
-        </p:spPr>
-      </p:sp>
-      <p:sp>
-        <p:nvSpPr>
-          <p:cNvPr id="18" name="Shape 16"/>
-          <p:cNvSpPr/>
-          <p:nvPr/>
-        </p:nvSpPr>
-        <p:spPr>
-          <a:xfrm>
-            <a:off x="8019288" y="3886200"/>
-            <a:ext cx="2706624" cy="0"/>
-          </a:xfrm>
-          <a:prstGeom prst="line">
-            <a:avLst/>
-          </a:prstGeom>
-          <a:noFill/>
-          <a:ln w="15240">
-            <a:solidFill>
-              <a:srgbClr val="003A63"/>
-            </a:solidFill>
-            <a:prstDash val="solid"/>
-          </a:ln>
-        </p:spPr>
-      </p:sp>
-      <p:sp>
-        <p:nvSpPr>
-          <p:cNvPr id="19" name="Text 17"/>
-          <p:cNvSpPr/>
-          <p:nvPr/>
-        </p:nvSpPr>
-        <p:spPr>
-          <a:xfrm>
-            <a:off x="7863840" y="3017520"/>
-            <a:ext cx="3017520" cy="201168"/>
-          </a:xfrm>
-          <a:prstGeom prst="rect">
-            <a:avLst/>
-          </a:prstGeom>
-          <a:noFill/>
-          <a:ln/>
-        </p:spPr>
-        <p:txBody>
-          <a:bodyPr wrap="square" lIns="0" tIns="0" rIns="0" bIns="0" rtlCol="0" anchor="ctr"/>
-          <a:lstStyle/>
-          <a:p>
-            <a:pPr algn="ctr" indent="0" marL="0">
-              <a:buNone/>
-            </a:pPr>
-            <a:r>
-              <a:rPr lang="en-US" sz="1050" b="1" dirty="0">
-                <a:solidFill>
-                  <a:srgbClr val="003A63"/>
-                </a:solidFill>
-                <a:latin typeface="Aptos" pitchFamily="34" charset="0"/>
-                <a:ea typeface="Aptos" pitchFamily="34" charset="-122"/>
-                <a:cs typeface="Aptos" pitchFamily="34" charset="-120"/>
-              </a:rPr>
-              <a:t>Measure and monitor</a:t>
-            </a:r>
-            <a:endParaRPr lang="en-US" sz="1050" dirty="0"/>
-          </a:p>
-        </p:txBody>
-      </p:sp>
-      <p:sp>
-        <p:nvSpPr>
-          <p:cNvPr id="20" name="Shape 18"/>
           <p:cNvSpPr/>
           <p:nvPr/>
         </p:nvSpPr>
@@ -5098,7 +4945,7 @@
       </p:sp>
       <p:sp>
         <p:nvSpPr>
-          <p:cNvPr id="21" name="Text 19"/>
+          <p:cNvPr id="17" name="Text 15"/>
           <p:cNvSpPr/>
           <p:nvPr/>
         </p:nvSpPr>
@@ -5137,7 +4984,7 @@
       </p:sp>
       <p:sp>
         <p:nvSpPr>
-          <p:cNvPr id="22" name="Text 20"/>
+          <p:cNvPr id="18" name="Text 16"/>
           <p:cNvSpPr/>
           <p:nvPr/>
         </p:nvSpPr>
@@ -5645,13 +5492,11 @@
             </a:avLst>
           </a:prstGeom>
           <a:solidFill>
-            <a:srgbClr val="FFFFFF">
-              <a:alpha val="88000"/>
-            </a:srgbClr>
+            <a:srgbClr val="FFFFFF"/>
           </a:solidFill>
           <a:ln w="12700">
             <a:solidFill>
-              <a:srgbClr val="D6E8F2"/>
+              <a:srgbClr val="B9D7E6"/>
             </a:solidFill>
             <a:prstDash val="solid"/>
           </a:ln>
@@ -5659,169 +5504,112 @@
       </p:sp>
       <p:sp>
         <p:nvSpPr>
-          <p:cNvPr id="14" name="Shape 12"/>
-          <p:cNvSpPr/>
-          <p:nvPr/>
-        </p:nvSpPr>
-        <p:spPr>
-          <a:xfrm>
-            <a:off x="8138160" y="3474720"/>
-            <a:ext cx="256032" cy="411480"/>
-          </a:xfrm>
-          <a:prstGeom prst="rect">
-            <a:avLst/>
-          </a:prstGeom>
-          <a:solidFill>
-            <a:srgbClr val="0068B7"/>
-          </a:solidFill>
-          <a:ln w="12700">
-            <a:solidFill>
-              <a:srgbClr val="0068B7"/>
-            </a:solidFill>
-            <a:prstDash val="solid"/>
-          </a:ln>
-        </p:spPr>
-      </p:sp>
-      <p:sp>
-        <p:nvSpPr>
-          <p:cNvPr id="15" name="Shape 13"/>
-          <p:cNvSpPr/>
-          <p:nvPr/>
-        </p:nvSpPr>
-        <p:spPr>
-          <a:xfrm>
-            <a:off x="8577072" y="3172968"/>
-            <a:ext cx="256032" cy="713232"/>
-          </a:xfrm>
-          <a:prstGeom prst="rect">
-            <a:avLst/>
-          </a:prstGeom>
-          <a:solidFill>
-            <a:srgbClr val="2F8A28"/>
-          </a:solidFill>
-          <a:ln w="12700">
-            <a:solidFill>
-              <a:srgbClr val="2F8A28"/>
-            </a:solidFill>
-            <a:prstDash val="solid"/>
-          </a:ln>
-        </p:spPr>
+          <p:cNvPr id="14" name="Text 12"/>
+          <p:cNvSpPr/>
+          <p:nvPr/>
+        </p:nvSpPr>
+        <p:spPr>
+          <a:xfrm>
+            <a:off x="7799832" y="2935224"/>
+            <a:ext cx="3145536" cy="256032"/>
+          </a:xfrm>
+          <a:prstGeom prst="rect">
+            <a:avLst/>
+          </a:prstGeom>
+          <a:noFill/>
+          <a:ln/>
+        </p:spPr>
+        <p:txBody>
+          <a:bodyPr wrap="square" lIns="0" tIns="0" rIns="0" bIns="0" rtlCol="0" anchor="ctr"/>
+          <a:lstStyle/>
+          <a:p>
+            <a:pPr indent="0" marL="0">
+              <a:buNone/>
+            </a:pPr>
+            <a:r>
+              <a:rPr lang="en-US" sz="1300" b="1" dirty="0">
+                <a:solidFill>
+                  <a:srgbClr val="0068B7"/>
+                </a:solidFill>
+                <a:latin typeface="Aptos" pitchFamily="34" charset="0"/>
+                <a:ea typeface="Aptos" pitchFamily="34" charset="-122"/>
+                <a:cs typeface="Aptos" pitchFamily="34" charset="-120"/>
+              </a:rPr>
+              <a:t>Concept checkpoints</a:t>
+            </a:r>
+            <a:endParaRPr lang="en-US" sz="1300" dirty="0"/>
+          </a:p>
+        </p:txBody>
+      </p:sp>
+      <p:sp>
+        <p:nvSpPr>
+          <p:cNvPr id="15" name="Text 13"/>
+          <p:cNvSpPr/>
+          <p:nvPr/>
+        </p:nvSpPr>
+        <p:spPr>
+          <a:xfrm>
+            <a:off x="7818120" y="3300984"/>
+            <a:ext cx="3090672" cy="877824"/>
+          </a:xfrm>
+          <a:prstGeom prst="rect">
+            <a:avLst/>
+          </a:prstGeom>
+          <a:noFill/>
+          <a:ln/>
+        </p:spPr>
+        <p:txBody>
+          <a:bodyPr wrap="square" lIns="254" tIns="254" rIns="254" bIns="254" rtlCol="0" anchor="t">
+            <a:normAutofit/>
+          </a:bodyPr>
+          <a:lstStyle/>
+          <a:p>
+            <a:r>
+              <a:rPr lang="en-US" sz="1380" dirty="0">
+                <a:solidFill>
+                  <a:srgbClr val="17364A"/>
+                </a:solidFill>
+                <a:latin typeface="Aptos" pitchFamily="34" charset="0"/>
+                <a:ea typeface="Aptos" pitchFamily="34" charset="-122"/>
+                <a:cs typeface="Aptos" pitchFamily="34" charset="-120"/>
+              </a:rPr>
+              <a:t>Who needs to understand this model result?</a:t>
+            </a:r>
+            <a:endParaRPr lang="en-US" sz="1380" dirty="0"/>
+          </a:p>
+          <a:p>
+            <a:r>
+              <a:rPr lang="en-US" sz="1380" dirty="0">
+                <a:solidFill>
+                  <a:srgbClr val="17364A"/>
+                </a:solidFill>
+                <a:latin typeface="Aptos" pitchFamily="34" charset="0"/>
+                <a:ea typeface="Aptos" pitchFamily="34" charset="-122"/>
+                <a:cs typeface="Aptos" pitchFamily="34" charset="-120"/>
+              </a:rPr>
+              <a:t>What decision will the result support?</a:t>
+            </a:r>
+            <a:endParaRPr lang="en-US" sz="1380" dirty="0"/>
+          </a:p>
+          <a:p>
+            <a:r>
+              <a:rPr lang="en-US" sz="1380" dirty="0">
+                <a:solidFill>
+                  <a:srgbClr val="17364A"/>
+                </a:solidFill>
+                <a:latin typeface="Aptos" pitchFamily="34" charset="0"/>
+                <a:ea typeface="Aptos" pitchFamily="34" charset="-122"/>
+                <a:cs typeface="Aptos" pitchFamily="34" charset="-120"/>
+              </a:rPr>
+              <a:t>What uncertainty or limitation could change the decision?</a:t>
+            </a:r>
+            <a:endParaRPr lang="en-US" sz="1380" dirty="0"/>
+          </a:p>
+        </p:txBody>
       </p:sp>
       <p:sp>
         <p:nvSpPr>
           <p:cNvPr id="16" name="Shape 14"/>
-          <p:cNvSpPr/>
-          <p:nvPr/>
-        </p:nvSpPr>
-        <p:spPr>
-          <a:xfrm>
-            <a:off x="9015984" y="2880360"/>
-            <a:ext cx="256032" cy="1005840"/>
-          </a:xfrm>
-          <a:prstGeom prst="rect">
-            <a:avLst/>
-          </a:prstGeom>
-          <a:solidFill>
-            <a:srgbClr val="D69A2D"/>
-          </a:solidFill>
-          <a:ln w="12700">
-            <a:solidFill>
-              <a:srgbClr val="D69A2D"/>
-            </a:solidFill>
-            <a:prstDash val="solid"/>
-          </a:ln>
-        </p:spPr>
-      </p:sp>
-      <p:sp>
-        <p:nvSpPr>
-          <p:cNvPr id="17" name="Shape 15"/>
-          <p:cNvSpPr/>
-          <p:nvPr/>
-        </p:nvSpPr>
-        <p:spPr>
-          <a:xfrm>
-            <a:off x="9454896" y="3319272"/>
-            <a:ext cx="256032" cy="566928"/>
-          </a:xfrm>
-          <a:prstGeom prst="rect">
-            <a:avLst/>
-          </a:prstGeom>
-          <a:solidFill>
-            <a:srgbClr val="6A4CA3"/>
-          </a:solidFill>
-          <a:ln w="12700">
-            <a:solidFill>
-              <a:srgbClr val="6A4CA3"/>
-            </a:solidFill>
-            <a:prstDash val="solid"/>
-          </a:ln>
-        </p:spPr>
-      </p:sp>
-      <p:sp>
-        <p:nvSpPr>
-          <p:cNvPr id="18" name="Shape 16"/>
-          <p:cNvSpPr/>
-          <p:nvPr/>
-        </p:nvSpPr>
-        <p:spPr>
-          <a:xfrm>
-            <a:off x="8019288" y="3886200"/>
-            <a:ext cx="2706624" cy="0"/>
-          </a:xfrm>
-          <a:prstGeom prst="line">
-            <a:avLst/>
-          </a:prstGeom>
-          <a:noFill/>
-          <a:ln w="15240">
-            <a:solidFill>
-              <a:srgbClr val="003A63"/>
-            </a:solidFill>
-            <a:prstDash val="solid"/>
-          </a:ln>
-        </p:spPr>
-      </p:sp>
-      <p:sp>
-        <p:nvSpPr>
-          <p:cNvPr id="19" name="Text 17"/>
-          <p:cNvSpPr/>
-          <p:nvPr/>
-        </p:nvSpPr>
-        <p:spPr>
-          <a:xfrm>
-            <a:off x="7863840" y="3017520"/>
-            <a:ext cx="3017520" cy="201168"/>
-          </a:xfrm>
-          <a:prstGeom prst="rect">
-            <a:avLst/>
-          </a:prstGeom>
-          <a:noFill/>
-          <a:ln/>
-        </p:spPr>
-        <p:txBody>
-          <a:bodyPr wrap="square" lIns="0" tIns="0" rIns="0" bIns="0" rtlCol="0" anchor="ctr"/>
-          <a:lstStyle/>
-          <a:p>
-            <a:pPr algn="ctr" indent="0" marL="0">
-              <a:buNone/>
-            </a:pPr>
-            <a:r>
-              <a:rPr lang="en-US" sz="1050" b="1" dirty="0">
-                <a:solidFill>
-                  <a:srgbClr val="003A63"/>
-                </a:solidFill>
-                <a:latin typeface="Aptos" pitchFamily="34" charset="0"/>
-                <a:ea typeface="Aptos" pitchFamily="34" charset="-122"/>
-                <a:cs typeface="Aptos" pitchFamily="34" charset="-120"/>
-              </a:rPr>
-              <a:t>Measure and monitor</a:t>
-            </a:r>
-            <a:endParaRPr lang="en-US" sz="1050" dirty="0"/>
-          </a:p>
-        </p:txBody>
-      </p:sp>
-      <p:sp>
-        <p:nvSpPr>
-          <p:cNvPr id="20" name="Shape 18"/>
           <p:cNvSpPr/>
           <p:nvPr/>
         </p:nvSpPr>
@@ -5848,7 +5636,7 @@
       </p:sp>
       <p:sp>
         <p:nvSpPr>
-          <p:cNvPr id="21" name="Text 19"/>
+          <p:cNvPr id="17" name="Text 15"/>
           <p:cNvSpPr/>
           <p:nvPr/>
         </p:nvSpPr>
@@ -5887,7 +5675,7 @@
       </p:sp>
       <p:sp>
         <p:nvSpPr>
-          <p:cNvPr id="22" name="Text 20"/>
+          <p:cNvPr id="18" name="Text 16"/>
           <p:cNvSpPr/>
           <p:nvPr/>
         </p:nvSpPr>
@@ -6381,13 +6169,11 @@
             </a:avLst>
           </a:prstGeom>
           <a:solidFill>
-            <a:srgbClr val="FFFFFF">
-              <a:alpha val="88000"/>
-            </a:srgbClr>
+            <a:srgbClr val="FFFFFF"/>
           </a:solidFill>
           <a:ln w="12700">
             <a:solidFill>
-              <a:srgbClr val="D6E8F2"/>
+              <a:srgbClr val="B9D7E6"/>
             </a:solidFill>
             <a:prstDash val="solid"/>
           </a:ln>
@@ -6395,169 +6181,98 @@
       </p:sp>
       <p:sp>
         <p:nvSpPr>
-          <p:cNvPr id="14" name="Shape 12"/>
-          <p:cNvSpPr/>
-          <p:nvPr/>
-        </p:nvSpPr>
-        <p:spPr>
-          <a:xfrm>
-            <a:off x="8138160" y="3474720"/>
-            <a:ext cx="256032" cy="411480"/>
-          </a:xfrm>
-          <a:prstGeom prst="rect">
-            <a:avLst/>
-          </a:prstGeom>
-          <a:solidFill>
-            <a:srgbClr val="0068B7"/>
-          </a:solidFill>
-          <a:ln w="12700">
-            <a:solidFill>
-              <a:srgbClr val="0068B7"/>
-            </a:solidFill>
-            <a:prstDash val="solid"/>
-          </a:ln>
-        </p:spPr>
-      </p:sp>
-      <p:sp>
-        <p:nvSpPr>
-          <p:cNvPr id="15" name="Shape 13"/>
-          <p:cNvSpPr/>
-          <p:nvPr/>
-        </p:nvSpPr>
-        <p:spPr>
-          <a:xfrm>
-            <a:off x="8577072" y="3172968"/>
-            <a:ext cx="256032" cy="713232"/>
-          </a:xfrm>
-          <a:prstGeom prst="rect">
-            <a:avLst/>
-          </a:prstGeom>
-          <a:solidFill>
-            <a:srgbClr val="2F8A28"/>
-          </a:solidFill>
-          <a:ln w="12700">
-            <a:solidFill>
-              <a:srgbClr val="2F8A28"/>
-            </a:solidFill>
-            <a:prstDash val="solid"/>
-          </a:ln>
-        </p:spPr>
+          <p:cNvPr id="14" name="Text 12"/>
+          <p:cNvSpPr/>
+          <p:nvPr/>
+        </p:nvSpPr>
+        <p:spPr>
+          <a:xfrm>
+            <a:off x="7799832" y="2935224"/>
+            <a:ext cx="3145536" cy="256032"/>
+          </a:xfrm>
+          <a:prstGeom prst="rect">
+            <a:avLst/>
+          </a:prstGeom>
+          <a:noFill/>
+          <a:ln/>
+        </p:spPr>
+        <p:txBody>
+          <a:bodyPr wrap="square" lIns="0" tIns="0" rIns="0" bIns="0" rtlCol="0" anchor="ctr"/>
+          <a:lstStyle/>
+          <a:p>
+            <a:pPr indent="0" marL="0">
+              <a:buNone/>
+            </a:pPr>
+            <a:r>
+              <a:rPr lang="en-US" sz="1300" b="1" dirty="0">
+                <a:solidFill>
+                  <a:srgbClr val="0068B7"/>
+                </a:solidFill>
+                <a:latin typeface="Aptos" pitchFamily="34" charset="0"/>
+                <a:ea typeface="Aptos" pitchFamily="34" charset="-122"/>
+                <a:cs typeface="Aptos" pitchFamily="34" charset="-120"/>
+              </a:rPr>
+              <a:t>Concept checkpoints</a:t>
+            </a:r>
+            <a:endParaRPr lang="en-US" sz="1300" dirty="0"/>
+          </a:p>
+        </p:txBody>
+      </p:sp>
+      <p:sp>
+        <p:nvSpPr>
+          <p:cNvPr id="15" name="Text 13"/>
+          <p:cNvSpPr/>
+          <p:nvPr/>
+        </p:nvSpPr>
+        <p:spPr>
+          <a:xfrm>
+            <a:off x="7818120" y="3300984"/>
+            <a:ext cx="3090672" cy="877824"/>
+          </a:xfrm>
+          <a:prstGeom prst="rect">
+            <a:avLst/>
+          </a:prstGeom>
+          <a:noFill/>
+          <a:ln/>
+        </p:spPr>
+        <p:txBody>
+          <a:bodyPr wrap="square" lIns="254" tIns="254" rIns="254" bIns="254" rtlCol="0" anchor="t">
+            <a:normAutofit/>
+          </a:bodyPr>
+          <a:lstStyle/>
+          <a:p>
+            <a:r>
+              <a:rPr lang="en-US" sz="1380" dirty="0">
+                <a:solidFill>
+                  <a:srgbClr val="17364A"/>
+                </a:solidFill>
+                <a:latin typeface="Aptos" pitchFamily="34" charset="0"/>
+                <a:ea typeface="Aptos" pitchFamily="34" charset="-122"/>
+                <a:cs typeface="Aptos" pitchFamily="34" charset="-120"/>
+              </a:rPr>
+              <a:t>Are there subgroup performance concerns?</a:t>
+            </a:r>
+            <a:endParaRPr lang="en-US" sz="1380" dirty="0"/>
+          </a:p>
+          <a:p>
+            <a:r>
+              <a:rPr lang="en-US" sz="1380" dirty="0">
+                <a:solidFill>
+                  <a:srgbClr val="17364A"/>
+                </a:solidFill>
+                <a:latin typeface="Aptos" pitchFamily="34" charset="0"/>
+                <a:ea typeface="Aptos" pitchFamily="34" charset="-122"/>
+                <a:cs typeface="Aptos" pitchFamily="34" charset="-120"/>
+              </a:rPr>
+              <a:t>What wording would prevent overclaiming?</a:t>
+            </a:r>
+            <a:endParaRPr lang="en-US" sz="1380" dirty="0"/>
+          </a:p>
+        </p:txBody>
       </p:sp>
       <p:sp>
         <p:nvSpPr>
           <p:cNvPr id="16" name="Shape 14"/>
-          <p:cNvSpPr/>
-          <p:nvPr/>
-        </p:nvSpPr>
-        <p:spPr>
-          <a:xfrm>
-            <a:off x="9015984" y="2880360"/>
-            <a:ext cx="256032" cy="1005840"/>
-          </a:xfrm>
-          <a:prstGeom prst="rect">
-            <a:avLst/>
-          </a:prstGeom>
-          <a:solidFill>
-            <a:srgbClr val="D69A2D"/>
-          </a:solidFill>
-          <a:ln w="12700">
-            <a:solidFill>
-              <a:srgbClr val="D69A2D"/>
-            </a:solidFill>
-            <a:prstDash val="solid"/>
-          </a:ln>
-        </p:spPr>
-      </p:sp>
-      <p:sp>
-        <p:nvSpPr>
-          <p:cNvPr id="17" name="Shape 15"/>
-          <p:cNvSpPr/>
-          <p:nvPr/>
-        </p:nvSpPr>
-        <p:spPr>
-          <a:xfrm>
-            <a:off x="9454896" y="3319272"/>
-            <a:ext cx="256032" cy="566928"/>
-          </a:xfrm>
-          <a:prstGeom prst="rect">
-            <a:avLst/>
-          </a:prstGeom>
-          <a:solidFill>
-            <a:srgbClr val="6A4CA3"/>
-          </a:solidFill>
-          <a:ln w="12700">
-            <a:solidFill>
-              <a:srgbClr val="6A4CA3"/>
-            </a:solidFill>
-            <a:prstDash val="solid"/>
-          </a:ln>
-        </p:spPr>
-      </p:sp>
-      <p:sp>
-        <p:nvSpPr>
-          <p:cNvPr id="18" name="Shape 16"/>
-          <p:cNvSpPr/>
-          <p:nvPr/>
-        </p:nvSpPr>
-        <p:spPr>
-          <a:xfrm>
-            <a:off x="8019288" y="3886200"/>
-            <a:ext cx="2706624" cy="0"/>
-          </a:xfrm>
-          <a:prstGeom prst="line">
-            <a:avLst/>
-          </a:prstGeom>
-          <a:noFill/>
-          <a:ln w="15240">
-            <a:solidFill>
-              <a:srgbClr val="003A63"/>
-            </a:solidFill>
-            <a:prstDash val="solid"/>
-          </a:ln>
-        </p:spPr>
-      </p:sp>
-      <p:sp>
-        <p:nvSpPr>
-          <p:cNvPr id="19" name="Text 17"/>
-          <p:cNvSpPr/>
-          <p:nvPr/>
-        </p:nvSpPr>
-        <p:spPr>
-          <a:xfrm>
-            <a:off x="7863840" y="3017520"/>
-            <a:ext cx="3017520" cy="201168"/>
-          </a:xfrm>
-          <a:prstGeom prst="rect">
-            <a:avLst/>
-          </a:prstGeom>
-          <a:noFill/>
-          <a:ln/>
-        </p:spPr>
-        <p:txBody>
-          <a:bodyPr wrap="square" lIns="0" tIns="0" rIns="0" bIns="0" rtlCol="0" anchor="ctr"/>
-          <a:lstStyle/>
-          <a:p>
-            <a:pPr algn="ctr" indent="0" marL="0">
-              <a:buNone/>
-            </a:pPr>
-            <a:r>
-              <a:rPr lang="en-US" sz="1050" b="1" dirty="0">
-                <a:solidFill>
-                  <a:srgbClr val="003A63"/>
-                </a:solidFill>
-                <a:latin typeface="Aptos" pitchFamily="34" charset="0"/>
-                <a:ea typeface="Aptos" pitchFamily="34" charset="-122"/>
-                <a:cs typeface="Aptos" pitchFamily="34" charset="-120"/>
-              </a:rPr>
-              <a:t>Measure and monitor</a:t>
-            </a:r>
-            <a:endParaRPr lang="en-US" sz="1050" dirty="0"/>
-          </a:p>
-        </p:txBody>
-      </p:sp>
-      <p:sp>
-        <p:nvSpPr>
-          <p:cNvPr id="20" name="Shape 18"/>
           <p:cNvSpPr/>
           <p:nvPr/>
         </p:nvSpPr>
@@ -6584,7 +6299,7 @@
       </p:sp>
       <p:sp>
         <p:nvSpPr>
-          <p:cNvPr id="21" name="Text 19"/>
+          <p:cNvPr id="17" name="Text 15"/>
           <p:cNvSpPr/>
           <p:nvPr/>
         </p:nvSpPr>
@@ -6623,7 +6338,7 @@
       </p:sp>
       <p:sp>
         <p:nvSpPr>
-          <p:cNvPr id="22" name="Text 20"/>
+          <p:cNvPr id="18" name="Text 16"/>
           <p:cNvSpPr/>
           <p:nvPr/>
         </p:nvSpPr>
@@ -7117,13 +6832,11 @@
             </a:avLst>
           </a:prstGeom>
           <a:solidFill>
-            <a:srgbClr val="FFFFFF">
-              <a:alpha val="88000"/>
-            </a:srgbClr>
+            <a:srgbClr val="FFFFFF"/>
           </a:solidFill>
           <a:ln w="12700">
             <a:solidFill>
-              <a:srgbClr val="D6E8F2"/>
+              <a:srgbClr val="B9D7E6"/>
             </a:solidFill>
             <a:prstDash val="solid"/>
           </a:ln>
@@ -7131,169 +6844,98 @@
       </p:sp>
       <p:sp>
         <p:nvSpPr>
-          <p:cNvPr id="14" name="Shape 12"/>
-          <p:cNvSpPr/>
-          <p:nvPr/>
-        </p:nvSpPr>
-        <p:spPr>
-          <a:xfrm>
-            <a:off x="8138160" y="3474720"/>
-            <a:ext cx="256032" cy="411480"/>
-          </a:xfrm>
-          <a:prstGeom prst="rect">
-            <a:avLst/>
-          </a:prstGeom>
-          <a:solidFill>
-            <a:srgbClr val="0068B7"/>
-          </a:solidFill>
-          <a:ln w="12700">
-            <a:solidFill>
-              <a:srgbClr val="0068B7"/>
-            </a:solidFill>
-            <a:prstDash val="solid"/>
-          </a:ln>
-        </p:spPr>
-      </p:sp>
-      <p:sp>
-        <p:nvSpPr>
-          <p:cNvPr id="15" name="Shape 13"/>
-          <p:cNvSpPr/>
-          <p:nvPr/>
-        </p:nvSpPr>
-        <p:spPr>
-          <a:xfrm>
-            <a:off x="8577072" y="3172968"/>
-            <a:ext cx="256032" cy="713232"/>
-          </a:xfrm>
-          <a:prstGeom prst="rect">
-            <a:avLst/>
-          </a:prstGeom>
-          <a:solidFill>
-            <a:srgbClr val="2F8A28"/>
-          </a:solidFill>
-          <a:ln w="12700">
-            <a:solidFill>
-              <a:srgbClr val="2F8A28"/>
-            </a:solidFill>
-            <a:prstDash val="solid"/>
-          </a:ln>
-        </p:spPr>
+          <p:cNvPr id="14" name="Text 12"/>
+          <p:cNvSpPr/>
+          <p:nvPr/>
+        </p:nvSpPr>
+        <p:spPr>
+          <a:xfrm>
+            <a:off x="7799832" y="2935224"/>
+            <a:ext cx="3145536" cy="256032"/>
+          </a:xfrm>
+          <a:prstGeom prst="rect">
+            <a:avLst/>
+          </a:prstGeom>
+          <a:noFill/>
+          <a:ln/>
+        </p:spPr>
+        <p:txBody>
+          <a:bodyPr wrap="square" lIns="0" tIns="0" rIns="0" bIns="0" rtlCol="0" anchor="ctr"/>
+          <a:lstStyle/>
+          <a:p>
+            <a:pPr indent="0" marL="0">
+              <a:buNone/>
+            </a:pPr>
+            <a:r>
+              <a:rPr lang="en-US" sz="1300" b="1" dirty="0">
+                <a:solidFill>
+                  <a:srgbClr val="0068B7"/>
+                </a:solidFill>
+                <a:latin typeface="Aptos" pitchFamily="34" charset="0"/>
+                <a:ea typeface="Aptos" pitchFamily="34" charset="-122"/>
+                <a:cs typeface="Aptos" pitchFamily="34" charset="-120"/>
+              </a:rPr>
+              <a:t>Concept checkpoints</a:t>
+            </a:r>
+            <a:endParaRPr lang="en-US" sz="1300" dirty="0"/>
+          </a:p>
+        </p:txBody>
+      </p:sp>
+      <p:sp>
+        <p:nvSpPr>
+          <p:cNvPr id="15" name="Text 13"/>
+          <p:cNvSpPr/>
+          <p:nvPr/>
+        </p:nvSpPr>
+        <p:spPr>
+          <a:xfrm>
+            <a:off x="7818120" y="3300984"/>
+            <a:ext cx="3090672" cy="877824"/>
+          </a:xfrm>
+          <a:prstGeom prst="rect">
+            <a:avLst/>
+          </a:prstGeom>
+          <a:noFill/>
+          <a:ln/>
+        </p:spPr>
+        <p:txBody>
+          <a:bodyPr wrap="square" lIns="254" tIns="254" rIns="254" bIns="254" rtlCol="0" anchor="t">
+            <a:normAutofit/>
+          </a:bodyPr>
+          <a:lstStyle/>
+          <a:p>
+            <a:r>
+              <a:rPr lang="en-US" sz="1380" dirty="0">
+                <a:solidFill>
+                  <a:srgbClr val="17364A"/>
+                </a:solidFill>
+                <a:latin typeface="Aptos" pitchFamily="34" charset="0"/>
+                <a:ea typeface="Aptos" pitchFamily="34" charset="-122"/>
+                <a:cs typeface="Aptos" pitchFamily="34" charset="-120"/>
+              </a:rPr>
+              <a:t>Create a one-page model communication brief.</a:t>
+            </a:r>
+            <a:endParaRPr lang="en-US" sz="1380" dirty="0"/>
+          </a:p>
+          <a:p>
+            <a:r>
+              <a:rPr lang="en-US" sz="1380" dirty="0">
+                <a:solidFill>
+                  <a:srgbClr val="17364A"/>
+                </a:solidFill>
+                <a:latin typeface="Aptos" pitchFamily="34" charset="0"/>
+                <a:ea typeface="Aptos" pitchFamily="34" charset="-122"/>
+                <a:cs typeface="Aptos" pitchFamily="34" charset="-120"/>
+              </a:rPr>
+              <a:t>Include the decision question, model result, uncertainty, validation status, limitations,.</a:t>
+            </a:r>
+            <a:endParaRPr lang="en-US" sz="1380" dirty="0"/>
+          </a:p>
+        </p:txBody>
       </p:sp>
       <p:sp>
         <p:nvSpPr>
           <p:cNvPr id="16" name="Shape 14"/>
-          <p:cNvSpPr/>
-          <p:nvPr/>
-        </p:nvSpPr>
-        <p:spPr>
-          <a:xfrm>
-            <a:off x="9015984" y="2880360"/>
-            <a:ext cx="256032" cy="1005840"/>
-          </a:xfrm>
-          <a:prstGeom prst="rect">
-            <a:avLst/>
-          </a:prstGeom>
-          <a:solidFill>
-            <a:srgbClr val="D69A2D"/>
-          </a:solidFill>
-          <a:ln w="12700">
-            <a:solidFill>
-              <a:srgbClr val="D69A2D"/>
-            </a:solidFill>
-            <a:prstDash val="solid"/>
-          </a:ln>
-        </p:spPr>
-      </p:sp>
-      <p:sp>
-        <p:nvSpPr>
-          <p:cNvPr id="17" name="Shape 15"/>
-          <p:cNvSpPr/>
-          <p:nvPr/>
-        </p:nvSpPr>
-        <p:spPr>
-          <a:xfrm>
-            <a:off x="9454896" y="3319272"/>
-            <a:ext cx="256032" cy="566928"/>
-          </a:xfrm>
-          <a:prstGeom prst="rect">
-            <a:avLst/>
-          </a:prstGeom>
-          <a:solidFill>
-            <a:srgbClr val="6A4CA3"/>
-          </a:solidFill>
-          <a:ln w="12700">
-            <a:solidFill>
-              <a:srgbClr val="6A4CA3"/>
-            </a:solidFill>
-            <a:prstDash val="solid"/>
-          </a:ln>
-        </p:spPr>
-      </p:sp>
-      <p:sp>
-        <p:nvSpPr>
-          <p:cNvPr id="18" name="Shape 16"/>
-          <p:cNvSpPr/>
-          <p:nvPr/>
-        </p:nvSpPr>
-        <p:spPr>
-          <a:xfrm>
-            <a:off x="8019288" y="3886200"/>
-            <a:ext cx="2706624" cy="0"/>
-          </a:xfrm>
-          <a:prstGeom prst="line">
-            <a:avLst/>
-          </a:prstGeom>
-          <a:noFill/>
-          <a:ln w="15240">
-            <a:solidFill>
-              <a:srgbClr val="003A63"/>
-            </a:solidFill>
-            <a:prstDash val="solid"/>
-          </a:ln>
-        </p:spPr>
-      </p:sp>
-      <p:sp>
-        <p:nvSpPr>
-          <p:cNvPr id="19" name="Text 17"/>
-          <p:cNvSpPr/>
-          <p:nvPr/>
-        </p:nvSpPr>
-        <p:spPr>
-          <a:xfrm>
-            <a:off x="7863840" y="3017520"/>
-            <a:ext cx="3017520" cy="201168"/>
-          </a:xfrm>
-          <a:prstGeom prst="rect">
-            <a:avLst/>
-          </a:prstGeom>
-          <a:noFill/>
-          <a:ln/>
-        </p:spPr>
-        <p:txBody>
-          <a:bodyPr wrap="square" lIns="0" tIns="0" rIns="0" bIns="0" rtlCol="0" anchor="ctr"/>
-          <a:lstStyle/>
-          <a:p>
-            <a:pPr algn="ctr" indent="0" marL="0">
-              <a:buNone/>
-            </a:pPr>
-            <a:r>
-              <a:rPr lang="en-US" sz="1050" b="1" dirty="0">
-                <a:solidFill>
-                  <a:srgbClr val="003A63"/>
-                </a:solidFill>
-                <a:latin typeface="Aptos" pitchFamily="34" charset="0"/>
-                <a:ea typeface="Aptos" pitchFamily="34" charset="-122"/>
-                <a:cs typeface="Aptos" pitchFamily="34" charset="-120"/>
-              </a:rPr>
-              <a:t>Measure and monitor</a:t>
-            </a:r>
-            <a:endParaRPr lang="en-US" sz="1050" dirty="0"/>
-          </a:p>
-        </p:txBody>
-      </p:sp>
-      <p:sp>
-        <p:nvSpPr>
-          <p:cNvPr id="20" name="Shape 18"/>
           <p:cNvSpPr/>
           <p:nvPr/>
         </p:nvSpPr>
@@ -7320,7 +6962,7 @@
       </p:sp>
       <p:sp>
         <p:nvSpPr>
-          <p:cNvPr id="21" name="Text 19"/>
+          <p:cNvPr id="17" name="Text 15"/>
           <p:cNvSpPr/>
           <p:nvPr/>
         </p:nvSpPr>
@@ -7359,7 +7001,7 @@
       </p:sp>
       <p:sp>
         <p:nvSpPr>
-          <p:cNvPr id="22" name="Text 20"/>
+          <p:cNvPr id="18" name="Text 16"/>
           <p:cNvSpPr/>
           <p:nvPr/>
         </p:nvSpPr>
@@ -7867,13 +7509,11 @@
             </a:avLst>
           </a:prstGeom>
           <a:solidFill>
-            <a:srgbClr val="FFFFFF">
-              <a:alpha val="88000"/>
-            </a:srgbClr>
+            <a:srgbClr val="FFFFFF"/>
           </a:solidFill>
           <a:ln w="12700">
             <a:solidFill>
-              <a:srgbClr val="D6E8F2"/>
+              <a:srgbClr val="B9D7E6"/>
             </a:solidFill>
             <a:prstDash val="solid"/>
           </a:ln>
@@ -7881,169 +7521,112 @@
       </p:sp>
       <p:sp>
         <p:nvSpPr>
-          <p:cNvPr id="14" name="Shape 12"/>
-          <p:cNvSpPr/>
-          <p:nvPr/>
-        </p:nvSpPr>
-        <p:spPr>
-          <a:xfrm>
-            <a:off x="8138160" y="3474720"/>
-            <a:ext cx="256032" cy="411480"/>
-          </a:xfrm>
-          <a:prstGeom prst="rect">
-            <a:avLst/>
-          </a:prstGeom>
-          <a:solidFill>
-            <a:srgbClr val="0068B7"/>
-          </a:solidFill>
-          <a:ln w="12700">
-            <a:solidFill>
-              <a:srgbClr val="0068B7"/>
-            </a:solidFill>
-            <a:prstDash val="solid"/>
-          </a:ln>
-        </p:spPr>
-      </p:sp>
-      <p:sp>
-        <p:nvSpPr>
-          <p:cNvPr id="15" name="Shape 13"/>
-          <p:cNvSpPr/>
-          <p:nvPr/>
-        </p:nvSpPr>
-        <p:spPr>
-          <a:xfrm>
-            <a:off x="8577072" y="3172968"/>
-            <a:ext cx="256032" cy="713232"/>
-          </a:xfrm>
-          <a:prstGeom prst="rect">
-            <a:avLst/>
-          </a:prstGeom>
-          <a:solidFill>
-            <a:srgbClr val="2F8A28"/>
-          </a:solidFill>
-          <a:ln w="12700">
-            <a:solidFill>
-              <a:srgbClr val="2F8A28"/>
-            </a:solidFill>
-            <a:prstDash val="solid"/>
-          </a:ln>
-        </p:spPr>
+          <p:cNvPr id="14" name="Text 12"/>
+          <p:cNvSpPr/>
+          <p:nvPr/>
+        </p:nvSpPr>
+        <p:spPr>
+          <a:xfrm>
+            <a:off x="7799832" y="2935224"/>
+            <a:ext cx="3145536" cy="256032"/>
+          </a:xfrm>
+          <a:prstGeom prst="rect">
+            <a:avLst/>
+          </a:prstGeom>
+          <a:noFill/>
+          <a:ln/>
+        </p:spPr>
+        <p:txBody>
+          <a:bodyPr wrap="square" lIns="0" tIns="0" rIns="0" bIns="0" rtlCol="0" anchor="ctr"/>
+          <a:lstStyle/>
+          <a:p>
+            <a:pPr indent="0" marL="0">
+              <a:buNone/>
+            </a:pPr>
+            <a:r>
+              <a:rPr lang="en-US" sz="1300" b="1" dirty="0">
+                <a:solidFill>
+                  <a:srgbClr val="0068B7"/>
+                </a:solidFill>
+                <a:latin typeface="Aptos" pitchFamily="34" charset="0"/>
+                <a:ea typeface="Aptos" pitchFamily="34" charset="-122"/>
+                <a:cs typeface="Aptos" pitchFamily="34" charset="-120"/>
+              </a:rPr>
+              <a:t>Concept checkpoints</a:t>
+            </a:r>
+            <a:endParaRPr lang="en-US" sz="1300" dirty="0"/>
+          </a:p>
+        </p:txBody>
+      </p:sp>
+      <p:sp>
+        <p:nvSpPr>
+          <p:cNvPr id="15" name="Text 13"/>
+          <p:cNvSpPr/>
+          <p:nvPr/>
+        </p:nvSpPr>
+        <p:spPr>
+          <a:xfrm>
+            <a:off x="7818120" y="3300984"/>
+            <a:ext cx="3090672" cy="877824"/>
+          </a:xfrm>
+          <a:prstGeom prst="rect">
+            <a:avLst/>
+          </a:prstGeom>
+          <a:noFill/>
+          <a:ln/>
+        </p:spPr>
+        <p:txBody>
+          <a:bodyPr wrap="square" lIns="254" tIns="254" rIns="254" bIns="254" rtlCol="0" anchor="t">
+            <a:normAutofit/>
+          </a:bodyPr>
+          <a:lstStyle/>
+          <a:p>
+            <a:r>
+              <a:rPr lang="en-US" sz="1380" dirty="0">
+                <a:solidFill>
+                  <a:srgbClr val="17364A"/>
+                </a:solidFill>
+                <a:latin typeface="Aptos" pitchFamily="34" charset="0"/>
+                <a:ea typeface="Aptos" pitchFamily="34" charset="-122"/>
+                <a:cs typeface="Aptos" pitchFamily="34" charset="-120"/>
+              </a:rPr>
+              <a:t>Model communication brief</a:t>
+            </a:r>
+            <a:endParaRPr lang="en-US" sz="1380" dirty="0"/>
+          </a:p>
+          <a:p>
+            <a:r>
+              <a:rPr lang="en-US" sz="1380" dirty="0">
+                <a:solidFill>
+                  <a:srgbClr val="17364A"/>
+                </a:solidFill>
+                <a:latin typeface="Aptos" pitchFamily="34" charset="0"/>
+                <a:ea typeface="Aptos" pitchFamily="34" charset="-122"/>
+                <a:cs typeface="Aptos" pitchFamily="34" charset="-120"/>
+              </a:rPr>
+              <a:t>Plain-language uncertainty statement</a:t>
+            </a:r>
+            <a:endParaRPr lang="en-US" sz="1380" dirty="0"/>
+          </a:p>
+          <a:p>
+            <a:r>
+              <a:rPr lang="en-US" sz="1380" dirty="0">
+                <a:solidFill>
+                  <a:srgbClr val="17364A"/>
+                </a:solidFill>
+                <a:latin typeface="Aptos" pitchFamily="34" charset="0"/>
+                <a:ea typeface="Aptos" pitchFamily="34" charset="-122"/>
+                <a:cs typeface="Aptos" pitchFamily="34" charset="-120"/>
+              </a:rPr>
+              <a:t>Subgroup caveat if relevant</a:t>
+            </a:r>
+            <a:endParaRPr lang="en-US" sz="1380" dirty="0"/>
+          </a:p>
+        </p:txBody>
       </p:sp>
       <p:sp>
         <p:nvSpPr>
           <p:cNvPr id="16" name="Shape 14"/>
-          <p:cNvSpPr/>
-          <p:nvPr/>
-        </p:nvSpPr>
-        <p:spPr>
-          <a:xfrm>
-            <a:off x="9015984" y="2880360"/>
-            <a:ext cx="256032" cy="1005840"/>
-          </a:xfrm>
-          <a:prstGeom prst="rect">
-            <a:avLst/>
-          </a:prstGeom>
-          <a:solidFill>
-            <a:srgbClr val="D69A2D"/>
-          </a:solidFill>
-          <a:ln w="12700">
-            <a:solidFill>
-              <a:srgbClr val="D69A2D"/>
-            </a:solidFill>
-            <a:prstDash val="solid"/>
-          </a:ln>
-        </p:spPr>
-      </p:sp>
-      <p:sp>
-        <p:nvSpPr>
-          <p:cNvPr id="17" name="Shape 15"/>
-          <p:cNvSpPr/>
-          <p:nvPr/>
-        </p:nvSpPr>
-        <p:spPr>
-          <a:xfrm>
-            <a:off x="9454896" y="3319272"/>
-            <a:ext cx="256032" cy="566928"/>
-          </a:xfrm>
-          <a:prstGeom prst="rect">
-            <a:avLst/>
-          </a:prstGeom>
-          <a:solidFill>
-            <a:srgbClr val="6A4CA3"/>
-          </a:solidFill>
-          <a:ln w="12700">
-            <a:solidFill>
-              <a:srgbClr val="6A4CA3"/>
-            </a:solidFill>
-            <a:prstDash val="solid"/>
-          </a:ln>
-        </p:spPr>
-      </p:sp>
-      <p:sp>
-        <p:nvSpPr>
-          <p:cNvPr id="18" name="Shape 16"/>
-          <p:cNvSpPr/>
-          <p:nvPr/>
-        </p:nvSpPr>
-        <p:spPr>
-          <a:xfrm>
-            <a:off x="8019288" y="3886200"/>
-            <a:ext cx="2706624" cy="0"/>
-          </a:xfrm>
-          <a:prstGeom prst="line">
-            <a:avLst/>
-          </a:prstGeom>
-          <a:noFill/>
-          <a:ln w="15240">
-            <a:solidFill>
-              <a:srgbClr val="003A63"/>
-            </a:solidFill>
-            <a:prstDash val="solid"/>
-          </a:ln>
-        </p:spPr>
-      </p:sp>
-      <p:sp>
-        <p:nvSpPr>
-          <p:cNvPr id="19" name="Text 17"/>
-          <p:cNvSpPr/>
-          <p:nvPr/>
-        </p:nvSpPr>
-        <p:spPr>
-          <a:xfrm>
-            <a:off x="7863840" y="3017520"/>
-            <a:ext cx="3017520" cy="201168"/>
-          </a:xfrm>
-          <a:prstGeom prst="rect">
-            <a:avLst/>
-          </a:prstGeom>
-          <a:noFill/>
-          <a:ln/>
-        </p:spPr>
-        <p:txBody>
-          <a:bodyPr wrap="square" lIns="0" tIns="0" rIns="0" bIns="0" rtlCol="0" anchor="ctr"/>
-          <a:lstStyle/>
-          <a:p>
-            <a:pPr algn="ctr" indent="0" marL="0">
-              <a:buNone/>
-            </a:pPr>
-            <a:r>
-              <a:rPr lang="en-US" sz="1050" b="1" dirty="0">
-                <a:solidFill>
-                  <a:srgbClr val="003A63"/>
-                </a:solidFill>
-                <a:latin typeface="Aptos" pitchFamily="34" charset="0"/>
-                <a:ea typeface="Aptos" pitchFamily="34" charset="-122"/>
-                <a:cs typeface="Aptos" pitchFamily="34" charset="-120"/>
-              </a:rPr>
-              <a:t>Measure and monitor</a:t>
-            </a:r>
-            <a:endParaRPr lang="en-US" sz="1050" dirty="0"/>
-          </a:p>
-        </p:txBody>
-      </p:sp>
-      <p:sp>
-        <p:nvSpPr>
-          <p:cNvPr id="20" name="Shape 18"/>
           <p:cNvSpPr/>
           <p:nvPr/>
         </p:nvSpPr>
@@ -8070,7 +7653,7 @@
       </p:sp>
       <p:sp>
         <p:nvSpPr>
-          <p:cNvPr id="21" name="Text 19"/>
+          <p:cNvPr id="17" name="Text 15"/>
           <p:cNvSpPr/>
           <p:nvPr/>
         </p:nvSpPr>
@@ -8109,7 +7692,7 @@
       </p:sp>
       <p:sp>
         <p:nvSpPr>
-          <p:cNvPr id="22" name="Text 20"/>
+          <p:cNvPr id="18" name="Text 16"/>
           <p:cNvSpPr/>
           <p:nvPr/>
         </p:nvSpPr>
@@ -8589,13 +8172,11 @@
             </a:avLst>
           </a:prstGeom>
           <a:solidFill>
-            <a:srgbClr val="FFFFFF">
-              <a:alpha val="88000"/>
-            </a:srgbClr>
+            <a:srgbClr val="FFFFFF"/>
           </a:solidFill>
           <a:ln w="12700">
             <a:solidFill>
-              <a:srgbClr val="D6E8F2"/>
+              <a:srgbClr val="B9D7E6"/>
             </a:solidFill>
             <a:prstDash val="solid"/>
           </a:ln>
@@ -8603,169 +8184,84 @@
       </p:sp>
       <p:sp>
         <p:nvSpPr>
-          <p:cNvPr id="14" name="Shape 12"/>
-          <p:cNvSpPr/>
-          <p:nvPr/>
-        </p:nvSpPr>
-        <p:spPr>
-          <a:xfrm>
-            <a:off x="8138160" y="3474720"/>
-            <a:ext cx="256032" cy="411480"/>
-          </a:xfrm>
-          <a:prstGeom prst="rect">
-            <a:avLst/>
-          </a:prstGeom>
-          <a:solidFill>
-            <a:srgbClr val="0068B7"/>
-          </a:solidFill>
-          <a:ln w="12700">
-            <a:solidFill>
-              <a:srgbClr val="0068B7"/>
-            </a:solidFill>
-            <a:prstDash val="solid"/>
-          </a:ln>
-        </p:spPr>
-      </p:sp>
-      <p:sp>
-        <p:nvSpPr>
-          <p:cNvPr id="15" name="Shape 13"/>
-          <p:cNvSpPr/>
-          <p:nvPr/>
-        </p:nvSpPr>
-        <p:spPr>
-          <a:xfrm>
-            <a:off x="8577072" y="3172968"/>
-            <a:ext cx="256032" cy="713232"/>
-          </a:xfrm>
-          <a:prstGeom prst="rect">
-            <a:avLst/>
-          </a:prstGeom>
-          <a:solidFill>
-            <a:srgbClr val="2F8A28"/>
-          </a:solidFill>
-          <a:ln w="12700">
-            <a:solidFill>
-              <a:srgbClr val="2F8A28"/>
-            </a:solidFill>
-            <a:prstDash val="solid"/>
-          </a:ln>
-        </p:spPr>
+          <p:cNvPr id="14" name="Text 12"/>
+          <p:cNvSpPr/>
+          <p:nvPr/>
+        </p:nvSpPr>
+        <p:spPr>
+          <a:xfrm>
+            <a:off x="7799832" y="2935224"/>
+            <a:ext cx="3145536" cy="256032"/>
+          </a:xfrm>
+          <a:prstGeom prst="rect">
+            <a:avLst/>
+          </a:prstGeom>
+          <a:noFill/>
+          <a:ln/>
+        </p:spPr>
+        <p:txBody>
+          <a:bodyPr wrap="square" lIns="0" tIns="0" rIns="0" bIns="0" rtlCol="0" anchor="ctr"/>
+          <a:lstStyle/>
+          <a:p>
+            <a:pPr indent="0" marL="0">
+              <a:buNone/>
+            </a:pPr>
+            <a:r>
+              <a:rPr lang="en-US" sz="1300" b="1" dirty="0">
+                <a:solidFill>
+                  <a:srgbClr val="0068B7"/>
+                </a:solidFill>
+                <a:latin typeface="Aptos" pitchFamily="34" charset="0"/>
+                <a:ea typeface="Aptos" pitchFamily="34" charset="-122"/>
+                <a:cs typeface="Aptos" pitchFamily="34" charset="-120"/>
+              </a:rPr>
+              <a:t>Concept checkpoints</a:t>
+            </a:r>
+            <a:endParaRPr lang="en-US" sz="1300" dirty="0"/>
+          </a:p>
+        </p:txBody>
+      </p:sp>
+      <p:sp>
+        <p:nvSpPr>
+          <p:cNvPr id="15" name="Text 13"/>
+          <p:cNvSpPr/>
+          <p:nvPr/>
+        </p:nvSpPr>
+        <p:spPr>
+          <a:xfrm>
+            <a:off x="7818120" y="3300984"/>
+            <a:ext cx="3090672" cy="877824"/>
+          </a:xfrm>
+          <a:prstGeom prst="rect">
+            <a:avLst/>
+          </a:prstGeom>
+          <a:noFill/>
+          <a:ln/>
+        </p:spPr>
+        <p:txBody>
+          <a:bodyPr wrap="square" lIns="254" tIns="254" rIns="254" bIns="254" rtlCol="0" anchor="t">
+            <a:normAutofit/>
+          </a:bodyPr>
+          <a:lstStyle/>
+          <a:p>
+            <a:r>
+              <a:rPr lang="en-US" sz="1380" dirty="0">
+                <a:solidFill>
+                  <a:srgbClr val="17364A"/>
+                </a:solidFill>
+                <a:latin typeface="Aptos" pitchFamily="34" charset="0"/>
+                <a:ea typeface="Aptos" pitchFamily="34" charset="-122"/>
+                <a:cs typeface="Aptos" pitchFamily="34" charset="-120"/>
+              </a:rPr>
+              <a:t>Review sign-off note</a:t>
+            </a:r>
+            <a:endParaRPr lang="en-US" sz="1380" dirty="0"/>
+          </a:p>
+        </p:txBody>
       </p:sp>
       <p:sp>
         <p:nvSpPr>
           <p:cNvPr id="16" name="Shape 14"/>
-          <p:cNvSpPr/>
-          <p:nvPr/>
-        </p:nvSpPr>
-        <p:spPr>
-          <a:xfrm>
-            <a:off x="9015984" y="2880360"/>
-            <a:ext cx="256032" cy="1005840"/>
-          </a:xfrm>
-          <a:prstGeom prst="rect">
-            <a:avLst/>
-          </a:prstGeom>
-          <a:solidFill>
-            <a:srgbClr val="D69A2D"/>
-          </a:solidFill>
-          <a:ln w="12700">
-            <a:solidFill>
-              <a:srgbClr val="D69A2D"/>
-            </a:solidFill>
-            <a:prstDash val="solid"/>
-          </a:ln>
-        </p:spPr>
-      </p:sp>
-      <p:sp>
-        <p:nvSpPr>
-          <p:cNvPr id="17" name="Shape 15"/>
-          <p:cNvSpPr/>
-          <p:nvPr/>
-        </p:nvSpPr>
-        <p:spPr>
-          <a:xfrm>
-            <a:off x="9454896" y="3319272"/>
-            <a:ext cx="256032" cy="566928"/>
-          </a:xfrm>
-          <a:prstGeom prst="rect">
-            <a:avLst/>
-          </a:prstGeom>
-          <a:solidFill>
-            <a:srgbClr val="6A4CA3"/>
-          </a:solidFill>
-          <a:ln w="12700">
-            <a:solidFill>
-              <a:srgbClr val="6A4CA3"/>
-            </a:solidFill>
-            <a:prstDash val="solid"/>
-          </a:ln>
-        </p:spPr>
-      </p:sp>
-      <p:sp>
-        <p:nvSpPr>
-          <p:cNvPr id="18" name="Shape 16"/>
-          <p:cNvSpPr/>
-          <p:nvPr/>
-        </p:nvSpPr>
-        <p:spPr>
-          <a:xfrm>
-            <a:off x="8019288" y="3886200"/>
-            <a:ext cx="2706624" cy="0"/>
-          </a:xfrm>
-          <a:prstGeom prst="line">
-            <a:avLst/>
-          </a:prstGeom>
-          <a:noFill/>
-          <a:ln w="15240">
-            <a:solidFill>
-              <a:srgbClr val="003A63"/>
-            </a:solidFill>
-            <a:prstDash val="solid"/>
-          </a:ln>
-        </p:spPr>
-      </p:sp>
-      <p:sp>
-        <p:nvSpPr>
-          <p:cNvPr id="19" name="Text 17"/>
-          <p:cNvSpPr/>
-          <p:nvPr/>
-        </p:nvSpPr>
-        <p:spPr>
-          <a:xfrm>
-            <a:off x="7863840" y="3017520"/>
-            <a:ext cx="3017520" cy="201168"/>
-          </a:xfrm>
-          <a:prstGeom prst="rect">
-            <a:avLst/>
-          </a:prstGeom>
-          <a:noFill/>
-          <a:ln/>
-        </p:spPr>
-        <p:txBody>
-          <a:bodyPr wrap="square" lIns="0" tIns="0" rIns="0" bIns="0" rtlCol="0" anchor="ctr"/>
-          <a:lstStyle/>
-          <a:p>
-            <a:pPr algn="ctr" indent="0" marL="0">
-              <a:buNone/>
-            </a:pPr>
-            <a:r>
-              <a:rPr lang="en-US" sz="1050" b="1" dirty="0">
-                <a:solidFill>
-                  <a:srgbClr val="003A63"/>
-                </a:solidFill>
-                <a:latin typeface="Aptos" pitchFamily="34" charset="0"/>
-                <a:ea typeface="Aptos" pitchFamily="34" charset="-122"/>
-                <a:cs typeface="Aptos" pitchFamily="34" charset="-120"/>
-              </a:rPr>
-              <a:t>Measure and monitor</a:t>
-            </a:r>
-            <a:endParaRPr lang="en-US" sz="1050" dirty="0"/>
-          </a:p>
-        </p:txBody>
-      </p:sp>
-      <p:sp>
-        <p:nvSpPr>
-          <p:cNvPr id="20" name="Shape 18"/>
           <p:cNvSpPr/>
           <p:nvPr/>
         </p:nvSpPr>
@@ -8792,7 +8288,7 @@
       </p:sp>
       <p:sp>
         <p:nvSpPr>
-          <p:cNvPr id="21" name="Text 19"/>
+          <p:cNvPr id="17" name="Text 15"/>
           <p:cNvSpPr/>
           <p:nvPr/>
         </p:nvSpPr>
@@ -8831,7 +8327,7 @@
       </p:sp>
       <p:sp>
         <p:nvSpPr>
-          <p:cNvPr id="22" name="Text 20"/>
+          <p:cNvPr id="18" name="Text 16"/>
           <p:cNvSpPr/>
           <p:nvPr/>
         </p:nvSpPr>
@@ -9339,13 +8835,11 @@
             </a:avLst>
           </a:prstGeom>
           <a:solidFill>
-            <a:srgbClr val="FFFFFF">
-              <a:alpha val="88000"/>
-            </a:srgbClr>
+            <a:srgbClr val="FFFFFF"/>
           </a:solidFill>
           <a:ln w="12700">
             <a:solidFill>
-              <a:srgbClr val="D6E8F2"/>
+              <a:srgbClr val="B9D7E6"/>
             </a:solidFill>
             <a:prstDash val="solid"/>
           </a:ln>
@@ -9353,169 +8847,112 @@
       </p:sp>
       <p:sp>
         <p:nvSpPr>
-          <p:cNvPr id="14" name="Shape 12"/>
-          <p:cNvSpPr/>
-          <p:nvPr/>
-        </p:nvSpPr>
-        <p:spPr>
-          <a:xfrm>
-            <a:off x="8138160" y="3474720"/>
-            <a:ext cx="256032" cy="411480"/>
-          </a:xfrm>
-          <a:prstGeom prst="rect">
-            <a:avLst/>
-          </a:prstGeom>
-          <a:solidFill>
-            <a:srgbClr val="0068B7"/>
-          </a:solidFill>
-          <a:ln w="12700">
-            <a:solidFill>
-              <a:srgbClr val="0068B7"/>
-            </a:solidFill>
-            <a:prstDash val="solid"/>
-          </a:ln>
-        </p:spPr>
-      </p:sp>
-      <p:sp>
-        <p:nvSpPr>
-          <p:cNvPr id="15" name="Shape 13"/>
-          <p:cNvSpPr/>
-          <p:nvPr/>
-        </p:nvSpPr>
-        <p:spPr>
-          <a:xfrm>
-            <a:off x="8577072" y="3172968"/>
-            <a:ext cx="256032" cy="713232"/>
-          </a:xfrm>
-          <a:prstGeom prst="rect">
-            <a:avLst/>
-          </a:prstGeom>
-          <a:solidFill>
-            <a:srgbClr val="2F8A28"/>
-          </a:solidFill>
-          <a:ln w="12700">
-            <a:solidFill>
-              <a:srgbClr val="2F8A28"/>
-            </a:solidFill>
-            <a:prstDash val="solid"/>
-          </a:ln>
-        </p:spPr>
+          <p:cNvPr id="14" name="Text 12"/>
+          <p:cNvSpPr/>
+          <p:nvPr/>
+        </p:nvSpPr>
+        <p:spPr>
+          <a:xfrm>
+            <a:off x="7799832" y="2935224"/>
+            <a:ext cx="3145536" cy="256032"/>
+          </a:xfrm>
+          <a:prstGeom prst="rect">
+            <a:avLst/>
+          </a:prstGeom>
+          <a:noFill/>
+          <a:ln/>
+        </p:spPr>
+        <p:txBody>
+          <a:bodyPr wrap="square" lIns="0" tIns="0" rIns="0" bIns="0" rtlCol="0" anchor="ctr"/>
+          <a:lstStyle/>
+          <a:p>
+            <a:pPr indent="0" marL="0">
+              <a:buNone/>
+            </a:pPr>
+            <a:r>
+              <a:rPr lang="en-US" sz="1300" b="1" dirty="0">
+                <a:solidFill>
+                  <a:srgbClr val="0068B7"/>
+                </a:solidFill>
+                <a:latin typeface="Aptos" pitchFamily="34" charset="0"/>
+                <a:ea typeface="Aptos" pitchFamily="34" charset="-122"/>
+                <a:cs typeface="Aptos" pitchFamily="34" charset="-120"/>
+              </a:rPr>
+              <a:t>Concept checkpoints</a:t>
+            </a:r>
+            <a:endParaRPr lang="en-US" sz="1300" dirty="0"/>
+          </a:p>
+        </p:txBody>
+      </p:sp>
+      <p:sp>
+        <p:nvSpPr>
+          <p:cNvPr id="15" name="Text 13"/>
+          <p:cNvSpPr/>
+          <p:nvPr/>
+        </p:nvSpPr>
+        <p:spPr>
+          <a:xfrm>
+            <a:off x="7818120" y="3300984"/>
+            <a:ext cx="3090672" cy="877824"/>
+          </a:xfrm>
+          <a:prstGeom prst="rect">
+            <a:avLst/>
+          </a:prstGeom>
+          <a:noFill/>
+          <a:ln/>
+        </p:spPr>
+        <p:txBody>
+          <a:bodyPr wrap="square" lIns="254" tIns="254" rIns="254" bIns="254" rtlCol="0" anchor="t">
+            <a:normAutofit/>
+          </a:bodyPr>
+          <a:lstStyle/>
+          <a:p>
+            <a:r>
+              <a:rPr lang="en-US" sz="1380" dirty="0">
+                <a:solidFill>
+                  <a:srgbClr val="17364A"/>
+                </a:solidFill>
+                <a:latin typeface="Aptos" pitchFamily="34" charset="0"/>
+                <a:ea typeface="Aptos" pitchFamily="34" charset="-122"/>
+                <a:cs typeface="Aptos" pitchFamily="34" charset="-120"/>
+              </a:rPr>
+              <a:t>Model communication brief</a:t>
+            </a:r>
+            <a:endParaRPr lang="en-US" sz="1380" dirty="0"/>
+          </a:p>
+          <a:p>
+            <a:r>
+              <a:rPr lang="en-US" sz="1380" dirty="0">
+                <a:solidFill>
+                  <a:srgbClr val="17364A"/>
+                </a:solidFill>
+                <a:latin typeface="Aptos" pitchFamily="34" charset="0"/>
+                <a:ea typeface="Aptos" pitchFamily="34" charset="-122"/>
+                <a:cs typeface="Aptos" pitchFamily="34" charset="-120"/>
+              </a:rPr>
+              <a:t>Plain-language uncertainty statement</a:t>
+            </a:r>
+            <a:endParaRPr lang="en-US" sz="1380" dirty="0"/>
+          </a:p>
+          <a:p>
+            <a:r>
+              <a:rPr lang="en-US" sz="1380" dirty="0">
+                <a:solidFill>
+                  <a:srgbClr val="17364A"/>
+                </a:solidFill>
+                <a:latin typeface="Aptos" pitchFamily="34" charset="0"/>
+                <a:ea typeface="Aptos" pitchFamily="34" charset="-122"/>
+                <a:cs typeface="Aptos" pitchFamily="34" charset="-120"/>
+              </a:rPr>
+              <a:t>Subgroup caveat if relevant</a:t>
+            </a:r>
+            <a:endParaRPr lang="en-US" sz="1380" dirty="0"/>
+          </a:p>
+        </p:txBody>
       </p:sp>
       <p:sp>
         <p:nvSpPr>
           <p:cNvPr id="16" name="Shape 14"/>
-          <p:cNvSpPr/>
-          <p:nvPr/>
-        </p:nvSpPr>
-        <p:spPr>
-          <a:xfrm>
-            <a:off x="9015984" y="2880360"/>
-            <a:ext cx="256032" cy="1005840"/>
-          </a:xfrm>
-          <a:prstGeom prst="rect">
-            <a:avLst/>
-          </a:prstGeom>
-          <a:solidFill>
-            <a:srgbClr val="D69A2D"/>
-          </a:solidFill>
-          <a:ln w="12700">
-            <a:solidFill>
-              <a:srgbClr val="D69A2D"/>
-            </a:solidFill>
-            <a:prstDash val="solid"/>
-          </a:ln>
-        </p:spPr>
-      </p:sp>
-      <p:sp>
-        <p:nvSpPr>
-          <p:cNvPr id="17" name="Shape 15"/>
-          <p:cNvSpPr/>
-          <p:nvPr/>
-        </p:nvSpPr>
-        <p:spPr>
-          <a:xfrm>
-            <a:off x="9454896" y="3319272"/>
-            <a:ext cx="256032" cy="566928"/>
-          </a:xfrm>
-          <a:prstGeom prst="rect">
-            <a:avLst/>
-          </a:prstGeom>
-          <a:solidFill>
-            <a:srgbClr val="6A4CA3"/>
-          </a:solidFill>
-          <a:ln w="12700">
-            <a:solidFill>
-              <a:srgbClr val="6A4CA3"/>
-            </a:solidFill>
-            <a:prstDash val="solid"/>
-          </a:ln>
-        </p:spPr>
-      </p:sp>
-      <p:sp>
-        <p:nvSpPr>
-          <p:cNvPr id="18" name="Shape 16"/>
-          <p:cNvSpPr/>
-          <p:nvPr/>
-        </p:nvSpPr>
-        <p:spPr>
-          <a:xfrm>
-            <a:off x="8019288" y="3886200"/>
-            <a:ext cx="2706624" cy="0"/>
-          </a:xfrm>
-          <a:prstGeom prst="line">
-            <a:avLst/>
-          </a:prstGeom>
-          <a:noFill/>
-          <a:ln w="15240">
-            <a:solidFill>
-              <a:srgbClr val="003A63"/>
-            </a:solidFill>
-            <a:prstDash val="solid"/>
-          </a:ln>
-        </p:spPr>
-      </p:sp>
-      <p:sp>
-        <p:nvSpPr>
-          <p:cNvPr id="19" name="Text 17"/>
-          <p:cNvSpPr/>
-          <p:nvPr/>
-        </p:nvSpPr>
-        <p:spPr>
-          <a:xfrm>
-            <a:off x="7863840" y="3017520"/>
-            <a:ext cx="3017520" cy="201168"/>
-          </a:xfrm>
-          <a:prstGeom prst="rect">
-            <a:avLst/>
-          </a:prstGeom>
-          <a:noFill/>
-          <a:ln/>
-        </p:spPr>
-        <p:txBody>
-          <a:bodyPr wrap="square" lIns="0" tIns="0" rIns="0" bIns="0" rtlCol="0" anchor="ctr"/>
-          <a:lstStyle/>
-          <a:p>
-            <a:pPr algn="ctr" indent="0" marL="0">
-              <a:buNone/>
-            </a:pPr>
-            <a:r>
-              <a:rPr lang="en-US" sz="1050" b="1" dirty="0">
-                <a:solidFill>
-                  <a:srgbClr val="003A63"/>
-                </a:solidFill>
-                <a:latin typeface="Aptos" pitchFamily="34" charset="0"/>
-                <a:ea typeface="Aptos" pitchFamily="34" charset="-122"/>
-                <a:cs typeface="Aptos" pitchFamily="34" charset="-120"/>
-              </a:rPr>
-              <a:t>Measure and monitor</a:t>
-            </a:r>
-            <a:endParaRPr lang="en-US" sz="1050" dirty="0"/>
-          </a:p>
-        </p:txBody>
-      </p:sp>
-      <p:sp>
-        <p:nvSpPr>
-          <p:cNvPr id="20" name="Shape 18"/>
           <p:cNvSpPr/>
           <p:nvPr/>
         </p:nvSpPr>
@@ -9542,7 +8979,7 @@
       </p:sp>
       <p:sp>
         <p:nvSpPr>
-          <p:cNvPr id="21" name="Text 19"/>
+          <p:cNvPr id="17" name="Text 15"/>
           <p:cNvSpPr/>
           <p:nvPr/>
         </p:nvSpPr>
@@ -9581,7 +9018,7 @@
       </p:sp>
       <p:sp>
         <p:nvSpPr>
-          <p:cNvPr id="22" name="Text 20"/>
+          <p:cNvPr id="18" name="Text 16"/>
           <p:cNvSpPr/>
           <p:nvPr/>
         </p:nvSpPr>
@@ -10089,13 +9526,11 @@
             </a:avLst>
           </a:prstGeom>
           <a:solidFill>
-            <a:srgbClr val="FFFFFF">
-              <a:alpha val="88000"/>
-            </a:srgbClr>
+            <a:srgbClr val="FFFFFF"/>
           </a:solidFill>
           <a:ln w="12700">
             <a:solidFill>
-              <a:srgbClr val="D6E8F2"/>
+              <a:srgbClr val="B9D7E6"/>
             </a:solidFill>
             <a:prstDash val="solid"/>
           </a:ln>
@@ -10103,169 +9538,112 @@
       </p:sp>
       <p:sp>
         <p:nvSpPr>
-          <p:cNvPr id="14" name="Shape 12"/>
-          <p:cNvSpPr/>
-          <p:nvPr/>
-        </p:nvSpPr>
-        <p:spPr>
-          <a:xfrm>
-            <a:off x="8138160" y="3474720"/>
-            <a:ext cx="256032" cy="411480"/>
-          </a:xfrm>
-          <a:prstGeom prst="rect">
-            <a:avLst/>
-          </a:prstGeom>
-          <a:solidFill>
-            <a:srgbClr val="0068B7"/>
-          </a:solidFill>
-          <a:ln w="12700">
-            <a:solidFill>
-              <a:srgbClr val="0068B7"/>
-            </a:solidFill>
-            <a:prstDash val="solid"/>
-          </a:ln>
-        </p:spPr>
-      </p:sp>
-      <p:sp>
-        <p:nvSpPr>
-          <p:cNvPr id="15" name="Shape 13"/>
-          <p:cNvSpPr/>
-          <p:nvPr/>
-        </p:nvSpPr>
-        <p:spPr>
-          <a:xfrm>
-            <a:off x="8577072" y="3172968"/>
-            <a:ext cx="256032" cy="713232"/>
-          </a:xfrm>
-          <a:prstGeom prst="rect">
-            <a:avLst/>
-          </a:prstGeom>
-          <a:solidFill>
-            <a:srgbClr val="2F8A28"/>
-          </a:solidFill>
-          <a:ln w="12700">
-            <a:solidFill>
-              <a:srgbClr val="2F8A28"/>
-            </a:solidFill>
-            <a:prstDash val="solid"/>
-          </a:ln>
-        </p:spPr>
+          <p:cNvPr id="14" name="Text 12"/>
+          <p:cNvSpPr/>
+          <p:nvPr/>
+        </p:nvSpPr>
+        <p:spPr>
+          <a:xfrm>
+            <a:off x="7799832" y="2935224"/>
+            <a:ext cx="3145536" cy="256032"/>
+          </a:xfrm>
+          <a:prstGeom prst="rect">
+            <a:avLst/>
+          </a:prstGeom>
+          <a:noFill/>
+          <a:ln/>
+        </p:spPr>
+        <p:txBody>
+          <a:bodyPr wrap="square" lIns="0" tIns="0" rIns="0" bIns="0" rtlCol="0" anchor="ctr"/>
+          <a:lstStyle/>
+          <a:p>
+            <a:pPr indent="0" marL="0">
+              <a:buNone/>
+            </a:pPr>
+            <a:r>
+              <a:rPr lang="en-US" sz="1300" b="1" dirty="0">
+                <a:solidFill>
+                  <a:srgbClr val="0068B7"/>
+                </a:solidFill>
+                <a:latin typeface="Aptos" pitchFamily="34" charset="0"/>
+                <a:ea typeface="Aptos" pitchFamily="34" charset="-122"/>
+                <a:cs typeface="Aptos" pitchFamily="34" charset="-120"/>
+              </a:rPr>
+              <a:t>Concept checkpoints</a:t>
+            </a:r>
+            <a:endParaRPr lang="en-US" sz="1300" dirty="0"/>
+          </a:p>
+        </p:txBody>
+      </p:sp>
+      <p:sp>
+        <p:nvSpPr>
+          <p:cNvPr id="15" name="Text 13"/>
+          <p:cNvSpPr/>
+          <p:nvPr/>
+        </p:nvSpPr>
+        <p:spPr>
+          <a:xfrm>
+            <a:off x="7818120" y="3300984"/>
+            <a:ext cx="3090672" cy="877824"/>
+          </a:xfrm>
+          <a:prstGeom prst="rect">
+            <a:avLst/>
+          </a:prstGeom>
+          <a:noFill/>
+          <a:ln/>
+        </p:spPr>
+        <p:txBody>
+          <a:bodyPr wrap="square" lIns="254" tIns="254" rIns="254" bIns="254" rtlCol="0" anchor="t">
+            <a:normAutofit/>
+          </a:bodyPr>
+          <a:lstStyle/>
+          <a:p>
+            <a:r>
+              <a:rPr lang="en-US" sz="1380" dirty="0">
+                <a:solidFill>
+                  <a:srgbClr val="17364A"/>
+                </a:solidFill>
+                <a:latin typeface="Aptos" pitchFamily="34" charset="0"/>
+                <a:ea typeface="Aptos" pitchFamily="34" charset="-122"/>
+                <a:cs typeface="Aptos" pitchFamily="34" charset="-120"/>
+              </a:rPr>
+              <a:t>1.</a:t>
+            </a:r>
+            <a:endParaRPr lang="en-US" sz="1380" dirty="0"/>
+          </a:p>
+          <a:p>
+            <a:r>
+              <a:rPr lang="en-US" sz="1380" dirty="0">
+                <a:solidFill>
+                  <a:srgbClr val="17364A"/>
+                </a:solidFill>
+                <a:latin typeface="Aptos" pitchFamily="34" charset="0"/>
+                <a:ea typeface="Aptos" pitchFamily="34" charset="-122"/>
+                <a:cs typeface="Aptos" pitchFamily="34" charset="-120"/>
+              </a:rPr>
+              <a:t>What is the best reason to communicate uncertainty with model results?</a:t>
+            </a:r>
+            <a:endParaRPr lang="en-US" sz="1380" dirty="0"/>
+          </a:p>
+          <a:p>
+            <a:r>
+              <a:rPr lang="en-US" sz="1380" dirty="0">
+                <a:solidFill>
+                  <a:srgbClr val="17364A"/>
+                </a:solidFill>
+                <a:latin typeface="Aptos" pitchFamily="34" charset="0"/>
+                <a:ea typeface="Aptos" pitchFamily="34" charset="-122"/>
+                <a:cs typeface="Aptos" pitchFamily="34" charset="-120"/>
+              </a:rPr>
+              <a:t>2.</a:t>
+            </a:r>
+            <a:endParaRPr lang="en-US" sz="1380" dirty="0"/>
+          </a:p>
+        </p:txBody>
       </p:sp>
       <p:sp>
         <p:nvSpPr>
           <p:cNvPr id="16" name="Shape 14"/>
-          <p:cNvSpPr/>
-          <p:nvPr/>
-        </p:nvSpPr>
-        <p:spPr>
-          <a:xfrm>
-            <a:off x="9015984" y="2880360"/>
-            <a:ext cx="256032" cy="1005840"/>
-          </a:xfrm>
-          <a:prstGeom prst="rect">
-            <a:avLst/>
-          </a:prstGeom>
-          <a:solidFill>
-            <a:srgbClr val="D69A2D"/>
-          </a:solidFill>
-          <a:ln w="12700">
-            <a:solidFill>
-              <a:srgbClr val="D69A2D"/>
-            </a:solidFill>
-            <a:prstDash val="solid"/>
-          </a:ln>
-        </p:spPr>
-      </p:sp>
-      <p:sp>
-        <p:nvSpPr>
-          <p:cNvPr id="17" name="Shape 15"/>
-          <p:cNvSpPr/>
-          <p:nvPr/>
-        </p:nvSpPr>
-        <p:spPr>
-          <a:xfrm>
-            <a:off x="9454896" y="3319272"/>
-            <a:ext cx="256032" cy="566928"/>
-          </a:xfrm>
-          <a:prstGeom prst="rect">
-            <a:avLst/>
-          </a:prstGeom>
-          <a:solidFill>
-            <a:srgbClr val="6A4CA3"/>
-          </a:solidFill>
-          <a:ln w="12700">
-            <a:solidFill>
-              <a:srgbClr val="6A4CA3"/>
-            </a:solidFill>
-            <a:prstDash val="solid"/>
-          </a:ln>
-        </p:spPr>
-      </p:sp>
-      <p:sp>
-        <p:nvSpPr>
-          <p:cNvPr id="18" name="Shape 16"/>
-          <p:cNvSpPr/>
-          <p:nvPr/>
-        </p:nvSpPr>
-        <p:spPr>
-          <a:xfrm>
-            <a:off x="8019288" y="3886200"/>
-            <a:ext cx="2706624" cy="0"/>
-          </a:xfrm>
-          <a:prstGeom prst="line">
-            <a:avLst/>
-          </a:prstGeom>
-          <a:noFill/>
-          <a:ln w="15240">
-            <a:solidFill>
-              <a:srgbClr val="003A63"/>
-            </a:solidFill>
-            <a:prstDash val="solid"/>
-          </a:ln>
-        </p:spPr>
-      </p:sp>
-      <p:sp>
-        <p:nvSpPr>
-          <p:cNvPr id="19" name="Text 17"/>
-          <p:cNvSpPr/>
-          <p:nvPr/>
-        </p:nvSpPr>
-        <p:spPr>
-          <a:xfrm>
-            <a:off x="7863840" y="3017520"/>
-            <a:ext cx="3017520" cy="201168"/>
-          </a:xfrm>
-          <a:prstGeom prst="rect">
-            <a:avLst/>
-          </a:prstGeom>
-          <a:noFill/>
-          <a:ln/>
-        </p:spPr>
-        <p:txBody>
-          <a:bodyPr wrap="square" lIns="0" tIns="0" rIns="0" bIns="0" rtlCol="0" anchor="ctr"/>
-          <a:lstStyle/>
-          <a:p>
-            <a:pPr algn="ctr" indent="0" marL="0">
-              <a:buNone/>
-            </a:pPr>
-            <a:r>
-              <a:rPr lang="en-US" sz="1050" b="1" dirty="0">
-                <a:solidFill>
-                  <a:srgbClr val="003A63"/>
-                </a:solidFill>
-                <a:latin typeface="Aptos" pitchFamily="34" charset="0"/>
-                <a:ea typeface="Aptos" pitchFamily="34" charset="-122"/>
-                <a:cs typeface="Aptos" pitchFamily="34" charset="-120"/>
-              </a:rPr>
-              <a:t>Measure and monitor</a:t>
-            </a:r>
-            <a:endParaRPr lang="en-US" sz="1050" dirty="0"/>
-          </a:p>
-        </p:txBody>
-      </p:sp>
-      <p:sp>
-        <p:nvSpPr>
-          <p:cNvPr id="20" name="Shape 18"/>
           <p:cNvSpPr/>
           <p:nvPr/>
         </p:nvSpPr>
@@ -10292,7 +9670,7 @@
       </p:sp>
       <p:sp>
         <p:nvSpPr>
-          <p:cNvPr id="21" name="Text 19"/>
+          <p:cNvPr id="17" name="Text 15"/>
           <p:cNvSpPr/>
           <p:nvPr/>
         </p:nvSpPr>
@@ -10331,7 +9709,7 @@
       </p:sp>
       <p:sp>
         <p:nvSpPr>
-          <p:cNvPr id="22" name="Text 20"/>
+          <p:cNvPr id="18" name="Text 16"/>
           <p:cNvSpPr/>
           <p:nvPr/>
         </p:nvSpPr>
@@ -10864,20 +10242,20 @@
         </p:nvSpPr>
         <p:spPr>
           <a:xfrm>
-            <a:off x="7635240" y="3730752"/>
-            <a:ext cx="1033272" cy="749808"/>
+            <a:off x="7909560" y="3675888"/>
+            <a:ext cx="3154680" cy="1691640"/>
           </a:xfrm>
           <a:prstGeom prst="roundRect">
             <a:avLst>
-              <a:gd name="adj" fmla="val 14634"/>
+              <a:gd name="adj" fmla="val 6486"/>
             </a:avLst>
           </a:prstGeom>
           <a:solidFill>
-            <a:srgbClr val="0068B7"/>
+            <a:srgbClr val="FFFFFF"/>
           </a:solidFill>
           <a:ln w="12700">
             <a:solidFill>
-              <a:srgbClr val="0068B7"/>
+              <a:srgbClr val="B9D7E6"/>
             </a:solidFill>
             <a:prstDash val="solid"/>
           </a:ln>
@@ -10891,172 +10269,100 @@
         </p:nvSpPr>
         <p:spPr>
           <a:xfrm>
-            <a:off x="7708392" y="3922776"/>
-            <a:ext cx="886968" cy="310896"/>
-          </a:xfrm>
-          <a:prstGeom prst="rect">
-            <a:avLst/>
-          </a:prstGeom>
-          <a:noFill/>
-          <a:ln/>
-        </p:spPr>
-        <p:txBody>
-          <a:bodyPr wrap="square" lIns="0" tIns="0" rIns="0" bIns="0" rtlCol="0" anchor="ctr">
+            <a:off x="8074152" y="3822192"/>
+            <a:ext cx="2825496" cy="256032"/>
+          </a:xfrm>
+          <a:prstGeom prst="rect">
+            <a:avLst/>
+          </a:prstGeom>
+          <a:noFill/>
+          <a:ln/>
+        </p:spPr>
+        <p:txBody>
+          <a:bodyPr wrap="square" lIns="0" tIns="0" rIns="0" bIns="0" rtlCol="0" anchor="ctr"/>
+          <a:lstStyle/>
+          <a:p>
+            <a:pPr indent="0" marL="0">
+              <a:buNone/>
+            </a:pPr>
+            <a:r>
+              <a:rPr lang="en-US" sz="1300" b="1" dirty="0">
+                <a:solidFill>
+                  <a:srgbClr val="0068B7"/>
+                </a:solidFill>
+                <a:latin typeface="Aptos" pitchFamily="34" charset="0"/>
+                <a:ea typeface="Aptos" pitchFamily="34" charset="-122"/>
+                <a:cs typeface="Aptos" pitchFamily="34" charset="-120"/>
+              </a:rPr>
+              <a:t>Learning sequence</a:t>
+            </a:r>
+            <a:endParaRPr lang="en-US" sz="1300" dirty="0"/>
+          </a:p>
+        </p:txBody>
+      </p:sp>
+      <p:sp>
+        <p:nvSpPr>
+          <p:cNvPr id="15" name="Text 13"/>
+          <p:cNvSpPr/>
+          <p:nvPr/>
+        </p:nvSpPr>
+        <p:spPr>
+          <a:xfrm>
+            <a:off x="8092440" y="4187952"/>
+            <a:ext cx="2770632" cy="1033272"/>
+          </a:xfrm>
+          <a:prstGeom prst="rect">
+            <a:avLst/>
+          </a:prstGeom>
+          <a:noFill/>
+          <a:ln/>
+        </p:spPr>
+        <p:txBody>
+          <a:bodyPr wrap="square" lIns="254" tIns="254" rIns="254" bIns="254" rtlCol="0" anchor="t">
             <a:normAutofit/>
           </a:bodyPr>
           <a:lstStyle/>
           <a:p>
-            <a:pPr algn="ctr" indent="0" marL="0">
-              <a:buNone/>
-            </a:pPr>
-            <a:r>
-              <a:rPr lang="en-US" sz="1500" b="1" dirty="0">
-                <a:solidFill>
-                  <a:srgbClr val="FFFFFF"/>
-                </a:solidFill>
-                <a:latin typeface="Aptos" pitchFamily="34" charset="0"/>
-                <a:ea typeface="Aptos" pitchFamily="34" charset="-122"/>
-                <a:cs typeface="Aptos" pitchFamily="34" charset="-120"/>
-              </a:rPr>
-              <a:t>Learn</a:t>
-            </a:r>
-            <a:endParaRPr lang="en-US" sz="1500" dirty="0"/>
-          </a:p>
-        </p:txBody>
-      </p:sp>
-      <p:sp>
-        <p:nvSpPr>
-          <p:cNvPr id="15" name="Shape 13"/>
-          <p:cNvSpPr/>
-          <p:nvPr/>
-        </p:nvSpPr>
-        <p:spPr>
-          <a:xfrm>
-            <a:off x="8924544" y="3730752"/>
-            <a:ext cx="1033272" cy="749808"/>
-          </a:xfrm>
-          <a:prstGeom prst="roundRect">
-            <a:avLst>
-              <a:gd name="adj" fmla="val 14634"/>
-            </a:avLst>
-          </a:prstGeom>
-          <a:solidFill>
-            <a:srgbClr val="2F8A28"/>
-          </a:solidFill>
-          <a:ln w="12700">
-            <a:solidFill>
-              <a:srgbClr val="2F8A28"/>
-            </a:solidFill>
-            <a:prstDash val="solid"/>
-          </a:ln>
-        </p:spPr>
-      </p:sp>
-      <p:sp>
-        <p:nvSpPr>
-          <p:cNvPr id="16" name="Text 14"/>
-          <p:cNvSpPr/>
-          <p:nvPr/>
-        </p:nvSpPr>
-        <p:spPr>
-          <a:xfrm>
-            <a:off x="8997696" y="3922776"/>
-            <a:ext cx="886968" cy="310896"/>
-          </a:xfrm>
-          <a:prstGeom prst="rect">
-            <a:avLst/>
-          </a:prstGeom>
-          <a:noFill/>
-          <a:ln/>
-        </p:spPr>
-        <p:txBody>
-          <a:bodyPr wrap="square" lIns="0" tIns="0" rIns="0" bIns="0" rtlCol="0" anchor="ctr">
-            <a:normAutofit/>
-          </a:bodyPr>
-          <a:lstStyle/>
-          <a:p>
-            <a:pPr algn="ctr" indent="0" marL="0">
-              <a:buNone/>
-            </a:pPr>
-            <a:r>
-              <a:rPr lang="en-US" sz="1500" b="1" dirty="0">
-                <a:solidFill>
-                  <a:srgbClr val="FFFFFF"/>
-                </a:solidFill>
-                <a:latin typeface="Aptos" pitchFamily="34" charset="0"/>
-                <a:ea typeface="Aptos" pitchFamily="34" charset="-122"/>
-                <a:cs typeface="Aptos" pitchFamily="34" charset="-120"/>
-              </a:rPr>
-              <a:t>Apply</a:t>
-            </a:r>
-            <a:endParaRPr lang="en-US" sz="1500" dirty="0"/>
-          </a:p>
-        </p:txBody>
-      </p:sp>
-      <p:sp>
-        <p:nvSpPr>
-          <p:cNvPr id="17" name="Shape 15"/>
-          <p:cNvSpPr/>
-          <p:nvPr/>
-        </p:nvSpPr>
-        <p:spPr>
-          <a:xfrm>
-            <a:off x="10213848" y="3730752"/>
-            <a:ext cx="1033272" cy="749808"/>
-          </a:xfrm>
-          <a:prstGeom prst="roundRect">
-            <a:avLst>
-              <a:gd name="adj" fmla="val 14634"/>
-            </a:avLst>
-          </a:prstGeom>
-          <a:solidFill>
-            <a:srgbClr val="6A4CA3"/>
-          </a:solidFill>
-          <a:ln w="12700">
-            <a:solidFill>
-              <a:srgbClr val="6A4CA3"/>
-            </a:solidFill>
-            <a:prstDash val="solid"/>
-          </a:ln>
-        </p:spPr>
-      </p:sp>
-      <p:sp>
-        <p:nvSpPr>
-          <p:cNvPr id="18" name="Text 16"/>
-          <p:cNvSpPr/>
-          <p:nvPr/>
-        </p:nvSpPr>
-        <p:spPr>
-          <a:xfrm>
-            <a:off x="10287000" y="3922776"/>
-            <a:ext cx="886968" cy="310896"/>
-          </a:xfrm>
-          <a:prstGeom prst="rect">
-            <a:avLst/>
-          </a:prstGeom>
-          <a:noFill/>
-          <a:ln/>
-        </p:spPr>
-        <p:txBody>
-          <a:bodyPr wrap="square" lIns="0" tIns="0" rIns="0" bIns="0" rtlCol="0" anchor="ctr">
-            <a:normAutofit/>
-          </a:bodyPr>
-          <a:lstStyle/>
-          <a:p>
-            <a:pPr algn="ctr" indent="0" marL="0">
-              <a:buNone/>
-            </a:pPr>
-            <a:r>
-              <a:rPr lang="en-US" sz="1500" b="1" dirty="0">
-                <a:solidFill>
-                  <a:srgbClr val="FFFFFF"/>
-                </a:solidFill>
-                <a:latin typeface="Aptos" pitchFamily="34" charset="0"/>
-                <a:ea typeface="Aptos" pitchFamily="34" charset="-122"/>
-                <a:cs typeface="Aptos" pitchFamily="34" charset="-120"/>
-              </a:rPr>
-              <a:t>Document</a:t>
-            </a:r>
-            <a:endParaRPr lang="en-US" sz="1500" dirty="0"/>
+            <a:r>
+              <a:rPr lang="en-US" sz="1380" dirty="0">
+                <a:solidFill>
+                  <a:srgbClr val="17364A"/>
+                </a:solidFill>
+                <a:latin typeface="Aptos" pitchFamily="34" charset="0"/>
+                <a:ea typeface="Aptos" pitchFamily="34" charset="-122"/>
+                <a:cs typeface="Aptos" pitchFamily="34" charset="-120"/>
+              </a:rPr>
+              <a:t>Read the module for shared vocabulary and context.</a:t>
+            </a:r>
+            <a:endParaRPr lang="en-US" sz="1380" dirty="0"/>
+          </a:p>
+          <a:p>
+            <a:r>
+              <a:rPr lang="en-US" sz="1380" dirty="0">
+                <a:solidFill>
+                  <a:srgbClr val="17364A"/>
+                </a:solidFill>
+                <a:latin typeface="Aptos" pitchFamily="34" charset="0"/>
+                <a:ea typeface="Aptos" pitchFamily="34" charset="-122"/>
+                <a:cs typeface="Aptos" pitchFamily="34" charset="-120"/>
+              </a:rPr>
+              <a:t>Complete the practical exercise to apply the concept.</a:t>
+            </a:r>
+            <a:endParaRPr lang="en-US" sz="1380" dirty="0"/>
+          </a:p>
+          <a:p>
+            <a:r>
+              <a:rPr lang="en-US" sz="1380" dirty="0">
+                <a:solidFill>
+                  <a:srgbClr val="17364A"/>
+                </a:solidFill>
+                <a:latin typeface="Aptos" pitchFamily="34" charset="0"/>
+                <a:ea typeface="Aptos" pitchFamily="34" charset="-122"/>
+                <a:cs typeface="Aptos" pitchFamily="34" charset="-120"/>
+              </a:rPr>
+              <a:t>Use the notes and references for deeper review.</a:t>
+            </a:r>
+            <a:endParaRPr lang="en-US" sz="1380" dirty="0"/>
           </a:p>
         </p:txBody>
       </p:sp>
@@ -11529,13 +10835,11 @@
             </a:avLst>
           </a:prstGeom>
           <a:solidFill>
-            <a:srgbClr val="FFFFFF">
-              <a:alpha val="88000"/>
-            </a:srgbClr>
+            <a:srgbClr val="FFFFFF"/>
           </a:solidFill>
           <a:ln w="12700">
             <a:solidFill>
-              <a:srgbClr val="D6E8F2"/>
+              <a:srgbClr val="B9D7E6"/>
             </a:solidFill>
             <a:prstDash val="solid"/>
           </a:ln>
@@ -11543,169 +10847,98 @@
       </p:sp>
       <p:sp>
         <p:nvSpPr>
-          <p:cNvPr id="14" name="Shape 12"/>
-          <p:cNvSpPr/>
-          <p:nvPr/>
-        </p:nvSpPr>
-        <p:spPr>
-          <a:xfrm>
-            <a:off x="8138160" y="3474720"/>
-            <a:ext cx="256032" cy="411480"/>
-          </a:xfrm>
-          <a:prstGeom prst="rect">
-            <a:avLst/>
-          </a:prstGeom>
-          <a:solidFill>
-            <a:srgbClr val="0068B7"/>
-          </a:solidFill>
-          <a:ln w="12700">
-            <a:solidFill>
-              <a:srgbClr val="0068B7"/>
-            </a:solidFill>
-            <a:prstDash val="solid"/>
-          </a:ln>
-        </p:spPr>
-      </p:sp>
-      <p:sp>
-        <p:nvSpPr>
-          <p:cNvPr id="15" name="Shape 13"/>
-          <p:cNvSpPr/>
-          <p:nvPr/>
-        </p:nvSpPr>
-        <p:spPr>
-          <a:xfrm>
-            <a:off x="8577072" y="3172968"/>
-            <a:ext cx="256032" cy="713232"/>
-          </a:xfrm>
-          <a:prstGeom prst="rect">
-            <a:avLst/>
-          </a:prstGeom>
-          <a:solidFill>
-            <a:srgbClr val="2F8A28"/>
-          </a:solidFill>
-          <a:ln w="12700">
-            <a:solidFill>
-              <a:srgbClr val="2F8A28"/>
-            </a:solidFill>
-            <a:prstDash val="solid"/>
-          </a:ln>
-        </p:spPr>
+          <p:cNvPr id="14" name="Text 12"/>
+          <p:cNvSpPr/>
+          <p:nvPr/>
+        </p:nvSpPr>
+        <p:spPr>
+          <a:xfrm>
+            <a:off x="7799832" y="2935224"/>
+            <a:ext cx="3145536" cy="256032"/>
+          </a:xfrm>
+          <a:prstGeom prst="rect">
+            <a:avLst/>
+          </a:prstGeom>
+          <a:noFill/>
+          <a:ln/>
+        </p:spPr>
+        <p:txBody>
+          <a:bodyPr wrap="square" lIns="0" tIns="0" rIns="0" bIns="0" rtlCol="0" anchor="ctr"/>
+          <a:lstStyle/>
+          <a:p>
+            <a:pPr indent="0" marL="0">
+              <a:buNone/>
+            </a:pPr>
+            <a:r>
+              <a:rPr lang="en-US" sz="1300" b="1" dirty="0">
+                <a:solidFill>
+                  <a:srgbClr val="0068B7"/>
+                </a:solidFill>
+                <a:latin typeface="Aptos" pitchFamily="34" charset="0"/>
+                <a:ea typeface="Aptos" pitchFamily="34" charset="-122"/>
+                <a:cs typeface="Aptos" pitchFamily="34" charset="-120"/>
+              </a:rPr>
+              <a:t>Concept checkpoints</a:t>
+            </a:r>
+            <a:endParaRPr lang="en-US" sz="1300" dirty="0"/>
+          </a:p>
+        </p:txBody>
+      </p:sp>
+      <p:sp>
+        <p:nvSpPr>
+          <p:cNvPr id="15" name="Text 13"/>
+          <p:cNvSpPr/>
+          <p:nvPr/>
+        </p:nvSpPr>
+        <p:spPr>
+          <a:xfrm>
+            <a:off x="7818120" y="3300984"/>
+            <a:ext cx="3090672" cy="877824"/>
+          </a:xfrm>
+          <a:prstGeom prst="rect">
+            <a:avLst/>
+          </a:prstGeom>
+          <a:noFill/>
+          <a:ln/>
+        </p:spPr>
+        <p:txBody>
+          <a:bodyPr wrap="square" lIns="254" tIns="254" rIns="254" bIns="254" rtlCol="0" anchor="t">
+            <a:normAutofit/>
+          </a:bodyPr>
+          <a:lstStyle/>
+          <a:p>
+            <a:r>
+              <a:rPr lang="en-US" sz="1380" dirty="0">
+                <a:solidFill>
+                  <a:srgbClr val="17364A"/>
+                </a:solidFill>
+                <a:latin typeface="Aptos" pitchFamily="34" charset="0"/>
+                <a:ea typeface="Aptos" pitchFamily="34" charset="-122"/>
+                <a:cs typeface="Aptos" pitchFamily="34" charset="-120"/>
+              </a:rPr>
+              <a:t>OWASP Top 10 for Large Language Model Applications:.</a:t>
+            </a:r>
+            <a:endParaRPr lang="en-US" sz="1380" dirty="0"/>
+          </a:p>
+          <a:p>
+            <a:r>
+              <a:rPr lang="en-US" sz="1380" dirty="0">
+                <a:solidFill>
+                  <a:srgbClr val="17364A"/>
+                </a:solidFill>
+                <a:latin typeface="Aptos" pitchFamily="34" charset="0"/>
+                <a:ea typeface="Aptos" pitchFamily="34" charset="-122"/>
+                <a:cs typeface="Aptos" pitchFamily="34" charset="-120"/>
+              </a:rPr>
+              <a:t>ONC health IT, interoperability, and information blocking resources:.</a:t>
+            </a:r>
+            <a:endParaRPr lang="en-US" sz="1380" dirty="0"/>
+          </a:p>
+        </p:txBody>
       </p:sp>
       <p:sp>
         <p:nvSpPr>
           <p:cNvPr id="16" name="Shape 14"/>
-          <p:cNvSpPr/>
-          <p:nvPr/>
-        </p:nvSpPr>
-        <p:spPr>
-          <a:xfrm>
-            <a:off x="9015984" y="2880360"/>
-            <a:ext cx="256032" cy="1005840"/>
-          </a:xfrm>
-          <a:prstGeom prst="rect">
-            <a:avLst/>
-          </a:prstGeom>
-          <a:solidFill>
-            <a:srgbClr val="D69A2D"/>
-          </a:solidFill>
-          <a:ln w="12700">
-            <a:solidFill>
-              <a:srgbClr val="D69A2D"/>
-            </a:solidFill>
-            <a:prstDash val="solid"/>
-          </a:ln>
-        </p:spPr>
-      </p:sp>
-      <p:sp>
-        <p:nvSpPr>
-          <p:cNvPr id="17" name="Shape 15"/>
-          <p:cNvSpPr/>
-          <p:nvPr/>
-        </p:nvSpPr>
-        <p:spPr>
-          <a:xfrm>
-            <a:off x="9454896" y="3319272"/>
-            <a:ext cx="256032" cy="566928"/>
-          </a:xfrm>
-          <a:prstGeom prst="rect">
-            <a:avLst/>
-          </a:prstGeom>
-          <a:solidFill>
-            <a:srgbClr val="6A4CA3"/>
-          </a:solidFill>
-          <a:ln w="12700">
-            <a:solidFill>
-              <a:srgbClr val="6A4CA3"/>
-            </a:solidFill>
-            <a:prstDash val="solid"/>
-          </a:ln>
-        </p:spPr>
-      </p:sp>
-      <p:sp>
-        <p:nvSpPr>
-          <p:cNvPr id="18" name="Shape 16"/>
-          <p:cNvSpPr/>
-          <p:nvPr/>
-        </p:nvSpPr>
-        <p:spPr>
-          <a:xfrm>
-            <a:off x="8019288" y="3886200"/>
-            <a:ext cx="2706624" cy="0"/>
-          </a:xfrm>
-          <a:prstGeom prst="line">
-            <a:avLst/>
-          </a:prstGeom>
-          <a:noFill/>
-          <a:ln w="15240">
-            <a:solidFill>
-              <a:srgbClr val="003A63"/>
-            </a:solidFill>
-            <a:prstDash val="solid"/>
-          </a:ln>
-        </p:spPr>
-      </p:sp>
-      <p:sp>
-        <p:nvSpPr>
-          <p:cNvPr id="19" name="Text 17"/>
-          <p:cNvSpPr/>
-          <p:nvPr/>
-        </p:nvSpPr>
-        <p:spPr>
-          <a:xfrm>
-            <a:off x="7863840" y="3017520"/>
-            <a:ext cx="3017520" cy="201168"/>
-          </a:xfrm>
-          <a:prstGeom prst="rect">
-            <a:avLst/>
-          </a:prstGeom>
-          <a:noFill/>
-          <a:ln/>
-        </p:spPr>
-        <p:txBody>
-          <a:bodyPr wrap="square" lIns="0" tIns="0" rIns="0" bIns="0" rtlCol="0" anchor="ctr"/>
-          <a:lstStyle/>
-          <a:p>
-            <a:pPr algn="ctr" indent="0" marL="0">
-              <a:buNone/>
-            </a:pPr>
-            <a:r>
-              <a:rPr lang="en-US" sz="1050" b="1" dirty="0">
-                <a:solidFill>
-                  <a:srgbClr val="003A63"/>
-                </a:solidFill>
-                <a:latin typeface="Aptos" pitchFamily="34" charset="0"/>
-                <a:ea typeface="Aptos" pitchFamily="34" charset="-122"/>
-                <a:cs typeface="Aptos" pitchFamily="34" charset="-120"/>
-              </a:rPr>
-              <a:t>Measure and monitor</a:t>
-            </a:r>
-            <a:endParaRPr lang="en-US" sz="1050" dirty="0"/>
-          </a:p>
-        </p:txBody>
-      </p:sp>
-      <p:sp>
-        <p:nvSpPr>
-          <p:cNvPr id="20" name="Shape 18"/>
           <p:cNvSpPr/>
           <p:nvPr/>
         </p:nvSpPr>
@@ -11732,7 +10965,7 @@
       </p:sp>
       <p:sp>
         <p:nvSpPr>
-          <p:cNvPr id="21" name="Text 19"/>
+          <p:cNvPr id="17" name="Text 15"/>
           <p:cNvSpPr/>
           <p:nvPr/>
         </p:nvSpPr>
@@ -11771,7 +11004,7 @@
       </p:sp>
       <p:sp>
         <p:nvSpPr>
-          <p:cNvPr id="22" name="Text 20"/>
+          <p:cNvPr id="18" name="Text 16"/>
           <p:cNvSpPr/>
           <p:nvPr/>
         </p:nvSpPr>
@@ -12251,13 +11484,11 @@
             </a:avLst>
           </a:prstGeom>
           <a:solidFill>
-            <a:srgbClr val="FFFFFF">
-              <a:alpha val="88000"/>
-            </a:srgbClr>
+            <a:srgbClr val="FFFFFF"/>
           </a:solidFill>
           <a:ln w="12700">
             <a:solidFill>
-              <a:srgbClr val="D6E8F2"/>
+              <a:srgbClr val="B9D7E6"/>
             </a:solidFill>
             <a:prstDash val="solid"/>
           </a:ln>
@@ -12265,169 +11496,84 @@
       </p:sp>
       <p:sp>
         <p:nvSpPr>
-          <p:cNvPr id="14" name="Shape 12"/>
-          <p:cNvSpPr/>
-          <p:nvPr/>
-        </p:nvSpPr>
-        <p:spPr>
-          <a:xfrm>
-            <a:off x="8138160" y="3474720"/>
-            <a:ext cx="256032" cy="411480"/>
-          </a:xfrm>
-          <a:prstGeom prst="rect">
-            <a:avLst/>
-          </a:prstGeom>
-          <a:solidFill>
-            <a:srgbClr val="0068B7"/>
-          </a:solidFill>
-          <a:ln w="12700">
-            <a:solidFill>
-              <a:srgbClr val="0068B7"/>
-            </a:solidFill>
-            <a:prstDash val="solid"/>
-          </a:ln>
-        </p:spPr>
-      </p:sp>
-      <p:sp>
-        <p:nvSpPr>
-          <p:cNvPr id="15" name="Shape 13"/>
-          <p:cNvSpPr/>
-          <p:nvPr/>
-        </p:nvSpPr>
-        <p:spPr>
-          <a:xfrm>
-            <a:off x="8577072" y="3172968"/>
-            <a:ext cx="256032" cy="713232"/>
-          </a:xfrm>
-          <a:prstGeom prst="rect">
-            <a:avLst/>
-          </a:prstGeom>
-          <a:solidFill>
-            <a:srgbClr val="2F8A28"/>
-          </a:solidFill>
-          <a:ln w="12700">
-            <a:solidFill>
-              <a:srgbClr val="2F8A28"/>
-            </a:solidFill>
-            <a:prstDash val="solid"/>
-          </a:ln>
-        </p:spPr>
+          <p:cNvPr id="14" name="Text 12"/>
+          <p:cNvSpPr/>
+          <p:nvPr/>
+        </p:nvSpPr>
+        <p:spPr>
+          <a:xfrm>
+            <a:off x="7799832" y="2935224"/>
+            <a:ext cx="3145536" cy="256032"/>
+          </a:xfrm>
+          <a:prstGeom prst="rect">
+            <a:avLst/>
+          </a:prstGeom>
+          <a:noFill/>
+          <a:ln/>
+        </p:spPr>
+        <p:txBody>
+          <a:bodyPr wrap="square" lIns="0" tIns="0" rIns="0" bIns="0" rtlCol="0" anchor="ctr"/>
+          <a:lstStyle/>
+          <a:p>
+            <a:pPr indent="0" marL="0">
+              <a:buNone/>
+            </a:pPr>
+            <a:r>
+              <a:rPr lang="en-US" sz="1300" b="1" dirty="0">
+                <a:solidFill>
+                  <a:srgbClr val="0068B7"/>
+                </a:solidFill>
+                <a:latin typeface="Aptos" pitchFamily="34" charset="0"/>
+                <a:ea typeface="Aptos" pitchFamily="34" charset="-122"/>
+                <a:cs typeface="Aptos" pitchFamily="34" charset="-120"/>
+              </a:rPr>
+              <a:t>Concept checkpoints</a:t>
+            </a:r>
+            <a:endParaRPr lang="en-US" sz="1300" dirty="0"/>
+          </a:p>
+        </p:txBody>
+      </p:sp>
+      <p:sp>
+        <p:nvSpPr>
+          <p:cNvPr id="15" name="Text 13"/>
+          <p:cNvSpPr/>
+          <p:nvPr/>
+        </p:nvSpPr>
+        <p:spPr>
+          <a:xfrm>
+            <a:off x="7818120" y="3300984"/>
+            <a:ext cx="3090672" cy="877824"/>
+          </a:xfrm>
+          <a:prstGeom prst="rect">
+            <a:avLst/>
+          </a:prstGeom>
+          <a:noFill/>
+          <a:ln/>
+        </p:spPr>
+        <p:txBody>
+          <a:bodyPr wrap="square" lIns="254" tIns="254" rIns="254" bIns="254" rtlCol="0" anchor="t">
+            <a:normAutofit/>
+          </a:bodyPr>
+          <a:lstStyle/>
+          <a:p>
+            <a:r>
+              <a:rPr lang="en-US" sz="1380" dirty="0">
+                <a:solidFill>
+                  <a:srgbClr val="17364A"/>
+                </a:solidFill>
+                <a:latin typeface="Aptos" pitchFamily="34" charset="0"/>
+                <a:ea typeface="Aptos" pitchFamily="34" charset="-122"/>
+                <a:cs typeface="Aptos" pitchFamily="34" charset="-120"/>
+              </a:rPr>
+              <a:t>Agency policies for privacy, public records, cybersecurity, procurement, civil rights,.</a:t>
+            </a:r>
+            <a:endParaRPr lang="en-US" sz="1380" dirty="0"/>
+          </a:p>
+        </p:txBody>
       </p:sp>
       <p:sp>
         <p:nvSpPr>
           <p:cNvPr id="16" name="Shape 14"/>
-          <p:cNvSpPr/>
-          <p:nvPr/>
-        </p:nvSpPr>
-        <p:spPr>
-          <a:xfrm>
-            <a:off x="9015984" y="2880360"/>
-            <a:ext cx="256032" cy="1005840"/>
-          </a:xfrm>
-          <a:prstGeom prst="rect">
-            <a:avLst/>
-          </a:prstGeom>
-          <a:solidFill>
-            <a:srgbClr val="D69A2D"/>
-          </a:solidFill>
-          <a:ln w="12700">
-            <a:solidFill>
-              <a:srgbClr val="D69A2D"/>
-            </a:solidFill>
-            <a:prstDash val="solid"/>
-          </a:ln>
-        </p:spPr>
-      </p:sp>
-      <p:sp>
-        <p:nvSpPr>
-          <p:cNvPr id="17" name="Shape 15"/>
-          <p:cNvSpPr/>
-          <p:nvPr/>
-        </p:nvSpPr>
-        <p:spPr>
-          <a:xfrm>
-            <a:off x="9454896" y="3319272"/>
-            <a:ext cx="256032" cy="566928"/>
-          </a:xfrm>
-          <a:prstGeom prst="rect">
-            <a:avLst/>
-          </a:prstGeom>
-          <a:solidFill>
-            <a:srgbClr val="6A4CA3"/>
-          </a:solidFill>
-          <a:ln w="12700">
-            <a:solidFill>
-              <a:srgbClr val="6A4CA3"/>
-            </a:solidFill>
-            <a:prstDash val="solid"/>
-          </a:ln>
-        </p:spPr>
-      </p:sp>
-      <p:sp>
-        <p:nvSpPr>
-          <p:cNvPr id="18" name="Shape 16"/>
-          <p:cNvSpPr/>
-          <p:nvPr/>
-        </p:nvSpPr>
-        <p:spPr>
-          <a:xfrm>
-            <a:off x="8019288" y="3886200"/>
-            <a:ext cx="2706624" cy="0"/>
-          </a:xfrm>
-          <a:prstGeom prst="line">
-            <a:avLst/>
-          </a:prstGeom>
-          <a:noFill/>
-          <a:ln w="15240">
-            <a:solidFill>
-              <a:srgbClr val="003A63"/>
-            </a:solidFill>
-            <a:prstDash val="solid"/>
-          </a:ln>
-        </p:spPr>
-      </p:sp>
-      <p:sp>
-        <p:nvSpPr>
-          <p:cNvPr id="19" name="Text 17"/>
-          <p:cNvSpPr/>
-          <p:nvPr/>
-        </p:nvSpPr>
-        <p:spPr>
-          <a:xfrm>
-            <a:off x="7863840" y="3017520"/>
-            <a:ext cx="3017520" cy="201168"/>
-          </a:xfrm>
-          <a:prstGeom prst="rect">
-            <a:avLst/>
-          </a:prstGeom>
-          <a:noFill/>
-          <a:ln/>
-        </p:spPr>
-        <p:txBody>
-          <a:bodyPr wrap="square" lIns="0" tIns="0" rIns="0" bIns="0" rtlCol="0" anchor="ctr"/>
-          <a:lstStyle/>
-          <a:p>
-            <a:pPr algn="ctr" indent="0" marL="0">
-              <a:buNone/>
-            </a:pPr>
-            <a:r>
-              <a:rPr lang="en-US" sz="1050" b="1" dirty="0">
-                <a:solidFill>
-                  <a:srgbClr val="003A63"/>
-                </a:solidFill>
-                <a:latin typeface="Aptos" pitchFamily="34" charset="0"/>
-                <a:ea typeface="Aptos" pitchFamily="34" charset="-122"/>
-                <a:cs typeface="Aptos" pitchFamily="34" charset="-120"/>
-              </a:rPr>
-              <a:t>Measure and monitor</a:t>
-            </a:r>
-            <a:endParaRPr lang="en-US" sz="1050" dirty="0"/>
-          </a:p>
-        </p:txBody>
-      </p:sp>
-      <p:sp>
-        <p:nvSpPr>
-          <p:cNvPr id="20" name="Shape 18"/>
           <p:cNvSpPr/>
           <p:nvPr/>
         </p:nvSpPr>
@@ -12454,7 +11600,7 @@
       </p:sp>
       <p:sp>
         <p:nvSpPr>
-          <p:cNvPr id="21" name="Text 19"/>
+          <p:cNvPr id="17" name="Text 15"/>
           <p:cNvSpPr/>
           <p:nvPr/>
         </p:nvSpPr>
@@ -12493,7 +11639,7 @@
       </p:sp>
       <p:sp>
         <p:nvSpPr>
-          <p:cNvPr id="22" name="Text 20"/>
+          <p:cNvPr id="18" name="Text 16"/>
           <p:cNvSpPr/>
           <p:nvPr/>
         </p:nvSpPr>
@@ -13006,20 +12152,20 @@
         </p:nvSpPr>
         <p:spPr>
           <a:xfrm>
-            <a:off x="7818120" y="3977640"/>
-            <a:ext cx="972312" cy="749808"/>
+            <a:off x="8046720" y="3794760"/>
+            <a:ext cx="3063240" cy="1600200"/>
           </a:xfrm>
           <a:prstGeom prst="roundRect">
             <a:avLst>
-              <a:gd name="adj" fmla="val 14634"/>
+              <a:gd name="adj" fmla="val 6857"/>
             </a:avLst>
           </a:prstGeom>
           <a:solidFill>
-            <a:srgbClr val="0068B7"/>
+            <a:srgbClr val="FFFFFF"/>
           </a:solidFill>
           <a:ln w="12700">
             <a:solidFill>
-              <a:srgbClr val="0068B7"/>
+              <a:srgbClr val="B9D7E6"/>
             </a:solidFill>
             <a:prstDash val="solid"/>
           </a:ln>
@@ -13033,172 +12179,100 @@
         </p:nvSpPr>
         <p:spPr>
           <a:xfrm>
-            <a:off x="7891272" y="4169664"/>
-            <a:ext cx="826008" cy="310896"/>
-          </a:xfrm>
-          <a:prstGeom prst="rect">
-            <a:avLst/>
-          </a:prstGeom>
-          <a:noFill/>
-          <a:ln/>
-        </p:spPr>
-        <p:txBody>
-          <a:bodyPr wrap="square" lIns="0" tIns="0" rIns="0" bIns="0" rtlCol="0" anchor="ctr">
+            <a:off x="8211312" y="3941064"/>
+            <a:ext cx="2734056" cy="256032"/>
+          </a:xfrm>
+          <a:prstGeom prst="rect">
+            <a:avLst/>
+          </a:prstGeom>
+          <a:noFill/>
+          <a:ln/>
+        </p:spPr>
+        <p:txBody>
+          <a:bodyPr wrap="square" lIns="0" tIns="0" rIns="0" bIns="0" rtlCol="0" anchor="ctr"/>
+          <a:lstStyle/>
+          <a:p>
+            <a:pPr indent="0" marL="0">
+              <a:buNone/>
+            </a:pPr>
+            <a:r>
+              <a:rPr lang="en-US" sz="1300" b="1" dirty="0">
+                <a:solidFill>
+                  <a:srgbClr val="0068B7"/>
+                </a:solidFill>
+                <a:latin typeface="Aptos" pitchFamily="34" charset="0"/>
+                <a:ea typeface="Aptos" pitchFamily="34" charset="-122"/>
+                <a:cs typeface="Aptos" pitchFamily="34" charset="-120"/>
+              </a:rPr>
+              <a:t>Use the play links to</a:t>
+            </a:r>
+            <a:endParaRPr lang="en-US" sz="1300" dirty="0"/>
+          </a:p>
+        </p:txBody>
+      </p:sp>
+      <p:sp>
+        <p:nvSpPr>
+          <p:cNvPr id="15" name="Text 13"/>
+          <p:cNvSpPr/>
+          <p:nvPr/>
+        </p:nvSpPr>
+        <p:spPr>
+          <a:xfrm>
+            <a:off x="8229600" y="4306824"/>
+            <a:ext cx="2679192" cy="941832"/>
+          </a:xfrm>
+          <a:prstGeom prst="rect">
+            <a:avLst/>
+          </a:prstGeom>
+          <a:noFill/>
+          <a:ln/>
+        </p:spPr>
+        <p:txBody>
+          <a:bodyPr wrap="square" lIns="254" tIns="254" rIns="254" bIns="254" rtlCol="0" anchor="t">
             <a:normAutofit/>
           </a:bodyPr>
           <a:lstStyle/>
           <a:p>
-            <a:pPr algn="ctr" indent="0" marL="0">
-              <a:buNone/>
-            </a:pPr>
-            <a:r>
-              <a:rPr lang="en-US" sz="1500" b="1" dirty="0">
-                <a:solidFill>
-                  <a:srgbClr val="FFFFFF"/>
-                </a:solidFill>
-                <a:latin typeface="Aptos" pitchFamily="34" charset="0"/>
-                <a:ea typeface="Aptos" pitchFamily="34" charset="-122"/>
-                <a:cs typeface="Aptos" pitchFamily="34" charset="-120"/>
-              </a:rPr>
-              <a:t>Lesson</a:t>
-            </a:r>
-            <a:endParaRPr lang="en-US" sz="1500" dirty="0"/>
-          </a:p>
-        </p:txBody>
-      </p:sp>
-      <p:sp>
-        <p:nvSpPr>
-          <p:cNvPr id="15" name="Shape 13"/>
-          <p:cNvSpPr/>
-          <p:nvPr/>
-        </p:nvSpPr>
-        <p:spPr>
-          <a:xfrm>
-            <a:off x="9046464" y="3977640"/>
-            <a:ext cx="972312" cy="749808"/>
-          </a:xfrm>
-          <a:prstGeom prst="roundRect">
-            <a:avLst>
-              <a:gd name="adj" fmla="val 14634"/>
-            </a:avLst>
-          </a:prstGeom>
-          <a:solidFill>
-            <a:srgbClr val="2F8A28"/>
-          </a:solidFill>
-          <a:ln w="12700">
-            <a:solidFill>
-              <a:srgbClr val="2F8A28"/>
-            </a:solidFill>
-            <a:prstDash val="solid"/>
-          </a:ln>
-        </p:spPr>
-      </p:sp>
-      <p:sp>
-        <p:nvSpPr>
-          <p:cNvPr id="16" name="Text 14"/>
-          <p:cNvSpPr/>
-          <p:nvPr/>
-        </p:nvSpPr>
-        <p:spPr>
-          <a:xfrm>
-            <a:off x="9119616" y="4169664"/>
-            <a:ext cx="826008" cy="310896"/>
-          </a:xfrm>
-          <a:prstGeom prst="rect">
-            <a:avLst/>
-          </a:prstGeom>
-          <a:noFill/>
-          <a:ln/>
-        </p:spPr>
-        <p:txBody>
-          <a:bodyPr wrap="square" lIns="0" tIns="0" rIns="0" bIns="0" rtlCol="0" anchor="ctr">
-            <a:normAutofit/>
-          </a:bodyPr>
-          <a:lstStyle/>
-          <a:p>
-            <a:pPr algn="ctr" indent="0" marL="0">
-              <a:buNone/>
-            </a:pPr>
-            <a:r>
-              <a:rPr lang="en-US" sz="1500" b="1" dirty="0">
-                <a:solidFill>
-                  <a:srgbClr val="FFFFFF"/>
-                </a:solidFill>
-                <a:latin typeface="Aptos" pitchFamily="34" charset="0"/>
-                <a:ea typeface="Aptos" pitchFamily="34" charset="-122"/>
-                <a:cs typeface="Aptos" pitchFamily="34" charset="-120"/>
-              </a:rPr>
-              <a:t>Plays</a:t>
-            </a:r>
-            <a:endParaRPr lang="en-US" sz="1500" dirty="0"/>
-          </a:p>
-        </p:txBody>
-      </p:sp>
-      <p:sp>
-        <p:nvSpPr>
-          <p:cNvPr id="17" name="Shape 15"/>
-          <p:cNvSpPr/>
-          <p:nvPr/>
-        </p:nvSpPr>
-        <p:spPr>
-          <a:xfrm>
-            <a:off x="10274808" y="3977640"/>
-            <a:ext cx="972312" cy="749808"/>
-          </a:xfrm>
-          <a:prstGeom prst="roundRect">
-            <a:avLst>
-              <a:gd name="adj" fmla="val 14634"/>
-            </a:avLst>
-          </a:prstGeom>
-          <a:solidFill>
-            <a:srgbClr val="6A4CA3"/>
-          </a:solidFill>
-          <a:ln w="12700">
-            <a:solidFill>
-              <a:srgbClr val="6A4CA3"/>
-            </a:solidFill>
-            <a:prstDash val="solid"/>
-          </a:ln>
-        </p:spPr>
-      </p:sp>
-      <p:sp>
-        <p:nvSpPr>
-          <p:cNvPr id="18" name="Text 16"/>
-          <p:cNvSpPr/>
-          <p:nvPr/>
-        </p:nvSpPr>
-        <p:spPr>
-          <a:xfrm>
-            <a:off x="10347960" y="4169664"/>
-            <a:ext cx="826008" cy="310896"/>
-          </a:xfrm>
-          <a:prstGeom prst="rect">
-            <a:avLst/>
-          </a:prstGeom>
-          <a:noFill/>
-          <a:ln/>
-        </p:spPr>
-        <p:txBody>
-          <a:bodyPr wrap="square" lIns="0" tIns="0" rIns="0" bIns="0" rtlCol="0" anchor="ctr">
-            <a:normAutofit/>
-          </a:bodyPr>
-          <a:lstStyle/>
-          <a:p>
-            <a:pPr algn="ctr" indent="0" marL="0">
-              <a:buNone/>
-            </a:pPr>
-            <a:r>
-              <a:rPr lang="en-US" sz="1500" b="1" dirty="0">
-                <a:solidFill>
-                  <a:srgbClr val="FFFFFF"/>
-                </a:solidFill>
-                <a:latin typeface="Aptos" pitchFamily="34" charset="0"/>
-                <a:ea typeface="Aptos" pitchFamily="34" charset="-122"/>
-                <a:cs typeface="Aptos" pitchFamily="34" charset="-120"/>
-              </a:rPr>
-              <a:t>Action</a:t>
-            </a:r>
-            <a:endParaRPr lang="en-US" sz="1500" dirty="0"/>
+            <a:r>
+              <a:rPr lang="en-US" sz="1380" dirty="0">
+                <a:solidFill>
+                  <a:srgbClr val="17364A"/>
+                </a:solidFill>
+                <a:latin typeface="Aptos" pitchFamily="34" charset="0"/>
+                <a:ea typeface="Aptos" pitchFamily="34" charset="-122"/>
+                <a:cs typeface="Aptos" pitchFamily="34" charset="-120"/>
+              </a:rPr>
+              <a:t>Locate the decision point in the playbook sequence.</a:t>
+            </a:r>
+            <a:endParaRPr lang="en-US" sz="1380" dirty="0"/>
+          </a:p>
+          <a:p>
+            <a:r>
+              <a:rPr lang="en-US" sz="1380" dirty="0">
+                <a:solidFill>
+                  <a:srgbClr val="17364A"/>
+                </a:solidFill>
+                <a:latin typeface="Aptos" pitchFamily="34" charset="0"/>
+                <a:ea typeface="Aptos" pitchFamily="34" charset="-122"/>
+                <a:cs typeface="Aptos" pitchFamily="34" charset="-120"/>
+              </a:rPr>
+              <a:t>Identify who should participate in the work.</a:t>
+            </a:r>
+            <a:endParaRPr lang="en-US" sz="1380" dirty="0"/>
+          </a:p>
+          <a:p>
+            <a:r>
+              <a:rPr lang="en-US" sz="1380" dirty="0">
+                <a:solidFill>
+                  <a:srgbClr val="17364A"/>
+                </a:solidFill>
+                <a:latin typeface="Aptos" pitchFamily="34" charset="0"/>
+                <a:ea typeface="Aptos" pitchFamily="34" charset="-122"/>
+                <a:cs typeface="Aptos" pitchFamily="34" charset="-120"/>
+              </a:rPr>
+              <a:t>Document the review, approval, or implementation step.</a:t>
+            </a:r>
+            <a:endParaRPr lang="en-US" sz="1380" dirty="0"/>
           </a:p>
         </p:txBody>
       </p:sp>
@@ -13676,20 +12750,20 @@
         </p:nvSpPr>
         <p:spPr>
           <a:xfrm>
-            <a:off x="7818120" y="3977640"/>
-            <a:ext cx="972312" cy="749808"/>
+            <a:off x="8046720" y="3794760"/>
+            <a:ext cx="3063240" cy="1600200"/>
           </a:xfrm>
           <a:prstGeom prst="roundRect">
             <a:avLst>
-              <a:gd name="adj" fmla="val 14634"/>
+              <a:gd name="adj" fmla="val 6857"/>
             </a:avLst>
           </a:prstGeom>
           <a:solidFill>
-            <a:srgbClr val="0068B7"/>
+            <a:srgbClr val="FFFFFF"/>
           </a:solidFill>
           <a:ln w="12700">
             <a:solidFill>
-              <a:srgbClr val="0068B7"/>
+              <a:srgbClr val="B9D7E6"/>
             </a:solidFill>
             <a:prstDash val="solid"/>
           </a:ln>
@@ -13703,172 +12777,100 @@
         </p:nvSpPr>
         <p:spPr>
           <a:xfrm>
-            <a:off x="7891272" y="4169664"/>
-            <a:ext cx="826008" cy="310896"/>
-          </a:xfrm>
-          <a:prstGeom prst="rect">
-            <a:avLst/>
-          </a:prstGeom>
-          <a:noFill/>
-          <a:ln/>
-        </p:spPr>
-        <p:txBody>
-          <a:bodyPr wrap="square" lIns="0" tIns="0" rIns="0" bIns="0" rtlCol="0" anchor="ctr">
+            <a:off x="8211312" y="3941064"/>
+            <a:ext cx="2734056" cy="256032"/>
+          </a:xfrm>
+          <a:prstGeom prst="rect">
+            <a:avLst/>
+          </a:prstGeom>
+          <a:noFill/>
+          <a:ln/>
+        </p:spPr>
+        <p:txBody>
+          <a:bodyPr wrap="square" lIns="0" tIns="0" rIns="0" bIns="0" rtlCol="0" anchor="ctr"/>
+          <a:lstStyle/>
+          <a:p>
+            <a:pPr indent="0" marL="0">
+              <a:buNone/>
+            </a:pPr>
+            <a:r>
+              <a:rPr lang="en-US" sz="1300" b="1" dirty="0">
+                <a:solidFill>
+                  <a:srgbClr val="0068B7"/>
+                </a:solidFill>
+                <a:latin typeface="Aptos" pitchFamily="34" charset="0"/>
+                <a:ea typeface="Aptos" pitchFamily="34" charset="-122"/>
+                <a:cs typeface="Aptos" pitchFamily="34" charset="-120"/>
+              </a:rPr>
+              <a:t>Tool selection cues</a:t>
+            </a:r>
+            <a:endParaRPr lang="en-US" sz="1300" dirty="0"/>
+          </a:p>
+        </p:txBody>
+      </p:sp>
+      <p:sp>
+        <p:nvSpPr>
+          <p:cNvPr id="15" name="Text 13"/>
+          <p:cNvSpPr/>
+          <p:nvPr/>
+        </p:nvSpPr>
+        <p:spPr>
+          <a:xfrm>
+            <a:off x="8229600" y="4306824"/>
+            <a:ext cx="2679192" cy="941832"/>
+          </a:xfrm>
+          <a:prstGeom prst="rect">
+            <a:avLst/>
+          </a:prstGeom>
+          <a:noFill/>
+          <a:ln/>
+        </p:spPr>
+        <p:txBody>
+          <a:bodyPr wrap="square" lIns="254" tIns="254" rIns="254" bIns="254" rtlCol="0" anchor="t">
             <a:normAutofit/>
           </a:bodyPr>
           <a:lstStyle/>
           <a:p>
-            <a:pPr algn="ctr" indent="0" marL="0">
-              <a:buNone/>
-            </a:pPr>
-            <a:r>
-              <a:rPr lang="en-US" sz="1500" b="1" dirty="0">
-                <a:solidFill>
-                  <a:srgbClr val="FFFFFF"/>
-                </a:solidFill>
-                <a:latin typeface="Aptos" pitchFamily="34" charset="0"/>
-                <a:ea typeface="Aptos" pitchFamily="34" charset="-122"/>
-                <a:cs typeface="Aptos" pitchFamily="34" charset="-120"/>
-              </a:rPr>
-              <a:t>Concept</a:t>
-            </a:r>
-            <a:endParaRPr lang="en-US" sz="1500" dirty="0"/>
-          </a:p>
-        </p:txBody>
-      </p:sp>
-      <p:sp>
-        <p:nvSpPr>
-          <p:cNvPr id="15" name="Shape 13"/>
-          <p:cNvSpPr/>
-          <p:nvPr/>
-        </p:nvSpPr>
-        <p:spPr>
-          <a:xfrm>
-            <a:off x="9046464" y="3977640"/>
-            <a:ext cx="972312" cy="749808"/>
-          </a:xfrm>
-          <a:prstGeom prst="roundRect">
-            <a:avLst>
-              <a:gd name="adj" fmla="val 14634"/>
-            </a:avLst>
-          </a:prstGeom>
-          <a:solidFill>
-            <a:srgbClr val="2F8A28"/>
-          </a:solidFill>
-          <a:ln w="12700">
-            <a:solidFill>
-              <a:srgbClr val="2F8A28"/>
-            </a:solidFill>
-            <a:prstDash val="solid"/>
-          </a:ln>
-        </p:spPr>
-      </p:sp>
-      <p:sp>
-        <p:nvSpPr>
-          <p:cNvPr id="16" name="Text 14"/>
-          <p:cNvSpPr/>
-          <p:nvPr/>
-        </p:nvSpPr>
-        <p:spPr>
-          <a:xfrm>
-            <a:off x="9119616" y="4169664"/>
-            <a:ext cx="826008" cy="310896"/>
-          </a:xfrm>
-          <a:prstGeom prst="rect">
-            <a:avLst/>
-          </a:prstGeom>
-          <a:noFill/>
-          <a:ln/>
-        </p:spPr>
-        <p:txBody>
-          <a:bodyPr wrap="square" lIns="0" tIns="0" rIns="0" bIns="0" rtlCol="0" anchor="ctr">
-            <a:normAutofit/>
-          </a:bodyPr>
-          <a:lstStyle/>
-          <a:p>
-            <a:pPr algn="ctr" indent="0" marL="0">
-              <a:buNone/>
-            </a:pPr>
-            <a:r>
-              <a:rPr lang="en-US" sz="1500" b="1" dirty="0">
-                <a:solidFill>
-                  <a:srgbClr val="FFFFFF"/>
-                </a:solidFill>
-                <a:latin typeface="Aptos" pitchFamily="34" charset="0"/>
-                <a:ea typeface="Aptos" pitchFamily="34" charset="-122"/>
-                <a:cs typeface="Aptos" pitchFamily="34" charset="-120"/>
-              </a:rPr>
-              <a:t>Tool</a:t>
-            </a:r>
-            <a:endParaRPr lang="en-US" sz="1500" dirty="0"/>
-          </a:p>
-        </p:txBody>
-      </p:sp>
-      <p:sp>
-        <p:nvSpPr>
-          <p:cNvPr id="17" name="Shape 15"/>
-          <p:cNvSpPr/>
-          <p:nvPr/>
-        </p:nvSpPr>
-        <p:spPr>
-          <a:xfrm>
-            <a:off x="10274808" y="3977640"/>
-            <a:ext cx="972312" cy="749808"/>
-          </a:xfrm>
-          <a:prstGeom prst="roundRect">
-            <a:avLst>
-              <a:gd name="adj" fmla="val 14634"/>
-            </a:avLst>
-          </a:prstGeom>
-          <a:solidFill>
-            <a:srgbClr val="D69A2D"/>
-          </a:solidFill>
-          <a:ln w="12700">
-            <a:solidFill>
-              <a:srgbClr val="D69A2D"/>
-            </a:solidFill>
-            <a:prstDash val="solid"/>
-          </a:ln>
-        </p:spPr>
-      </p:sp>
-      <p:sp>
-        <p:nvSpPr>
-          <p:cNvPr id="18" name="Text 16"/>
-          <p:cNvSpPr/>
-          <p:nvPr/>
-        </p:nvSpPr>
-        <p:spPr>
-          <a:xfrm>
-            <a:off x="10347960" y="4169664"/>
-            <a:ext cx="826008" cy="310896"/>
-          </a:xfrm>
-          <a:prstGeom prst="rect">
-            <a:avLst/>
-          </a:prstGeom>
-          <a:noFill/>
-          <a:ln/>
-        </p:spPr>
-        <p:txBody>
-          <a:bodyPr wrap="square" lIns="0" tIns="0" rIns="0" bIns="0" rtlCol="0" anchor="ctr">
-            <a:normAutofit/>
-          </a:bodyPr>
-          <a:lstStyle/>
-          <a:p>
-            <a:pPr algn="ctr" indent="0" marL="0">
-              <a:buNone/>
-            </a:pPr>
-            <a:r>
-              <a:rPr lang="en-US" sz="1500" b="1" dirty="0">
-                <a:solidFill>
-                  <a:srgbClr val="FFFFFF"/>
-                </a:solidFill>
-                <a:latin typeface="Aptos" pitchFamily="34" charset="0"/>
-                <a:ea typeface="Aptos" pitchFamily="34" charset="-122"/>
-                <a:cs typeface="Aptos" pitchFamily="34" charset="-120"/>
-              </a:rPr>
-              <a:t>Artifact</a:t>
-            </a:r>
-            <a:endParaRPr lang="en-US" sz="1500" dirty="0"/>
+            <a:r>
+              <a:rPr lang="en-US" sz="1380" dirty="0">
+                <a:solidFill>
+                  <a:srgbClr val="17364A"/>
+                </a:solidFill>
+                <a:latin typeface="Aptos" pitchFamily="34" charset="0"/>
+                <a:ea typeface="Aptos" pitchFamily="34" charset="-122"/>
+                <a:cs typeface="Aptos" pitchFamily="34" charset="-120"/>
+              </a:rPr>
+              <a:t>Use a tool when no comparable local process exists.</a:t>
+            </a:r>
+            <a:endParaRPr lang="en-US" sz="1380" dirty="0"/>
+          </a:p>
+          <a:p>
+            <a:r>
+              <a:rPr lang="en-US" sz="1380" dirty="0">
+                <a:solidFill>
+                  <a:srgbClr val="17364A"/>
+                </a:solidFill>
+                <a:latin typeface="Aptos" pitchFamily="34" charset="0"/>
+                <a:ea typeface="Aptos" pitchFamily="34" charset="-122"/>
+                <a:cs typeface="Aptos" pitchFamily="34" charset="-120"/>
+              </a:rPr>
+              <a:t>Adapt existing department templates when they already fit the purpose.</a:t>
+            </a:r>
+            <a:endParaRPr lang="en-US" sz="1380" dirty="0"/>
+          </a:p>
+          <a:p>
+            <a:r>
+              <a:rPr lang="en-US" sz="1380" dirty="0">
+                <a:solidFill>
+                  <a:srgbClr val="17364A"/>
+                </a:solidFill>
+                <a:latin typeface="Aptos" pitchFamily="34" charset="0"/>
+                <a:ea typeface="Aptos" pitchFamily="34" charset="-122"/>
+                <a:cs typeface="Aptos" pitchFamily="34" charset="-120"/>
+              </a:rPr>
+              <a:t>Save the completed artifact as evidence of the decision.</a:t>
+            </a:r>
+            <a:endParaRPr lang="en-US" sz="1380" dirty="0"/>
           </a:p>
         </p:txBody>
       </p:sp>
@@ -14341,13 +13343,11 @@
             </a:avLst>
           </a:prstGeom>
           <a:solidFill>
-            <a:srgbClr val="FFFFFF">
-              <a:alpha val="88000"/>
-            </a:srgbClr>
+            <a:srgbClr val="FFFFFF"/>
           </a:solidFill>
           <a:ln w="12700">
             <a:solidFill>
-              <a:srgbClr val="D6E8F2"/>
+              <a:srgbClr val="B9D7E6"/>
             </a:solidFill>
             <a:prstDash val="solid"/>
           </a:ln>
@@ -14355,169 +13355,112 @@
       </p:sp>
       <p:sp>
         <p:nvSpPr>
-          <p:cNvPr id="14" name="Shape 12"/>
-          <p:cNvSpPr/>
-          <p:nvPr/>
-        </p:nvSpPr>
-        <p:spPr>
-          <a:xfrm>
-            <a:off x="8138160" y="3474720"/>
-            <a:ext cx="256032" cy="411480"/>
-          </a:xfrm>
-          <a:prstGeom prst="rect">
-            <a:avLst/>
-          </a:prstGeom>
-          <a:solidFill>
-            <a:srgbClr val="0068B7"/>
-          </a:solidFill>
-          <a:ln w="12700">
-            <a:solidFill>
-              <a:srgbClr val="0068B7"/>
-            </a:solidFill>
-            <a:prstDash val="solid"/>
-          </a:ln>
-        </p:spPr>
-      </p:sp>
-      <p:sp>
-        <p:nvSpPr>
-          <p:cNvPr id="15" name="Shape 13"/>
-          <p:cNvSpPr/>
-          <p:nvPr/>
-        </p:nvSpPr>
-        <p:spPr>
-          <a:xfrm>
-            <a:off x="8577072" y="3172968"/>
-            <a:ext cx="256032" cy="713232"/>
-          </a:xfrm>
-          <a:prstGeom prst="rect">
-            <a:avLst/>
-          </a:prstGeom>
-          <a:solidFill>
-            <a:srgbClr val="2F8A28"/>
-          </a:solidFill>
-          <a:ln w="12700">
-            <a:solidFill>
-              <a:srgbClr val="2F8A28"/>
-            </a:solidFill>
-            <a:prstDash val="solid"/>
-          </a:ln>
-        </p:spPr>
+          <p:cNvPr id="14" name="Text 12"/>
+          <p:cNvSpPr/>
+          <p:nvPr/>
+        </p:nvSpPr>
+        <p:spPr>
+          <a:xfrm>
+            <a:off x="7799832" y="2935224"/>
+            <a:ext cx="3145536" cy="256032"/>
+          </a:xfrm>
+          <a:prstGeom prst="rect">
+            <a:avLst/>
+          </a:prstGeom>
+          <a:noFill/>
+          <a:ln/>
+        </p:spPr>
+        <p:txBody>
+          <a:bodyPr wrap="square" lIns="0" tIns="0" rIns="0" bIns="0" rtlCol="0" anchor="ctr"/>
+          <a:lstStyle/>
+          <a:p>
+            <a:pPr indent="0" marL="0">
+              <a:buNone/>
+            </a:pPr>
+            <a:r>
+              <a:rPr lang="en-US" sz="1300" b="1" dirty="0">
+                <a:solidFill>
+                  <a:srgbClr val="0068B7"/>
+                </a:solidFill>
+                <a:latin typeface="Aptos" pitchFamily="34" charset="0"/>
+                <a:ea typeface="Aptos" pitchFamily="34" charset="-122"/>
+                <a:cs typeface="Aptos" pitchFamily="34" charset="-120"/>
+              </a:rPr>
+              <a:t>Concept checkpoints</a:t>
+            </a:r>
+            <a:endParaRPr lang="en-US" sz="1300" dirty="0"/>
+          </a:p>
+        </p:txBody>
+      </p:sp>
+      <p:sp>
+        <p:nvSpPr>
+          <p:cNvPr id="15" name="Text 13"/>
+          <p:cNvSpPr/>
+          <p:nvPr/>
+        </p:nvSpPr>
+        <p:spPr>
+          <a:xfrm>
+            <a:off x="7818120" y="3300984"/>
+            <a:ext cx="3090672" cy="877824"/>
+          </a:xfrm>
+          <a:prstGeom prst="rect">
+            <a:avLst/>
+          </a:prstGeom>
+          <a:noFill/>
+          <a:ln/>
+        </p:spPr>
+        <p:txBody>
+          <a:bodyPr wrap="square" lIns="254" tIns="254" rIns="254" bIns="254" rtlCol="0" anchor="t">
+            <a:normAutofit/>
+          </a:bodyPr>
+          <a:lstStyle/>
+          <a:p>
+            <a:r>
+              <a:rPr lang="en-US" sz="1380" dirty="0">
+                <a:solidFill>
+                  <a:srgbClr val="17364A"/>
+                </a:solidFill>
+                <a:latin typeface="Aptos" pitchFamily="34" charset="0"/>
+                <a:ea typeface="Aptos" pitchFamily="34" charset="-122"/>
+                <a:cs typeface="Aptos" pitchFamily="34" charset="-120"/>
+              </a:rPr>
+              <a:t>Identify when model results should include confidence intervals, prediction intervals,.</a:t>
+            </a:r>
+            <a:endParaRPr lang="en-US" sz="1380" dirty="0"/>
+          </a:p>
+          <a:p>
+            <a:r>
+              <a:rPr lang="en-US" sz="1380" dirty="0">
+                <a:solidFill>
+                  <a:srgbClr val="17364A"/>
+                </a:solidFill>
+                <a:latin typeface="Aptos" pitchFamily="34" charset="0"/>
+                <a:ea typeface="Aptos" pitchFamily="34" charset="-122"/>
+                <a:cs typeface="Aptos" pitchFamily="34" charset="-120"/>
+              </a:rPr>
+              <a:t>Avoid overclaiming, causal overreach, and false precision in AI communications.</a:t>
+            </a:r>
+            <a:endParaRPr lang="en-US" sz="1380" dirty="0"/>
+          </a:p>
+          <a:p>
+            <a:r>
+              <a:rPr lang="en-US" sz="1380" dirty="0">
+                <a:solidFill>
+                  <a:srgbClr val="17364A"/>
+                </a:solidFill>
+                <a:latin typeface="Aptos" pitchFamily="34" charset="0"/>
+                <a:ea typeface="Aptos" pitchFamily="34" charset="-122"/>
+                <a:cs typeface="Aptos" pitchFamily="34" charset="-120"/>
+              </a:rPr>
+              <a:t>Create a model communication brief for a public health decision-maker.</a:t>
+            </a:r>
+            <a:endParaRPr lang="en-US" sz="1380" dirty="0"/>
+          </a:p>
+        </p:txBody>
       </p:sp>
       <p:sp>
         <p:nvSpPr>
           <p:cNvPr id="16" name="Shape 14"/>
-          <p:cNvSpPr/>
-          <p:nvPr/>
-        </p:nvSpPr>
-        <p:spPr>
-          <a:xfrm>
-            <a:off x="9015984" y="2880360"/>
-            <a:ext cx="256032" cy="1005840"/>
-          </a:xfrm>
-          <a:prstGeom prst="rect">
-            <a:avLst/>
-          </a:prstGeom>
-          <a:solidFill>
-            <a:srgbClr val="D69A2D"/>
-          </a:solidFill>
-          <a:ln w="12700">
-            <a:solidFill>
-              <a:srgbClr val="D69A2D"/>
-            </a:solidFill>
-            <a:prstDash val="solid"/>
-          </a:ln>
-        </p:spPr>
-      </p:sp>
-      <p:sp>
-        <p:nvSpPr>
-          <p:cNvPr id="17" name="Shape 15"/>
-          <p:cNvSpPr/>
-          <p:nvPr/>
-        </p:nvSpPr>
-        <p:spPr>
-          <a:xfrm>
-            <a:off x="9454896" y="3319272"/>
-            <a:ext cx="256032" cy="566928"/>
-          </a:xfrm>
-          <a:prstGeom prst="rect">
-            <a:avLst/>
-          </a:prstGeom>
-          <a:solidFill>
-            <a:srgbClr val="6A4CA3"/>
-          </a:solidFill>
-          <a:ln w="12700">
-            <a:solidFill>
-              <a:srgbClr val="6A4CA3"/>
-            </a:solidFill>
-            <a:prstDash val="solid"/>
-          </a:ln>
-        </p:spPr>
-      </p:sp>
-      <p:sp>
-        <p:nvSpPr>
-          <p:cNvPr id="18" name="Shape 16"/>
-          <p:cNvSpPr/>
-          <p:nvPr/>
-        </p:nvSpPr>
-        <p:spPr>
-          <a:xfrm>
-            <a:off x="8019288" y="3886200"/>
-            <a:ext cx="2706624" cy="0"/>
-          </a:xfrm>
-          <a:prstGeom prst="line">
-            <a:avLst/>
-          </a:prstGeom>
-          <a:noFill/>
-          <a:ln w="15240">
-            <a:solidFill>
-              <a:srgbClr val="003A63"/>
-            </a:solidFill>
-            <a:prstDash val="solid"/>
-          </a:ln>
-        </p:spPr>
-      </p:sp>
-      <p:sp>
-        <p:nvSpPr>
-          <p:cNvPr id="19" name="Text 17"/>
-          <p:cNvSpPr/>
-          <p:nvPr/>
-        </p:nvSpPr>
-        <p:spPr>
-          <a:xfrm>
-            <a:off x="7863840" y="3017520"/>
-            <a:ext cx="3017520" cy="201168"/>
-          </a:xfrm>
-          <a:prstGeom prst="rect">
-            <a:avLst/>
-          </a:prstGeom>
-          <a:noFill/>
-          <a:ln/>
-        </p:spPr>
-        <p:txBody>
-          <a:bodyPr wrap="square" lIns="0" tIns="0" rIns="0" bIns="0" rtlCol="0" anchor="ctr"/>
-          <a:lstStyle/>
-          <a:p>
-            <a:pPr algn="ctr" indent="0" marL="0">
-              <a:buNone/>
-            </a:pPr>
-            <a:r>
-              <a:rPr lang="en-US" sz="1050" b="1" dirty="0">
-                <a:solidFill>
-                  <a:srgbClr val="003A63"/>
-                </a:solidFill>
-                <a:latin typeface="Aptos" pitchFamily="34" charset="0"/>
-                <a:ea typeface="Aptos" pitchFamily="34" charset="-122"/>
-                <a:cs typeface="Aptos" pitchFamily="34" charset="-120"/>
-              </a:rPr>
-              <a:t>Measure and monitor</a:t>
-            </a:r>
-            <a:endParaRPr lang="en-US" sz="1050" dirty="0"/>
-          </a:p>
-        </p:txBody>
-      </p:sp>
-      <p:sp>
-        <p:nvSpPr>
-          <p:cNvPr id="20" name="Shape 18"/>
           <p:cNvSpPr/>
           <p:nvPr/>
         </p:nvSpPr>
@@ -14544,7 +13487,7 @@
       </p:sp>
       <p:sp>
         <p:nvSpPr>
-          <p:cNvPr id="21" name="Text 19"/>
+          <p:cNvPr id="17" name="Text 15"/>
           <p:cNvSpPr/>
           <p:nvPr/>
         </p:nvSpPr>
@@ -14583,7 +13526,7 @@
       </p:sp>
       <p:sp>
         <p:nvSpPr>
-          <p:cNvPr id="22" name="Text 20"/>
+          <p:cNvPr id="18" name="Text 16"/>
           <p:cNvSpPr/>
           <p:nvPr/>
         </p:nvSpPr>
@@ -15091,13 +14034,11 @@
             </a:avLst>
           </a:prstGeom>
           <a:solidFill>
-            <a:srgbClr val="FFFFFF">
-              <a:alpha val="88000"/>
-            </a:srgbClr>
+            <a:srgbClr val="FFFFFF"/>
           </a:solidFill>
           <a:ln w="12700">
             <a:solidFill>
-              <a:srgbClr val="D6E8F2"/>
+              <a:srgbClr val="B9D7E6"/>
             </a:solidFill>
             <a:prstDash val="solid"/>
           </a:ln>
@@ -15105,169 +14046,112 @@
       </p:sp>
       <p:sp>
         <p:nvSpPr>
-          <p:cNvPr id="14" name="Shape 12"/>
-          <p:cNvSpPr/>
-          <p:nvPr/>
-        </p:nvSpPr>
-        <p:spPr>
-          <a:xfrm>
-            <a:off x="8138160" y="3474720"/>
-            <a:ext cx="256032" cy="411480"/>
-          </a:xfrm>
-          <a:prstGeom prst="rect">
-            <a:avLst/>
-          </a:prstGeom>
-          <a:solidFill>
-            <a:srgbClr val="0068B7"/>
-          </a:solidFill>
-          <a:ln w="12700">
-            <a:solidFill>
-              <a:srgbClr val="0068B7"/>
-            </a:solidFill>
-            <a:prstDash val="solid"/>
-          </a:ln>
-        </p:spPr>
-      </p:sp>
-      <p:sp>
-        <p:nvSpPr>
-          <p:cNvPr id="15" name="Shape 13"/>
-          <p:cNvSpPr/>
-          <p:nvPr/>
-        </p:nvSpPr>
-        <p:spPr>
-          <a:xfrm>
-            <a:off x="8577072" y="3172968"/>
-            <a:ext cx="256032" cy="713232"/>
-          </a:xfrm>
-          <a:prstGeom prst="rect">
-            <a:avLst/>
-          </a:prstGeom>
-          <a:solidFill>
-            <a:srgbClr val="2F8A28"/>
-          </a:solidFill>
-          <a:ln w="12700">
-            <a:solidFill>
-              <a:srgbClr val="2F8A28"/>
-            </a:solidFill>
-            <a:prstDash val="solid"/>
-          </a:ln>
-        </p:spPr>
+          <p:cNvPr id="14" name="Text 12"/>
+          <p:cNvSpPr/>
+          <p:nvPr/>
+        </p:nvSpPr>
+        <p:spPr>
+          <a:xfrm>
+            <a:off x="7799832" y="2935224"/>
+            <a:ext cx="3145536" cy="256032"/>
+          </a:xfrm>
+          <a:prstGeom prst="rect">
+            <a:avLst/>
+          </a:prstGeom>
+          <a:noFill/>
+          <a:ln/>
+        </p:spPr>
+        <p:txBody>
+          <a:bodyPr wrap="square" lIns="0" tIns="0" rIns="0" bIns="0" rtlCol="0" anchor="ctr"/>
+          <a:lstStyle/>
+          <a:p>
+            <a:pPr indent="0" marL="0">
+              <a:buNone/>
+            </a:pPr>
+            <a:r>
+              <a:rPr lang="en-US" sz="1300" b="1" dirty="0">
+                <a:solidFill>
+                  <a:srgbClr val="0068B7"/>
+                </a:solidFill>
+                <a:latin typeface="Aptos" pitchFamily="34" charset="0"/>
+                <a:ea typeface="Aptos" pitchFamily="34" charset="-122"/>
+                <a:cs typeface="Aptos" pitchFamily="34" charset="-120"/>
+              </a:rPr>
+              <a:t>Concept checkpoints</a:t>
+            </a:r>
+            <a:endParaRPr lang="en-US" sz="1300" dirty="0"/>
+          </a:p>
+        </p:txBody>
+      </p:sp>
+      <p:sp>
+        <p:nvSpPr>
+          <p:cNvPr id="15" name="Text 13"/>
+          <p:cNvSpPr/>
+          <p:nvPr/>
+        </p:nvSpPr>
+        <p:spPr>
+          <a:xfrm>
+            <a:off x="7818120" y="3300984"/>
+            <a:ext cx="3090672" cy="877824"/>
+          </a:xfrm>
+          <a:prstGeom prst="rect">
+            <a:avLst/>
+          </a:prstGeom>
+          <a:noFill/>
+          <a:ln/>
+        </p:spPr>
+        <p:txBody>
+          <a:bodyPr wrap="square" lIns="254" tIns="254" rIns="254" bIns="254" rtlCol="0" anchor="t">
+            <a:normAutofit/>
+          </a:bodyPr>
+          <a:lstStyle/>
+          <a:p>
+            <a:r>
+              <a:rPr lang="en-US" sz="1380" dirty="0">
+                <a:solidFill>
+                  <a:srgbClr val="17364A"/>
+                </a:solidFill>
+                <a:latin typeface="Aptos" pitchFamily="34" charset="0"/>
+                <a:ea typeface="Aptos" pitchFamily="34" charset="-122"/>
+                <a:cs typeface="Aptos" pitchFamily="34" charset="-120"/>
+              </a:rPr>
+              <a:t>Public health staff often need to communicate AI or model results to leaders, partners,.</a:t>
+            </a:r>
+            <a:endParaRPr lang="en-US" sz="1380" dirty="0"/>
+          </a:p>
+          <a:p>
+            <a:r>
+              <a:rPr lang="en-US" sz="1380" dirty="0">
+                <a:solidFill>
+                  <a:srgbClr val="17364A"/>
+                </a:solidFill>
+                <a:latin typeface="Aptos" pitchFamily="34" charset="0"/>
+                <a:ea typeface="Aptos" pitchFamily="34" charset="-122"/>
+                <a:cs typeface="Aptos" pitchFamily="34" charset="-120"/>
+              </a:rPr>
+              <a:t>This module teaches learners how to explain model outputs, uncertainty, limitations, and.</a:t>
+            </a:r>
+            <a:endParaRPr lang="en-US" sz="1380" dirty="0"/>
+          </a:p>
+          <a:p>
+            <a:r>
+              <a:rPr lang="en-US" sz="1380" dirty="0">
+                <a:solidFill>
+                  <a:srgbClr val="17364A"/>
+                </a:solidFill>
+                <a:latin typeface="Aptos" pitchFamily="34" charset="0"/>
+                <a:ea typeface="Aptos" pitchFamily="34" charset="-122"/>
+                <a:cs typeface="Aptos" pitchFamily="34" charset="-120"/>
+              </a:rPr>
+              <a:t>Learners translate metrics, confidence, caveats, and validation findings into language.</a:t>
+            </a:r>
+            <a:endParaRPr lang="en-US" sz="1380" dirty="0"/>
+          </a:p>
+        </p:txBody>
       </p:sp>
       <p:sp>
         <p:nvSpPr>
           <p:cNvPr id="16" name="Shape 14"/>
-          <p:cNvSpPr/>
-          <p:nvPr/>
-        </p:nvSpPr>
-        <p:spPr>
-          <a:xfrm>
-            <a:off x="9015984" y="2880360"/>
-            <a:ext cx="256032" cy="1005840"/>
-          </a:xfrm>
-          <a:prstGeom prst="rect">
-            <a:avLst/>
-          </a:prstGeom>
-          <a:solidFill>
-            <a:srgbClr val="D69A2D"/>
-          </a:solidFill>
-          <a:ln w="12700">
-            <a:solidFill>
-              <a:srgbClr val="D69A2D"/>
-            </a:solidFill>
-            <a:prstDash val="solid"/>
-          </a:ln>
-        </p:spPr>
-      </p:sp>
-      <p:sp>
-        <p:nvSpPr>
-          <p:cNvPr id="17" name="Shape 15"/>
-          <p:cNvSpPr/>
-          <p:nvPr/>
-        </p:nvSpPr>
-        <p:spPr>
-          <a:xfrm>
-            <a:off x="9454896" y="3319272"/>
-            <a:ext cx="256032" cy="566928"/>
-          </a:xfrm>
-          <a:prstGeom prst="rect">
-            <a:avLst/>
-          </a:prstGeom>
-          <a:solidFill>
-            <a:srgbClr val="6A4CA3"/>
-          </a:solidFill>
-          <a:ln w="12700">
-            <a:solidFill>
-              <a:srgbClr val="6A4CA3"/>
-            </a:solidFill>
-            <a:prstDash val="solid"/>
-          </a:ln>
-        </p:spPr>
-      </p:sp>
-      <p:sp>
-        <p:nvSpPr>
-          <p:cNvPr id="18" name="Shape 16"/>
-          <p:cNvSpPr/>
-          <p:nvPr/>
-        </p:nvSpPr>
-        <p:spPr>
-          <a:xfrm>
-            <a:off x="8019288" y="3886200"/>
-            <a:ext cx="2706624" cy="0"/>
-          </a:xfrm>
-          <a:prstGeom prst="line">
-            <a:avLst/>
-          </a:prstGeom>
-          <a:noFill/>
-          <a:ln w="15240">
-            <a:solidFill>
-              <a:srgbClr val="003A63"/>
-            </a:solidFill>
-            <a:prstDash val="solid"/>
-          </a:ln>
-        </p:spPr>
-      </p:sp>
-      <p:sp>
-        <p:nvSpPr>
-          <p:cNvPr id="19" name="Text 17"/>
-          <p:cNvSpPr/>
-          <p:nvPr/>
-        </p:nvSpPr>
-        <p:spPr>
-          <a:xfrm>
-            <a:off x="7863840" y="3017520"/>
-            <a:ext cx="3017520" cy="201168"/>
-          </a:xfrm>
-          <a:prstGeom prst="rect">
-            <a:avLst/>
-          </a:prstGeom>
-          <a:noFill/>
-          <a:ln/>
-        </p:spPr>
-        <p:txBody>
-          <a:bodyPr wrap="square" lIns="0" tIns="0" rIns="0" bIns="0" rtlCol="0" anchor="ctr"/>
-          <a:lstStyle/>
-          <a:p>
-            <a:pPr algn="ctr" indent="0" marL="0">
-              <a:buNone/>
-            </a:pPr>
-            <a:r>
-              <a:rPr lang="en-US" sz="1050" b="1" dirty="0">
-                <a:solidFill>
-                  <a:srgbClr val="003A63"/>
-                </a:solidFill>
-                <a:latin typeface="Aptos" pitchFamily="34" charset="0"/>
-                <a:ea typeface="Aptos" pitchFamily="34" charset="-122"/>
-                <a:cs typeface="Aptos" pitchFamily="34" charset="-120"/>
-              </a:rPr>
-              <a:t>Measure and monitor</a:t>
-            </a:r>
-            <a:endParaRPr lang="en-US" sz="1050" dirty="0"/>
-          </a:p>
-        </p:txBody>
-      </p:sp>
-      <p:sp>
-        <p:nvSpPr>
-          <p:cNvPr id="20" name="Shape 18"/>
           <p:cNvSpPr/>
           <p:nvPr/>
         </p:nvSpPr>
@@ -15294,7 +14178,7 @@
       </p:sp>
       <p:sp>
         <p:nvSpPr>
-          <p:cNvPr id="21" name="Text 19"/>
+          <p:cNvPr id="17" name="Text 15"/>
           <p:cNvSpPr/>
           <p:nvPr/>
         </p:nvSpPr>
@@ -15333,7 +14217,7 @@
       </p:sp>
       <p:sp>
         <p:nvSpPr>
-          <p:cNvPr id="22" name="Text 20"/>
+          <p:cNvPr id="18" name="Text 16"/>
           <p:cNvSpPr/>
           <p:nvPr/>
         </p:nvSpPr>
@@ -15841,13 +14725,11 @@
             </a:avLst>
           </a:prstGeom>
           <a:solidFill>
-            <a:srgbClr val="FFFFFF">
-              <a:alpha val="88000"/>
-            </a:srgbClr>
+            <a:srgbClr val="FFFFFF"/>
           </a:solidFill>
           <a:ln w="12700">
             <a:solidFill>
-              <a:srgbClr val="D6E8F2"/>
+              <a:srgbClr val="B9D7E6"/>
             </a:solidFill>
             <a:prstDash val="solid"/>
           </a:ln>
@@ -15855,169 +14737,98 @@
       </p:sp>
       <p:sp>
         <p:nvSpPr>
-          <p:cNvPr id="14" name="Shape 12"/>
-          <p:cNvSpPr/>
-          <p:nvPr/>
-        </p:nvSpPr>
-        <p:spPr>
-          <a:xfrm>
-            <a:off x="8138160" y="3474720"/>
-            <a:ext cx="256032" cy="411480"/>
-          </a:xfrm>
-          <a:prstGeom prst="rect">
-            <a:avLst/>
-          </a:prstGeom>
-          <a:solidFill>
-            <a:srgbClr val="0068B7"/>
-          </a:solidFill>
-          <a:ln w="12700">
-            <a:solidFill>
-              <a:srgbClr val="0068B7"/>
-            </a:solidFill>
-            <a:prstDash val="solid"/>
-          </a:ln>
-        </p:spPr>
-      </p:sp>
-      <p:sp>
-        <p:nvSpPr>
-          <p:cNvPr id="15" name="Shape 13"/>
-          <p:cNvSpPr/>
-          <p:nvPr/>
-        </p:nvSpPr>
-        <p:spPr>
-          <a:xfrm>
-            <a:off x="8577072" y="3172968"/>
-            <a:ext cx="256032" cy="713232"/>
-          </a:xfrm>
-          <a:prstGeom prst="rect">
-            <a:avLst/>
-          </a:prstGeom>
-          <a:solidFill>
-            <a:srgbClr val="2F8A28"/>
-          </a:solidFill>
-          <a:ln w="12700">
-            <a:solidFill>
-              <a:srgbClr val="2F8A28"/>
-            </a:solidFill>
-            <a:prstDash val="solid"/>
-          </a:ln>
-        </p:spPr>
+          <p:cNvPr id="14" name="Text 12"/>
+          <p:cNvSpPr/>
+          <p:nvPr/>
+        </p:nvSpPr>
+        <p:spPr>
+          <a:xfrm>
+            <a:off x="7799832" y="2935224"/>
+            <a:ext cx="3145536" cy="256032"/>
+          </a:xfrm>
+          <a:prstGeom prst="rect">
+            <a:avLst/>
+          </a:prstGeom>
+          <a:noFill/>
+          <a:ln/>
+        </p:spPr>
+        <p:txBody>
+          <a:bodyPr wrap="square" lIns="0" tIns="0" rIns="0" bIns="0" rtlCol="0" anchor="ctr"/>
+          <a:lstStyle/>
+          <a:p>
+            <a:pPr indent="0" marL="0">
+              <a:buNone/>
+            </a:pPr>
+            <a:r>
+              <a:rPr lang="en-US" sz="1300" b="1" dirty="0">
+                <a:solidFill>
+                  <a:srgbClr val="0068B7"/>
+                </a:solidFill>
+                <a:latin typeface="Aptos" pitchFamily="34" charset="0"/>
+                <a:ea typeface="Aptos" pitchFamily="34" charset="-122"/>
+                <a:cs typeface="Aptos" pitchFamily="34" charset="-120"/>
+              </a:rPr>
+              <a:t>Concept checkpoints</a:t>
+            </a:r>
+            <a:endParaRPr lang="en-US" sz="1300" dirty="0"/>
+          </a:p>
+        </p:txBody>
+      </p:sp>
+      <p:sp>
+        <p:nvSpPr>
+          <p:cNvPr id="15" name="Text 13"/>
+          <p:cNvSpPr/>
+          <p:nvPr/>
+        </p:nvSpPr>
+        <p:spPr>
+          <a:xfrm>
+            <a:off x="7818120" y="3300984"/>
+            <a:ext cx="3090672" cy="877824"/>
+          </a:xfrm>
+          <a:prstGeom prst="rect">
+            <a:avLst/>
+          </a:prstGeom>
+          <a:noFill/>
+          <a:ln/>
+        </p:spPr>
+        <p:txBody>
+          <a:bodyPr wrap="square" lIns="254" tIns="254" rIns="254" bIns="254" rtlCol="0" anchor="t">
+            <a:normAutofit/>
+          </a:bodyPr>
+          <a:lstStyle/>
+          <a:p>
+            <a:r>
+              <a:rPr lang="en-US" sz="1380" dirty="0">
+                <a:solidFill>
+                  <a:srgbClr val="17364A"/>
+                </a:solidFill>
+                <a:latin typeface="Aptos" pitchFamily="34" charset="0"/>
+                <a:ea typeface="Aptos" pitchFamily="34" charset="-122"/>
+                <a:cs typeface="Aptos" pitchFamily="34" charset="-120"/>
+              </a:rPr>
+              <a:t>Calibration: How closely predicted probabilities match observed outcomes.</a:t>
+            </a:r>
+            <a:endParaRPr lang="en-US" sz="1380" dirty="0"/>
+          </a:p>
+          <a:p>
+            <a:r>
+              <a:rPr lang="en-US" sz="1380" dirty="0">
+                <a:solidFill>
+                  <a:srgbClr val="17364A"/>
+                </a:solidFill>
+                <a:latin typeface="Aptos" pitchFamily="34" charset="0"/>
+                <a:ea typeface="Aptos" pitchFamily="34" charset="-122"/>
+                <a:cs typeface="Aptos" pitchFamily="34" charset="-120"/>
+              </a:rPr>
+              <a:t>Caveat: A clear statement of limitation, condition, or caution.</a:t>
+            </a:r>
+            <a:endParaRPr lang="en-US" sz="1380" dirty="0"/>
+          </a:p>
+        </p:txBody>
       </p:sp>
       <p:sp>
         <p:nvSpPr>
           <p:cNvPr id="16" name="Shape 14"/>
-          <p:cNvSpPr/>
-          <p:nvPr/>
-        </p:nvSpPr>
-        <p:spPr>
-          <a:xfrm>
-            <a:off x="9015984" y="2880360"/>
-            <a:ext cx="256032" cy="1005840"/>
-          </a:xfrm>
-          <a:prstGeom prst="rect">
-            <a:avLst/>
-          </a:prstGeom>
-          <a:solidFill>
-            <a:srgbClr val="D69A2D"/>
-          </a:solidFill>
-          <a:ln w="12700">
-            <a:solidFill>
-              <a:srgbClr val="D69A2D"/>
-            </a:solidFill>
-            <a:prstDash val="solid"/>
-          </a:ln>
-        </p:spPr>
-      </p:sp>
-      <p:sp>
-        <p:nvSpPr>
-          <p:cNvPr id="17" name="Shape 15"/>
-          <p:cNvSpPr/>
-          <p:nvPr/>
-        </p:nvSpPr>
-        <p:spPr>
-          <a:xfrm>
-            <a:off x="9454896" y="3319272"/>
-            <a:ext cx="256032" cy="566928"/>
-          </a:xfrm>
-          <a:prstGeom prst="rect">
-            <a:avLst/>
-          </a:prstGeom>
-          <a:solidFill>
-            <a:srgbClr val="6A4CA3"/>
-          </a:solidFill>
-          <a:ln w="12700">
-            <a:solidFill>
-              <a:srgbClr val="6A4CA3"/>
-            </a:solidFill>
-            <a:prstDash val="solid"/>
-          </a:ln>
-        </p:spPr>
-      </p:sp>
-      <p:sp>
-        <p:nvSpPr>
-          <p:cNvPr id="18" name="Shape 16"/>
-          <p:cNvSpPr/>
-          <p:nvPr/>
-        </p:nvSpPr>
-        <p:spPr>
-          <a:xfrm>
-            <a:off x="8019288" y="3886200"/>
-            <a:ext cx="2706624" cy="0"/>
-          </a:xfrm>
-          <a:prstGeom prst="line">
-            <a:avLst/>
-          </a:prstGeom>
-          <a:noFill/>
-          <a:ln w="15240">
-            <a:solidFill>
-              <a:srgbClr val="003A63"/>
-            </a:solidFill>
-            <a:prstDash val="solid"/>
-          </a:ln>
-        </p:spPr>
-      </p:sp>
-      <p:sp>
-        <p:nvSpPr>
-          <p:cNvPr id="19" name="Text 17"/>
-          <p:cNvSpPr/>
-          <p:nvPr/>
-        </p:nvSpPr>
-        <p:spPr>
-          <a:xfrm>
-            <a:off x="7863840" y="3017520"/>
-            <a:ext cx="3017520" cy="201168"/>
-          </a:xfrm>
-          <a:prstGeom prst="rect">
-            <a:avLst/>
-          </a:prstGeom>
-          <a:noFill/>
-          <a:ln/>
-        </p:spPr>
-        <p:txBody>
-          <a:bodyPr wrap="square" lIns="0" tIns="0" rIns="0" bIns="0" rtlCol="0" anchor="ctr"/>
-          <a:lstStyle/>
-          <a:p>
-            <a:pPr algn="ctr" indent="0" marL="0">
-              <a:buNone/>
-            </a:pPr>
-            <a:r>
-              <a:rPr lang="en-US" sz="1050" b="1" dirty="0">
-                <a:solidFill>
-                  <a:srgbClr val="003A63"/>
-                </a:solidFill>
-                <a:latin typeface="Aptos" pitchFamily="34" charset="0"/>
-                <a:ea typeface="Aptos" pitchFamily="34" charset="-122"/>
-                <a:cs typeface="Aptos" pitchFamily="34" charset="-120"/>
-              </a:rPr>
-              <a:t>Measure and monitor</a:t>
-            </a:r>
-            <a:endParaRPr lang="en-US" sz="1050" dirty="0"/>
-          </a:p>
-        </p:txBody>
-      </p:sp>
-      <p:sp>
-        <p:nvSpPr>
-          <p:cNvPr id="20" name="Shape 18"/>
           <p:cNvSpPr/>
           <p:nvPr/>
         </p:nvSpPr>
@@ -16044,7 +14855,7 @@
       </p:sp>
       <p:sp>
         <p:nvSpPr>
-          <p:cNvPr id="21" name="Text 19"/>
+          <p:cNvPr id="17" name="Text 15"/>
           <p:cNvSpPr/>
           <p:nvPr/>
         </p:nvSpPr>
@@ -16083,7 +14894,7 @@
       </p:sp>
       <p:sp>
         <p:nvSpPr>
-          <p:cNvPr id="22" name="Text 20"/>
+          <p:cNvPr id="18" name="Text 16"/>
           <p:cNvSpPr/>
           <p:nvPr/>
         </p:nvSpPr>
@@ -16591,13 +15402,11 @@
             </a:avLst>
           </a:prstGeom>
           <a:solidFill>
-            <a:srgbClr val="FFFFFF">
-              <a:alpha val="88000"/>
-            </a:srgbClr>
+            <a:srgbClr val="FFFFFF"/>
           </a:solidFill>
           <a:ln w="12700">
             <a:solidFill>
-              <a:srgbClr val="D6E8F2"/>
+              <a:srgbClr val="B9D7E6"/>
             </a:solidFill>
             <a:prstDash val="solid"/>
           </a:ln>
@@ -16605,169 +15414,112 @@
       </p:sp>
       <p:sp>
         <p:nvSpPr>
-          <p:cNvPr id="14" name="Shape 12"/>
-          <p:cNvSpPr/>
-          <p:nvPr/>
-        </p:nvSpPr>
-        <p:spPr>
-          <a:xfrm>
-            <a:off x="8138160" y="3474720"/>
-            <a:ext cx="256032" cy="411480"/>
-          </a:xfrm>
-          <a:prstGeom prst="rect">
-            <a:avLst/>
-          </a:prstGeom>
-          <a:solidFill>
-            <a:srgbClr val="0068B7"/>
-          </a:solidFill>
-          <a:ln w="12700">
-            <a:solidFill>
-              <a:srgbClr val="0068B7"/>
-            </a:solidFill>
-            <a:prstDash val="solid"/>
-          </a:ln>
-        </p:spPr>
-      </p:sp>
-      <p:sp>
-        <p:nvSpPr>
-          <p:cNvPr id="15" name="Shape 13"/>
-          <p:cNvSpPr/>
-          <p:nvPr/>
-        </p:nvSpPr>
-        <p:spPr>
-          <a:xfrm>
-            <a:off x="8577072" y="3172968"/>
-            <a:ext cx="256032" cy="713232"/>
-          </a:xfrm>
-          <a:prstGeom prst="rect">
-            <a:avLst/>
-          </a:prstGeom>
-          <a:solidFill>
-            <a:srgbClr val="2F8A28"/>
-          </a:solidFill>
-          <a:ln w="12700">
-            <a:solidFill>
-              <a:srgbClr val="2F8A28"/>
-            </a:solidFill>
-            <a:prstDash val="solid"/>
-          </a:ln>
-        </p:spPr>
+          <p:cNvPr id="14" name="Text 12"/>
+          <p:cNvSpPr/>
+          <p:nvPr/>
+        </p:nvSpPr>
+        <p:spPr>
+          <a:xfrm>
+            <a:off x="7799832" y="2935224"/>
+            <a:ext cx="3145536" cy="256032"/>
+          </a:xfrm>
+          <a:prstGeom prst="rect">
+            <a:avLst/>
+          </a:prstGeom>
+          <a:noFill/>
+          <a:ln/>
+        </p:spPr>
+        <p:txBody>
+          <a:bodyPr wrap="square" lIns="0" tIns="0" rIns="0" bIns="0" rtlCol="0" anchor="ctr"/>
+          <a:lstStyle/>
+          <a:p>
+            <a:pPr indent="0" marL="0">
+              <a:buNone/>
+            </a:pPr>
+            <a:r>
+              <a:rPr lang="en-US" sz="1300" b="1" dirty="0">
+                <a:solidFill>
+                  <a:srgbClr val="0068B7"/>
+                </a:solidFill>
+                <a:latin typeface="Aptos" pitchFamily="34" charset="0"/>
+                <a:ea typeface="Aptos" pitchFamily="34" charset="-122"/>
+                <a:cs typeface="Aptos" pitchFamily="34" charset="-120"/>
+              </a:rPr>
+              <a:t>Concept checkpoints</a:t>
+            </a:r>
+            <a:endParaRPr lang="en-US" sz="1300" dirty="0"/>
+          </a:p>
+        </p:txBody>
+      </p:sp>
+      <p:sp>
+        <p:nvSpPr>
+          <p:cNvPr id="15" name="Text 13"/>
+          <p:cNvSpPr/>
+          <p:nvPr/>
+        </p:nvSpPr>
+        <p:spPr>
+          <a:xfrm>
+            <a:off x="7818120" y="3300984"/>
+            <a:ext cx="3090672" cy="877824"/>
+          </a:xfrm>
+          <a:prstGeom prst="rect">
+            <a:avLst/>
+          </a:prstGeom>
+          <a:noFill/>
+          <a:ln/>
+        </p:spPr>
+        <p:txBody>
+          <a:bodyPr wrap="square" lIns="254" tIns="254" rIns="254" bIns="254" rtlCol="0" anchor="t">
+            <a:normAutofit/>
+          </a:bodyPr>
+          <a:lstStyle/>
+          <a:p>
+            <a:r>
+              <a:rPr lang="en-US" sz="1380" dirty="0">
+                <a:solidFill>
+                  <a:srgbClr val="17364A"/>
+                </a:solidFill>
+                <a:latin typeface="Aptos" pitchFamily="34" charset="0"/>
+                <a:ea typeface="Aptos" pitchFamily="34" charset="-122"/>
+                <a:cs typeface="Aptos" pitchFamily="34" charset="-120"/>
+              </a:rPr>
+              <a:t>A forecast may affect staffing, a risk score may affect outreach, and a hotspot map may.</a:t>
+            </a:r>
+            <a:endParaRPr lang="en-US" sz="1380" dirty="0"/>
+          </a:p>
+          <a:p>
+            <a:r>
+              <a:rPr lang="en-US" sz="1380" dirty="0">
+                <a:solidFill>
+                  <a:srgbClr val="17364A"/>
+                </a:solidFill>
+                <a:latin typeface="Aptos" pitchFamily="34" charset="0"/>
+                <a:ea typeface="Aptos" pitchFamily="34" charset="-122"/>
+                <a:cs typeface="Aptos" pitchFamily="34" charset="-120"/>
+              </a:rPr>
+              <a:t>If uncertainty is not explained clearly, decision-makers may treat estimates as facts or.</a:t>
+            </a:r>
+            <a:endParaRPr lang="en-US" sz="1380" dirty="0"/>
+          </a:p>
+          <a:p>
+            <a:r>
+              <a:rPr lang="en-US" sz="1380" dirty="0">
+                <a:solidFill>
+                  <a:srgbClr val="17364A"/>
+                </a:solidFill>
+                <a:latin typeface="Aptos" pitchFamily="34" charset="0"/>
+                <a:ea typeface="Aptos" pitchFamily="34" charset="-122"/>
+                <a:cs typeface="Aptos" pitchFamily="34" charset="-120"/>
+              </a:rPr>
+              <a:t>Public health communication must balance clarity and caution.</a:t>
+            </a:r>
+            <a:endParaRPr lang="en-US" sz="1380" dirty="0"/>
+          </a:p>
+        </p:txBody>
       </p:sp>
       <p:sp>
         <p:nvSpPr>
           <p:cNvPr id="16" name="Shape 14"/>
-          <p:cNvSpPr/>
-          <p:nvPr/>
-        </p:nvSpPr>
-        <p:spPr>
-          <a:xfrm>
-            <a:off x="9015984" y="2880360"/>
-            <a:ext cx="256032" cy="1005840"/>
-          </a:xfrm>
-          <a:prstGeom prst="rect">
-            <a:avLst/>
-          </a:prstGeom>
-          <a:solidFill>
-            <a:srgbClr val="D69A2D"/>
-          </a:solidFill>
-          <a:ln w="12700">
-            <a:solidFill>
-              <a:srgbClr val="D69A2D"/>
-            </a:solidFill>
-            <a:prstDash val="solid"/>
-          </a:ln>
-        </p:spPr>
-      </p:sp>
-      <p:sp>
-        <p:nvSpPr>
-          <p:cNvPr id="17" name="Shape 15"/>
-          <p:cNvSpPr/>
-          <p:nvPr/>
-        </p:nvSpPr>
-        <p:spPr>
-          <a:xfrm>
-            <a:off x="9454896" y="3319272"/>
-            <a:ext cx="256032" cy="566928"/>
-          </a:xfrm>
-          <a:prstGeom prst="rect">
-            <a:avLst/>
-          </a:prstGeom>
-          <a:solidFill>
-            <a:srgbClr val="6A4CA3"/>
-          </a:solidFill>
-          <a:ln w="12700">
-            <a:solidFill>
-              <a:srgbClr val="6A4CA3"/>
-            </a:solidFill>
-            <a:prstDash val="solid"/>
-          </a:ln>
-        </p:spPr>
-      </p:sp>
-      <p:sp>
-        <p:nvSpPr>
-          <p:cNvPr id="18" name="Shape 16"/>
-          <p:cNvSpPr/>
-          <p:nvPr/>
-        </p:nvSpPr>
-        <p:spPr>
-          <a:xfrm>
-            <a:off x="8019288" y="3886200"/>
-            <a:ext cx="2706624" cy="0"/>
-          </a:xfrm>
-          <a:prstGeom prst="line">
-            <a:avLst/>
-          </a:prstGeom>
-          <a:noFill/>
-          <a:ln w="15240">
-            <a:solidFill>
-              <a:srgbClr val="003A63"/>
-            </a:solidFill>
-            <a:prstDash val="solid"/>
-          </a:ln>
-        </p:spPr>
-      </p:sp>
-      <p:sp>
-        <p:nvSpPr>
-          <p:cNvPr id="19" name="Text 17"/>
-          <p:cNvSpPr/>
-          <p:nvPr/>
-        </p:nvSpPr>
-        <p:spPr>
-          <a:xfrm>
-            <a:off x="7863840" y="3017520"/>
-            <a:ext cx="3017520" cy="201168"/>
-          </a:xfrm>
-          <a:prstGeom prst="rect">
-            <a:avLst/>
-          </a:prstGeom>
-          <a:noFill/>
-          <a:ln/>
-        </p:spPr>
-        <p:txBody>
-          <a:bodyPr wrap="square" lIns="0" tIns="0" rIns="0" bIns="0" rtlCol="0" anchor="ctr"/>
-          <a:lstStyle/>
-          <a:p>
-            <a:pPr algn="ctr" indent="0" marL="0">
-              <a:buNone/>
-            </a:pPr>
-            <a:r>
-              <a:rPr lang="en-US" sz="1050" b="1" dirty="0">
-                <a:solidFill>
-                  <a:srgbClr val="003A63"/>
-                </a:solidFill>
-                <a:latin typeface="Aptos" pitchFamily="34" charset="0"/>
-                <a:ea typeface="Aptos" pitchFamily="34" charset="-122"/>
-                <a:cs typeface="Aptos" pitchFamily="34" charset="-120"/>
-              </a:rPr>
-              <a:t>Measure and monitor</a:t>
-            </a:r>
-            <a:endParaRPr lang="en-US" sz="1050" dirty="0"/>
-          </a:p>
-        </p:txBody>
-      </p:sp>
-      <p:sp>
-        <p:nvSpPr>
-          <p:cNvPr id="20" name="Shape 18"/>
           <p:cNvSpPr/>
           <p:nvPr/>
         </p:nvSpPr>
@@ -16794,7 +15546,7 @@
       </p:sp>
       <p:sp>
         <p:nvSpPr>
-          <p:cNvPr id="21" name="Text 19"/>
+          <p:cNvPr id="17" name="Text 15"/>
           <p:cNvSpPr/>
           <p:nvPr/>
         </p:nvSpPr>
@@ -16833,7 +15585,7 @@
       </p:sp>
       <p:sp>
         <p:nvSpPr>
-          <p:cNvPr id="22" name="Text 20"/>
+          <p:cNvPr id="18" name="Text 16"/>
           <p:cNvSpPr/>
           <p:nvPr/>
         </p:nvSpPr>
@@ -17341,13 +16093,11 @@
             </a:avLst>
           </a:prstGeom>
           <a:solidFill>
-            <a:srgbClr val="FFFFFF">
-              <a:alpha val="88000"/>
-            </a:srgbClr>
+            <a:srgbClr val="FFFFFF"/>
           </a:solidFill>
           <a:ln w="12700">
             <a:solidFill>
-              <a:srgbClr val="D6E8F2"/>
+              <a:srgbClr val="B9D7E6"/>
             </a:solidFill>
             <a:prstDash val="solid"/>
           </a:ln>
@@ -17355,169 +16105,112 @@
       </p:sp>
       <p:sp>
         <p:nvSpPr>
-          <p:cNvPr id="14" name="Shape 12"/>
-          <p:cNvSpPr/>
-          <p:nvPr/>
-        </p:nvSpPr>
-        <p:spPr>
-          <a:xfrm>
-            <a:off x="8138160" y="3474720"/>
-            <a:ext cx="256032" cy="411480"/>
-          </a:xfrm>
-          <a:prstGeom prst="rect">
-            <a:avLst/>
-          </a:prstGeom>
-          <a:solidFill>
-            <a:srgbClr val="0068B7"/>
-          </a:solidFill>
-          <a:ln w="12700">
-            <a:solidFill>
-              <a:srgbClr val="0068B7"/>
-            </a:solidFill>
-            <a:prstDash val="solid"/>
-          </a:ln>
-        </p:spPr>
-      </p:sp>
-      <p:sp>
-        <p:nvSpPr>
-          <p:cNvPr id="15" name="Shape 13"/>
-          <p:cNvSpPr/>
-          <p:nvPr/>
-        </p:nvSpPr>
-        <p:spPr>
-          <a:xfrm>
-            <a:off x="8577072" y="3172968"/>
-            <a:ext cx="256032" cy="713232"/>
-          </a:xfrm>
-          <a:prstGeom prst="rect">
-            <a:avLst/>
-          </a:prstGeom>
-          <a:solidFill>
-            <a:srgbClr val="2F8A28"/>
-          </a:solidFill>
-          <a:ln w="12700">
-            <a:solidFill>
-              <a:srgbClr val="2F8A28"/>
-            </a:solidFill>
-            <a:prstDash val="solid"/>
-          </a:ln>
-        </p:spPr>
+          <p:cNvPr id="14" name="Text 12"/>
+          <p:cNvSpPr/>
+          <p:nvPr/>
+        </p:nvSpPr>
+        <p:spPr>
+          <a:xfrm>
+            <a:off x="7799832" y="2935224"/>
+            <a:ext cx="3145536" cy="256032"/>
+          </a:xfrm>
+          <a:prstGeom prst="rect">
+            <a:avLst/>
+          </a:prstGeom>
+          <a:noFill/>
+          <a:ln/>
+        </p:spPr>
+        <p:txBody>
+          <a:bodyPr wrap="square" lIns="0" tIns="0" rIns="0" bIns="0" rtlCol="0" anchor="ctr"/>
+          <a:lstStyle/>
+          <a:p>
+            <a:pPr indent="0" marL="0">
+              <a:buNone/>
+            </a:pPr>
+            <a:r>
+              <a:rPr lang="en-US" sz="1300" b="1" dirty="0">
+                <a:solidFill>
+                  <a:srgbClr val="0068B7"/>
+                </a:solidFill>
+                <a:latin typeface="Aptos" pitchFamily="34" charset="0"/>
+                <a:ea typeface="Aptos" pitchFamily="34" charset="-122"/>
+                <a:cs typeface="Aptos" pitchFamily="34" charset="-120"/>
+              </a:rPr>
+              <a:t>Concept checkpoints</a:t>
+            </a:r>
+            <a:endParaRPr lang="en-US" sz="1300" dirty="0"/>
+          </a:p>
+        </p:txBody>
+      </p:sp>
+      <p:sp>
+        <p:nvSpPr>
+          <p:cNvPr id="15" name="Text 13"/>
+          <p:cNvSpPr/>
+          <p:nvPr/>
+        </p:nvSpPr>
+        <p:spPr>
+          <a:xfrm>
+            <a:off x="7818120" y="3300984"/>
+            <a:ext cx="3090672" cy="877824"/>
+          </a:xfrm>
+          <a:prstGeom prst="rect">
+            <a:avLst/>
+          </a:prstGeom>
+          <a:noFill/>
+          <a:ln/>
+        </p:spPr>
+        <p:txBody>
+          <a:bodyPr wrap="square" lIns="254" tIns="254" rIns="254" bIns="254" rtlCol="0" anchor="t">
+            <a:normAutofit/>
+          </a:bodyPr>
+          <a:lstStyle/>
+          <a:p>
+            <a:r>
+              <a:rPr lang="en-US" sz="1380" dirty="0">
+                <a:solidFill>
+                  <a:srgbClr val="17364A"/>
+                </a:solidFill>
+                <a:latin typeface="Aptos" pitchFamily="34" charset="0"/>
+                <a:ea typeface="Aptos" pitchFamily="34" charset="-122"/>
+                <a:cs typeface="Aptos" pitchFamily="34" charset="-120"/>
+              </a:rPr>
+              <a:t>An epidemiology team uses a time-series model to forecast emergency department visits for.</a:t>
+            </a:r>
+            <a:endParaRPr lang="en-US" sz="1380" dirty="0"/>
+          </a:p>
+          <a:p>
+            <a:r>
+              <a:rPr lang="en-US" sz="1380" dirty="0">
+                <a:solidFill>
+                  <a:srgbClr val="17364A"/>
+                </a:solidFill>
+                <a:latin typeface="Aptos" pitchFamily="34" charset="0"/>
+                <a:ea typeface="Aptos" pitchFamily="34" charset="-122"/>
+                <a:cs typeface="Aptos" pitchFamily="34" charset="-120"/>
+              </a:rPr>
+              <a:t>The forecast shows a possible increase over the next two weeks, but the prediction.</a:t>
+            </a:r>
+            <a:endParaRPr lang="en-US" sz="1380" dirty="0"/>
+          </a:p>
+          <a:p>
+            <a:r>
+              <a:rPr lang="en-US" sz="1380" dirty="0">
+                <a:solidFill>
+                  <a:srgbClr val="17364A"/>
+                </a:solidFill>
+                <a:latin typeface="Aptos" pitchFamily="34" charset="0"/>
+                <a:ea typeface="Aptos" pitchFamily="34" charset="-122"/>
+                <a:cs typeface="Aptos" pitchFamily="34" charset="-120"/>
+              </a:rPr>
+              <a:t>A strong communication brief would state that visits may rise, explain the uncertainty,.</a:t>
+            </a:r>
+            <a:endParaRPr lang="en-US" sz="1380" dirty="0"/>
+          </a:p>
+        </p:txBody>
       </p:sp>
       <p:sp>
         <p:nvSpPr>
           <p:cNvPr id="16" name="Shape 14"/>
-          <p:cNvSpPr/>
-          <p:nvPr/>
-        </p:nvSpPr>
-        <p:spPr>
-          <a:xfrm>
-            <a:off x="9015984" y="2880360"/>
-            <a:ext cx="256032" cy="1005840"/>
-          </a:xfrm>
-          <a:prstGeom prst="rect">
-            <a:avLst/>
-          </a:prstGeom>
-          <a:solidFill>
-            <a:srgbClr val="D69A2D"/>
-          </a:solidFill>
-          <a:ln w="12700">
-            <a:solidFill>
-              <a:srgbClr val="D69A2D"/>
-            </a:solidFill>
-            <a:prstDash val="solid"/>
-          </a:ln>
-        </p:spPr>
-      </p:sp>
-      <p:sp>
-        <p:nvSpPr>
-          <p:cNvPr id="17" name="Shape 15"/>
-          <p:cNvSpPr/>
-          <p:nvPr/>
-        </p:nvSpPr>
-        <p:spPr>
-          <a:xfrm>
-            <a:off x="9454896" y="3319272"/>
-            <a:ext cx="256032" cy="566928"/>
-          </a:xfrm>
-          <a:prstGeom prst="rect">
-            <a:avLst/>
-          </a:prstGeom>
-          <a:solidFill>
-            <a:srgbClr val="6A4CA3"/>
-          </a:solidFill>
-          <a:ln w="12700">
-            <a:solidFill>
-              <a:srgbClr val="6A4CA3"/>
-            </a:solidFill>
-            <a:prstDash val="solid"/>
-          </a:ln>
-        </p:spPr>
-      </p:sp>
-      <p:sp>
-        <p:nvSpPr>
-          <p:cNvPr id="18" name="Shape 16"/>
-          <p:cNvSpPr/>
-          <p:nvPr/>
-        </p:nvSpPr>
-        <p:spPr>
-          <a:xfrm>
-            <a:off x="8019288" y="3886200"/>
-            <a:ext cx="2706624" cy="0"/>
-          </a:xfrm>
-          <a:prstGeom prst="line">
-            <a:avLst/>
-          </a:prstGeom>
-          <a:noFill/>
-          <a:ln w="15240">
-            <a:solidFill>
-              <a:srgbClr val="003A63"/>
-            </a:solidFill>
-            <a:prstDash val="solid"/>
-          </a:ln>
-        </p:spPr>
-      </p:sp>
-      <p:sp>
-        <p:nvSpPr>
-          <p:cNvPr id="19" name="Text 17"/>
-          <p:cNvSpPr/>
-          <p:nvPr/>
-        </p:nvSpPr>
-        <p:spPr>
-          <a:xfrm>
-            <a:off x="7863840" y="3017520"/>
-            <a:ext cx="3017520" cy="201168"/>
-          </a:xfrm>
-          <a:prstGeom prst="rect">
-            <a:avLst/>
-          </a:prstGeom>
-          <a:noFill/>
-          <a:ln/>
-        </p:spPr>
-        <p:txBody>
-          <a:bodyPr wrap="square" lIns="0" tIns="0" rIns="0" bIns="0" rtlCol="0" anchor="ctr"/>
-          <a:lstStyle/>
-          <a:p>
-            <a:pPr algn="ctr" indent="0" marL="0">
-              <a:buNone/>
-            </a:pPr>
-            <a:r>
-              <a:rPr lang="en-US" sz="1050" b="1" dirty="0">
-                <a:solidFill>
-                  <a:srgbClr val="003A63"/>
-                </a:solidFill>
-                <a:latin typeface="Aptos" pitchFamily="34" charset="0"/>
-                <a:ea typeface="Aptos" pitchFamily="34" charset="-122"/>
-                <a:cs typeface="Aptos" pitchFamily="34" charset="-120"/>
-              </a:rPr>
-              <a:t>Measure and monitor</a:t>
-            </a:r>
-            <a:endParaRPr lang="en-US" sz="1050" dirty="0"/>
-          </a:p>
-        </p:txBody>
-      </p:sp>
-      <p:sp>
-        <p:nvSpPr>
-          <p:cNvPr id="20" name="Shape 18"/>
           <p:cNvSpPr/>
           <p:nvPr/>
         </p:nvSpPr>
@@ -17544,7 +16237,7 @@
       </p:sp>
       <p:sp>
         <p:nvSpPr>
-          <p:cNvPr id="21" name="Text 19"/>
+          <p:cNvPr id="17" name="Text 15"/>
           <p:cNvSpPr/>
           <p:nvPr/>
         </p:nvSpPr>
@@ -17583,7 +16276,7 @@
       </p:sp>
       <p:sp>
         <p:nvSpPr>
-          <p:cNvPr id="22" name="Text 20"/>
+          <p:cNvPr id="18" name="Text 16"/>
           <p:cNvSpPr/>
           <p:nvPr/>
         </p:nvSpPr>

--- a/downloads/presentations/modules/anl-350.pptx
+++ b/downloads/presentations/modules/anl-350.pptx
@@ -3261,49 +3261,58 @@
           <a:ln/>
         </p:spPr>
         <p:txBody>
-          <a:bodyPr wrap="square" lIns="635" tIns="635" rIns="635" bIns="635" rtlCol="0" anchor="t">
+          <a:bodyPr wrap="square" lIns="1016" tIns="1016" rIns="1016" bIns="1016" rtlCol="0" anchor="t">
             <a:normAutofit/>
           </a:bodyPr>
           <a:lstStyle/>
           <a:p>
+            <a:pPr indent="0" marL="0">
+              <a:buNone/>
+            </a:pPr>
             <a:r>
               <a:rPr lang="en-US" sz="2100" dirty="0">
                 <a:solidFill>
-                  <a:srgbClr val="17364A"/>
-                </a:solidFill>
-                <a:latin typeface="Aptos" pitchFamily="34" charset="0"/>
-                <a:ea typeface="Aptos" pitchFamily="34" charset="-122"/>
-                <a:cs typeface="Aptos" pitchFamily="34" charset="-120"/>
-              </a:rPr>
-              <a:t>Model communication begins with the decision context.</a:t>
+                  <a:srgbClr val="003A63"/>
+                </a:solidFill>
+                <a:latin typeface="Aptos" pitchFamily="34" charset="0"/>
+                <a:ea typeface="Aptos" pitchFamily="34" charset="-122"/>
+                <a:cs typeface="Aptos" pitchFamily="34" charset="-120"/>
+              </a:rPr>
+              <a:t>• Model communication begins with the decision context.</a:t>
             </a:r>
             <a:endParaRPr lang="en-US" sz="2100" dirty="0"/>
           </a:p>
           <a:p>
+            <a:pPr indent="0" marL="0">
+              <a:buNone/>
+            </a:pPr>
             <a:r>
               <a:rPr lang="en-US" sz="2100" dirty="0">
                 <a:solidFill>
-                  <a:srgbClr val="17364A"/>
-                </a:solidFill>
-                <a:latin typeface="Aptos" pitchFamily="34" charset="0"/>
-                <a:ea typeface="Aptos" pitchFamily="34" charset="-122"/>
-                <a:cs typeface="Aptos" pitchFamily="34" charset="-120"/>
-              </a:rPr>
-              <a:t>The same model output may be communicated differently to a technical team, health officer, program.</a:t>
+                  <a:srgbClr val="003A63"/>
+                </a:solidFill>
+                <a:latin typeface="Aptos" pitchFamily="34" charset="0"/>
+                <a:ea typeface="Aptos" pitchFamily="34" charset="-122"/>
+                <a:cs typeface="Aptos" pitchFamily="34" charset="-120"/>
+              </a:rPr>
+              <a:t>• The same model output may be communicated differently to a technical team, health officer,.</a:t>
             </a:r>
             <a:endParaRPr lang="en-US" sz="2100" dirty="0"/>
           </a:p>
           <a:p>
+            <a:pPr indent="0" marL="0">
+              <a:buNone/>
+            </a:pPr>
             <a:r>
               <a:rPr lang="en-US" sz="2100" dirty="0">
                 <a:solidFill>
-                  <a:srgbClr val="17364A"/>
-                </a:solidFill>
-                <a:latin typeface="Aptos" pitchFamily="34" charset="0"/>
-                <a:ea typeface="Aptos" pitchFamily="34" charset="-122"/>
-                <a:cs typeface="Aptos" pitchFamily="34" charset="-120"/>
-              </a:rPr>
-              <a:t>Technical users may need details about metrics and data limitations, while executives may need decision.</a:t>
+                  <a:srgbClr val="003A63"/>
+                </a:solidFill>
+                <a:latin typeface="Aptos" pitchFamily="34" charset="0"/>
+                <a:ea typeface="Aptos" pitchFamily="34" charset="-122"/>
+                <a:cs typeface="Aptos" pitchFamily="34" charset="-120"/>
+              </a:rPr>
+              <a:t>• Technical users may need details about metrics and data limitations, while executives may need.</a:t>
             </a:r>
             <a:endParaRPr lang="en-US" sz="2100" dirty="0"/>
           </a:p>
@@ -3383,17 +3392,17 @@
         </p:nvSpPr>
         <p:spPr>
           <a:xfrm>
-            <a:off x="7799832" y="1828800"/>
-            <a:ext cx="3145536" cy="685800"/>
-          </a:xfrm>
-          <a:prstGeom prst="rect">
-            <a:avLst/>
-          </a:prstGeom>
-          <a:noFill/>
-          <a:ln/>
-        </p:spPr>
-        <p:txBody>
-          <a:bodyPr wrap="square" lIns="0" tIns="0" rIns="0" bIns="0" rtlCol="0" anchor="t">
+            <a:off x="7799832" y="1801368"/>
+            <a:ext cx="3145536" cy="758952"/>
+          </a:xfrm>
+          <a:prstGeom prst="rect">
+            <a:avLst/>
+          </a:prstGeom>
+          <a:noFill/>
+          <a:ln/>
+        </p:spPr>
+        <p:txBody>
+          <a:bodyPr wrap="square" lIns="254" tIns="254" rIns="254" bIns="254" rtlCol="0" anchor="t">
             <a:normAutofit/>
           </a:bodyPr>
           <a:lstStyle/>
@@ -3402,7 +3411,7 @@
               <a:buNone/>
             </a:pPr>
             <a:r>
-              <a:rPr lang="en-US" sz="1550" dirty="0">
+              <a:rPr lang="en-US" sz="1320" dirty="0">
                 <a:solidFill>
                   <a:srgbClr val="17364A"/>
                 </a:solidFill>
@@ -3412,7 +3421,7 @@
               </a:rPr>
               <a:t>Model communication begins with the decision context.</a:t>
             </a:r>
-            <a:endParaRPr lang="en-US" sz="1550" dirty="0"/>
+            <a:endParaRPr lang="en-US" sz="1320" dirty="0"/>
           </a:p>
         </p:txBody>
       </p:sp>
@@ -3500,13 +3509,16 @@
           <a:ln/>
         </p:spPr>
         <p:txBody>
-          <a:bodyPr wrap="square" lIns="254" tIns="254" rIns="254" bIns="254" rtlCol="0" anchor="t">
+          <a:bodyPr wrap="square" lIns="508" tIns="508" rIns="508" bIns="508" rtlCol="0" anchor="t">
             <a:normAutofit/>
           </a:bodyPr>
           <a:lstStyle/>
           <a:p>
-            <a:r>
-              <a:rPr lang="en-US" sz="1380" dirty="0">
+            <a:pPr indent="0" marL="0">
+              <a:buNone/>
+            </a:pPr>
+            <a:r>
+              <a:rPr lang="en-US" sz="1220" dirty="0">
                 <a:solidFill>
                   <a:srgbClr val="17364A"/>
                 </a:solidFill>
@@ -3514,13 +3526,16 @@
                 <a:ea typeface="Aptos" pitchFamily="34" charset="-122"/>
                 <a:cs typeface="Aptos" pitchFamily="34" charset="-120"/>
               </a:rPr>
-              <a:t>The same model output may be communicated differently to a technical team, health officer,.</a:t>
-            </a:r>
-            <a:endParaRPr lang="en-US" sz="1380" dirty="0"/>
-          </a:p>
-          <a:p>
-            <a:r>
-              <a:rPr lang="en-US" sz="1380" dirty="0">
+              <a:t>The same model output may be communicated differently to a.</a:t>
+            </a:r>
+            <a:endParaRPr lang="en-US" sz="1220" dirty="0"/>
+          </a:p>
+          <a:p>
+            <a:pPr indent="0" marL="0">
+              <a:buNone/>
+            </a:pPr>
+            <a:r>
+              <a:rPr lang="en-US" sz="1220" dirty="0">
                 <a:solidFill>
                   <a:srgbClr val="17364A"/>
                 </a:solidFill>
@@ -3528,13 +3543,16 @@
                 <a:ea typeface="Aptos" pitchFamily="34" charset="-122"/>
                 <a:cs typeface="Aptos" pitchFamily="34" charset="-120"/>
               </a:rPr>
-              <a:t>Technical users may need details about metrics and data limitations, while executives may.</a:t>
-            </a:r>
-            <a:endParaRPr lang="en-US" sz="1380" dirty="0"/>
-          </a:p>
-          <a:p>
-            <a:r>
-              <a:rPr lang="en-US" sz="1380" dirty="0">
+              <a:t>Technical users may need details about metrics and data.</a:t>
+            </a:r>
+            <a:endParaRPr lang="en-US" sz="1220" dirty="0"/>
+          </a:p>
+          <a:p>
+            <a:pPr indent="0" marL="0">
+              <a:buNone/>
+            </a:pPr>
+            <a:r>
+              <a:rPr lang="en-US" sz="1220" dirty="0">
                 <a:solidFill>
                   <a:srgbClr val="17364A"/>
                 </a:solidFill>
@@ -3544,7 +3562,7 @@
               </a:rPr>
               <a:t>Uncertainty should be explained visually and verbally.</a:t>
             </a:r>
-            <a:endParaRPr lang="en-US" sz="1380" dirty="0"/>
+            <a:endParaRPr lang="en-US" sz="1220" dirty="0"/>
           </a:p>
         </p:txBody>
       </p:sp>
@@ -3622,17 +3640,17 @@
         </p:nvSpPr>
         <p:spPr>
           <a:xfrm>
-            <a:off x="7799832" y="5001768"/>
-            <a:ext cx="3145536" cy="502920"/>
-          </a:xfrm>
-          <a:prstGeom prst="rect">
-            <a:avLst/>
-          </a:prstGeom>
-          <a:noFill/>
-          <a:ln/>
-        </p:spPr>
-        <p:txBody>
-          <a:bodyPr wrap="square" lIns="0" tIns="0" rIns="0" bIns="0" rtlCol="0" anchor="t">
+            <a:off x="7799832" y="4974336"/>
+            <a:ext cx="3145536" cy="576072"/>
+          </a:xfrm>
+          <a:prstGeom prst="rect">
+            <a:avLst/>
+          </a:prstGeom>
+          <a:noFill/>
+          <a:ln/>
+        </p:spPr>
+        <p:txBody>
+          <a:bodyPr wrap="square" lIns="254" tIns="254" rIns="254" bIns="254" rtlCol="0" anchor="t">
             <a:normAutofit/>
           </a:bodyPr>
           <a:lstStyle/>
@@ -3641,7 +3659,7 @@
               <a:buNone/>
             </a:pPr>
             <a:r>
-              <a:rPr lang="en-US" sz="1550" dirty="0">
+              <a:rPr lang="en-US" sz="1320" dirty="0">
                 <a:solidFill>
                   <a:srgbClr val="17364A"/>
                 </a:solidFill>
@@ -3649,9 +3667,9 @@
                 <a:ea typeface="Aptos" pitchFamily="34" charset="-122"/>
                 <a:cs typeface="Aptos" pitchFamily="34" charset="-120"/>
               </a:rPr>
-              <a:t>Connect the concept to data quality, model performance, validation evidence, monitoring measures, and decisions that remain under human control.</a:t>
-            </a:r>
-            <a:endParaRPr lang="en-US" sz="1550" dirty="0"/>
+              <a:t>Connect the concept to data quality, model performance, validation evidence, monitoring measures, and decisions that.</a:t>
+            </a:r>
+            <a:endParaRPr lang="en-US" sz="1320" dirty="0"/>
           </a:p>
         </p:txBody>
       </p:sp>
@@ -3952,49 +3970,58 @@
           <a:ln/>
         </p:spPr>
         <p:txBody>
-          <a:bodyPr wrap="square" lIns="635" tIns="635" rIns="635" bIns="635" rtlCol="0" anchor="t">
+          <a:bodyPr wrap="square" lIns="1016" tIns="1016" rIns="1016" bIns="1016" rtlCol="0" anchor="t">
             <a:normAutofit/>
           </a:bodyPr>
           <a:lstStyle/>
           <a:p>
+            <a:pPr indent="0" marL="0">
+              <a:buNone/>
+            </a:pPr>
             <a:r>
               <a:rPr lang="en-US" sz="2100" dirty="0">
                 <a:solidFill>
-                  <a:srgbClr val="17364A"/>
-                </a:solidFill>
-                <a:latin typeface="Aptos" pitchFamily="34" charset="0"/>
-                <a:ea typeface="Aptos" pitchFamily="34" charset="-122"/>
-                <a:cs typeface="Aptos" pitchFamily="34" charset="-120"/>
-              </a:rPr>
-              <a:t>A major failure mode is false precision.</a:t>
+                  <a:srgbClr val="003A63"/>
+                </a:solidFill>
+                <a:latin typeface="Aptos" pitchFamily="34" charset="0"/>
+                <a:ea typeface="Aptos" pitchFamily="34" charset="-122"/>
+                <a:cs typeface="Aptos" pitchFamily="34" charset="-120"/>
+              </a:rPr>
+              <a:t>• A major failure mode is false precision.</a:t>
             </a:r>
             <a:endParaRPr lang="en-US" sz="2100" dirty="0"/>
           </a:p>
           <a:p>
+            <a:pPr indent="0" marL="0">
+              <a:buNone/>
+            </a:pPr>
             <a:r>
               <a:rPr lang="en-US" sz="2100" dirty="0">
                 <a:solidFill>
-                  <a:srgbClr val="17364A"/>
-                </a:solidFill>
-                <a:latin typeface="Aptos" pitchFamily="34" charset="0"/>
-                <a:ea typeface="Aptos" pitchFamily="34" charset="-122"/>
-                <a:cs typeface="Aptos" pitchFamily="34" charset="-120"/>
-              </a:rPr>
-              <a:t>A model may produce a number such as 82.4 percent risk, but the data and validation may not support.</a:t>
+                  <a:srgbClr val="003A63"/>
+                </a:solidFill>
+                <a:latin typeface="Aptos" pitchFamily="34" charset="0"/>
+                <a:ea typeface="Aptos" pitchFamily="34" charset="-122"/>
+                <a:cs typeface="Aptos" pitchFamily="34" charset="-120"/>
+              </a:rPr>
+              <a:t>• A model may produce a number such as 82.4 percent risk, but the data and validation may not.</a:t>
             </a:r>
             <a:endParaRPr lang="en-US" sz="2100" dirty="0"/>
           </a:p>
           <a:p>
+            <a:pPr indent="0" marL="0">
+              <a:buNone/>
+            </a:pPr>
             <a:r>
               <a:rPr lang="en-US" sz="2100" dirty="0">
                 <a:solidFill>
-                  <a:srgbClr val="17364A"/>
-                </a:solidFill>
-                <a:latin typeface="Aptos" pitchFamily="34" charset="0"/>
-                <a:ea typeface="Aptos" pitchFamily="34" charset="-122"/>
-                <a:cs typeface="Aptos" pitchFamily="34" charset="-120"/>
-              </a:rPr>
-              <a:t>A guardrail is to use appropriate rounding, risk categories, and uncertainty statements.</a:t>
+                  <a:srgbClr val="003A63"/>
+                </a:solidFill>
+                <a:latin typeface="Aptos" pitchFamily="34" charset="0"/>
+                <a:ea typeface="Aptos" pitchFamily="34" charset="-122"/>
+                <a:cs typeface="Aptos" pitchFamily="34" charset="-120"/>
+              </a:rPr>
+              <a:t>• A guardrail is to use appropriate rounding, risk categories, and uncertainty statements.</a:t>
             </a:r>
             <a:endParaRPr lang="en-US" sz="2100" dirty="0"/>
           </a:p>
@@ -4074,17 +4101,17 @@
         </p:nvSpPr>
         <p:spPr>
           <a:xfrm>
-            <a:off x="7799832" y="1828800"/>
-            <a:ext cx="3145536" cy="685800"/>
-          </a:xfrm>
-          <a:prstGeom prst="rect">
-            <a:avLst/>
-          </a:prstGeom>
-          <a:noFill/>
-          <a:ln/>
-        </p:spPr>
-        <p:txBody>
-          <a:bodyPr wrap="square" lIns="0" tIns="0" rIns="0" bIns="0" rtlCol="0" anchor="t">
+            <a:off x="7799832" y="1801368"/>
+            <a:ext cx="3145536" cy="758952"/>
+          </a:xfrm>
+          <a:prstGeom prst="rect">
+            <a:avLst/>
+          </a:prstGeom>
+          <a:noFill/>
+          <a:ln/>
+        </p:spPr>
+        <p:txBody>
+          <a:bodyPr wrap="square" lIns="254" tIns="254" rIns="254" bIns="254" rtlCol="0" anchor="t">
             <a:normAutofit/>
           </a:bodyPr>
           <a:lstStyle/>
@@ -4093,7 +4120,7 @@
               <a:buNone/>
             </a:pPr>
             <a:r>
-              <a:rPr lang="en-US" sz="1550" dirty="0">
+              <a:rPr lang="en-US" sz="1320" dirty="0">
                 <a:solidFill>
                   <a:srgbClr val="17364A"/>
                 </a:solidFill>
@@ -4103,7 +4130,7 @@
               </a:rPr>
               <a:t>A major failure mode is false precision.</a:t>
             </a:r>
-            <a:endParaRPr lang="en-US" sz="1550" dirty="0"/>
+            <a:endParaRPr lang="en-US" sz="1320" dirty="0"/>
           </a:p>
         </p:txBody>
       </p:sp>
@@ -4191,13 +4218,16 @@
           <a:ln/>
         </p:spPr>
         <p:txBody>
-          <a:bodyPr wrap="square" lIns="254" tIns="254" rIns="254" bIns="254" rtlCol="0" anchor="t">
+          <a:bodyPr wrap="square" lIns="508" tIns="508" rIns="508" bIns="508" rtlCol="0" anchor="t">
             <a:normAutofit/>
           </a:bodyPr>
           <a:lstStyle/>
           <a:p>
-            <a:r>
-              <a:rPr lang="en-US" sz="1380" dirty="0">
+            <a:pPr indent="0" marL="0">
+              <a:buNone/>
+            </a:pPr>
+            <a:r>
+              <a:rPr lang="en-US" sz="1220" dirty="0">
                 <a:solidFill>
                   <a:srgbClr val="17364A"/>
                 </a:solidFill>
@@ -4205,13 +4235,16 @@
                 <a:ea typeface="Aptos" pitchFamily="34" charset="-122"/>
                 <a:cs typeface="Aptos" pitchFamily="34" charset="-120"/>
               </a:rPr>
-              <a:t>A model may produce a number such as 82.4 percent risk, but the data and validation may.</a:t>
-            </a:r>
-            <a:endParaRPr lang="en-US" sz="1380" dirty="0"/>
-          </a:p>
-          <a:p>
-            <a:r>
-              <a:rPr lang="en-US" sz="1380" dirty="0">
+              <a:t>A model may produce a number such as 82.4 percent risk, but the.</a:t>
+            </a:r>
+            <a:endParaRPr lang="en-US" sz="1220" dirty="0"/>
+          </a:p>
+          <a:p>
+            <a:pPr indent="0" marL="0">
+              <a:buNone/>
+            </a:pPr>
+            <a:r>
+              <a:rPr lang="en-US" sz="1220" dirty="0">
                 <a:solidFill>
                   <a:srgbClr val="17364A"/>
                 </a:solidFill>
@@ -4219,13 +4252,16 @@
                 <a:ea typeface="Aptos" pitchFamily="34" charset="-122"/>
                 <a:cs typeface="Aptos" pitchFamily="34" charset="-120"/>
               </a:rPr>
-              <a:t>Another failure mode is hiding limitations to make results look more actionable.</a:t>
-            </a:r>
-            <a:endParaRPr lang="en-US" sz="1380" dirty="0"/>
-          </a:p>
-          <a:p>
-            <a:r>
-              <a:rPr lang="en-US" sz="1380" dirty="0">
+              <a:t>Another failure mode is hiding limitations to make results look.</a:t>
+            </a:r>
+            <a:endParaRPr lang="en-US" sz="1220" dirty="0"/>
+          </a:p>
+          <a:p>
+            <a:pPr indent="0" marL="0">
+              <a:buNone/>
+            </a:pPr>
+            <a:r>
+              <a:rPr lang="en-US" sz="1220" dirty="0">
                 <a:solidFill>
                   <a:srgbClr val="17364A"/>
                 </a:solidFill>
@@ -4235,7 +4271,7 @@
               </a:rPr>
               <a:t>This can erode trust if the model later performs poorly.</a:t>
             </a:r>
-            <a:endParaRPr lang="en-US" sz="1380" dirty="0"/>
+            <a:endParaRPr lang="en-US" sz="1220" dirty="0"/>
           </a:p>
         </p:txBody>
       </p:sp>
@@ -4313,17 +4349,17 @@
         </p:nvSpPr>
         <p:spPr>
           <a:xfrm>
-            <a:off x="7799832" y="5001768"/>
-            <a:ext cx="3145536" cy="502920"/>
-          </a:xfrm>
-          <a:prstGeom prst="rect">
-            <a:avLst/>
-          </a:prstGeom>
-          <a:noFill/>
-          <a:ln/>
-        </p:spPr>
-        <p:txBody>
-          <a:bodyPr wrap="square" lIns="0" tIns="0" rIns="0" bIns="0" rtlCol="0" anchor="t">
+            <a:off x="7799832" y="4974336"/>
+            <a:ext cx="3145536" cy="576072"/>
+          </a:xfrm>
+          <a:prstGeom prst="rect">
+            <a:avLst/>
+          </a:prstGeom>
+          <a:noFill/>
+          <a:ln/>
+        </p:spPr>
+        <p:txBody>
+          <a:bodyPr wrap="square" lIns="254" tIns="254" rIns="254" bIns="254" rtlCol="0" anchor="t">
             <a:normAutofit/>
           </a:bodyPr>
           <a:lstStyle/>
@@ -4332,7 +4368,7 @@
               <a:buNone/>
             </a:pPr>
             <a:r>
-              <a:rPr lang="en-US" sz="1550" dirty="0">
+              <a:rPr lang="en-US" sz="1320" dirty="0">
                 <a:solidFill>
                   <a:srgbClr val="17364A"/>
                 </a:solidFill>
@@ -4340,9 +4376,9 @@
                 <a:ea typeface="Aptos" pitchFamily="34" charset="-122"/>
                 <a:cs typeface="Aptos" pitchFamily="34" charset="-120"/>
               </a:rPr>
-              <a:t>Identify what could go wrong, who could be affected, what safeguards are needed, and what evidence should be reviewed before use expands.</a:t>
-            </a:r>
-            <a:endParaRPr lang="en-US" sz="1550" dirty="0"/>
+              <a:t>Identify what could go wrong, who could be affected, what safeguards are needed, and what evidence should be reviewed.</a:t>
+            </a:r>
+            <a:endParaRPr lang="en-US" sz="1320" dirty="0"/>
           </a:p>
         </p:txBody>
       </p:sp>
@@ -4643,49 +4679,58 @@
           <a:ln/>
         </p:spPr>
         <p:txBody>
-          <a:bodyPr wrap="square" lIns="635" tIns="635" rIns="635" bIns="635" rtlCol="0" anchor="t">
+          <a:bodyPr wrap="square" lIns="1016" tIns="1016" rIns="1016" bIns="1016" rtlCol="0" anchor="t">
             <a:normAutofit/>
           </a:bodyPr>
           <a:lstStyle/>
           <a:p>
+            <a:pPr indent="0" marL="0">
+              <a:buNone/>
+            </a:pPr>
             <a:r>
               <a:rPr lang="en-US" sz="2100" dirty="0">
                 <a:solidFill>
-                  <a:srgbClr val="17364A"/>
-                </a:solidFill>
-                <a:latin typeface="Aptos" pitchFamily="34" charset="0"/>
-                <a:ea typeface="Aptos" pitchFamily="34" charset="-122"/>
-                <a:cs typeface="Aptos" pitchFamily="34" charset="-120"/>
-              </a:rPr>
-              <a:t>Generative AI can help draft summaries of model findings, but the draft must be checked by analysts who.</a:t>
+                  <a:srgbClr val="003A63"/>
+                </a:solidFill>
+                <a:latin typeface="Aptos" pitchFamily="34" charset="0"/>
+                <a:ea typeface="Aptos" pitchFamily="34" charset="-122"/>
+                <a:cs typeface="Aptos" pitchFamily="34" charset="-120"/>
+              </a:rPr>
+              <a:t>• Generative AI can help draft summaries of model findings, but the draft must be checked by.</a:t>
             </a:r>
             <a:endParaRPr lang="en-US" sz="2100" dirty="0"/>
           </a:p>
           <a:p>
+            <a:pPr indent="0" marL="0">
+              <a:buNone/>
+            </a:pPr>
             <a:r>
               <a:rPr lang="en-US" sz="2100" dirty="0">
                 <a:solidFill>
-                  <a:srgbClr val="17364A"/>
-                </a:solidFill>
-                <a:latin typeface="Aptos" pitchFamily="34" charset="0"/>
-                <a:ea typeface="Aptos" pitchFamily="34" charset="-122"/>
-                <a:cs typeface="Aptos" pitchFamily="34" charset="-120"/>
-              </a:rPr>
-              <a:t>Predictive analytics, outbreak forecasts, risk stratification tools, and geospatial models all require.</a:t>
+                  <a:srgbClr val="003A63"/>
+                </a:solidFill>
+                <a:latin typeface="Aptos" pitchFamily="34" charset="0"/>
+                <a:ea typeface="Aptos" pitchFamily="34" charset="-122"/>
+                <a:cs typeface="Aptos" pitchFamily="34" charset="-120"/>
+              </a:rPr>
+              <a:t>• Predictive analytics, outbreak forecasts, risk stratification tools, and geospatial models all.</a:t>
             </a:r>
             <a:endParaRPr lang="en-US" sz="2100" dirty="0"/>
           </a:p>
           <a:p>
+            <a:pPr indent="0" marL="0">
+              <a:buNone/>
+            </a:pPr>
             <a:r>
               <a:rPr lang="en-US" sz="2100" dirty="0">
                 <a:solidFill>
-                  <a:srgbClr val="17364A"/>
-                </a:solidFill>
-                <a:latin typeface="Aptos" pitchFamily="34" charset="0"/>
-                <a:ea typeface="Aptos" pitchFamily="34" charset="-122"/>
-                <a:cs typeface="Aptos" pitchFamily="34" charset="-120"/>
-              </a:rPr>
-              <a:t>RAG systems used for briefings should cite source reports and validation evidence.</a:t>
+                  <a:srgbClr val="003A63"/>
+                </a:solidFill>
+                <a:latin typeface="Aptos" pitchFamily="34" charset="0"/>
+                <a:ea typeface="Aptos" pitchFamily="34" charset="-122"/>
+                <a:cs typeface="Aptos" pitchFamily="34" charset="-120"/>
+              </a:rPr>
+              <a:t>• RAG systems used for briefings should cite source reports and validation evidence.</a:t>
             </a:r>
             <a:endParaRPr lang="en-US" sz="2100" dirty="0"/>
           </a:p>
@@ -4765,17 +4810,17 @@
         </p:nvSpPr>
         <p:spPr>
           <a:xfrm>
-            <a:off x="7799832" y="1828800"/>
-            <a:ext cx="3145536" cy="685800"/>
-          </a:xfrm>
-          <a:prstGeom prst="rect">
-            <a:avLst/>
-          </a:prstGeom>
-          <a:noFill/>
-          <a:ln/>
-        </p:spPr>
-        <p:txBody>
-          <a:bodyPr wrap="square" lIns="0" tIns="0" rIns="0" bIns="0" rtlCol="0" anchor="t">
+            <a:off x="7799832" y="1801368"/>
+            <a:ext cx="3145536" cy="758952"/>
+          </a:xfrm>
+          <a:prstGeom prst="rect">
+            <a:avLst/>
+          </a:prstGeom>
+          <a:noFill/>
+          <a:ln/>
+        </p:spPr>
+        <p:txBody>
+          <a:bodyPr wrap="square" lIns="254" tIns="254" rIns="254" bIns="254" rtlCol="0" anchor="t">
             <a:normAutofit/>
           </a:bodyPr>
           <a:lstStyle/>
@@ -4784,7 +4829,7 @@
               <a:buNone/>
             </a:pPr>
             <a:r>
-              <a:rPr lang="en-US" sz="1550" dirty="0">
+              <a:rPr lang="en-US" sz="1320" dirty="0">
                 <a:solidFill>
                   <a:srgbClr val="17364A"/>
                 </a:solidFill>
@@ -4794,7 +4839,7 @@
               </a:rPr>
               <a:t>Generative AI can help draft summaries of model findings, but the draft must be checked by analysts who.</a:t>
             </a:r>
-            <a:endParaRPr lang="en-US" sz="1550" dirty="0"/>
+            <a:endParaRPr lang="en-US" sz="1320" dirty="0"/>
           </a:p>
         </p:txBody>
       </p:sp>
@@ -4882,13 +4927,16 @@
           <a:ln/>
         </p:spPr>
         <p:txBody>
-          <a:bodyPr wrap="square" lIns="254" tIns="254" rIns="254" bIns="254" rtlCol="0" anchor="t">
+          <a:bodyPr wrap="square" lIns="508" tIns="508" rIns="508" bIns="508" rtlCol="0" anchor="t">
             <a:normAutofit/>
           </a:bodyPr>
           <a:lstStyle/>
           <a:p>
-            <a:r>
-              <a:rPr lang="en-US" sz="1380" dirty="0">
+            <a:pPr indent="0" marL="0">
+              <a:buNone/>
+            </a:pPr>
+            <a:r>
+              <a:rPr lang="en-US" sz="1220" dirty="0">
                 <a:solidFill>
                   <a:srgbClr val="17364A"/>
                 </a:solidFill>
@@ -4896,13 +4944,16 @@
                 <a:ea typeface="Aptos" pitchFamily="34" charset="-122"/>
                 <a:cs typeface="Aptos" pitchFamily="34" charset="-120"/>
               </a:rPr>
-              <a:t>Generative AI can help draft summaries of model findings, but the draft must be checked by.</a:t>
-            </a:r>
-            <a:endParaRPr lang="en-US" sz="1380" dirty="0"/>
-          </a:p>
-          <a:p>
-            <a:r>
-              <a:rPr lang="en-US" sz="1380" dirty="0">
+              <a:t>Generative AI can help draft summaries of model findings, but the.</a:t>
+            </a:r>
+            <a:endParaRPr lang="en-US" sz="1220" dirty="0"/>
+          </a:p>
+          <a:p>
+            <a:pPr indent="0" marL="0">
+              <a:buNone/>
+            </a:pPr>
+            <a:r>
+              <a:rPr lang="en-US" sz="1220" dirty="0">
                 <a:solidFill>
                   <a:srgbClr val="17364A"/>
                 </a:solidFill>
@@ -4910,9 +4961,9 @@
                 <a:ea typeface="Aptos" pitchFamily="34" charset="-122"/>
                 <a:cs typeface="Aptos" pitchFamily="34" charset="-120"/>
               </a:rPr>
-              <a:t>Predictive analytics, outbreak forecasts, risk stratification tools, and geospatial models.</a:t>
-            </a:r>
-            <a:endParaRPr lang="en-US" sz="1380" dirty="0"/>
+              <a:t>Predictive analytics, outbreak forecasts, risk stratification.</a:t>
+            </a:r>
+            <a:endParaRPr lang="en-US" sz="1220" dirty="0"/>
           </a:p>
         </p:txBody>
       </p:sp>
@@ -4990,17 +5041,17 @@
         </p:nvSpPr>
         <p:spPr>
           <a:xfrm>
-            <a:off x="7799832" y="5001768"/>
-            <a:ext cx="3145536" cy="502920"/>
-          </a:xfrm>
-          <a:prstGeom prst="rect">
-            <a:avLst/>
-          </a:prstGeom>
-          <a:noFill/>
-          <a:ln/>
-        </p:spPr>
-        <p:txBody>
-          <a:bodyPr wrap="square" lIns="0" tIns="0" rIns="0" bIns="0" rtlCol="0" anchor="t">
+            <a:off x="7799832" y="4974336"/>
+            <a:ext cx="3145536" cy="576072"/>
+          </a:xfrm>
+          <a:prstGeom prst="rect">
+            <a:avLst/>
+          </a:prstGeom>
+          <a:noFill/>
+          <a:ln/>
+        </p:spPr>
+        <p:txBody>
+          <a:bodyPr wrap="square" lIns="254" tIns="254" rIns="254" bIns="254" rtlCol="0" anchor="t">
             <a:normAutofit/>
           </a:bodyPr>
           <a:lstStyle/>
@@ -5009,7 +5060,7 @@
               <a:buNone/>
             </a:pPr>
             <a:r>
-              <a:rPr lang="en-US" sz="1550" dirty="0">
+              <a:rPr lang="en-US" sz="1320" dirty="0">
                 <a:solidFill>
                   <a:srgbClr val="17364A"/>
                 </a:solidFill>
@@ -5017,9 +5068,9 @@
                 <a:ea typeface="Aptos" pitchFamily="34" charset="-122"/>
                 <a:cs typeface="Aptos" pitchFamily="34" charset="-120"/>
               </a:rPr>
-              <a:t>Connect the concept to data quality, model performance, validation evidence, monitoring measures, and decisions that remain under human control.</a:t>
-            </a:r>
-            <a:endParaRPr lang="en-US" sz="1550" dirty="0"/>
+              <a:t>Connect the concept to data quality, model performance, validation evidence, monitoring measures, and decisions that.</a:t>
+            </a:r>
+            <a:endParaRPr lang="en-US" sz="1320" dirty="0"/>
           </a:p>
         </p:txBody>
       </p:sp>
@@ -5320,49 +5371,58 @@
           <a:ln/>
         </p:spPr>
         <p:txBody>
-          <a:bodyPr wrap="square" lIns="635" tIns="635" rIns="635" bIns="635" rtlCol="0" anchor="t">
+          <a:bodyPr wrap="square" lIns="1016" tIns="1016" rIns="1016" bIns="1016" rtlCol="0" anchor="t">
             <a:normAutofit/>
           </a:bodyPr>
           <a:lstStyle/>
           <a:p>
+            <a:pPr indent="0" marL="0">
+              <a:buNone/>
+            </a:pPr>
             <a:r>
               <a:rPr lang="en-US" sz="2100" dirty="0">
                 <a:solidFill>
-                  <a:srgbClr val="17364A"/>
-                </a:solidFill>
-                <a:latin typeface="Aptos" pitchFamily="34" charset="0"/>
-                <a:ea typeface="Aptos" pitchFamily="34" charset="-122"/>
-                <a:cs typeface="Aptos" pitchFamily="34" charset="-120"/>
-              </a:rPr>
-              <a:t>Who needs to understand this model result?</a:t>
+                  <a:srgbClr val="003A63"/>
+                </a:solidFill>
+                <a:latin typeface="Aptos" pitchFamily="34" charset="0"/>
+                <a:ea typeface="Aptos" pitchFamily="34" charset="-122"/>
+                <a:cs typeface="Aptos" pitchFamily="34" charset="-120"/>
+              </a:rPr>
+              <a:t>• Who needs to understand this model result?</a:t>
             </a:r>
             <a:endParaRPr lang="en-US" sz="2100" dirty="0"/>
           </a:p>
           <a:p>
+            <a:pPr indent="0" marL="0">
+              <a:buNone/>
+            </a:pPr>
             <a:r>
               <a:rPr lang="en-US" sz="2100" dirty="0">
                 <a:solidFill>
-                  <a:srgbClr val="17364A"/>
-                </a:solidFill>
-                <a:latin typeface="Aptos" pitchFamily="34" charset="0"/>
-                <a:ea typeface="Aptos" pitchFamily="34" charset="-122"/>
-                <a:cs typeface="Aptos" pitchFamily="34" charset="-120"/>
-              </a:rPr>
-              <a:t>What decision will the result support?</a:t>
+                  <a:srgbClr val="003A63"/>
+                </a:solidFill>
+                <a:latin typeface="Aptos" pitchFamily="34" charset="0"/>
+                <a:ea typeface="Aptos" pitchFamily="34" charset="-122"/>
+                <a:cs typeface="Aptos" pitchFamily="34" charset="-120"/>
+              </a:rPr>
+              <a:t>• What decision will the result support?</a:t>
             </a:r>
             <a:endParaRPr lang="en-US" sz="2100" dirty="0"/>
           </a:p>
           <a:p>
+            <a:pPr indent="0" marL="0">
+              <a:buNone/>
+            </a:pPr>
             <a:r>
               <a:rPr lang="en-US" sz="2100" dirty="0">
                 <a:solidFill>
-                  <a:srgbClr val="17364A"/>
-                </a:solidFill>
-                <a:latin typeface="Aptos" pitchFamily="34" charset="0"/>
-                <a:ea typeface="Aptos" pitchFamily="34" charset="-122"/>
-                <a:cs typeface="Aptos" pitchFamily="34" charset="-120"/>
-              </a:rPr>
-              <a:t>What uncertainty or limitation could change the decision?</a:t>
+                  <a:srgbClr val="003A63"/>
+                </a:solidFill>
+                <a:latin typeface="Aptos" pitchFamily="34" charset="0"/>
+                <a:ea typeface="Aptos" pitchFamily="34" charset="-122"/>
+                <a:cs typeface="Aptos" pitchFamily="34" charset="-120"/>
+              </a:rPr>
+              <a:t>• What uncertainty or limitation could change the decision?</a:t>
             </a:r>
             <a:endParaRPr lang="en-US" sz="2100" dirty="0"/>
           </a:p>
@@ -5442,17 +5502,17 @@
         </p:nvSpPr>
         <p:spPr>
           <a:xfrm>
-            <a:off x="7799832" y="1828800"/>
-            <a:ext cx="3145536" cy="685800"/>
-          </a:xfrm>
-          <a:prstGeom prst="rect">
-            <a:avLst/>
-          </a:prstGeom>
-          <a:noFill/>
-          <a:ln/>
-        </p:spPr>
-        <p:txBody>
-          <a:bodyPr wrap="square" lIns="0" tIns="0" rIns="0" bIns="0" rtlCol="0" anchor="t">
+            <a:off x="7799832" y="1801368"/>
+            <a:ext cx="3145536" cy="758952"/>
+          </a:xfrm>
+          <a:prstGeom prst="rect">
+            <a:avLst/>
+          </a:prstGeom>
+          <a:noFill/>
+          <a:ln/>
+        </p:spPr>
+        <p:txBody>
+          <a:bodyPr wrap="square" lIns="254" tIns="254" rIns="254" bIns="254" rtlCol="0" anchor="t">
             <a:normAutofit/>
           </a:bodyPr>
           <a:lstStyle/>
@@ -5461,7 +5521,7 @@
               <a:buNone/>
             </a:pPr>
             <a:r>
-              <a:rPr lang="en-US" sz="1550" dirty="0">
+              <a:rPr lang="en-US" sz="1320" dirty="0">
                 <a:solidFill>
                   <a:srgbClr val="17364A"/>
                 </a:solidFill>
@@ -5471,7 +5531,7 @@
               </a:rPr>
               <a:t>Who needs to understand this model result?</a:t>
             </a:r>
-            <a:endParaRPr lang="en-US" sz="1550" dirty="0"/>
+            <a:endParaRPr lang="en-US" sz="1320" dirty="0"/>
           </a:p>
         </p:txBody>
       </p:sp>
@@ -5559,13 +5619,16 @@
           <a:ln/>
         </p:spPr>
         <p:txBody>
-          <a:bodyPr wrap="square" lIns="254" tIns="254" rIns="254" bIns="254" rtlCol="0" anchor="t">
+          <a:bodyPr wrap="square" lIns="508" tIns="508" rIns="508" bIns="508" rtlCol="0" anchor="t">
             <a:normAutofit/>
           </a:bodyPr>
           <a:lstStyle/>
           <a:p>
-            <a:r>
-              <a:rPr lang="en-US" sz="1380" dirty="0">
+            <a:pPr indent="0" marL="0">
+              <a:buNone/>
+            </a:pPr>
+            <a:r>
+              <a:rPr lang="en-US" sz="1220" dirty="0">
                 <a:solidFill>
                   <a:srgbClr val="17364A"/>
                 </a:solidFill>
@@ -5575,11 +5638,14 @@
               </a:rPr>
               <a:t>Who needs to understand this model result?</a:t>
             </a:r>
-            <a:endParaRPr lang="en-US" sz="1380" dirty="0"/>
-          </a:p>
-          <a:p>
-            <a:r>
-              <a:rPr lang="en-US" sz="1380" dirty="0">
+            <a:endParaRPr lang="en-US" sz="1220" dirty="0"/>
+          </a:p>
+          <a:p>
+            <a:pPr indent="0" marL="0">
+              <a:buNone/>
+            </a:pPr>
+            <a:r>
+              <a:rPr lang="en-US" sz="1220" dirty="0">
                 <a:solidFill>
                   <a:srgbClr val="17364A"/>
                 </a:solidFill>
@@ -5589,11 +5655,14 @@
               </a:rPr>
               <a:t>What decision will the result support?</a:t>
             </a:r>
-            <a:endParaRPr lang="en-US" sz="1380" dirty="0"/>
-          </a:p>
-          <a:p>
-            <a:r>
-              <a:rPr lang="en-US" sz="1380" dirty="0">
+            <a:endParaRPr lang="en-US" sz="1220" dirty="0"/>
+          </a:p>
+          <a:p>
+            <a:pPr indent="0" marL="0">
+              <a:buNone/>
+            </a:pPr>
+            <a:r>
+              <a:rPr lang="en-US" sz="1220" dirty="0">
                 <a:solidFill>
                   <a:srgbClr val="17364A"/>
                 </a:solidFill>
@@ -5603,7 +5672,7 @@
               </a:rPr>
               <a:t>What uncertainty or limitation could change the decision?</a:t>
             </a:r>
-            <a:endParaRPr lang="en-US" sz="1380" dirty="0"/>
+            <a:endParaRPr lang="en-US" sz="1220" dirty="0"/>
           </a:p>
         </p:txBody>
       </p:sp>
@@ -5681,17 +5750,17 @@
         </p:nvSpPr>
         <p:spPr>
           <a:xfrm>
-            <a:off x="7799832" y="5001768"/>
-            <a:ext cx="3145536" cy="502920"/>
-          </a:xfrm>
-          <a:prstGeom prst="rect">
-            <a:avLst/>
-          </a:prstGeom>
-          <a:noFill/>
-          <a:ln/>
-        </p:spPr>
-        <p:txBody>
-          <a:bodyPr wrap="square" lIns="0" tIns="0" rIns="0" bIns="0" rtlCol="0" anchor="t">
+            <a:off x="7799832" y="4974336"/>
+            <a:ext cx="3145536" cy="576072"/>
+          </a:xfrm>
+          <a:prstGeom prst="rect">
+            <a:avLst/>
+          </a:prstGeom>
+          <a:noFill/>
+          <a:ln/>
+        </p:spPr>
+        <p:txBody>
+          <a:bodyPr wrap="square" lIns="254" tIns="254" rIns="254" bIns="254" rtlCol="0" anchor="t">
             <a:normAutofit/>
           </a:bodyPr>
           <a:lstStyle/>
@@ -5700,7 +5769,7 @@
               <a:buNone/>
             </a:pPr>
             <a:r>
-              <a:rPr lang="en-US" sz="1550" dirty="0">
+              <a:rPr lang="en-US" sz="1320" dirty="0">
                 <a:solidFill>
                   <a:srgbClr val="17364A"/>
                 </a:solidFill>
@@ -5708,9 +5777,9 @@
                 <a:ea typeface="Aptos" pitchFamily="34" charset="-122"/>
                 <a:cs typeface="Aptos" pitchFamily="34" charset="-120"/>
               </a:rPr>
-              <a:t>Connect the concept to data quality, model performance, validation evidence, monitoring measures, and decisions that remain under human control.</a:t>
-            </a:r>
-            <a:endParaRPr lang="en-US" sz="1550" dirty="0"/>
+              <a:t>Connect the concept to data quality, model performance, validation evidence, monitoring measures, and decisions that.</a:t>
+            </a:r>
+            <a:endParaRPr lang="en-US" sz="1320" dirty="0"/>
           </a:p>
         </p:txBody>
       </p:sp>
@@ -6011,35 +6080,41 @@
           <a:ln/>
         </p:spPr>
         <p:txBody>
-          <a:bodyPr wrap="square" lIns="635" tIns="635" rIns="635" bIns="635" rtlCol="0" anchor="t">
+          <a:bodyPr wrap="square" lIns="1016" tIns="1016" rIns="1016" bIns="1016" rtlCol="0" anchor="t">
             <a:normAutofit/>
           </a:bodyPr>
           <a:lstStyle/>
           <a:p>
+            <a:pPr indent="0" marL="0">
+              <a:buNone/>
+            </a:pPr>
             <a:r>
               <a:rPr lang="en-US" sz="2100" dirty="0">
                 <a:solidFill>
-                  <a:srgbClr val="17364A"/>
-                </a:solidFill>
-                <a:latin typeface="Aptos" pitchFamily="34" charset="0"/>
-                <a:ea typeface="Aptos" pitchFamily="34" charset="-122"/>
-                <a:cs typeface="Aptos" pitchFamily="34" charset="-120"/>
-              </a:rPr>
-              <a:t>Are there subgroup performance concerns?</a:t>
+                  <a:srgbClr val="003A63"/>
+                </a:solidFill>
+                <a:latin typeface="Aptos" pitchFamily="34" charset="0"/>
+                <a:ea typeface="Aptos" pitchFamily="34" charset="-122"/>
+                <a:cs typeface="Aptos" pitchFamily="34" charset="-120"/>
+              </a:rPr>
+              <a:t>• Are there subgroup performance concerns?</a:t>
             </a:r>
             <a:endParaRPr lang="en-US" sz="2100" dirty="0"/>
           </a:p>
           <a:p>
+            <a:pPr indent="0" marL="0">
+              <a:buNone/>
+            </a:pPr>
             <a:r>
               <a:rPr lang="en-US" sz="2100" dirty="0">
                 <a:solidFill>
-                  <a:srgbClr val="17364A"/>
-                </a:solidFill>
-                <a:latin typeface="Aptos" pitchFamily="34" charset="0"/>
-                <a:ea typeface="Aptos" pitchFamily="34" charset="-122"/>
-                <a:cs typeface="Aptos" pitchFamily="34" charset="-120"/>
-              </a:rPr>
-              <a:t>What wording would prevent overclaiming?</a:t>
+                  <a:srgbClr val="003A63"/>
+                </a:solidFill>
+                <a:latin typeface="Aptos" pitchFamily="34" charset="0"/>
+                <a:ea typeface="Aptos" pitchFamily="34" charset="-122"/>
+                <a:cs typeface="Aptos" pitchFamily="34" charset="-120"/>
+              </a:rPr>
+              <a:t>• What wording would prevent overclaiming?</a:t>
             </a:r>
             <a:endParaRPr lang="en-US" sz="2100" dirty="0"/>
           </a:p>
@@ -6119,17 +6194,17 @@
         </p:nvSpPr>
         <p:spPr>
           <a:xfrm>
-            <a:off x="7799832" y="1828800"/>
-            <a:ext cx="3145536" cy="685800"/>
-          </a:xfrm>
-          <a:prstGeom prst="rect">
-            <a:avLst/>
-          </a:prstGeom>
-          <a:noFill/>
-          <a:ln/>
-        </p:spPr>
-        <p:txBody>
-          <a:bodyPr wrap="square" lIns="0" tIns="0" rIns="0" bIns="0" rtlCol="0" anchor="t">
+            <a:off x="7799832" y="1801368"/>
+            <a:ext cx="3145536" cy="758952"/>
+          </a:xfrm>
+          <a:prstGeom prst="rect">
+            <a:avLst/>
+          </a:prstGeom>
+          <a:noFill/>
+          <a:ln/>
+        </p:spPr>
+        <p:txBody>
+          <a:bodyPr wrap="square" lIns="254" tIns="254" rIns="254" bIns="254" rtlCol="0" anchor="t">
             <a:normAutofit/>
           </a:bodyPr>
           <a:lstStyle/>
@@ -6138,7 +6213,7 @@
               <a:buNone/>
             </a:pPr>
             <a:r>
-              <a:rPr lang="en-US" sz="1550" dirty="0">
+              <a:rPr lang="en-US" sz="1320" dirty="0">
                 <a:solidFill>
                   <a:srgbClr val="17364A"/>
                 </a:solidFill>
@@ -6148,7 +6223,7 @@
               </a:rPr>
               <a:t>Are there subgroup performance concerns?</a:t>
             </a:r>
-            <a:endParaRPr lang="en-US" sz="1550" dirty="0"/>
+            <a:endParaRPr lang="en-US" sz="1320" dirty="0"/>
           </a:p>
         </p:txBody>
       </p:sp>
@@ -6236,13 +6311,16 @@
           <a:ln/>
         </p:spPr>
         <p:txBody>
-          <a:bodyPr wrap="square" lIns="254" tIns="254" rIns="254" bIns="254" rtlCol="0" anchor="t">
+          <a:bodyPr wrap="square" lIns="508" tIns="508" rIns="508" bIns="508" rtlCol="0" anchor="t">
             <a:normAutofit/>
           </a:bodyPr>
           <a:lstStyle/>
           <a:p>
-            <a:r>
-              <a:rPr lang="en-US" sz="1380" dirty="0">
+            <a:pPr indent="0" marL="0">
+              <a:buNone/>
+            </a:pPr>
+            <a:r>
+              <a:rPr lang="en-US" sz="1220" dirty="0">
                 <a:solidFill>
                   <a:srgbClr val="17364A"/>
                 </a:solidFill>
@@ -6252,11 +6330,14 @@
               </a:rPr>
               <a:t>Are there subgroup performance concerns?</a:t>
             </a:r>
-            <a:endParaRPr lang="en-US" sz="1380" dirty="0"/>
-          </a:p>
-          <a:p>
-            <a:r>
-              <a:rPr lang="en-US" sz="1380" dirty="0">
+            <a:endParaRPr lang="en-US" sz="1220" dirty="0"/>
+          </a:p>
+          <a:p>
+            <a:pPr indent="0" marL="0">
+              <a:buNone/>
+            </a:pPr>
+            <a:r>
+              <a:rPr lang="en-US" sz="1220" dirty="0">
                 <a:solidFill>
                   <a:srgbClr val="17364A"/>
                 </a:solidFill>
@@ -6266,7 +6347,7 @@
               </a:rPr>
               <a:t>What wording would prevent overclaiming?</a:t>
             </a:r>
-            <a:endParaRPr lang="en-US" sz="1380" dirty="0"/>
+            <a:endParaRPr lang="en-US" sz="1220" dirty="0"/>
           </a:p>
         </p:txBody>
       </p:sp>
@@ -6344,17 +6425,17 @@
         </p:nvSpPr>
         <p:spPr>
           <a:xfrm>
-            <a:off x="7799832" y="5001768"/>
-            <a:ext cx="3145536" cy="502920"/>
-          </a:xfrm>
-          <a:prstGeom prst="rect">
-            <a:avLst/>
-          </a:prstGeom>
-          <a:noFill/>
-          <a:ln/>
-        </p:spPr>
-        <p:txBody>
-          <a:bodyPr wrap="square" lIns="0" tIns="0" rIns="0" bIns="0" rtlCol="0" anchor="t">
+            <a:off x="7799832" y="4974336"/>
+            <a:ext cx="3145536" cy="576072"/>
+          </a:xfrm>
+          <a:prstGeom prst="rect">
+            <a:avLst/>
+          </a:prstGeom>
+          <a:noFill/>
+          <a:ln/>
+        </p:spPr>
+        <p:txBody>
+          <a:bodyPr wrap="square" lIns="254" tIns="254" rIns="254" bIns="254" rtlCol="0" anchor="t">
             <a:normAutofit/>
           </a:bodyPr>
           <a:lstStyle/>
@@ -6363,7 +6444,7 @@
               <a:buNone/>
             </a:pPr>
             <a:r>
-              <a:rPr lang="en-US" sz="1550" dirty="0">
+              <a:rPr lang="en-US" sz="1320" dirty="0">
                 <a:solidFill>
                   <a:srgbClr val="17364A"/>
                 </a:solidFill>
@@ -6371,9 +6452,9 @@
                 <a:ea typeface="Aptos" pitchFamily="34" charset="-122"/>
                 <a:cs typeface="Aptos" pitchFamily="34" charset="-120"/>
               </a:rPr>
-              <a:t>Connect the concept to data quality, model performance, validation evidence, monitoring measures, and decisions that remain under human control.</a:t>
-            </a:r>
-            <a:endParaRPr lang="en-US" sz="1550" dirty="0"/>
+              <a:t>Connect the concept to data quality, model performance, validation evidence, monitoring measures, and decisions that.</a:t>
+            </a:r>
+            <a:endParaRPr lang="en-US" sz="1320" dirty="0"/>
           </a:p>
         </p:txBody>
       </p:sp>
@@ -6674,35 +6755,41 @@
           <a:ln/>
         </p:spPr>
         <p:txBody>
-          <a:bodyPr wrap="square" lIns="635" tIns="635" rIns="635" bIns="635" rtlCol="0" anchor="t">
+          <a:bodyPr wrap="square" lIns="1016" tIns="1016" rIns="1016" bIns="1016" rtlCol="0" anchor="t">
             <a:normAutofit/>
           </a:bodyPr>
           <a:lstStyle/>
           <a:p>
+            <a:pPr indent="0" marL="0">
+              <a:buNone/>
+            </a:pPr>
             <a:r>
               <a:rPr lang="en-US" sz="2100" dirty="0">
                 <a:solidFill>
-                  <a:srgbClr val="17364A"/>
-                </a:solidFill>
-                <a:latin typeface="Aptos" pitchFamily="34" charset="0"/>
-                <a:ea typeface="Aptos" pitchFamily="34" charset="-122"/>
-                <a:cs typeface="Aptos" pitchFamily="34" charset="-120"/>
-              </a:rPr>
-              <a:t>Create a one-page model communication brief.</a:t>
+                  <a:srgbClr val="003A63"/>
+                </a:solidFill>
+                <a:latin typeface="Aptos" pitchFamily="34" charset="0"/>
+                <a:ea typeface="Aptos" pitchFamily="34" charset="-122"/>
+                <a:cs typeface="Aptos" pitchFamily="34" charset="-120"/>
+              </a:rPr>
+              <a:t>• Create a one-page model communication brief.</a:t>
             </a:r>
             <a:endParaRPr lang="en-US" sz="2100" dirty="0"/>
           </a:p>
           <a:p>
+            <a:pPr indent="0" marL="0">
+              <a:buNone/>
+            </a:pPr>
             <a:r>
               <a:rPr lang="en-US" sz="2100" dirty="0">
                 <a:solidFill>
-                  <a:srgbClr val="17364A"/>
-                </a:solidFill>
-                <a:latin typeface="Aptos" pitchFamily="34" charset="0"/>
-                <a:ea typeface="Aptos" pitchFamily="34" charset="-122"/>
-                <a:cs typeface="Aptos" pitchFamily="34" charset="-120"/>
-              </a:rPr>
-              <a:t>Include the decision question, model result, uncertainty, validation status, limitations, subgroup.</a:t>
+                  <a:srgbClr val="003A63"/>
+                </a:solidFill>
+                <a:latin typeface="Aptos" pitchFamily="34" charset="0"/>
+                <a:ea typeface="Aptos" pitchFamily="34" charset="-122"/>
+                <a:cs typeface="Aptos" pitchFamily="34" charset="-120"/>
+              </a:rPr>
+              <a:t>• Include the decision question, model result, uncertainty, validation status, limitations,.</a:t>
             </a:r>
             <a:endParaRPr lang="en-US" sz="2100" dirty="0"/>
           </a:p>
@@ -6782,17 +6869,17 @@
         </p:nvSpPr>
         <p:spPr>
           <a:xfrm>
-            <a:off x="7799832" y="1828800"/>
-            <a:ext cx="3145536" cy="685800"/>
-          </a:xfrm>
-          <a:prstGeom prst="rect">
-            <a:avLst/>
-          </a:prstGeom>
-          <a:noFill/>
-          <a:ln/>
-        </p:spPr>
-        <p:txBody>
-          <a:bodyPr wrap="square" lIns="0" tIns="0" rIns="0" bIns="0" rtlCol="0" anchor="t">
+            <a:off x="7799832" y="1801368"/>
+            <a:ext cx="3145536" cy="758952"/>
+          </a:xfrm>
+          <a:prstGeom prst="rect">
+            <a:avLst/>
+          </a:prstGeom>
+          <a:noFill/>
+          <a:ln/>
+        </p:spPr>
+        <p:txBody>
+          <a:bodyPr wrap="square" lIns="254" tIns="254" rIns="254" bIns="254" rtlCol="0" anchor="t">
             <a:normAutofit/>
           </a:bodyPr>
           <a:lstStyle/>
@@ -6801,7 +6888,7 @@
               <a:buNone/>
             </a:pPr>
             <a:r>
-              <a:rPr lang="en-US" sz="1550" dirty="0">
+              <a:rPr lang="en-US" sz="1320" dirty="0">
                 <a:solidFill>
                   <a:srgbClr val="17364A"/>
                 </a:solidFill>
@@ -6811,7 +6898,7 @@
               </a:rPr>
               <a:t>Create a one-page model communication brief.</a:t>
             </a:r>
-            <a:endParaRPr lang="en-US" sz="1550" dirty="0"/>
+            <a:endParaRPr lang="en-US" sz="1320" dirty="0"/>
           </a:p>
         </p:txBody>
       </p:sp>
@@ -6899,13 +6986,16 @@
           <a:ln/>
         </p:spPr>
         <p:txBody>
-          <a:bodyPr wrap="square" lIns="254" tIns="254" rIns="254" bIns="254" rtlCol="0" anchor="t">
+          <a:bodyPr wrap="square" lIns="508" tIns="508" rIns="508" bIns="508" rtlCol="0" anchor="t">
             <a:normAutofit/>
           </a:bodyPr>
           <a:lstStyle/>
           <a:p>
-            <a:r>
-              <a:rPr lang="en-US" sz="1380" dirty="0">
+            <a:pPr indent="0" marL="0">
+              <a:buNone/>
+            </a:pPr>
+            <a:r>
+              <a:rPr lang="en-US" sz="1220" dirty="0">
                 <a:solidFill>
                   <a:srgbClr val="17364A"/>
                 </a:solidFill>
@@ -6915,11 +7005,14 @@
               </a:rPr>
               <a:t>Create a one-page model communication brief.</a:t>
             </a:r>
-            <a:endParaRPr lang="en-US" sz="1380" dirty="0"/>
-          </a:p>
-          <a:p>
-            <a:r>
-              <a:rPr lang="en-US" sz="1380" dirty="0">
+            <a:endParaRPr lang="en-US" sz="1220" dirty="0"/>
+          </a:p>
+          <a:p>
+            <a:pPr indent="0" marL="0">
+              <a:buNone/>
+            </a:pPr>
+            <a:r>
+              <a:rPr lang="en-US" sz="1220" dirty="0">
                 <a:solidFill>
                   <a:srgbClr val="17364A"/>
                 </a:solidFill>
@@ -6927,9 +7020,9 @@
                 <a:ea typeface="Aptos" pitchFamily="34" charset="-122"/>
                 <a:cs typeface="Aptos" pitchFamily="34" charset="-120"/>
               </a:rPr>
-              <a:t>Include the decision question, model result, uncertainty, validation status, limitations,.</a:t>
-            </a:r>
-            <a:endParaRPr lang="en-US" sz="1380" dirty="0"/>
+              <a:t>Include the decision question, model result, uncertainty,.</a:t>
+            </a:r>
+            <a:endParaRPr lang="en-US" sz="1220" dirty="0"/>
           </a:p>
         </p:txBody>
       </p:sp>
@@ -7007,17 +7100,17 @@
         </p:nvSpPr>
         <p:spPr>
           <a:xfrm>
-            <a:off x="7799832" y="5001768"/>
-            <a:ext cx="3145536" cy="502920"/>
-          </a:xfrm>
-          <a:prstGeom prst="rect">
-            <a:avLst/>
-          </a:prstGeom>
-          <a:noFill/>
-          <a:ln/>
-        </p:spPr>
-        <p:txBody>
-          <a:bodyPr wrap="square" lIns="0" tIns="0" rIns="0" bIns="0" rtlCol="0" anchor="t">
+            <a:off x="7799832" y="4974336"/>
+            <a:ext cx="3145536" cy="576072"/>
+          </a:xfrm>
+          <a:prstGeom prst="rect">
+            <a:avLst/>
+          </a:prstGeom>
+          <a:noFill/>
+          <a:ln/>
+        </p:spPr>
+        <p:txBody>
+          <a:bodyPr wrap="square" lIns="254" tIns="254" rIns="254" bIns="254" rtlCol="0" anchor="t">
             <a:normAutofit/>
           </a:bodyPr>
           <a:lstStyle/>
@@ -7026,7 +7119,7 @@
               <a:buNone/>
             </a:pPr>
             <a:r>
-              <a:rPr lang="en-US" sz="1550" dirty="0">
+              <a:rPr lang="en-US" sz="1320" dirty="0">
                 <a:solidFill>
                   <a:srgbClr val="17364A"/>
                 </a:solidFill>
@@ -7034,9 +7127,9 @@
                 <a:ea typeface="Aptos" pitchFamily="34" charset="-122"/>
                 <a:cs typeface="Aptos" pitchFamily="34" charset="-120"/>
               </a:rPr>
-              <a:t>Use the assignment to test whether you can explain the concept, apply it to a realistic public health situation, and identify what would need review before the work moves forward.</a:t>
-            </a:r>
-            <a:endParaRPr lang="en-US" sz="1550" dirty="0"/>
+              <a:t>Use the assignment to test whether you can explain the concept, apply it to a realistic public health situation, and.</a:t>
+            </a:r>
+            <a:endParaRPr lang="en-US" sz="1320" dirty="0"/>
           </a:p>
         </p:txBody>
       </p:sp>
@@ -7337,49 +7430,58 @@
           <a:ln/>
         </p:spPr>
         <p:txBody>
-          <a:bodyPr wrap="square" lIns="635" tIns="635" rIns="635" bIns="635" rtlCol="0" anchor="t">
+          <a:bodyPr wrap="square" lIns="1016" tIns="1016" rIns="1016" bIns="1016" rtlCol="0" anchor="t">
             <a:normAutofit/>
           </a:bodyPr>
           <a:lstStyle/>
           <a:p>
+            <a:pPr indent="0" marL="0">
+              <a:buNone/>
+            </a:pPr>
             <a:r>
               <a:rPr lang="en-US" sz="2100" dirty="0">
                 <a:solidFill>
-                  <a:srgbClr val="17364A"/>
-                </a:solidFill>
-                <a:latin typeface="Aptos" pitchFamily="34" charset="0"/>
-                <a:ea typeface="Aptos" pitchFamily="34" charset="-122"/>
-                <a:cs typeface="Aptos" pitchFamily="34" charset="-120"/>
-              </a:rPr>
-              <a:t>Model communication brief</a:t>
+                  <a:srgbClr val="003A63"/>
+                </a:solidFill>
+                <a:latin typeface="Aptos" pitchFamily="34" charset="0"/>
+                <a:ea typeface="Aptos" pitchFamily="34" charset="-122"/>
+                <a:cs typeface="Aptos" pitchFamily="34" charset="-120"/>
+              </a:rPr>
+              <a:t>• Model communication brief</a:t>
             </a:r>
             <a:endParaRPr lang="en-US" sz="2100" dirty="0"/>
           </a:p>
           <a:p>
+            <a:pPr indent="0" marL="0">
+              <a:buNone/>
+            </a:pPr>
             <a:r>
               <a:rPr lang="en-US" sz="2100" dirty="0">
                 <a:solidFill>
-                  <a:srgbClr val="17364A"/>
-                </a:solidFill>
-                <a:latin typeface="Aptos" pitchFamily="34" charset="0"/>
-                <a:ea typeface="Aptos" pitchFamily="34" charset="-122"/>
-                <a:cs typeface="Aptos" pitchFamily="34" charset="-120"/>
-              </a:rPr>
-              <a:t>Plain-language uncertainty statement</a:t>
+                  <a:srgbClr val="003A63"/>
+                </a:solidFill>
+                <a:latin typeface="Aptos" pitchFamily="34" charset="0"/>
+                <a:ea typeface="Aptos" pitchFamily="34" charset="-122"/>
+                <a:cs typeface="Aptos" pitchFamily="34" charset="-120"/>
+              </a:rPr>
+              <a:t>• Plain-language uncertainty statement</a:t>
             </a:r>
             <a:endParaRPr lang="en-US" sz="2100" dirty="0"/>
           </a:p>
           <a:p>
+            <a:pPr indent="0" marL="0">
+              <a:buNone/>
+            </a:pPr>
             <a:r>
               <a:rPr lang="en-US" sz="2100" dirty="0">
                 <a:solidFill>
-                  <a:srgbClr val="17364A"/>
-                </a:solidFill>
-                <a:latin typeface="Aptos" pitchFamily="34" charset="0"/>
-                <a:ea typeface="Aptos" pitchFamily="34" charset="-122"/>
-                <a:cs typeface="Aptos" pitchFamily="34" charset="-120"/>
-              </a:rPr>
-              <a:t>Subgroup caveat if relevant</a:t>
+                  <a:srgbClr val="003A63"/>
+                </a:solidFill>
+                <a:latin typeface="Aptos" pitchFamily="34" charset="0"/>
+                <a:ea typeface="Aptos" pitchFamily="34" charset="-122"/>
+                <a:cs typeface="Aptos" pitchFamily="34" charset="-120"/>
+              </a:rPr>
+              <a:t>• Subgroup caveat if relevant</a:t>
             </a:r>
             <a:endParaRPr lang="en-US" sz="2100" dirty="0"/>
           </a:p>
@@ -7459,17 +7561,17 @@
         </p:nvSpPr>
         <p:spPr>
           <a:xfrm>
-            <a:off x="7799832" y="1828800"/>
-            <a:ext cx="3145536" cy="685800"/>
-          </a:xfrm>
-          <a:prstGeom prst="rect">
-            <a:avLst/>
-          </a:prstGeom>
-          <a:noFill/>
-          <a:ln/>
-        </p:spPr>
-        <p:txBody>
-          <a:bodyPr wrap="square" lIns="0" tIns="0" rIns="0" bIns="0" rtlCol="0" anchor="t">
+            <a:off x="7799832" y="1801368"/>
+            <a:ext cx="3145536" cy="758952"/>
+          </a:xfrm>
+          <a:prstGeom prst="rect">
+            <a:avLst/>
+          </a:prstGeom>
+          <a:noFill/>
+          <a:ln/>
+        </p:spPr>
+        <p:txBody>
+          <a:bodyPr wrap="square" lIns="254" tIns="254" rIns="254" bIns="254" rtlCol="0" anchor="t">
             <a:normAutofit/>
           </a:bodyPr>
           <a:lstStyle/>
@@ -7478,7 +7580,7 @@
               <a:buNone/>
             </a:pPr>
             <a:r>
-              <a:rPr lang="en-US" sz="1550" dirty="0">
+              <a:rPr lang="en-US" sz="1320" dirty="0">
                 <a:solidFill>
                   <a:srgbClr val="17364A"/>
                 </a:solidFill>
@@ -7488,7 +7590,7 @@
               </a:rPr>
               <a:t>Model communication brief</a:t>
             </a:r>
-            <a:endParaRPr lang="en-US" sz="1550" dirty="0"/>
+            <a:endParaRPr lang="en-US" sz="1320" dirty="0"/>
           </a:p>
         </p:txBody>
       </p:sp>
@@ -7576,13 +7678,16 @@
           <a:ln/>
         </p:spPr>
         <p:txBody>
-          <a:bodyPr wrap="square" lIns="254" tIns="254" rIns="254" bIns="254" rtlCol="0" anchor="t">
+          <a:bodyPr wrap="square" lIns="508" tIns="508" rIns="508" bIns="508" rtlCol="0" anchor="t">
             <a:normAutofit/>
           </a:bodyPr>
           <a:lstStyle/>
           <a:p>
-            <a:r>
-              <a:rPr lang="en-US" sz="1380" dirty="0">
+            <a:pPr indent="0" marL="0">
+              <a:buNone/>
+            </a:pPr>
+            <a:r>
+              <a:rPr lang="en-US" sz="1220" dirty="0">
                 <a:solidFill>
                   <a:srgbClr val="17364A"/>
                 </a:solidFill>
@@ -7592,11 +7697,14 @@
               </a:rPr>
               <a:t>Model communication brief</a:t>
             </a:r>
-            <a:endParaRPr lang="en-US" sz="1380" dirty="0"/>
-          </a:p>
-          <a:p>
-            <a:r>
-              <a:rPr lang="en-US" sz="1380" dirty="0">
+            <a:endParaRPr lang="en-US" sz="1220" dirty="0"/>
+          </a:p>
+          <a:p>
+            <a:pPr indent="0" marL="0">
+              <a:buNone/>
+            </a:pPr>
+            <a:r>
+              <a:rPr lang="en-US" sz="1220" dirty="0">
                 <a:solidFill>
                   <a:srgbClr val="17364A"/>
                 </a:solidFill>
@@ -7606,11 +7714,14 @@
               </a:rPr>
               <a:t>Plain-language uncertainty statement</a:t>
             </a:r>
-            <a:endParaRPr lang="en-US" sz="1380" dirty="0"/>
-          </a:p>
-          <a:p>
-            <a:r>
-              <a:rPr lang="en-US" sz="1380" dirty="0">
+            <a:endParaRPr lang="en-US" sz="1220" dirty="0"/>
+          </a:p>
+          <a:p>
+            <a:pPr indent="0" marL="0">
+              <a:buNone/>
+            </a:pPr>
+            <a:r>
+              <a:rPr lang="en-US" sz="1220" dirty="0">
                 <a:solidFill>
                   <a:srgbClr val="17364A"/>
                 </a:solidFill>
@@ -7620,7 +7731,7 @@
               </a:rPr>
               <a:t>Subgroup caveat if relevant</a:t>
             </a:r>
-            <a:endParaRPr lang="en-US" sz="1380" dirty="0"/>
+            <a:endParaRPr lang="en-US" sz="1220" dirty="0"/>
           </a:p>
         </p:txBody>
       </p:sp>
@@ -7698,17 +7809,17 @@
         </p:nvSpPr>
         <p:spPr>
           <a:xfrm>
-            <a:off x="7799832" y="5001768"/>
-            <a:ext cx="3145536" cy="502920"/>
-          </a:xfrm>
-          <a:prstGeom prst="rect">
-            <a:avLst/>
-          </a:prstGeom>
-          <a:noFill/>
-          <a:ln/>
-        </p:spPr>
-        <p:txBody>
-          <a:bodyPr wrap="square" lIns="0" tIns="0" rIns="0" bIns="0" rtlCol="0" anchor="t">
+            <a:off x="7799832" y="4974336"/>
+            <a:ext cx="3145536" cy="576072"/>
+          </a:xfrm>
+          <a:prstGeom prst="rect">
+            <a:avLst/>
+          </a:prstGeom>
+          <a:noFill/>
+          <a:ln/>
+        </p:spPr>
+        <p:txBody>
+          <a:bodyPr wrap="square" lIns="254" tIns="254" rIns="254" bIns="254" rtlCol="0" anchor="t">
             <a:normAutofit/>
           </a:bodyPr>
           <a:lstStyle/>
@@ -7717,7 +7828,7 @@
               <a:buNone/>
             </a:pPr>
             <a:r>
-              <a:rPr lang="en-US" sz="1550" dirty="0">
+              <a:rPr lang="en-US" sz="1320" dirty="0">
                 <a:solidFill>
                   <a:srgbClr val="17364A"/>
                 </a:solidFill>
@@ -7725,9 +7836,9 @@
                 <a:ea typeface="Aptos" pitchFamily="34" charset="-122"/>
                 <a:cs typeface="Aptos" pitchFamily="34" charset="-120"/>
               </a:rPr>
-              <a:t>Connect the concept to data quality, model performance, validation evidence, monitoring measures, and decisions that remain under human control.</a:t>
-            </a:r>
-            <a:endParaRPr lang="en-US" sz="1550" dirty="0"/>
+              <a:t>Connect the concept to data quality, model performance, validation evidence, monitoring measures, and decisions that.</a:t>
+            </a:r>
+            <a:endParaRPr lang="en-US" sz="1320" dirty="0"/>
           </a:p>
         </p:txBody>
       </p:sp>
@@ -8028,21 +8139,24 @@
           <a:ln/>
         </p:spPr>
         <p:txBody>
-          <a:bodyPr wrap="square" lIns="635" tIns="635" rIns="635" bIns="635" rtlCol="0" anchor="t">
+          <a:bodyPr wrap="square" lIns="1016" tIns="1016" rIns="1016" bIns="1016" rtlCol="0" anchor="t">
             <a:normAutofit/>
           </a:bodyPr>
           <a:lstStyle/>
           <a:p>
+            <a:pPr indent="0" marL="0">
+              <a:buNone/>
+            </a:pPr>
             <a:r>
               <a:rPr lang="en-US" sz="2100" dirty="0">
                 <a:solidFill>
-                  <a:srgbClr val="17364A"/>
-                </a:solidFill>
-                <a:latin typeface="Aptos" pitchFamily="34" charset="0"/>
-                <a:ea typeface="Aptos" pitchFamily="34" charset="-122"/>
-                <a:cs typeface="Aptos" pitchFamily="34" charset="-120"/>
-              </a:rPr>
-              <a:t>Review sign-off note</a:t>
+                  <a:srgbClr val="003A63"/>
+                </a:solidFill>
+                <a:latin typeface="Aptos" pitchFamily="34" charset="0"/>
+                <a:ea typeface="Aptos" pitchFamily="34" charset="-122"/>
+                <a:cs typeface="Aptos" pitchFamily="34" charset="-120"/>
+              </a:rPr>
+              <a:t>• Review sign-off note</a:t>
             </a:r>
             <a:endParaRPr lang="en-US" sz="2100" dirty="0"/>
           </a:p>
@@ -8122,17 +8236,17 @@
         </p:nvSpPr>
         <p:spPr>
           <a:xfrm>
-            <a:off x="7799832" y="1828800"/>
-            <a:ext cx="3145536" cy="685800"/>
-          </a:xfrm>
-          <a:prstGeom prst="rect">
-            <a:avLst/>
-          </a:prstGeom>
-          <a:noFill/>
-          <a:ln/>
-        </p:spPr>
-        <p:txBody>
-          <a:bodyPr wrap="square" lIns="0" tIns="0" rIns="0" bIns="0" rtlCol="0" anchor="t">
+            <a:off x="7799832" y="1801368"/>
+            <a:ext cx="3145536" cy="758952"/>
+          </a:xfrm>
+          <a:prstGeom prst="rect">
+            <a:avLst/>
+          </a:prstGeom>
+          <a:noFill/>
+          <a:ln/>
+        </p:spPr>
+        <p:txBody>
+          <a:bodyPr wrap="square" lIns="254" tIns="254" rIns="254" bIns="254" rtlCol="0" anchor="t">
             <a:normAutofit/>
           </a:bodyPr>
           <a:lstStyle/>
@@ -8141,7 +8255,7 @@
               <a:buNone/>
             </a:pPr>
             <a:r>
-              <a:rPr lang="en-US" sz="1550" dirty="0">
+              <a:rPr lang="en-US" sz="1320" dirty="0">
                 <a:solidFill>
                   <a:srgbClr val="17364A"/>
                 </a:solidFill>
@@ -8151,7 +8265,7 @@
               </a:rPr>
               <a:t>Review sign-off note</a:t>
             </a:r>
-            <a:endParaRPr lang="en-US" sz="1550" dirty="0"/>
+            <a:endParaRPr lang="en-US" sz="1320" dirty="0"/>
           </a:p>
         </p:txBody>
       </p:sp>
@@ -8239,13 +8353,16 @@
           <a:ln/>
         </p:spPr>
         <p:txBody>
-          <a:bodyPr wrap="square" lIns="254" tIns="254" rIns="254" bIns="254" rtlCol="0" anchor="t">
+          <a:bodyPr wrap="square" lIns="508" tIns="508" rIns="508" bIns="508" rtlCol="0" anchor="t">
             <a:normAutofit/>
           </a:bodyPr>
           <a:lstStyle/>
           <a:p>
-            <a:r>
-              <a:rPr lang="en-US" sz="1380" dirty="0">
+            <a:pPr indent="0" marL="0">
+              <a:buNone/>
+            </a:pPr>
+            <a:r>
+              <a:rPr lang="en-US" sz="1220" dirty="0">
                 <a:solidFill>
                   <a:srgbClr val="17364A"/>
                 </a:solidFill>
@@ -8255,7 +8372,7 @@
               </a:rPr>
               <a:t>Review sign-off note</a:t>
             </a:r>
-            <a:endParaRPr lang="en-US" sz="1380" dirty="0"/>
+            <a:endParaRPr lang="en-US" sz="1220" dirty="0"/>
           </a:p>
         </p:txBody>
       </p:sp>
@@ -8333,17 +8450,17 @@
         </p:nvSpPr>
         <p:spPr>
           <a:xfrm>
-            <a:off x="7799832" y="5001768"/>
-            <a:ext cx="3145536" cy="502920"/>
-          </a:xfrm>
-          <a:prstGeom prst="rect">
-            <a:avLst/>
-          </a:prstGeom>
-          <a:noFill/>
-          <a:ln/>
-        </p:spPr>
-        <p:txBody>
-          <a:bodyPr wrap="square" lIns="0" tIns="0" rIns="0" bIns="0" rtlCol="0" anchor="t">
+            <a:off x="7799832" y="4974336"/>
+            <a:ext cx="3145536" cy="576072"/>
+          </a:xfrm>
+          <a:prstGeom prst="rect">
+            <a:avLst/>
+          </a:prstGeom>
+          <a:noFill/>
+          <a:ln/>
+        </p:spPr>
+        <p:txBody>
+          <a:bodyPr wrap="square" lIns="254" tIns="254" rIns="254" bIns="254" rtlCol="0" anchor="t">
             <a:normAutofit/>
           </a:bodyPr>
           <a:lstStyle/>
@@ -8352,7 +8469,7 @@
               <a:buNone/>
             </a:pPr>
             <a:r>
-              <a:rPr lang="en-US" sz="1550" dirty="0">
+              <a:rPr lang="en-US" sz="1320" dirty="0">
                 <a:solidFill>
                   <a:srgbClr val="17364A"/>
                 </a:solidFill>
@@ -8360,9 +8477,9 @@
                 <a:ea typeface="Aptos" pitchFamily="34" charset="-122"/>
                 <a:cs typeface="Aptos" pitchFamily="34" charset="-120"/>
               </a:rPr>
-              <a:t>Connect the concept to data quality, model performance, validation evidence, monitoring measures, and decisions that remain under human control.</a:t>
-            </a:r>
-            <a:endParaRPr lang="en-US" sz="1550" dirty="0"/>
+              <a:t>Connect the concept to data quality, model performance, validation evidence, monitoring measures, and decisions that.</a:t>
+            </a:r>
+            <a:endParaRPr lang="en-US" sz="1320" dirty="0"/>
           </a:p>
         </p:txBody>
       </p:sp>
@@ -8663,49 +8780,58 @@
           <a:ln/>
         </p:spPr>
         <p:txBody>
-          <a:bodyPr wrap="square" lIns="635" tIns="635" rIns="635" bIns="635" rtlCol="0" anchor="t">
+          <a:bodyPr wrap="square" lIns="1016" tIns="1016" rIns="1016" bIns="1016" rtlCol="0" anchor="t">
             <a:normAutofit/>
           </a:bodyPr>
           <a:lstStyle/>
           <a:p>
+            <a:pPr indent="0" marL="0">
+              <a:buNone/>
+            </a:pPr>
             <a:r>
               <a:rPr lang="en-US" sz="2100" dirty="0">
                 <a:solidFill>
-                  <a:srgbClr val="17364A"/>
-                </a:solidFill>
-                <a:latin typeface="Aptos" pitchFamily="34" charset="0"/>
-                <a:ea typeface="Aptos" pitchFamily="34" charset="-122"/>
-                <a:cs typeface="Aptos" pitchFamily="34" charset="-120"/>
-              </a:rPr>
-              <a:t>Model communication brief</a:t>
+                  <a:srgbClr val="003A63"/>
+                </a:solidFill>
+                <a:latin typeface="Aptos" pitchFamily="34" charset="0"/>
+                <a:ea typeface="Aptos" pitchFamily="34" charset="-122"/>
+                <a:cs typeface="Aptos" pitchFamily="34" charset="-120"/>
+              </a:rPr>
+              <a:t>• Model communication brief</a:t>
             </a:r>
             <a:endParaRPr lang="en-US" sz="2100" dirty="0"/>
           </a:p>
           <a:p>
+            <a:pPr indent="0" marL="0">
+              <a:buNone/>
+            </a:pPr>
             <a:r>
               <a:rPr lang="en-US" sz="2100" dirty="0">
                 <a:solidFill>
-                  <a:srgbClr val="17364A"/>
-                </a:solidFill>
-                <a:latin typeface="Aptos" pitchFamily="34" charset="0"/>
-                <a:ea typeface="Aptos" pitchFamily="34" charset="-122"/>
-                <a:cs typeface="Aptos" pitchFamily="34" charset="-120"/>
-              </a:rPr>
-              <a:t>Plain-language uncertainty statement</a:t>
+                  <a:srgbClr val="003A63"/>
+                </a:solidFill>
+                <a:latin typeface="Aptos" pitchFamily="34" charset="0"/>
+                <a:ea typeface="Aptos" pitchFamily="34" charset="-122"/>
+                <a:cs typeface="Aptos" pitchFamily="34" charset="-120"/>
+              </a:rPr>
+              <a:t>• Plain-language uncertainty statement</a:t>
             </a:r>
             <a:endParaRPr lang="en-US" sz="2100" dirty="0"/>
           </a:p>
           <a:p>
+            <a:pPr indent="0" marL="0">
+              <a:buNone/>
+            </a:pPr>
             <a:r>
               <a:rPr lang="en-US" sz="2100" dirty="0">
                 <a:solidFill>
-                  <a:srgbClr val="17364A"/>
-                </a:solidFill>
-                <a:latin typeface="Aptos" pitchFamily="34" charset="0"/>
-                <a:ea typeface="Aptos" pitchFamily="34" charset="-122"/>
-                <a:cs typeface="Aptos" pitchFamily="34" charset="-120"/>
-              </a:rPr>
-              <a:t>Subgroup caveat if relevant</a:t>
+                  <a:srgbClr val="003A63"/>
+                </a:solidFill>
+                <a:latin typeface="Aptos" pitchFamily="34" charset="0"/>
+                <a:ea typeface="Aptos" pitchFamily="34" charset="-122"/>
+                <a:cs typeface="Aptos" pitchFamily="34" charset="-120"/>
+              </a:rPr>
+              <a:t>• Subgroup caveat if relevant</a:t>
             </a:r>
             <a:endParaRPr lang="en-US" sz="2100" dirty="0"/>
           </a:p>
@@ -8785,17 +8911,17 @@
         </p:nvSpPr>
         <p:spPr>
           <a:xfrm>
-            <a:off x="7799832" y="1828800"/>
-            <a:ext cx="3145536" cy="685800"/>
-          </a:xfrm>
-          <a:prstGeom prst="rect">
-            <a:avLst/>
-          </a:prstGeom>
-          <a:noFill/>
-          <a:ln/>
-        </p:spPr>
-        <p:txBody>
-          <a:bodyPr wrap="square" lIns="0" tIns="0" rIns="0" bIns="0" rtlCol="0" anchor="t">
+            <a:off x="7799832" y="1801368"/>
+            <a:ext cx="3145536" cy="758952"/>
+          </a:xfrm>
+          <a:prstGeom prst="rect">
+            <a:avLst/>
+          </a:prstGeom>
+          <a:noFill/>
+          <a:ln/>
+        </p:spPr>
+        <p:txBody>
+          <a:bodyPr wrap="square" lIns="254" tIns="254" rIns="254" bIns="254" rtlCol="0" anchor="t">
             <a:normAutofit/>
           </a:bodyPr>
           <a:lstStyle/>
@@ -8804,7 +8930,7 @@
               <a:buNone/>
             </a:pPr>
             <a:r>
-              <a:rPr lang="en-US" sz="1550" dirty="0">
+              <a:rPr lang="en-US" sz="1320" dirty="0">
                 <a:solidFill>
                   <a:srgbClr val="17364A"/>
                 </a:solidFill>
@@ -8814,7 +8940,7 @@
               </a:rPr>
               <a:t>Model communication brief</a:t>
             </a:r>
-            <a:endParaRPr lang="en-US" sz="1550" dirty="0"/>
+            <a:endParaRPr lang="en-US" sz="1320" dirty="0"/>
           </a:p>
         </p:txBody>
       </p:sp>
@@ -8902,13 +9028,16 @@
           <a:ln/>
         </p:spPr>
         <p:txBody>
-          <a:bodyPr wrap="square" lIns="254" tIns="254" rIns="254" bIns="254" rtlCol="0" anchor="t">
+          <a:bodyPr wrap="square" lIns="508" tIns="508" rIns="508" bIns="508" rtlCol="0" anchor="t">
             <a:normAutofit/>
           </a:bodyPr>
           <a:lstStyle/>
           <a:p>
-            <a:r>
-              <a:rPr lang="en-US" sz="1380" dirty="0">
+            <a:pPr indent="0" marL="0">
+              <a:buNone/>
+            </a:pPr>
+            <a:r>
+              <a:rPr lang="en-US" sz="1220" dirty="0">
                 <a:solidFill>
                   <a:srgbClr val="17364A"/>
                 </a:solidFill>
@@ -8918,11 +9047,14 @@
               </a:rPr>
               <a:t>Model communication brief</a:t>
             </a:r>
-            <a:endParaRPr lang="en-US" sz="1380" dirty="0"/>
-          </a:p>
-          <a:p>
-            <a:r>
-              <a:rPr lang="en-US" sz="1380" dirty="0">
+            <a:endParaRPr lang="en-US" sz="1220" dirty="0"/>
+          </a:p>
+          <a:p>
+            <a:pPr indent="0" marL="0">
+              <a:buNone/>
+            </a:pPr>
+            <a:r>
+              <a:rPr lang="en-US" sz="1220" dirty="0">
                 <a:solidFill>
                   <a:srgbClr val="17364A"/>
                 </a:solidFill>
@@ -8932,11 +9064,14 @@
               </a:rPr>
               <a:t>Plain-language uncertainty statement</a:t>
             </a:r>
-            <a:endParaRPr lang="en-US" sz="1380" dirty="0"/>
-          </a:p>
-          <a:p>
-            <a:r>
-              <a:rPr lang="en-US" sz="1380" dirty="0">
+            <a:endParaRPr lang="en-US" sz="1220" dirty="0"/>
+          </a:p>
+          <a:p>
+            <a:pPr indent="0" marL="0">
+              <a:buNone/>
+            </a:pPr>
+            <a:r>
+              <a:rPr lang="en-US" sz="1220" dirty="0">
                 <a:solidFill>
                   <a:srgbClr val="17364A"/>
                 </a:solidFill>
@@ -8946,7 +9081,7 @@
               </a:rPr>
               <a:t>Subgroup caveat if relevant</a:t>
             </a:r>
-            <a:endParaRPr lang="en-US" sz="1380" dirty="0"/>
+            <a:endParaRPr lang="en-US" sz="1220" dirty="0"/>
           </a:p>
         </p:txBody>
       </p:sp>
@@ -9024,17 +9159,17 @@
         </p:nvSpPr>
         <p:spPr>
           <a:xfrm>
-            <a:off x="7799832" y="5001768"/>
-            <a:ext cx="3145536" cy="502920"/>
-          </a:xfrm>
-          <a:prstGeom prst="rect">
-            <a:avLst/>
-          </a:prstGeom>
-          <a:noFill/>
-          <a:ln/>
-        </p:spPr>
-        <p:txBody>
-          <a:bodyPr wrap="square" lIns="0" tIns="0" rIns="0" bIns="0" rtlCol="0" anchor="t">
+            <a:off x="7799832" y="4974336"/>
+            <a:ext cx="3145536" cy="576072"/>
+          </a:xfrm>
+          <a:prstGeom prst="rect">
+            <a:avLst/>
+          </a:prstGeom>
+          <a:noFill/>
+          <a:ln/>
+        </p:spPr>
+        <p:txBody>
+          <a:bodyPr wrap="square" lIns="254" tIns="254" rIns="254" bIns="254" rtlCol="0" anchor="t">
             <a:normAutofit/>
           </a:bodyPr>
           <a:lstStyle/>
@@ -9043,7 +9178,7 @@
               <a:buNone/>
             </a:pPr>
             <a:r>
-              <a:rPr lang="en-US" sz="1550" dirty="0">
+              <a:rPr lang="en-US" sz="1320" dirty="0">
                 <a:solidFill>
                   <a:srgbClr val="17364A"/>
                 </a:solidFill>
@@ -9051,9 +9186,9 @@
                 <a:ea typeface="Aptos" pitchFamily="34" charset="-122"/>
                 <a:cs typeface="Aptos" pitchFamily="34" charset="-120"/>
               </a:rPr>
-              <a:t>Use the assignment to test whether you can explain the concept, apply it to a realistic public health situation, and identify what would need review before the work moves forward.</a:t>
-            </a:r>
-            <a:endParaRPr lang="en-US" sz="1550" dirty="0"/>
+              <a:t>Use the assignment to test whether you can explain the concept, apply it to a realistic public health situation, and.</a:t>
+            </a:r>
+            <a:endParaRPr lang="en-US" sz="1320" dirty="0"/>
           </a:p>
         </p:txBody>
       </p:sp>
@@ -9354,49 +9489,58 @@
           <a:ln/>
         </p:spPr>
         <p:txBody>
-          <a:bodyPr wrap="square" lIns="635" tIns="635" rIns="635" bIns="635" rtlCol="0" anchor="t">
+          <a:bodyPr wrap="square" lIns="1016" tIns="1016" rIns="1016" bIns="1016" rtlCol="0" anchor="t">
             <a:normAutofit/>
           </a:bodyPr>
           <a:lstStyle/>
           <a:p>
+            <a:pPr indent="0" marL="0">
+              <a:buNone/>
+            </a:pPr>
             <a:r>
               <a:rPr lang="en-US" sz="2100" dirty="0">
                 <a:solidFill>
-                  <a:srgbClr val="17364A"/>
-                </a:solidFill>
-                <a:latin typeface="Aptos" pitchFamily="34" charset="0"/>
-                <a:ea typeface="Aptos" pitchFamily="34" charset="-122"/>
-                <a:cs typeface="Aptos" pitchFamily="34" charset="-120"/>
-              </a:rPr>
-              <a:t>1. What is the best reason to communicate uncertainty with model results?</a:t>
+                  <a:srgbClr val="003A63"/>
+                </a:solidFill>
+                <a:latin typeface="Aptos" pitchFamily="34" charset="0"/>
+                <a:ea typeface="Aptos" pitchFamily="34" charset="-122"/>
+                <a:cs typeface="Aptos" pitchFamily="34" charset="-120"/>
+              </a:rPr>
+              <a:t>• 1. What is the best reason to communicate uncertainty with model results?</a:t>
             </a:r>
             <a:endParaRPr lang="en-US" sz="2100" dirty="0"/>
           </a:p>
           <a:p>
+            <a:pPr indent="0" marL="0">
+              <a:buNone/>
+            </a:pPr>
             <a:r>
               <a:rPr lang="en-US" sz="2100" dirty="0">
                 <a:solidFill>
-                  <a:srgbClr val="17364A"/>
-                </a:solidFill>
-                <a:latin typeface="Aptos" pitchFamily="34" charset="0"/>
-                <a:ea typeface="Aptos" pitchFamily="34" charset="-122"/>
-                <a:cs typeface="Aptos" pitchFamily="34" charset="-120"/>
-              </a:rPr>
-              <a:t>2. What is the best reason to assign an accountability owner?</a:t>
+                  <a:srgbClr val="003A63"/>
+                </a:solidFill>
+                <a:latin typeface="Aptos" pitchFamily="34" charset="0"/>
+                <a:ea typeface="Aptos" pitchFamily="34" charset="-122"/>
+                <a:cs typeface="Aptos" pitchFamily="34" charset="-120"/>
+              </a:rPr>
+              <a:t>• 2. What is the best reason to assign an accountability owner?</a:t>
             </a:r>
             <a:endParaRPr lang="en-US" sz="2100" dirty="0"/>
           </a:p>
           <a:p>
+            <a:pPr indent="0" marL="0">
+              <a:buNone/>
+            </a:pPr>
             <a:r>
               <a:rPr lang="en-US" sz="2100" dirty="0">
                 <a:solidFill>
-                  <a:srgbClr val="17364A"/>
-                </a:solidFill>
-                <a:latin typeface="Aptos" pitchFamily="34" charset="0"/>
-                <a:ea typeface="Aptos" pitchFamily="34" charset="-122"/>
-                <a:cs typeface="Aptos" pitchFamily="34" charset="-120"/>
-              </a:rPr>
-              <a:t>3. When should an AI-supported workflow be escalated for review?</a:t>
+                  <a:srgbClr val="003A63"/>
+                </a:solidFill>
+                <a:latin typeface="Aptos" pitchFamily="34" charset="0"/>
+                <a:ea typeface="Aptos" pitchFamily="34" charset="-122"/>
+                <a:cs typeface="Aptos" pitchFamily="34" charset="-120"/>
+              </a:rPr>
+              <a:t>• 3. When should an AI-supported workflow be escalated for review?</a:t>
             </a:r>
             <a:endParaRPr lang="en-US" sz="2100" dirty="0"/>
           </a:p>
@@ -9476,17 +9620,17 @@
         </p:nvSpPr>
         <p:spPr>
           <a:xfrm>
-            <a:off x="7799832" y="1828800"/>
-            <a:ext cx="3145536" cy="685800"/>
-          </a:xfrm>
-          <a:prstGeom prst="rect">
-            <a:avLst/>
-          </a:prstGeom>
-          <a:noFill/>
-          <a:ln/>
-        </p:spPr>
-        <p:txBody>
-          <a:bodyPr wrap="square" lIns="0" tIns="0" rIns="0" bIns="0" rtlCol="0" anchor="t">
+            <a:off x="7799832" y="1801368"/>
+            <a:ext cx="3145536" cy="758952"/>
+          </a:xfrm>
+          <a:prstGeom prst="rect">
+            <a:avLst/>
+          </a:prstGeom>
+          <a:noFill/>
+          <a:ln/>
+        </p:spPr>
+        <p:txBody>
+          <a:bodyPr wrap="square" lIns="254" tIns="254" rIns="254" bIns="254" rtlCol="0" anchor="t">
             <a:normAutofit/>
           </a:bodyPr>
           <a:lstStyle/>
@@ -9495,7 +9639,7 @@
               <a:buNone/>
             </a:pPr>
             <a:r>
-              <a:rPr lang="en-US" sz="1550" dirty="0">
+              <a:rPr lang="en-US" sz="1320" dirty="0">
                 <a:solidFill>
                   <a:srgbClr val="17364A"/>
                 </a:solidFill>
@@ -9505,7 +9649,7 @@
               </a:rPr>
               <a:t>1. What is the best reason to communicate uncertainty with model results?</a:t>
             </a:r>
-            <a:endParaRPr lang="en-US" sz="1550" dirty="0"/>
+            <a:endParaRPr lang="en-US" sz="1320" dirty="0"/>
           </a:p>
         </p:txBody>
       </p:sp>
@@ -9593,13 +9737,16 @@
           <a:ln/>
         </p:spPr>
         <p:txBody>
-          <a:bodyPr wrap="square" lIns="254" tIns="254" rIns="254" bIns="254" rtlCol="0" anchor="t">
+          <a:bodyPr wrap="square" lIns="508" tIns="508" rIns="508" bIns="508" rtlCol="0" anchor="t">
             <a:normAutofit/>
           </a:bodyPr>
           <a:lstStyle/>
           <a:p>
-            <a:r>
-              <a:rPr lang="en-US" sz="1380" dirty="0">
+            <a:pPr indent="0" marL="0">
+              <a:buNone/>
+            </a:pPr>
+            <a:r>
+              <a:rPr lang="en-US" sz="1220" dirty="0">
                 <a:solidFill>
                   <a:srgbClr val="17364A"/>
                 </a:solidFill>
@@ -9609,11 +9756,14 @@
               </a:rPr>
               <a:t>1.</a:t>
             </a:r>
-            <a:endParaRPr lang="en-US" sz="1380" dirty="0"/>
-          </a:p>
-          <a:p>
-            <a:r>
-              <a:rPr lang="en-US" sz="1380" dirty="0">
+            <a:endParaRPr lang="en-US" sz="1220" dirty="0"/>
+          </a:p>
+          <a:p>
+            <a:pPr indent="0" marL="0">
+              <a:buNone/>
+            </a:pPr>
+            <a:r>
+              <a:rPr lang="en-US" sz="1220" dirty="0">
                 <a:solidFill>
                   <a:srgbClr val="17364A"/>
                 </a:solidFill>
@@ -9621,13 +9771,16 @@
                 <a:ea typeface="Aptos" pitchFamily="34" charset="-122"/>
                 <a:cs typeface="Aptos" pitchFamily="34" charset="-120"/>
               </a:rPr>
-              <a:t>What is the best reason to communicate uncertainty with model results?</a:t>
-            </a:r>
-            <a:endParaRPr lang="en-US" sz="1380" dirty="0"/>
-          </a:p>
-          <a:p>
-            <a:r>
-              <a:rPr lang="en-US" sz="1380" dirty="0">
+              <a:t>What is the best reason to communicate uncertainty with model.</a:t>
+            </a:r>
+            <a:endParaRPr lang="en-US" sz="1220" dirty="0"/>
+          </a:p>
+          <a:p>
+            <a:pPr indent="0" marL="0">
+              <a:buNone/>
+            </a:pPr>
+            <a:r>
+              <a:rPr lang="en-US" sz="1220" dirty="0">
                 <a:solidFill>
                   <a:srgbClr val="17364A"/>
                 </a:solidFill>
@@ -9637,7 +9790,7 @@
               </a:rPr>
               <a:t>2.</a:t>
             </a:r>
-            <a:endParaRPr lang="en-US" sz="1380" dirty="0"/>
+            <a:endParaRPr lang="en-US" sz="1220" dirty="0"/>
           </a:p>
         </p:txBody>
       </p:sp>
@@ -9715,17 +9868,17 @@
         </p:nvSpPr>
         <p:spPr>
           <a:xfrm>
-            <a:off x="7799832" y="5001768"/>
-            <a:ext cx="3145536" cy="502920"/>
-          </a:xfrm>
-          <a:prstGeom prst="rect">
-            <a:avLst/>
-          </a:prstGeom>
-          <a:noFill/>
-          <a:ln/>
-        </p:spPr>
-        <p:txBody>
-          <a:bodyPr wrap="square" lIns="0" tIns="0" rIns="0" bIns="0" rtlCol="0" anchor="t">
+            <a:off x="7799832" y="4974336"/>
+            <a:ext cx="3145536" cy="576072"/>
+          </a:xfrm>
+          <a:prstGeom prst="rect">
+            <a:avLst/>
+          </a:prstGeom>
+          <a:noFill/>
+          <a:ln/>
+        </p:spPr>
+        <p:txBody>
+          <a:bodyPr wrap="square" lIns="254" tIns="254" rIns="254" bIns="254" rtlCol="0" anchor="t">
             <a:normAutofit/>
           </a:bodyPr>
           <a:lstStyle/>
@@ -9734,7 +9887,7 @@
               <a:buNone/>
             </a:pPr>
             <a:r>
-              <a:rPr lang="en-US" sz="1550" dirty="0">
+              <a:rPr lang="en-US" sz="1320" dirty="0">
                 <a:solidFill>
                   <a:srgbClr val="17364A"/>
                 </a:solidFill>
@@ -9742,9 +9895,9 @@
                 <a:ea typeface="Aptos" pitchFamily="34" charset="-122"/>
                 <a:cs typeface="Aptos" pitchFamily="34" charset="-120"/>
               </a:rPr>
-              <a:t>Use the assignment to test whether you can explain the concept, apply it to a realistic public health situation, and identify what would need review before the work moves forward.</a:t>
-            </a:r>
-            <a:endParaRPr lang="en-US" sz="1550" dirty="0"/>
+              <a:t>Use the assignment to test whether you can explain the concept, apply it to a realistic public health situation, and.</a:t>
+            </a:r>
+            <a:endParaRPr lang="en-US" sz="1320" dirty="0"/>
           </a:p>
         </p:txBody>
       </p:sp>
@@ -10045,49 +10198,58 @@
           <a:ln/>
         </p:spPr>
         <p:txBody>
-          <a:bodyPr wrap="square" lIns="635" tIns="635" rIns="635" bIns="635" rtlCol="0" anchor="t">
+          <a:bodyPr wrap="square" lIns="1016" tIns="1016" rIns="1016" bIns="1016" rtlCol="0" anchor="t">
             <a:normAutofit/>
           </a:bodyPr>
           <a:lstStyle/>
           <a:p>
+            <a:pPr indent="0" marL="0">
+              <a:buNone/>
+            </a:pPr>
             <a:r>
               <a:rPr lang="en-US" sz="2100" dirty="0">
                 <a:solidFill>
-                  <a:srgbClr val="17364A"/>
-                </a:solidFill>
-                <a:latin typeface="Aptos" pitchFamily="34" charset="0"/>
-                <a:ea typeface="Aptos" pitchFamily="34" charset="-122"/>
-                <a:cs typeface="Aptos" pitchFamily="34" charset="-120"/>
-              </a:rPr>
-              <a:t>Public health staff often need to communicate AI or model results to leaders, partners, the public, or.</a:t>
+                  <a:srgbClr val="003A63"/>
+                </a:solidFill>
+                <a:latin typeface="Aptos" pitchFamily="34" charset="0"/>
+                <a:ea typeface="Aptos" pitchFamily="34" charset="-122"/>
+                <a:cs typeface="Aptos" pitchFamily="34" charset="-120"/>
+              </a:rPr>
+              <a:t>• Public health staff often need to communicate AI or model results to leaders, partners, the.</a:t>
             </a:r>
             <a:endParaRPr lang="en-US" sz="2100" dirty="0"/>
           </a:p>
           <a:p>
+            <a:pPr indent="0" marL="0">
+              <a:buNone/>
+            </a:pPr>
             <a:r>
               <a:rPr lang="en-US" sz="2100" dirty="0">
                 <a:solidFill>
-                  <a:srgbClr val="17364A"/>
-                </a:solidFill>
-                <a:latin typeface="Aptos" pitchFamily="34" charset="0"/>
-                <a:ea typeface="Aptos" pitchFamily="34" charset="-122"/>
-                <a:cs typeface="Aptos" pitchFamily="34" charset="-120"/>
-              </a:rPr>
-              <a:t>This module teaches learners how to explain model outputs, uncertainty, limitations, and appropriate use without.</a:t>
+                  <a:srgbClr val="003A63"/>
+                </a:solidFill>
+                <a:latin typeface="Aptos" pitchFamily="34" charset="0"/>
+                <a:ea typeface="Aptos" pitchFamily="34" charset="-122"/>
+                <a:cs typeface="Aptos" pitchFamily="34" charset="-120"/>
+              </a:rPr>
+              <a:t>• This module teaches learners how to explain model outputs, uncertainty, limitations, and.</a:t>
             </a:r>
             <a:endParaRPr lang="en-US" sz="2100" dirty="0"/>
           </a:p>
           <a:p>
+            <a:pPr indent="0" marL="0">
+              <a:buNone/>
+            </a:pPr>
             <a:r>
               <a:rPr lang="en-US" sz="2100" dirty="0">
                 <a:solidFill>
-                  <a:srgbClr val="17364A"/>
-                </a:solidFill>
-                <a:latin typeface="Aptos" pitchFamily="34" charset="0"/>
-                <a:ea typeface="Aptos" pitchFamily="34" charset="-122"/>
-                <a:cs typeface="Aptos" pitchFamily="34" charset="-120"/>
-              </a:rPr>
-              <a:t>The module focuses on practical communication.</a:t>
+                  <a:srgbClr val="003A63"/>
+                </a:solidFill>
+                <a:latin typeface="Aptos" pitchFamily="34" charset="0"/>
+                <a:ea typeface="Aptos" pitchFamily="34" charset="-122"/>
+                <a:cs typeface="Aptos" pitchFamily="34" charset="-120"/>
+              </a:rPr>
+              <a:t>• The module focuses on practical communication.</a:t>
             </a:r>
             <a:endParaRPr lang="en-US" sz="2100" dirty="0"/>
           </a:p>
@@ -10167,17 +10329,17 @@
         </p:nvSpPr>
         <p:spPr>
           <a:xfrm>
-            <a:off x="8074152" y="1920240"/>
-            <a:ext cx="2825496" cy="1280160"/>
-          </a:xfrm>
-          <a:prstGeom prst="rect">
-            <a:avLst/>
-          </a:prstGeom>
-          <a:noFill/>
-          <a:ln/>
-        </p:spPr>
-        <p:txBody>
-          <a:bodyPr wrap="square" lIns="0" tIns="0" rIns="0" bIns="0" rtlCol="0" anchor="t">
+            <a:off x="8074152" y="1892808"/>
+            <a:ext cx="2825496" cy="1353312"/>
+          </a:xfrm>
+          <a:prstGeom prst="rect">
+            <a:avLst/>
+          </a:prstGeom>
+          <a:noFill/>
+          <a:ln/>
+        </p:spPr>
+        <p:txBody>
+          <a:bodyPr wrap="square" lIns="254" tIns="254" rIns="254" bIns="254" rtlCol="0" anchor="t">
             <a:normAutofit/>
           </a:bodyPr>
           <a:lstStyle/>
@@ -10186,7 +10348,7 @@
               <a:buNone/>
             </a:pPr>
             <a:r>
-              <a:rPr lang="en-US" sz="1550" dirty="0">
+              <a:rPr lang="en-US" sz="1320" dirty="0">
                 <a:solidFill>
                   <a:srgbClr val="17364A"/>
                 </a:solidFill>
@@ -10194,43 +10356,9 @@
                 <a:ea typeface="Aptos" pitchFamily="34" charset="-122"/>
                 <a:cs typeface="Aptos" pitchFamily="34" charset="-120"/>
               </a:rPr>
-              <a:t>Level: intermediate/practitioner</a:t>
-            </a:r>
-            <a:endParaRPr lang="en-US" sz="1550" dirty="0"/>
-          </a:p>
-          <a:p>
-            <a:pPr indent="0" marL="0">
-              <a:buNone/>
-            </a:pPr>
-            <a:r>
-              <a:rPr lang="en-US" sz="1550" dirty="0">
-                <a:solidFill>
-                  <a:srgbClr val="17364A"/>
-                </a:solidFill>
-                <a:latin typeface="Aptos" pitchFamily="34" charset="0"/>
-                <a:ea typeface="Aptos" pitchFamily="34" charset="-122"/>
-                <a:cs typeface="Aptos" pitchFamily="34" charset="-120"/>
-              </a:rPr>
-              <a:t>Primary track: Analytics and Modeling Track</a:t>
-            </a:r>
-            <a:endParaRPr lang="en-US" sz="1550" dirty="0"/>
-          </a:p>
-          <a:p>
-            <a:pPr indent="0" marL="0">
-              <a:buNone/>
-            </a:pPr>
-            <a:r>
-              <a:rPr lang="en-US" sz="1550" dirty="0">
-                <a:solidFill>
-                  <a:srgbClr val="17364A"/>
-                </a:solidFill>
-                <a:latin typeface="Aptos" pitchFamily="34" charset="0"/>
-                <a:ea typeface="Aptos" pitchFamily="34" charset="-122"/>
-                <a:cs typeface="Aptos" pitchFamily="34" charset="-120"/>
-              </a:rPr>
-              <a:t>Appears in tracks: analytics-modeling, communications, public-health-executive-leadership, epidemiology, governance-security</a:t>
-            </a:r>
-            <a:endParaRPr lang="en-US" sz="1550" dirty="0"/>
+              <a:t>Level: intermediate/practitioner Primary track: Analytics and Modeling Track Appears in tracks: analytics-modeling,.</a:t>
+            </a:r>
+            <a:endParaRPr lang="en-US" sz="1320" dirty="0"/>
           </a:p>
         </p:txBody>
       </p:sp>
@@ -10318,13 +10446,16 @@
           <a:ln/>
         </p:spPr>
         <p:txBody>
-          <a:bodyPr wrap="square" lIns="254" tIns="254" rIns="254" bIns="254" rtlCol="0" anchor="t">
+          <a:bodyPr wrap="square" lIns="508" tIns="508" rIns="508" bIns="508" rtlCol="0" anchor="t">
             <a:normAutofit/>
           </a:bodyPr>
           <a:lstStyle/>
           <a:p>
-            <a:r>
-              <a:rPr lang="en-US" sz="1380" dirty="0">
+            <a:pPr indent="0" marL="0">
+              <a:buNone/>
+            </a:pPr>
+            <a:r>
+              <a:rPr lang="en-US" sz="1220" dirty="0">
                 <a:solidFill>
                   <a:srgbClr val="17364A"/>
                 </a:solidFill>
@@ -10334,11 +10465,14 @@
               </a:rPr>
               <a:t>Read the module for shared vocabulary and context.</a:t>
             </a:r>
-            <a:endParaRPr lang="en-US" sz="1380" dirty="0"/>
-          </a:p>
-          <a:p>
-            <a:r>
-              <a:rPr lang="en-US" sz="1380" dirty="0">
+            <a:endParaRPr lang="en-US" sz="1220" dirty="0"/>
+          </a:p>
+          <a:p>
+            <a:pPr indent="0" marL="0">
+              <a:buNone/>
+            </a:pPr>
+            <a:r>
+              <a:rPr lang="en-US" sz="1220" dirty="0">
                 <a:solidFill>
                   <a:srgbClr val="17364A"/>
                 </a:solidFill>
@@ -10348,11 +10482,14 @@
               </a:rPr>
               <a:t>Complete the practical exercise to apply the concept.</a:t>
             </a:r>
-            <a:endParaRPr lang="en-US" sz="1380" dirty="0"/>
-          </a:p>
-          <a:p>
-            <a:r>
-              <a:rPr lang="en-US" sz="1380" dirty="0">
+            <a:endParaRPr lang="en-US" sz="1220" dirty="0"/>
+          </a:p>
+          <a:p>
+            <a:pPr indent="0" marL="0">
+              <a:buNone/>
+            </a:pPr>
+            <a:r>
+              <a:rPr lang="en-US" sz="1220" dirty="0">
                 <a:solidFill>
                   <a:srgbClr val="17364A"/>
                 </a:solidFill>
@@ -10362,7 +10499,7 @@
               </a:rPr>
               <a:t>Use the notes and references for deeper review.</a:t>
             </a:r>
-            <a:endParaRPr lang="en-US" sz="1380" dirty="0"/>
+            <a:endParaRPr lang="en-US" sz="1220" dirty="0"/>
           </a:p>
         </p:txBody>
       </p:sp>
@@ -10663,49 +10800,58 @@
           <a:ln/>
         </p:spPr>
         <p:txBody>
-          <a:bodyPr wrap="square" lIns="635" tIns="635" rIns="635" bIns="635" rtlCol="0" anchor="t">
+          <a:bodyPr wrap="square" lIns="1016" tIns="1016" rIns="1016" bIns="1016" rtlCol="0" anchor="t">
             <a:normAutofit/>
           </a:bodyPr>
           <a:lstStyle/>
           <a:p>
+            <a:pPr indent="0" marL="0">
+              <a:buNone/>
+            </a:pPr>
             <a:r>
               <a:rPr lang="en-US" sz="2100" dirty="0">
                 <a:solidFill>
-                  <a:srgbClr val="17364A"/>
-                </a:solidFill>
-                <a:latin typeface="Aptos" pitchFamily="34" charset="0"/>
-                <a:ea typeface="Aptos" pitchFamily="34" charset="-122"/>
-                <a:cs typeface="Aptos" pitchFamily="34" charset="-120"/>
-              </a:rPr>
-              <a:t>CDC Public Health Data Strategy and Data Modernization resources:.</a:t>
+                  <a:srgbClr val="003A63"/>
+                </a:solidFill>
+                <a:latin typeface="Aptos" pitchFamily="34" charset="0"/>
+                <a:ea typeface="Aptos" pitchFamily="34" charset="-122"/>
+                <a:cs typeface="Aptos" pitchFamily="34" charset="-120"/>
+              </a:rPr>
+              <a:t>• CDC Public Health Data Strategy and Data Modernization resources:.</a:t>
             </a:r>
             <a:endParaRPr lang="en-US" sz="2100" dirty="0"/>
           </a:p>
           <a:p>
+            <a:pPr indent="0" marL="0">
+              <a:buNone/>
+            </a:pPr>
             <a:r>
               <a:rPr lang="en-US" sz="2100" dirty="0">
                 <a:solidFill>
-                  <a:srgbClr val="17364A"/>
-                </a:solidFill>
-                <a:latin typeface="Aptos" pitchFamily="34" charset="0"/>
-                <a:ea typeface="Aptos" pitchFamily="34" charset="-122"/>
-                <a:cs typeface="Aptos" pitchFamily="34" charset="-120"/>
-              </a:rPr>
-              <a:t>NIST Artificial Intelligence Risk Management Framework and NIST Generative AI Profile:.</a:t>
+                  <a:srgbClr val="003A63"/>
+                </a:solidFill>
+                <a:latin typeface="Aptos" pitchFamily="34" charset="0"/>
+                <a:ea typeface="Aptos" pitchFamily="34" charset="-122"/>
+                <a:cs typeface="Aptos" pitchFamily="34" charset="-120"/>
+              </a:rPr>
+              <a:t>• NIST Artificial Intelligence Risk Management Framework and NIST Generative AI Profile:.</a:t>
             </a:r>
             <a:endParaRPr lang="en-US" sz="2100" dirty="0"/>
           </a:p>
           <a:p>
+            <a:pPr indent="0" marL="0">
+              <a:buNone/>
+            </a:pPr>
             <a:r>
               <a:rPr lang="en-US" sz="2100" dirty="0">
                 <a:solidFill>
-                  <a:srgbClr val="17364A"/>
-                </a:solidFill>
-                <a:latin typeface="Aptos" pitchFamily="34" charset="0"/>
-                <a:ea typeface="Aptos" pitchFamily="34" charset="-122"/>
-                <a:cs typeface="Aptos" pitchFamily="34" charset="-120"/>
-              </a:rPr>
-              <a:t>WHO Ethics and Governance of Artificial Intelligence for Health guidance:.</a:t>
+                  <a:srgbClr val="003A63"/>
+                </a:solidFill>
+                <a:latin typeface="Aptos" pitchFamily="34" charset="0"/>
+                <a:ea typeface="Aptos" pitchFamily="34" charset="-122"/>
+                <a:cs typeface="Aptos" pitchFamily="34" charset="-120"/>
+              </a:rPr>
+              <a:t>• WHO Ethics and Governance of Artificial Intelligence for Health guidance:.</a:t>
             </a:r>
             <a:endParaRPr lang="en-US" sz="2100" dirty="0"/>
           </a:p>
@@ -10785,17 +10931,17 @@
         </p:nvSpPr>
         <p:spPr>
           <a:xfrm>
-            <a:off x="7799832" y="1828800"/>
-            <a:ext cx="3145536" cy="685800"/>
-          </a:xfrm>
-          <a:prstGeom prst="rect">
-            <a:avLst/>
-          </a:prstGeom>
-          <a:noFill/>
-          <a:ln/>
-        </p:spPr>
-        <p:txBody>
-          <a:bodyPr wrap="square" lIns="0" tIns="0" rIns="0" bIns="0" rtlCol="0" anchor="t">
+            <a:off x="7799832" y="1801368"/>
+            <a:ext cx="3145536" cy="758952"/>
+          </a:xfrm>
+          <a:prstGeom prst="rect">
+            <a:avLst/>
+          </a:prstGeom>
+          <a:noFill/>
+          <a:ln/>
+        </p:spPr>
+        <p:txBody>
+          <a:bodyPr wrap="square" lIns="254" tIns="254" rIns="254" bIns="254" rtlCol="0" anchor="t">
             <a:normAutofit/>
           </a:bodyPr>
           <a:lstStyle/>
@@ -10804,7 +10950,7 @@
               <a:buNone/>
             </a:pPr>
             <a:r>
-              <a:rPr lang="en-US" sz="1550" dirty="0">
+              <a:rPr lang="en-US" sz="1320" dirty="0">
                 <a:solidFill>
                   <a:srgbClr val="17364A"/>
                 </a:solidFill>
@@ -10814,7 +10960,7 @@
               </a:rPr>
               <a:t>CDC Public Health Data Strategy and Data Modernization resources:.</a:t>
             </a:r>
-            <a:endParaRPr lang="en-US" sz="1550" dirty="0"/>
+            <a:endParaRPr lang="en-US" sz="1320" dirty="0"/>
           </a:p>
         </p:txBody>
       </p:sp>
@@ -10902,13 +11048,16 @@
           <a:ln/>
         </p:spPr>
         <p:txBody>
-          <a:bodyPr wrap="square" lIns="254" tIns="254" rIns="254" bIns="254" rtlCol="0" anchor="t">
+          <a:bodyPr wrap="square" lIns="508" tIns="508" rIns="508" bIns="508" rtlCol="0" anchor="t">
             <a:normAutofit/>
           </a:bodyPr>
           <a:lstStyle/>
           <a:p>
-            <a:r>
-              <a:rPr lang="en-US" sz="1380" dirty="0">
+            <a:pPr indent="0" marL="0">
+              <a:buNone/>
+            </a:pPr>
+            <a:r>
+              <a:rPr lang="en-US" sz="1220" dirty="0">
                 <a:solidFill>
                   <a:srgbClr val="17364A"/>
                 </a:solidFill>
@@ -10918,11 +11067,14 @@
               </a:rPr>
               <a:t>OWASP Top 10 for Large Language Model Applications:.</a:t>
             </a:r>
-            <a:endParaRPr lang="en-US" sz="1380" dirty="0"/>
-          </a:p>
-          <a:p>
-            <a:r>
-              <a:rPr lang="en-US" sz="1380" dirty="0">
+            <a:endParaRPr lang="en-US" sz="1220" dirty="0"/>
+          </a:p>
+          <a:p>
+            <a:pPr indent="0" marL="0">
+              <a:buNone/>
+            </a:pPr>
+            <a:r>
+              <a:rPr lang="en-US" sz="1220" dirty="0">
                 <a:solidFill>
                   <a:srgbClr val="17364A"/>
                 </a:solidFill>
@@ -10930,9 +11082,9 @@
                 <a:ea typeface="Aptos" pitchFamily="34" charset="-122"/>
                 <a:cs typeface="Aptos" pitchFamily="34" charset="-120"/>
               </a:rPr>
-              <a:t>ONC health IT, interoperability, and information blocking resources:.</a:t>
-            </a:r>
-            <a:endParaRPr lang="en-US" sz="1380" dirty="0"/>
+              <a:t>ONC health IT, interoperability, and information blocking.</a:t>
+            </a:r>
+            <a:endParaRPr lang="en-US" sz="1220" dirty="0"/>
           </a:p>
         </p:txBody>
       </p:sp>
@@ -11010,17 +11162,17 @@
         </p:nvSpPr>
         <p:spPr>
           <a:xfrm>
-            <a:off x="7799832" y="5001768"/>
-            <a:ext cx="3145536" cy="502920"/>
-          </a:xfrm>
-          <a:prstGeom prst="rect">
-            <a:avLst/>
-          </a:prstGeom>
-          <a:noFill/>
-          <a:ln/>
-        </p:spPr>
-        <p:txBody>
-          <a:bodyPr wrap="square" lIns="0" tIns="0" rIns="0" bIns="0" rtlCol="0" anchor="t">
+            <a:off x="7799832" y="4974336"/>
+            <a:ext cx="3145536" cy="576072"/>
+          </a:xfrm>
+          <a:prstGeom prst="rect">
+            <a:avLst/>
+          </a:prstGeom>
+          <a:noFill/>
+          <a:ln/>
+        </p:spPr>
+        <p:txBody>
+          <a:bodyPr wrap="square" lIns="254" tIns="254" rIns="254" bIns="254" rtlCol="0" anchor="t">
             <a:normAutofit/>
           </a:bodyPr>
           <a:lstStyle/>
@@ -11029,7 +11181,7 @@
               <a:buNone/>
             </a:pPr>
             <a:r>
-              <a:rPr lang="en-US" sz="1550" dirty="0">
+              <a:rPr lang="en-US" sz="1320" dirty="0">
                 <a:solidFill>
                   <a:srgbClr val="17364A"/>
                 </a:solidFill>
@@ -11037,9 +11189,9 @@
                 <a:ea typeface="Aptos" pitchFamily="34" charset="-122"/>
                 <a:cs typeface="Aptos" pitchFamily="34" charset="-120"/>
               </a:rPr>
-              <a:t>Connect the concept to data quality, model performance, validation evidence, monitoring measures, and decisions that remain under human control.</a:t>
-            </a:r>
-            <a:endParaRPr lang="en-US" sz="1550" dirty="0"/>
+              <a:t>Connect the concept to data quality, model performance, validation evidence, monitoring measures, and decisions that.</a:t>
+            </a:r>
+            <a:endParaRPr lang="en-US" sz="1320" dirty="0"/>
           </a:p>
         </p:txBody>
       </p:sp>
@@ -11340,21 +11492,24 @@
           <a:ln/>
         </p:spPr>
         <p:txBody>
-          <a:bodyPr wrap="square" lIns="635" tIns="635" rIns="635" bIns="635" rtlCol="0" anchor="t">
+          <a:bodyPr wrap="square" lIns="1016" tIns="1016" rIns="1016" bIns="1016" rtlCol="0" anchor="t">
             <a:normAutofit/>
           </a:bodyPr>
           <a:lstStyle/>
           <a:p>
+            <a:pPr indent="0" marL="0">
+              <a:buNone/>
+            </a:pPr>
             <a:r>
               <a:rPr lang="en-US" sz="2100" dirty="0">
                 <a:solidFill>
-                  <a:srgbClr val="17364A"/>
-                </a:solidFill>
-                <a:latin typeface="Aptos" pitchFamily="34" charset="0"/>
-                <a:ea typeface="Aptos" pitchFamily="34" charset="-122"/>
-                <a:cs typeface="Aptos" pitchFamily="34" charset="-120"/>
-              </a:rPr>
-              <a:t>Agency policies for privacy, public records, cybersecurity, procurement, civil rights, accessibility,.</a:t>
+                  <a:srgbClr val="003A63"/>
+                </a:solidFill>
+                <a:latin typeface="Aptos" pitchFamily="34" charset="0"/>
+                <a:ea typeface="Aptos" pitchFamily="34" charset="-122"/>
+                <a:cs typeface="Aptos" pitchFamily="34" charset="-120"/>
+              </a:rPr>
+              <a:t>• Agency policies for privacy, public records, cybersecurity, procurement, civil rights,.</a:t>
             </a:r>
             <a:endParaRPr lang="en-US" sz="2100" dirty="0"/>
           </a:p>
@@ -11434,17 +11589,17 @@
         </p:nvSpPr>
         <p:spPr>
           <a:xfrm>
-            <a:off x="7799832" y="1828800"/>
-            <a:ext cx="3145536" cy="685800"/>
-          </a:xfrm>
-          <a:prstGeom prst="rect">
-            <a:avLst/>
-          </a:prstGeom>
-          <a:noFill/>
-          <a:ln/>
-        </p:spPr>
-        <p:txBody>
-          <a:bodyPr wrap="square" lIns="0" tIns="0" rIns="0" bIns="0" rtlCol="0" anchor="t">
+            <a:off x="7799832" y="1801368"/>
+            <a:ext cx="3145536" cy="758952"/>
+          </a:xfrm>
+          <a:prstGeom prst="rect">
+            <a:avLst/>
+          </a:prstGeom>
+          <a:noFill/>
+          <a:ln/>
+        </p:spPr>
+        <p:txBody>
+          <a:bodyPr wrap="square" lIns="254" tIns="254" rIns="254" bIns="254" rtlCol="0" anchor="t">
             <a:normAutofit/>
           </a:bodyPr>
           <a:lstStyle/>
@@ -11453,7 +11608,7 @@
               <a:buNone/>
             </a:pPr>
             <a:r>
-              <a:rPr lang="en-US" sz="1550" dirty="0">
+              <a:rPr lang="en-US" sz="1320" dirty="0">
                 <a:solidFill>
                   <a:srgbClr val="17364A"/>
                 </a:solidFill>
@@ -11463,7 +11618,7 @@
               </a:rPr>
               <a:t>Agency policies for privacy, public records, cybersecurity, procurement, civil rights, accessibility,.</a:t>
             </a:r>
-            <a:endParaRPr lang="en-US" sz="1550" dirty="0"/>
+            <a:endParaRPr lang="en-US" sz="1320" dirty="0"/>
           </a:p>
         </p:txBody>
       </p:sp>
@@ -11551,13 +11706,16 @@
           <a:ln/>
         </p:spPr>
         <p:txBody>
-          <a:bodyPr wrap="square" lIns="254" tIns="254" rIns="254" bIns="254" rtlCol="0" anchor="t">
+          <a:bodyPr wrap="square" lIns="508" tIns="508" rIns="508" bIns="508" rtlCol="0" anchor="t">
             <a:normAutofit/>
           </a:bodyPr>
           <a:lstStyle/>
           <a:p>
-            <a:r>
-              <a:rPr lang="en-US" sz="1380" dirty="0">
+            <a:pPr indent="0" marL="0">
+              <a:buNone/>
+            </a:pPr>
+            <a:r>
+              <a:rPr lang="en-US" sz="1220" dirty="0">
                 <a:solidFill>
                   <a:srgbClr val="17364A"/>
                 </a:solidFill>
@@ -11565,9 +11723,9 @@
                 <a:ea typeface="Aptos" pitchFamily="34" charset="-122"/>
                 <a:cs typeface="Aptos" pitchFamily="34" charset="-120"/>
               </a:rPr>
-              <a:t>Agency policies for privacy, public records, cybersecurity, procurement, civil rights,.</a:t>
-            </a:r>
-            <a:endParaRPr lang="en-US" sz="1380" dirty="0"/>
+              <a:t>Agency policies for privacy, public records, cybersecurity,.</a:t>
+            </a:r>
+            <a:endParaRPr lang="en-US" sz="1220" dirty="0"/>
           </a:p>
         </p:txBody>
       </p:sp>
@@ -11645,17 +11803,17 @@
         </p:nvSpPr>
         <p:spPr>
           <a:xfrm>
-            <a:off x="7799832" y="5001768"/>
-            <a:ext cx="3145536" cy="502920"/>
-          </a:xfrm>
-          <a:prstGeom prst="rect">
-            <a:avLst/>
-          </a:prstGeom>
-          <a:noFill/>
-          <a:ln/>
-        </p:spPr>
-        <p:txBody>
-          <a:bodyPr wrap="square" lIns="0" tIns="0" rIns="0" bIns="0" rtlCol="0" anchor="t">
+            <a:off x="7799832" y="4974336"/>
+            <a:ext cx="3145536" cy="576072"/>
+          </a:xfrm>
+          <a:prstGeom prst="rect">
+            <a:avLst/>
+          </a:prstGeom>
+          <a:noFill/>
+          <a:ln/>
+        </p:spPr>
+        <p:txBody>
+          <a:bodyPr wrap="square" lIns="254" tIns="254" rIns="254" bIns="254" rtlCol="0" anchor="t">
             <a:normAutofit/>
           </a:bodyPr>
           <a:lstStyle/>
@@ -11664,7 +11822,7 @@
               <a:buNone/>
             </a:pPr>
             <a:r>
-              <a:rPr lang="en-US" sz="1550" dirty="0">
+              <a:rPr lang="en-US" sz="1320" dirty="0">
                 <a:solidFill>
                   <a:srgbClr val="17364A"/>
                 </a:solidFill>
@@ -11672,9 +11830,9 @@
                 <a:ea typeface="Aptos" pitchFamily="34" charset="-122"/>
                 <a:cs typeface="Aptos" pitchFamily="34" charset="-120"/>
               </a:rPr>
-              <a:t>Connect the concept to data quality, model performance, validation evidence, monitoring measures, and decisions that remain under human control.</a:t>
-            </a:r>
-            <a:endParaRPr lang="en-US" sz="1550" dirty="0"/>
+              <a:t>Connect the concept to data quality, model performance, validation evidence, monitoring measures, and decisions that.</a:t>
+            </a:r>
+            <a:endParaRPr lang="en-US" sz="1320" dirty="0"/>
           </a:p>
         </p:txBody>
       </p:sp>
@@ -11975,63 +12133,75 @@
           <a:ln/>
         </p:spPr>
         <p:txBody>
-          <a:bodyPr wrap="square" lIns="635" tIns="635" rIns="635" bIns="635" rtlCol="0" anchor="t">
+          <a:bodyPr wrap="square" lIns="1016" tIns="1016" rIns="1016" bIns="1016" rtlCol="0" anchor="t">
             <a:normAutofit/>
           </a:bodyPr>
           <a:lstStyle/>
           <a:p>
+            <a:pPr indent="0" marL="0">
+              <a:buNone/>
+            </a:pPr>
             <a:r>
               <a:rPr lang="en-US" sz="1900" dirty="0">
                 <a:solidFill>
-                  <a:srgbClr val="17364A"/>
-                </a:solidFill>
-                <a:latin typeface="Aptos" pitchFamily="34" charset="0"/>
-                <a:ea typeface="Aptos" pitchFamily="34" charset="-122"/>
-                <a:cs typeface="Aptos" pitchFamily="34" charset="-120"/>
-              </a:rPr>
-              <a:t>Play 11: Build and Deploy AI Solutions - This lesson informs Play 11 by helping learners connect the lesson.</a:t>
+                  <a:srgbClr val="003A63"/>
+                </a:solidFill>
+                <a:latin typeface="Aptos" pitchFamily="34" charset="0"/>
+                <a:ea typeface="Aptos" pitchFamily="34" charset="-122"/>
+                <a:cs typeface="Aptos" pitchFamily="34" charset="-120"/>
+              </a:rPr>
+              <a:t>• Play 11: Build and Deploy AI Solutions - This lesson informs Play 11 by helping learners.</a:t>
             </a:r>
             <a:endParaRPr lang="en-US" sz="1900" dirty="0"/>
           </a:p>
           <a:p>
+            <a:pPr indent="0" marL="0">
+              <a:buNone/>
+            </a:pPr>
             <a:r>
               <a:rPr lang="en-US" sz="1900" dirty="0">
                 <a:solidFill>
-                  <a:srgbClr val="17364A"/>
-                </a:solidFill>
-                <a:latin typeface="Aptos" pitchFamily="34" charset="0"/>
-                <a:ea typeface="Aptos" pitchFamily="34" charset="-122"/>
-                <a:cs typeface="Aptos" pitchFamily="34" charset="-120"/>
-              </a:rPr>
-              <a:t>Play 1: Vision &amp; Guardrails - This lesson informs Play 1 by helping learners connect the lesson topic to.</a:t>
+                  <a:srgbClr val="003A63"/>
+                </a:solidFill>
+                <a:latin typeface="Aptos" pitchFamily="34" charset="0"/>
+                <a:ea typeface="Aptos" pitchFamily="34" charset="-122"/>
+                <a:cs typeface="Aptos" pitchFamily="34" charset="-120"/>
+              </a:rPr>
+              <a:t>• Play 1: Vision &amp; Guardrails - This lesson informs Play 1 by helping learners connect the.</a:t>
             </a:r>
             <a:endParaRPr lang="en-US" sz="1900" dirty="0"/>
           </a:p>
           <a:p>
+            <a:pPr indent="0" marL="0">
+              <a:buNone/>
+            </a:pPr>
             <a:r>
               <a:rPr lang="en-US" sz="1900" dirty="0">
                 <a:solidFill>
-                  <a:srgbClr val="17364A"/>
-                </a:solidFill>
-                <a:latin typeface="Aptos" pitchFamily="34" charset="0"/>
-                <a:ea typeface="Aptos" pitchFamily="34" charset="-122"/>
-                <a:cs typeface="Aptos" pitchFamily="34" charset="-120"/>
-              </a:rPr>
-              <a:t>Play 7: Prioritize Use Cases - This lesson informs Play 7 by helping learners connect the lesson topic to.</a:t>
+                  <a:srgbClr val="003A63"/>
+                </a:solidFill>
+                <a:latin typeface="Aptos" pitchFamily="34" charset="0"/>
+                <a:ea typeface="Aptos" pitchFamily="34" charset="-122"/>
+                <a:cs typeface="Aptos" pitchFamily="34" charset="-120"/>
+              </a:rPr>
+              <a:t>• Play 7: Prioritize Use Cases - This lesson informs Play 7 by helping learners connect the.</a:t>
             </a:r>
             <a:endParaRPr lang="en-US" sz="1900" dirty="0"/>
           </a:p>
           <a:p>
+            <a:pPr indent="0" marL="0">
+              <a:buNone/>
+            </a:pPr>
             <a:r>
               <a:rPr lang="en-US" sz="1900" dirty="0">
                 <a:solidFill>
-                  <a:srgbClr val="17364A"/>
-                </a:solidFill>
-                <a:latin typeface="Aptos" pitchFamily="34" charset="0"/>
-                <a:ea typeface="Aptos" pitchFamily="34" charset="-122"/>
-                <a:cs typeface="Aptos" pitchFamily="34" charset="-120"/>
-              </a:rPr>
-              <a:t>Play 2: Readiness Assessment - This lesson informs Play 2 by helping learners connect the lesson topic to.</a:t>
+                  <a:srgbClr val="003A63"/>
+                </a:solidFill>
+                <a:latin typeface="Aptos" pitchFamily="34" charset="0"/>
+                <a:ea typeface="Aptos" pitchFamily="34" charset="-122"/>
+                <a:cs typeface="Aptos" pitchFamily="34" charset="-120"/>
+              </a:rPr>
+              <a:t>• Play 2: Readiness Assessment - This lesson informs Play 2 by helping learners connect the.</a:t>
             </a:r>
             <a:endParaRPr lang="en-US" sz="1900" dirty="0"/>
           </a:p>
@@ -12111,17 +12281,17 @@
         </p:nvSpPr>
         <p:spPr>
           <a:xfrm>
-            <a:off x="8211312" y="1920240"/>
-            <a:ext cx="2734056" cy="1463040"/>
-          </a:xfrm>
-          <a:prstGeom prst="rect">
-            <a:avLst/>
-          </a:prstGeom>
-          <a:noFill/>
-          <a:ln/>
-        </p:spPr>
-        <p:txBody>
-          <a:bodyPr wrap="square" lIns="0" tIns="0" rIns="0" bIns="0" rtlCol="0" anchor="t">
+            <a:off x="8211312" y="1892808"/>
+            <a:ext cx="2734056" cy="1536192"/>
+          </a:xfrm>
+          <a:prstGeom prst="rect">
+            <a:avLst/>
+          </a:prstGeom>
+          <a:noFill/>
+          <a:ln/>
+        </p:spPr>
+        <p:txBody>
+          <a:bodyPr wrap="square" lIns="254" tIns="254" rIns="254" bIns="254" rtlCol="0" anchor="t">
             <a:normAutofit/>
           </a:bodyPr>
           <a:lstStyle/>
@@ -12130,7 +12300,7 @@
               <a:buNone/>
             </a:pPr>
             <a:r>
-              <a:rPr lang="en-US" sz="1550" dirty="0">
+              <a:rPr lang="en-US" sz="1320" dirty="0">
                 <a:solidFill>
                   <a:srgbClr val="17364A"/>
                 </a:solidFill>
@@ -12138,9 +12308,9 @@
                 <a:ea typeface="Aptos" pitchFamily="34" charset="-122"/>
                 <a:cs typeface="Aptos" pitchFamily="34" charset="-120"/>
               </a:rPr>
-              <a:t>Use the related plays to identify decisions, participants, timing, approvals, and documentation needed for responsible implementation.</a:t>
-            </a:r>
-            <a:endParaRPr lang="en-US" sz="1550" dirty="0"/>
+              <a:t>Use the related plays to identify decisions, participants, timing, approvals, and documentation needed for responsible.</a:t>
+            </a:r>
+            <a:endParaRPr lang="en-US" sz="1320" dirty="0"/>
           </a:p>
         </p:txBody>
       </p:sp>
@@ -12228,13 +12398,16 @@
           <a:ln/>
         </p:spPr>
         <p:txBody>
-          <a:bodyPr wrap="square" lIns="254" tIns="254" rIns="254" bIns="254" rtlCol="0" anchor="t">
+          <a:bodyPr wrap="square" lIns="508" tIns="508" rIns="508" bIns="508" rtlCol="0" anchor="t">
             <a:normAutofit/>
           </a:bodyPr>
           <a:lstStyle/>
           <a:p>
-            <a:r>
-              <a:rPr lang="en-US" sz="1380" dirty="0">
+            <a:pPr indent="0" marL="0">
+              <a:buNone/>
+            </a:pPr>
+            <a:r>
+              <a:rPr lang="en-US" sz="1220" dirty="0">
                 <a:solidFill>
                   <a:srgbClr val="17364A"/>
                 </a:solidFill>
@@ -12244,11 +12417,14 @@
               </a:rPr>
               <a:t>Locate the decision point in the playbook sequence.</a:t>
             </a:r>
-            <a:endParaRPr lang="en-US" sz="1380" dirty="0"/>
-          </a:p>
-          <a:p>
-            <a:r>
-              <a:rPr lang="en-US" sz="1380" dirty="0">
+            <a:endParaRPr lang="en-US" sz="1220" dirty="0"/>
+          </a:p>
+          <a:p>
+            <a:pPr indent="0" marL="0">
+              <a:buNone/>
+            </a:pPr>
+            <a:r>
+              <a:rPr lang="en-US" sz="1220" dirty="0">
                 <a:solidFill>
                   <a:srgbClr val="17364A"/>
                 </a:solidFill>
@@ -12258,11 +12434,14 @@
               </a:rPr>
               <a:t>Identify who should participate in the work.</a:t>
             </a:r>
-            <a:endParaRPr lang="en-US" sz="1380" dirty="0"/>
-          </a:p>
-          <a:p>
-            <a:r>
-              <a:rPr lang="en-US" sz="1380" dirty="0">
+            <a:endParaRPr lang="en-US" sz="1220" dirty="0"/>
+          </a:p>
+          <a:p>
+            <a:pPr indent="0" marL="0">
+              <a:buNone/>
+            </a:pPr>
+            <a:r>
+              <a:rPr lang="en-US" sz="1220" dirty="0">
                 <a:solidFill>
                   <a:srgbClr val="17364A"/>
                 </a:solidFill>
@@ -12272,7 +12451,7 @@
               </a:rPr>
               <a:t>Document the review, approval, or implementation step.</a:t>
             </a:r>
-            <a:endParaRPr lang="en-US" sz="1380" dirty="0"/>
+            <a:endParaRPr lang="en-US" sz="1220" dirty="0"/>
           </a:p>
         </p:txBody>
       </p:sp>
@@ -12573,63 +12752,75 @@
           <a:ln/>
         </p:spPr>
         <p:txBody>
-          <a:bodyPr wrap="square" lIns="635" tIns="635" rIns="635" bIns="635" rtlCol="0" anchor="t">
+          <a:bodyPr wrap="square" lIns="1016" tIns="1016" rIns="1016" bIns="1016" rtlCol="0" anchor="t">
             <a:normAutofit/>
           </a:bodyPr>
           <a:lstStyle/>
           <a:p>
+            <a:pPr indent="0" marL="0">
+              <a:buNone/>
+            </a:pPr>
             <a:r>
               <a:rPr lang="en-US" sz="1850" dirty="0">
                 <a:solidFill>
-                  <a:srgbClr val="17364A"/>
-                </a:solidFill>
-                <a:latin typeface="Aptos" pitchFamily="34" charset="0"/>
-                <a:ea typeface="Aptos" pitchFamily="34" charset="-122"/>
-                <a:cs typeface="Aptos" pitchFamily="34" charset="-120"/>
-              </a:rPr>
-              <a:t>Tool 3: Equity Impact Assessment Checklist (Checklist) - Use this tool to complete or strengthen the.</a:t>
+                  <a:srgbClr val="003A63"/>
+                </a:solidFill>
+                <a:latin typeface="Aptos" pitchFamily="34" charset="0"/>
+                <a:ea typeface="Aptos" pitchFamily="34" charset="-122"/>
+                <a:cs typeface="Aptos" pitchFamily="34" charset="-120"/>
+              </a:rPr>
+              <a:t>• Tool 3: Equity Impact Assessment Checklist (Checklist) - Use this tool to complete or.</a:t>
             </a:r>
             <a:endParaRPr lang="en-US" sz="1850" dirty="0"/>
           </a:p>
           <a:p>
+            <a:pPr indent="0" marL="0">
+              <a:buNone/>
+            </a:pPr>
             <a:r>
               <a:rPr lang="en-US" sz="1850" dirty="0">
                 <a:solidFill>
-                  <a:srgbClr val="17364A"/>
-                </a:solidFill>
-                <a:latin typeface="Aptos" pitchFamily="34" charset="0"/>
-                <a:ea typeface="Aptos" pitchFamily="34" charset="-122"/>
-                <a:cs typeface="Aptos" pitchFamily="34" charset="-120"/>
-              </a:rPr>
-              <a:t>Tool 4: AI Policy Landscape Scan (Worksheet) - Use AI Policy Landscape Scan to translate this lesson into a.</a:t>
+                  <a:srgbClr val="003A63"/>
+                </a:solidFill>
+                <a:latin typeface="Aptos" pitchFamily="34" charset="0"/>
+                <a:ea typeface="Aptos" pitchFamily="34" charset="-122"/>
+                <a:cs typeface="Aptos" pitchFamily="34" charset="-120"/>
+              </a:rPr>
+              <a:t>• Tool 4: AI Policy Landscape Scan (Worksheet) - Use AI Policy Landscape Scan to translate this.</a:t>
             </a:r>
             <a:endParaRPr lang="en-US" sz="1850" dirty="0"/>
           </a:p>
           <a:p>
+            <a:pPr indent="0" marL="0">
+              <a:buNone/>
+            </a:pPr>
             <a:r>
               <a:rPr lang="en-US" sz="1850" dirty="0">
                 <a:solidFill>
-                  <a:srgbClr val="17364A"/>
-                </a:solidFill>
-                <a:latin typeface="Aptos" pitchFamily="34" charset="0"/>
-                <a:ea typeface="Aptos" pitchFamily="34" charset="-122"/>
-                <a:cs typeface="Aptos" pitchFamily="34" charset="-120"/>
-              </a:rPr>
-              <a:t>Tool 5: AI Environmental and Resource Impact Review (Checklist) - Use AI Environmental and Resource Impact.</a:t>
+                  <a:srgbClr val="003A63"/>
+                </a:solidFill>
+                <a:latin typeface="Aptos" pitchFamily="34" charset="0"/>
+                <a:ea typeface="Aptos" pitchFamily="34" charset="-122"/>
+                <a:cs typeface="Aptos" pitchFamily="34" charset="-120"/>
+              </a:rPr>
+              <a:t>• Tool 5: AI Environmental and Resource Impact Review (Checklist) - Use AI Environmental and.</a:t>
             </a:r>
             <a:endParaRPr lang="en-US" sz="1850" dirty="0"/>
           </a:p>
           <a:p>
+            <a:pPr indent="0" marL="0">
+              <a:buNone/>
+            </a:pPr>
             <a:r>
               <a:rPr lang="en-US" sz="1850" dirty="0">
                 <a:solidFill>
-                  <a:srgbClr val="17364A"/>
-                </a:solidFill>
-                <a:latin typeface="Aptos" pitchFamily="34" charset="0"/>
-                <a:ea typeface="Aptos" pitchFamily="34" charset="-122"/>
-                <a:cs typeface="Aptos" pitchFamily="34" charset="-120"/>
-              </a:rPr>
-              <a:t>Tool 6: Human-Centered AI Decision Rule Checklist (Checklist) - Use Human-Centered AI Decision Rule.</a:t>
+                  <a:srgbClr val="003A63"/>
+                </a:solidFill>
+                <a:latin typeface="Aptos" pitchFamily="34" charset="0"/>
+                <a:ea typeface="Aptos" pitchFamily="34" charset="-122"/>
+                <a:cs typeface="Aptos" pitchFamily="34" charset="-120"/>
+              </a:rPr>
+              <a:t>• Tool 6: Human-Centered AI Decision Rule Checklist (Checklist) - Use Human-Centered AI Decision.</a:t>
             </a:r>
             <a:endParaRPr lang="en-US" sz="1850" dirty="0"/>
           </a:p>
@@ -12709,17 +12900,17 @@
         </p:nvSpPr>
         <p:spPr>
           <a:xfrm>
-            <a:off x="8211312" y="1920240"/>
-            <a:ext cx="2734056" cy="1463040"/>
-          </a:xfrm>
-          <a:prstGeom prst="rect">
-            <a:avLst/>
-          </a:prstGeom>
-          <a:noFill/>
-          <a:ln/>
-        </p:spPr>
-        <p:txBody>
-          <a:bodyPr wrap="square" lIns="0" tIns="0" rIns="0" bIns="0" rtlCol="0" anchor="t">
+            <a:off x="8211312" y="1892808"/>
+            <a:ext cx="2734056" cy="1536192"/>
+          </a:xfrm>
+          <a:prstGeom prst="rect">
+            <a:avLst/>
+          </a:prstGeom>
+          <a:noFill/>
+          <a:ln/>
+        </p:spPr>
+        <p:txBody>
+          <a:bodyPr wrap="square" lIns="254" tIns="254" rIns="254" bIns="254" rtlCol="0" anchor="t">
             <a:normAutofit/>
           </a:bodyPr>
           <a:lstStyle/>
@@ -12728,7 +12919,7 @@
               <a:buNone/>
             </a:pPr>
             <a:r>
-              <a:rPr lang="en-US" sz="1550" dirty="0">
+              <a:rPr lang="en-US" sz="1320" dirty="0">
                 <a:solidFill>
                   <a:srgbClr val="17364A"/>
                 </a:solidFill>
@@ -12736,9 +12927,9 @@
                 <a:ea typeface="Aptos" pitchFamily="34" charset="-122"/>
                 <a:cs typeface="Aptos" pitchFamily="34" charset="-120"/>
               </a:rPr>
-              <a:t>Use linked tools when your department needs a structured worksheet, template, checklist, review process, or documentation artifact.</a:t>
-            </a:r>
-            <a:endParaRPr lang="en-US" sz="1550" dirty="0"/>
+              <a:t>Use linked tools when your department needs a structured worksheet, template, checklist, review process, or.</a:t>
+            </a:r>
+            <a:endParaRPr lang="en-US" sz="1320" dirty="0"/>
           </a:p>
         </p:txBody>
       </p:sp>
@@ -12826,13 +13017,16 @@
           <a:ln/>
         </p:spPr>
         <p:txBody>
-          <a:bodyPr wrap="square" lIns="254" tIns="254" rIns="254" bIns="254" rtlCol="0" anchor="t">
+          <a:bodyPr wrap="square" lIns="508" tIns="508" rIns="508" bIns="508" rtlCol="0" anchor="t">
             <a:normAutofit/>
           </a:bodyPr>
           <a:lstStyle/>
           <a:p>
-            <a:r>
-              <a:rPr lang="en-US" sz="1380" dirty="0">
+            <a:pPr indent="0" marL="0">
+              <a:buNone/>
+            </a:pPr>
+            <a:r>
+              <a:rPr lang="en-US" sz="1220" dirty="0">
                 <a:solidFill>
                   <a:srgbClr val="17364A"/>
                 </a:solidFill>
@@ -12842,11 +13036,14 @@
               </a:rPr>
               <a:t>Use a tool when no comparable local process exists.</a:t>
             </a:r>
-            <a:endParaRPr lang="en-US" sz="1380" dirty="0"/>
-          </a:p>
-          <a:p>
-            <a:r>
-              <a:rPr lang="en-US" sz="1380" dirty="0">
+            <a:endParaRPr lang="en-US" sz="1220" dirty="0"/>
+          </a:p>
+          <a:p>
+            <a:pPr indent="0" marL="0">
+              <a:buNone/>
+            </a:pPr>
+            <a:r>
+              <a:rPr lang="en-US" sz="1220" dirty="0">
                 <a:solidFill>
                   <a:srgbClr val="17364A"/>
                 </a:solidFill>
@@ -12854,13 +13051,16 @@
                 <a:ea typeface="Aptos" pitchFamily="34" charset="-122"/>
                 <a:cs typeface="Aptos" pitchFamily="34" charset="-120"/>
               </a:rPr>
-              <a:t>Adapt existing department templates when they already fit the purpose.</a:t>
-            </a:r>
-            <a:endParaRPr lang="en-US" sz="1380" dirty="0"/>
-          </a:p>
-          <a:p>
-            <a:r>
-              <a:rPr lang="en-US" sz="1380" dirty="0">
+              <a:t>Adapt existing department templates when they already fit the.</a:t>
+            </a:r>
+            <a:endParaRPr lang="en-US" sz="1220" dirty="0"/>
+          </a:p>
+          <a:p>
+            <a:pPr indent="0" marL="0">
+              <a:buNone/>
+            </a:pPr>
+            <a:r>
+              <a:rPr lang="en-US" sz="1220" dirty="0">
                 <a:solidFill>
                   <a:srgbClr val="17364A"/>
                 </a:solidFill>
@@ -12870,7 +13070,7 @@
               </a:rPr>
               <a:t>Save the completed artifact as evidence of the decision.</a:t>
             </a:r>
-            <a:endParaRPr lang="en-US" sz="1380" dirty="0"/>
+            <a:endParaRPr lang="en-US" sz="1220" dirty="0"/>
           </a:p>
         </p:txBody>
       </p:sp>
@@ -13171,49 +13371,58 @@
           <a:ln/>
         </p:spPr>
         <p:txBody>
-          <a:bodyPr wrap="square" lIns="635" tIns="635" rIns="635" bIns="635" rtlCol="0" anchor="t">
+          <a:bodyPr wrap="square" lIns="1016" tIns="1016" rIns="1016" bIns="1016" rtlCol="0" anchor="t">
             <a:normAutofit/>
           </a:bodyPr>
           <a:lstStyle/>
           <a:p>
+            <a:pPr indent="0" marL="0">
+              <a:buNone/>
+            </a:pPr>
             <a:r>
               <a:rPr lang="en-US" sz="2100" dirty="0">
                 <a:solidFill>
-                  <a:srgbClr val="17364A"/>
-                </a:solidFill>
-                <a:latin typeface="Aptos" pitchFamily="34" charset="0"/>
-                <a:ea typeface="Aptos" pitchFamily="34" charset="-122"/>
-                <a:cs typeface="Aptos" pitchFamily="34" charset="-120"/>
-              </a:rPr>
-              <a:t>Explain model results in plain language for nontechnical audiences.</a:t>
+                  <a:srgbClr val="003A63"/>
+                </a:solidFill>
+                <a:latin typeface="Aptos" pitchFamily="34" charset="0"/>
+                <a:ea typeface="Aptos" pitchFamily="34" charset="-122"/>
+                <a:cs typeface="Aptos" pitchFamily="34" charset="-120"/>
+              </a:rPr>
+              <a:t>• Explain model results in plain language for nontechnical audiences.</a:t>
             </a:r>
             <a:endParaRPr lang="en-US" sz="2100" dirty="0"/>
           </a:p>
           <a:p>
+            <a:pPr indent="0" marL="0">
+              <a:buNone/>
+            </a:pPr>
             <a:r>
               <a:rPr lang="en-US" sz="2100" dirty="0">
                 <a:solidFill>
-                  <a:srgbClr val="17364A"/>
-                </a:solidFill>
-                <a:latin typeface="Aptos" pitchFamily="34" charset="0"/>
-                <a:ea typeface="Aptos" pitchFamily="34" charset="-122"/>
-                <a:cs typeface="Aptos" pitchFamily="34" charset="-120"/>
-              </a:rPr>
-              <a:t>Distinguish uncertainty, variability, error, bias, and data limitations.</a:t>
+                  <a:srgbClr val="003A63"/>
+                </a:solidFill>
+                <a:latin typeface="Aptos" pitchFamily="34" charset="0"/>
+                <a:ea typeface="Aptos" pitchFamily="34" charset="-122"/>
+                <a:cs typeface="Aptos" pitchFamily="34" charset="-120"/>
+              </a:rPr>
+              <a:t>• Distinguish uncertainty, variability, error, bias, and data limitations.</a:t>
             </a:r>
             <a:endParaRPr lang="en-US" sz="2100" dirty="0"/>
           </a:p>
           <a:p>
+            <a:pPr indent="0" marL="0">
+              <a:buNone/>
+            </a:pPr>
             <a:r>
               <a:rPr lang="en-US" sz="2100" dirty="0">
                 <a:solidFill>
-                  <a:srgbClr val="17364A"/>
-                </a:solidFill>
-                <a:latin typeface="Aptos" pitchFamily="34" charset="0"/>
-                <a:ea typeface="Aptos" pitchFamily="34" charset="-122"/>
-                <a:cs typeface="Aptos" pitchFamily="34" charset="-120"/>
-              </a:rPr>
-              <a:t>Identify when model results should include confidence intervals, prediction intervals, caveats, or.</a:t>
+                  <a:srgbClr val="003A63"/>
+                </a:solidFill>
+                <a:latin typeface="Aptos" pitchFamily="34" charset="0"/>
+                <a:ea typeface="Aptos" pitchFamily="34" charset="-122"/>
+                <a:cs typeface="Aptos" pitchFamily="34" charset="-120"/>
+              </a:rPr>
+              <a:t>• Identify when model results should include confidence intervals, prediction intervals,.</a:t>
             </a:r>
             <a:endParaRPr lang="en-US" sz="2100" dirty="0"/>
           </a:p>
@@ -13293,17 +13502,17 @@
         </p:nvSpPr>
         <p:spPr>
           <a:xfrm>
-            <a:off x="7799832" y="1828800"/>
-            <a:ext cx="3145536" cy="685800"/>
-          </a:xfrm>
-          <a:prstGeom prst="rect">
-            <a:avLst/>
-          </a:prstGeom>
-          <a:noFill/>
-          <a:ln/>
-        </p:spPr>
-        <p:txBody>
-          <a:bodyPr wrap="square" lIns="0" tIns="0" rIns="0" bIns="0" rtlCol="0" anchor="t">
+            <a:off x="7799832" y="1801368"/>
+            <a:ext cx="3145536" cy="758952"/>
+          </a:xfrm>
+          <a:prstGeom prst="rect">
+            <a:avLst/>
+          </a:prstGeom>
+          <a:noFill/>
+          <a:ln/>
+        </p:spPr>
+        <p:txBody>
+          <a:bodyPr wrap="square" lIns="254" tIns="254" rIns="254" bIns="254" rtlCol="0" anchor="t">
             <a:normAutofit/>
           </a:bodyPr>
           <a:lstStyle/>
@@ -13312,7 +13521,7 @@
               <a:buNone/>
             </a:pPr>
             <a:r>
-              <a:rPr lang="en-US" sz="1550" dirty="0">
+              <a:rPr lang="en-US" sz="1320" dirty="0">
                 <a:solidFill>
                   <a:srgbClr val="17364A"/>
                 </a:solidFill>
@@ -13322,7 +13531,7 @@
               </a:rPr>
               <a:t>Explain model results in plain language for nontechnical audiences.</a:t>
             </a:r>
-            <a:endParaRPr lang="en-US" sz="1550" dirty="0"/>
+            <a:endParaRPr lang="en-US" sz="1320" dirty="0"/>
           </a:p>
         </p:txBody>
       </p:sp>
@@ -13410,13 +13619,16 @@
           <a:ln/>
         </p:spPr>
         <p:txBody>
-          <a:bodyPr wrap="square" lIns="254" tIns="254" rIns="254" bIns="254" rtlCol="0" anchor="t">
+          <a:bodyPr wrap="square" lIns="508" tIns="508" rIns="508" bIns="508" rtlCol="0" anchor="t">
             <a:normAutofit/>
           </a:bodyPr>
           <a:lstStyle/>
           <a:p>
-            <a:r>
-              <a:rPr lang="en-US" sz="1380" dirty="0">
+            <a:pPr indent="0" marL="0">
+              <a:buNone/>
+            </a:pPr>
+            <a:r>
+              <a:rPr lang="en-US" sz="1220" dirty="0">
                 <a:solidFill>
                   <a:srgbClr val="17364A"/>
                 </a:solidFill>
@@ -13424,13 +13636,16 @@
                 <a:ea typeface="Aptos" pitchFamily="34" charset="-122"/>
                 <a:cs typeface="Aptos" pitchFamily="34" charset="-120"/>
               </a:rPr>
-              <a:t>Identify when model results should include confidence intervals, prediction intervals,.</a:t>
-            </a:r>
-            <a:endParaRPr lang="en-US" sz="1380" dirty="0"/>
-          </a:p>
-          <a:p>
-            <a:r>
-              <a:rPr lang="en-US" sz="1380" dirty="0">
+              <a:t>Identify when model results should include confidence intervals,.</a:t>
+            </a:r>
+            <a:endParaRPr lang="en-US" sz="1220" dirty="0"/>
+          </a:p>
+          <a:p>
+            <a:pPr indent="0" marL="0">
+              <a:buNone/>
+            </a:pPr>
+            <a:r>
+              <a:rPr lang="en-US" sz="1220" dirty="0">
                 <a:solidFill>
                   <a:srgbClr val="17364A"/>
                 </a:solidFill>
@@ -13438,13 +13653,16 @@
                 <a:ea typeface="Aptos" pitchFamily="34" charset="-122"/>
                 <a:cs typeface="Aptos" pitchFamily="34" charset="-120"/>
               </a:rPr>
-              <a:t>Avoid overclaiming, causal overreach, and false precision in AI communications.</a:t>
-            </a:r>
-            <a:endParaRPr lang="en-US" sz="1380" dirty="0"/>
-          </a:p>
-          <a:p>
-            <a:r>
-              <a:rPr lang="en-US" sz="1380" dirty="0">
+              <a:t>Avoid overclaiming, causal overreach, and false precision in AI.</a:t>
+            </a:r>
+            <a:endParaRPr lang="en-US" sz="1220" dirty="0"/>
+          </a:p>
+          <a:p>
+            <a:pPr indent="0" marL="0">
+              <a:buNone/>
+            </a:pPr>
+            <a:r>
+              <a:rPr lang="en-US" sz="1220" dirty="0">
                 <a:solidFill>
                   <a:srgbClr val="17364A"/>
                 </a:solidFill>
@@ -13452,9 +13670,9 @@
                 <a:ea typeface="Aptos" pitchFamily="34" charset="-122"/>
                 <a:cs typeface="Aptos" pitchFamily="34" charset="-120"/>
               </a:rPr>
-              <a:t>Create a model communication brief for a public health decision-maker.</a:t>
-            </a:r>
-            <a:endParaRPr lang="en-US" sz="1380" dirty="0"/>
+              <a:t>Create a model communication brief for a public health.</a:t>
+            </a:r>
+            <a:endParaRPr lang="en-US" sz="1220" dirty="0"/>
           </a:p>
         </p:txBody>
       </p:sp>
@@ -13532,17 +13750,17 @@
         </p:nvSpPr>
         <p:spPr>
           <a:xfrm>
-            <a:off x="7799832" y="5001768"/>
-            <a:ext cx="3145536" cy="502920"/>
-          </a:xfrm>
-          <a:prstGeom prst="rect">
-            <a:avLst/>
-          </a:prstGeom>
-          <a:noFill/>
-          <a:ln/>
-        </p:spPr>
-        <p:txBody>
-          <a:bodyPr wrap="square" lIns="0" tIns="0" rIns="0" bIns="0" rtlCol="0" anchor="t">
+            <a:off x="7799832" y="4974336"/>
+            <a:ext cx="3145536" cy="576072"/>
+          </a:xfrm>
+          <a:prstGeom prst="rect">
+            <a:avLst/>
+          </a:prstGeom>
+          <a:noFill/>
+          <a:ln/>
+        </p:spPr>
+        <p:txBody>
+          <a:bodyPr wrap="square" lIns="254" tIns="254" rIns="254" bIns="254" rtlCol="0" anchor="t">
             <a:normAutofit/>
           </a:bodyPr>
           <a:lstStyle/>
@@ -13551,7 +13769,7 @@
               <a:buNone/>
             </a:pPr>
             <a:r>
-              <a:rPr lang="en-US" sz="1550" dirty="0">
+              <a:rPr lang="en-US" sz="1320" dirty="0">
                 <a:solidFill>
                   <a:srgbClr val="17364A"/>
                 </a:solidFill>
@@ -13559,9 +13777,9 @@
                 <a:ea typeface="Aptos" pitchFamily="34" charset="-122"/>
                 <a:cs typeface="Aptos" pitchFamily="34" charset="-120"/>
               </a:rPr>
-              <a:t>Use the assignment to test whether you can explain the concept, apply it to a realistic public health situation, and identify what would need review before the work moves forward.</a:t>
-            </a:r>
-            <a:endParaRPr lang="en-US" sz="1550" dirty="0"/>
+              <a:t>Use the assignment to test whether you can explain the concept, apply it to a realistic public health situation, and.</a:t>
+            </a:r>
+            <a:endParaRPr lang="en-US" sz="1320" dirty="0"/>
           </a:p>
         </p:txBody>
       </p:sp>
@@ -13862,49 +14080,58 @@
           <a:ln/>
         </p:spPr>
         <p:txBody>
-          <a:bodyPr wrap="square" lIns="635" tIns="635" rIns="635" bIns="635" rtlCol="0" anchor="t">
+          <a:bodyPr wrap="square" lIns="1016" tIns="1016" rIns="1016" bIns="1016" rtlCol="0" anchor="t">
             <a:normAutofit/>
           </a:bodyPr>
           <a:lstStyle/>
           <a:p>
+            <a:pPr indent="0" marL="0">
+              <a:buNone/>
+            </a:pPr>
             <a:r>
               <a:rPr lang="en-US" sz="2100" dirty="0">
                 <a:solidFill>
-                  <a:srgbClr val="17364A"/>
-                </a:solidFill>
-                <a:latin typeface="Aptos" pitchFamily="34" charset="0"/>
-                <a:ea typeface="Aptos" pitchFamily="34" charset="-122"/>
-                <a:cs typeface="Aptos" pitchFamily="34" charset="-120"/>
-              </a:rPr>
-              <a:t>Public health staff often need to communicate AI or model results to leaders, partners, the public, or.</a:t>
+                  <a:srgbClr val="003A63"/>
+                </a:solidFill>
+                <a:latin typeface="Aptos" pitchFamily="34" charset="0"/>
+                <a:ea typeface="Aptos" pitchFamily="34" charset="-122"/>
+                <a:cs typeface="Aptos" pitchFamily="34" charset="-120"/>
+              </a:rPr>
+              <a:t>• Public health staff often need to communicate AI or model results to leaders, partners, the.</a:t>
             </a:r>
             <a:endParaRPr lang="en-US" sz="2100" dirty="0"/>
           </a:p>
           <a:p>
+            <a:pPr indent="0" marL="0">
+              <a:buNone/>
+            </a:pPr>
             <a:r>
               <a:rPr lang="en-US" sz="2100" dirty="0">
                 <a:solidFill>
-                  <a:srgbClr val="17364A"/>
-                </a:solidFill>
-                <a:latin typeface="Aptos" pitchFamily="34" charset="0"/>
-                <a:ea typeface="Aptos" pitchFamily="34" charset="-122"/>
-                <a:cs typeface="Aptos" pitchFamily="34" charset="-120"/>
-              </a:rPr>
-              <a:t>This module teaches learners how to explain model outputs, uncertainty, limitations, and appropriate.</a:t>
+                  <a:srgbClr val="003A63"/>
+                </a:solidFill>
+                <a:latin typeface="Aptos" pitchFamily="34" charset="0"/>
+                <a:ea typeface="Aptos" pitchFamily="34" charset="-122"/>
+                <a:cs typeface="Aptos" pitchFamily="34" charset="-120"/>
+              </a:rPr>
+              <a:t>• This module teaches learners how to explain model outputs, uncertainty, limitations, and.</a:t>
             </a:r>
             <a:endParaRPr lang="en-US" sz="2100" dirty="0"/>
           </a:p>
           <a:p>
+            <a:pPr indent="0" marL="0">
+              <a:buNone/>
+            </a:pPr>
             <a:r>
               <a:rPr lang="en-US" sz="2100" dirty="0">
                 <a:solidFill>
-                  <a:srgbClr val="17364A"/>
-                </a:solidFill>
-                <a:latin typeface="Aptos" pitchFamily="34" charset="0"/>
-                <a:ea typeface="Aptos" pitchFamily="34" charset="-122"/>
-                <a:cs typeface="Aptos" pitchFamily="34" charset="-120"/>
-              </a:rPr>
-              <a:t>The module focuses on practical communication.</a:t>
+                  <a:srgbClr val="003A63"/>
+                </a:solidFill>
+                <a:latin typeface="Aptos" pitchFamily="34" charset="0"/>
+                <a:ea typeface="Aptos" pitchFamily="34" charset="-122"/>
+                <a:cs typeface="Aptos" pitchFamily="34" charset="-120"/>
+              </a:rPr>
+              <a:t>• The module focuses on practical communication.</a:t>
             </a:r>
             <a:endParaRPr lang="en-US" sz="2100" dirty="0"/>
           </a:p>
@@ -13984,17 +14211,17 @@
         </p:nvSpPr>
         <p:spPr>
           <a:xfrm>
-            <a:off x="7799832" y="1828800"/>
-            <a:ext cx="3145536" cy="685800"/>
-          </a:xfrm>
-          <a:prstGeom prst="rect">
-            <a:avLst/>
-          </a:prstGeom>
-          <a:noFill/>
-          <a:ln/>
-        </p:spPr>
-        <p:txBody>
-          <a:bodyPr wrap="square" lIns="0" tIns="0" rIns="0" bIns="0" rtlCol="0" anchor="t">
+            <a:off x="7799832" y="1801368"/>
+            <a:ext cx="3145536" cy="758952"/>
+          </a:xfrm>
+          <a:prstGeom prst="rect">
+            <a:avLst/>
+          </a:prstGeom>
+          <a:noFill/>
+          <a:ln/>
+        </p:spPr>
+        <p:txBody>
+          <a:bodyPr wrap="square" lIns="254" tIns="254" rIns="254" bIns="254" rtlCol="0" anchor="t">
             <a:normAutofit/>
           </a:bodyPr>
           <a:lstStyle/>
@@ -14003,7 +14230,7 @@
               <a:buNone/>
             </a:pPr>
             <a:r>
-              <a:rPr lang="en-US" sz="1550" dirty="0">
+              <a:rPr lang="en-US" sz="1320" dirty="0">
                 <a:solidFill>
                   <a:srgbClr val="17364A"/>
                 </a:solidFill>
@@ -14013,7 +14240,7 @@
               </a:rPr>
               <a:t>Public health staff often need to communicate AI or model results to leaders, partners, the public, or.</a:t>
             </a:r>
-            <a:endParaRPr lang="en-US" sz="1550" dirty="0"/>
+            <a:endParaRPr lang="en-US" sz="1320" dirty="0"/>
           </a:p>
         </p:txBody>
       </p:sp>
@@ -14101,13 +14328,16 @@
           <a:ln/>
         </p:spPr>
         <p:txBody>
-          <a:bodyPr wrap="square" lIns="254" tIns="254" rIns="254" bIns="254" rtlCol="0" anchor="t">
+          <a:bodyPr wrap="square" lIns="508" tIns="508" rIns="508" bIns="508" rtlCol="0" anchor="t">
             <a:normAutofit/>
           </a:bodyPr>
           <a:lstStyle/>
           <a:p>
-            <a:r>
-              <a:rPr lang="en-US" sz="1380" dirty="0">
+            <a:pPr indent="0" marL="0">
+              <a:buNone/>
+            </a:pPr>
+            <a:r>
+              <a:rPr lang="en-US" sz="1220" dirty="0">
                 <a:solidFill>
                   <a:srgbClr val="17364A"/>
                 </a:solidFill>
@@ -14115,13 +14345,16 @@
                 <a:ea typeface="Aptos" pitchFamily="34" charset="-122"/>
                 <a:cs typeface="Aptos" pitchFamily="34" charset="-120"/>
               </a:rPr>
-              <a:t>Public health staff often need to communicate AI or model results to leaders, partners,.</a:t>
-            </a:r>
-            <a:endParaRPr lang="en-US" sz="1380" dirty="0"/>
-          </a:p>
-          <a:p>
-            <a:r>
-              <a:rPr lang="en-US" sz="1380" dirty="0">
+              <a:t>Public health staff often need to communicate AI or model results.</a:t>
+            </a:r>
+            <a:endParaRPr lang="en-US" sz="1220" dirty="0"/>
+          </a:p>
+          <a:p>
+            <a:pPr indent="0" marL="0">
+              <a:buNone/>
+            </a:pPr>
+            <a:r>
+              <a:rPr lang="en-US" sz="1220" dirty="0">
                 <a:solidFill>
                   <a:srgbClr val="17364A"/>
                 </a:solidFill>
@@ -14129,13 +14362,16 @@
                 <a:ea typeface="Aptos" pitchFamily="34" charset="-122"/>
                 <a:cs typeface="Aptos" pitchFamily="34" charset="-120"/>
               </a:rPr>
-              <a:t>This module teaches learners how to explain model outputs, uncertainty, limitations, and.</a:t>
-            </a:r>
-            <a:endParaRPr lang="en-US" sz="1380" dirty="0"/>
-          </a:p>
-          <a:p>
-            <a:r>
-              <a:rPr lang="en-US" sz="1380" dirty="0">
+              <a:t>This module teaches learners how to explain model outputs,.</a:t>
+            </a:r>
+            <a:endParaRPr lang="en-US" sz="1220" dirty="0"/>
+          </a:p>
+          <a:p>
+            <a:pPr indent="0" marL="0">
+              <a:buNone/>
+            </a:pPr>
+            <a:r>
+              <a:rPr lang="en-US" sz="1220" dirty="0">
                 <a:solidFill>
                   <a:srgbClr val="17364A"/>
                 </a:solidFill>
@@ -14143,9 +14379,9 @@
                 <a:ea typeface="Aptos" pitchFamily="34" charset="-122"/>
                 <a:cs typeface="Aptos" pitchFamily="34" charset="-120"/>
               </a:rPr>
-              <a:t>Learners translate metrics, confidence, caveats, and validation findings into language.</a:t>
-            </a:r>
-            <a:endParaRPr lang="en-US" sz="1380" dirty="0"/>
+              <a:t>Learners translate metrics, confidence, caveats, and validation.</a:t>
+            </a:r>
+            <a:endParaRPr lang="en-US" sz="1220" dirty="0"/>
           </a:p>
         </p:txBody>
       </p:sp>
@@ -14223,17 +14459,17 @@
         </p:nvSpPr>
         <p:spPr>
           <a:xfrm>
-            <a:off x="7799832" y="5001768"/>
-            <a:ext cx="3145536" cy="502920"/>
-          </a:xfrm>
-          <a:prstGeom prst="rect">
-            <a:avLst/>
-          </a:prstGeom>
-          <a:noFill/>
-          <a:ln/>
-        </p:spPr>
-        <p:txBody>
-          <a:bodyPr wrap="square" lIns="0" tIns="0" rIns="0" bIns="0" rtlCol="0" anchor="t">
+            <a:off x="7799832" y="4974336"/>
+            <a:ext cx="3145536" cy="576072"/>
+          </a:xfrm>
+          <a:prstGeom prst="rect">
+            <a:avLst/>
+          </a:prstGeom>
+          <a:noFill/>
+          <a:ln/>
+        </p:spPr>
+        <p:txBody>
+          <a:bodyPr wrap="square" lIns="254" tIns="254" rIns="254" bIns="254" rtlCol="0" anchor="t">
             <a:normAutofit/>
           </a:bodyPr>
           <a:lstStyle/>
@@ -14242,7 +14478,7 @@
               <a:buNone/>
             </a:pPr>
             <a:r>
-              <a:rPr lang="en-US" sz="1550" dirty="0">
+              <a:rPr lang="en-US" sz="1320" dirty="0">
                 <a:solidFill>
                   <a:srgbClr val="17364A"/>
                 </a:solidFill>
@@ -14250,9 +14486,9 @@
                 <a:ea typeface="Aptos" pitchFamily="34" charset="-122"/>
                 <a:cs typeface="Aptos" pitchFamily="34" charset="-120"/>
               </a:rPr>
-              <a:t>Connect the concept to data quality, model performance, validation evidence, monitoring measures, and decisions that remain under human control.</a:t>
-            </a:r>
-            <a:endParaRPr lang="en-US" sz="1550" dirty="0"/>
+              <a:t>Connect the concept to data quality, model performance, validation evidence, monitoring measures, and decisions that.</a:t>
+            </a:r>
+            <a:endParaRPr lang="en-US" sz="1320" dirty="0"/>
           </a:p>
         </p:txBody>
       </p:sp>
@@ -14553,49 +14789,58 @@
           <a:ln/>
         </p:spPr>
         <p:txBody>
-          <a:bodyPr wrap="square" lIns="635" tIns="635" rIns="635" bIns="635" rtlCol="0" anchor="t">
+          <a:bodyPr wrap="square" lIns="1016" tIns="1016" rIns="1016" bIns="1016" rtlCol="0" anchor="t">
             <a:normAutofit/>
           </a:bodyPr>
           <a:lstStyle/>
           <a:p>
+            <a:pPr indent="0" marL="0">
+              <a:buNone/>
+            </a:pPr>
             <a:r>
               <a:rPr lang="en-US" sz="2100" dirty="0">
                 <a:solidFill>
-                  <a:srgbClr val="17364A"/>
-                </a:solidFill>
-                <a:latin typeface="Aptos" pitchFamily="34" charset="0"/>
-                <a:ea typeface="Aptos" pitchFamily="34" charset="-122"/>
-                <a:cs typeface="Aptos" pitchFamily="34" charset="-120"/>
-              </a:rPr>
-              <a:t>Uncertainty: The degree to which an estimate, prediction, or conclusion may be imprecise or incomplete.</a:t>
+                  <a:srgbClr val="003A63"/>
+                </a:solidFill>
+                <a:latin typeface="Aptos" pitchFamily="34" charset="0"/>
+                <a:ea typeface="Aptos" pitchFamily="34" charset="-122"/>
+                <a:cs typeface="Aptos" pitchFamily="34" charset="-120"/>
+              </a:rPr>
+              <a:t>• Uncertainty: The degree to which an estimate, prediction, or conclusion may be imprecise or.</a:t>
             </a:r>
             <a:endParaRPr lang="en-US" sz="2100" dirty="0"/>
           </a:p>
           <a:p>
+            <a:pPr indent="0" marL="0">
+              <a:buNone/>
+            </a:pPr>
             <a:r>
               <a:rPr lang="en-US" sz="2100" dirty="0">
                 <a:solidFill>
-                  <a:srgbClr val="17364A"/>
-                </a:solidFill>
-                <a:latin typeface="Aptos" pitchFamily="34" charset="0"/>
-                <a:ea typeface="Aptos" pitchFamily="34" charset="-122"/>
-                <a:cs typeface="Aptos" pitchFamily="34" charset="-120"/>
-              </a:rPr>
-              <a:t>Prediction interval: A range that estimates where a future observation may fall.</a:t>
+                  <a:srgbClr val="003A63"/>
+                </a:solidFill>
+                <a:latin typeface="Aptos" pitchFamily="34" charset="0"/>
+                <a:ea typeface="Aptos" pitchFamily="34" charset="-122"/>
+                <a:cs typeface="Aptos" pitchFamily="34" charset="-120"/>
+              </a:rPr>
+              <a:t>• Prediction interval: A range that estimates where a future observation may fall.</a:t>
             </a:r>
             <a:endParaRPr lang="en-US" sz="2100" dirty="0"/>
           </a:p>
           <a:p>
+            <a:pPr indent="0" marL="0">
+              <a:buNone/>
+            </a:pPr>
             <a:r>
               <a:rPr lang="en-US" sz="2100" dirty="0">
                 <a:solidFill>
-                  <a:srgbClr val="17364A"/>
-                </a:solidFill>
-                <a:latin typeface="Aptos" pitchFamily="34" charset="0"/>
-                <a:ea typeface="Aptos" pitchFamily="34" charset="-122"/>
-                <a:cs typeface="Aptos" pitchFamily="34" charset="-120"/>
-              </a:rPr>
-              <a:t>Confidence interval: A range that expresses uncertainty around an estimated parameter.</a:t>
+                  <a:srgbClr val="003A63"/>
+                </a:solidFill>
+                <a:latin typeface="Aptos" pitchFamily="34" charset="0"/>
+                <a:ea typeface="Aptos" pitchFamily="34" charset="-122"/>
+                <a:cs typeface="Aptos" pitchFamily="34" charset="-120"/>
+              </a:rPr>
+              <a:t>• Confidence interval: A range that expresses uncertainty around an estimated parameter.</a:t>
             </a:r>
             <a:endParaRPr lang="en-US" sz="2100" dirty="0"/>
           </a:p>
@@ -14675,17 +14920,17 @@
         </p:nvSpPr>
         <p:spPr>
           <a:xfrm>
-            <a:off x="7799832" y="1828800"/>
-            <a:ext cx="3145536" cy="685800"/>
-          </a:xfrm>
-          <a:prstGeom prst="rect">
-            <a:avLst/>
-          </a:prstGeom>
-          <a:noFill/>
-          <a:ln/>
-        </p:spPr>
-        <p:txBody>
-          <a:bodyPr wrap="square" lIns="0" tIns="0" rIns="0" bIns="0" rtlCol="0" anchor="t">
+            <a:off x="7799832" y="1801368"/>
+            <a:ext cx="3145536" cy="758952"/>
+          </a:xfrm>
+          <a:prstGeom prst="rect">
+            <a:avLst/>
+          </a:prstGeom>
+          <a:noFill/>
+          <a:ln/>
+        </p:spPr>
+        <p:txBody>
+          <a:bodyPr wrap="square" lIns="254" tIns="254" rIns="254" bIns="254" rtlCol="0" anchor="t">
             <a:normAutofit/>
           </a:bodyPr>
           <a:lstStyle/>
@@ -14694,7 +14939,7 @@
               <a:buNone/>
             </a:pPr>
             <a:r>
-              <a:rPr lang="en-US" sz="1550" dirty="0">
+              <a:rPr lang="en-US" sz="1320" dirty="0">
                 <a:solidFill>
                   <a:srgbClr val="17364A"/>
                 </a:solidFill>
@@ -14704,7 +14949,7 @@
               </a:rPr>
               <a:t>Uncertainty: The degree to which an estimate, prediction, or conclusion may be imprecise or incomplete.</a:t>
             </a:r>
-            <a:endParaRPr lang="en-US" sz="1550" dirty="0"/>
+            <a:endParaRPr lang="en-US" sz="1320" dirty="0"/>
           </a:p>
         </p:txBody>
       </p:sp>
@@ -14792,13 +15037,16 @@
           <a:ln/>
         </p:spPr>
         <p:txBody>
-          <a:bodyPr wrap="square" lIns="254" tIns="254" rIns="254" bIns="254" rtlCol="0" anchor="t">
+          <a:bodyPr wrap="square" lIns="508" tIns="508" rIns="508" bIns="508" rtlCol="0" anchor="t">
             <a:normAutofit/>
           </a:bodyPr>
           <a:lstStyle/>
           <a:p>
-            <a:r>
-              <a:rPr lang="en-US" sz="1380" dirty="0">
+            <a:pPr indent="0" marL="0">
+              <a:buNone/>
+            </a:pPr>
+            <a:r>
+              <a:rPr lang="en-US" sz="1220" dirty="0">
                 <a:solidFill>
                   <a:srgbClr val="17364A"/>
                 </a:solidFill>
@@ -14806,13 +15054,16 @@
                 <a:ea typeface="Aptos" pitchFamily="34" charset="-122"/>
                 <a:cs typeface="Aptos" pitchFamily="34" charset="-120"/>
               </a:rPr>
-              <a:t>Calibration: How closely predicted probabilities match observed outcomes.</a:t>
-            </a:r>
-            <a:endParaRPr lang="en-US" sz="1380" dirty="0"/>
-          </a:p>
-          <a:p>
-            <a:r>
-              <a:rPr lang="en-US" sz="1380" dirty="0">
+              <a:t>Calibration: How closely predicted probabilities match observed.</a:t>
+            </a:r>
+            <a:endParaRPr lang="en-US" sz="1220" dirty="0"/>
+          </a:p>
+          <a:p>
+            <a:pPr indent="0" marL="0">
+              <a:buNone/>
+            </a:pPr>
+            <a:r>
+              <a:rPr lang="en-US" sz="1220" dirty="0">
                 <a:solidFill>
                   <a:srgbClr val="17364A"/>
                 </a:solidFill>
@@ -14822,7 +15073,7 @@
               </a:rPr>
               <a:t>Caveat: A clear statement of limitation, condition, or caution.</a:t>
             </a:r>
-            <a:endParaRPr lang="en-US" sz="1380" dirty="0"/>
+            <a:endParaRPr lang="en-US" sz="1220" dirty="0"/>
           </a:p>
         </p:txBody>
       </p:sp>
@@ -14900,17 +15151,17 @@
         </p:nvSpPr>
         <p:spPr>
           <a:xfrm>
-            <a:off x="7799832" y="5001768"/>
-            <a:ext cx="3145536" cy="502920"/>
-          </a:xfrm>
-          <a:prstGeom prst="rect">
-            <a:avLst/>
-          </a:prstGeom>
-          <a:noFill/>
-          <a:ln/>
-        </p:spPr>
-        <p:txBody>
-          <a:bodyPr wrap="square" lIns="0" tIns="0" rIns="0" bIns="0" rtlCol="0" anchor="t">
+            <a:off x="7799832" y="4974336"/>
+            <a:ext cx="3145536" cy="576072"/>
+          </a:xfrm>
+          <a:prstGeom prst="rect">
+            <a:avLst/>
+          </a:prstGeom>
+          <a:noFill/>
+          <a:ln/>
+        </p:spPr>
+        <p:txBody>
+          <a:bodyPr wrap="square" lIns="254" tIns="254" rIns="254" bIns="254" rtlCol="0" anchor="t">
             <a:normAutofit/>
           </a:bodyPr>
           <a:lstStyle/>
@@ -14919,7 +15170,7 @@
               <a:buNone/>
             </a:pPr>
             <a:r>
-              <a:rPr lang="en-US" sz="1550" dirty="0">
+              <a:rPr lang="en-US" sz="1320" dirty="0">
                 <a:solidFill>
                   <a:srgbClr val="17364A"/>
                 </a:solidFill>
@@ -14927,9 +15178,9 @@
                 <a:ea typeface="Aptos" pitchFamily="34" charset="-122"/>
                 <a:cs typeface="Aptos" pitchFamily="34" charset="-120"/>
               </a:rPr>
-              <a:t>Connect the concept to data quality, model performance, validation evidence, monitoring measures, and decisions that remain under human control.</a:t>
-            </a:r>
-            <a:endParaRPr lang="en-US" sz="1550" dirty="0"/>
+              <a:t>Connect the concept to data quality, model performance, validation evidence, monitoring measures, and decisions that.</a:t>
+            </a:r>
+            <a:endParaRPr lang="en-US" sz="1320" dirty="0"/>
           </a:p>
         </p:txBody>
       </p:sp>
@@ -15230,49 +15481,58 @@
           <a:ln/>
         </p:spPr>
         <p:txBody>
-          <a:bodyPr wrap="square" lIns="635" tIns="635" rIns="635" bIns="635" rtlCol="0" anchor="t">
+          <a:bodyPr wrap="square" lIns="1016" tIns="1016" rIns="1016" bIns="1016" rtlCol="0" anchor="t">
             <a:normAutofit/>
           </a:bodyPr>
           <a:lstStyle/>
           <a:p>
+            <a:pPr indent="0" marL="0">
+              <a:buNone/>
+            </a:pPr>
             <a:r>
               <a:rPr lang="en-US" sz="2100" dirty="0">
                 <a:solidFill>
-                  <a:srgbClr val="17364A"/>
-                </a:solidFill>
-                <a:latin typeface="Aptos" pitchFamily="34" charset="0"/>
-                <a:ea typeface="Aptos" pitchFamily="34" charset="-122"/>
-                <a:cs typeface="Aptos" pitchFamily="34" charset="-120"/>
-              </a:rPr>
-              <a:t>Model outputs can influence urgent decisions.</a:t>
+                  <a:srgbClr val="003A63"/>
+                </a:solidFill>
+                <a:latin typeface="Aptos" pitchFamily="34" charset="0"/>
+                <a:ea typeface="Aptos" pitchFamily="34" charset="-122"/>
+                <a:cs typeface="Aptos" pitchFamily="34" charset="-120"/>
+              </a:rPr>
+              <a:t>• Model outputs can influence urgent decisions.</a:t>
             </a:r>
             <a:endParaRPr lang="en-US" sz="2100" dirty="0"/>
           </a:p>
           <a:p>
+            <a:pPr indent="0" marL="0">
+              <a:buNone/>
+            </a:pPr>
             <a:r>
               <a:rPr lang="en-US" sz="2100" dirty="0">
                 <a:solidFill>
-                  <a:srgbClr val="17364A"/>
-                </a:solidFill>
-                <a:latin typeface="Aptos" pitchFamily="34" charset="0"/>
-                <a:ea typeface="Aptos" pitchFamily="34" charset="-122"/>
-                <a:cs typeface="Aptos" pitchFamily="34" charset="-120"/>
-              </a:rPr>
-              <a:t>A forecast may affect staffing, a risk score may affect outreach, and a hotspot map may affect.</a:t>
+                  <a:srgbClr val="003A63"/>
+                </a:solidFill>
+                <a:latin typeface="Aptos" pitchFamily="34" charset="0"/>
+                <a:ea typeface="Aptos" pitchFamily="34" charset="-122"/>
+                <a:cs typeface="Aptos" pitchFamily="34" charset="-120"/>
+              </a:rPr>
+              <a:t>• A forecast may affect staffing, a risk score may affect outreach, and a hotspot map may affect.</a:t>
             </a:r>
             <a:endParaRPr lang="en-US" sz="2100" dirty="0"/>
           </a:p>
           <a:p>
+            <a:pPr indent="0" marL="0">
+              <a:buNone/>
+            </a:pPr>
             <a:r>
               <a:rPr lang="en-US" sz="2100" dirty="0">
                 <a:solidFill>
-                  <a:srgbClr val="17364A"/>
-                </a:solidFill>
-                <a:latin typeface="Aptos" pitchFamily="34" charset="0"/>
-                <a:ea typeface="Aptos" pitchFamily="34" charset="-122"/>
-                <a:cs typeface="Aptos" pitchFamily="34" charset="-120"/>
-              </a:rPr>
-              <a:t>If uncertainty is not explained clearly, decision-makers may treat estimates as facts or ignore.</a:t>
+                  <a:srgbClr val="003A63"/>
+                </a:solidFill>
+                <a:latin typeface="Aptos" pitchFamily="34" charset="0"/>
+                <a:ea typeface="Aptos" pitchFamily="34" charset="-122"/>
+                <a:cs typeface="Aptos" pitchFamily="34" charset="-120"/>
+              </a:rPr>
+              <a:t>• If uncertainty is not explained clearly, decision-makers may treat estimates as facts or ignore.</a:t>
             </a:r>
             <a:endParaRPr lang="en-US" sz="2100" dirty="0"/>
           </a:p>
@@ -15352,17 +15612,17 @@
         </p:nvSpPr>
         <p:spPr>
           <a:xfrm>
-            <a:off x="7799832" y="1828800"/>
-            <a:ext cx="3145536" cy="685800"/>
-          </a:xfrm>
-          <a:prstGeom prst="rect">
-            <a:avLst/>
-          </a:prstGeom>
-          <a:noFill/>
-          <a:ln/>
-        </p:spPr>
-        <p:txBody>
-          <a:bodyPr wrap="square" lIns="0" tIns="0" rIns="0" bIns="0" rtlCol="0" anchor="t">
+            <a:off x="7799832" y="1801368"/>
+            <a:ext cx="3145536" cy="758952"/>
+          </a:xfrm>
+          <a:prstGeom prst="rect">
+            <a:avLst/>
+          </a:prstGeom>
+          <a:noFill/>
+          <a:ln/>
+        </p:spPr>
+        <p:txBody>
+          <a:bodyPr wrap="square" lIns="254" tIns="254" rIns="254" bIns="254" rtlCol="0" anchor="t">
             <a:normAutofit/>
           </a:bodyPr>
           <a:lstStyle/>
@@ -15371,7 +15631,7 @@
               <a:buNone/>
             </a:pPr>
             <a:r>
-              <a:rPr lang="en-US" sz="1550" dirty="0">
+              <a:rPr lang="en-US" sz="1320" dirty="0">
                 <a:solidFill>
                   <a:srgbClr val="17364A"/>
                 </a:solidFill>
@@ -15381,7 +15641,7 @@
               </a:rPr>
               <a:t>Model outputs can influence urgent decisions.</a:t>
             </a:r>
-            <a:endParaRPr lang="en-US" sz="1550" dirty="0"/>
+            <a:endParaRPr lang="en-US" sz="1320" dirty="0"/>
           </a:p>
         </p:txBody>
       </p:sp>
@@ -15469,13 +15729,16 @@
           <a:ln/>
         </p:spPr>
         <p:txBody>
-          <a:bodyPr wrap="square" lIns="254" tIns="254" rIns="254" bIns="254" rtlCol="0" anchor="t">
+          <a:bodyPr wrap="square" lIns="508" tIns="508" rIns="508" bIns="508" rtlCol="0" anchor="t">
             <a:normAutofit/>
           </a:bodyPr>
           <a:lstStyle/>
           <a:p>
-            <a:r>
-              <a:rPr lang="en-US" sz="1380" dirty="0">
+            <a:pPr indent="0" marL="0">
+              <a:buNone/>
+            </a:pPr>
+            <a:r>
+              <a:rPr lang="en-US" sz="1220" dirty="0">
                 <a:solidFill>
                   <a:srgbClr val="17364A"/>
                 </a:solidFill>
@@ -15483,13 +15746,16 @@
                 <a:ea typeface="Aptos" pitchFamily="34" charset="-122"/>
                 <a:cs typeface="Aptos" pitchFamily="34" charset="-120"/>
               </a:rPr>
-              <a:t>A forecast may affect staffing, a risk score may affect outreach, and a hotspot map may.</a:t>
-            </a:r>
-            <a:endParaRPr lang="en-US" sz="1380" dirty="0"/>
-          </a:p>
-          <a:p>
-            <a:r>
-              <a:rPr lang="en-US" sz="1380" dirty="0">
+              <a:t>A forecast may affect staffing, a risk score may affect outreach,.</a:t>
+            </a:r>
+            <a:endParaRPr lang="en-US" sz="1220" dirty="0"/>
+          </a:p>
+          <a:p>
+            <a:pPr indent="0" marL="0">
+              <a:buNone/>
+            </a:pPr>
+            <a:r>
+              <a:rPr lang="en-US" sz="1220" dirty="0">
                 <a:solidFill>
                   <a:srgbClr val="17364A"/>
                 </a:solidFill>
@@ -15497,13 +15763,16 @@
                 <a:ea typeface="Aptos" pitchFamily="34" charset="-122"/>
                 <a:cs typeface="Aptos" pitchFamily="34" charset="-120"/>
               </a:rPr>
-              <a:t>If uncertainty is not explained clearly, decision-makers may treat estimates as facts or.</a:t>
-            </a:r>
-            <a:endParaRPr lang="en-US" sz="1380" dirty="0"/>
-          </a:p>
-          <a:p>
-            <a:r>
-              <a:rPr lang="en-US" sz="1380" dirty="0">
+              <a:t>If uncertainty is not explained clearly, decision-makers may treat.</a:t>
+            </a:r>
+            <a:endParaRPr lang="en-US" sz="1220" dirty="0"/>
+          </a:p>
+          <a:p>
+            <a:pPr indent="0" marL="0">
+              <a:buNone/>
+            </a:pPr>
+            <a:r>
+              <a:rPr lang="en-US" sz="1220" dirty="0">
                 <a:solidFill>
                   <a:srgbClr val="17364A"/>
                 </a:solidFill>
@@ -15513,7 +15782,7 @@
               </a:rPr>
               <a:t>Public health communication must balance clarity and caution.</a:t>
             </a:r>
-            <a:endParaRPr lang="en-US" sz="1380" dirty="0"/>
+            <a:endParaRPr lang="en-US" sz="1220" dirty="0"/>
           </a:p>
         </p:txBody>
       </p:sp>
@@ -15591,17 +15860,17 @@
         </p:nvSpPr>
         <p:spPr>
           <a:xfrm>
-            <a:off x="7799832" y="5001768"/>
-            <a:ext cx="3145536" cy="502920"/>
-          </a:xfrm>
-          <a:prstGeom prst="rect">
-            <a:avLst/>
-          </a:prstGeom>
-          <a:noFill/>
-          <a:ln/>
-        </p:spPr>
-        <p:txBody>
-          <a:bodyPr wrap="square" lIns="0" tIns="0" rIns="0" bIns="0" rtlCol="0" anchor="t">
+            <a:off x="7799832" y="4974336"/>
+            <a:ext cx="3145536" cy="576072"/>
+          </a:xfrm>
+          <a:prstGeom prst="rect">
+            <a:avLst/>
+          </a:prstGeom>
+          <a:noFill/>
+          <a:ln/>
+        </p:spPr>
+        <p:txBody>
+          <a:bodyPr wrap="square" lIns="254" tIns="254" rIns="254" bIns="254" rtlCol="0" anchor="t">
             <a:normAutofit/>
           </a:bodyPr>
           <a:lstStyle/>
@@ -15610,7 +15879,7 @@
               <a:buNone/>
             </a:pPr>
             <a:r>
-              <a:rPr lang="en-US" sz="1550" dirty="0">
+              <a:rPr lang="en-US" sz="1320" dirty="0">
                 <a:solidFill>
                   <a:srgbClr val="17364A"/>
                 </a:solidFill>
@@ -15618,9 +15887,9 @@
                 <a:ea typeface="Aptos" pitchFamily="34" charset="-122"/>
                 <a:cs typeface="Aptos" pitchFamily="34" charset="-120"/>
               </a:rPr>
-              <a:t>Connect the concept to data quality, model performance, validation evidence, monitoring measures, and decisions that remain under human control.</a:t>
-            </a:r>
-            <a:endParaRPr lang="en-US" sz="1550" dirty="0"/>
+              <a:t>Connect the concept to data quality, model performance, validation evidence, monitoring measures, and decisions that.</a:t>
+            </a:r>
+            <a:endParaRPr lang="en-US" sz="1320" dirty="0"/>
           </a:p>
         </p:txBody>
       </p:sp>
@@ -15921,49 +16190,58 @@
           <a:ln/>
         </p:spPr>
         <p:txBody>
-          <a:bodyPr wrap="square" lIns="635" tIns="635" rIns="635" bIns="635" rtlCol="0" anchor="t">
+          <a:bodyPr wrap="square" lIns="1016" tIns="1016" rIns="1016" bIns="1016" rtlCol="0" anchor="t">
             <a:normAutofit/>
           </a:bodyPr>
           <a:lstStyle/>
           <a:p>
+            <a:pPr indent="0" marL="0">
+              <a:buNone/>
+            </a:pPr>
             <a:r>
               <a:rPr lang="en-US" sz="2100" dirty="0">
                 <a:solidFill>
-                  <a:srgbClr val="17364A"/>
-                </a:solidFill>
-                <a:latin typeface="Aptos" pitchFamily="34" charset="0"/>
-                <a:ea typeface="Aptos" pitchFamily="34" charset="-122"/>
-                <a:cs typeface="Aptos" pitchFamily="34" charset="-120"/>
-              </a:rPr>
-              <a:t>An epidemiology team uses a time-series model to forecast emergency department visits for respiratory.</a:t>
+                  <a:srgbClr val="003A63"/>
+                </a:solidFill>
+                <a:latin typeface="Aptos" pitchFamily="34" charset="0"/>
+                <a:ea typeface="Aptos" pitchFamily="34" charset="-122"/>
+                <a:cs typeface="Aptos" pitchFamily="34" charset="-120"/>
+              </a:rPr>
+              <a:t>• An epidemiology team uses a time-series model to forecast emergency department visits for.</a:t>
             </a:r>
             <a:endParaRPr lang="en-US" sz="2100" dirty="0"/>
           </a:p>
           <a:p>
+            <a:pPr indent="0" marL="0">
+              <a:buNone/>
+            </a:pPr>
             <a:r>
               <a:rPr lang="en-US" sz="2100" dirty="0">
                 <a:solidFill>
-                  <a:srgbClr val="17364A"/>
-                </a:solidFill>
-                <a:latin typeface="Aptos" pitchFamily="34" charset="0"/>
-                <a:ea typeface="Aptos" pitchFamily="34" charset="-122"/>
-                <a:cs typeface="Aptos" pitchFamily="34" charset="-120"/>
-              </a:rPr>
-              <a:t>The forecast shows a possible increase over the next two weeks, but the prediction interval is wide.</a:t>
+                  <a:srgbClr val="003A63"/>
+                </a:solidFill>
+                <a:latin typeface="Aptos" pitchFamily="34" charset="0"/>
+                <a:ea typeface="Aptos" pitchFamily="34" charset="-122"/>
+                <a:cs typeface="Aptos" pitchFamily="34" charset="-120"/>
+              </a:rPr>
+              <a:t>• The forecast shows a possible increase over the next two weeks, but the prediction interval is.</a:t>
             </a:r>
             <a:endParaRPr lang="en-US" sz="2100" dirty="0"/>
           </a:p>
           <a:p>
+            <a:pPr indent="0" marL="0">
+              <a:buNone/>
+            </a:pPr>
             <a:r>
               <a:rPr lang="en-US" sz="2100" dirty="0">
                 <a:solidFill>
-                  <a:srgbClr val="17364A"/>
-                </a:solidFill>
-                <a:latin typeface="Aptos" pitchFamily="34" charset="0"/>
-                <a:ea typeface="Aptos" pitchFamily="34" charset="-122"/>
-                <a:cs typeface="Aptos" pitchFamily="34" charset="-120"/>
-              </a:rPr>
-              <a:t>A strong communication brief would state that visits may rise, explain the uncertainty, identify.</a:t>
+                  <a:srgbClr val="003A63"/>
+                </a:solidFill>
+                <a:latin typeface="Aptos" pitchFamily="34" charset="0"/>
+                <a:ea typeface="Aptos" pitchFamily="34" charset="-122"/>
+                <a:cs typeface="Aptos" pitchFamily="34" charset="-120"/>
+              </a:rPr>
+              <a:t>• A strong communication brief would state that visits may rise, explain the uncertainty,.</a:t>
             </a:r>
             <a:endParaRPr lang="en-US" sz="2100" dirty="0"/>
           </a:p>
@@ -16043,17 +16321,17 @@
         </p:nvSpPr>
         <p:spPr>
           <a:xfrm>
-            <a:off x="7799832" y="1828800"/>
-            <a:ext cx="3145536" cy="685800"/>
-          </a:xfrm>
-          <a:prstGeom prst="rect">
-            <a:avLst/>
-          </a:prstGeom>
-          <a:noFill/>
-          <a:ln/>
-        </p:spPr>
-        <p:txBody>
-          <a:bodyPr wrap="square" lIns="0" tIns="0" rIns="0" bIns="0" rtlCol="0" anchor="t">
+            <a:off x="7799832" y="1801368"/>
+            <a:ext cx="3145536" cy="758952"/>
+          </a:xfrm>
+          <a:prstGeom prst="rect">
+            <a:avLst/>
+          </a:prstGeom>
+          <a:noFill/>
+          <a:ln/>
+        </p:spPr>
+        <p:txBody>
+          <a:bodyPr wrap="square" lIns="254" tIns="254" rIns="254" bIns="254" rtlCol="0" anchor="t">
             <a:normAutofit/>
           </a:bodyPr>
           <a:lstStyle/>
@@ -16062,7 +16340,7 @@
               <a:buNone/>
             </a:pPr>
             <a:r>
-              <a:rPr lang="en-US" sz="1550" dirty="0">
+              <a:rPr lang="en-US" sz="1320" dirty="0">
                 <a:solidFill>
                   <a:srgbClr val="17364A"/>
                 </a:solidFill>
@@ -16072,7 +16350,7 @@
               </a:rPr>
               <a:t>An epidemiology team uses a time-series model to forecast emergency department visits for respiratory.</a:t>
             </a:r>
-            <a:endParaRPr lang="en-US" sz="1550" dirty="0"/>
+            <a:endParaRPr lang="en-US" sz="1320" dirty="0"/>
           </a:p>
         </p:txBody>
       </p:sp>
@@ -16160,13 +16438,16 @@
           <a:ln/>
         </p:spPr>
         <p:txBody>
-          <a:bodyPr wrap="square" lIns="254" tIns="254" rIns="254" bIns="254" rtlCol="0" anchor="t">
+          <a:bodyPr wrap="square" lIns="508" tIns="508" rIns="508" bIns="508" rtlCol="0" anchor="t">
             <a:normAutofit/>
           </a:bodyPr>
           <a:lstStyle/>
           <a:p>
-            <a:r>
-              <a:rPr lang="en-US" sz="1380" dirty="0">
+            <a:pPr indent="0" marL="0">
+              <a:buNone/>
+            </a:pPr>
+            <a:r>
+              <a:rPr lang="en-US" sz="1220" dirty="0">
                 <a:solidFill>
                   <a:srgbClr val="17364A"/>
                 </a:solidFill>
@@ -16174,13 +16455,16 @@
                 <a:ea typeface="Aptos" pitchFamily="34" charset="-122"/>
                 <a:cs typeface="Aptos" pitchFamily="34" charset="-120"/>
               </a:rPr>
-              <a:t>An epidemiology team uses a time-series model to forecast emergency department visits for.</a:t>
-            </a:r>
-            <a:endParaRPr lang="en-US" sz="1380" dirty="0"/>
-          </a:p>
-          <a:p>
-            <a:r>
-              <a:rPr lang="en-US" sz="1380" dirty="0">
+              <a:t>An epidemiology team uses a time-series model to forecast.</a:t>
+            </a:r>
+            <a:endParaRPr lang="en-US" sz="1220" dirty="0"/>
+          </a:p>
+          <a:p>
+            <a:pPr indent="0" marL="0">
+              <a:buNone/>
+            </a:pPr>
+            <a:r>
+              <a:rPr lang="en-US" sz="1220" dirty="0">
                 <a:solidFill>
                   <a:srgbClr val="17364A"/>
                 </a:solidFill>
@@ -16188,13 +16472,16 @@
                 <a:ea typeface="Aptos" pitchFamily="34" charset="-122"/>
                 <a:cs typeface="Aptos" pitchFamily="34" charset="-120"/>
               </a:rPr>
-              <a:t>The forecast shows a possible increase over the next two weeks, but the prediction.</a:t>
-            </a:r>
-            <a:endParaRPr lang="en-US" sz="1380" dirty="0"/>
-          </a:p>
-          <a:p>
-            <a:r>
-              <a:rPr lang="en-US" sz="1380" dirty="0">
+              <a:t>The forecast shows a possible increase over the next two weeks,.</a:t>
+            </a:r>
+            <a:endParaRPr lang="en-US" sz="1220" dirty="0"/>
+          </a:p>
+          <a:p>
+            <a:pPr indent="0" marL="0">
+              <a:buNone/>
+            </a:pPr>
+            <a:r>
+              <a:rPr lang="en-US" sz="1220" dirty="0">
                 <a:solidFill>
                   <a:srgbClr val="17364A"/>
                 </a:solidFill>
@@ -16202,9 +16489,9 @@
                 <a:ea typeface="Aptos" pitchFamily="34" charset="-122"/>
                 <a:cs typeface="Aptos" pitchFamily="34" charset="-120"/>
               </a:rPr>
-              <a:t>A strong communication brief would state that visits may rise, explain the uncertainty,.</a:t>
-            </a:r>
-            <a:endParaRPr lang="en-US" sz="1380" dirty="0"/>
+              <a:t>A strong communication brief would state that visits may rise,.</a:t>
+            </a:r>
+            <a:endParaRPr lang="en-US" sz="1220" dirty="0"/>
           </a:p>
         </p:txBody>
       </p:sp>
@@ -16282,17 +16569,17 @@
         </p:nvSpPr>
         <p:spPr>
           <a:xfrm>
-            <a:off x="7799832" y="5001768"/>
-            <a:ext cx="3145536" cy="502920"/>
-          </a:xfrm>
-          <a:prstGeom prst="rect">
-            <a:avLst/>
-          </a:prstGeom>
-          <a:noFill/>
-          <a:ln/>
-        </p:spPr>
-        <p:txBody>
-          <a:bodyPr wrap="square" lIns="0" tIns="0" rIns="0" bIns="0" rtlCol="0" anchor="t">
+            <a:off x="7799832" y="4974336"/>
+            <a:ext cx="3145536" cy="576072"/>
+          </a:xfrm>
+          <a:prstGeom prst="rect">
+            <a:avLst/>
+          </a:prstGeom>
+          <a:noFill/>
+          <a:ln/>
+        </p:spPr>
+        <p:txBody>
+          <a:bodyPr wrap="square" lIns="254" tIns="254" rIns="254" bIns="254" rtlCol="0" anchor="t">
             <a:normAutofit/>
           </a:bodyPr>
           <a:lstStyle/>
@@ -16301,7 +16588,7 @@
               <a:buNone/>
             </a:pPr>
             <a:r>
-              <a:rPr lang="en-US" sz="1550" dirty="0">
+              <a:rPr lang="en-US" sz="1320" dirty="0">
                 <a:solidFill>
                   <a:srgbClr val="17364A"/>
                 </a:solidFill>
@@ -16309,9 +16596,9 @@
                 <a:ea typeface="Aptos" pitchFamily="34" charset="-122"/>
                 <a:cs typeface="Aptos" pitchFamily="34" charset="-120"/>
               </a:rPr>
-              <a:t>Connect the concept to data quality, model performance, validation evidence, monitoring measures, and decisions that remain under human control.</a:t>
-            </a:r>
-            <a:endParaRPr lang="en-US" sz="1550" dirty="0"/>
+              <a:t>Connect the concept to data quality, model performance, validation evidence, monitoring measures, and decisions that.</a:t>
+            </a:r>
+            <a:endParaRPr lang="en-US" sz="1320" dirty="0"/>
           </a:p>
         </p:txBody>
       </p:sp>

--- a/downloads/presentations/modules/anl-350.pptx
+++ b/downloads/presentations/modules/anl-350.pptx
@@ -3327,11 +3327,11 @@
         <p:spPr>
           <a:xfrm>
             <a:off x="7635240" y="1325880"/>
-            <a:ext cx="3474720" cy="1325880"/>
+            <a:ext cx="3474720" cy="1207008"/>
           </a:xfrm>
           <a:prstGeom prst="roundRect">
             <a:avLst>
-              <a:gd name="adj" fmla="val 8276"/>
+              <a:gd name="adj" fmla="val 9091"/>
             </a:avLst>
           </a:prstGeom>
           <a:solidFill>
@@ -3393,7 +3393,7 @@
         <p:spPr>
           <a:xfrm>
             <a:off x="7799832" y="1801368"/>
-            <a:ext cx="3145536" cy="758952"/>
+            <a:ext cx="3145536" cy="640080"/>
           </a:xfrm>
           <a:prstGeom prst="rect">
             <a:avLst/>
@@ -3433,12 +3433,12 @@
         </p:nvSpPr>
         <p:spPr>
           <a:xfrm>
-            <a:off x="7635240" y="2788920"/>
-            <a:ext cx="3474720" cy="1536192"/>
+            <a:off x="7635240" y="2670048"/>
+            <a:ext cx="3474720" cy="1377086"/>
           </a:xfrm>
           <a:prstGeom prst="roundRect">
             <a:avLst>
-              <a:gd name="adj" fmla="val 7143"/>
+              <a:gd name="adj" fmla="val 7968"/>
             </a:avLst>
           </a:prstGeom>
           <a:solidFill>
@@ -3460,8 +3460,8 @@
         </p:nvSpPr>
         <p:spPr>
           <a:xfrm>
-            <a:off x="7799832" y="2935224"/>
-            <a:ext cx="3145536" cy="256032"/>
+            <a:off x="7799832" y="2798064"/>
+            <a:ext cx="3145536" cy="237744"/>
           </a:xfrm>
           <a:prstGeom prst="rect">
             <a:avLst/>
@@ -3477,7 +3477,7 @@
               <a:buNone/>
             </a:pPr>
             <a:r>
-              <a:rPr lang="en-US" sz="1300" b="1" dirty="0">
+              <a:rPr lang="en-US" sz="1250" b="1" dirty="0">
                 <a:solidFill>
                   <a:srgbClr val="0068B7"/>
                 </a:solidFill>
@@ -3485,101 +3485,317 @@
                 <a:ea typeface="Aptos" pitchFamily="34" charset="-122"/>
                 <a:cs typeface="Aptos" pitchFamily="34" charset="-120"/>
               </a:rPr>
-              <a:t>Concept checkpoints</a:t>
-            </a:r>
-            <a:endParaRPr lang="en-US" sz="1300" dirty="0"/>
-          </a:p>
-        </p:txBody>
-      </p:sp>
-      <p:sp>
-        <p:nvSpPr>
-          <p:cNvPr id="15" name="Text 13"/>
-          <p:cNvSpPr/>
-          <p:nvPr/>
-        </p:nvSpPr>
-        <p:spPr>
-          <a:xfrm>
-            <a:off x="7818120" y="3300984"/>
-            <a:ext cx="3090672" cy="877824"/>
-          </a:xfrm>
-          <a:prstGeom prst="rect">
-            <a:avLst/>
-          </a:prstGeom>
-          <a:noFill/>
-          <a:ln/>
-        </p:spPr>
-        <p:txBody>
-          <a:bodyPr wrap="square" lIns="508" tIns="508" rIns="508" bIns="508" rtlCol="0" anchor="t">
+              <a:t>Data-to-decision flow</a:t>
+            </a:r>
+            <a:endParaRPr lang="en-US" sz="1250" dirty="0"/>
+          </a:p>
+        </p:txBody>
+      </p:sp>
+      <p:sp>
+        <p:nvSpPr>
+          <p:cNvPr id="15" name="Shape 13"/>
+          <p:cNvSpPr/>
+          <p:nvPr/>
+        </p:nvSpPr>
+        <p:spPr>
+          <a:xfrm>
+            <a:off x="8763000" y="3351276"/>
+            <a:ext cx="164592" cy="0"/>
+          </a:xfrm>
+          <a:prstGeom prst="line">
+            <a:avLst/>
+          </a:prstGeom>
+          <a:noFill/>
+          <a:ln w="15240">
+            <a:solidFill>
+              <a:srgbClr val="8ABBD8"/>
+            </a:solidFill>
+            <a:prstDash val="solid"/>
+          </a:ln>
+        </p:spPr>
+      </p:sp>
+      <p:sp>
+        <p:nvSpPr>
+          <p:cNvPr id="16" name="Shape 14"/>
+          <p:cNvSpPr/>
+          <p:nvPr/>
+        </p:nvSpPr>
+        <p:spPr>
+          <a:xfrm>
+            <a:off x="7872984" y="3200400"/>
+            <a:ext cx="890016" cy="301752"/>
+          </a:xfrm>
+          <a:prstGeom prst="roundRect">
+            <a:avLst>
+              <a:gd name="adj" fmla="val 24242"/>
+            </a:avLst>
+          </a:prstGeom>
+          <a:solidFill>
+            <a:srgbClr val="0068B7"/>
+          </a:solidFill>
+          <a:ln w="12700">
+            <a:solidFill>
+              <a:srgbClr val="0068B7"/>
+            </a:solidFill>
+            <a:prstDash val="solid"/>
+          </a:ln>
+        </p:spPr>
+      </p:sp>
+      <p:sp>
+        <p:nvSpPr>
+          <p:cNvPr id="17" name="Text 15"/>
+          <p:cNvSpPr/>
+          <p:nvPr/>
+        </p:nvSpPr>
+        <p:spPr>
+          <a:xfrm>
+            <a:off x="7909560" y="3273552"/>
+            <a:ext cx="816864" cy="146304"/>
+          </a:xfrm>
+          <a:prstGeom prst="rect">
+            <a:avLst/>
+          </a:prstGeom>
+          <a:noFill/>
+          <a:ln/>
+        </p:spPr>
+        <p:txBody>
+          <a:bodyPr wrap="square" lIns="0" tIns="0" rIns="0" bIns="0" rtlCol="0" anchor="ctr">
             <a:normAutofit/>
           </a:bodyPr>
           <a:lstStyle/>
           <a:p>
-            <a:pPr indent="0" marL="0">
-              <a:buNone/>
-            </a:pPr>
-            <a:r>
-              <a:rPr lang="en-US" sz="1220" dirty="0">
-                <a:solidFill>
-                  <a:srgbClr val="17364A"/>
-                </a:solidFill>
-                <a:latin typeface="Aptos" pitchFamily="34" charset="0"/>
-                <a:ea typeface="Aptos" pitchFamily="34" charset="-122"/>
-                <a:cs typeface="Aptos" pitchFamily="34" charset="-120"/>
-              </a:rPr>
-              <a:t>The same model output may be communicated differently to a.</a:t>
-            </a:r>
-            <a:endParaRPr lang="en-US" sz="1220" dirty="0"/>
-          </a:p>
-          <a:p>
-            <a:pPr indent="0" marL="0">
-              <a:buNone/>
-            </a:pPr>
-            <a:r>
-              <a:rPr lang="en-US" sz="1220" dirty="0">
-                <a:solidFill>
-                  <a:srgbClr val="17364A"/>
-                </a:solidFill>
-                <a:latin typeface="Aptos" pitchFamily="34" charset="0"/>
-                <a:ea typeface="Aptos" pitchFamily="34" charset="-122"/>
-                <a:cs typeface="Aptos" pitchFamily="34" charset="-120"/>
-              </a:rPr>
-              <a:t>Technical users may need details about metrics and data.</a:t>
-            </a:r>
-            <a:endParaRPr lang="en-US" sz="1220" dirty="0"/>
-          </a:p>
-          <a:p>
-            <a:pPr indent="0" marL="0">
-              <a:buNone/>
-            </a:pPr>
-            <a:r>
-              <a:rPr lang="en-US" sz="1220" dirty="0">
-                <a:solidFill>
-                  <a:srgbClr val="17364A"/>
-                </a:solidFill>
-                <a:latin typeface="Aptos" pitchFamily="34" charset="0"/>
-                <a:ea typeface="Aptos" pitchFamily="34" charset="-122"/>
-                <a:cs typeface="Aptos" pitchFamily="34" charset="-120"/>
-              </a:rPr>
-              <a:t>Uncertainty should be explained visually and verbally.</a:t>
-            </a:r>
-            <a:endParaRPr lang="en-US" sz="1220" dirty="0"/>
-          </a:p>
-        </p:txBody>
-      </p:sp>
-      <p:sp>
-        <p:nvSpPr>
-          <p:cNvPr id="16" name="Shape 14"/>
-          <p:cNvSpPr/>
-          <p:nvPr/>
-        </p:nvSpPr>
-        <p:spPr>
-          <a:xfrm>
-            <a:off x="7635240" y="4498848"/>
-            <a:ext cx="3474720" cy="1143000"/>
+            <a:pPr algn="ctr" indent="0" marL="0">
+              <a:buNone/>
+            </a:pPr>
+            <a:r>
+              <a:rPr lang="en-US" sz="880" b="1" dirty="0">
+                <a:solidFill>
+                  <a:srgbClr val="FFFFFF"/>
+                </a:solidFill>
+                <a:latin typeface="Aptos" pitchFamily="34" charset="0"/>
+                <a:ea typeface="Aptos" pitchFamily="34" charset="-122"/>
+                <a:cs typeface="Aptos" pitchFamily="34" charset="-120"/>
+              </a:rPr>
+              <a:t>Data</a:t>
+            </a:r>
+            <a:endParaRPr lang="en-US" sz="880" dirty="0"/>
+          </a:p>
+        </p:txBody>
+      </p:sp>
+      <p:sp>
+        <p:nvSpPr>
+          <p:cNvPr id="18" name="Shape 16"/>
+          <p:cNvSpPr/>
+          <p:nvPr/>
+        </p:nvSpPr>
+        <p:spPr>
+          <a:xfrm>
+            <a:off x="9817608" y="3351276"/>
+            <a:ext cx="164592" cy="0"/>
+          </a:xfrm>
+          <a:prstGeom prst="line">
+            <a:avLst/>
+          </a:prstGeom>
+          <a:noFill/>
+          <a:ln w="15240">
+            <a:solidFill>
+              <a:srgbClr val="8ABBD8"/>
+            </a:solidFill>
+            <a:prstDash val="solid"/>
+          </a:ln>
+        </p:spPr>
+      </p:sp>
+      <p:sp>
+        <p:nvSpPr>
+          <p:cNvPr id="19" name="Shape 17"/>
+          <p:cNvSpPr/>
+          <p:nvPr/>
+        </p:nvSpPr>
+        <p:spPr>
+          <a:xfrm>
+            <a:off x="8927592" y="3200400"/>
+            <a:ext cx="890016" cy="301752"/>
           </a:xfrm>
           <a:prstGeom prst="roundRect">
             <a:avLst>
-              <a:gd name="adj" fmla="val 9600"/>
+              <a:gd name="adj" fmla="val 24242"/>
+            </a:avLst>
+          </a:prstGeom>
+          <a:solidFill>
+            <a:srgbClr val="2F8A28"/>
+          </a:solidFill>
+          <a:ln w="12700">
+            <a:solidFill>
+              <a:srgbClr val="2F8A28"/>
+            </a:solidFill>
+            <a:prstDash val="solid"/>
+          </a:ln>
+        </p:spPr>
+      </p:sp>
+      <p:sp>
+        <p:nvSpPr>
+          <p:cNvPr id="20" name="Text 18"/>
+          <p:cNvSpPr/>
+          <p:nvPr/>
+        </p:nvSpPr>
+        <p:spPr>
+          <a:xfrm>
+            <a:off x="8964168" y="3273552"/>
+            <a:ext cx="816864" cy="146304"/>
+          </a:xfrm>
+          <a:prstGeom prst="rect">
+            <a:avLst/>
+          </a:prstGeom>
+          <a:noFill/>
+          <a:ln/>
+        </p:spPr>
+        <p:txBody>
+          <a:bodyPr wrap="square" lIns="0" tIns="0" rIns="0" bIns="0" rtlCol="0" anchor="ctr">
+            <a:normAutofit/>
+          </a:bodyPr>
+          <a:lstStyle/>
+          <a:p>
+            <a:pPr algn="ctr" indent="0" marL="0">
+              <a:buNone/>
+            </a:pPr>
+            <a:r>
+              <a:rPr lang="en-US" sz="880" b="1" dirty="0">
+                <a:solidFill>
+                  <a:srgbClr val="FFFFFF"/>
+                </a:solidFill>
+                <a:latin typeface="Aptos" pitchFamily="34" charset="0"/>
+                <a:ea typeface="Aptos" pitchFamily="34" charset="-122"/>
+                <a:cs typeface="Aptos" pitchFamily="34" charset="-120"/>
+              </a:rPr>
+              <a:t>Analysis</a:t>
+            </a:r>
+            <a:endParaRPr lang="en-US" sz="880" dirty="0"/>
+          </a:p>
+        </p:txBody>
+      </p:sp>
+      <p:sp>
+        <p:nvSpPr>
+          <p:cNvPr id="21" name="Shape 19"/>
+          <p:cNvSpPr/>
+          <p:nvPr/>
+        </p:nvSpPr>
+        <p:spPr>
+          <a:xfrm>
+            <a:off x="9982200" y="3200400"/>
+            <a:ext cx="890016" cy="301752"/>
+          </a:xfrm>
+          <a:prstGeom prst="roundRect">
+            <a:avLst>
+              <a:gd name="adj" fmla="val 24242"/>
+            </a:avLst>
+          </a:prstGeom>
+          <a:solidFill>
+            <a:srgbClr val="6A4CA3"/>
+          </a:solidFill>
+          <a:ln w="12700">
+            <a:solidFill>
+              <a:srgbClr val="6A4CA3"/>
+            </a:solidFill>
+            <a:prstDash val="solid"/>
+          </a:ln>
+        </p:spPr>
+      </p:sp>
+      <p:sp>
+        <p:nvSpPr>
+          <p:cNvPr id="22" name="Text 20"/>
+          <p:cNvSpPr/>
+          <p:nvPr/>
+        </p:nvSpPr>
+        <p:spPr>
+          <a:xfrm>
+            <a:off x="10018776" y="3273552"/>
+            <a:ext cx="816864" cy="146304"/>
+          </a:xfrm>
+          <a:prstGeom prst="rect">
+            <a:avLst/>
+          </a:prstGeom>
+          <a:noFill/>
+          <a:ln/>
+        </p:spPr>
+        <p:txBody>
+          <a:bodyPr wrap="square" lIns="0" tIns="0" rIns="0" bIns="0" rtlCol="0" anchor="ctr">
+            <a:normAutofit/>
+          </a:bodyPr>
+          <a:lstStyle/>
+          <a:p>
+            <a:pPr algn="ctr" indent="0" marL="0">
+              <a:buNone/>
+            </a:pPr>
+            <a:r>
+              <a:rPr lang="en-US" sz="880" b="1" dirty="0">
+                <a:solidFill>
+                  <a:srgbClr val="FFFFFF"/>
+                </a:solidFill>
+                <a:latin typeface="Aptos" pitchFamily="34" charset="0"/>
+                <a:ea typeface="Aptos" pitchFamily="34" charset="-122"/>
+                <a:cs typeface="Aptos" pitchFamily="34" charset="-120"/>
+              </a:rPr>
+              <a:t>Review</a:t>
+            </a:r>
+            <a:endParaRPr lang="en-US" sz="880" dirty="0"/>
+          </a:p>
+        </p:txBody>
+      </p:sp>
+      <p:sp>
+        <p:nvSpPr>
+          <p:cNvPr id="23" name="Text 21"/>
+          <p:cNvSpPr/>
+          <p:nvPr/>
+        </p:nvSpPr>
+        <p:spPr>
+          <a:xfrm>
+            <a:off x="7854696" y="3694176"/>
+            <a:ext cx="3035808" cy="206654"/>
+          </a:xfrm>
+          <a:prstGeom prst="rect">
+            <a:avLst/>
+          </a:prstGeom>
+          <a:noFill/>
+          <a:ln/>
+        </p:spPr>
+        <p:txBody>
+          <a:bodyPr wrap="square" lIns="254" tIns="254" rIns="254" bIns="254" rtlCol="0" anchor="t">
+            <a:normAutofit/>
+          </a:bodyPr>
+          <a:lstStyle/>
+          <a:p>
+            <a:pPr indent="0" marL="0">
+              <a:buNone/>
+            </a:pPr>
+            <a:r>
+              <a:rPr lang="en-US" sz="1120" dirty="0">
+                <a:solidFill>
+                  <a:srgbClr val="17364A"/>
+                </a:solidFill>
+                <a:latin typeface="Aptos" pitchFamily="34" charset="0"/>
+                <a:ea typeface="Aptos" pitchFamily="34" charset="-122"/>
+                <a:cs typeface="Aptos" pitchFamily="34" charset="-120"/>
+              </a:rPr>
+              <a:t>The important handoff is not from data to AI; it is from analysis to accountable human review.</a:t>
+            </a:r>
+            <a:endParaRPr lang="en-US" sz="1120" dirty="0"/>
+          </a:p>
+        </p:txBody>
+      </p:sp>
+      <p:sp>
+        <p:nvSpPr>
+          <p:cNvPr id="24" name="Shape 22"/>
+          <p:cNvSpPr/>
+          <p:nvPr/>
+        </p:nvSpPr>
+        <p:spPr>
+          <a:xfrm>
+            <a:off x="7635240" y="4184294"/>
+            <a:ext cx="3474720" cy="1466698"/>
+          </a:xfrm>
+          <a:prstGeom prst="roundRect">
+            <a:avLst>
+              <a:gd name="adj" fmla="val 7481"/>
             </a:avLst>
           </a:prstGeom>
           <a:solidFill>
@@ -3595,13 +3811,13 @@
       </p:sp>
       <p:sp>
         <p:nvSpPr>
-          <p:cNvPr id="17" name="Text 15"/>
-          <p:cNvSpPr/>
-          <p:nvPr/>
-        </p:nvSpPr>
-        <p:spPr>
-          <a:xfrm>
-            <a:off x="7799832" y="4645152"/>
+          <p:cNvPr id="25" name="Text 23"/>
+          <p:cNvSpPr/>
+          <p:nvPr/>
+        </p:nvSpPr>
+        <p:spPr>
+          <a:xfrm>
+            <a:off x="7799832" y="4330598"/>
             <a:ext cx="3145536" cy="256032"/>
           </a:xfrm>
           <a:prstGeom prst="rect">
@@ -3634,14 +3850,14 @@
       </p:sp>
       <p:sp>
         <p:nvSpPr>
-          <p:cNvPr id="18" name="Text 16"/>
-          <p:cNvSpPr/>
-          <p:nvPr/>
-        </p:nvSpPr>
-        <p:spPr>
-          <a:xfrm>
-            <a:off x="7799832" y="4974336"/>
-            <a:ext cx="3145536" cy="576072"/>
+          <p:cNvPr id="26" name="Text 24"/>
+          <p:cNvSpPr/>
+          <p:nvPr/>
+        </p:nvSpPr>
+        <p:spPr>
+          <a:xfrm>
+            <a:off x="7799832" y="4659782"/>
+            <a:ext cx="3145536" cy="899770"/>
           </a:xfrm>
           <a:prstGeom prst="rect">
             <a:avLst/>
@@ -3667,7 +3883,7 @@
                 <a:ea typeface="Aptos" pitchFamily="34" charset="-122"/>
                 <a:cs typeface="Aptos" pitchFamily="34" charset="-120"/>
               </a:rPr>
-              <a:t>Connect the concept to data quality, model performance, validation evidence, monitoring measures, and decisions that.</a:t>
+              <a:t>Connect the concept to data quality, model performance, validation evidence, monitoring measures, and decisions that remain under human control.</a:t>
             </a:r>
             <a:endParaRPr lang="en-US" sz="1320" dirty="0"/>
           </a:p>
@@ -4036,11 +4252,11 @@
         <p:spPr>
           <a:xfrm>
             <a:off x="7635240" y="1325880"/>
-            <a:ext cx="3474720" cy="1325880"/>
+            <a:ext cx="3474720" cy="1207008"/>
           </a:xfrm>
           <a:prstGeom prst="roundRect">
             <a:avLst>
-              <a:gd name="adj" fmla="val 8276"/>
+              <a:gd name="adj" fmla="val 9091"/>
             </a:avLst>
           </a:prstGeom>
           <a:solidFill>
@@ -4102,7 +4318,7 @@
         <p:spPr>
           <a:xfrm>
             <a:off x="7799832" y="1801368"/>
-            <a:ext cx="3145536" cy="758952"/>
+            <a:ext cx="3145536" cy="640080"/>
           </a:xfrm>
           <a:prstGeom prst="rect">
             <a:avLst/>
@@ -4142,7 +4358,7 @@
         </p:nvSpPr>
         <p:spPr>
           <a:xfrm>
-            <a:off x="7635240" y="2788920"/>
+            <a:off x="7635240" y="2670048"/>
             <a:ext cx="3474720" cy="1536192"/>
           </a:xfrm>
           <a:prstGeom prst="roundRect">
@@ -4169,7 +4385,7 @@
         </p:nvSpPr>
         <p:spPr>
           <a:xfrm>
-            <a:off x="7799832" y="2935224"/>
+            <a:off x="7799832" y="2816352"/>
             <a:ext cx="3145536" cy="256032"/>
           </a:xfrm>
           <a:prstGeom prst="rect">
@@ -4208,7 +4424,7 @@
         </p:nvSpPr>
         <p:spPr>
           <a:xfrm>
-            <a:off x="7818120" y="3300984"/>
+            <a:off x="7818120" y="3182112"/>
             <a:ext cx="3090672" cy="877824"/>
           </a:xfrm>
           <a:prstGeom prst="rect">
@@ -4283,12 +4499,12 @@
         </p:nvSpPr>
         <p:spPr>
           <a:xfrm>
-            <a:off x="7635240" y="4498848"/>
-            <a:ext cx="3474720" cy="1143000"/>
+            <a:off x="7635240" y="4343400"/>
+            <a:ext cx="3474720" cy="1255471"/>
           </a:xfrm>
           <a:prstGeom prst="roundRect">
             <a:avLst>
-              <a:gd name="adj" fmla="val 9600"/>
+              <a:gd name="adj" fmla="val 8740"/>
             </a:avLst>
           </a:prstGeom>
           <a:solidFill>
@@ -4310,7 +4526,7 @@
         </p:nvSpPr>
         <p:spPr>
           <a:xfrm>
-            <a:off x="7799832" y="4645152"/>
+            <a:off x="7799832" y="4489704"/>
             <a:ext cx="3145536" cy="256032"/>
           </a:xfrm>
           <a:prstGeom prst="rect">
@@ -4349,8 +4565,8 @@
         </p:nvSpPr>
         <p:spPr>
           <a:xfrm>
-            <a:off x="7799832" y="4974336"/>
-            <a:ext cx="3145536" cy="576072"/>
+            <a:off x="7799832" y="4818888"/>
+            <a:ext cx="3145536" cy="688543"/>
           </a:xfrm>
           <a:prstGeom prst="rect">
             <a:avLst/>
@@ -4376,7 +4592,7 @@
                 <a:ea typeface="Aptos" pitchFamily="34" charset="-122"/>
                 <a:cs typeface="Aptos" pitchFamily="34" charset="-120"/>
               </a:rPr>
-              <a:t>Identify what could go wrong, who could be affected, what safeguards are needed, and what evidence should be reviewed.</a:t>
+              <a:t>Identify what could go wrong, who could be affected, what safeguards are needed, and what evidence should be reviewed before use.</a:t>
             </a:r>
             <a:endParaRPr lang="en-US" sz="1320" dirty="0"/>
           </a:p>
@@ -4745,11 +4961,11 @@
         <p:spPr>
           <a:xfrm>
             <a:off x="7635240" y="1325880"/>
-            <a:ext cx="3474720" cy="1325880"/>
+            <a:ext cx="3474720" cy="1255471"/>
           </a:xfrm>
           <a:prstGeom prst="roundRect">
             <a:avLst>
-              <a:gd name="adj" fmla="val 8276"/>
+              <a:gd name="adj" fmla="val 8740"/>
             </a:avLst>
           </a:prstGeom>
           <a:solidFill>
@@ -4811,7 +5027,7 @@
         <p:spPr>
           <a:xfrm>
             <a:off x="7799832" y="1801368"/>
-            <a:ext cx="3145536" cy="758952"/>
+            <a:ext cx="3145536" cy="688543"/>
           </a:xfrm>
           <a:prstGeom prst="rect">
             <a:avLst/>
@@ -4851,12 +5067,12 @@
         </p:nvSpPr>
         <p:spPr>
           <a:xfrm>
-            <a:off x="7635240" y="2788920"/>
-            <a:ext cx="3474720" cy="1536192"/>
+            <a:off x="7635240" y="2718511"/>
+            <a:ext cx="3474720" cy="1328623"/>
           </a:xfrm>
           <a:prstGeom prst="roundRect">
             <a:avLst>
-              <a:gd name="adj" fmla="val 7143"/>
+              <a:gd name="adj" fmla="val 8259"/>
             </a:avLst>
           </a:prstGeom>
           <a:solidFill>
@@ -4878,7 +5094,7 @@
         </p:nvSpPr>
         <p:spPr>
           <a:xfrm>
-            <a:off x="7799832" y="2935224"/>
+            <a:off x="7799832" y="2864815"/>
             <a:ext cx="3145536" cy="256032"/>
           </a:xfrm>
           <a:prstGeom prst="rect">
@@ -4917,8 +5133,8 @@
         </p:nvSpPr>
         <p:spPr>
           <a:xfrm>
-            <a:off x="7818120" y="3300984"/>
-            <a:ext cx="3090672" cy="877824"/>
+            <a:off x="7818120" y="3230575"/>
+            <a:ext cx="3090672" cy="670255"/>
           </a:xfrm>
           <a:prstGeom prst="rect">
             <a:avLst/>
@@ -4975,12 +5191,12 @@
         </p:nvSpPr>
         <p:spPr>
           <a:xfrm>
-            <a:off x="7635240" y="4498848"/>
-            <a:ext cx="3474720" cy="1143000"/>
+            <a:off x="7635240" y="4184294"/>
+            <a:ext cx="3474720" cy="1466698"/>
           </a:xfrm>
           <a:prstGeom prst="roundRect">
             <a:avLst>
-              <a:gd name="adj" fmla="val 9600"/>
+              <a:gd name="adj" fmla="val 7481"/>
             </a:avLst>
           </a:prstGeom>
           <a:solidFill>
@@ -5002,7 +5218,7 @@
         </p:nvSpPr>
         <p:spPr>
           <a:xfrm>
-            <a:off x="7799832" y="4645152"/>
+            <a:off x="7799832" y="4330598"/>
             <a:ext cx="3145536" cy="256032"/>
           </a:xfrm>
           <a:prstGeom prst="rect">
@@ -5041,8 +5257,8 @@
         </p:nvSpPr>
         <p:spPr>
           <a:xfrm>
-            <a:off x="7799832" y="4974336"/>
-            <a:ext cx="3145536" cy="576072"/>
+            <a:off x="7799832" y="4659782"/>
+            <a:ext cx="3145536" cy="899770"/>
           </a:xfrm>
           <a:prstGeom prst="rect">
             <a:avLst/>
@@ -5068,7 +5284,7 @@
                 <a:ea typeface="Aptos" pitchFamily="34" charset="-122"/>
                 <a:cs typeface="Aptos" pitchFamily="34" charset="-120"/>
               </a:rPr>
-              <a:t>Connect the concept to data quality, model performance, validation evidence, monitoring measures, and decisions that.</a:t>
+              <a:t>Connect the concept to data quality, model performance, validation evidence, monitoring measures, and decisions that remain under human control.</a:t>
             </a:r>
             <a:endParaRPr lang="en-US" sz="1320" dirty="0"/>
           </a:p>
@@ -5437,11 +5653,11 @@
         <p:spPr>
           <a:xfrm>
             <a:off x="7635240" y="1325880"/>
-            <a:ext cx="3474720" cy="1325880"/>
+            <a:ext cx="3474720" cy="1207008"/>
           </a:xfrm>
           <a:prstGeom prst="roundRect">
             <a:avLst>
-              <a:gd name="adj" fmla="val 8276"/>
+              <a:gd name="adj" fmla="val 9091"/>
             </a:avLst>
           </a:prstGeom>
           <a:solidFill>
@@ -5503,7 +5719,7 @@
         <p:spPr>
           <a:xfrm>
             <a:off x="7799832" y="1801368"/>
-            <a:ext cx="3145536" cy="758952"/>
+            <a:ext cx="3145536" cy="640080"/>
           </a:xfrm>
           <a:prstGeom prst="rect">
             <a:avLst/>
@@ -5543,12 +5759,12 @@
         </p:nvSpPr>
         <p:spPr>
           <a:xfrm>
-            <a:off x="7635240" y="2788920"/>
-            <a:ext cx="3474720" cy="1536192"/>
+            <a:off x="7635240" y="2670048"/>
+            <a:ext cx="3474720" cy="1377086"/>
           </a:xfrm>
           <a:prstGeom prst="roundRect">
             <a:avLst>
-              <a:gd name="adj" fmla="val 7143"/>
+              <a:gd name="adj" fmla="val 7968"/>
             </a:avLst>
           </a:prstGeom>
           <a:solidFill>
@@ -5570,7 +5786,7 @@
         </p:nvSpPr>
         <p:spPr>
           <a:xfrm>
-            <a:off x="7799832" y="2935224"/>
+            <a:off x="7799832" y="2816352"/>
             <a:ext cx="3145536" cy="256032"/>
           </a:xfrm>
           <a:prstGeom prst="rect">
@@ -5609,8 +5825,8 @@
         </p:nvSpPr>
         <p:spPr>
           <a:xfrm>
-            <a:off x="7818120" y="3300984"/>
-            <a:ext cx="3090672" cy="877824"/>
+            <a:off x="7818120" y="3182112"/>
+            <a:ext cx="3090672" cy="718718"/>
           </a:xfrm>
           <a:prstGeom prst="rect">
             <a:avLst/>
@@ -5684,12 +5900,12 @@
         </p:nvSpPr>
         <p:spPr>
           <a:xfrm>
-            <a:off x="7635240" y="4498848"/>
-            <a:ext cx="3474720" cy="1143000"/>
+            <a:off x="7635240" y="4184294"/>
+            <a:ext cx="3474720" cy="1466698"/>
           </a:xfrm>
           <a:prstGeom prst="roundRect">
             <a:avLst>
-              <a:gd name="adj" fmla="val 9600"/>
+              <a:gd name="adj" fmla="val 7481"/>
             </a:avLst>
           </a:prstGeom>
           <a:solidFill>
@@ -5711,7 +5927,7 @@
         </p:nvSpPr>
         <p:spPr>
           <a:xfrm>
-            <a:off x="7799832" y="4645152"/>
+            <a:off x="7799832" y="4330598"/>
             <a:ext cx="3145536" cy="256032"/>
           </a:xfrm>
           <a:prstGeom prst="rect">
@@ -5750,8 +5966,8 @@
         </p:nvSpPr>
         <p:spPr>
           <a:xfrm>
-            <a:off x="7799832" y="4974336"/>
-            <a:ext cx="3145536" cy="576072"/>
+            <a:off x="7799832" y="4659782"/>
+            <a:ext cx="3145536" cy="899770"/>
           </a:xfrm>
           <a:prstGeom prst="rect">
             <a:avLst/>
@@ -5777,7 +5993,7 @@
                 <a:ea typeface="Aptos" pitchFamily="34" charset="-122"/>
                 <a:cs typeface="Aptos" pitchFamily="34" charset="-120"/>
               </a:rPr>
-              <a:t>Connect the concept to data quality, model performance, validation evidence, monitoring measures, and decisions that.</a:t>
+              <a:t>Connect the concept to data quality, model performance, validation evidence, monitoring measures, and decisions that remain under human control.</a:t>
             </a:r>
             <a:endParaRPr lang="en-US" sz="1320" dirty="0"/>
           </a:p>
@@ -6129,11 +6345,11 @@
         <p:spPr>
           <a:xfrm>
             <a:off x="7635240" y="1325880"/>
-            <a:ext cx="3474720" cy="1325880"/>
+            <a:ext cx="3474720" cy="1207008"/>
           </a:xfrm>
           <a:prstGeom prst="roundRect">
             <a:avLst>
-              <a:gd name="adj" fmla="val 8276"/>
+              <a:gd name="adj" fmla="val 9091"/>
             </a:avLst>
           </a:prstGeom>
           <a:solidFill>
@@ -6195,7 +6411,7 @@
         <p:spPr>
           <a:xfrm>
             <a:off x="7799832" y="1801368"/>
-            <a:ext cx="3145536" cy="758952"/>
+            <a:ext cx="3145536" cy="640080"/>
           </a:xfrm>
           <a:prstGeom prst="rect">
             <a:avLst/>
@@ -6235,12 +6451,12 @@
         </p:nvSpPr>
         <p:spPr>
           <a:xfrm>
-            <a:off x="7635240" y="2788920"/>
-            <a:ext cx="3474720" cy="1536192"/>
+            <a:off x="7635240" y="2670048"/>
+            <a:ext cx="3474720" cy="1377086"/>
           </a:xfrm>
           <a:prstGeom prst="roundRect">
             <a:avLst>
-              <a:gd name="adj" fmla="val 7143"/>
+              <a:gd name="adj" fmla="val 7968"/>
             </a:avLst>
           </a:prstGeom>
           <a:solidFill>
@@ -6262,7 +6478,7 @@
         </p:nvSpPr>
         <p:spPr>
           <a:xfrm>
-            <a:off x="7799832" y="2935224"/>
+            <a:off x="7799832" y="2816352"/>
             <a:ext cx="3145536" cy="256032"/>
           </a:xfrm>
           <a:prstGeom prst="rect">
@@ -6301,8 +6517,8 @@
         </p:nvSpPr>
         <p:spPr>
           <a:xfrm>
-            <a:off x="7818120" y="3300984"/>
-            <a:ext cx="3090672" cy="877824"/>
+            <a:off x="7818120" y="3182112"/>
+            <a:ext cx="3090672" cy="718718"/>
           </a:xfrm>
           <a:prstGeom prst="rect">
             <a:avLst/>
@@ -6359,12 +6575,12 @@
         </p:nvSpPr>
         <p:spPr>
           <a:xfrm>
-            <a:off x="7635240" y="4498848"/>
-            <a:ext cx="3474720" cy="1143000"/>
+            <a:off x="7635240" y="4184294"/>
+            <a:ext cx="3474720" cy="1466698"/>
           </a:xfrm>
           <a:prstGeom prst="roundRect">
             <a:avLst>
-              <a:gd name="adj" fmla="val 9600"/>
+              <a:gd name="adj" fmla="val 7481"/>
             </a:avLst>
           </a:prstGeom>
           <a:solidFill>
@@ -6386,7 +6602,7 @@
         </p:nvSpPr>
         <p:spPr>
           <a:xfrm>
-            <a:off x="7799832" y="4645152"/>
+            <a:off x="7799832" y="4330598"/>
             <a:ext cx="3145536" cy="256032"/>
           </a:xfrm>
           <a:prstGeom prst="rect">
@@ -6425,8 +6641,8 @@
         </p:nvSpPr>
         <p:spPr>
           <a:xfrm>
-            <a:off x="7799832" y="4974336"/>
-            <a:ext cx="3145536" cy="576072"/>
+            <a:off x="7799832" y="4659782"/>
+            <a:ext cx="3145536" cy="899770"/>
           </a:xfrm>
           <a:prstGeom prst="rect">
             <a:avLst/>
@@ -6452,7 +6668,7 @@
                 <a:ea typeface="Aptos" pitchFamily="34" charset="-122"/>
                 <a:cs typeface="Aptos" pitchFamily="34" charset="-120"/>
               </a:rPr>
-              <a:t>Connect the concept to data quality, model performance, validation evidence, monitoring measures, and decisions that.</a:t>
+              <a:t>Connect the concept to data quality, model performance, validation evidence, monitoring measures, and decisions that remain under human control.</a:t>
             </a:r>
             <a:endParaRPr lang="en-US" sz="1320" dirty="0"/>
           </a:p>
@@ -6804,11 +7020,11 @@
         <p:spPr>
           <a:xfrm>
             <a:off x="7635240" y="1325880"/>
-            <a:ext cx="3474720" cy="1325880"/>
+            <a:ext cx="3474720" cy="1207008"/>
           </a:xfrm>
           <a:prstGeom prst="roundRect">
             <a:avLst>
-              <a:gd name="adj" fmla="val 8276"/>
+              <a:gd name="adj" fmla="val 9091"/>
             </a:avLst>
           </a:prstGeom>
           <a:solidFill>
@@ -6870,7 +7086,7 @@
         <p:spPr>
           <a:xfrm>
             <a:off x="7799832" y="1801368"/>
-            <a:ext cx="3145536" cy="758952"/>
+            <a:ext cx="3145536" cy="640080"/>
           </a:xfrm>
           <a:prstGeom prst="rect">
             <a:avLst/>
@@ -6910,12 +7126,12 @@
         </p:nvSpPr>
         <p:spPr>
           <a:xfrm>
-            <a:off x="7635240" y="2788920"/>
-            <a:ext cx="3474720" cy="1536192"/>
+            <a:off x="7635240" y="2670048"/>
+            <a:ext cx="3474720" cy="1377086"/>
           </a:xfrm>
           <a:prstGeom prst="roundRect">
             <a:avLst>
-              <a:gd name="adj" fmla="val 7143"/>
+              <a:gd name="adj" fmla="val 7968"/>
             </a:avLst>
           </a:prstGeom>
           <a:solidFill>
@@ -6937,7 +7153,7 @@
         </p:nvSpPr>
         <p:spPr>
           <a:xfrm>
-            <a:off x="7799832" y="2935224"/>
+            <a:off x="7799832" y="2816352"/>
             <a:ext cx="3145536" cy="256032"/>
           </a:xfrm>
           <a:prstGeom prst="rect">
@@ -6976,8 +7192,8 @@
         </p:nvSpPr>
         <p:spPr>
           <a:xfrm>
-            <a:off x="7818120" y="3300984"/>
-            <a:ext cx="3090672" cy="877824"/>
+            <a:off x="7818120" y="3182112"/>
+            <a:ext cx="3090672" cy="718718"/>
           </a:xfrm>
           <a:prstGeom prst="rect">
             <a:avLst/>
@@ -7034,12 +7250,12 @@
         </p:nvSpPr>
         <p:spPr>
           <a:xfrm>
-            <a:off x="7635240" y="4498848"/>
-            <a:ext cx="3474720" cy="1143000"/>
+            <a:off x="7635240" y="4184294"/>
+            <a:ext cx="3474720" cy="1466698"/>
           </a:xfrm>
           <a:prstGeom prst="roundRect">
             <a:avLst>
-              <a:gd name="adj" fmla="val 9600"/>
+              <a:gd name="adj" fmla="val 7481"/>
             </a:avLst>
           </a:prstGeom>
           <a:solidFill>
@@ -7061,7 +7277,7 @@
         </p:nvSpPr>
         <p:spPr>
           <a:xfrm>
-            <a:off x="7799832" y="4645152"/>
+            <a:off x="7799832" y="4330598"/>
             <a:ext cx="3145536" cy="256032"/>
           </a:xfrm>
           <a:prstGeom prst="rect">
@@ -7100,8 +7316,8 @@
         </p:nvSpPr>
         <p:spPr>
           <a:xfrm>
-            <a:off x="7799832" y="4974336"/>
-            <a:ext cx="3145536" cy="576072"/>
+            <a:off x="7799832" y="4659782"/>
+            <a:ext cx="3145536" cy="899770"/>
           </a:xfrm>
           <a:prstGeom prst="rect">
             <a:avLst/>
@@ -7127,7 +7343,7 @@
                 <a:ea typeface="Aptos" pitchFamily="34" charset="-122"/>
                 <a:cs typeface="Aptos" pitchFamily="34" charset="-120"/>
               </a:rPr>
-              <a:t>Use the assignment to test whether you can explain the concept, apply it to a realistic public health situation, and.</a:t>
+              <a:t>Use the assignment to test whether you can explain the concept, apply it to a realistic public health situation, and identify what would need review before the work moves forward.</a:t>
             </a:r>
             <a:endParaRPr lang="en-US" sz="1320" dirty="0"/>
           </a:p>
@@ -7496,11 +7712,11 @@
         <p:spPr>
           <a:xfrm>
             <a:off x="7635240" y="1325880"/>
-            <a:ext cx="3474720" cy="1325880"/>
+            <a:ext cx="3474720" cy="1207008"/>
           </a:xfrm>
           <a:prstGeom prst="roundRect">
             <a:avLst>
-              <a:gd name="adj" fmla="val 8276"/>
+              <a:gd name="adj" fmla="val 9091"/>
             </a:avLst>
           </a:prstGeom>
           <a:solidFill>
@@ -7562,7 +7778,7 @@
         <p:spPr>
           <a:xfrm>
             <a:off x="7799832" y="1801368"/>
-            <a:ext cx="3145536" cy="758952"/>
+            <a:ext cx="3145536" cy="640080"/>
           </a:xfrm>
           <a:prstGeom prst="rect">
             <a:avLst/>
@@ -7602,12 +7818,12 @@
         </p:nvSpPr>
         <p:spPr>
           <a:xfrm>
-            <a:off x="7635240" y="2788920"/>
-            <a:ext cx="3474720" cy="1536192"/>
+            <a:off x="7635240" y="2670048"/>
+            <a:ext cx="3474720" cy="1377086"/>
           </a:xfrm>
           <a:prstGeom prst="roundRect">
             <a:avLst>
-              <a:gd name="adj" fmla="val 7143"/>
+              <a:gd name="adj" fmla="val 7968"/>
             </a:avLst>
           </a:prstGeom>
           <a:solidFill>
@@ -7629,7 +7845,7 @@
         </p:nvSpPr>
         <p:spPr>
           <a:xfrm>
-            <a:off x="7799832" y="2935224"/>
+            <a:off x="7799832" y="2816352"/>
             <a:ext cx="3145536" cy="256032"/>
           </a:xfrm>
           <a:prstGeom prst="rect">
@@ -7668,8 +7884,8 @@
         </p:nvSpPr>
         <p:spPr>
           <a:xfrm>
-            <a:off x="7818120" y="3300984"/>
-            <a:ext cx="3090672" cy="877824"/>
+            <a:off x="7818120" y="3182112"/>
+            <a:ext cx="3090672" cy="718718"/>
           </a:xfrm>
           <a:prstGeom prst="rect">
             <a:avLst/>
@@ -7743,12 +7959,12 @@
         </p:nvSpPr>
         <p:spPr>
           <a:xfrm>
-            <a:off x="7635240" y="4498848"/>
-            <a:ext cx="3474720" cy="1143000"/>
+            <a:off x="7635240" y="4184294"/>
+            <a:ext cx="3474720" cy="1466698"/>
           </a:xfrm>
           <a:prstGeom prst="roundRect">
             <a:avLst>
-              <a:gd name="adj" fmla="val 9600"/>
+              <a:gd name="adj" fmla="val 7481"/>
             </a:avLst>
           </a:prstGeom>
           <a:solidFill>
@@ -7770,7 +7986,7 @@
         </p:nvSpPr>
         <p:spPr>
           <a:xfrm>
-            <a:off x="7799832" y="4645152"/>
+            <a:off x="7799832" y="4330598"/>
             <a:ext cx="3145536" cy="256032"/>
           </a:xfrm>
           <a:prstGeom prst="rect">
@@ -7809,8 +8025,8 @@
         </p:nvSpPr>
         <p:spPr>
           <a:xfrm>
-            <a:off x="7799832" y="4974336"/>
-            <a:ext cx="3145536" cy="576072"/>
+            <a:off x="7799832" y="4659782"/>
+            <a:ext cx="3145536" cy="899770"/>
           </a:xfrm>
           <a:prstGeom prst="rect">
             <a:avLst/>
@@ -7836,7 +8052,7 @@
                 <a:ea typeface="Aptos" pitchFamily="34" charset="-122"/>
                 <a:cs typeface="Aptos" pitchFamily="34" charset="-120"/>
               </a:rPr>
-              <a:t>Connect the concept to data quality, model performance, validation evidence, monitoring measures, and decisions that.</a:t>
+              <a:t>Connect the concept to data quality, model performance, validation evidence, monitoring measures, and decisions that remain under human control.</a:t>
             </a:r>
             <a:endParaRPr lang="en-US" sz="1320" dirty="0"/>
           </a:p>
@@ -8171,11 +8387,11 @@
         <p:spPr>
           <a:xfrm>
             <a:off x="7635240" y="1325880"/>
-            <a:ext cx="3474720" cy="1325880"/>
+            <a:ext cx="3474720" cy="1207008"/>
           </a:xfrm>
           <a:prstGeom prst="roundRect">
             <a:avLst>
-              <a:gd name="adj" fmla="val 8276"/>
+              <a:gd name="adj" fmla="val 9091"/>
             </a:avLst>
           </a:prstGeom>
           <a:solidFill>
@@ -8237,7 +8453,7 @@
         <p:spPr>
           <a:xfrm>
             <a:off x="7799832" y="1801368"/>
-            <a:ext cx="3145536" cy="758952"/>
+            <a:ext cx="3145536" cy="640080"/>
           </a:xfrm>
           <a:prstGeom prst="rect">
             <a:avLst/>
@@ -8277,12 +8493,12 @@
         </p:nvSpPr>
         <p:spPr>
           <a:xfrm>
-            <a:off x="7635240" y="2788920"/>
-            <a:ext cx="3474720" cy="1536192"/>
+            <a:off x="7635240" y="2670048"/>
+            <a:ext cx="3474720" cy="1377086"/>
           </a:xfrm>
           <a:prstGeom prst="roundRect">
             <a:avLst>
-              <a:gd name="adj" fmla="val 7143"/>
+              <a:gd name="adj" fmla="val 7968"/>
             </a:avLst>
           </a:prstGeom>
           <a:solidFill>
@@ -8304,7 +8520,7 @@
         </p:nvSpPr>
         <p:spPr>
           <a:xfrm>
-            <a:off x="7799832" y="2935224"/>
+            <a:off x="7799832" y="2816352"/>
             <a:ext cx="3145536" cy="256032"/>
           </a:xfrm>
           <a:prstGeom prst="rect">
@@ -8343,8 +8559,8 @@
         </p:nvSpPr>
         <p:spPr>
           <a:xfrm>
-            <a:off x="7818120" y="3300984"/>
-            <a:ext cx="3090672" cy="877824"/>
+            <a:off x="7818120" y="3182112"/>
+            <a:ext cx="3090672" cy="718718"/>
           </a:xfrm>
           <a:prstGeom prst="rect">
             <a:avLst/>
@@ -8384,12 +8600,12 @@
         </p:nvSpPr>
         <p:spPr>
           <a:xfrm>
-            <a:off x="7635240" y="4498848"/>
-            <a:ext cx="3474720" cy="1143000"/>
+            <a:off x="7635240" y="4184294"/>
+            <a:ext cx="3474720" cy="1466698"/>
           </a:xfrm>
           <a:prstGeom prst="roundRect">
             <a:avLst>
-              <a:gd name="adj" fmla="val 9600"/>
+              <a:gd name="adj" fmla="val 7481"/>
             </a:avLst>
           </a:prstGeom>
           <a:solidFill>
@@ -8411,7 +8627,7 @@
         </p:nvSpPr>
         <p:spPr>
           <a:xfrm>
-            <a:off x="7799832" y="4645152"/>
+            <a:off x="7799832" y="4330598"/>
             <a:ext cx="3145536" cy="256032"/>
           </a:xfrm>
           <a:prstGeom prst="rect">
@@ -8450,8 +8666,8 @@
         </p:nvSpPr>
         <p:spPr>
           <a:xfrm>
-            <a:off x="7799832" y="4974336"/>
-            <a:ext cx="3145536" cy="576072"/>
+            <a:off x="7799832" y="4659782"/>
+            <a:ext cx="3145536" cy="899770"/>
           </a:xfrm>
           <a:prstGeom prst="rect">
             <a:avLst/>
@@ -8477,7 +8693,7 @@
                 <a:ea typeface="Aptos" pitchFamily="34" charset="-122"/>
                 <a:cs typeface="Aptos" pitchFamily="34" charset="-120"/>
               </a:rPr>
-              <a:t>Connect the concept to data quality, model performance, validation evidence, monitoring measures, and decisions that.</a:t>
+              <a:t>Connect the concept to data quality, model performance, validation evidence, monitoring measures, and decisions that remain under human control.</a:t>
             </a:r>
             <a:endParaRPr lang="en-US" sz="1320" dirty="0"/>
           </a:p>
@@ -8846,11 +9062,11 @@
         <p:spPr>
           <a:xfrm>
             <a:off x="7635240" y="1325880"/>
-            <a:ext cx="3474720" cy="1325880"/>
+            <a:ext cx="3474720" cy="1207008"/>
           </a:xfrm>
           <a:prstGeom prst="roundRect">
             <a:avLst>
-              <a:gd name="adj" fmla="val 8276"/>
+              <a:gd name="adj" fmla="val 9091"/>
             </a:avLst>
           </a:prstGeom>
           <a:solidFill>
@@ -8912,7 +9128,7 @@
         <p:spPr>
           <a:xfrm>
             <a:off x="7799832" y="1801368"/>
-            <a:ext cx="3145536" cy="758952"/>
+            <a:ext cx="3145536" cy="640080"/>
           </a:xfrm>
           <a:prstGeom prst="rect">
             <a:avLst/>
@@ -8952,12 +9168,12 @@
         </p:nvSpPr>
         <p:spPr>
           <a:xfrm>
-            <a:off x="7635240" y="2788920"/>
-            <a:ext cx="3474720" cy="1536192"/>
+            <a:off x="7635240" y="2670048"/>
+            <a:ext cx="3474720" cy="1377086"/>
           </a:xfrm>
           <a:prstGeom prst="roundRect">
             <a:avLst>
-              <a:gd name="adj" fmla="val 7143"/>
+              <a:gd name="adj" fmla="val 7968"/>
             </a:avLst>
           </a:prstGeom>
           <a:solidFill>
@@ -8979,7 +9195,7 @@
         </p:nvSpPr>
         <p:spPr>
           <a:xfrm>
-            <a:off x="7799832" y="2935224"/>
+            <a:off x="7799832" y="2816352"/>
             <a:ext cx="3145536" cy="256032"/>
           </a:xfrm>
           <a:prstGeom prst="rect">
@@ -9018,8 +9234,8 @@
         </p:nvSpPr>
         <p:spPr>
           <a:xfrm>
-            <a:off x="7818120" y="3300984"/>
-            <a:ext cx="3090672" cy="877824"/>
+            <a:off x="7818120" y="3182112"/>
+            <a:ext cx="3090672" cy="718718"/>
           </a:xfrm>
           <a:prstGeom prst="rect">
             <a:avLst/>
@@ -9093,12 +9309,12 @@
         </p:nvSpPr>
         <p:spPr>
           <a:xfrm>
-            <a:off x="7635240" y="4498848"/>
-            <a:ext cx="3474720" cy="1143000"/>
+            <a:off x="7635240" y="4184294"/>
+            <a:ext cx="3474720" cy="1466698"/>
           </a:xfrm>
           <a:prstGeom prst="roundRect">
             <a:avLst>
-              <a:gd name="adj" fmla="val 9600"/>
+              <a:gd name="adj" fmla="val 7481"/>
             </a:avLst>
           </a:prstGeom>
           <a:solidFill>
@@ -9120,7 +9336,7 @@
         </p:nvSpPr>
         <p:spPr>
           <a:xfrm>
-            <a:off x="7799832" y="4645152"/>
+            <a:off x="7799832" y="4330598"/>
             <a:ext cx="3145536" cy="256032"/>
           </a:xfrm>
           <a:prstGeom prst="rect">
@@ -9159,8 +9375,8 @@
         </p:nvSpPr>
         <p:spPr>
           <a:xfrm>
-            <a:off x="7799832" y="4974336"/>
-            <a:ext cx="3145536" cy="576072"/>
+            <a:off x="7799832" y="4659782"/>
+            <a:ext cx="3145536" cy="899770"/>
           </a:xfrm>
           <a:prstGeom prst="rect">
             <a:avLst/>
@@ -9186,7 +9402,7 @@
                 <a:ea typeface="Aptos" pitchFamily="34" charset="-122"/>
                 <a:cs typeface="Aptos" pitchFamily="34" charset="-120"/>
               </a:rPr>
-              <a:t>Use the assignment to test whether you can explain the concept, apply it to a realistic public health situation, and.</a:t>
+              <a:t>Use the assignment to test whether you can explain the concept, apply it to a realistic public health situation, and identify what would need review before the work moves forward.</a:t>
             </a:r>
             <a:endParaRPr lang="en-US" sz="1320" dirty="0"/>
           </a:p>
@@ -9555,11 +9771,11 @@
         <p:spPr>
           <a:xfrm>
             <a:off x="7635240" y="1325880"/>
-            <a:ext cx="3474720" cy="1325880"/>
+            <a:ext cx="3474720" cy="1207008"/>
           </a:xfrm>
           <a:prstGeom prst="roundRect">
             <a:avLst>
-              <a:gd name="adj" fmla="val 8276"/>
+              <a:gd name="adj" fmla="val 9091"/>
             </a:avLst>
           </a:prstGeom>
           <a:solidFill>
@@ -9621,7 +9837,7 @@
         <p:spPr>
           <a:xfrm>
             <a:off x="7799832" y="1801368"/>
-            <a:ext cx="3145536" cy="758952"/>
+            <a:ext cx="3145536" cy="640080"/>
           </a:xfrm>
           <a:prstGeom prst="rect">
             <a:avLst/>
@@ -9661,12 +9877,12 @@
         </p:nvSpPr>
         <p:spPr>
           <a:xfrm>
-            <a:off x="7635240" y="2788920"/>
-            <a:ext cx="3474720" cy="1536192"/>
+            <a:off x="7635240" y="2670048"/>
+            <a:ext cx="3474720" cy="1377086"/>
           </a:xfrm>
           <a:prstGeom prst="roundRect">
             <a:avLst>
-              <a:gd name="adj" fmla="val 7143"/>
+              <a:gd name="adj" fmla="val 7968"/>
             </a:avLst>
           </a:prstGeom>
           <a:solidFill>
@@ -9688,7 +9904,7 @@
         </p:nvSpPr>
         <p:spPr>
           <a:xfrm>
-            <a:off x="7799832" y="2935224"/>
+            <a:off x="7799832" y="2816352"/>
             <a:ext cx="3145536" cy="256032"/>
           </a:xfrm>
           <a:prstGeom prst="rect">
@@ -9727,8 +9943,8 @@
         </p:nvSpPr>
         <p:spPr>
           <a:xfrm>
-            <a:off x="7818120" y="3300984"/>
-            <a:ext cx="3090672" cy="877824"/>
+            <a:off x="7818120" y="3182112"/>
+            <a:ext cx="3090672" cy="718718"/>
           </a:xfrm>
           <a:prstGeom prst="rect">
             <a:avLst/>
@@ -9802,12 +10018,12 @@
         </p:nvSpPr>
         <p:spPr>
           <a:xfrm>
-            <a:off x="7635240" y="4498848"/>
-            <a:ext cx="3474720" cy="1143000"/>
+            <a:off x="7635240" y="4184294"/>
+            <a:ext cx="3474720" cy="1466698"/>
           </a:xfrm>
           <a:prstGeom prst="roundRect">
             <a:avLst>
-              <a:gd name="adj" fmla="val 9600"/>
+              <a:gd name="adj" fmla="val 7481"/>
             </a:avLst>
           </a:prstGeom>
           <a:solidFill>
@@ -9829,7 +10045,7 @@
         </p:nvSpPr>
         <p:spPr>
           <a:xfrm>
-            <a:off x="7799832" y="4645152"/>
+            <a:off x="7799832" y="4330598"/>
             <a:ext cx="3145536" cy="256032"/>
           </a:xfrm>
           <a:prstGeom prst="rect">
@@ -9868,8 +10084,8 @@
         </p:nvSpPr>
         <p:spPr>
           <a:xfrm>
-            <a:off x="7799832" y="4974336"/>
-            <a:ext cx="3145536" cy="576072"/>
+            <a:off x="7799832" y="4659782"/>
+            <a:ext cx="3145536" cy="899770"/>
           </a:xfrm>
           <a:prstGeom prst="rect">
             <a:avLst/>
@@ -9895,7 +10111,7 @@
                 <a:ea typeface="Aptos" pitchFamily="34" charset="-122"/>
                 <a:cs typeface="Aptos" pitchFamily="34" charset="-120"/>
               </a:rPr>
-              <a:t>Use the assignment to test whether you can explain the concept, apply it to a realistic public health situation, and.</a:t>
+              <a:t>Use the assignment to test whether you can explain the concept, apply it to a realistic public health situation, and identify what would need review before the work moves forward.</a:t>
             </a:r>
             <a:endParaRPr lang="en-US" sz="1320" dirty="0"/>
           </a:p>
@@ -10356,7 +10572,7 @@
                 <a:ea typeface="Aptos" pitchFamily="34" charset="-122"/>
                 <a:cs typeface="Aptos" pitchFamily="34" charset="-120"/>
               </a:rPr>
-              <a:t>Level: intermediate/practitioner Primary track: Analytics and Modeling Track Appears in tracks: analytics-modeling,.</a:t>
+              <a:t>Level: intermediate/practitioner Primary track: Analytics and Modeling Track Appears in tracks: analytics-modeling, communications, public-health-executive-leadership, epidemiology, governance-security</a:t>
             </a:r>
             <a:endParaRPr lang="en-US" sz="1320" dirty="0"/>
           </a:p>
@@ -10866,11 +11082,11 @@
         <p:spPr>
           <a:xfrm>
             <a:off x="7635240" y="1325880"/>
-            <a:ext cx="3474720" cy="1325880"/>
+            <a:ext cx="3474720" cy="1207008"/>
           </a:xfrm>
           <a:prstGeom prst="roundRect">
             <a:avLst>
-              <a:gd name="adj" fmla="val 8276"/>
+              <a:gd name="adj" fmla="val 9091"/>
             </a:avLst>
           </a:prstGeom>
           <a:solidFill>
@@ -10932,7 +11148,7 @@
         <p:spPr>
           <a:xfrm>
             <a:off x="7799832" y="1801368"/>
-            <a:ext cx="3145536" cy="758952"/>
+            <a:ext cx="3145536" cy="640080"/>
           </a:xfrm>
           <a:prstGeom prst="rect">
             <a:avLst/>
@@ -10972,12 +11188,12 @@
         </p:nvSpPr>
         <p:spPr>
           <a:xfrm>
-            <a:off x="7635240" y="2788920"/>
-            <a:ext cx="3474720" cy="1536192"/>
+            <a:off x="7635240" y="2670048"/>
+            <a:ext cx="3474720" cy="1377086"/>
           </a:xfrm>
           <a:prstGeom prst="roundRect">
             <a:avLst>
-              <a:gd name="adj" fmla="val 7143"/>
+              <a:gd name="adj" fmla="val 7968"/>
             </a:avLst>
           </a:prstGeom>
           <a:solidFill>
@@ -10999,7 +11215,7 @@
         </p:nvSpPr>
         <p:spPr>
           <a:xfrm>
-            <a:off x="7799832" y="2935224"/>
+            <a:off x="7799832" y="2816352"/>
             <a:ext cx="3145536" cy="256032"/>
           </a:xfrm>
           <a:prstGeom prst="rect">
@@ -11038,8 +11254,8 @@
         </p:nvSpPr>
         <p:spPr>
           <a:xfrm>
-            <a:off x="7818120" y="3300984"/>
-            <a:ext cx="3090672" cy="877824"/>
+            <a:off x="7818120" y="3182112"/>
+            <a:ext cx="3090672" cy="718718"/>
           </a:xfrm>
           <a:prstGeom prst="rect">
             <a:avLst/>
@@ -11096,12 +11312,12 @@
         </p:nvSpPr>
         <p:spPr>
           <a:xfrm>
-            <a:off x="7635240" y="4498848"/>
-            <a:ext cx="3474720" cy="1143000"/>
+            <a:off x="7635240" y="4184294"/>
+            <a:ext cx="3474720" cy="1466698"/>
           </a:xfrm>
           <a:prstGeom prst="roundRect">
             <a:avLst>
-              <a:gd name="adj" fmla="val 9600"/>
+              <a:gd name="adj" fmla="val 7481"/>
             </a:avLst>
           </a:prstGeom>
           <a:solidFill>
@@ -11123,7 +11339,7 @@
         </p:nvSpPr>
         <p:spPr>
           <a:xfrm>
-            <a:off x="7799832" y="4645152"/>
+            <a:off x="7799832" y="4330598"/>
             <a:ext cx="3145536" cy="256032"/>
           </a:xfrm>
           <a:prstGeom prst="rect">
@@ -11162,8 +11378,8 @@
         </p:nvSpPr>
         <p:spPr>
           <a:xfrm>
-            <a:off x="7799832" y="4974336"/>
-            <a:ext cx="3145536" cy="576072"/>
+            <a:off x="7799832" y="4659782"/>
+            <a:ext cx="3145536" cy="899770"/>
           </a:xfrm>
           <a:prstGeom prst="rect">
             <a:avLst/>
@@ -11189,7 +11405,7 @@
                 <a:ea typeface="Aptos" pitchFamily="34" charset="-122"/>
                 <a:cs typeface="Aptos" pitchFamily="34" charset="-120"/>
               </a:rPr>
-              <a:t>Connect the concept to data quality, model performance, validation evidence, monitoring measures, and decisions that.</a:t>
+              <a:t>Connect the concept to data quality, model performance, validation evidence, monitoring measures, and decisions that remain under human control.</a:t>
             </a:r>
             <a:endParaRPr lang="en-US" sz="1320" dirty="0"/>
           </a:p>
@@ -11524,11 +11740,11 @@
         <p:spPr>
           <a:xfrm>
             <a:off x="7635240" y="1325880"/>
-            <a:ext cx="3474720" cy="1325880"/>
+            <a:ext cx="3474720" cy="1255471"/>
           </a:xfrm>
           <a:prstGeom prst="roundRect">
             <a:avLst>
-              <a:gd name="adj" fmla="val 8276"/>
+              <a:gd name="adj" fmla="val 8740"/>
             </a:avLst>
           </a:prstGeom>
           <a:solidFill>
@@ -11590,7 +11806,7 @@
         <p:spPr>
           <a:xfrm>
             <a:off x="7799832" y="1801368"/>
-            <a:ext cx="3145536" cy="758952"/>
+            <a:ext cx="3145536" cy="688543"/>
           </a:xfrm>
           <a:prstGeom prst="rect">
             <a:avLst/>
@@ -11630,12 +11846,12 @@
         </p:nvSpPr>
         <p:spPr>
           <a:xfrm>
-            <a:off x="7635240" y="2788920"/>
-            <a:ext cx="3474720" cy="1536192"/>
+            <a:off x="7635240" y="2718511"/>
+            <a:ext cx="3474720" cy="1328623"/>
           </a:xfrm>
           <a:prstGeom prst="roundRect">
             <a:avLst>
-              <a:gd name="adj" fmla="val 7143"/>
+              <a:gd name="adj" fmla="val 8259"/>
             </a:avLst>
           </a:prstGeom>
           <a:solidFill>
@@ -11657,7 +11873,7 @@
         </p:nvSpPr>
         <p:spPr>
           <a:xfrm>
-            <a:off x="7799832" y="2935224"/>
+            <a:off x="7799832" y="2864815"/>
             <a:ext cx="3145536" cy="256032"/>
           </a:xfrm>
           <a:prstGeom prst="rect">
@@ -11696,8 +11912,8 @@
         </p:nvSpPr>
         <p:spPr>
           <a:xfrm>
-            <a:off x="7818120" y="3300984"/>
-            <a:ext cx="3090672" cy="877824"/>
+            <a:off x="7818120" y="3230575"/>
+            <a:ext cx="3090672" cy="670255"/>
           </a:xfrm>
           <a:prstGeom prst="rect">
             <a:avLst/>
@@ -11737,12 +11953,12 @@
         </p:nvSpPr>
         <p:spPr>
           <a:xfrm>
-            <a:off x="7635240" y="4498848"/>
-            <a:ext cx="3474720" cy="1143000"/>
+            <a:off x="7635240" y="4184294"/>
+            <a:ext cx="3474720" cy="1466698"/>
           </a:xfrm>
           <a:prstGeom prst="roundRect">
             <a:avLst>
-              <a:gd name="adj" fmla="val 9600"/>
+              <a:gd name="adj" fmla="val 7481"/>
             </a:avLst>
           </a:prstGeom>
           <a:solidFill>
@@ -11764,7 +11980,7 @@
         </p:nvSpPr>
         <p:spPr>
           <a:xfrm>
-            <a:off x="7799832" y="4645152"/>
+            <a:off x="7799832" y="4330598"/>
             <a:ext cx="3145536" cy="256032"/>
           </a:xfrm>
           <a:prstGeom prst="rect">
@@ -11803,8 +12019,8 @@
         </p:nvSpPr>
         <p:spPr>
           <a:xfrm>
-            <a:off x="7799832" y="4974336"/>
-            <a:ext cx="3145536" cy="576072"/>
+            <a:off x="7799832" y="4659782"/>
+            <a:ext cx="3145536" cy="899770"/>
           </a:xfrm>
           <a:prstGeom prst="rect">
             <a:avLst/>
@@ -11830,7 +12046,7 @@
                 <a:ea typeface="Aptos" pitchFamily="34" charset="-122"/>
                 <a:cs typeface="Aptos" pitchFamily="34" charset="-120"/>
               </a:rPr>
-              <a:t>Connect the concept to data quality, model performance, validation evidence, monitoring measures, and decisions that.</a:t>
+              <a:t>Connect the concept to data quality, model performance, validation evidence, monitoring measures, and decisions that remain under human control.</a:t>
             </a:r>
             <a:endParaRPr lang="en-US" sz="1320" dirty="0"/>
           </a:p>
@@ -12308,7 +12524,7 @@
                 <a:ea typeface="Aptos" pitchFamily="34" charset="-122"/>
                 <a:cs typeface="Aptos" pitchFamily="34" charset="-120"/>
               </a:rPr>
-              <a:t>Use the related plays to identify decisions, participants, timing, approvals, and documentation needed for responsible.</a:t>
+              <a:t>Use the related plays to identify decisions, participants, timing, approvals, and documentation needed for responsible implementation.</a:t>
             </a:r>
             <a:endParaRPr lang="en-US" sz="1320" dirty="0"/>
           </a:p>
@@ -12927,7 +13143,7 @@
                 <a:ea typeface="Aptos" pitchFamily="34" charset="-122"/>
                 <a:cs typeface="Aptos" pitchFamily="34" charset="-120"/>
               </a:rPr>
-              <a:t>Use linked tools when your department needs a structured worksheet, template, checklist, review process, or.</a:t>
+              <a:t>Use linked tools when your department needs a structured worksheet, template, checklist, review process, or documentation artifact.</a:t>
             </a:r>
             <a:endParaRPr lang="en-US" sz="1320" dirty="0"/>
           </a:p>
@@ -13437,11 +13653,11 @@
         <p:spPr>
           <a:xfrm>
             <a:off x="7635240" y="1325880"/>
-            <a:ext cx="3474720" cy="1325880"/>
+            <a:ext cx="3474720" cy="1207008"/>
           </a:xfrm>
           <a:prstGeom prst="roundRect">
             <a:avLst>
-              <a:gd name="adj" fmla="val 8276"/>
+              <a:gd name="adj" fmla="val 9091"/>
             </a:avLst>
           </a:prstGeom>
           <a:solidFill>
@@ -13503,7 +13719,7 @@
         <p:spPr>
           <a:xfrm>
             <a:off x="7799832" y="1801368"/>
-            <a:ext cx="3145536" cy="758952"/>
+            <a:ext cx="3145536" cy="640080"/>
           </a:xfrm>
           <a:prstGeom prst="rect">
             <a:avLst/>
@@ -13543,12 +13759,12 @@
         </p:nvSpPr>
         <p:spPr>
           <a:xfrm>
-            <a:off x="7635240" y="2788920"/>
-            <a:ext cx="3474720" cy="1536192"/>
+            <a:off x="7635240" y="2670048"/>
+            <a:ext cx="3474720" cy="1377086"/>
           </a:xfrm>
           <a:prstGeom prst="roundRect">
             <a:avLst>
-              <a:gd name="adj" fmla="val 7143"/>
+              <a:gd name="adj" fmla="val 7968"/>
             </a:avLst>
           </a:prstGeom>
           <a:solidFill>
@@ -13570,7 +13786,7 @@
         </p:nvSpPr>
         <p:spPr>
           <a:xfrm>
-            <a:off x="7799832" y="2935224"/>
+            <a:off x="7799832" y="2816352"/>
             <a:ext cx="3145536" cy="256032"/>
           </a:xfrm>
           <a:prstGeom prst="rect">
@@ -13609,8 +13825,8 @@
         </p:nvSpPr>
         <p:spPr>
           <a:xfrm>
-            <a:off x="7818120" y="3300984"/>
-            <a:ext cx="3090672" cy="877824"/>
+            <a:off x="7818120" y="3182112"/>
+            <a:ext cx="3090672" cy="718718"/>
           </a:xfrm>
           <a:prstGeom prst="rect">
             <a:avLst/>
@@ -13684,12 +13900,12 @@
         </p:nvSpPr>
         <p:spPr>
           <a:xfrm>
-            <a:off x="7635240" y="4498848"/>
-            <a:ext cx="3474720" cy="1143000"/>
+            <a:off x="7635240" y="4184294"/>
+            <a:ext cx="3474720" cy="1466698"/>
           </a:xfrm>
           <a:prstGeom prst="roundRect">
             <a:avLst>
-              <a:gd name="adj" fmla="val 9600"/>
+              <a:gd name="adj" fmla="val 7481"/>
             </a:avLst>
           </a:prstGeom>
           <a:solidFill>
@@ -13711,7 +13927,7 @@
         </p:nvSpPr>
         <p:spPr>
           <a:xfrm>
-            <a:off x="7799832" y="4645152"/>
+            <a:off x="7799832" y="4330598"/>
             <a:ext cx="3145536" cy="256032"/>
           </a:xfrm>
           <a:prstGeom prst="rect">
@@ -13750,8 +13966,8 @@
         </p:nvSpPr>
         <p:spPr>
           <a:xfrm>
-            <a:off x="7799832" y="4974336"/>
-            <a:ext cx="3145536" cy="576072"/>
+            <a:off x="7799832" y="4659782"/>
+            <a:ext cx="3145536" cy="899770"/>
           </a:xfrm>
           <a:prstGeom prst="rect">
             <a:avLst/>
@@ -13777,7 +13993,7 @@
                 <a:ea typeface="Aptos" pitchFamily="34" charset="-122"/>
                 <a:cs typeface="Aptos" pitchFamily="34" charset="-120"/>
               </a:rPr>
-              <a:t>Use the assignment to test whether you can explain the concept, apply it to a realistic public health situation, and.</a:t>
+              <a:t>Use the assignment to test whether you can explain the concept, apply it to a realistic public health situation, and identify what would need review before the work moves forward.</a:t>
             </a:r>
             <a:endParaRPr lang="en-US" sz="1320" dirty="0"/>
           </a:p>
@@ -14146,11 +14362,11 @@
         <p:spPr>
           <a:xfrm>
             <a:off x="7635240" y="1325880"/>
-            <a:ext cx="3474720" cy="1325880"/>
+            <a:ext cx="3474720" cy="1255471"/>
           </a:xfrm>
           <a:prstGeom prst="roundRect">
             <a:avLst>
-              <a:gd name="adj" fmla="val 8276"/>
+              <a:gd name="adj" fmla="val 8740"/>
             </a:avLst>
           </a:prstGeom>
           <a:solidFill>
@@ -14212,7 +14428,7 @@
         <p:spPr>
           <a:xfrm>
             <a:off x="7799832" y="1801368"/>
-            <a:ext cx="3145536" cy="758952"/>
+            <a:ext cx="3145536" cy="688543"/>
           </a:xfrm>
           <a:prstGeom prst="rect">
             <a:avLst/>
@@ -14252,12 +14468,12 @@
         </p:nvSpPr>
         <p:spPr>
           <a:xfrm>
-            <a:off x="7635240" y="2788920"/>
-            <a:ext cx="3474720" cy="1536192"/>
+            <a:off x="7635240" y="2718511"/>
+            <a:ext cx="3474720" cy="1328623"/>
           </a:xfrm>
           <a:prstGeom prst="roundRect">
             <a:avLst>
-              <a:gd name="adj" fmla="val 7143"/>
+              <a:gd name="adj" fmla="val 8259"/>
             </a:avLst>
           </a:prstGeom>
           <a:solidFill>
@@ -14279,8 +14495,8 @@
         </p:nvSpPr>
         <p:spPr>
           <a:xfrm>
-            <a:off x="7799832" y="2935224"/>
-            <a:ext cx="3145536" cy="256032"/>
+            <a:off x="7799832" y="2846527"/>
+            <a:ext cx="3145536" cy="237744"/>
           </a:xfrm>
           <a:prstGeom prst="rect">
             <a:avLst/>
@@ -14296,7 +14512,7 @@
               <a:buNone/>
             </a:pPr>
             <a:r>
-              <a:rPr lang="en-US" sz="1300" b="1" dirty="0">
+              <a:rPr lang="en-US" sz="1250" b="1" dirty="0">
                 <a:solidFill>
                   <a:srgbClr val="0068B7"/>
                 </a:solidFill>
@@ -14304,101 +14520,317 @@
                 <a:ea typeface="Aptos" pitchFamily="34" charset="-122"/>
                 <a:cs typeface="Aptos" pitchFamily="34" charset="-120"/>
               </a:rPr>
-              <a:t>Concept checkpoints</a:t>
-            </a:r>
-            <a:endParaRPr lang="en-US" sz="1300" dirty="0"/>
-          </a:p>
-        </p:txBody>
-      </p:sp>
-      <p:sp>
-        <p:nvSpPr>
-          <p:cNvPr id="15" name="Text 13"/>
-          <p:cNvSpPr/>
-          <p:nvPr/>
-        </p:nvSpPr>
-        <p:spPr>
-          <a:xfrm>
-            <a:off x="7818120" y="3300984"/>
-            <a:ext cx="3090672" cy="877824"/>
-          </a:xfrm>
-          <a:prstGeom prst="rect">
-            <a:avLst/>
-          </a:prstGeom>
-          <a:noFill/>
-          <a:ln/>
-        </p:spPr>
-        <p:txBody>
-          <a:bodyPr wrap="square" lIns="508" tIns="508" rIns="508" bIns="508" rtlCol="0" anchor="t">
+              <a:t>Data-to-decision flow</a:t>
+            </a:r>
+            <a:endParaRPr lang="en-US" sz="1250" dirty="0"/>
+          </a:p>
+        </p:txBody>
+      </p:sp>
+      <p:sp>
+        <p:nvSpPr>
+          <p:cNvPr id="15" name="Shape 13"/>
+          <p:cNvSpPr/>
+          <p:nvPr/>
+        </p:nvSpPr>
+        <p:spPr>
+          <a:xfrm>
+            <a:off x="8763000" y="3399739"/>
+            <a:ext cx="164592" cy="0"/>
+          </a:xfrm>
+          <a:prstGeom prst="line">
+            <a:avLst/>
+          </a:prstGeom>
+          <a:noFill/>
+          <a:ln w="15240">
+            <a:solidFill>
+              <a:srgbClr val="8ABBD8"/>
+            </a:solidFill>
+            <a:prstDash val="solid"/>
+          </a:ln>
+        </p:spPr>
+      </p:sp>
+      <p:sp>
+        <p:nvSpPr>
+          <p:cNvPr id="16" name="Shape 14"/>
+          <p:cNvSpPr/>
+          <p:nvPr/>
+        </p:nvSpPr>
+        <p:spPr>
+          <a:xfrm>
+            <a:off x="7872984" y="3248863"/>
+            <a:ext cx="890016" cy="301752"/>
+          </a:xfrm>
+          <a:prstGeom prst="roundRect">
+            <a:avLst>
+              <a:gd name="adj" fmla="val 24242"/>
+            </a:avLst>
+          </a:prstGeom>
+          <a:solidFill>
+            <a:srgbClr val="0068B7"/>
+          </a:solidFill>
+          <a:ln w="12700">
+            <a:solidFill>
+              <a:srgbClr val="0068B7"/>
+            </a:solidFill>
+            <a:prstDash val="solid"/>
+          </a:ln>
+        </p:spPr>
+      </p:sp>
+      <p:sp>
+        <p:nvSpPr>
+          <p:cNvPr id="17" name="Text 15"/>
+          <p:cNvSpPr/>
+          <p:nvPr/>
+        </p:nvSpPr>
+        <p:spPr>
+          <a:xfrm>
+            <a:off x="7909560" y="3322015"/>
+            <a:ext cx="816864" cy="146304"/>
+          </a:xfrm>
+          <a:prstGeom prst="rect">
+            <a:avLst/>
+          </a:prstGeom>
+          <a:noFill/>
+          <a:ln/>
+        </p:spPr>
+        <p:txBody>
+          <a:bodyPr wrap="square" lIns="0" tIns="0" rIns="0" bIns="0" rtlCol="0" anchor="ctr">
             <a:normAutofit/>
           </a:bodyPr>
           <a:lstStyle/>
           <a:p>
-            <a:pPr indent="0" marL="0">
-              <a:buNone/>
-            </a:pPr>
-            <a:r>
-              <a:rPr lang="en-US" sz="1220" dirty="0">
-                <a:solidFill>
-                  <a:srgbClr val="17364A"/>
-                </a:solidFill>
-                <a:latin typeface="Aptos" pitchFamily="34" charset="0"/>
-                <a:ea typeface="Aptos" pitchFamily="34" charset="-122"/>
-                <a:cs typeface="Aptos" pitchFamily="34" charset="-120"/>
-              </a:rPr>
-              <a:t>Public health staff often need to communicate AI or model results.</a:t>
-            </a:r>
-            <a:endParaRPr lang="en-US" sz="1220" dirty="0"/>
-          </a:p>
-          <a:p>
-            <a:pPr indent="0" marL="0">
-              <a:buNone/>
-            </a:pPr>
-            <a:r>
-              <a:rPr lang="en-US" sz="1220" dirty="0">
-                <a:solidFill>
-                  <a:srgbClr val="17364A"/>
-                </a:solidFill>
-                <a:latin typeface="Aptos" pitchFamily="34" charset="0"/>
-                <a:ea typeface="Aptos" pitchFamily="34" charset="-122"/>
-                <a:cs typeface="Aptos" pitchFamily="34" charset="-120"/>
-              </a:rPr>
-              <a:t>This module teaches learners how to explain model outputs,.</a:t>
-            </a:r>
-            <a:endParaRPr lang="en-US" sz="1220" dirty="0"/>
-          </a:p>
-          <a:p>
-            <a:pPr indent="0" marL="0">
-              <a:buNone/>
-            </a:pPr>
-            <a:r>
-              <a:rPr lang="en-US" sz="1220" dirty="0">
-                <a:solidFill>
-                  <a:srgbClr val="17364A"/>
-                </a:solidFill>
-                <a:latin typeface="Aptos" pitchFamily="34" charset="0"/>
-                <a:ea typeface="Aptos" pitchFamily="34" charset="-122"/>
-                <a:cs typeface="Aptos" pitchFamily="34" charset="-120"/>
-              </a:rPr>
-              <a:t>Learners translate metrics, confidence, caveats, and validation.</a:t>
-            </a:r>
-            <a:endParaRPr lang="en-US" sz="1220" dirty="0"/>
-          </a:p>
-        </p:txBody>
-      </p:sp>
-      <p:sp>
-        <p:nvSpPr>
-          <p:cNvPr id="16" name="Shape 14"/>
-          <p:cNvSpPr/>
-          <p:nvPr/>
-        </p:nvSpPr>
-        <p:spPr>
-          <a:xfrm>
-            <a:off x="7635240" y="4498848"/>
-            <a:ext cx="3474720" cy="1143000"/>
+            <a:pPr algn="ctr" indent="0" marL="0">
+              <a:buNone/>
+            </a:pPr>
+            <a:r>
+              <a:rPr lang="en-US" sz="880" b="1" dirty="0">
+                <a:solidFill>
+                  <a:srgbClr val="FFFFFF"/>
+                </a:solidFill>
+                <a:latin typeface="Aptos" pitchFamily="34" charset="0"/>
+                <a:ea typeface="Aptos" pitchFamily="34" charset="-122"/>
+                <a:cs typeface="Aptos" pitchFamily="34" charset="-120"/>
+              </a:rPr>
+              <a:t>Data</a:t>
+            </a:r>
+            <a:endParaRPr lang="en-US" sz="880" dirty="0"/>
+          </a:p>
+        </p:txBody>
+      </p:sp>
+      <p:sp>
+        <p:nvSpPr>
+          <p:cNvPr id="18" name="Shape 16"/>
+          <p:cNvSpPr/>
+          <p:nvPr/>
+        </p:nvSpPr>
+        <p:spPr>
+          <a:xfrm>
+            <a:off x="9817608" y="3399739"/>
+            <a:ext cx="164592" cy="0"/>
+          </a:xfrm>
+          <a:prstGeom prst="line">
+            <a:avLst/>
+          </a:prstGeom>
+          <a:noFill/>
+          <a:ln w="15240">
+            <a:solidFill>
+              <a:srgbClr val="8ABBD8"/>
+            </a:solidFill>
+            <a:prstDash val="solid"/>
+          </a:ln>
+        </p:spPr>
+      </p:sp>
+      <p:sp>
+        <p:nvSpPr>
+          <p:cNvPr id="19" name="Shape 17"/>
+          <p:cNvSpPr/>
+          <p:nvPr/>
+        </p:nvSpPr>
+        <p:spPr>
+          <a:xfrm>
+            <a:off x="8927592" y="3248863"/>
+            <a:ext cx="890016" cy="301752"/>
           </a:xfrm>
           <a:prstGeom prst="roundRect">
             <a:avLst>
-              <a:gd name="adj" fmla="val 9600"/>
+              <a:gd name="adj" fmla="val 24242"/>
+            </a:avLst>
+          </a:prstGeom>
+          <a:solidFill>
+            <a:srgbClr val="2F8A28"/>
+          </a:solidFill>
+          <a:ln w="12700">
+            <a:solidFill>
+              <a:srgbClr val="2F8A28"/>
+            </a:solidFill>
+            <a:prstDash val="solid"/>
+          </a:ln>
+        </p:spPr>
+      </p:sp>
+      <p:sp>
+        <p:nvSpPr>
+          <p:cNvPr id="20" name="Text 18"/>
+          <p:cNvSpPr/>
+          <p:nvPr/>
+        </p:nvSpPr>
+        <p:spPr>
+          <a:xfrm>
+            <a:off x="8964168" y="3322015"/>
+            <a:ext cx="816864" cy="146304"/>
+          </a:xfrm>
+          <a:prstGeom prst="rect">
+            <a:avLst/>
+          </a:prstGeom>
+          <a:noFill/>
+          <a:ln/>
+        </p:spPr>
+        <p:txBody>
+          <a:bodyPr wrap="square" lIns="0" tIns="0" rIns="0" bIns="0" rtlCol="0" anchor="ctr">
+            <a:normAutofit/>
+          </a:bodyPr>
+          <a:lstStyle/>
+          <a:p>
+            <a:pPr algn="ctr" indent="0" marL="0">
+              <a:buNone/>
+            </a:pPr>
+            <a:r>
+              <a:rPr lang="en-US" sz="880" b="1" dirty="0">
+                <a:solidFill>
+                  <a:srgbClr val="FFFFFF"/>
+                </a:solidFill>
+                <a:latin typeface="Aptos" pitchFamily="34" charset="0"/>
+                <a:ea typeface="Aptos" pitchFamily="34" charset="-122"/>
+                <a:cs typeface="Aptos" pitchFamily="34" charset="-120"/>
+              </a:rPr>
+              <a:t>Analysis</a:t>
+            </a:r>
+            <a:endParaRPr lang="en-US" sz="880" dirty="0"/>
+          </a:p>
+        </p:txBody>
+      </p:sp>
+      <p:sp>
+        <p:nvSpPr>
+          <p:cNvPr id="21" name="Shape 19"/>
+          <p:cNvSpPr/>
+          <p:nvPr/>
+        </p:nvSpPr>
+        <p:spPr>
+          <a:xfrm>
+            <a:off x="9982200" y="3248863"/>
+            <a:ext cx="890016" cy="301752"/>
+          </a:xfrm>
+          <a:prstGeom prst="roundRect">
+            <a:avLst>
+              <a:gd name="adj" fmla="val 24242"/>
+            </a:avLst>
+          </a:prstGeom>
+          <a:solidFill>
+            <a:srgbClr val="6A4CA3"/>
+          </a:solidFill>
+          <a:ln w="12700">
+            <a:solidFill>
+              <a:srgbClr val="6A4CA3"/>
+            </a:solidFill>
+            <a:prstDash val="solid"/>
+          </a:ln>
+        </p:spPr>
+      </p:sp>
+      <p:sp>
+        <p:nvSpPr>
+          <p:cNvPr id="22" name="Text 20"/>
+          <p:cNvSpPr/>
+          <p:nvPr/>
+        </p:nvSpPr>
+        <p:spPr>
+          <a:xfrm>
+            <a:off x="10018776" y="3322015"/>
+            <a:ext cx="816864" cy="146304"/>
+          </a:xfrm>
+          <a:prstGeom prst="rect">
+            <a:avLst/>
+          </a:prstGeom>
+          <a:noFill/>
+          <a:ln/>
+        </p:spPr>
+        <p:txBody>
+          <a:bodyPr wrap="square" lIns="0" tIns="0" rIns="0" bIns="0" rtlCol="0" anchor="ctr">
+            <a:normAutofit/>
+          </a:bodyPr>
+          <a:lstStyle/>
+          <a:p>
+            <a:pPr algn="ctr" indent="0" marL="0">
+              <a:buNone/>
+            </a:pPr>
+            <a:r>
+              <a:rPr lang="en-US" sz="880" b="1" dirty="0">
+                <a:solidFill>
+                  <a:srgbClr val="FFFFFF"/>
+                </a:solidFill>
+                <a:latin typeface="Aptos" pitchFamily="34" charset="0"/>
+                <a:ea typeface="Aptos" pitchFamily="34" charset="-122"/>
+                <a:cs typeface="Aptos" pitchFamily="34" charset="-120"/>
+              </a:rPr>
+              <a:t>Review</a:t>
+            </a:r>
+            <a:endParaRPr lang="en-US" sz="880" dirty="0"/>
+          </a:p>
+        </p:txBody>
+      </p:sp>
+      <p:sp>
+        <p:nvSpPr>
+          <p:cNvPr id="23" name="Text 21"/>
+          <p:cNvSpPr/>
+          <p:nvPr/>
+        </p:nvSpPr>
+        <p:spPr>
+          <a:xfrm>
+            <a:off x="7854696" y="3742639"/>
+            <a:ext cx="3035808" cy="158191"/>
+          </a:xfrm>
+          <a:prstGeom prst="rect">
+            <a:avLst/>
+          </a:prstGeom>
+          <a:noFill/>
+          <a:ln/>
+        </p:spPr>
+        <p:txBody>
+          <a:bodyPr wrap="square" lIns="254" tIns="254" rIns="254" bIns="254" rtlCol="0" anchor="t">
+            <a:normAutofit/>
+          </a:bodyPr>
+          <a:lstStyle/>
+          <a:p>
+            <a:pPr indent="0" marL="0">
+              <a:buNone/>
+            </a:pPr>
+            <a:r>
+              <a:rPr lang="en-US" sz="1120" dirty="0">
+                <a:solidFill>
+                  <a:srgbClr val="17364A"/>
+                </a:solidFill>
+                <a:latin typeface="Aptos" pitchFamily="34" charset="0"/>
+                <a:ea typeface="Aptos" pitchFamily="34" charset="-122"/>
+                <a:cs typeface="Aptos" pitchFamily="34" charset="-120"/>
+              </a:rPr>
+              <a:t>The important handoff is not from data to AI; it is from analysis to accountable human review.</a:t>
+            </a:r>
+            <a:endParaRPr lang="en-US" sz="1120" dirty="0"/>
+          </a:p>
+        </p:txBody>
+      </p:sp>
+      <p:sp>
+        <p:nvSpPr>
+          <p:cNvPr id="24" name="Shape 22"/>
+          <p:cNvSpPr/>
+          <p:nvPr/>
+        </p:nvSpPr>
+        <p:spPr>
+          <a:xfrm>
+            <a:off x="7635240" y="4184294"/>
+            <a:ext cx="3474720" cy="1466698"/>
+          </a:xfrm>
+          <a:prstGeom prst="roundRect">
+            <a:avLst>
+              <a:gd name="adj" fmla="val 7481"/>
             </a:avLst>
           </a:prstGeom>
           <a:solidFill>
@@ -14414,13 +14846,13 @@
       </p:sp>
       <p:sp>
         <p:nvSpPr>
-          <p:cNvPr id="17" name="Text 15"/>
-          <p:cNvSpPr/>
-          <p:nvPr/>
-        </p:nvSpPr>
-        <p:spPr>
-          <a:xfrm>
-            <a:off x="7799832" y="4645152"/>
+          <p:cNvPr id="25" name="Text 23"/>
+          <p:cNvSpPr/>
+          <p:nvPr/>
+        </p:nvSpPr>
+        <p:spPr>
+          <a:xfrm>
+            <a:off x="7799832" y="4330598"/>
             <a:ext cx="3145536" cy="256032"/>
           </a:xfrm>
           <a:prstGeom prst="rect">
@@ -14453,14 +14885,14 @@
       </p:sp>
       <p:sp>
         <p:nvSpPr>
-          <p:cNvPr id="18" name="Text 16"/>
-          <p:cNvSpPr/>
-          <p:nvPr/>
-        </p:nvSpPr>
-        <p:spPr>
-          <a:xfrm>
-            <a:off x="7799832" y="4974336"/>
-            <a:ext cx="3145536" cy="576072"/>
+          <p:cNvPr id="26" name="Text 24"/>
+          <p:cNvSpPr/>
+          <p:nvPr/>
+        </p:nvSpPr>
+        <p:spPr>
+          <a:xfrm>
+            <a:off x="7799832" y="4659782"/>
+            <a:ext cx="3145536" cy="899770"/>
           </a:xfrm>
           <a:prstGeom prst="rect">
             <a:avLst/>
@@ -14486,7 +14918,7 @@
                 <a:ea typeface="Aptos" pitchFamily="34" charset="-122"/>
                 <a:cs typeface="Aptos" pitchFamily="34" charset="-120"/>
               </a:rPr>
-              <a:t>Connect the concept to data quality, model performance, validation evidence, monitoring measures, and decisions that.</a:t>
+              <a:t>Connect the concept to data quality, model performance, validation evidence, monitoring measures, and decisions that remain under human control.</a:t>
             </a:r>
             <a:endParaRPr lang="en-US" sz="1320" dirty="0"/>
           </a:p>
@@ -14855,11 +15287,11 @@
         <p:spPr>
           <a:xfrm>
             <a:off x="7635240" y="1325880"/>
-            <a:ext cx="3474720" cy="1325880"/>
+            <a:ext cx="3474720" cy="1255471"/>
           </a:xfrm>
           <a:prstGeom prst="roundRect">
             <a:avLst>
-              <a:gd name="adj" fmla="val 8276"/>
+              <a:gd name="adj" fmla="val 8740"/>
             </a:avLst>
           </a:prstGeom>
           <a:solidFill>
@@ -14921,7 +15353,7 @@
         <p:spPr>
           <a:xfrm>
             <a:off x="7799832" y="1801368"/>
-            <a:ext cx="3145536" cy="758952"/>
+            <a:ext cx="3145536" cy="688543"/>
           </a:xfrm>
           <a:prstGeom prst="rect">
             <a:avLst/>
@@ -14961,12 +15393,12 @@
         </p:nvSpPr>
         <p:spPr>
           <a:xfrm>
-            <a:off x="7635240" y="2788920"/>
-            <a:ext cx="3474720" cy="1536192"/>
+            <a:off x="7635240" y="2718511"/>
+            <a:ext cx="3474720" cy="1328623"/>
           </a:xfrm>
           <a:prstGeom prst="roundRect">
             <a:avLst>
-              <a:gd name="adj" fmla="val 7143"/>
+              <a:gd name="adj" fmla="val 8259"/>
             </a:avLst>
           </a:prstGeom>
           <a:solidFill>
@@ -14988,7 +15420,7 @@
         </p:nvSpPr>
         <p:spPr>
           <a:xfrm>
-            <a:off x="7799832" y="2935224"/>
+            <a:off x="7799832" y="2864815"/>
             <a:ext cx="3145536" cy="256032"/>
           </a:xfrm>
           <a:prstGeom prst="rect">
@@ -15027,8 +15459,8 @@
         </p:nvSpPr>
         <p:spPr>
           <a:xfrm>
-            <a:off x="7818120" y="3300984"/>
-            <a:ext cx="3090672" cy="877824"/>
+            <a:off x="7818120" y="3230575"/>
+            <a:ext cx="3090672" cy="670255"/>
           </a:xfrm>
           <a:prstGeom prst="rect">
             <a:avLst/>
@@ -15085,12 +15517,12 @@
         </p:nvSpPr>
         <p:spPr>
           <a:xfrm>
-            <a:off x="7635240" y="4498848"/>
-            <a:ext cx="3474720" cy="1143000"/>
+            <a:off x="7635240" y="4184294"/>
+            <a:ext cx="3474720" cy="1466698"/>
           </a:xfrm>
           <a:prstGeom prst="roundRect">
             <a:avLst>
-              <a:gd name="adj" fmla="val 9600"/>
+              <a:gd name="adj" fmla="val 7481"/>
             </a:avLst>
           </a:prstGeom>
           <a:solidFill>
@@ -15112,7 +15544,7 @@
         </p:nvSpPr>
         <p:spPr>
           <a:xfrm>
-            <a:off x="7799832" y="4645152"/>
+            <a:off x="7799832" y="4330598"/>
             <a:ext cx="3145536" cy="256032"/>
           </a:xfrm>
           <a:prstGeom prst="rect">
@@ -15151,8 +15583,8 @@
         </p:nvSpPr>
         <p:spPr>
           <a:xfrm>
-            <a:off x="7799832" y="4974336"/>
-            <a:ext cx="3145536" cy="576072"/>
+            <a:off x="7799832" y="4659782"/>
+            <a:ext cx="3145536" cy="899770"/>
           </a:xfrm>
           <a:prstGeom prst="rect">
             <a:avLst/>
@@ -15178,7 +15610,7 @@
                 <a:ea typeface="Aptos" pitchFamily="34" charset="-122"/>
                 <a:cs typeface="Aptos" pitchFamily="34" charset="-120"/>
               </a:rPr>
-              <a:t>Connect the concept to data quality, model performance, validation evidence, monitoring measures, and decisions that.</a:t>
+              <a:t>Connect the concept to data quality, model performance, validation evidence, monitoring measures, and decisions that remain under human control.</a:t>
             </a:r>
             <a:endParaRPr lang="en-US" sz="1320" dirty="0"/>
           </a:p>
@@ -15547,11 +15979,11 @@
         <p:spPr>
           <a:xfrm>
             <a:off x="7635240" y="1325880"/>
-            <a:ext cx="3474720" cy="1325880"/>
+            <a:ext cx="3474720" cy="1207008"/>
           </a:xfrm>
           <a:prstGeom prst="roundRect">
             <a:avLst>
-              <a:gd name="adj" fmla="val 8276"/>
+              <a:gd name="adj" fmla="val 9091"/>
             </a:avLst>
           </a:prstGeom>
           <a:solidFill>
@@ -15613,7 +16045,7 @@
         <p:spPr>
           <a:xfrm>
             <a:off x="7799832" y="1801368"/>
-            <a:ext cx="3145536" cy="758952"/>
+            <a:ext cx="3145536" cy="640080"/>
           </a:xfrm>
           <a:prstGeom prst="rect">
             <a:avLst/>
@@ -15653,12 +16085,12 @@
         </p:nvSpPr>
         <p:spPr>
           <a:xfrm>
-            <a:off x="7635240" y="2788920"/>
-            <a:ext cx="3474720" cy="1536192"/>
+            <a:off x="7635240" y="2670048"/>
+            <a:ext cx="3474720" cy="1377086"/>
           </a:xfrm>
           <a:prstGeom prst="roundRect">
             <a:avLst>
-              <a:gd name="adj" fmla="val 7143"/>
+              <a:gd name="adj" fmla="val 7968"/>
             </a:avLst>
           </a:prstGeom>
           <a:solidFill>
@@ -15680,8 +16112,8 @@
         </p:nvSpPr>
         <p:spPr>
           <a:xfrm>
-            <a:off x="7799832" y="2935224"/>
-            <a:ext cx="3145536" cy="256032"/>
+            <a:off x="7799832" y="2798064"/>
+            <a:ext cx="3145536" cy="237744"/>
           </a:xfrm>
           <a:prstGeom prst="rect">
             <a:avLst/>
@@ -15697,7 +16129,7 @@
               <a:buNone/>
             </a:pPr>
             <a:r>
-              <a:rPr lang="en-US" sz="1300" b="1" dirty="0">
+              <a:rPr lang="en-US" sz="1250" b="1" dirty="0">
                 <a:solidFill>
                   <a:srgbClr val="0068B7"/>
                 </a:solidFill>
@@ -15705,101 +16137,317 @@
                 <a:ea typeface="Aptos" pitchFamily="34" charset="-122"/>
                 <a:cs typeface="Aptos" pitchFamily="34" charset="-120"/>
               </a:rPr>
-              <a:t>Concept checkpoints</a:t>
-            </a:r>
-            <a:endParaRPr lang="en-US" sz="1300" dirty="0"/>
-          </a:p>
-        </p:txBody>
-      </p:sp>
-      <p:sp>
-        <p:nvSpPr>
-          <p:cNvPr id="15" name="Text 13"/>
-          <p:cNvSpPr/>
-          <p:nvPr/>
-        </p:nvSpPr>
-        <p:spPr>
-          <a:xfrm>
-            <a:off x="7818120" y="3300984"/>
-            <a:ext cx="3090672" cy="877824"/>
-          </a:xfrm>
-          <a:prstGeom prst="rect">
-            <a:avLst/>
-          </a:prstGeom>
-          <a:noFill/>
-          <a:ln/>
-        </p:spPr>
-        <p:txBody>
-          <a:bodyPr wrap="square" lIns="508" tIns="508" rIns="508" bIns="508" rtlCol="0" anchor="t">
+              <a:t>Data-to-decision flow</a:t>
+            </a:r>
+            <a:endParaRPr lang="en-US" sz="1250" dirty="0"/>
+          </a:p>
+        </p:txBody>
+      </p:sp>
+      <p:sp>
+        <p:nvSpPr>
+          <p:cNvPr id="15" name="Shape 13"/>
+          <p:cNvSpPr/>
+          <p:nvPr/>
+        </p:nvSpPr>
+        <p:spPr>
+          <a:xfrm>
+            <a:off x="8763000" y="3351276"/>
+            <a:ext cx="164592" cy="0"/>
+          </a:xfrm>
+          <a:prstGeom prst="line">
+            <a:avLst/>
+          </a:prstGeom>
+          <a:noFill/>
+          <a:ln w="15240">
+            <a:solidFill>
+              <a:srgbClr val="8ABBD8"/>
+            </a:solidFill>
+            <a:prstDash val="solid"/>
+          </a:ln>
+        </p:spPr>
+      </p:sp>
+      <p:sp>
+        <p:nvSpPr>
+          <p:cNvPr id="16" name="Shape 14"/>
+          <p:cNvSpPr/>
+          <p:nvPr/>
+        </p:nvSpPr>
+        <p:spPr>
+          <a:xfrm>
+            <a:off x="7872984" y="3200400"/>
+            <a:ext cx="890016" cy="301752"/>
+          </a:xfrm>
+          <a:prstGeom prst="roundRect">
+            <a:avLst>
+              <a:gd name="adj" fmla="val 24242"/>
+            </a:avLst>
+          </a:prstGeom>
+          <a:solidFill>
+            <a:srgbClr val="0068B7"/>
+          </a:solidFill>
+          <a:ln w="12700">
+            <a:solidFill>
+              <a:srgbClr val="0068B7"/>
+            </a:solidFill>
+            <a:prstDash val="solid"/>
+          </a:ln>
+        </p:spPr>
+      </p:sp>
+      <p:sp>
+        <p:nvSpPr>
+          <p:cNvPr id="17" name="Text 15"/>
+          <p:cNvSpPr/>
+          <p:nvPr/>
+        </p:nvSpPr>
+        <p:spPr>
+          <a:xfrm>
+            <a:off x="7909560" y="3273552"/>
+            <a:ext cx="816864" cy="146304"/>
+          </a:xfrm>
+          <a:prstGeom prst="rect">
+            <a:avLst/>
+          </a:prstGeom>
+          <a:noFill/>
+          <a:ln/>
+        </p:spPr>
+        <p:txBody>
+          <a:bodyPr wrap="square" lIns="0" tIns="0" rIns="0" bIns="0" rtlCol="0" anchor="ctr">
             <a:normAutofit/>
           </a:bodyPr>
           <a:lstStyle/>
           <a:p>
-            <a:pPr indent="0" marL="0">
-              <a:buNone/>
-            </a:pPr>
-            <a:r>
-              <a:rPr lang="en-US" sz="1220" dirty="0">
-                <a:solidFill>
-                  <a:srgbClr val="17364A"/>
-                </a:solidFill>
-                <a:latin typeface="Aptos" pitchFamily="34" charset="0"/>
-                <a:ea typeface="Aptos" pitchFamily="34" charset="-122"/>
-                <a:cs typeface="Aptos" pitchFamily="34" charset="-120"/>
-              </a:rPr>
-              <a:t>A forecast may affect staffing, a risk score may affect outreach,.</a:t>
-            </a:r>
-            <a:endParaRPr lang="en-US" sz="1220" dirty="0"/>
-          </a:p>
-          <a:p>
-            <a:pPr indent="0" marL="0">
-              <a:buNone/>
-            </a:pPr>
-            <a:r>
-              <a:rPr lang="en-US" sz="1220" dirty="0">
-                <a:solidFill>
-                  <a:srgbClr val="17364A"/>
-                </a:solidFill>
-                <a:latin typeface="Aptos" pitchFamily="34" charset="0"/>
-                <a:ea typeface="Aptos" pitchFamily="34" charset="-122"/>
-                <a:cs typeface="Aptos" pitchFamily="34" charset="-120"/>
-              </a:rPr>
-              <a:t>If uncertainty is not explained clearly, decision-makers may treat.</a:t>
-            </a:r>
-            <a:endParaRPr lang="en-US" sz="1220" dirty="0"/>
-          </a:p>
-          <a:p>
-            <a:pPr indent="0" marL="0">
-              <a:buNone/>
-            </a:pPr>
-            <a:r>
-              <a:rPr lang="en-US" sz="1220" dirty="0">
-                <a:solidFill>
-                  <a:srgbClr val="17364A"/>
-                </a:solidFill>
-                <a:latin typeface="Aptos" pitchFamily="34" charset="0"/>
-                <a:ea typeface="Aptos" pitchFamily="34" charset="-122"/>
-                <a:cs typeface="Aptos" pitchFamily="34" charset="-120"/>
-              </a:rPr>
-              <a:t>Public health communication must balance clarity and caution.</a:t>
-            </a:r>
-            <a:endParaRPr lang="en-US" sz="1220" dirty="0"/>
-          </a:p>
-        </p:txBody>
-      </p:sp>
-      <p:sp>
-        <p:nvSpPr>
-          <p:cNvPr id="16" name="Shape 14"/>
-          <p:cNvSpPr/>
-          <p:nvPr/>
-        </p:nvSpPr>
-        <p:spPr>
-          <a:xfrm>
-            <a:off x="7635240" y="4498848"/>
-            <a:ext cx="3474720" cy="1143000"/>
+            <a:pPr algn="ctr" indent="0" marL="0">
+              <a:buNone/>
+            </a:pPr>
+            <a:r>
+              <a:rPr lang="en-US" sz="880" b="1" dirty="0">
+                <a:solidFill>
+                  <a:srgbClr val="FFFFFF"/>
+                </a:solidFill>
+                <a:latin typeface="Aptos" pitchFamily="34" charset="0"/>
+                <a:ea typeface="Aptos" pitchFamily="34" charset="-122"/>
+                <a:cs typeface="Aptos" pitchFamily="34" charset="-120"/>
+              </a:rPr>
+              <a:t>Data</a:t>
+            </a:r>
+            <a:endParaRPr lang="en-US" sz="880" dirty="0"/>
+          </a:p>
+        </p:txBody>
+      </p:sp>
+      <p:sp>
+        <p:nvSpPr>
+          <p:cNvPr id="18" name="Shape 16"/>
+          <p:cNvSpPr/>
+          <p:nvPr/>
+        </p:nvSpPr>
+        <p:spPr>
+          <a:xfrm>
+            <a:off x="9817608" y="3351276"/>
+            <a:ext cx="164592" cy="0"/>
+          </a:xfrm>
+          <a:prstGeom prst="line">
+            <a:avLst/>
+          </a:prstGeom>
+          <a:noFill/>
+          <a:ln w="15240">
+            <a:solidFill>
+              <a:srgbClr val="8ABBD8"/>
+            </a:solidFill>
+            <a:prstDash val="solid"/>
+          </a:ln>
+        </p:spPr>
+      </p:sp>
+      <p:sp>
+        <p:nvSpPr>
+          <p:cNvPr id="19" name="Shape 17"/>
+          <p:cNvSpPr/>
+          <p:nvPr/>
+        </p:nvSpPr>
+        <p:spPr>
+          <a:xfrm>
+            <a:off x="8927592" y="3200400"/>
+            <a:ext cx="890016" cy="301752"/>
           </a:xfrm>
           <a:prstGeom prst="roundRect">
             <a:avLst>
-              <a:gd name="adj" fmla="val 9600"/>
+              <a:gd name="adj" fmla="val 24242"/>
+            </a:avLst>
+          </a:prstGeom>
+          <a:solidFill>
+            <a:srgbClr val="2F8A28"/>
+          </a:solidFill>
+          <a:ln w="12700">
+            <a:solidFill>
+              <a:srgbClr val="2F8A28"/>
+            </a:solidFill>
+            <a:prstDash val="solid"/>
+          </a:ln>
+        </p:spPr>
+      </p:sp>
+      <p:sp>
+        <p:nvSpPr>
+          <p:cNvPr id="20" name="Text 18"/>
+          <p:cNvSpPr/>
+          <p:nvPr/>
+        </p:nvSpPr>
+        <p:spPr>
+          <a:xfrm>
+            <a:off x="8964168" y="3273552"/>
+            <a:ext cx="816864" cy="146304"/>
+          </a:xfrm>
+          <a:prstGeom prst="rect">
+            <a:avLst/>
+          </a:prstGeom>
+          <a:noFill/>
+          <a:ln/>
+        </p:spPr>
+        <p:txBody>
+          <a:bodyPr wrap="square" lIns="0" tIns="0" rIns="0" bIns="0" rtlCol="0" anchor="ctr">
+            <a:normAutofit/>
+          </a:bodyPr>
+          <a:lstStyle/>
+          <a:p>
+            <a:pPr algn="ctr" indent="0" marL="0">
+              <a:buNone/>
+            </a:pPr>
+            <a:r>
+              <a:rPr lang="en-US" sz="880" b="1" dirty="0">
+                <a:solidFill>
+                  <a:srgbClr val="FFFFFF"/>
+                </a:solidFill>
+                <a:latin typeface="Aptos" pitchFamily="34" charset="0"/>
+                <a:ea typeface="Aptos" pitchFamily="34" charset="-122"/>
+                <a:cs typeface="Aptos" pitchFamily="34" charset="-120"/>
+              </a:rPr>
+              <a:t>Analysis</a:t>
+            </a:r>
+            <a:endParaRPr lang="en-US" sz="880" dirty="0"/>
+          </a:p>
+        </p:txBody>
+      </p:sp>
+      <p:sp>
+        <p:nvSpPr>
+          <p:cNvPr id="21" name="Shape 19"/>
+          <p:cNvSpPr/>
+          <p:nvPr/>
+        </p:nvSpPr>
+        <p:spPr>
+          <a:xfrm>
+            <a:off x="9982200" y="3200400"/>
+            <a:ext cx="890016" cy="301752"/>
+          </a:xfrm>
+          <a:prstGeom prst="roundRect">
+            <a:avLst>
+              <a:gd name="adj" fmla="val 24242"/>
+            </a:avLst>
+          </a:prstGeom>
+          <a:solidFill>
+            <a:srgbClr val="6A4CA3"/>
+          </a:solidFill>
+          <a:ln w="12700">
+            <a:solidFill>
+              <a:srgbClr val="6A4CA3"/>
+            </a:solidFill>
+            <a:prstDash val="solid"/>
+          </a:ln>
+        </p:spPr>
+      </p:sp>
+      <p:sp>
+        <p:nvSpPr>
+          <p:cNvPr id="22" name="Text 20"/>
+          <p:cNvSpPr/>
+          <p:nvPr/>
+        </p:nvSpPr>
+        <p:spPr>
+          <a:xfrm>
+            <a:off x="10018776" y="3273552"/>
+            <a:ext cx="816864" cy="146304"/>
+          </a:xfrm>
+          <a:prstGeom prst="rect">
+            <a:avLst/>
+          </a:prstGeom>
+          <a:noFill/>
+          <a:ln/>
+        </p:spPr>
+        <p:txBody>
+          <a:bodyPr wrap="square" lIns="0" tIns="0" rIns="0" bIns="0" rtlCol="0" anchor="ctr">
+            <a:normAutofit/>
+          </a:bodyPr>
+          <a:lstStyle/>
+          <a:p>
+            <a:pPr algn="ctr" indent="0" marL="0">
+              <a:buNone/>
+            </a:pPr>
+            <a:r>
+              <a:rPr lang="en-US" sz="880" b="1" dirty="0">
+                <a:solidFill>
+                  <a:srgbClr val="FFFFFF"/>
+                </a:solidFill>
+                <a:latin typeface="Aptos" pitchFamily="34" charset="0"/>
+                <a:ea typeface="Aptos" pitchFamily="34" charset="-122"/>
+                <a:cs typeface="Aptos" pitchFamily="34" charset="-120"/>
+              </a:rPr>
+              <a:t>Review</a:t>
+            </a:r>
+            <a:endParaRPr lang="en-US" sz="880" dirty="0"/>
+          </a:p>
+        </p:txBody>
+      </p:sp>
+      <p:sp>
+        <p:nvSpPr>
+          <p:cNvPr id="23" name="Text 21"/>
+          <p:cNvSpPr/>
+          <p:nvPr/>
+        </p:nvSpPr>
+        <p:spPr>
+          <a:xfrm>
+            <a:off x="7854696" y="3694176"/>
+            <a:ext cx="3035808" cy="206654"/>
+          </a:xfrm>
+          <a:prstGeom prst="rect">
+            <a:avLst/>
+          </a:prstGeom>
+          <a:noFill/>
+          <a:ln/>
+        </p:spPr>
+        <p:txBody>
+          <a:bodyPr wrap="square" lIns="254" tIns="254" rIns="254" bIns="254" rtlCol="0" anchor="t">
+            <a:normAutofit/>
+          </a:bodyPr>
+          <a:lstStyle/>
+          <a:p>
+            <a:pPr indent="0" marL="0">
+              <a:buNone/>
+            </a:pPr>
+            <a:r>
+              <a:rPr lang="en-US" sz="1120" dirty="0">
+                <a:solidFill>
+                  <a:srgbClr val="17364A"/>
+                </a:solidFill>
+                <a:latin typeface="Aptos" pitchFamily="34" charset="0"/>
+                <a:ea typeface="Aptos" pitchFamily="34" charset="-122"/>
+                <a:cs typeface="Aptos" pitchFamily="34" charset="-120"/>
+              </a:rPr>
+              <a:t>The important handoff is not from data to AI; it is from analysis to accountable human review.</a:t>
+            </a:r>
+            <a:endParaRPr lang="en-US" sz="1120" dirty="0"/>
+          </a:p>
+        </p:txBody>
+      </p:sp>
+      <p:sp>
+        <p:nvSpPr>
+          <p:cNvPr id="24" name="Shape 22"/>
+          <p:cNvSpPr/>
+          <p:nvPr/>
+        </p:nvSpPr>
+        <p:spPr>
+          <a:xfrm>
+            <a:off x="7635240" y="4184294"/>
+            <a:ext cx="3474720" cy="1466698"/>
+          </a:xfrm>
+          <a:prstGeom prst="roundRect">
+            <a:avLst>
+              <a:gd name="adj" fmla="val 7481"/>
             </a:avLst>
           </a:prstGeom>
           <a:solidFill>
@@ -15815,13 +16463,13 @@
       </p:sp>
       <p:sp>
         <p:nvSpPr>
-          <p:cNvPr id="17" name="Text 15"/>
-          <p:cNvSpPr/>
-          <p:nvPr/>
-        </p:nvSpPr>
-        <p:spPr>
-          <a:xfrm>
-            <a:off x="7799832" y="4645152"/>
+          <p:cNvPr id="25" name="Text 23"/>
+          <p:cNvSpPr/>
+          <p:nvPr/>
+        </p:nvSpPr>
+        <p:spPr>
+          <a:xfrm>
+            <a:off x="7799832" y="4330598"/>
             <a:ext cx="3145536" cy="256032"/>
           </a:xfrm>
           <a:prstGeom prst="rect">
@@ -15854,14 +16502,14 @@
       </p:sp>
       <p:sp>
         <p:nvSpPr>
-          <p:cNvPr id="18" name="Text 16"/>
-          <p:cNvSpPr/>
-          <p:nvPr/>
-        </p:nvSpPr>
-        <p:spPr>
-          <a:xfrm>
-            <a:off x="7799832" y="4974336"/>
-            <a:ext cx="3145536" cy="576072"/>
+          <p:cNvPr id="26" name="Text 24"/>
+          <p:cNvSpPr/>
+          <p:nvPr/>
+        </p:nvSpPr>
+        <p:spPr>
+          <a:xfrm>
+            <a:off x="7799832" y="4659782"/>
+            <a:ext cx="3145536" cy="899770"/>
           </a:xfrm>
           <a:prstGeom prst="rect">
             <a:avLst/>
@@ -15887,7 +16535,7 @@
                 <a:ea typeface="Aptos" pitchFamily="34" charset="-122"/>
                 <a:cs typeface="Aptos" pitchFamily="34" charset="-120"/>
               </a:rPr>
-              <a:t>Connect the concept to data quality, model performance, validation evidence, monitoring measures, and decisions that.</a:t>
+              <a:t>Connect the concept to data quality, model performance, validation evidence, monitoring measures, and decisions that remain under human control.</a:t>
             </a:r>
             <a:endParaRPr lang="en-US" sz="1320" dirty="0"/>
           </a:p>
@@ -16256,11 +16904,11 @@
         <p:spPr>
           <a:xfrm>
             <a:off x="7635240" y="1325880"/>
-            <a:ext cx="3474720" cy="1325880"/>
+            <a:ext cx="3474720" cy="1255471"/>
           </a:xfrm>
           <a:prstGeom prst="roundRect">
             <a:avLst>
-              <a:gd name="adj" fmla="val 8276"/>
+              <a:gd name="adj" fmla="val 8740"/>
             </a:avLst>
           </a:prstGeom>
           <a:solidFill>
@@ -16322,7 +16970,7 @@
         <p:spPr>
           <a:xfrm>
             <a:off x="7799832" y="1801368"/>
-            <a:ext cx="3145536" cy="758952"/>
+            <a:ext cx="3145536" cy="688543"/>
           </a:xfrm>
           <a:prstGeom prst="rect">
             <a:avLst/>
@@ -16362,12 +17010,12 @@
         </p:nvSpPr>
         <p:spPr>
           <a:xfrm>
-            <a:off x="7635240" y="2788920"/>
-            <a:ext cx="3474720" cy="1536192"/>
+            <a:off x="7635240" y="2718511"/>
+            <a:ext cx="3474720" cy="1328623"/>
           </a:xfrm>
           <a:prstGeom prst="roundRect">
             <a:avLst>
-              <a:gd name="adj" fmla="val 7143"/>
+              <a:gd name="adj" fmla="val 8259"/>
             </a:avLst>
           </a:prstGeom>
           <a:solidFill>
@@ -16389,7 +17037,7 @@
         </p:nvSpPr>
         <p:spPr>
           <a:xfrm>
-            <a:off x="7799832" y="2935224"/>
+            <a:off x="7799832" y="2864815"/>
             <a:ext cx="3145536" cy="256032"/>
           </a:xfrm>
           <a:prstGeom prst="rect">
@@ -16428,8 +17076,8 @@
         </p:nvSpPr>
         <p:spPr>
           <a:xfrm>
-            <a:off x="7818120" y="3300984"/>
-            <a:ext cx="3090672" cy="877824"/>
+            <a:off x="7818120" y="3230575"/>
+            <a:ext cx="3090672" cy="670255"/>
           </a:xfrm>
           <a:prstGeom prst="rect">
             <a:avLst/>
@@ -16503,12 +17151,12 @@
         </p:nvSpPr>
         <p:spPr>
           <a:xfrm>
-            <a:off x="7635240" y="4498848"/>
-            <a:ext cx="3474720" cy="1143000"/>
+            <a:off x="7635240" y="4184294"/>
+            <a:ext cx="3474720" cy="1466698"/>
           </a:xfrm>
           <a:prstGeom prst="roundRect">
             <a:avLst>
-              <a:gd name="adj" fmla="val 9600"/>
+              <a:gd name="adj" fmla="val 7481"/>
             </a:avLst>
           </a:prstGeom>
           <a:solidFill>
@@ -16530,7 +17178,7 @@
         </p:nvSpPr>
         <p:spPr>
           <a:xfrm>
-            <a:off x="7799832" y="4645152"/>
+            <a:off x="7799832" y="4330598"/>
             <a:ext cx="3145536" cy="256032"/>
           </a:xfrm>
           <a:prstGeom prst="rect">
@@ -16569,8 +17217,8 @@
         </p:nvSpPr>
         <p:spPr>
           <a:xfrm>
-            <a:off x="7799832" y="4974336"/>
-            <a:ext cx="3145536" cy="576072"/>
+            <a:off x="7799832" y="4659782"/>
+            <a:ext cx="3145536" cy="899770"/>
           </a:xfrm>
           <a:prstGeom prst="rect">
             <a:avLst/>
@@ -16596,7 +17244,7 @@
                 <a:ea typeface="Aptos" pitchFamily="34" charset="-122"/>
                 <a:cs typeface="Aptos" pitchFamily="34" charset="-120"/>
               </a:rPr>
-              <a:t>Connect the concept to data quality, model performance, validation evidence, monitoring measures, and decisions that.</a:t>
+              <a:t>Connect the concept to data quality, model performance, validation evidence, monitoring measures, and decisions that remain under human control.</a:t>
             </a:r>
             <a:endParaRPr lang="en-US" sz="1320" dirty="0"/>
           </a:p>

--- a/downloads/presentations/modules/anl-350.pptx
+++ b/downloads/presentations/modules/anl-350.pptx
@@ -3251,8 +3251,8 @@
         </p:nvSpPr>
         <p:spPr>
           <a:xfrm>
-            <a:off x="868680" y="1508760"/>
-            <a:ext cx="6309360" cy="4160520"/>
+            <a:off x="822960" y="1463040"/>
+            <a:ext cx="6565392" cy="4343400"/>
           </a:xfrm>
           <a:prstGeom prst="rect">
             <a:avLst/>
@@ -3270,7 +3270,7 @@
               <a:buNone/>
             </a:pPr>
             <a:r>
-              <a:rPr lang="en-US" sz="2100" dirty="0">
+              <a:rPr lang="en-US" sz="1920" dirty="0">
                 <a:solidFill>
                   <a:srgbClr val="003A63"/>
                 </a:solidFill>
@@ -3280,14 +3280,14 @@
               </a:rPr>
               <a:t>• Model communication begins with the decision context.</a:t>
             </a:r>
-            <a:endParaRPr lang="en-US" sz="2100" dirty="0"/>
-          </a:p>
-          <a:p>
-            <a:pPr indent="0" marL="0">
-              <a:buNone/>
-            </a:pPr>
-            <a:r>
-              <a:rPr lang="en-US" sz="2100" dirty="0">
+            <a:endParaRPr lang="en-US" sz="1920" dirty="0"/>
+          </a:p>
+          <a:p>
+            <a:pPr indent="0" marL="0">
+              <a:buNone/>
+            </a:pPr>
+            <a:r>
+              <a:rPr lang="en-US" sz="1920" dirty="0">
                 <a:solidFill>
                   <a:srgbClr val="003A63"/>
                 </a:solidFill>
@@ -3295,16 +3295,16 @@
                 <a:ea typeface="Aptos" pitchFamily="34" charset="-122"/>
                 <a:cs typeface="Aptos" pitchFamily="34" charset="-120"/>
               </a:rPr>
-              <a:t>• The same model output may be communicated differently to a technical team, health officer,.</a:t>
-            </a:r>
-            <a:endParaRPr lang="en-US" sz="2100" dirty="0"/>
-          </a:p>
-          <a:p>
-            <a:pPr indent="0" marL="0">
-              <a:buNone/>
-            </a:pPr>
-            <a:r>
-              <a:rPr lang="en-US" sz="2100" dirty="0">
+              <a:t>• The same model output may be communicated differently to a technical team,.</a:t>
+            </a:r>
+            <a:endParaRPr lang="en-US" sz="1920" dirty="0"/>
+          </a:p>
+          <a:p>
+            <a:pPr indent="0" marL="0">
+              <a:buNone/>
+            </a:pPr>
+            <a:r>
+              <a:rPr lang="en-US" sz="1920" dirty="0">
                 <a:solidFill>
                   <a:srgbClr val="003A63"/>
                 </a:solidFill>
@@ -3312,9 +3312,9 @@
                 <a:ea typeface="Aptos" pitchFamily="34" charset="-122"/>
                 <a:cs typeface="Aptos" pitchFamily="34" charset="-120"/>
               </a:rPr>
-              <a:t>• Technical users may need details about metrics and data limitations, while executives may need.</a:t>
-            </a:r>
-            <a:endParaRPr lang="en-US" sz="2100" dirty="0"/>
+              <a:t>• Technical users may need details about metrics and data limitations, while.</a:t>
+            </a:r>
+            <a:endParaRPr lang="en-US" sz="1920" dirty="0"/>
           </a:p>
         </p:txBody>
       </p:sp>
@@ -3326,12 +3326,12 @@
         </p:nvSpPr>
         <p:spPr>
           <a:xfrm>
-            <a:off x="7635240" y="1325880"/>
-            <a:ext cx="3474720" cy="1207008"/>
+            <a:off x="7543800" y="1325880"/>
+            <a:ext cx="3611880" cy="1261872"/>
           </a:xfrm>
           <a:prstGeom prst="roundRect">
             <a:avLst>
-              <a:gd name="adj" fmla="val 9091"/>
+              <a:gd name="adj" fmla="val 8696"/>
             </a:avLst>
           </a:prstGeom>
           <a:solidFill>
@@ -3353,8 +3353,8 @@
         </p:nvSpPr>
         <p:spPr>
           <a:xfrm>
-            <a:off x="7799832" y="1472184"/>
-            <a:ext cx="3145536" cy="256032"/>
+            <a:off x="7708392" y="1453896"/>
+            <a:ext cx="3282696" cy="228600"/>
           </a:xfrm>
           <a:prstGeom prst="rect">
             <a:avLst/>
@@ -3370,7 +3370,7 @@
               <a:buNone/>
             </a:pPr>
             <a:r>
-              <a:rPr lang="en-US" sz="1300" b="1" dirty="0">
+              <a:rPr lang="en-US" sz="1220" b="1" dirty="0">
                 <a:solidFill>
                   <a:srgbClr val="0068B7"/>
                 </a:solidFill>
@@ -3380,7 +3380,7 @@
               </a:rPr>
               <a:t>Data decision</a:t>
             </a:r>
-            <a:endParaRPr lang="en-US" sz="1300" dirty="0"/>
+            <a:endParaRPr lang="en-US" sz="1220" dirty="0"/>
           </a:p>
         </p:txBody>
       </p:sp>
@@ -3392,8 +3392,8 @@
         </p:nvSpPr>
         <p:spPr>
           <a:xfrm>
-            <a:off x="7799832" y="1801368"/>
-            <a:ext cx="3145536" cy="640080"/>
+            <a:off x="7708392" y="1764792"/>
+            <a:ext cx="3282696" cy="749808"/>
           </a:xfrm>
           <a:prstGeom prst="rect">
             <a:avLst/>
@@ -3411,7 +3411,7 @@
               <a:buNone/>
             </a:pPr>
             <a:r>
-              <a:rPr lang="en-US" sz="1320" dirty="0">
+              <a:rPr lang="en-US" sz="1220" dirty="0">
                 <a:solidFill>
                   <a:srgbClr val="17364A"/>
                 </a:solidFill>
@@ -3421,7 +3421,7 @@
               </a:rPr>
               <a:t>Model communication begins with the decision context.</a:t>
             </a:r>
-            <a:endParaRPr lang="en-US" sz="1320" dirty="0"/>
+            <a:endParaRPr lang="en-US" sz="1220" dirty="0"/>
           </a:p>
         </p:txBody>
       </p:sp>
@@ -3433,12 +3433,12 @@
         </p:nvSpPr>
         <p:spPr>
           <a:xfrm>
-            <a:off x="7635240" y="2670048"/>
-            <a:ext cx="3474720" cy="1377086"/>
+            <a:off x="7543800" y="2724912"/>
+            <a:ext cx="3611880" cy="1527048"/>
           </a:xfrm>
           <a:prstGeom prst="roundRect">
             <a:avLst>
-              <a:gd name="adj" fmla="val 7968"/>
+              <a:gd name="adj" fmla="val 7186"/>
             </a:avLst>
           </a:prstGeom>
           <a:solidFill>
@@ -3460,24 +3460,26 @@
         </p:nvSpPr>
         <p:spPr>
           <a:xfrm>
-            <a:off x="7799832" y="2798064"/>
-            <a:ext cx="3145536" cy="237744"/>
-          </a:xfrm>
-          <a:prstGeom prst="rect">
-            <a:avLst/>
-          </a:prstGeom>
-          <a:noFill/>
-          <a:ln/>
-        </p:spPr>
-        <p:txBody>
-          <a:bodyPr wrap="square" lIns="0" tIns="0" rIns="0" bIns="0" rtlCol="0" anchor="ctr"/>
-          <a:lstStyle/>
-          <a:p>
-            <a:pPr indent="0" marL="0">
-              <a:buNone/>
-            </a:pPr>
-            <a:r>
-              <a:rPr lang="en-US" sz="1250" b="1" dirty="0">
+            <a:off x="7708392" y="2852928"/>
+            <a:ext cx="3282696" cy="219456"/>
+          </a:xfrm>
+          <a:prstGeom prst="rect">
+            <a:avLst/>
+          </a:prstGeom>
+          <a:noFill/>
+          <a:ln/>
+        </p:spPr>
+        <p:txBody>
+          <a:bodyPr wrap="square" lIns="0" tIns="0" rIns="0" bIns="0" rtlCol="0" anchor="ctr">
+            <a:normAutofit/>
+          </a:bodyPr>
+          <a:lstStyle/>
+          <a:p>
+            <a:pPr indent="0" marL="0">
+              <a:buNone/>
+            </a:pPr>
+            <a:r>
+              <a:rPr lang="en-US" sz="1160" b="1" dirty="0">
                 <a:solidFill>
                   <a:srgbClr val="0068B7"/>
                 </a:solidFill>
@@ -3487,7 +3489,7 @@
               </a:rPr>
               <a:t>Data-to-decision flow</a:t>
             </a:r>
-            <a:endParaRPr lang="en-US" sz="1250" dirty="0"/>
+            <a:endParaRPr lang="en-US" sz="1160" dirty="0"/>
           </a:p>
         </p:txBody>
       </p:sp>
@@ -3499,7 +3501,7 @@
         </p:nvSpPr>
         <p:spPr>
           <a:xfrm>
-            <a:off x="8763000" y="3351276"/>
+            <a:off x="8717280" y="3406140"/>
             <a:ext cx="164592" cy="0"/>
           </a:xfrm>
           <a:prstGeom prst="line">
@@ -3522,8 +3524,8 @@
         </p:nvSpPr>
         <p:spPr>
           <a:xfrm>
-            <a:off x="7872984" y="3200400"/>
-            <a:ext cx="890016" cy="301752"/>
+            <a:off x="7781544" y="3255264"/>
+            <a:ext cx="935736" cy="301752"/>
           </a:xfrm>
           <a:prstGeom prst="roundRect">
             <a:avLst>
@@ -3549,8 +3551,8 @@
         </p:nvSpPr>
         <p:spPr>
           <a:xfrm>
-            <a:off x="7909560" y="3273552"/>
-            <a:ext cx="816864" cy="146304"/>
+            <a:off x="7818120" y="3328416"/>
+            <a:ext cx="862584" cy="146304"/>
           </a:xfrm>
           <a:prstGeom prst="rect">
             <a:avLst/>
@@ -3590,7 +3592,7 @@
         </p:nvSpPr>
         <p:spPr>
           <a:xfrm>
-            <a:off x="9817608" y="3351276"/>
+            <a:off x="9817608" y="3406140"/>
             <a:ext cx="164592" cy="0"/>
           </a:xfrm>
           <a:prstGeom prst="line">
@@ -3613,8 +3615,8 @@
         </p:nvSpPr>
         <p:spPr>
           <a:xfrm>
-            <a:off x="8927592" y="3200400"/>
-            <a:ext cx="890016" cy="301752"/>
+            <a:off x="8881872" y="3255264"/>
+            <a:ext cx="935736" cy="301752"/>
           </a:xfrm>
           <a:prstGeom prst="roundRect">
             <a:avLst>
@@ -3640,8 +3642,8 @@
         </p:nvSpPr>
         <p:spPr>
           <a:xfrm>
-            <a:off x="8964168" y="3273552"/>
-            <a:ext cx="816864" cy="146304"/>
+            <a:off x="8918448" y="3328416"/>
+            <a:ext cx="862584" cy="146304"/>
           </a:xfrm>
           <a:prstGeom prst="rect">
             <a:avLst/>
@@ -3681,8 +3683,8 @@
         </p:nvSpPr>
         <p:spPr>
           <a:xfrm>
-            <a:off x="9982200" y="3200400"/>
-            <a:ext cx="890016" cy="301752"/>
+            <a:off x="9982200" y="3255264"/>
+            <a:ext cx="935736" cy="301752"/>
           </a:xfrm>
           <a:prstGeom prst="roundRect">
             <a:avLst>
@@ -3708,8 +3710,8 @@
         </p:nvSpPr>
         <p:spPr>
           <a:xfrm>
-            <a:off x="10018776" y="3273552"/>
-            <a:ext cx="816864" cy="146304"/>
+            <a:off x="10018776" y="3328416"/>
+            <a:ext cx="862584" cy="146304"/>
           </a:xfrm>
           <a:prstGeom prst="rect">
             <a:avLst/>
@@ -3749,8 +3751,8 @@
         </p:nvSpPr>
         <p:spPr>
           <a:xfrm>
-            <a:off x="7854696" y="3694176"/>
-            <a:ext cx="3035808" cy="206654"/>
+            <a:off x="7763256" y="3749040"/>
+            <a:ext cx="3172968" cy="356616"/>
           </a:xfrm>
           <a:prstGeom prst="rect">
             <a:avLst/>
@@ -3768,7 +3770,7 @@
               <a:buNone/>
             </a:pPr>
             <a:r>
-              <a:rPr lang="en-US" sz="1120" dirty="0">
+              <a:rPr lang="en-US" sz="1040" dirty="0">
                 <a:solidFill>
                   <a:srgbClr val="17364A"/>
                 </a:solidFill>
@@ -3776,9 +3778,9 @@
                 <a:ea typeface="Aptos" pitchFamily="34" charset="-122"/>
                 <a:cs typeface="Aptos" pitchFamily="34" charset="-120"/>
               </a:rPr>
-              <a:t>The important handoff is not from data to AI; it is from analysis to accountable human review.</a:t>
-            </a:r>
-            <a:endParaRPr lang="en-US" sz="1120" dirty="0"/>
+              <a:t>The important handoff is not from data to AI; it is from analysis to.</a:t>
+            </a:r>
+            <a:endParaRPr lang="en-US" sz="1040" dirty="0"/>
           </a:p>
         </p:txBody>
       </p:sp>
@@ -3790,12 +3792,12 @@
         </p:nvSpPr>
         <p:spPr>
           <a:xfrm>
-            <a:off x="7635240" y="4184294"/>
-            <a:ext cx="3474720" cy="1466698"/>
+            <a:off x="7543800" y="4389120"/>
+            <a:ext cx="3611880" cy="1261872"/>
           </a:xfrm>
           <a:prstGeom prst="roundRect">
             <a:avLst>
-              <a:gd name="adj" fmla="val 7481"/>
+              <a:gd name="adj" fmla="val 8696"/>
             </a:avLst>
           </a:prstGeom>
           <a:solidFill>
@@ -3817,8 +3819,8 @@
         </p:nvSpPr>
         <p:spPr>
           <a:xfrm>
-            <a:off x="7799832" y="4330598"/>
-            <a:ext cx="3145536" cy="256032"/>
+            <a:off x="7708392" y="4517136"/>
+            <a:ext cx="3282696" cy="228600"/>
           </a:xfrm>
           <a:prstGeom prst="rect">
             <a:avLst/>
@@ -3834,7 +3836,7 @@
               <a:buNone/>
             </a:pPr>
             <a:r>
-              <a:rPr lang="en-US" sz="1300" b="1" dirty="0">
+              <a:rPr lang="en-US" sz="1220" b="1" dirty="0">
                 <a:solidFill>
                   <a:srgbClr val="0068B7"/>
                 </a:solidFill>
@@ -3844,7 +3846,7 @@
               </a:rPr>
               <a:t>How to validate</a:t>
             </a:r>
-            <a:endParaRPr lang="en-US" sz="1300" dirty="0"/>
+            <a:endParaRPr lang="en-US" sz="1220" dirty="0"/>
           </a:p>
         </p:txBody>
       </p:sp>
@@ -3856,8 +3858,8 @@
         </p:nvSpPr>
         <p:spPr>
           <a:xfrm>
-            <a:off x="7799832" y="4659782"/>
-            <a:ext cx="3145536" cy="899770"/>
+            <a:off x="7708392" y="4828032"/>
+            <a:ext cx="3282696" cy="749808"/>
           </a:xfrm>
           <a:prstGeom prst="rect">
             <a:avLst/>
@@ -3875,7 +3877,7 @@
               <a:buNone/>
             </a:pPr>
             <a:r>
-              <a:rPr lang="en-US" sz="1320" dirty="0">
+              <a:rPr lang="en-US" sz="1220" dirty="0">
                 <a:solidFill>
                   <a:srgbClr val="17364A"/>
                 </a:solidFill>
@@ -3883,9 +3885,9 @@
                 <a:ea typeface="Aptos" pitchFamily="34" charset="-122"/>
                 <a:cs typeface="Aptos" pitchFamily="34" charset="-120"/>
               </a:rPr>
-              <a:t>Connect the concept to data quality, model performance, validation evidence, monitoring measures, and decisions that remain under human control.</a:t>
-            </a:r>
-            <a:endParaRPr lang="en-US" sz="1320" dirty="0"/>
+              <a:t>Connect the concept to data quality, model performance, validation evidence,.</a:t>
+            </a:r>
+            <a:endParaRPr lang="en-US" sz="1220" dirty="0"/>
           </a:p>
         </p:txBody>
       </p:sp>
@@ -4176,8 +4178,8 @@
         </p:nvSpPr>
         <p:spPr>
           <a:xfrm>
-            <a:off x="868680" y="1508760"/>
-            <a:ext cx="6309360" cy="4160520"/>
+            <a:off x="822960" y="1463040"/>
+            <a:ext cx="6565392" cy="4343400"/>
           </a:xfrm>
           <a:prstGeom prst="rect">
             <a:avLst/>
@@ -4195,7 +4197,7 @@
               <a:buNone/>
             </a:pPr>
             <a:r>
-              <a:rPr lang="en-US" sz="2100" dirty="0">
+              <a:rPr lang="en-US" sz="1920" dirty="0">
                 <a:solidFill>
                   <a:srgbClr val="003A63"/>
                 </a:solidFill>
@@ -4205,14 +4207,14 @@
               </a:rPr>
               <a:t>• A major failure mode is false precision.</a:t>
             </a:r>
-            <a:endParaRPr lang="en-US" sz="2100" dirty="0"/>
-          </a:p>
-          <a:p>
-            <a:pPr indent="0" marL="0">
-              <a:buNone/>
-            </a:pPr>
-            <a:r>
-              <a:rPr lang="en-US" sz="2100" dirty="0">
+            <a:endParaRPr lang="en-US" sz="1920" dirty="0"/>
+          </a:p>
+          <a:p>
+            <a:pPr indent="0" marL="0">
+              <a:buNone/>
+            </a:pPr>
+            <a:r>
+              <a:rPr lang="en-US" sz="1920" dirty="0">
                 <a:solidFill>
                   <a:srgbClr val="003A63"/>
                 </a:solidFill>
@@ -4220,16 +4222,16 @@
                 <a:ea typeface="Aptos" pitchFamily="34" charset="-122"/>
                 <a:cs typeface="Aptos" pitchFamily="34" charset="-120"/>
               </a:rPr>
-              <a:t>• A model may produce a number such as 82.4 percent risk, but the data and validation may not.</a:t>
-            </a:r>
-            <a:endParaRPr lang="en-US" sz="2100" dirty="0"/>
-          </a:p>
-          <a:p>
-            <a:pPr indent="0" marL="0">
-              <a:buNone/>
-            </a:pPr>
-            <a:r>
-              <a:rPr lang="en-US" sz="2100" dirty="0">
+              <a:t>• A model may produce a number such as 82.4 percent risk, but the data and.</a:t>
+            </a:r>
+            <a:endParaRPr lang="en-US" sz="1920" dirty="0"/>
+          </a:p>
+          <a:p>
+            <a:pPr indent="0" marL="0">
+              <a:buNone/>
+            </a:pPr>
+            <a:r>
+              <a:rPr lang="en-US" sz="1920" dirty="0">
                 <a:solidFill>
                   <a:srgbClr val="003A63"/>
                 </a:solidFill>
@@ -4237,9 +4239,9 @@
                 <a:ea typeface="Aptos" pitchFamily="34" charset="-122"/>
                 <a:cs typeface="Aptos" pitchFamily="34" charset="-120"/>
               </a:rPr>
-              <a:t>• A guardrail is to use appropriate rounding, risk categories, and uncertainty statements.</a:t>
-            </a:r>
-            <a:endParaRPr lang="en-US" sz="2100" dirty="0"/>
+              <a:t>• A guardrail is to use appropriate rounding, risk categories, and uncertainty.</a:t>
+            </a:r>
+            <a:endParaRPr lang="en-US" sz="1920" dirty="0"/>
           </a:p>
         </p:txBody>
       </p:sp>
@@ -4251,12 +4253,12 @@
         </p:nvSpPr>
         <p:spPr>
           <a:xfrm>
-            <a:off x="7635240" y="1325880"/>
-            <a:ext cx="3474720" cy="1207008"/>
+            <a:off x="7543800" y="1325880"/>
+            <a:ext cx="3611880" cy="1261872"/>
           </a:xfrm>
           <a:prstGeom prst="roundRect">
             <a:avLst>
-              <a:gd name="adj" fmla="val 9091"/>
+              <a:gd name="adj" fmla="val 8696"/>
             </a:avLst>
           </a:prstGeom>
           <a:solidFill>
@@ -4278,8 +4280,8 @@
         </p:nvSpPr>
         <p:spPr>
           <a:xfrm>
-            <a:off x="7799832" y="1472184"/>
-            <a:ext cx="3145536" cy="256032"/>
+            <a:off x="7708392" y="1453896"/>
+            <a:ext cx="3282696" cy="228600"/>
           </a:xfrm>
           <a:prstGeom prst="rect">
             <a:avLst/>
@@ -4295,7 +4297,7 @@
               <a:buNone/>
             </a:pPr>
             <a:r>
-              <a:rPr lang="en-US" sz="1300" b="1" dirty="0">
+              <a:rPr lang="en-US" sz="1220" b="1" dirty="0">
                 <a:solidFill>
                   <a:srgbClr val="0068B7"/>
                 </a:solidFill>
@@ -4305,7 +4307,7 @@
               </a:rPr>
               <a:t>Risk check</a:t>
             </a:r>
-            <a:endParaRPr lang="en-US" sz="1300" dirty="0"/>
+            <a:endParaRPr lang="en-US" sz="1220" dirty="0"/>
           </a:p>
         </p:txBody>
       </p:sp>
@@ -4317,8 +4319,8 @@
         </p:nvSpPr>
         <p:spPr>
           <a:xfrm>
-            <a:off x="7799832" y="1801368"/>
-            <a:ext cx="3145536" cy="640080"/>
+            <a:off x="7708392" y="1764792"/>
+            <a:ext cx="3282696" cy="749808"/>
           </a:xfrm>
           <a:prstGeom prst="rect">
             <a:avLst/>
@@ -4336,7 +4338,7 @@
               <a:buNone/>
             </a:pPr>
             <a:r>
-              <a:rPr lang="en-US" sz="1320" dirty="0">
+              <a:rPr lang="en-US" sz="1220" dirty="0">
                 <a:solidFill>
                   <a:srgbClr val="17364A"/>
                 </a:solidFill>
@@ -4346,7 +4348,7 @@
               </a:rPr>
               <a:t>A major failure mode is false precision.</a:t>
             </a:r>
-            <a:endParaRPr lang="en-US" sz="1320" dirty="0"/>
+            <a:endParaRPr lang="en-US" sz="1220" dirty="0"/>
           </a:p>
         </p:txBody>
       </p:sp>
@@ -4358,12 +4360,12 @@
         </p:nvSpPr>
         <p:spPr>
           <a:xfrm>
-            <a:off x="7635240" y="2670048"/>
-            <a:ext cx="3474720" cy="1536192"/>
+            <a:off x="7543800" y="2724912"/>
+            <a:ext cx="3611880" cy="1527048"/>
           </a:xfrm>
           <a:prstGeom prst="roundRect">
             <a:avLst>
-              <a:gd name="adj" fmla="val 7143"/>
+              <a:gd name="adj" fmla="val 7186"/>
             </a:avLst>
           </a:prstGeom>
           <a:solidFill>
@@ -4385,8 +4387,8 @@
         </p:nvSpPr>
         <p:spPr>
           <a:xfrm>
-            <a:off x="7799832" y="2816352"/>
-            <a:ext cx="3145536" cy="256032"/>
+            <a:off x="7708392" y="2852928"/>
+            <a:ext cx="3282696" cy="228600"/>
           </a:xfrm>
           <a:prstGeom prst="rect">
             <a:avLst/>
@@ -4402,7 +4404,7 @@
               <a:buNone/>
             </a:pPr>
             <a:r>
-              <a:rPr lang="en-US" sz="1300" b="1" dirty="0">
+              <a:rPr lang="en-US" sz="1220" b="1" dirty="0">
                 <a:solidFill>
                   <a:srgbClr val="0068B7"/>
                 </a:solidFill>
@@ -4412,7 +4414,7 @@
               </a:rPr>
               <a:t>Concept checkpoints</a:t>
             </a:r>
-            <a:endParaRPr lang="en-US" sz="1300" dirty="0"/>
+            <a:endParaRPr lang="en-US" sz="1220" dirty="0"/>
           </a:p>
         </p:txBody>
       </p:sp>
@@ -4424,8 +4426,8 @@
         </p:nvSpPr>
         <p:spPr>
           <a:xfrm>
-            <a:off x="7818120" y="3182112"/>
-            <a:ext cx="3090672" cy="877824"/>
+            <a:off x="7726680" y="3182112"/>
+            <a:ext cx="3227832" cy="960120"/>
           </a:xfrm>
           <a:prstGeom prst="rect">
             <a:avLst/>
@@ -4443,7 +4445,7 @@
               <a:buNone/>
             </a:pPr>
             <a:r>
-              <a:rPr lang="en-US" sz="1220" dirty="0">
+              <a:rPr lang="en-US" sz="1140" dirty="0">
                 <a:solidFill>
                   <a:srgbClr val="17364A"/>
                 </a:solidFill>
@@ -4451,16 +4453,16 @@
                 <a:ea typeface="Aptos" pitchFamily="34" charset="-122"/>
                 <a:cs typeface="Aptos" pitchFamily="34" charset="-120"/>
               </a:rPr>
-              <a:t>A model may produce a number such as 82.4 percent risk, but the.</a:t>
-            </a:r>
-            <a:endParaRPr lang="en-US" sz="1220" dirty="0"/>
-          </a:p>
-          <a:p>
-            <a:pPr indent="0" marL="0">
-              <a:buNone/>
-            </a:pPr>
-            <a:r>
-              <a:rPr lang="en-US" sz="1220" dirty="0">
+              <a:t>A model may produce a number such as 82.4 percent.</a:t>
+            </a:r>
+            <a:endParaRPr lang="en-US" sz="1140" dirty="0"/>
+          </a:p>
+          <a:p>
+            <a:pPr indent="0" marL="0">
+              <a:buNone/>
+            </a:pPr>
+            <a:r>
+              <a:rPr lang="en-US" sz="1140" dirty="0">
                 <a:solidFill>
                   <a:srgbClr val="17364A"/>
                 </a:solidFill>
@@ -4468,16 +4470,16 @@
                 <a:ea typeface="Aptos" pitchFamily="34" charset="-122"/>
                 <a:cs typeface="Aptos" pitchFamily="34" charset="-120"/>
               </a:rPr>
-              <a:t>Another failure mode is hiding limitations to make results look.</a:t>
-            </a:r>
-            <a:endParaRPr lang="en-US" sz="1220" dirty="0"/>
-          </a:p>
-          <a:p>
-            <a:pPr indent="0" marL="0">
-              <a:buNone/>
-            </a:pPr>
-            <a:r>
-              <a:rPr lang="en-US" sz="1220" dirty="0">
+              <a:t>Another failure mode is hiding limitations to make.</a:t>
+            </a:r>
+            <a:endParaRPr lang="en-US" sz="1140" dirty="0"/>
+          </a:p>
+          <a:p>
+            <a:pPr indent="0" marL="0">
+              <a:buNone/>
+            </a:pPr>
+            <a:r>
+              <a:rPr lang="en-US" sz="1140" dirty="0">
                 <a:solidFill>
                   <a:srgbClr val="17364A"/>
                 </a:solidFill>
@@ -4485,9 +4487,9 @@
                 <a:ea typeface="Aptos" pitchFamily="34" charset="-122"/>
                 <a:cs typeface="Aptos" pitchFamily="34" charset="-120"/>
               </a:rPr>
-              <a:t>This can erode trust if the model later performs poorly.</a:t>
-            </a:r>
-            <a:endParaRPr lang="en-US" sz="1220" dirty="0"/>
+              <a:t>This can erode trust if the model later performs.</a:t>
+            </a:r>
+            <a:endParaRPr lang="en-US" sz="1140" dirty="0"/>
           </a:p>
         </p:txBody>
       </p:sp>
@@ -4499,12 +4501,12 @@
         </p:nvSpPr>
         <p:spPr>
           <a:xfrm>
-            <a:off x="7635240" y="4343400"/>
-            <a:ext cx="3474720" cy="1255471"/>
+            <a:off x="7543800" y="4389120"/>
+            <a:ext cx="3611880" cy="1261872"/>
           </a:xfrm>
           <a:prstGeom prst="roundRect">
             <a:avLst>
-              <a:gd name="adj" fmla="val 8740"/>
+              <a:gd name="adj" fmla="val 8696"/>
             </a:avLst>
           </a:prstGeom>
           <a:solidFill>
@@ -4526,8 +4528,8 @@
         </p:nvSpPr>
         <p:spPr>
           <a:xfrm>
-            <a:off x="7799832" y="4489704"/>
-            <a:ext cx="3145536" cy="256032"/>
+            <a:off x="7708392" y="4517136"/>
+            <a:ext cx="3282696" cy="228600"/>
           </a:xfrm>
           <a:prstGeom prst="rect">
             <a:avLst/>
@@ -4543,7 +4545,7 @@
               <a:buNone/>
             </a:pPr>
             <a:r>
-              <a:rPr lang="en-US" sz="1300" b="1" dirty="0">
+              <a:rPr lang="en-US" sz="1220" b="1" dirty="0">
                 <a:solidFill>
                   <a:srgbClr val="0068B7"/>
                 </a:solidFill>
@@ -4553,7 +4555,7 @@
               </a:rPr>
               <a:t>Safeguard to plan</a:t>
             </a:r>
-            <a:endParaRPr lang="en-US" sz="1300" dirty="0"/>
+            <a:endParaRPr lang="en-US" sz="1220" dirty="0"/>
           </a:p>
         </p:txBody>
       </p:sp>
@@ -4565,8 +4567,8 @@
         </p:nvSpPr>
         <p:spPr>
           <a:xfrm>
-            <a:off x="7799832" y="4818888"/>
-            <a:ext cx="3145536" cy="688543"/>
+            <a:off x="7708392" y="4828032"/>
+            <a:ext cx="3282696" cy="749808"/>
           </a:xfrm>
           <a:prstGeom prst="rect">
             <a:avLst/>
@@ -4584,7 +4586,7 @@
               <a:buNone/>
             </a:pPr>
             <a:r>
-              <a:rPr lang="en-US" sz="1320" dirty="0">
+              <a:rPr lang="en-US" sz="1220" dirty="0">
                 <a:solidFill>
                   <a:srgbClr val="17364A"/>
                 </a:solidFill>
@@ -4592,9 +4594,9 @@
                 <a:ea typeface="Aptos" pitchFamily="34" charset="-122"/>
                 <a:cs typeface="Aptos" pitchFamily="34" charset="-120"/>
               </a:rPr>
-              <a:t>Identify what could go wrong, who could be affected, what safeguards are needed, and what evidence should be reviewed before use.</a:t>
-            </a:r>
-            <a:endParaRPr lang="en-US" sz="1320" dirty="0"/>
+              <a:t>Identify what could go wrong, who could be affected, what safeguards are needed,.</a:t>
+            </a:r>
+            <a:endParaRPr lang="en-US" sz="1220" dirty="0"/>
           </a:p>
         </p:txBody>
       </p:sp>
@@ -4885,8 +4887,8 @@
         </p:nvSpPr>
         <p:spPr>
           <a:xfrm>
-            <a:off x="868680" y="1508760"/>
-            <a:ext cx="6309360" cy="4160520"/>
+            <a:off x="822960" y="1463040"/>
+            <a:ext cx="6565392" cy="4343400"/>
           </a:xfrm>
           <a:prstGeom prst="rect">
             <a:avLst/>
@@ -4904,7 +4906,7 @@
               <a:buNone/>
             </a:pPr>
             <a:r>
-              <a:rPr lang="en-US" sz="2100" dirty="0">
+              <a:rPr lang="en-US" sz="1920" dirty="0">
                 <a:solidFill>
                   <a:srgbClr val="003A63"/>
                 </a:solidFill>
@@ -4912,16 +4914,16 @@
                 <a:ea typeface="Aptos" pitchFamily="34" charset="-122"/>
                 <a:cs typeface="Aptos" pitchFamily="34" charset="-120"/>
               </a:rPr>
-              <a:t>• Generative AI can help draft summaries of model findings, but the draft must be checked by.</a:t>
-            </a:r>
-            <a:endParaRPr lang="en-US" sz="2100" dirty="0"/>
-          </a:p>
-          <a:p>
-            <a:pPr indent="0" marL="0">
-              <a:buNone/>
-            </a:pPr>
-            <a:r>
-              <a:rPr lang="en-US" sz="2100" dirty="0">
+              <a:t>• Generative AI can help draft summaries of model findings, but the draft must.</a:t>
+            </a:r>
+            <a:endParaRPr lang="en-US" sz="1920" dirty="0"/>
+          </a:p>
+          <a:p>
+            <a:pPr indent="0" marL="0">
+              <a:buNone/>
+            </a:pPr>
+            <a:r>
+              <a:rPr lang="en-US" sz="1920" dirty="0">
                 <a:solidFill>
                   <a:srgbClr val="003A63"/>
                 </a:solidFill>
@@ -4929,16 +4931,16 @@
                 <a:ea typeface="Aptos" pitchFamily="34" charset="-122"/>
                 <a:cs typeface="Aptos" pitchFamily="34" charset="-120"/>
               </a:rPr>
-              <a:t>• Predictive analytics, outbreak forecasts, risk stratification tools, and geospatial models all.</a:t>
-            </a:r>
-            <a:endParaRPr lang="en-US" sz="2100" dirty="0"/>
-          </a:p>
-          <a:p>
-            <a:pPr indent="0" marL="0">
-              <a:buNone/>
-            </a:pPr>
-            <a:r>
-              <a:rPr lang="en-US" sz="2100" dirty="0">
+              <a:t>• Predictive analytics, outbreak forecasts, risk stratification tools, and.</a:t>
+            </a:r>
+            <a:endParaRPr lang="en-US" sz="1920" dirty="0"/>
+          </a:p>
+          <a:p>
+            <a:pPr indent="0" marL="0">
+              <a:buNone/>
+            </a:pPr>
+            <a:r>
+              <a:rPr lang="en-US" sz="1920" dirty="0">
                 <a:solidFill>
                   <a:srgbClr val="003A63"/>
                 </a:solidFill>
@@ -4946,9 +4948,9 @@
                 <a:ea typeface="Aptos" pitchFamily="34" charset="-122"/>
                 <a:cs typeface="Aptos" pitchFamily="34" charset="-120"/>
               </a:rPr>
-              <a:t>• RAG systems used for briefings should cite source reports and validation evidence.</a:t>
-            </a:r>
-            <a:endParaRPr lang="en-US" sz="2100" dirty="0"/>
+              <a:t>• RAG systems used for briefings should cite source reports and validation.</a:t>
+            </a:r>
+            <a:endParaRPr lang="en-US" sz="1920" dirty="0"/>
           </a:p>
         </p:txBody>
       </p:sp>
@@ -4960,12 +4962,12 @@
         </p:nvSpPr>
         <p:spPr>
           <a:xfrm>
-            <a:off x="7635240" y="1325880"/>
-            <a:ext cx="3474720" cy="1255471"/>
+            <a:off x="7543800" y="1325880"/>
+            <a:ext cx="3611880" cy="1261872"/>
           </a:xfrm>
           <a:prstGeom prst="roundRect">
             <a:avLst>
-              <a:gd name="adj" fmla="val 8740"/>
+              <a:gd name="adj" fmla="val 8696"/>
             </a:avLst>
           </a:prstGeom>
           <a:solidFill>
@@ -4987,8 +4989,8 @@
         </p:nvSpPr>
         <p:spPr>
           <a:xfrm>
-            <a:off x="7799832" y="1472184"/>
-            <a:ext cx="3145536" cy="256032"/>
+            <a:off x="7708392" y="1453896"/>
+            <a:ext cx="3282696" cy="228600"/>
           </a:xfrm>
           <a:prstGeom prst="rect">
             <a:avLst/>
@@ -5004,7 +5006,7 @@
               <a:buNone/>
             </a:pPr>
             <a:r>
-              <a:rPr lang="en-US" sz="1300" b="1" dirty="0">
+              <a:rPr lang="en-US" sz="1220" b="1" dirty="0">
                 <a:solidFill>
                   <a:srgbClr val="0068B7"/>
                 </a:solidFill>
@@ -5014,7 +5016,7 @@
               </a:rPr>
               <a:t>Data decision</a:t>
             </a:r>
-            <a:endParaRPr lang="en-US" sz="1300" dirty="0"/>
+            <a:endParaRPr lang="en-US" sz="1220" dirty="0"/>
           </a:p>
         </p:txBody>
       </p:sp>
@@ -5026,8 +5028,8 @@
         </p:nvSpPr>
         <p:spPr>
           <a:xfrm>
-            <a:off x="7799832" y="1801368"/>
-            <a:ext cx="3145536" cy="688543"/>
+            <a:off x="7708392" y="1764792"/>
+            <a:ext cx="3282696" cy="749808"/>
           </a:xfrm>
           <a:prstGeom prst="rect">
             <a:avLst/>
@@ -5045,7 +5047,7 @@
               <a:buNone/>
             </a:pPr>
             <a:r>
-              <a:rPr lang="en-US" sz="1320" dirty="0">
+              <a:rPr lang="en-US" sz="1220" dirty="0">
                 <a:solidFill>
                   <a:srgbClr val="17364A"/>
                 </a:solidFill>
@@ -5053,9 +5055,9 @@
                 <a:ea typeface="Aptos" pitchFamily="34" charset="-122"/>
                 <a:cs typeface="Aptos" pitchFamily="34" charset="-120"/>
               </a:rPr>
-              <a:t>Generative AI can help draft summaries of model findings, but the draft must be checked by analysts who.</a:t>
-            </a:r>
-            <a:endParaRPr lang="en-US" sz="1320" dirty="0"/>
+              <a:t>Generative AI can help draft summaries of model findings, but the draft must be.</a:t>
+            </a:r>
+            <a:endParaRPr lang="en-US" sz="1220" dirty="0"/>
           </a:p>
         </p:txBody>
       </p:sp>
@@ -5067,12 +5069,12 @@
         </p:nvSpPr>
         <p:spPr>
           <a:xfrm>
-            <a:off x="7635240" y="2718511"/>
-            <a:ext cx="3474720" cy="1328623"/>
+            <a:off x="7543800" y="2724912"/>
+            <a:ext cx="3611880" cy="1527048"/>
           </a:xfrm>
           <a:prstGeom prst="roundRect">
             <a:avLst>
-              <a:gd name="adj" fmla="val 8259"/>
+              <a:gd name="adj" fmla="val 7186"/>
             </a:avLst>
           </a:prstGeom>
           <a:solidFill>
@@ -5094,8 +5096,8 @@
         </p:nvSpPr>
         <p:spPr>
           <a:xfrm>
-            <a:off x="7799832" y="2864815"/>
-            <a:ext cx="3145536" cy="256032"/>
+            <a:off x="7708392" y="2852928"/>
+            <a:ext cx="3282696" cy="228600"/>
           </a:xfrm>
           <a:prstGeom prst="rect">
             <a:avLst/>
@@ -5111,7 +5113,7 @@
               <a:buNone/>
             </a:pPr>
             <a:r>
-              <a:rPr lang="en-US" sz="1300" b="1" dirty="0">
+              <a:rPr lang="en-US" sz="1220" b="1" dirty="0">
                 <a:solidFill>
                   <a:srgbClr val="0068B7"/>
                 </a:solidFill>
@@ -5121,7 +5123,7 @@
               </a:rPr>
               <a:t>Concept checkpoints</a:t>
             </a:r>
-            <a:endParaRPr lang="en-US" sz="1300" dirty="0"/>
+            <a:endParaRPr lang="en-US" sz="1220" dirty="0"/>
           </a:p>
         </p:txBody>
       </p:sp>
@@ -5133,8 +5135,8 @@
         </p:nvSpPr>
         <p:spPr>
           <a:xfrm>
-            <a:off x="7818120" y="3230575"/>
-            <a:ext cx="3090672" cy="670255"/>
+            <a:off x="7726680" y="3182112"/>
+            <a:ext cx="3227832" cy="960120"/>
           </a:xfrm>
           <a:prstGeom prst="rect">
             <a:avLst/>
@@ -5152,7 +5154,7 @@
               <a:buNone/>
             </a:pPr>
             <a:r>
-              <a:rPr lang="en-US" sz="1220" dirty="0">
+              <a:rPr lang="en-US" sz="1140" dirty="0">
                 <a:solidFill>
                   <a:srgbClr val="17364A"/>
                 </a:solidFill>
@@ -5160,16 +5162,16 @@
                 <a:ea typeface="Aptos" pitchFamily="34" charset="-122"/>
                 <a:cs typeface="Aptos" pitchFamily="34" charset="-120"/>
               </a:rPr>
-              <a:t>Generative AI can help draft summaries of model findings, but the.</a:t>
-            </a:r>
-            <a:endParaRPr lang="en-US" sz="1220" dirty="0"/>
-          </a:p>
-          <a:p>
-            <a:pPr indent="0" marL="0">
-              <a:buNone/>
-            </a:pPr>
-            <a:r>
-              <a:rPr lang="en-US" sz="1220" dirty="0">
+              <a:t>Generative AI can help draft summaries of model.</a:t>
+            </a:r>
+            <a:endParaRPr lang="en-US" sz="1140" dirty="0"/>
+          </a:p>
+          <a:p>
+            <a:pPr indent="0" marL="0">
+              <a:buNone/>
+            </a:pPr>
+            <a:r>
+              <a:rPr lang="en-US" sz="1140" dirty="0">
                 <a:solidFill>
                   <a:srgbClr val="17364A"/>
                 </a:solidFill>
@@ -5177,9 +5179,9 @@
                 <a:ea typeface="Aptos" pitchFamily="34" charset="-122"/>
                 <a:cs typeface="Aptos" pitchFamily="34" charset="-120"/>
               </a:rPr>
-              <a:t>Predictive analytics, outbreak forecasts, risk stratification.</a:t>
-            </a:r>
-            <a:endParaRPr lang="en-US" sz="1220" dirty="0"/>
+              <a:t>Predictive analytics, outbreak forecasts, risk.</a:t>
+            </a:r>
+            <a:endParaRPr lang="en-US" sz="1140" dirty="0"/>
           </a:p>
         </p:txBody>
       </p:sp>
@@ -5191,12 +5193,12 @@
         </p:nvSpPr>
         <p:spPr>
           <a:xfrm>
-            <a:off x="7635240" y="4184294"/>
-            <a:ext cx="3474720" cy="1466698"/>
+            <a:off x="7543800" y="4389120"/>
+            <a:ext cx="3611880" cy="1261872"/>
           </a:xfrm>
           <a:prstGeom prst="roundRect">
             <a:avLst>
-              <a:gd name="adj" fmla="val 7481"/>
+              <a:gd name="adj" fmla="val 8696"/>
             </a:avLst>
           </a:prstGeom>
           <a:solidFill>
@@ -5218,8 +5220,8 @@
         </p:nvSpPr>
         <p:spPr>
           <a:xfrm>
-            <a:off x="7799832" y="4330598"/>
-            <a:ext cx="3145536" cy="256032"/>
+            <a:off x="7708392" y="4517136"/>
+            <a:ext cx="3282696" cy="228600"/>
           </a:xfrm>
           <a:prstGeom prst="rect">
             <a:avLst/>
@@ -5235,7 +5237,7 @@
               <a:buNone/>
             </a:pPr>
             <a:r>
-              <a:rPr lang="en-US" sz="1300" b="1" dirty="0">
+              <a:rPr lang="en-US" sz="1220" b="1" dirty="0">
                 <a:solidFill>
                   <a:srgbClr val="0068B7"/>
                 </a:solidFill>
@@ -5245,7 +5247,7 @@
               </a:rPr>
               <a:t>How to validate</a:t>
             </a:r>
-            <a:endParaRPr lang="en-US" sz="1300" dirty="0"/>
+            <a:endParaRPr lang="en-US" sz="1220" dirty="0"/>
           </a:p>
         </p:txBody>
       </p:sp>
@@ -5257,8 +5259,8 @@
         </p:nvSpPr>
         <p:spPr>
           <a:xfrm>
-            <a:off x="7799832" y="4659782"/>
-            <a:ext cx="3145536" cy="899770"/>
+            <a:off x="7708392" y="4828032"/>
+            <a:ext cx="3282696" cy="749808"/>
           </a:xfrm>
           <a:prstGeom prst="rect">
             <a:avLst/>
@@ -5276,7 +5278,7 @@
               <a:buNone/>
             </a:pPr>
             <a:r>
-              <a:rPr lang="en-US" sz="1320" dirty="0">
+              <a:rPr lang="en-US" sz="1220" dirty="0">
                 <a:solidFill>
                   <a:srgbClr val="17364A"/>
                 </a:solidFill>
@@ -5284,9 +5286,9 @@
                 <a:ea typeface="Aptos" pitchFamily="34" charset="-122"/>
                 <a:cs typeface="Aptos" pitchFamily="34" charset="-120"/>
               </a:rPr>
-              <a:t>Connect the concept to data quality, model performance, validation evidence, monitoring measures, and decisions that remain under human control.</a:t>
-            </a:r>
-            <a:endParaRPr lang="en-US" sz="1320" dirty="0"/>
+              <a:t>Connect the concept to data quality, model performance, validation evidence,.</a:t>
+            </a:r>
+            <a:endParaRPr lang="en-US" sz="1220" dirty="0"/>
           </a:p>
         </p:txBody>
       </p:sp>
@@ -5577,8 +5579,8 @@
         </p:nvSpPr>
         <p:spPr>
           <a:xfrm>
-            <a:off x="868680" y="1508760"/>
-            <a:ext cx="6309360" cy="4160520"/>
+            <a:off x="822960" y="1463040"/>
+            <a:ext cx="6565392" cy="4343400"/>
           </a:xfrm>
           <a:prstGeom prst="rect">
             <a:avLst/>
@@ -5596,7 +5598,7 @@
               <a:buNone/>
             </a:pPr>
             <a:r>
-              <a:rPr lang="en-US" sz="2100" dirty="0">
+              <a:rPr lang="en-US" sz="1920" dirty="0">
                 <a:solidFill>
                   <a:srgbClr val="003A63"/>
                 </a:solidFill>
@@ -5606,14 +5608,14 @@
               </a:rPr>
               <a:t>• Who needs to understand this model result?</a:t>
             </a:r>
-            <a:endParaRPr lang="en-US" sz="2100" dirty="0"/>
-          </a:p>
-          <a:p>
-            <a:pPr indent="0" marL="0">
-              <a:buNone/>
-            </a:pPr>
-            <a:r>
-              <a:rPr lang="en-US" sz="2100" dirty="0">
+            <a:endParaRPr lang="en-US" sz="1920" dirty="0"/>
+          </a:p>
+          <a:p>
+            <a:pPr indent="0" marL="0">
+              <a:buNone/>
+            </a:pPr>
+            <a:r>
+              <a:rPr lang="en-US" sz="1920" dirty="0">
                 <a:solidFill>
                   <a:srgbClr val="003A63"/>
                 </a:solidFill>
@@ -5623,14 +5625,14 @@
               </a:rPr>
               <a:t>• What decision will the result support?</a:t>
             </a:r>
-            <a:endParaRPr lang="en-US" sz="2100" dirty="0"/>
-          </a:p>
-          <a:p>
-            <a:pPr indent="0" marL="0">
-              <a:buNone/>
-            </a:pPr>
-            <a:r>
-              <a:rPr lang="en-US" sz="2100" dirty="0">
+            <a:endParaRPr lang="en-US" sz="1920" dirty="0"/>
+          </a:p>
+          <a:p>
+            <a:pPr indent="0" marL="0">
+              <a:buNone/>
+            </a:pPr>
+            <a:r>
+              <a:rPr lang="en-US" sz="1920" dirty="0">
                 <a:solidFill>
                   <a:srgbClr val="003A63"/>
                 </a:solidFill>
@@ -5640,7 +5642,7 @@
               </a:rPr>
               <a:t>• What uncertainty or limitation could change the decision?</a:t>
             </a:r>
-            <a:endParaRPr lang="en-US" sz="2100" dirty="0"/>
+            <a:endParaRPr lang="en-US" sz="1920" dirty="0"/>
           </a:p>
         </p:txBody>
       </p:sp>
@@ -5652,12 +5654,12 @@
         </p:nvSpPr>
         <p:spPr>
           <a:xfrm>
-            <a:off x="7635240" y="1325880"/>
-            <a:ext cx="3474720" cy="1207008"/>
+            <a:off x="7543800" y="1325880"/>
+            <a:ext cx="3611880" cy="1261872"/>
           </a:xfrm>
           <a:prstGeom prst="roundRect">
             <a:avLst>
-              <a:gd name="adj" fmla="val 9091"/>
+              <a:gd name="adj" fmla="val 8696"/>
             </a:avLst>
           </a:prstGeom>
           <a:solidFill>
@@ -5679,8 +5681,8 @@
         </p:nvSpPr>
         <p:spPr>
           <a:xfrm>
-            <a:off x="7799832" y="1472184"/>
-            <a:ext cx="3145536" cy="256032"/>
+            <a:off x="7708392" y="1453896"/>
+            <a:ext cx="3282696" cy="228600"/>
           </a:xfrm>
           <a:prstGeom prst="rect">
             <a:avLst/>
@@ -5696,7 +5698,7 @@
               <a:buNone/>
             </a:pPr>
             <a:r>
-              <a:rPr lang="en-US" sz="1300" b="1" dirty="0">
+              <a:rPr lang="en-US" sz="1220" b="1" dirty="0">
                 <a:solidFill>
                   <a:srgbClr val="0068B7"/>
                 </a:solidFill>
@@ -5706,7 +5708,7 @@
               </a:rPr>
               <a:t>Data decision</a:t>
             </a:r>
-            <a:endParaRPr lang="en-US" sz="1300" dirty="0"/>
+            <a:endParaRPr lang="en-US" sz="1220" dirty="0"/>
           </a:p>
         </p:txBody>
       </p:sp>
@@ -5718,8 +5720,8 @@
         </p:nvSpPr>
         <p:spPr>
           <a:xfrm>
-            <a:off x="7799832" y="1801368"/>
-            <a:ext cx="3145536" cy="640080"/>
+            <a:off x="7708392" y="1764792"/>
+            <a:ext cx="3282696" cy="749808"/>
           </a:xfrm>
           <a:prstGeom prst="rect">
             <a:avLst/>
@@ -5737,7 +5739,7 @@
               <a:buNone/>
             </a:pPr>
             <a:r>
-              <a:rPr lang="en-US" sz="1320" dirty="0">
+              <a:rPr lang="en-US" sz="1220" dirty="0">
                 <a:solidFill>
                   <a:srgbClr val="17364A"/>
                 </a:solidFill>
@@ -5747,7 +5749,7 @@
               </a:rPr>
               <a:t>Who needs to understand this model result?</a:t>
             </a:r>
-            <a:endParaRPr lang="en-US" sz="1320" dirty="0"/>
+            <a:endParaRPr lang="en-US" sz="1220" dirty="0"/>
           </a:p>
         </p:txBody>
       </p:sp>
@@ -5759,12 +5761,12 @@
         </p:nvSpPr>
         <p:spPr>
           <a:xfrm>
-            <a:off x="7635240" y="2670048"/>
-            <a:ext cx="3474720" cy="1377086"/>
+            <a:off x="7543800" y="2724912"/>
+            <a:ext cx="3611880" cy="1527048"/>
           </a:xfrm>
           <a:prstGeom prst="roundRect">
             <a:avLst>
-              <a:gd name="adj" fmla="val 7968"/>
+              <a:gd name="adj" fmla="val 7186"/>
             </a:avLst>
           </a:prstGeom>
           <a:solidFill>
@@ -5786,8 +5788,8 @@
         </p:nvSpPr>
         <p:spPr>
           <a:xfrm>
-            <a:off x="7799832" y="2816352"/>
-            <a:ext cx="3145536" cy="256032"/>
+            <a:off x="7708392" y="2852928"/>
+            <a:ext cx="3282696" cy="228600"/>
           </a:xfrm>
           <a:prstGeom prst="rect">
             <a:avLst/>
@@ -5803,7 +5805,7 @@
               <a:buNone/>
             </a:pPr>
             <a:r>
-              <a:rPr lang="en-US" sz="1300" b="1" dirty="0">
+              <a:rPr lang="en-US" sz="1220" b="1" dirty="0">
                 <a:solidFill>
                   <a:srgbClr val="0068B7"/>
                 </a:solidFill>
@@ -5813,7 +5815,7 @@
               </a:rPr>
               <a:t>Concept checkpoints</a:t>
             </a:r>
-            <a:endParaRPr lang="en-US" sz="1300" dirty="0"/>
+            <a:endParaRPr lang="en-US" sz="1220" dirty="0"/>
           </a:p>
         </p:txBody>
       </p:sp>
@@ -5825,8 +5827,8 @@
         </p:nvSpPr>
         <p:spPr>
           <a:xfrm>
-            <a:off x="7818120" y="3182112"/>
-            <a:ext cx="3090672" cy="718718"/>
+            <a:off x="7726680" y="3182112"/>
+            <a:ext cx="3227832" cy="960120"/>
           </a:xfrm>
           <a:prstGeom prst="rect">
             <a:avLst/>
@@ -5844,7 +5846,7 @@
               <a:buNone/>
             </a:pPr>
             <a:r>
-              <a:rPr lang="en-US" sz="1220" dirty="0">
+              <a:rPr lang="en-US" sz="1140" dirty="0">
                 <a:solidFill>
                   <a:srgbClr val="17364A"/>
                 </a:solidFill>
@@ -5854,14 +5856,14 @@
               </a:rPr>
               <a:t>Who needs to understand this model result?</a:t>
             </a:r>
-            <a:endParaRPr lang="en-US" sz="1220" dirty="0"/>
-          </a:p>
-          <a:p>
-            <a:pPr indent="0" marL="0">
-              <a:buNone/>
-            </a:pPr>
-            <a:r>
-              <a:rPr lang="en-US" sz="1220" dirty="0">
+            <a:endParaRPr lang="en-US" sz="1140" dirty="0"/>
+          </a:p>
+          <a:p>
+            <a:pPr indent="0" marL="0">
+              <a:buNone/>
+            </a:pPr>
+            <a:r>
+              <a:rPr lang="en-US" sz="1140" dirty="0">
                 <a:solidFill>
                   <a:srgbClr val="17364A"/>
                 </a:solidFill>
@@ -5871,14 +5873,14 @@
               </a:rPr>
               <a:t>What decision will the result support?</a:t>
             </a:r>
-            <a:endParaRPr lang="en-US" sz="1220" dirty="0"/>
-          </a:p>
-          <a:p>
-            <a:pPr indent="0" marL="0">
-              <a:buNone/>
-            </a:pPr>
-            <a:r>
-              <a:rPr lang="en-US" sz="1220" dirty="0">
+            <a:endParaRPr lang="en-US" sz="1140" dirty="0"/>
+          </a:p>
+          <a:p>
+            <a:pPr indent="0" marL="0">
+              <a:buNone/>
+            </a:pPr>
+            <a:r>
+              <a:rPr lang="en-US" sz="1140" dirty="0">
                 <a:solidFill>
                   <a:srgbClr val="17364A"/>
                 </a:solidFill>
@@ -5886,9 +5888,9 @@
                 <a:ea typeface="Aptos" pitchFamily="34" charset="-122"/>
                 <a:cs typeface="Aptos" pitchFamily="34" charset="-120"/>
               </a:rPr>
-              <a:t>What uncertainty or limitation could change the decision?</a:t>
-            </a:r>
-            <a:endParaRPr lang="en-US" sz="1220" dirty="0"/>
+              <a:t>What uncertainty or limitation could change the.</a:t>
+            </a:r>
+            <a:endParaRPr lang="en-US" sz="1140" dirty="0"/>
           </a:p>
         </p:txBody>
       </p:sp>
@@ -5900,12 +5902,12 @@
         </p:nvSpPr>
         <p:spPr>
           <a:xfrm>
-            <a:off x="7635240" y="4184294"/>
-            <a:ext cx="3474720" cy="1466698"/>
+            <a:off x="7543800" y="4389120"/>
+            <a:ext cx="3611880" cy="1261872"/>
           </a:xfrm>
           <a:prstGeom prst="roundRect">
             <a:avLst>
-              <a:gd name="adj" fmla="val 7481"/>
+              <a:gd name="adj" fmla="val 8696"/>
             </a:avLst>
           </a:prstGeom>
           <a:solidFill>
@@ -5927,8 +5929,8 @@
         </p:nvSpPr>
         <p:spPr>
           <a:xfrm>
-            <a:off x="7799832" y="4330598"/>
-            <a:ext cx="3145536" cy="256032"/>
+            <a:off x="7708392" y="4517136"/>
+            <a:ext cx="3282696" cy="228600"/>
           </a:xfrm>
           <a:prstGeom prst="rect">
             <a:avLst/>
@@ -5944,7 +5946,7 @@
               <a:buNone/>
             </a:pPr>
             <a:r>
-              <a:rPr lang="en-US" sz="1300" b="1" dirty="0">
+              <a:rPr lang="en-US" sz="1220" b="1" dirty="0">
                 <a:solidFill>
                   <a:srgbClr val="0068B7"/>
                 </a:solidFill>
@@ -5954,7 +5956,7 @@
               </a:rPr>
               <a:t>How to validate</a:t>
             </a:r>
-            <a:endParaRPr lang="en-US" sz="1300" dirty="0"/>
+            <a:endParaRPr lang="en-US" sz="1220" dirty="0"/>
           </a:p>
         </p:txBody>
       </p:sp>
@@ -5966,8 +5968,8 @@
         </p:nvSpPr>
         <p:spPr>
           <a:xfrm>
-            <a:off x="7799832" y="4659782"/>
-            <a:ext cx="3145536" cy="899770"/>
+            <a:off x="7708392" y="4828032"/>
+            <a:ext cx="3282696" cy="749808"/>
           </a:xfrm>
           <a:prstGeom prst="rect">
             <a:avLst/>
@@ -5985,7 +5987,7 @@
               <a:buNone/>
             </a:pPr>
             <a:r>
-              <a:rPr lang="en-US" sz="1320" dirty="0">
+              <a:rPr lang="en-US" sz="1220" dirty="0">
                 <a:solidFill>
                   <a:srgbClr val="17364A"/>
                 </a:solidFill>
@@ -5993,9 +5995,9 @@
                 <a:ea typeface="Aptos" pitchFamily="34" charset="-122"/>
                 <a:cs typeface="Aptos" pitchFamily="34" charset="-120"/>
               </a:rPr>
-              <a:t>Connect the concept to data quality, model performance, validation evidence, monitoring measures, and decisions that remain under human control.</a:t>
-            </a:r>
-            <a:endParaRPr lang="en-US" sz="1320" dirty="0"/>
+              <a:t>Connect the concept to data quality, model performance, validation evidence,.</a:t>
+            </a:r>
+            <a:endParaRPr lang="en-US" sz="1220" dirty="0"/>
           </a:p>
         </p:txBody>
       </p:sp>
@@ -6286,8 +6288,8 @@
         </p:nvSpPr>
         <p:spPr>
           <a:xfrm>
-            <a:off x="868680" y="1508760"/>
-            <a:ext cx="6309360" cy="4160520"/>
+            <a:off x="822960" y="1463040"/>
+            <a:ext cx="6565392" cy="4343400"/>
           </a:xfrm>
           <a:prstGeom prst="rect">
             <a:avLst/>
@@ -6305,7 +6307,7 @@
               <a:buNone/>
             </a:pPr>
             <a:r>
-              <a:rPr lang="en-US" sz="2100" dirty="0">
+              <a:rPr lang="en-US" sz="1920" dirty="0">
                 <a:solidFill>
                   <a:srgbClr val="003A63"/>
                 </a:solidFill>
@@ -6315,14 +6317,14 @@
               </a:rPr>
               <a:t>• Are there subgroup performance concerns?</a:t>
             </a:r>
-            <a:endParaRPr lang="en-US" sz="2100" dirty="0"/>
-          </a:p>
-          <a:p>
-            <a:pPr indent="0" marL="0">
-              <a:buNone/>
-            </a:pPr>
-            <a:r>
-              <a:rPr lang="en-US" sz="2100" dirty="0">
+            <a:endParaRPr lang="en-US" sz="1920" dirty="0"/>
+          </a:p>
+          <a:p>
+            <a:pPr indent="0" marL="0">
+              <a:buNone/>
+            </a:pPr>
+            <a:r>
+              <a:rPr lang="en-US" sz="1920" dirty="0">
                 <a:solidFill>
                   <a:srgbClr val="003A63"/>
                 </a:solidFill>
@@ -6332,7 +6334,7 @@
               </a:rPr>
               <a:t>• What wording would prevent overclaiming?</a:t>
             </a:r>
-            <a:endParaRPr lang="en-US" sz="2100" dirty="0"/>
+            <a:endParaRPr lang="en-US" sz="1920" dirty="0"/>
           </a:p>
         </p:txBody>
       </p:sp>
@@ -6344,12 +6346,12 @@
         </p:nvSpPr>
         <p:spPr>
           <a:xfrm>
-            <a:off x="7635240" y="1325880"/>
-            <a:ext cx="3474720" cy="1207008"/>
+            <a:off x="7543800" y="1325880"/>
+            <a:ext cx="3611880" cy="1261872"/>
           </a:xfrm>
           <a:prstGeom prst="roundRect">
             <a:avLst>
-              <a:gd name="adj" fmla="val 9091"/>
+              <a:gd name="adj" fmla="val 8696"/>
             </a:avLst>
           </a:prstGeom>
           <a:solidFill>
@@ -6371,8 +6373,8 @@
         </p:nvSpPr>
         <p:spPr>
           <a:xfrm>
-            <a:off x="7799832" y="1472184"/>
-            <a:ext cx="3145536" cy="256032"/>
+            <a:off x="7708392" y="1453896"/>
+            <a:ext cx="3282696" cy="228600"/>
           </a:xfrm>
           <a:prstGeom prst="rect">
             <a:avLst/>
@@ -6388,7 +6390,7 @@
               <a:buNone/>
             </a:pPr>
             <a:r>
-              <a:rPr lang="en-US" sz="1300" b="1" dirty="0">
+              <a:rPr lang="en-US" sz="1220" b="1" dirty="0">
                 <a:solidFill>
                   <a:srgbClr val="0068B7"/>
                 </a:solidFill>
@@ -6398,7 +6400,7 @@
               </a:rPr>
               <a:t>Data decision</a:t>
             </a:r>
-            <a:endParaRPr lang="en-US" sz="1300" dirty="0"/>
+            <a:endParaRPr lang="en-US" sz="1220" dirty="0"/>
           </a:p>
         </p:txBody>
       </p:sp>
@@ -6410,8 +6412,8 @@
         </p:nvSpPr>
         <p:spPr>
           <a:xfrm>
-            <a:off x="7799832" y="1801368"/>
-            <a:ext cx="3145536" cy="640080"/>
+            <a:off x="7708392" y="1764792"/>
+            <a:ext cx="3282696" cy="749808"/>
           </a:xfrm>
           <a:prstGeom prst="rect">
             <a:avLst/>
@@ -6429,7 +6431,7 @@
               <a:buNone/>
             </a:pPr>
             <a:r>
-              <a:rPr lang="en-US" sz="1320" dirty="0">
+              <a:rPr lang="en-US" sz="1220" dirty="0">
                 <a:solidFill>
                   <a:srgbClr val="17364A"/>
                 </a:solidFill>
@@ -6439,7 +6441,7 @@
               </a:rPr>
               <a:t>Are there subgroup performance concerns?</a:t>
             </a:r>
-            <a:endParaRPr lang="en-US" sz="1320" dirty="0"/>
+            <a:endParaRPr lang="en-US" sz="1220" dirty="0"/>
           </a:p>
         </p:txBody>
       </p:sp>
@@ -6451,12 +6453,12 @@
         </p:nvSpPr>
         <p:spPr>
           <a:xfrm>
-            <a:off x="7635240" y="2670048"/>
-            <a:ext cx="3474720" cy="1377086"/>
+            <a:off x="7543800" y="2724912"/>
+            <a:ext cx="3611880" cy="1527048"/>
           </a:xfrm>
           <a:prstGeom prst="roundRect">
             <a:avLst>
-              <a:gd name="adj" fmla="val 7968"/>
+              <a:gd name="adj" fmla="val 7186"/>
             </a:avLst>
           </a:prstGeom>
           <a:solidFill>
@@ -6478,8 +6480,8 @@
         </p:nvSpPr>
         <p:spPr>
           <a:xfrm>
-            <a:off x="7799832" y="2816352"/>
-            <a:ext cx="3145536" cy="256032"/>
+            <a:off x="7708392" y="2852928"/>
+            <a:ext cx="3282696" cy="228600"/>
           </a:xfrm>
           <a:prstGeom prst="rect">
             <a:avLst/>
@@ -6495,7 +6497,7 @@
               <a:buNone/>
             </a:pPr>
             <a:r>
-              <a:rPr lang="en-US" sz="1300" b="1" dirty="0">
+              <a:rPr lang="en-US" sz="1220" b="1" dirty="0">
                 <a:solidFill>
                   <a:srgbClr val="0068B7"/>
                 </a:solidFill>
@@ -6505,7 +6507,7 @@
               </a:rPr>
               <a:t>Concept checkpoints</a:t>
             </a:r>
-            <a:endParaRPr lang="en-US" sz="1300" dirty="0"/>
+            <a:endParaRPr lang="en-US" sz="1220" dirty="0"/>
           </a:p>
         </p:txBody>
       </p:sp>
@@ -6517,8 +6519,8 @@
         </p:nvSpPr>
         <p:spPr>
           <a:xfrm>
-            <a:off x="7818120" y="3182112"/>
-            <a:ext cx="3090672" cy="718718"/>
+            <a:off x="7726680" y="3182112"/>
+            <a:ext cx="3227832" cy="960120"/>
           </a:xfrm>
           <a:prstGeom prst="rect">
             <a:avLst/>
@@ -6536,7 +6538,7 @@
               <a:buNone/>
             </a:pPr>
             <a:r>
-              <a:rPr lang="en-US" sz="1220" dirty="0">
+              <a:rPr lang="en-US" sz="1140" dirty="0">
                 <a:solidFill>
                   <a:srgbClr val="17364A"/>
                 </a:solidFill>
@@ -6546,14 +6548,14 @@
               </a:rPr>
               <a:t>Are there subgroup performance concerns?</a:t>
             </a:r>
-            <a:endParaRPr lang="en-US" sz="1220" dirty="0"/>
-          </a:p>
-          <a:p>
-            <a:pPr indent="0" marL="0">
-              <a:buNone/>
-            </a:pPr>
-            <a:r>
-              <a:rPr lang="en-US" sz="1220" dirty="0">
+            <a:endParaRPr lang="en-US" sz="1140" dirty="0"/>
+          </a:p>
+          <a:p>
+            <a:pPr indent="0" marL="0">
+              <a:buNone/>
+            </a:pPr>
+            <a:r>
+              <a:rPr lang="en-US" sz="1140" dirty="0">
                 <a:solidFill>
                   <a:srgbClr val="17364A"/>
                 </a:solidFill>
@@ -6563,7 +6565,7 @@
               </a:rPr>
               <a:t>What wording would prevent overclaiming?</a:t>
             </a:r>
-            <a:endParaRPr lang="en-US" sz="1220" dirty="0"/>
+            <a:endParaRPr lang="en-US" sz="1140" dirty="0"/>
           </a:p>
         </p:txBody>
       </p:sp>
@@ -6575,12 +6577,12 @@
         </p:nvSpPr>
         <p:spPr>
           <a:xfrm>
-            <a:off x="7635240" y="4184294"/>
-            <a:ext cx="3474720" cy="1466698"/>
+            <a:off x="7543800" y="4389120"/>
+            <a:ext cx="3611880" cy="1261872"/>
           </a:xfrm>
           <a:prstGeom prst="roundRect">
             <a:avLst>
-              <a:gd name="adj" fmla="val 7481"/>
+              <a:gd name="adj" fmla="val 8696"/>
             </a:avLst>
           </a:prstGeom>
           <a:solidFill>
@@ -6602,8 +6604,8 @@
         </p:nvSpPr>
         <p:spPr>
           <a:xfrm>
-            <a:off x="7799832" y="4330598"/>
-            <a:ext cx="3145536" cy="256032"/>
+            <a:off x="7708392" y="4517136"/>
+            <a:ext cx="3282696" cy="228600"/>
           </a:xfrm>
           <a:prstGeom prst="rect">
             <a:avLst/>
@@ -6619,7 +6621,7 @@
               <a:buNone/>
             </a:pPr>
             <a:r>
-              <a:rPr lang="en-US" sz="1300" b="1" dirty="0">
+              <a:rPr lang="en-US" sz="1220" b="1" dirty="0">
                 <a:solidFill>
                   <a:srgbClr val="0068B7"/>
                 </a:solidFill>
@@ -6629,7 +6631,7 @@
               </a:rPr>
               <a:t>How to validate</a:t>
             </a:r>
-            <a:endParaRPr lang="en-US" sz="1300" dirty="0"/>
+            <a:endParaRPr lang="en-US" sz="1220" dirty="0"/>
           </a:p>
         </p:txBody>
       </p:sp>
@@ -6641,8 +6643,8 @@
         </p:nvSpPr>
         <p:spPr>
           <a:xfrm>
-            <a:off x="7799832" y="4659782"/>
-            <a:ext cx="3145536" cy="899770"/>
+            <a:off x="7708392" y="4828032"/>
+            <a:ext cx="3282696" cy="749808"/>
           </a:xfrm>
           <a:prstGeom prst="rect">
             <a:avLst/>
@@ -6660,7 +6662,7 @@
               <a:buNone/>
             </a:pPr>
             <a:r>
-              <a:rPr lang="en-US" sz="1320" dirty="0">
+              <a:rPr lang="en-US" sz="1220" dirty="0">
                 <a:solidFill>
                   <a:srgbClr val="17364A"/>
                 </a:solidFill>
@@ -6668,9 +6670,9 @@
                 <a:ea typeface="Aptos" pitchFamily="34" charset="-122"/>
                 <a:cs typeface="Aptos" pitchFamily="34" charset="-120"/>
               </a:rPr>
-              <a:t>Connect the concept to data quality, model performance, validation evidence, monitoring measures, and decisions that remain under human control.</a:t>
-            </a:r>
-            <a:endParaRPr lang="en-US" sz="1320" dirty="0"/>
+              <a:t>Connect the concept to data quality, model performance, validation evidence,.</a:t>
+            </a:r>
+            <a:endParaRPr lang="en-US" sz="1220" dirty="0"/>
           </a:p>
         </p:txBody>
       </p:sp>
@@ -6961,8 +6963,8 @@
         </p:nvSpPr>
         <p:spPr>
           <a:xfrm>
-            <a:off x="868680" y="1508760"/>
-            <a:ext cx="6309360" cy="4160520"/>
+            <a:off x="822960" y="1463040"/>
+            <a:ext cx="6565392" cy="4343400"/>
           </a:xfrm>
           <a:prstGeom prst="rect">
             <a:avLst/>
@@ -6980,7 +6982,7 @@
               <a:buNone/>
             </a:pPr>
             <a:r>
-              <a:rPr lang="en-US" sz="2100" dirty="0">
+              <a:rPr lang="en-US" sz="1920" dirty="0">
                 <a:solidFill>
                   <a:srgbClr val="003A63"/>
                 </a:solidFill>
@@ -6990,14 +6992,14 @@
               </a:rPr>
               <a:t>• Create a one-page model communication brief.</a:t>
             </a:r>
-            <a:endParaRPr lang="en-US" sz="2100" dirty="0"/>
-          </a:p>
-          <a:p>
-            <a:pPr indent="0" marL="0">
-              <a:buNone/>
-            </a:pPr>
-            <a:r>
-              <a:rPr lang="en-US" sz="2100" dirty="0">
+            <a:endParaRPr lang="en-US" sz="1920" dirty="0"/>
+          </a:p>
+          <a:p>
+            <a:pPr indent="0" marL="0">
+              <a:buNone/>
+            </a:pPr>
+            <a:r>
+              <a:rPr lang="en-US" sz="1920" dirty="0">
                 <a:solidFill>
                   <a:srgbClr val="003A63"/>
                 </a:solidFill>
@@ -7005,9 +7007,9 @@
                 <a:ea typeface="Aptos" pitchFamily="34" charset="-122"/>
                 <a:cs typeface="Aptos" pitchFamily="34" charset="-120"/>
               </a:rPr>
-              <a:t>• Include the decision question, model result, uncertainty, validation status, limitations,.</a:t>
-            </a:r>
-            <a:endParaRPr lang="en-US" sz="2100" dirty="0"/>
+              <a:t>• Include the decision question, model result, uncertainty, validation status,.</a:t>
+            </a:r>
+            <a:endParaRPr lang="en-US" sz="1920" dirty="0"/>
           </a:p>
         </p:txBody>
       </p:sp>
@@ -7019,12 +7021,12 @@
         </p:nvSpPr>
         <p:spPr>
           <a:xfrm>
-            <a:off x="7635240" y="1325880"/>
-            <a:ext cx="3474720" cy="1207008"/>
+            <a:off x="7543800" y="1325880"/>
+            <a:ext cx="3611880" cy="1261872"/>
           </a:xfrm>
           <a:prstGeom prst="roundRect">
             <a:avLst>
-              <a:gd name="adj" fmla="val 9091"/>
+              <a:gd name="adj" fmla="val 8696"/>
             </a:avLst>
           </a:prstGeom>
           <a:solidFill>
@@ -7046,8 +7048,8 @@
         </p:nvSpPr>
         <p:spPr>
           <a:xfrm>
-            <a:off x="7799832" y="1472184"/>
-            <a:ext cx="3145536" cy="256032"/>
+            <a:off x="7708392" y="1453896"/>
+            <a:ext cx="3282696" cy="228600"/>
           </a:xfrm>
           <a:prstGeom prst="rect">
             <a:avLst/>
@@ -7063,7 +7065,7 @@
               <a:buNone/>
             </a:pPr>
             <a:r>
-              <a:rPr lang="en-US" sz="1300" b="1" dirty="0">
+              <a:rPr lang="en-US" sz="1220" b="1" dirty="0">
                 <a:solidFill>
                   <a:srgbClr val="0068B7"/>
                 </a:solidFill>
@@ -7073,7 +7075,7 @@
               </a:rPr>
               <a:t>Data decision</a:t>
             </a:r>
-            <a:endParaRPr lang="en-US" sz="1300" dirty="0"/>
+            <a:endParaRPr lang="en-US" sz="1220" dirty="0"/>
           </a:p>
         </p:txBody>
       </p:sp>
@@ -7085,8 +7087,8 @@
         </p:nvSpPr>
         <p:spPr>
           <a:xfrm>
-            <a:off x="7799832" y="1801368"/>
-            <a:ext cx="3145536" cy="640080"/>
+            <a:off x="7708392" y="1764792"/>
+            <a:ext cx="3282696" cy="749808"/>
           </a:xfrm>
           <a:prstGeom prst="rect">
             <a:avLst/>
@@ -7104,7 +7106,7 @@
               <a:buNone/>
             </a:pPr>
             <a:r>
-              <a:rPr lang="en-US" sz="1320" dirty="0">
+              <a:rPr lang="en-US" sz="1220" dirty="0">
                 <a:solidFill>
                   <a:srgbClr val="17364A"/>
                 </a:solidFill>
@@ -7114,7 +7116,7 @@
               </a:rPr>
               <a:t>Create a one-page model communication brief.</a:t>
             </a:r>
-            <a:endParaRPr lang="en-US" sz="1320" dirty="0"/>
+            <a:endParaRPr lang="en-US" sz="1220" dirty="0"/>
           </a:p>
         </p:txBody>
       </p:sp>
@@ -7126,12 +7128,12 @@
         </p:nvSpPr>
         <p:spPr>
           <a:xfrm>
-            <a:off x="7635240" y="2670048"/>
-            <a:ext cx="3474720" cy="1377086"/>
+            <a:off x="7543800" y="2724912"/>
+            <a:ext cx="3611880" cy="1527048"/>
           </a:xfrm>
           <a:prstGeom prst="roundRect">
             <a:avLst>
-              <a:gd name="adj" fmla="val 7968"/>
+              <a:gd name="adj" fmla="val 7186"/>
             </a:avLst>
           </a:prstGeom>
           <a:solidFill>
@@ -7153,8 +7155,8 @@
         </p:nvSpPr>
         <p:spPr>
           <a:xfrm>
-            <a:off x="7799832" y="2816352"/>
-            <a:ext cx="3145536" cy="256032"/>
+            <a:off x="7708392" y="2852928"/>
+            <a:ext cx="3282696" cy="228600"/>
           </a:xfrm>
           <a:prstGeom prst="rect">
             <a:avLst/>
@@ -7170,7 +7172,7 @@
               <a:buNone/>
             </a:pPr>
             <a:r>
-              <a:rPr lang="en-US" sz="1300" b="1" dirty="0">
+              <a:rPr lang="en-US" sz="1220" b="1" dirty="0">
                 <a:solidFill>
                   <a:srgbClr val="0068B7"/>
                 </a:solidFill>
@@ -7180,7 +7182,7 @@
               </a:rPr>
               <a:t>Concept checkpoints</a:t>
             </a:r>
-            <a:endParaRPr lang="en-US" sz="1300" dirty="0"/>
+            <a:endParaRPr lang="en-US" sz="1220" dirty="0"/>
           </a:p>
         </p:txBody>
       </p:sp>
@@ -7192,8 +7194,8 @@
         </p:nvSpPr>
         <p:spPr>
           <a:xfrm>
-            <a:off x="7818120" y="3182112"/>
-            <a:ext cx="3090672" cy="718718"/>
+            <a:off x="7726680" y="3182112"/>
+            <a:ext cx="3227832" cy="960120"/>
           </a:xfrm>
           <a:prstGeom prst="rect">
             <a:avLst/>
@@ -7211,7 +7213,7 @@
               <a:buNone/>
             </a:pPr>
             <a:r>
-              <a:rPr lang="en-US" sz="1220" dirty="0">
+              <a:rPr lang="en-US" sz="1140" dirty="0">
                 <a:solidFill>
                   <a:srgbClr val="17364A"/>
                 </a:solidFill>
@@ -7221,14 +7223,14 @@
               </a:rPr>
               <a:t>Create a one-page model communication brief.</a:t>
             </a:r>
-            <a:endParaRPr lang="en-US" sz="1220" dirty="0"/>
-          </a:p>
-          <a:p>
-            <a:pPr indent="0" marL="0">
-              <a:buNone/>
-            </a:pPr>
-            <a:r>
-              <a:rPr lang="en-US" sz="1220" dirty="0">
+            <a:endParaRPr lang="en-US" sz="1140" dirty="0"/>
+          </a:p>
+          <a:p>
+            <a:pPr indent="0" marL="0">
+              <a:buNone/>
+            </a:pPr>
+            <a:r>
+              <a:rPr lang="en-US" sz="1140" dirty="0">
                 <a:solidFill>
                   <a:srgbClr val="17364A"/>
                 </a:solidFill>
@@ -7236,9 +7238,9 @@
                 <a:ea typeface="Aptos" pitchFamily="34" charset="-122"/>
                 <a:cs typeface="Aptos" pitchFamily="34" charset="-120"/>
               </a:rPr>
-              <a:t>Include the decision question, model result, uncertainty,.</a:t>
-            </a:r>
-            <a:endParaRPr lang="en-US" sz="1220" dirty="0"/>
+              <a:t>Include the decision question, model result,.</a:t>
+            </a:r>
+            <a:endParaRPr lang="en-US" sz="1140" dirty="0"/>
           </a:p>
         </p:txBody>
       </p:sp>
@@ -7250,12 +7252,12 @@
         </p:nvSpPr>
         <p:spPr>
           <a:xfrm>
-            <a:off x="7635240" y="4184294"/>
-            <a:ext cx="3474720" cy="1466698"/>
+            <a:off x="7543800" y="4389120"/>
+            <a:ext cx="3611880" cy="1261872"/>
           </a:xfrm>
           <a:prstGeom prst="roundRect">
             <a:avLst>
-              <a:gd name="adj" fmla="val 7481"/>
+              <a:gd name="adj" fmla="val 8696"/>
             </a:avLst>
           </a:prstGeom>
           <a:solidFill>
@@ -7277,8 +7279,8 @@
         </p:nvSpPr>
         <p:spPr>
           <a:xfrm>
-            <a:off x="7799832" y="4330598"/>
-            <a:ext cx="3145536" cy="256032"/>
+            <a:off x="7708392" y="4517136"/>
+            <a:ext cx="3282696" cy="228600"/>
           </a:xfrm>
           <a:prstGeom prst="rect">
             <a:avLst/>
@@ -7294,7 +7296,7 @@
               <a:buNone/>
             </a:pPr>
             <a:r>
-              <a:rPr lang="en-US" sz="1300" b="1" dirty="0">
+              <a:rPr lang="en-US" sz="1220" b="1" dirty="0">
                 <a:solidFill>
                   <a:srgbClr val="0068B7"/>
                 </a:solidFill>
@@ -7304,7 +7306,7 @@
               </a:rPr>
               <a:t>How to validate</a:t>
             </a:r>
-            <a:endParaRPr lang="en-US" sz="1300" dirty="0"/>
+            <a:endParaRPr lang="en-US" sz="1220" dirty="0"/>
           </a:p>
         </p:txBody>
       </p:sp>
@@ -7316,8 +7318,8 @@
         </p:nvSpPr>
         <p:spPr>
           <a:xfrm>
-            <a:off x="7799832" y="4659782"/>
-            <a:ext cx="3145536" cy="899770"/>
+            <a:off x="7708392" y="4828032"/>
+            <a:ext cx="3282696" cy="749808"/>
           </a:xfrm>
           <a:prstGeom prst="rect">
             <a:avLst/>
@@ -7335,7 +7337,7 @@
               <a:buNone/>
             </a:pPr>
             <a:r>
-              <a:rPr lang="en-US" sz="1320" dirty="0">
+              <a:rPr lang="en-US" sz="1220" dirty="0">
                 <a:solidFill>
                   <a:srgbClr val="17364A"/>
                 </a:solidFill>
@@ -7343,9 +7345,9 @@
                 <a:ea typeface="Aptos" pitchFamily="34" charset="-122"/>
                 <a:cs typeface="Aptos" pitchFamily="34" charset="-120"/>
               </a:rPr>
-              <a:t>Use the assignment to test whether you can explain the concept, apply it to a realistic public health situation, and identify what would need review before the work moves forward.</a:t>
-            </a:r>
-            <a:endParaRPr lang="en-US" sz="1320" dirty="0"/>
+              <a:t>Use the assignment to test whether you can explain the concept, apply it to a.</a:t>
+            </a:r>
+            <a:endParaRPr lang="en-US" sz="1220" dirty="0"/>
           </a:p>
         </p:txBody>
       </p:sp>
@@ -7636,8 +7638,8 @@
         </p:nvSpPr>
         <p:spPr>
           <a:xfrm>
-            <a:off x="868680" y="1508760"/>
-            <a:ext cx="6309360" cy="4160520"/>
+            <a:off x="822960" y="1463040"/>
+            <a:ext cx="6565392" cy="4343400"/>
           </a:xfrm>
           <a:prstGeom prst="rect">
             <a:avLst/>
@@ -7655,7 +7657,7 @@
               <a:buNone/>
             </a:pPr>
             <a:r>
-              <a:rPr lang="en-US" sz="2100" dirty="0">
+              <a:rPr lang="en-US" sz="1920" dirty="0">
                 <a:solidFill>
                   <a:srgbClr val="003A63"/>
                 </a:solidFill>
@@ -7665,14 +7667,14 @@
               </a:rPr>
               <a:t>• Model communication brief</a:t>
             </a:r>
-            <a:endParaRPr lang="en-US" sz="2100" dirty="0"/>
-          </a:p>
-          <a:p>
-            <a:pPr indent="0" marL="0">
-              <a:buNone/>
-            </a:pPr>
-            <a:r>
-              <a:rPr lang="en-US" sz="2100" dirty="0">
+            <a:endParaRPr lang="en-US" sz="1920" dirty="0"/>
+          </a:p>
+          <a:p>
+            <a:pPr indent="0" marL="0">
+              <a:buNone/>
+            </a:pPr>
+            <a:r>
+              <a:rPr lang="en-US" sz="1920" dirty="0">
                 <a:solidFill>
                   <a:srgbClr val="003A63"/>
                 </a:solidFill>
@@ -7682,14 +7684,14 @@
               </a:rPr>
               <a:t>• Plain-language uncertainty statement</a:t>
             </a:r>
-            <a:endParaRPr lang="en-US" sz="2100" dirty="0"/>
-          </a:p>
-          <a:p>
-            <a:pPr indent="0" marL="0">
-              <a:buNone/>
-            </a:pPr>
-            <a:r>
-              <a:rPr lang="en-US" sz="2100" dirty="0">
+            <a:endParaRPr lang="en-US" sz="1920" dirty="0"/>
+          </a:p>
+          <a:p>
+            <a:pPr indent="0" marL="0">
+              <a:buNone/>
+            </a:pPr>
+            <a:r>
+              <a:rPr lang="en-US" sz="1920" dirty="0">
                 <a:solidFill>
                   <a:srgbClr val="003A63"/>
                 </a:solidFill>
@@ -7699,7 +7701,7 @@
               </a:rPr>
               <a:t>• Subgroup caveat if relevant</a:t>
             </a:r>
-            <a:endParaRPr lang="en-US" sz="2100" dirty="0"/>
+            <a:endParaRPr lang="en-US" sz="1920" dirty="0"/>
           </a:p>
         </p:txBody>
       </p:sp>
@@ -7711,12 +7713,12 @@
         </p:nvSpPr>
         <p:spPr>
           <a:xfrm>
-            <a:off x="7635240" y="1325880"/>
-            <a:ext cx="3474720" cy="1207008"/>
+            <a:off x="7543800" y="1325880"/>
+            <a:ext cx="3611880" cy="1261872"/>
           </a:xfrm>
           <a:prstGeom prst="roundRect">
             <a:avLst>
-              <a:gd name="adj" fmla="val 9091"/>
+              <a:gd name="adj" fmla="val 8696"/>
             </a:avLst>
           </a:prstGeom>
           <a:solidFill>
@@ -7738,8 +7740,8 @@
         </p:nvSpPr>
         <p:spPr>
           <a:xfrm>
-            <a:off x="7799832" y="1472184"/>
-            <a:ext cx="3145536" cy="256032"/>
+            <a:off x="7708392" y="1453896"/>
+            <a:ext cx="3282696" cy="228600"/>
           </a:xfrm>
           <a:prstGeom prst="rect">
             <a:avLst/>
@@ -7755,7 +7757,7 @@
               <a:buNone/>
             </a:pPr>
             <a:r>
-              <a:rPr lang="en-US" sz="1300" b="1" dirty="0">
+              <a:rPr lang="en-US" sz="1220" b="1" dirty="0">
                 <a:solidFill>
                   <a:srgbClr val="0068B7"/>
                 </a:solidFill>
@@ -7765,7 +7767,7 @@
               </a:rPr>
               <a:t>Data decision</a:t>
             </a:r>
-            <a:endParaRPr lang="en-US" sz="1300" dirty="0"/>
+            <a:endParaRPr lang="en-US" sz="1220" dirty="0"/>
           </a:p>
         </p:txBody>
       </p:sp>
@@ -7777,8 +7779,8 @@
         </p:nvSpPr>
         <p:spPr>
           <a:xfrm>
-            <a:off x="7799832" y="1801368"/>
-            <a:ext cx="3145536" cy="640080"/>
+            <a:off x="7708392" y="1764792"/>
+            <a:ext cx="3282696" cy="749808"/>
           </a:xfrm>
           <a:prstGeom prst="rect">
             <a:avLst/>
@@ -7796,7 +7798,7 @@
               <a:buNone/>
             </a:pPr>
             <a:r>
-              <a:rPr lang="en-US" sz="1320" dirty="0">
+              <a:rPr lang="en-US" sz="1220" dirty="0">
                 <a:solidFill>
                   <a:srgbClr val="17364A"/>
                 </a:solidFill>
@@ -7806,7 +7808,7 @@
               </a:rPr>
               <a:t>Model communication brief</a:t>
             </a:r>
-            <a:endParaRPr lang="en-US" sz="1320" dirty="0"/>
+            <a:endParaRPr lang="en-US" sz="1220" dirty="0"/>
           </a:p>
         </p:txBody>
       </p:sp>
@@ -7818,12 +7820,12 @@
         </p:nvSpPr>
         <p:spPr>
           <a:xfrm>
-            <a:off x="7635240" y="2670048"/>
-            <a:ext cx="3474720" cy="1377086"/>
+            <a:off x="7543800" y="2724912"/>
+            <a:ext cx="3611880" cy="1527048"/>
           </a:xfrm>
           <a:prstGeom prst="roundRect">
             <a:avLst>
-              <a:gd name="adj" fmla="val 7968"/>
+              <a:gd name="adj" fmla="val 7186"/>
             </a:avLst>
           </a:prstGeom>
           <a:solidFill>
@@ -7845,8 +7847,8 @@
         </p:nvSpPr>
         <p:spPr>
           <a:xfrm>
-            <a:off x="7799832" y="2816352"/>
-            <a:ext cx="3145536" cy="256032"/>
+            <a:off x="7708392" y="2852928"/>
+            <a:ext cx="3282696" cy="228600"/>
           </a:xfrm>
           <a:prstGeom prst="rect">
             <a:avLst/>
@@ -7862,7 +7864,7 @@
               <a:buNone/>
             </a:pPr>
             <a:r>
-              <a:rPr lang="en-US" sz="1300" b="1" dirty="0">
+              <a:rPr lang="en-US" sz="1220" b="1" dirty="0">
                 <a:solidFill>
                   <a:srgbClr val="0068B7"/>
                 </a:solidFill>
@@ -7872,7 +7874,7 @@
               </a:rPr>
               <a:t>Concept checkpoints</a:t>
             </a:r>
-            <a:endParaRPr lang="en-US" sz="1300" dirty="0"/>
+            <a:endParaRPr lang="en-US" sz="1220" dirty="0"/>
           </a:p>
         </p:txBody>
       </p:sp>
@@ -7884,8 +7886,8 @@
         </p:nvSpPr>
         <p:spPr>
           <a:xfrm>
-            <a:off x="7818120" y="3182112"/>
-            <a:ext cx="3090672" cy="718718"/>
+            <a:off x="7726680" y="3182112"/>
+            <a:ext cx="3227832" cy="960120"/>
           </a:xfrm>
           <a:prstGeom prst="rect">
             <a:avLst/>
@@ -7903,7 +7905,7 @@
               <a:buNone/>
             </a:pPr>
             <a:r>
-              <a:rPr lang="en-US" sz="1220" dirty="0">
+              <a:rPr lang="en-US" sz="1140" dirty="0">
                 <a:solidFill>
                   <a:srgbClr val="17364A"/>
                 </a:solidFill>
@@ -7913,14 +7915,14 @@
               </a:rPr>
               <a:t>Model communication brief</a:t>
             </a:r>
-            <a:endParaRPr lang="en-US" sz="1220" dirty="0"/>
-          </a:p>
-          <a:p>
-            <a:pPr indent="0" marL="0">
-              <a:buNone/>
-            </a:pPr>
-            <a:r>
-              <a:rPr lang="en-US" sz="1220" dirty="0">
+            <a:endParaRPr lang="en-US" sz="1140" dirty="0"/>
+          </a:p>
+          <a:p>
+            <a:pPr indent="0" marL="0">
+              <a:buNone/>
+            </a:pPr>
+            <a:r>
+              <a:rPr lang="en-US" sz="1140" dirty="0">
                 <a:solidFill>
                   <a:srgbClr val="17364A"/>
                 </a:solidFill>
@@ -7930,14 +7932,14 @@
               </a:rPr>
               <a:t>Plain-language uncertainty statement</a:t>
             </a:r>
-            <a:endParaRPr lang="en-US" sz="1220" dirty="0"/>
-          </a:p>
-          <a:p>
-            <a:pPr indent="0" marL="0">
-              <a:buNone/>
-            </a:pPr>
-            <a:r>
-              <a:rPr lang="en-US" sz="1220" dirty="0">
+            <a:endParaRPr lang="en-US" sz="1140" dirty="0"/>
+          </a:p>
+          <a:p>
+            <a:pPr indent="0" marL="0">
+              <a:buNone/>
+            </a:pPr>
+            <a:r>
+              <a:rPr lang="en-US" sz="1140" dirty="0">
                 <a:solidFill>
                   <a:srgbClr val="17364A"/>
                 </a:solidFill>
@@ -7947,7 +7949,7 @@
               </a:rPr>
               <a:t>Subgroup caveat if relevant</a:t>
             </a:r>
-            <a:endParaRPr lang="en-US" sz="1220" dirty="0"/>
+            <a:endParaRPr lang="en-US" sz="1140" dirty="0"/>
           </a:p>
         </p:txBody>
       </p:sp>
@@ -7959,12 +7961,12 @@
         </p:nvSpPr>
         <p:spPr>
           <a:xfrm>
-            <a:off x="7635240" y="4184294"/>
-            <a:ext cx="3474720" cy="1466698"/>
+            <a:off x="7543800" y="4389120"/>
+            <a:ext cx="3611880" cy="1261872"/>
           </a:xfrm>
           <a:prstGeom prst="roundRect">
             <a:avLst>
-              <a:gd name="adj" fmla="val 7481"/>
+              <a:gd name="adj" fmla="val 8696"/>
             </a:avLst>
           </a:prstGeom>
           <a:solidFill>
@@ -7986,8 +7988,8 @@
         </p:nvSpPr>
         <p:spPr>
           <a:xfrm>
-            <a:off x="7799832" y="4330598"/>
-            <a:ext cx="3145536" cy="256032"/>
+            <a:off x="7708392" y="4517136"/>
+            <a:ext cx="3282696" cy="228600"/>
           </a:xfrm>
           <a:prstGeom prst="rect">
             <a:avLst/>
@@ -8003,7 +8005,7 @@
               <a:buNone/>
             </a:pPr>
             <a:r>
-              <a:rPr lang="en-US" sz="1300" b="1" dirty="0">
+              <a:rPr lang="en-US" sz="1220" b="1" dirty="0">
                 <a:solidFill>
                   <a:srgbClr val="0068B7"/>
                 </a:solidFill>
@@ -8013,7 +8015,7 @@
               </a:rPr>
               <a:t>How to validate</a:t>
             </a:r>
-            <a:endParaRPr lang="en-US" sz="1300" dirty="0"/>
+            <a:endParaRPr lang="en-US" sz="1220" dirty="0"/>
           </a:p>
         </p:txBody>
       </p:sp>
@@ -8025,8 +8027,8 @@
         </p:nvSpPr>
         <p:spPr>
           <a:xfrm>
-            <a:off x="7799832" y="4659782"/>
-            <a:ext cx="3145536" cy="899770"/>
+            <a:off x="7708392" y="4828032"/>
+            <a:ext cx="3282696" cy="749808"/>
           </a:xfrm>
           <a:prstGeom prst="rect">
             <a:avLst/>
@@ -8044,7 +8046,7 @@
               <a:buNone/>
             </a:pPr>
             <a:r>
-              <a:rPr lang="en-US" sz="1320" dirty="0">
+              <a:rPr lang="en-US" sz="1220" dirty="0">
                 <a:solidFill>
                   <a:srgbClr val="17364A"/>
                 </a:solidFill>
@@ -8052,9 +8054,9 @@
                 <a:ea typeface="Aptos" pitchFamily="34" charset="-122"/>
                 <a:cs typeface="Aptos" pitchFamily="34" charset="-120"/>
               </a:rPr>
-              <a:t>Connect the concept to data quality, model performance, validation evidence, monitoring measures, and decisions that remain under human control.</a:t>
-            </a:r>
-            <a:endParaRPr lang="en-US" sz="1320" dirty="0"/>
+              <a:t>Connect the concept to data quality, model performance, validation evidence,.</a:t>
+            </a:r>
+            <a:endParaRPr lang="en-US" sz="1220" dirty="0"/>
           </a:p>
         </p:txBody>
       </p:sp>
@@ -8345,8 +8347,8 @@
         </p:nvSpPr>
         <p:spPr>
           <a:xfrm>
-            <a:off x="868680" y="1508760"/>
-            <a:ext cx="6309360" cy="4160520"/>
+            <a:off x="822960" y="1463040"/>
+            <a:ext cx="6565392" cy="4343400"/>
           </a:xfrm>
           <a:prstGeom prst="rect">
             <a:avLst/>
@@ -8364,7 +8366,7 @@
               <a:buNone/>
             </a:pPr>
             <a:r>
-              <a:rPr lang="en-US" sz="2100" dirty="0">
+              <a:rPr lang="en-US" sz="1920" dirty="0">
                 <a:solidFill>
                   <a:srgbClr val="003A63"/>
                 </a:solidFill>
@@ -8374,7 +8376,7 @@
               </a:rPr>
               <a:t>• Review sign-off note</a:t>
             </a:r>
-            <a:endParaRPr lang="en-US" sz="2100" dirty="0"/>
+            <a:endParaRPr lang="en-US" sz="1920" dirty="0"/>
           </a:p>
         </p:txBody>
       </p:sp>
@@ -8386,12 +8388,12 @@
         </p:nvSpPr>
         <p:spPr>
           <a:xfrm>
-            <a:off x="7635240" y="1325880"/>
-            <a:ext cx="3474720" cy="1207008"/>
+            <a:off x="7543800" y="1325880"/>
+            <a:ext cx="3611880" cy="1261872"/>
           </a:xfrm>
           <a:prstGeom prst="roundRect">
             <a:avLst>
-              <a:gd name="adj" fmla="val 9091"/>
+              <a:gd name="adj" fmla="val 8696"/>
             </a:avLst>
           </a:prstGeom>
           <a:solidFill>
@@ -8413,8 +8415,8 @@
         </p:nvSpPr>
         <p:spPr>
           <a:xfrm>
-            <a:off x="7799832" y="1472184"/>
-            <a:ext cx="3145536" cy="256032"/>
+            <a:off x="7708392" y="1453896"/>
+            <a:ext cx="3282696" cy="228600"/>
           </a:xfrm>
           <a:prstGeom prst="rect">
             <a:avLst/>
@@ -8430,7 +8432,7 @@
               <a:buNone/>
             </a:pPr>
             <a:r>
-              <a:rPr lang="en-US" sz="1300" b="1" dirty="0">
+              <a:rPr lang="en-US" sz="1220" b="1" dirty="0">
                 <a:solidFill>
                   <a:srgbClr val="0068B7"/>
                 </a:solidFill>
@@ -8440,7 +8442,7 @@
               </a:rPr>
               <a:t>Data decision</a:t>
             </a:r>
-            <a:endParaRPr lang="en-US" sz="1300" dirty="0"/>
+            <a:endParaRPr lang="en-US" sz="1220" dirty="0"/>
           </a:p>
         </p:txBody>
       </p:sp>
@@ -8452,8 +8454,8 @@
         </p:nvSpPr>
         <p:spPr>
           <a:xfrm>
-            <a:off x="7799832" y="1801368"/>
-            <a:ext cx="3145536" cy="640080"/>
+            <a:off x="7708392" y="1764792"/>
+            <a:ext cx="3282696" cy="749808"/>
           </a:xfrm>
           <a:prstGeom prst="rect">
             <a:avLst/>
@@ -8471,7 +8473,7 @@
               <a:buNone/>
             </a:pPr>
             <a:r>
-              <a:rPr lang="en-US" sz="1320" dirty="0">
+              <a:rPr lang="en-US" sz="1220" dirty="0">
                 <a:solidFill>
                   <a:srgbClr val="17364A"/>
                 </a:solidFill>
@@ -8481,7 +8483,7 @@
               </a:rPr>
               <a:t>Review sign-off note</a:t>
             </a:r>
-            <a:endParaRPr lang="en-US" sz="1320" dirty="0"/>
+            <a:endParaRPr lang="en-US" sz="1220" dirty="0"/>
           </a:p>
         </p:txBody>
       </p:sp>
@@ -8493,12 +8495,12 @@
         </p:nvSpPr>
         <p:spPr>
           <a:xfrm>
-            <a:off x="7635240" y="2670048"/>
-            <a:ext cx="3474720" cy="1377086"/>
+            <a:off x="7543800" y="2724912"/>
+            <a:ext cx="3611880" cy="1527048"/>
           </a:xfrm>
           <a:prstGeom prst="roundRect">
             <a:avLst>
-              <a:gd name="adj" fmla="val 7968"/>
+              <a:gd name="adj" fmla="val 7186"/>
             </a:avLst>
           </a:prstGeom>
           <a:solidFill>
@@ -8520,8 +8522,8 @@
         </p:nvSpPr>
         <p:spPr>
           <a:xfrm>
-            <a:off x="7799832" y="2816352"/>
-            <a:ext cx="3145536" cy="256032"/>
+            <a:off x="7708392" y="2852928"/>
+            <a:ext cx="3282696" cy="228600"/>
           </a:xfrm>
           <a:prstGeom prst="rect">
             <a:avLst/>
@@ -8537,7 +8539,7 @@
               <a:buNone/>
             </a:pPr>
             <a:r>
-              <a:rPr lang="en-US" sz="1300" b="1" dirty="0">
+              <a:rPr lang="en-US" sz="1220" b="1" dirty="0">
                 <a:solidFill>
                   <a:srgbClr val="0068B7"/>
                 </a:solidFill>
@@ -8547,7 +8549,7 @@
               </a:rPr>
               <a:t>Concept checkpoints</a:t>
             </a:r>
-            <a:endParaRPr lang="en-US" sz="1300" dirty="0"/>
+            <a:endParaRPr lang="en-US" sz="1220" dirty="0"/>
           </a:p>
         </p:txBody>
       </p:sp>
@@ -8559,8 +8561,8 @@
         </p:nvSpPr>
         <p:spPr>
           <a:xfrm>
-            <a:off x="7818120" y="3182112"/>
-            <a:ext cx="3090672" cy="718718"/>
+            <a:off x="7726680" y="3182112"/>
+            <a:ext cx="3227832" cy="960120"/>
           </a:xfrm>
           <a:prstGeom prst="rect">
             <a:avLst/>
@@ -8578,7 +8580,7 @@
               <a:buNone/>
             </a:pPr>
             <a:r>
-              <a:rPr lang="en-US" sz="1220" dirty="0">
+              <a:rPr lang="en-US" sz="1140" dirty="0">
                 <a:solidFill>
                   <a:srgbClr val="17364A"/>
                 </a:solidFill>
@@ -8588,7 +8590,7 @@
               </a:rPr>
               <a:t>Review sign-off note</a:t>
             </a:r>
-            <a:endParaRPr lang="en-US" sz="1220" dirty="0"/>
+            <a:endParaRPr lang="en-US" sz="1140" dirty="0"/>
           </a:p>
         </p:txBody>
       </p:sp>
@@ -8600,12 +8602,12 @@
         </p:nvSpPr>
         <p:spPr>
           <a:xfrm>
-            <a:off x="7635240" y="4184294"/>
-            <a:ext cx="3474720" cy="1466698"/>
+            <a:off x="7543800" y="4389120"/>
+            <a:ext cx="3611880" cy="1261872"/>
           </a:xfrm>
           <a:prstGeom prst="roundRect">
             <a:avLst>
-              <a:gd name="adj" fmla="val 7481"/>
+              <a:gd name="adj" fmla="val 8696"/>
             </a:avLst>
           </a:prstGeom>
           <a:solidFill>
@@ -8627,8 +8629,8 @@
         </p:nvSpPr>
         <p:spPr>
           <a:xfrm>
-            <a:off x="7799832" y="4330598"/>
-            <a:ext cx="3145536" cy="256032"/>
+            <a:off x="7708392" y="4517136"/>
+            <a:ext cx="3282696" cy="228600"/>
           </a:xfrm>
           <a:prstGeom prst="rect">
             <a:avLst/>
@@ -8644,7 +8646,7 @@
               <a:buNone/>
             </a:pPr>
             <a:r>
-              <a:rPr lang="en-US" sz="1300" b="1" dirty="0">
+              <a:rPr lang="en-US" sz="1220" b="1" dirty="0">
                 <a:solidFill>
                   <a:srgbClr val="0068B7"/>
                 </a:solidFill>
@@ -8654,7 +8656,7 @@
               </a:rPr>
               <a:t>How to validate</a:t>
             </a:r>
-            <a:endParaRPr lang="en-US" sz="1300" dirty="0"/>
+            <a:endParaRPr lang="en-US" sz="1220" dirty="0"/>
           </a:p>
         </p:txBody>
       </p:sp>
@@ -8666,8 +8668,8 @@
         </p:nvSpPr>
         <p:spPr>
           <a:xfrm>
-            <a:off x="7799832" y="4659782"/>
-            <a:ext cx="3145536" cy="899770"/>
+            <a:off x="7708392" y="4828032"/>
+            <a:ext cx="3282696" cy="749808"/>
           </a:xfrm>
           <a:prstGeom prst="rect">
             <a:avLst/>
@@ -8685,7 +8687,7 @@
               <a:buNone/>
             </a:pPr>
             <a:r>
-              <a:rPr lang="en-US" sz="1320" dirty="0">
+              <a:rPr lang="en-US" sz="1220" dirty="0">
                 <a:solidFill>
                   <a:srgbClr val="17364A"/>
                 </a:solidFill>
@@ -8693,9 +8695,9 @@
                 <a:ea typeface="Aptos" pitchFamily="34" charset="-122"/>
                 <a:cs typeface="Aptos" pitchFamily="34" charset="-120"/>
               </a:rPr>
-              <a:t>Connect the concept to data quality, model performance, validation evidence, monitoring measures, and decisions that remain under human control.</a:t>
-            </a:r>
-            <a:endParaRPr lang="en-US" sz="1320" dirty="0"/>
+              <a:t>Connect the concept to data quality, model performance, validation evidence,.</a:t>
+            </a:r>
+            <a:endParaRPr lang="en-US" sz="1220" dirty="0"/>
           </a:p>
         </p:txBody>
       </p:sp>
@@ -8986,8 +8988,8 @@
         </p:nvSpPr>
         <p:spPr>
           <a:xfrm>
-            <a:off x="868680" y="1508760"/>
-            <a:ext cx="6309360" cy="4160520"/>
+            <a:off x="822960" y="1463040"/>
+            <a:ext cx="6565392" cy="4343400"/>
           </a:xfrm>
           <a:prstGeom prst="rect">
             <a:avLst/>
@@ -9005,7 +9007,7 @@
               <a:buNone/>
             </a:pPr>
             <a:r>
-              <a:rPr lang="en-US" sz="2100" dirty="0">
+              <a:rPr lang="en-US" sz="1920" dirty="0">
                 <a:solidFill>
                   <a:srgbClr val="003A63"/>
                 </a:solidFill>
@@ -9015,14 +9017,14 @@
               </a:rPr>
               <a:t>• Model communication brief</a:t>
             </a:r>
-            <a:endParaRPr lang="en-US" sz="2100" dirty="0"/>
-          </a:p>
-          <a:p>
-            <a:pPr indent="0" marL="0">
-              <a:buNone/>
-            </a:pPr>
-            <a:r>
-              <a:rPr lang="en-US" sz="2100" dirty="0">
+            <a:endParaRPr lang="en-US" sz="1920" dirty="0"/>
+          </a:p>
+          <a:p>
+            <a:pPr indent="0" marL="0">
+              <a:buNone/>
+            </a:pPr>
+            <a:r>
+              <a:rPr lang="en-US" sz="1920" dirty="0">
                 <a:solidFill>
                   <a:srgbClr val="003A63"/>
                 </a:solidFill>
@@ -9032,14 +9034,14 @@
               </a:rPr>
               <a:t>• Plain-language uncertainty statement</a:t>
             </a:r>
-            <a:endParaRPr lang="en-US" sz="2100" dirty="0"/>
-          </a:p>
-          <a:p>
-            <a:pPr indent="0" marL="0">
-              <a:buNone/>
-            </a:pPr>
-            <a:r>
-              <a:rPr lang="en-US" sz="2100" dirty="0">
+            <a:endParaRPr lang="en-US" sz="1920" dirty="0"/>
+          </a:p>
+          <a:p>
+            <a:pPr indent="0" marL="0">
+              <a:buNone/>
+            </a:pPr>
+            <a:r>
+              <a:rPr lang="en-US" sz="1920" dirty="0">
                 <a:solidFill>
                   <a:srgbClr val="003A63"/>
                 </a:solidFill>
@@ -9049,7 +9051,7 @@
               </a:rPr>
               <a:t>• Subgroup caveat if relevant</a:t>
             </a:r>
-            <a:endParaRPr lang="en-US" sz="2100" dirty="0"/>
+            <a:endParaRPr lang="en-US" sz="1920" dirty="0"/>
           </a:p>
         </p:txBody>
       </p:sp>
@@ -9061,12 +9063,12 @@
         </p:nvSpPr>
         <p:spPr>
           <a:xfrm>
-            <a:off x="7635240" y="1325880"/>
-            <a:ext cx="3474720" cy="1207008"/>
+            <a:off x="7543800" y="1325880"/>
+            <a:ext cx="3611880" cy="1261872"/>
           </a:xfrm>
           <a:prstGeom prst="roundRect">
             <a:avLst>
-              <a:gd name="adj" fmla="val 9091"/>
+              <a:gd name="adj" fmla="val 8696"/>
             </a:avLst>
           </a:prstGeom>
           <a:solidFill>
@@ -9088,8 +9090,8 @@
         </p:nvSpPr>
         <p:spPr>
           <a:xfrm>
-            <a:off x="7799832" y="1472184"/>
-            <a:ext cx="3145536" cy="256032"/>
+            <a:off x="7708392" y="1453896"/>
+            <a:ext cx="3282696" cy="228600"/>
           </a:xfrm>
           <a:prstGeom prst="rect">
             <a:avLst/>
@@ -9105,7 +9107,7 @@
               <a:buNone/>
             </a:pPr>
             <a:r>
-              <a:rPr lang="en-US" sz="1300" b="1" dirty="0">
+              <a:rPr lang="en-US" sz="1220" b="1" dirty="0">
                 <a:solidFill>
                   <a:srgbClr val="0068B7"/>
                 </a:solidFill>
@@ -9115,7 +9117,7 @@
               </a:rPr>
               <a:t>Data decision</a:t>
             </a:r>
-            <a:endParaRPr lang="en-US" sz="1300" dirty="0"/>
+            <a:endParaRPr lang="en-US" sz="1220" dirty="0"/>
           </a:p>
         </p:txBody>
       </p:sp>
@@ -9127,8 +9129,8 @@
         </p:nvSpPr>
         <p:spPr>
           <a:xfrm>
-            <a:off x="7799832" y="1801368"/>
-            <a:ext cx="3145536" cy="640080"/>
+            <a:off x="7708392" y="1764792"/>
+            <a:ext cx="3282696" cy="749808"/>
           </a:xfrm>
           <a:prstGeom prst="rect">
             <a:avLst/>
@@ -9146,7 +9148,7 @@
               <a:buNone/>
             </a:pPr>
             <a:r>
-              <a:rPr lang="en-US" sz="1320" dirty="0">
+              <a:rPr lang="en-US" sz="1220" dirty="0">
                 <a:solidFill>
                   <a:srgbClr val="17364A"/>
                 </a:solidFill>
@@ -9156,7 +9158,7 @@
               </a:rPr>
               <a:t>Model communication brief</a:t>
             </a:r>
-            <a:endParaRPr lang="en-US" sz="1320" dirty="0"/>
+            <a:endParaRPr lang="en-US" sz="1220" dirty="0"/>
           </a:p>
         </p:txBody>
       </p:sp>
@@ -9168,12 +9170,12 @@
         </p:nvSpPr>
         <p:spPr>
           <a:xfrm>
-            <a:off x="7635240" y="2670048"/>
-            <a:ext cx="3474720" cy="1377086"/>
+            <a:off x="7543800" y="2724912"/>
+            <a:ext cx="3611880" cy="1527048"/>
           </a:xfrm>
           <a:prstGeom prst="roundRect">
             <a:avLst>
-              <a:gd name="adj" fmla="val 7968"/>
+              <a:gd name="adj" fmla="val 7186"/>
             </a:avLst>
           </a:prstGeom>
           <a:solidFill>
@@ -9195,8 +9197,8 @@
         </p:nvSpPr>
         <p:spPr>
           <a:xfrm>
-            <a:off x="7799832" y="2816352"/>
-            <a:ext cx="3145536" cy="256032"/>
+            <a:off x="7708392" y="2852928"/>
+            <a:ext cx="3282696" cy="228600"/>
           </a:xfrm>
           <a:prstGeom prst="rect">
             <a:avLst/>
@@ -9212,7 +9214,7 @@
               <a:buNone/>
             </a:pPr>
             <a:r>
-              <a:rPr lang="en-US" sz="1300" b="1" dirty="0">
+              <a:rPr lang="en-US" sz="1220" b="1" dirty="0">
                 <a:solidFill>
                   <a:srgbClr val="0068B7"/>
                 </a:solidFill>
@@ -9222,7 +9224,7 @@
               </a:rPr>
               <a:t>Concept checkpoints</a:t>
             </a:r>
-            <a:endParaRPr lang="en-US" sz="1300" dirty="0"/>
+            <a:endParaRPr lang="en-US" sz="1220" dirty="0"/>
           </a:p>
         </p:txBody>
       </p:sp>
@@ -9234,8 +9236,8 @@
         </p:nvSpPr>
         <p:spPr>
           <a:xfrm>
-            <a:off x="7818120" y="3182112"/>
-            <a:ext cx="3090672" cy="718718"/>
+            <a:off x="7726680" y="3182112"/>
+            <a:ext cx="3227832" cy="960120"/>
           </a:xfrm>
           <a:prstGeom prst="rect">
             <a:avLst/>
@@ -9253,7 +9255,7 @@
               <a:buNone/>
             </a:pPr>
             <a:r>
-              <a:rPr lang="en-US" sz="1220" dirty="0">
+              <a:rPr lang="en-US" sz="1140" dirty="0">
                 <a:solidFill>
                   <a:srgbClr val="17364A"/>
                 </a:solidFill>
@@ -9263,14 +9265,14 @@
               </a:rPr>
               <a:t>Model communication brief</a:t>
             </a:r>
-            <a:endParaRPr lang="en-US" sz="1220" dirty="0"/>
-          </a:p>
-          <a:p>
-            <a:pPr indent="0" marL="0">
-              <a:buNone/>
-            </a:pPr>
-            <a:r>
-              <a:rPr lang="en-US" sz="1220" dirty="0">
+            <a:endParaRPr lang="en-US" sz="1140" dirty="0"/>
+          </a:p>
+          <a:p>
+            <a:pPr indent="0" marL="0">
+              <a:buNone/>
+            </a:pPr>
+            <a:r>
+              <a:rPr lang="en-US" sz="1140" dirty="0">
                 <a:solidFill>
                   <a:srgbClr val="17364A"/>
                 </a:solidFill>
@@ -9280,14 +9282,14 @@
               </a:rPr>
               <a:t>Plain-language uncertainty statement</a:t>
             </a:r>
-            <a:endParaRPr lang="en-US" sz="1220" dirty="0"/>
-          </a:p>
-          <a:p>
-            <a:pPr indent="0" marL="0">
-              <a:buNone/>
-            </a:pPr>
-            <a:r>
-              <a:rPr lang="en-US" sz="1220" dirty="0">
+            <a:endParaRPr lang="en-US" sz="1140" dirty="0"/>
+          </a:p>
+          <a:p>
+            <a:pPr indent="0" marL="0">
+              <a:buNone/>
+            </a:pPr>
+            <a:r>
+              <a:rPr lang="en-US" sz="1140" dirty="0">
                 <a:solidFill>
                   <a:srgbClr val="17364A"/>
                 </a:solidFill>
@@ -9297,7 +9299,7 @@
               </a:rPr>
               <a:t>Subgroup caveat if relevant</a:t>
             </a:r>
-            <a:endParaRPr lang="en-US" sz="1220" dirty="0"/>
+            <a:endParaRPr lang="en-US" sz="1140" dirty="0"/>
           </a:p>
         </p:txBody>
       </p:sp>
@@ -9309,12 +9311,12 @@
         </p:nvSpPr>
         <p:spPr>
           <a:xfrm>
-            <a:off x="7635240" y="4184294"/>
-            <a:ext cx="3474720" cy="1466698"/>
+            <a:off x="7543800" y="4389120"/>
+            <a:ext cx="3611880" cy="1261872"/>
           </a:xfrm>
           <a:prstGeom prst="roundRect">
             <a:avLst>
-              <a:gd name="adj" fmla="val 7481"/>
+              <a:gd name="adj" fmla="val 8696"/>
             </a:avLst>
           </a:prstGeom>
           <a:solidFill>
@@ -9336,8 +9338,8 @@
         </p:nvSpPr>
         <p:spPr>
           <a:xfrm>
-            <a:off x="7799832" y="4330598"/>
-            <a:ext cx="3145536" cy="256032"/>
+            <a:off x="7708392" y="4517136"/>
+            <a:ext cx="3282696" cy="228600"/>
           </a:xfrm>
           <a:prstGeom prst="rect">
             <a:avLst/>
@@ -9353,7 +9355,7 @@
               <a:buNone/>
             </a:pPr>
             <a:r>
-              <a:rPr lang="en-US" sz="1300" b="1" dirty="0">
+              <a:rPr lang="en-US" sz="1220" b="1" dirty="0">
                 <a:solidFill>
                   <a:srgbClr val="0068B7"/>
                 </a:solidFill>
@@ -9363,7 +9365,7 @@
               </a:rPr>
               <a:t>How to validate</a:t>
             </a:r>
-            <a:endParaRPr lang="en-US" sz="1300" dirty="0"/>
+            <a:endParaRPr lang="en-US" sz="1220" dirty="0"/>
           </a:p>
         </p:txBody>
       </p:sp>
@@ -9375,8 +9377,8 @@
         </p:nvSpPr>
         <p:spPr>
           <a:xfrm>
-            <a:off x="7799832" y="4659782"/>
-            <a:ext cx="3145536" cy="899770"/>
+            <a:off x="7708392" y="4828032"/>
+            <a:ext cx="3282696" cy="749808"/>
           </a:xfrm>
           <a:prstGeom prst="rect">
             <a:avLst/>
@@ -9394,7 +9396,7 @@
               <a:buNone/>
             </a:pPr>
             <a:r>
-              <a:rPr lang="en-US" sz="1320" dirty="0">
+              <a:rPr lang="en-US" sz="1220" dirty="0">
                 <a:solidFill>
                   <a:srgbClr val="17364A"/>
                 </a:solidFill>
@@ -9402,9 +9404,9 @@
                 <a:ea typeface="Aptos" pitchFamily="34" charset="-122"/>
                 <a:cs typeface="Aptos" pitchFamily="34" charset="-120"/>
               </a:rPr>
-              <a:t>Use the assignment to test whether you can explain the concept, apply it to a realistic public health situation, and identify what would need review before the work moves forward.</a:t>
-            </a:r>
-            <a:endParaRPr lang="en-US" sz="1320" dirty="0"/>
+              <a:t>Use the assignment to test whether you can explain the concept, apply it to a.</a:t>
+            </a:r>
+            <a:endParaRPr lang="en-US" sz="1220" dirty="0"/>
           </a:p>
         </p:txBody>
       </p:sp>
@@ -9695,8 +9697,8 @@
         </p:nvSpPr>
         <p:spPr>
           <a:xfrm>
-            <a:off x="868680" y="1508760"/>
-            <a:ext cx="6309360" cy="4160520"/>
+            <a:off x="822960" y="1463040"/>
+            <a:ext cx="6565392" cy="4343400"/>
           </a:xfrm>
           <a:prstGeom prst="rect">
             <a:avLst/>
@@ -9714,7 +9716,7 @@
               <a:buNone/>
             </a:pPr>
             <a:r>
-              <a:rPr lang="en-US" sz="2100" dirty="0">
+              <a:rPr lang="en-US" sz="1920" dirty="0">
                 <a:solidFill>
                   <a:srgbClr val="003A63"/>
                 </a:solidFill>
@@ -9724,14 +9726,14 @@
               </a:rPr>
               <a:t>• 1. What is the best reason to communicate uncertainty with model results?</a:t>
             </a:r>
-            <a:endParaRPr lang="en-US" sz="2100" dirty="0"/>
-          </a:p>
-          <a:p>
-            <a:pPr indent="0" marL="0">
-              <a:buNone/>
-            </a:pPr>
-            <a:r>
-              <a:rPr lang="en-US" sz="2100" dirty="0">
+            <a:endParaRPr lang="en-US" sz="1920" dirty="0"/>
+          </a:p>
+          <a:p>
+            <a:pPr indent="0" marL="0">
+              <a:buNone/>
+            </a:pPr>
+            <a:r>
+              <a:rPr lang="en-US" sz="1920" dirty="0">
                 <a:solidFill>
                   <a:srgbClr val="003A63"/>
                 </a:solidFill>
@@ -9741,14 +9743,14 @@
               </a:rPr>
               <a:t>• 2. What is the best reason to assign an accountability owner?</a:t>
             </a:r>
-            <a:endParaRPr lang="en-US" sz="2100" dirty="0"/>
-          </a:p>
-          <a:p>
-            <a:pPr indent="0" marL="0">
-              <a:buNone/>
-            </a:pPr>
-            <a:r>
-              <a:rPr lang="en-US" sz="2100" dirty="0">
+            <a:endParaRPr lang="en-US" sz="1920" dirty="0"/>
+          </a:p>
+          <a:p>
+            <a:pPr indent="0" marL="0">
+              <a:buNone/>
+            </a:pPr>
+            <a:r>
+              <a:rPr lang="en-US" sz="1920" dirty="0">
                 <a:solidFill>
                   <a:srgbClr val="003A63"/>
                 </a:solidFill>
@@ -9758,7 +9760,7 @@
               </a:rPr>
               <a:t>• 3. When should an AI-supported workflow be escalated for review?</a:t>
             </a:r>
-            <a:endParaRPr lang="en-US" sz="2100" dirty="0"/>
+            <a:endParaRPr lang="en-US" sz="1920" dirty="0"/>
           </a:p>
         </p:txBody>
       </p:sp>
@@ -9770,12 +9772,12 @@
         </p:nvSpPr>
         <p:spPr>
           <a:xfrm>
-            <a:off x="7635240" y="1325880"/>
-            <a:ext cx="3474720" cy="1207008"/>
+            <a:off x="7543800" y="1325880"/>
+            <a:ext cx="3611880" cy="1261872"/>
           </a:xfrm>
           <a:prstGeom prst="roundRect">
             <a:avLst>
-              <a:gd name="adj" fmla="val 9091"/>
+              <a:gd name="adj" fmla="val 8696"/>
             </a:avLst>
           </a:prstGeom>
           <a:solidFill>
@@ -9797,8 +9799,8 @@
         </p:nvSpPr>
         <p:spPr>
           <a:xfrm>
-            <a:off x="7799832" y="1472184"/>
-            <a:ext cx="3145536" cy="256032"/>
+            <a:off x="7708392" y="1453896"/>
+            <a:ext cx="3282696" cy="228600"/>
           </a:xfrm>
           <a:prstGeom prst="rect">
             <a:avLst/>
@@ -9814,7 +9816,7 @@
               <a:buNone/>
             </a:pPr>
             <a:r>
-              <a:rPr lang="en-US" sz="1300" b="1" dirty="0">
+              <a:rPr lang="en-US" sz="1220" b="1" dirty="0">
                 <a:solidFill>
                   <a:srgbClr val="0068B7"/>
                 </a:solidFill>
@@ -9824,7 +9826,7 @@
               </a:rPr>
               <a:t>Data decision</a:t>
             </a:r>
-            <a:endParaRPr lang="en-US" sz="1300" dirty="0"/>
+            <a:endParaRPr lang="en-US" sz="1220" dirty="0"/>
           </a:p>
         </p:txBody>
       </p:sp>
@@ -9836,8 +9838,8 @@
         </p:nvSpPr>
         <p:spPr>
           <a:xfrm>
-            <a:off x="7799832" y="1801368"/>
-            <a:ext cx="3145536" cy="640080"/>
+            <a:off x="7708392" y="1764792"/>
+            <a:ext cx="3282696" cy="749808"/>
           </a:xfrm>
           <a:prstGeom prst="rect">
             <a:avLst/>
@@ -9855,7 +9857,7 @@
               <a:buNone/>
             </a:pPr>
             <a:r>
-              <a:rPr lang="en-US" sz="1320" dirty="0">
+              <a:rPr lang="en-US" sz="1220" dirty="0">
                 <a:solidFill>
                   <a:srgbClr val="17364A"/>
                 </a:solidFill>
@@ -9865,7 +9867,7 @@
               </a:rPr>
               <a:t>1. What is the best reason to communicate uncertainty with model results?</a:t>
             </a:r>
-            <a:endParaRPr lang="en-US" sz="1320" dirty="0"/>
+            <a:endParaRPr lang="en-US" sz="1220" dirty="0"/>
           </a:p>
         </p:txBody>
       </p:sp>
@@ -9877,12 +9879,12 @@
         </p:nvSpPr>
         <p:spPr>
           <a:xfrm>
-            <a:off x="7635240" y="2670048"/>
-            <a:ext cx="3474720" cy="1377086"/>
+            <a:off x="7543800" y="2724912"/>
+            <a:ext cx="3611880" cy="1527048"/>
           </a:xfrm>
           <a:prstGeom prst="roundRect">
             <a:avLst>
-              <a:gd name="adj" fmla="val 7968"/>
+              <a:gd name="adj" fmla="val 7186"/>
             </a:avLst>
           </a:prstGeom>
           <a:solidFill>
@@ -9904,8 +9906,8 @@
         </p:nvSpPr>
         <p:spPr>
           <a:xfrm>
-            <a:off x="7799832" y="2816352"/>
-            <a:ext cx="3145536" cy="256032"/>
+            <a:off x="7708392" y="2852928"/>
+            <a:ext cx="3282696" cy="228600"/>
           </a:xfrm>
           <a:prstGeom prst="rect">
             <a:avLst/>
@@ -9921,7 +9923,7 @@
               <a:buNone/>
             </a:pPr>
             <a:r>
-              <a:rPr lang="en-US" sz="1300" b="1" dirty="0">
+              <a:rPr lang="en-US" sz="1220" b="1" dirty="0">
                 <a:solidFill>
                   <a:srgbClr val="0068B7"/>
                 </a:solidFill>
@@ -9931,7 +9933,7 @@
               </a:rPr>
               <a:t>Concept checkpoints</a:t>
             </a:r>
-            <a:endParaRPr lang="en-US" sz="1300" dirty="0"/>
+            <a:endParaRPr lang="en-US" sz="1220" dirty="0"/>
           </a:p>
         </p:txBody>
       </p:sp>
@@ -9943,8 +9945,8 @@
         </p:nvSpPr>
         <p:spPr>
           <a:xfrm>
-            <a:off x="7818120" y="3182112"/>
-            <a:ext cx="3090672" cy="718718"/>
+            <a:off x="7726680" y="3182112"/>
+            <a:ext cx="3227832" cy="960120"/>
           </a:xfrm>
           <a:prstGeom prst="rect">
             <a:avLst/>
@@ -9962,7 +9964,7 @@
               <a:buNone/>
             </a:pPr>
             <a:r>
-              <a:rPr lang="en-US" sz="1220" dirty="0">
+              <a:rPr lang="en-US" sz="1140" dirty="0">
                 <a:solidFill>
                   <a:srgbClr val="17364A"/>
                 </a:solidFill>
@@ -9972,14 +9974,14 @@
               </a:rPr>
               <a:t>1.</a:t>
             </a:r>
-            <a:endParaRPr lang="en-US" sz="1220" dirty="0"/>
-          </a:p>
-          <a:p>
-            <a:pPr indent="0" marL="0">
-              <a:buNone/>
-            </a:pPr>
-            <a:r>
-              <a:rPr lang="en-US" sz="1220" dirty="0">
+            <a:endParaRPr lang="en-US" sz="1140" dirty="0"/>
+          </a:p>
+          <a:p>
+            <a:pPr indent="0" marL="0">
+              <a:buNone/>
+            </a:pPr>
+            <a:r>
+              <a:rPr lang="en-US" sz="1140" dirty="0">
                 <a:solidFill>
                   <a:srgbClr val="17364A"/>
                 </a:solidFill>
@@ -9987,16 +9989,16 @@
                 <a:ea typeface="Aptos" pitchFamily="34" charset="-122"/>
                 <a:cs typeface="Aptos" pitchFamily="34" charset="-120"/>
               </a:rPr>
-              <a:t>What is the best reason to communicate uncertainty with model.</a:t>
-            </a:r>
-            <a:endParaRPr lang="en-US" sz="1220" dirty="0"/>
-          </a:p>
-          <a:p>
-            <a:pPr indent="0" marL="0">
-              <a:buNone/>
-            </a:pPr>
-            <a:r>
-              <a:rPr lang="en-US" sz="1220" dirty="0">
+              <a:t>What is the best reason to communicate uncertainty.</a:t>
+            </a:r>
+            <a:endParaRPr lang="en-US" sz="1140" dirty="0"/>
+          </a:p>
+          <a:p>
+            <a:pPr indent="0" marL="0">
+              <a:buNone/>
+            </a:pPr>
+            <a:r>
+              <a:rPr lang="en-US" sz="1140" dirty="0">
                 <a:solidFill>
                   <a:srgbClr val="17364A"/>
                 </a:solidFill>
@@ -10006,7 +10008,7 @@
               </a:rPr>
               <a:t>2.</a:t>
             </a:r>
-            <a:endParaRPr lang="en-US" sz="1220" dirty="0"/>
+            <a:endParaRPr lang="en-US" sz="1140" dirty="0"/>
           </a:p>
         </p:txBody>
       </p:sp>
@@ -10018,12 +10020,12 @@
         </p:nvSpPr>
         <p:spPr>
           <a:xfrm>
-            <a:off x="7635240" y="4184294"/>
-            <a:ext cx="3474720" cy="1466698"/>
+            <a:off x="7543800" y="4389120"/>
+            <a:ext cx="3611880" cy="1261872"/>
           </a:xfrm>
           <a:prstGeom prst="roundRect">
             <a:avLst>
-              <a:gd name="adj" fmla="val 7481"/>
+              <a:gd name="adj" fmla="val 8696"/>
             </a:avLst>
           </a:prstGeom>
           <a:solidFill>
@@ -10045,8 +10047,8 @@
         </p:nvSpPr>
         <p:spPr>
           <a:xfrm>
-            <a:off x="7799832" y="4330598"/>
-            <a:ext cx="3145536" cy="256032"/>
+            <a:off x="7708392" y="4517136"/>
+            <a:ext cx="3282696" cy="228600"/>
           </a:xfrm>
           <a:prstGeom prst="rect">
             <a:avLst/>
@@ -10062,7 +10064,7 @@
               <a:buNone/>
             </a:pPr>
             <a:r>
-              <a:rPr lang="en-US" sz="1300" b="1" dirty="0">
+              <a:rPr lang="en-US" sz="1220" b="1" dirty="0">
                 <a:solidFill>
                   <a:srgbClr val="0068B7"/>
                 </a:solidFill>
@@ -10072,7 +10074,7 @@
               </a:rPr>
               <a:t>How to validate</a:t>
             </a:r>
-            <a:endParaRPr lang="en-US" sz="1300" dirty="0"/>
+            <a:endParaRPr lang="en-US" sz="1220" dirty="0"/>
           </a:p>
         </p:txBody>
       </p:sp>
@@ -10084,8 +10086,8 @@
         </p:nvSpPr>
         <p:spPr>
           <a:xfrm>
-            <a:off x="7799832" y="4659782"/>
-            <a:ext cx="3145536" cy="899770"/>
+            <a:off x="7708392" y="4828032"/>
+            <a:ext cx="3282696" cy="749808"/>
           </a:xfrm>
           <a:prstGeom prst="rect">
             <a:avLst/>
@@ -10103,7 +10105,7 @@
               <a:buNone/>
             </a:pPr>
             <a:r>
-              <a:rPr lang="en-US" sz="1320" dirty="0">
+              <a:rPr lang="en-US" sz="1220" dirty="0">
                 <a:solidFill>
                   <a:srgbClr val="17364A"/>
                 </a:solidFill>
@@ -10111,9 +10113,9 @@
                 <a:ea typeface="Aptos" pitchFamily="34" charset="-122"/>
                 <a:cs typeface="Aptos" pitchFamily="34" charset="-120"/>
               </a:rPr>
-              <a:t>Use the assignment to test whether you can explain the concept, apply it to a realistic public health situation, and identify what would need review before the work moves forward.</a:t>
-            </a:r>
-            <a:endParaRPr lang="en-US" sz="1320" dirty="0"/>
+              <a:t>Use the assignment to test whether you can explain the concept, apply it to a.</a:t>
+            </a:r>
+            <a:endParaRPr lang="en-US" sz="1220" dirty="0"/>
           </a:p>
         </p:txBody>
       </p:sp>
@@ -10431,7 +10433,7 @@
                 <a:ea typeface="Aptos" pitchFamily="34" charset="-122"/>
                 <a:cs typeface="Aptos" pitchFamily="34" charset="-120"/>
               </a:rPr>
-              <a:t>• Public health staff often need to communicate AI or model results to leaders, partners, the.</a:t>
+              <a:t>• Public health staff often need to communicate AI or model results to.</a:t>
             </a:r>
             <a:endParaRPr lang="en-US" sz="2100" dirty="0"/>
           </a:p>
@@ -10448,7 +10450,7 @@
                 <a:ea typeface="Aptos" pitchFamily="34" charset="-122"/>
                 <a:cs typeface="Aptos" pitchFamily="34" charset="-120"/>
               </a:rPr>
-              <a:t>• This module teaches learners how to explain model outputs, uncertainty, limitations, and.</a:t>
+              <a:t>• This module teaches learners how to explain model outputs, uncertainty,.</a:t>
             </a:r>
             <a:endParaRPr lang="en-US" sz="2100" dirty="0"/>
           </a:p>
@@ -10506,8 +10508,8 @@
         </p:nvSpPr>
         <p:spPr>
           <a:xfrm>
-            <a:off x="8074152" y="1563624"/>
-            <a:ext cx="2825496" cy="256032"/>
+            <a:off x="8074152" y="1545336"/>
+            <a:ext cx="2825496" cy="228600"/>
           </a:xfrm>
           <a:prstGeom prst="rect">
             <a:avLst/>
@@ -10523,7 +10525,7 @@
               <a:buNone/>
             </a:pPr>
             <a:r>
-              <a:rPr lang="en-US" sz="1300" b="1" dirty="0">
+              <a:rPr lang="en-US" sz="1220" b="1" dirty="0">
                 <a:solidFill>
                   <a:srgbClr val="0068B7"/>
                 </a:solidFill>
@@ -10533,7 +10535,7 @@
               </a:rPr>
               <a:t>Module details</a:t>
             </a:r>
-            <a:endParaRPr lang="en-US" sz="1300" dirty="0"/>
+            <a:endParaRPr lang="en-US" sz="1220" dirty="0"/>
           </a:p>
         </p:txBody>
       </p:sp>
@@ -10545,8 +10547,8 @@
         </p:nvSpPr>
         <p:spPr>
           <a:xfrm>
-            <a:off x="8074152" y="1892808"/>
-            <a:ext cx="2825496" cy="1353312"/>
+            <a:off x="8074152" y="1856232"/>
+            <a:ext cx="2825496" cy="1408176"/>
           </a:xfrm>
           <a:prstGeom prst="rect">
             <a:avLst/>
@@ -10564,7 +10566,7 @@
               <a:buNone/>
             </a:pPr>
             <a:r>
-              <a:rPr lang="en-US" sz="1320" dirty="0">
+              <a:rPr lang="en-US" sz="1220" dirty="0">
                 <a:solidFill>
                   <a:srgbClr val="17364A"/>
                 </a:solidFill>
@@ -10572,9 +10574,9 @@
                 <a:ea typeface="Aptos" pitchFamily="34" charset="-122"/>
                 <a:cs typeface="Aptos" pitchFamily="34" charset="-120"/>
               </a:rPr>
-              <a:t>Level: intermediate/practitioner Primary track: Analytics and Modeling Track Appears in tracks: analytics-modeling, communications, public-health-executive-leadership, epidemiology, governance-security</a:t>
-            </a:r>
-            <a:endParaRPr lang="en-US" sz="1320" dirty="0"/>
+              <a:t>Level: intermediate/practitioner Primary track: Analytics and Modeling Track.</a:t>
+            </a:r>
+            <a:endParaRPr lang="en-US" sz="1220" dirty="0"/>
           </a:p>
         </p:txBody>
       </p:sp>
@@ -10613,8 +10615,8 @@
         </p:nvSpPr>
         <p:spPr>
           <a:xfrm>
-            <a:off x="8074152" y="3822192"/>
-            <a:ext cx="2825496" cy="256032"/>
+            <a:off x="8074152" y="3803904"/>
+            <a:ext cx="2825496" cy="228600"/>
           </a:xfrm>
           <a:prstGeom prst="rect">
             <a:avLst/>
@@ -10630,7 +10632,7 @@
               <a:buNone/>
             </a:pPr>
             <a:r>
-              <a:rPr lang="en-US" sz="1300" b="1" dirty="0">
+              <a:rPr lang="en-US" sz="1220" b="1" dirty="0">
                 <a:solidFill>
                   <a:srgbClr val="0068B7"/>
                 </a:solidFill>
@@ -10640,7 +10642,7 @@
               </a:rPr>
               <a:t>Learning sequence</a:t>
             </a:r>
-            <a:endParaRPr lang="en-US" sz="1300" dirty="0"/>
+            <a:endParaRPr lang="en-US" sz="1220" dirty="0"/>
           </a:p>
         </p:txBody>
       </p:sp>
@@ -10652,8 +10654,8 @@
         </p:nvSpPr>
         <p:spPr>
           <a:xfrm>
-            <a:off x="8092440" y="4187952"/>
-            <a:ext cx="2770632" cy="1033272"/>
+            <a:off x="8092440" y="4133088"/>
+            <a:ext cx="2770632" cy="1124712"/>
           </a:xfrm>
           <a:prstGeom prst="rect">
             <a:avLst/>
@@ -10671,7 +10673,7 @@
               <a:buNone/>
             </a:pPr>
             <a:r>
-              <a:rPr lang="en-US" sz="1220" dirty="0">
+              <a:rPr lang="en-US" sz="1140" dirty="0">
                 <a:solidFill>
                   <a:srgbClr val="17364A"/>
                 </a:solidFill>
@@ -10681,14 +10683,14 @@
               </a:rPr>
               <a:t>Read the module for shared vocabulary and context.</a:t>
             </a:r>
-            <a:endParaRPr lang="en-US" sz="1220" dirty="0"/>
-          </a:p>
-          <a:p>
-            <a:pPr indent="0" marL="0">
-              <a:buNone/>
-            </a:pPr>
-            <a:r>
-              <a:rPr lang="en-US" sz="1220" dirty="0">
+            <a:endParaRPr lang="en-US" sz="1140" dirty="0"/>
+          </a:p>
+          <a:p>
+            <a:pPr indent="0" marL="0">
+              <a:buNone/>
+            </a:pPr>
+            <a:r>
+              <a:rPr lang="en-US" sz="1140" dirty="0">
                 <a:solidFill>
                   <a:srgbClr val="17364A"/>
                 </a:solidFill>
@@ -10696,16 +10698,16 @@
                 <a:ea typeface="Aptos" pitchFamily="34" charset="-122"/>
                 <a:cs typeface="Aptos" pitchFamily="34" charset="-120"/>
               </a:rPr>
-              <a:t>Complete the practical exercise to apply the concept.</a:t>
-            </a:r>
-            <a:endParaRPr lang="en-US" sz="1220" dirty="0"/>
-          </a:p>
-          <a:p>
-            <a:pPr indent="0" marL="0">
-              <a:buNone/>
-            </a:pPr>
-            <a:r>
-              <a:rPr lang="en-US" sz="1220" dirty="0">
+              <a:t>Complete the practical exercise to apply the.</a:t>
+            </a:r>
+            <a:endParaRPr lang="en-US" sz="1140" dirty="0"/>
+          </a:p>
+          <a:p>
+            <a:pPr indent="0" marL="0">
+              <a:buNone/>
+            </a:pPr>
+            <a:r>
+              <a:rPr lang="en-US" sz="1140" dirty="0">
                 <a:solidFill>
                   <a:srgbClr val="17364A"/>
                 </a:solidFill>
@@ -10715,7 +10717,7 @@
               </a:rPr>
               <a:t>Use the notes and references for deeper review.</a:t>
             </a:r>
-            <a:endParaRPr lang="en-US" sz="1220" dirty="0"/>
+            <a:endParaRPr lang="en-US" sz="1140" dirty="0"/>
           </a:p>
         </p:txBody>
       </p:sp>
@@ -11006,8 +11008,8 @@
         </p:nvSpPr>
         <p:spPr>
           <a:xfrm>
-            <a:off x="868680" y="1508760"/>
-            <a:ext cx="6309360" cy="4160520"/>
+            <a:off x="822960" y="1463040"/>
+            <a:ext cx="6565392" cy="4343400"/>
           </a:xfrm>
           <a:prstGeom prst="rect">
             <a:avLst/>
@@ -11025,7 +11027,7 @@
               <a:buNone/>
             </a:pPr>
             <a:r>
-              <a:rPr lang="en-US" sz="2100" dirty="0">
+              <a:rPr lang="en-US" sz="1920" dirty="0">
                 <a:solidFill>
                   <a:srgbClr val="003A63"/>
                 </a:solidFill>
@@ -11035,14 +11037,14 @@
               </a:rPr>
               <a:t>• CDC Public Health Data Strategy and Data Modernization resources:.</a:t>
             </a:r>
-            <a:endParaRPr lang="en-US" sz="2100" dirty="0"/>
-          </a:p>
-          <a:p>
-            <a:pPr indent="0" marL="0">
-              <a:buNone/>
-            </a:pPr>
-            <a:r>
-              <a:rPr lang="en-US" sz="2100" dirty="0">
+            <a:endParaRPr lang="en-US" sz="1920" dirty="0"/>
+          </a:p>
+          <a:p>
+            <a:pPr indent="0" marL="0">
+              <a:buNone/>
+            </a:pPr>
+            <a:r>
+              <a:rPr lang="en-US" sz="1920" dirty="0">
                 <a:solidFill>
                   <a:srgbClr val="003A63"/>
                 </a:solidFill>
@@ -11050,16 +11052,16 @@
                 <a:ea typeface="Aptos" pitchFamily="34" charset="-122"/>
                 <a:cs typeface="Aptos" pitchFamily="34" charset="-120"/>
               </a:rPr>
-              <a:t>• NIST Artificial Intelligence Risk Management Framework and NIST Generative AI Profile:.</a:t>
-            </a:r>
-            <a:endParaRPr lang="en-US" sz="2100" dirty="0"/>
-          </a:p>
-          <a:p>
-            <a:pPr indent="0" marL="0">
-              <a:buNone/>
-            </a:pPr>
-            <a:r>
-              <a:rPr lang="en-US" sz="2100" dirty="0">
+              <a:t>• NIST Artificial Intelligence Risk Management Framework and NIST Generative.</a:t>
+            </a:r>
+            <a:endParaRPr lang="en-US" sz="1920" dirty="0"/>
+          </a:p>
+          <a:p>
+            <a:pPr indent="0" marL="0">
+              <a:buNone/>
+            </a:pPr>
+            <a:r>
+              <a:rPr lang="en-US" sz="1920" dirty="0">
                 <a:solidFill>
                   <a:srgbClr val="003A63"/>
                 </a:solidFill>
@@ -11069,7 +11071,7 @@
               </a:rPr>
               <a:t>• WHO Ethics and Governance of Artificial Intelligence for Health guidance:.</a:t>
             </a:r>
-            <a:endParaRPr lang="en-US" sz="2100" dirty="0"/>
+            <a:endParaRPr lang="en-US" sz="1920" dirty="0"/>
           </a:p>
         </p:txBody>
       </p:sp>
@@ -11081,12 +11083,12 @@
         </p:nvSpPr>
         <p:spPr>
           <a:xfrm>
-            <a:off x="7635240" y="1325880"/>
-            <a:ext cx="3474720" cy="1207008"/>
+            <a:off x="7543800" y="1325880"/>
+            <a:ext cx="3611880" cy="1261872"/>
           </a:xfrm>
           <a:prstGeom prst="roundRect">
             <a:avLst>
-              <a:gd name="adj" fmla="val 9091"/>
+              <a:gd name="adj" fmla="val 8696"/>
             </a:avLst>
           </a:prstGeom>
           <a:solidFill>
@@ -11108,8 +11110,8 @@
         </p:nvSpPr>
         <p:spPr>
           <a:xfrm>
-            <a:off x="7799832" y="1472184"/>
-            <a:ext cx="3145536" cy="256032"/>
+            <a:off x="7708392" y="1453896"/>
+            <a:ext cx="3282696" cy="228600"/>
           </a:xfrm>
           <a:prstGeom prst="rect">
             <a:avLst/>
@@ -11125,7 +11127,7 @@
               <a:buNone/>
             </a:pPr>
             <a:r>
-              <a:rPr lang="en-US" sz="1300" b="1" dirty="0">
+              <a:rPr lang="en-US" sz="1220" b="1" dirty="0">
                 <a:solidFill>
                   <a:srgbClr val="0068B7"/>
                 </a:solidFill>
@@ -11135,7 +11137,7 @@
               </a:rPr>
               <a:t>Data decision</a:t>
             </a:r>
-            <a:endParaRPr lang="en-US" sz="1300" dirty="0"/>
+            <a:endParaRPr lang="en-US" sz="1220" dirty="0"/>
           </a:p>
         </p:txBody>
       </p:sp>
@@ -11147,8 +11149,8 @@
         </p:nvSpPr>
         <p:spPr>
           <a:xfrm>
-            <a:off x="7799832" y="1801368"/>
-            <a:ext cx="3145536" cy="640080"/>
+            <a:off x="7708392" y="1764792"/>
+            <a:ext cx="3282696" cy="749808"/>
           </a:xfrm>
           <a:prstGeom prst="rect">
             <a:avLst/>
@@ -11166,7 +11168,7 @@
               <a:buNone/>
             </a:pPr>
             <a:r>
-              <a:rPr lang="en-US" sz="1320" dirty="0">
+              <a:rPr lang="en-US" sz="1220" dirty="0">
                 <a:solidFill>
                   <a:srgbClr val="17364A"/>
                 </a:solidFill>
@@ -11176,7 +11178,7 @@
               </a:rPr>
               <a:t>CDC Public Health Data Strategy and Data Modernization resources:.</a:t>
             </a:r>
-            <a:endParaRPr lang="en-US" sz="1320" dirty="0"/>
+            <a:endParaRPr lang="en-US" sz="1220" dirty="0"/>
           </a:p>
         </p:txBody>
       </p:sp>
@@ -11188,12 +11190,12 @@
         </p:nvSpPr>
         <p:spPr>
           <a:xfrm>
-            <a:off x="7635240" y="2670048"/>
-            <a:ext cx="3474720" cy="1377086"/>
+            <a:off x="7543800" y="2724912"/>
+            <a:ext cx="3611880" cy="1527048"/>
           </a:xfrm>
           <a:prstGeom prst="roundRect">
             <a:avLst>
-              <a:gd name="adj" fmla="val 7968"/>
+              <a:gd name="adj" fmla="val 7186"/>
             </a:avLst>
           </a:prstGeom>
           <a:solidFill>
@@ -11215,8 +11217,8 @@
         </p:nvSpPr>
         <p:spPr>
           <a:xfrm>
-            <a:off x="7799832" y="2816352"/>
-            <a:ext cx="3145536" cy="256032"/>
+            <a:off x="7708392" y="2852928"/>
+            <a:ext cx="3282696" cy="228600"/>
           </a:xfrm>
           <a:prstGeom prst="rect">
             <a:avLst/>
@@ -11232,7 +11234,7 @@
               <a:buNone/>
             </a:pPr>
             <a:r>
-              <a:rPr lang="en-US" sz="1300" b="1" dirty="0">
+              <a:rPr lang="en-US" sz="1220" b="1" dirty="0">
                 <a:solidFill>
                   <a:srgbClr val="0068B7"/>
                 </a:solidFill>
@@ -11242,7 +11244,7 @@
               </a:rPr>
               <a:t>Concept checkpoints</a:t>
             </a:r>
-            <a:endParaRPr lang="en-US" sz="1300" dirty="0"/>
+            <a:endParaRPr lang="en-US" sz="1220" dirty="0"/>
           </a:p>
         </p:txBody>
       </p:sp>
@@ -11254,8 +11256,8 @@
         </p:nvSpPr>
         <p:spPr>
           <a:xfrm>
-            <a:off x="7818120" y="3182112"/>
-            <a:ext cx="3090672" cy="718718"/>
+            <a:off x="7726680" y="3182112"/>
+            <a:ext cx="3227832" cy="960120"/>
           </a:xfrm>
           <a:prstGeom prst="rect">
             <a:avLst/>
@@ -11273,7 +11275,7 @@
               <a:buNone/>
             </a:pPr>
             <a:r>
-              <a:rPr lang="en-US" sz="1220" dirty="0">
+              <a:rPr lang="en-US" sz="1140" dirty="0">
                 <a:solidFill>
                   <a:srgbClr val="17364A"/>
                 </a:solidFill>
@@ -11283,14 +11285,14 @@
               </a:rPr>
               <a:t>OWASP Top 10 for Large Language Model Applications:.</a:t>
             </a:r>
-            <a:endParaRPr lang="en-US" sz="1220" dirty="0"/>
-          </a:p>
-          <a:p>
-            <a:pPr indent="0" marL="0">
-              <a:buNone/>
-            </a:pPr>
-            <a:r>
-              <a:rPr lang="en-US" sz="1220" dirty="0">
+            <a:endParaRPr lang="en-US" sz="1140" dirty="0"/>
+          </a:p>
+          <a:p>
+            <a:pPr indent="0" marL="0">
+              <a:buNone/>
+            </a:pPr>
+            <a:r>
+              <a:rPr lang="en-US" sz="1140" dirty="0">
                 <a:solidFill>
                   <a:srgbClr val="17364A"/>
                 </a:solidFill>
@@ -11298,9 +11300,9 @@
                 <a:ea typeface="Aptos" pitchFamily="34" charset="-122"/>
                 <a:cs typeface="Aptos" pitchFamily="34" charset="-120"/>
               </a:rPr>
-              <a:t>ONC health IT, interoperability, and information blocking.</a:t>
-            </a:r>
-            <a:endParaRPr lang="en-US" sz="1220" dirty="0"/>
+              <a:t>ONC health IT, interoperability, and information.</a:t>
+            </a:r>
+            <a:endParaRPr lang="en-US" sz="1140" dirty="0"/>
           </a:p>
         </p:txBody>
       </p:sp>
@@ -11312,12 +11314,12 @@
         </p:nvSpPr>
         <p:spPr>
           <a:xfrm>
-            <a:off x="7635240" y="4184294"/>
-            <a:ext cx="3474720" cy="1466698"/>
+            <a:off x="7543800" y="4389120"/>
+            <a:ext cx="3611880" cy="1261872"/>
           </a:xfrm>
           <a:prstGeom prst="roundRect">
             <a:avLst>
-              <a:gd name="adj" fmla="val 7481"/>
+              <a:gd name="adj" fmla="val 8696"/>
             </a:avLst>
           </a:prstGeom>
           <a:solidFill>
@@ -11339,8 +11341,8 @@
         </p:nvSpPr>
         <p:spPr>
           <a:xfrm>
-            <a:off x="7799832" y="4330598"/>
-            <a:ext cx="3145536" cy="256032"/>
+            <a:off x="7708392" y="4517136"/>
+            <a:ext cx="3282696" cy="228600"/>
           </a:xfrm>
           <a:prstGeom prst="rect">
             <a:avLst/>
@@ -11356,7 +11358,7 @@
               <a:buNone/>
             </a:pPr>
             <a:r>
-              <a:rPr lang="en-US" sz="1300" b="1" dirty="0">
+              <a:rPr lang="en-US" sz="1220" b="1" dirty="0">
                 <a:solidFill>
                   <a:srgbClr val="0068B7"/>
                 </a:solidFill>
@@ -11366,7 +11368,7 @@
               </a:rPr>
               <a:t>How to validate</a:t>
             </a:r>
-            <a:endParaRPr lang="en-US" sz="1300" dirty="0"/>
+            <a:endParaRPr lang="en-US" sz="1220" dirty="0"/>
           </a:p>
         </p:txBody>
       </p:sp>
@@ -11378,8 +11380,8 @@
         </p:nvSpPr>
         <p:spPr>
           <a:xfrm>
-            <a:off x="7799832" y="4659782"/>
-            <a:ext cx="3145536" cy="899770"/>
+            <a:off x="7708392" y="4828032"/>
+            <a:ext cx="3282696" cy="749808"/>
           </a:xfrm>
           <a:prstGeom prst="rect">
             <a:avLst/>
@@ -11397,7 +11399,7 @@
               <a:buNone/>
             </a:pPr>
             <a:r>
-              <a:rPr lang="en-US" sz="1320" dirty="0">
+              <a:rPr lang="en-US" sz="1220" dirty="0">
                 <a:solidFill>
                   <a:srgbClr val="17364A"/>
                 </a:solidFill>
@@ -11405,9 +11407,9 @@
                 <a:ea typeface="Aptos" pitchFamily="34" charset="-122"/>
                 <a:cs typeface="Aptos" pitchFamily="34" charset="-120"/>
               </a:rPr>
-              <a:t>Connect the concept to data quality, model performance, validation evidence, monitoring measures, and decisions that remain under human control.</a:t>
-            </a:r>
-            <a:endParaRPr lang="en-US" sz="1320" dirty="0"/>
+              <a:t>Connect the concept to data quality, model performance, validation evidence,.</a:t>
+            </a:r>
+            <a:endParaRPr lang="en-US" sz="1220" dirty="0"/>
           </a:p>
         </p:txBody>
       </p:sp>
@@ -11698,8 +11700,8 @@
         </p:nvSpPr>
         <p:spPr>
           <a:xfrm>
-            <a:off x="868680" y="1508760"/>
-            <a:ext cx="6309360" cy="4160520"/>
+            <a:off x="822960" y="1463040"/>
+            <a:ext cx="6565392" cy="4343400"/>
           </a:xfrm>
           <a:prstGeom prst="rect">
             <a:avLst/>
@@ -11717,7 +11719,7 @@
               <a:buNone/>
             </a:pPr>
             <a:r>
-              <a:rPr lang="en-US" sz="2100" dirty="0">
+              <a:rPr lang="en-US" sz="1920" dirty="0">
                 <a:solidFill>
                   <a:srgbClr val="003A63"/>
                 </a:solidFill>
@@ -11725,9 +11727,9 @@
                 <a:ea typeface="Aptos" pitchFamily="34" charset="-122"/>
                 <a:cs typeface="Aptos" pitchFamily="34" charset="-120"/>
               </a:rPr>
-              <a:t>• Agency policies for privacy, public records, cybersecurity, procurement, civil rights,.</a:t>
-            </a:r>
-            <a:endParaRPr lang="en-US" sz="2100" dirty="0"/>
+              <a:t>• Agency policies for privacy, public records, cybersecurity, procurement,.</a:t>
+            </a:r>
+            <a:endParaRPr lang="en-US" sz="1920" dirty="0"/>
           </a:p>
         </p:txBody>
       </p:sp>
@@ -11739,12 +11741,12 @@
         </p:nvSpPr>
         <p:spPr>
           <a:xfrm>
-            <a:off x="7635240" y="1325880"/>
-            <a:ext cx="3474720" cy="1255471"/>
+            <a:off x="7543800" y="1325880"/>
+            <a:ext cx="3611880" cy="1261872"/>
           </a:xfrm>
           <a:prstGeom prst="roundRect">
             <a:avLst>
-              <a:gd name="adj" fmla="val 8740"/>
+              <a:gd name="adj" fmla="val 8696"/>
             </a:avLst>
           </a:prstGeom>
           <a:solidFill>
@@ -11766,8 +11768,8 @@
         </p:nvSpPr>
         <p:spPr>
           <a:xfrm>
-            <a:off x="7799832" y="1472184"/>
-            <a:ext cx="3145536" cy="256032"/>
+            <a:off x="7708392" y="1453896"/>
+            <a:ext cx="3282696" cy="228600"/>
           </a:xfrm>
           <a:prstGeom prst="rect">
             <a:avLst/>
@@ -11783,7 +11785,7 @@
               <a:buNone/>
             </a:pPr>
             <a:r>
-              <a:rPr lang="en-US" sz="1300" b="1" dirty="0">
+              <a:rPr lang="en-US" sz="1220" b="1" dirty="0">
                 <a:solidFill>
                   <a:srgbClr val="0068B7"/>
                 </a:solidFill>
@@ -11793,7 +11795,7 @@
               </a:rPr>
               <a:t>Data decision</a:t>
             </a:r>
-            <a:endParaRPr lang="en-US" sz="1300" dirty="0"/>
+            <a:endParaRPr lang="en-US" sz="1220" dirty="0"/>
           </a:p>
         </p:txBody>
       </p:sp>
@@ -11805,8 +11807,8 @@
         </p:nvSpPr>
         <p:spPr>
           <a:xfrm>
-            <a:off x="7799832" y="1801368"/>
-            <a:ext cx="3145536" cy="688543"/>
+            <a:off x="7708392" y="1764792"/>
+            <a:ext cx="3282696" cy="749808"/>
           </a:xfrm>
           <a:prstGeom prst="rect">
             <a:avLst/>
@@ -11824,7 +11826,7 @@
               <a:buNone/>
             </a:pPr>
             <a:r>
-              <a:rPr lang="en-US" sz="1320" dirty="0">
+              <a:rPr lang="en-US" sz="1220" dirty="0">
                 <a:solidFill>
                   <a:srgbClr val="17364A"/>
                 </a:solidFill>
@@ -11832,9 +11834,9 @@
                 <a:ea typeface="Aptos" pitchFamily="34" charset="-122"/>
                 <a:cs typeface="Aptos" pitchFamily="34" charset="-120"/>
               </a:rPr>
-              <a:t>Agency policies for privacy, public records, cybersecurity, procurement, civil rights, accessibility,.</a:t>
-            </a:r>
-            <a:endParaRPr lang="en-US" sz="1320" dirty="0"/>
+              <a:t>Agency policies for privacy, public records, cybersecurity, procurement, civil.</a:t>
+            </a:r>
+            <a:endParaRPr lang="en-US" sz="1220" dirty="0"/>
           </a:p>
         </p:txBody>
       </p:sp>
@@ -11846,12 +11848,12 @@
         </p:nvSpPr>
         <p:spPr>
           <a:xfrm>
-            <a:off x="7635240" y="2718511"/>
-            <a:ext cx="3474720" cy="1328623"/>
+            <a:off x="7543800" y="2724912"/>
+            <a:ext cx="3611880" cy="1527048"/>
           </a:xfrm>
           <a:prstGeom prst="roundRect">
             <a:avLst>
-              <a:gd name="adj" fmla="val 8259"/>
+              <a:gd name="adj" fmla="val 7186"/>
             </a:avLst>
           </a:prstGeom>
           <a:solidFill>
@@ -11873,8 +11875,8 @@
         </p:nvSpPr>
         <p:spPr>
           <a:xfrm>
-            <a:off x="7799832" y="2864815"/>
-            <a:ext cx="3145536" cy="256032"/>
+            <a:off x="7708392" y="2852928"/>
+            <a:ext cx="3282696" cy="228600"/>
           </a:xfrm>
           <a:prstGeom prst="rect">
             <a:avLst/>
@@ -11890,7 +11892,7 @@
               <a:buNone/>
             </a:pPr>
             <a:r>
-              <a:rPr lang="en-US" sz="1300" b="1" dirty="0">
+              <a:rPr lang="en-US" sz="1220" b="1" dirty="0">
                 <a:solidFill>
                   <a:srgbClr val="0068B7"/>
                 </a:solidFill>
@@ -11900,7 +11902,7 @@
               </a:rPr>
               <a:t>Concept checkpoints</a:t>
             </a:r>
-            <a:endParaRPr lang="en-US" sz="1300" dirty="0"/>
+            <a:endParaRPr lang="en-US" sz="1220" dirty="0"/>
           </a:p>
         </p:txBody>
       </p:sp>
@@ -11912,8 +11914,8 @@
         </p:nvSpPr>
         <p:spPr>
           <a:xfrm>
-            <a:off x="7818120" y="3230575"/>
-            <a:ext cx="3090672" cy="670255"/>
+            <a:off x="7726680" y="3182112"/>
+            <a:ext cx="3227832" cy="960120"/>
           </a:xfrm>
           <a:prstGeom prst="rect">
             <a:avLst/>
@@ -11931,7 +11933,7 @@
               <a:buNone/>
             </a:pPr>
             <a:r>
-              <a:rPr lang="en-US" sz="1220" dirty="0">
+              <a:rPr lang="en-US" sz="1140" dirty="0">
                 <a:solidFill>
                   <a:srgbClr val="17364A"/>
                 </a:solidFill>
@@ -11939,9 +11941,9 @@
                 <a:ea typeface="Aptos" pitchFamily="34" charset="-122"/>
                 <a:cs typeface="Aptos" pitchFamily="34" charset="-120"/>
               </a:rPr>
-              <a:t>Agency policies for privacy, public records, cybersecurity,.</a:t>
-            </a:r>
-            <a:endParaRPr lang="en-US" sz="1220" dirty="0"/>
+              <a:t>Agency policies for privacy, public records,.</a:t>
+            </a:r>
+            <a:endParaRPr lang="en-US" sz="1140" dirty="0"/>
           </a:p>
         </p:txBody>
       </p:sp>
@@ -11953,12 +11955,12 @@
         </p:nvSpPr>
         <p:spPr>
           <a:xfrm>
-            <a:off x="7635240" y="4184294"/>
-            <a:ext cx="3474720" cy="1466698"/>
+            <a:off x="7543800" y="4389120"/>
+            <a:ext cx="3611880" cy="1261872"/>
           </a:xfrm>
           <a:prstGeom prst="roundRect">
             <a:avLst>
-              <a:gd name="adj" fmla="val 7481"/>
+              <a:gd name="adj" fmla="val 8696"/>
             </a:avLst>
           </a:prstGeom>
           <a:solidFill>
@@ -11980,8 +11982,8 @@
         </p:nvSpPr>
         <p:spPr>
           <a:xfrm>
-            <a:off x="7799832" y="4330598"/>
-            <a:ext cx="3145536" cy="256032"/>
+            <a:off x="7708392" y="4517136"/>
+            <a:ext cx="3282696" cy="228600"/>
           </a:xfrm>
           <a:prstGeom prst="rect">
             <a:avLst/>
@@ -11997,7 +11999,7 @@
               <a:buNone/>
             </a:pPr>
             <a:r>
-              <a:rPr lang="en-US" sz="1300" b="1" dirty="0">
+              <a:rPr lang="en-US" sz="1220" b="1" dirty="0">
                 <a:solidFill>
                   <a:srgbClr val="0068B7"/>
                 </a:solidFill>
@@ -12007,7 +12009,7 @@
               </a:rPr>
               <a:t>How to validate</a:t>
             </a:r>
-            <a:endParaRPr lang="en-US" sz="1300" dirty="0"/>
+            <a:endParaRPr lang="en-US" sz="1220" dirty="0"/>
           </a:p>
         </p:txBody>
       </p:sp>
@@ -12019,8 +12021,8 @@
         </p:nvSpPr>
         <p:spPr>
           <a:xfrm>
-            <a:off x="7799832" y="4659782"/>
-            <a:ext cx="3145536" cy="899770"/>
+            <a:off x="7708392" y="4828032"/>
+            <a:ext cx="3282696" cy="749808"/>
           </a:xfrm>
           <a:prstGeom prst="rect">
             <a:avLst/>
@@ -12038,7 +12040,7 @@
               <a:buNone/>
             </a:pPr>
             <a:r>
-              <a:rPr lang="en-US" sz="1320" dirty="0">
+              <a:rPr lang="en-US" sz="1220" dirty="0">
                 <a:solidFill>
                   <a:srgbClr val="17364A"/>
                 </a:solidFill>
@@ -12046,9 +12048,9 @@
                 <a:ea typeface="Aptos" pitchFamily="34" charset="-122"/>
                 <a:cs typeface="Aptos" pitchFamily="34" charset="-120"/>
               </a:rPr>
-              <a:t>Connect the concept to data quality, model performance, validation evidence, monitoring measures, and decisions that remain under human control.</a:t>
-            </a:r>
-            <a:endParaRPr lang="en-US" sz="1320" dirty="0"/>
+              <a:t>Connect the concept to data quality, model performance, validation evidence,.</a:t>
+            </a:r>
+            <a:endParaRPr lang="en-US" sz="1220" dirty="0"/>
           </a:p>
         </p:txBody>
       </p:sp>
@@ -12366,7 +12368,7 @@
                 <a:ea typeface="Aptos" pitchFamily="34" charset="-122"/>
                 <a:cs typeface="Aptos" pitchFamily="34" charset="-120"/>
               </a:rPr>
-              <a:t>• Play 11: Build and Deploy AI Solutions - This lesson informs Play 11 by helping learners.</a:t>
+              <a:t>• Play 11: Build and Deploy AI Solutions - This lesson informs Play 11 by.</a:t>
             </a:r>
             <a:endParaRPr lang="en-US" sz="1900" dirty="0"/>
           </a:p>
@@ -12383,7 +12385,7 @@
                 <a:ea typeface="Aptos" pitchFamily="34" charset="-122"/>
                 <a:cs typeface="Aptos" pitchFamily="34" charset="-120"/>
               </a:rPr>
-              <a:t>• Play 1: Vision &amp; Guardrails - This lesson informs Play 1 by helping learners connect the.</a:t>
+              <a:t>• Play 1: Vision &amp; Guardrails - This lesson informs Play 1 by helping learners.</a:t>
             </a:r>
             <a:endParaRPr lang="en-US" sz="1900" dirty="0"/>
           </a:p>
@@ -12400,7 +12402,7 @@
                 <a:ea typeface="Aptos" pitchFamily="34" charset="-122"/>
                 <a:cs typeface="Aptos" pitchFamily="34" charset="-120"/>
               </a:rPr>
-              <a:t>• Play 7: Prioritize Use Cases - This lesson informs Play 7 by helping learners connect the.</a:t>
+              <a:t>• Play 7: Prioritize Use Cases - This lesson informs Play 7 by helping.</a:t>
             </a:r>
             <a:endParaRPr lang="en-US" sz="1900" dirty="0"/>
           </a:p>
@@ -12417,7 +12419,7 @@
                 <a:ea typeface="Aptos" pitchFamily="34" charset="-122"/>
                 <a:cs typeface="Aptos" pitchFamily="34" charset="-120"/>
               </a:rPr>
-              <a:t>• Play 2: Readiness Assessment - This lesson informs Play 2 by helping learners connect the.</a:t>
+              <a:t>• Play 2: Readiness Assessment - This lesson informs Play 2 by helping.</a:t>
             </a:r>
             <a:endParaRPr lang="en-US" sz="1900" dirty="0"/>
           </a:p>
@@ -12458,8 +12460,8 @@
         </p:nvSpPr>
         <p:spPr>
           <a:xfrm>
-            <a:off x="8211312" y="1563624"/>
-            <a:ext cx="2734056" cy="256032"/>
+            <a:off x="8211312" y="1545336"/>
+            <a:ext cx="2734056" cy="228600"/>
           </a:xfrm>
           <a:prstGeom prst="rect">
             <a:avLst/>
@@ -12475,7 +12477,7 @@
               <a:buNone/>
             </a:pPr>
             <a:r>
-              <a:rPr lang="en-US" sz="1300" b="1" dirty="0">
+              <a:rPr lang="en-US" sz="1220" b="1" dirty="0">
                 <a:solidFill>
                   <a:srgbClr val="0068B7"/>
                 </a:solidFill>
@@ -12485,7 +12487,7 @@
               </a:rPr>
               <a:t>Apply the lesson</a:t>
             </a:r>
-            <a:endParaRPr lang="en-US" sz="1300" dirty="0"/>
+            <a:endParaRPr lang="en-US" sz="1220" dirty="0"/>
           </a:p>
         </p:txBody>
       </p:sp>
@@ -12497,8 +12499,8 @@
         </p:nvSpPr>
         <p:spPr>
           <a:xfrm>
-            <a:off x="8211312" y="1892808"/>
-            <a:ext cx="2734056" cy="1536192"/>
+            <a:off x="8211312" y="1856232"/>
+            <a:ext cx="2734056" cy="1591056"/>
           </a:xfrm>
           <a:prstGeom prst="rect">
             <a:avLst/>
@@ -12516,7 +12518,7 @@
               <a:buNone/>
             </a:pPr>
             <a:r>
-              <a:rPr lang="en-US" sz="1320" dirty="0">
+              <a:rPr lang="en-US" sz="1220" dirty="0">
                 <a:solidFill>
                   <a:srgbClr val="17364A"/>
                 </a:solidFill>
@@ -12524,9 +12526,9 @@
                 <a:ea typeface="Aptos" pitchFamily="34" charset="-122"/>
                 <a:cs typeface="Aptos" pitchFamily="34" charset="-120"/>
               </a:rPr>
-              <a:t>Use the related plays to identify decisions, participants, timing, approvals, and documentation needed for responsible implementation.</a:t>
-            </a:r>
-            <a:endParaRPr lang="en-US" sz="1320" dirty="0"/>
+              <a:t>Use the related plays to identify decisions, participants, timing, approvals,.</a:t>
+            </a:r>
+            <a:endParaRPr lang="en-US" sz="1220" dirty="0"/>
           </a:p>
         </p:txBody>
       </p:sp>
@@ -12565,8 +12567,8 @@
         </p:nvSpPr>
         <p:spPr>
           <a:xfrm>
-            <a:off x="8211312" y="3941064"/>
-            <a:ext cx="2734056" cy="256032"/>
+            <a:off x="8211312" y="3922776"/>
+            <a:ext cx="2734056" cy="228600"/>
           </a:xfrm>
           <a:prstGeom prst="rect">
             <a:avLst/>
@@ -12582,7 +12584,7 @@
               <a:buNone/>
             </a:pPr>
             <a:r>
-              <a:rPr lang="en-US" sz="1300" b="1" dirty="0">
+              <a:rPr lang="en-US" sz="1220" b="1" dirty="0">
                 <a:solidFill>
                   <a:srgbClr val="0068B7"/>
                 </a:solidFill>
@@ -12592,7 +12594,7 @@
               </a:rPr>
               <a:t>Use the play links to</a:t>
             </a:r>
-            <a:endParaRPr lang="en-US" sz="1300" dirty="0"/>
+            <a:endParaRPr lang="en-US" sz="1220" dirty="0"/>
           </a:p>
         </p:txBody>
       </p:sp>
@@ -12604,8 +12606,8 @@
         </p:nvSpPr>
         <p:spPr>
           <a:xfrm>
-            <a:off x="8229600" y="4306824"/>
-            <a:ext cx="2679192" cy="941832"/>
+            <a:off x="8229600" y="4251960"/>
+            <a:ext cx="2679192" cy="1033272"/>
           </a:xfrm>
           <a:prstGeom prst="rect">
             <a:avLst/>
@@ -12623,7 +12625,7 @@
               <a:buNone/>
             </a:pPr>
             <a:r>
-              <a:rPr lang="en-US" sz="1220" dirty="0">
+              <a:rPr lang="en-US" sz="1140" dirty="0">
                 <a:solidFill>
                   <a:srgbClr val="17364A"/>
                 </a:solidFill>
@@ -12633,14 +12635,14 @@
               </a:rPr>
               <a:t>Locate the decision point in the playbook sequence.</a:t>
             </a:r>
-            <a:endParaRPr lang="en-US" sz="1220" dirty="0"/>
-          </a:p>
-          <a:p>
-            <a:pPr indent="0" marL="0">
-              <a:buNone/>
-            </a:pPr>
-            <a:r>
-              <a:rPr lang="en-US" sz="1220" dirty="0">
+            <a:endParaRPr lang="en-US" sz="1140" dirty="0"/>
+          </a:p>
+          <a:p>
+            <a:pPr indent="0" marL="0">
+              <a:buNone/>
+            </a:pPr>
+            <a:r>
+              <a:rPr lang="en-US" sz="1140" dirty="0">
                 <a:solidFill>
                   <a:srgbClr val="17364A"/>
                 </a:solidFill>
@@ -12650,14 +12652,14 @@
               </a:rPr>
               <a:t>Identify who should participate in the work.</a:t>
             </a:r>
-            <a:endParaRPr lang="en-US" sz="1220" dirty="0"/>
-          </a:p>
-          <a:p>
-            <a:pPr indent="0" marL="0">
-              <a:buNone/>
-            </a:pPr>
-            <a:r>
-              <a:rPr lang="en-US" sz="1220" dirty="0">
+            <a:endParaRPr lang="en-US" sz="1140" dirty="0"/>
+          </a:p>
+          <a:p>
+            <a:pPr indent="0" marL="0">
+              <a:buNone/>
+            </a:pPr>
+            <a:r>
+              <a:rPr lang="en-US" sz="1140" dirty="0">
                 <a:solidFill>
                   <a:srgbClr val="17364A"/>
                 </a:solidFill>
@@ -12665,9 +12667,9 @@
                 <a:ea typeface="Aptos" pitchFamily="34" charset="-122"/>
                 <a:cs typeface="Aptos" pitchFamily="34" charset="-120"/>
               </a:rPr>
-              <a:t>Document the review, approval, or implementation step.</a:t>
-            </a:r>
-            <a:endParaRPr lang="en-US" sz="1220" dirty="0"/>
+              <a:t>Document the review, approval, or implementation.</a:t>
+            </a:r>
+            <a:endParaRPr lang="en-US" sz="1140" dirty="0"/>
           </a:p>
         </p:txBody>
       </p:sp>
@@ -12985,7 +12987,7 @@
                 <a:ea typeface="Aptos" pitchFamily="34" charset="-122"/>
                 <a:cs typeface="Aptos" pitchFamily="34" charset="-120"/>
               </a:rPr>
-              <a:t>• Tool 3: Equity Impact Assessment Checklist (Checklist) - Use this tool to complete or.</a:t>
+              <a:t>• Tool 3: Equity Impact Assessment Checklist (Checklist) - Use this tool to.</a:t>
             </a:r>
             <a:endParaRPr lang="en-US" sz="1850" dirty="0"/>
           </a:p>
@@ -13002,7 +13004,7 @@
                 <a:ea typeface="Aptos" pitchFamily="34" charset="-122"/>
                 <a:cs typeface="Aptos" pitchFamily="34" charset="-120"/>
               </a:rPr>
-              <a:t>• Tool 4: AI Policy Landscape Scan (Worksheet) - Use AI Policy Landscape Scan to translate this.</a:t>
+              <a:t>• Tool 4: AI Policy Landscape Scan (Worksheet) - Use AI Policy Landscape Scan.</a:t>
             </a:r>
             <a:endParaRPr lang="en-US" sz="1850" dirty="0"/>
           </a:p>
@@ -13019,7 +13021,7 @@
                 <a:ea typeface="Aptos" pitchFamily="34" charset="-122"/>
                 <a:cs typeface="Aptos" pitchFamily="34" charset="-120"/>
               </a:rPr>
-              <a:t>• Tool 5: AI Environmental and Resource Impact Review (Checklist) - Use AI Environmental and.</a:t>
+              <a:t>• Tool 5: AI Environmental and Resource Impact Review (Checklist) - Use AI.</a:t>
             </a:r>
             <a:endParaRPr lang="en-US" sz="1850" dirty="0"/>
           </a:p>
@@ -13036,7 +13038,7 @@
                 <a:ea typeface="Aptos" pitchFamily="34" charset="-122"/>
                 <a:cs typeface="Aptos" pitchFamily="34" charset="-120"/>
               </a:rPr>
-              <a:t>• Tool 6: Human-Centered AI Decision Rule Checklist (Checklist) - Use Human-Centered AI Decision.</a:t>
+              <a:t>• Tool 6: Human-Centered AI Decision Rule Checklist (Checklist) - Use.</a:t>
             </a:r>
             <a:endParaRPr lang="en-US" sz="1850" dirty="0"/>
           </a:p>
@@ -13077,8 +13079,8 @@
         </p:nvSpPr>
         <p:spPr>
           <a:xfrm>
-            <a:off x="8211312" y="1563624"/>
-            <a:ext cx="2734056" cy="256032"/>
+            <a:off x="8211312" y="1545336"/>
+            <a:ext cx="2734056" cy="228600"/>
           </a:xfrm>
           <a:prstGeom prst="rect">
             <a:avLst/>
@@ -13094,7 +13096,7 @@
               <a:buNone/>
             </a:pPr>
             <a:r>
-              <a:rPr lang="en-US" sz="1300" b="1" dirty="0">
+              <a:rPr lang="en-US" sz="1220" b="1" dirty="0">
                 <a:solidFill>
                   <a:srgbClr val="0068B7"/>
                 </a:solidFill>
@@ -13104,7 +13106,7 @@
               </a:rPr>
               <a:t>Use the tools</a:t>
             </a:r>
-            <a:endParaRPr lang="en-US" sz="1300" dirty="0"/>
+            <a:endParaRPr lang="en-US" sz="1220" dirty="0"/>
           </a:p>
         </p:txBody>
       </p:sp>
@@ -13116,8 +13118,8 @@
         </p:nvSpPr>
         <p:spPr>
           <a:xfrm>
-            <a:off x="8211312" y="1892808"/>
-            <a:ext cx="2734056" cy="1536192"/>
+            <a:off x="8211312" y="1856232"/>
+            <a:ext cx="2734056" cy="1591056"/>
           </a:xfrm>
           <a:prstGeom prst="rect">
             <a:avLst/>
@@ -13135,7 +13137,7 @@
               <a:buNone/>
             </a:pPr>
             <a:r>
-              <a:rPr lang="en-US" sz="1320" dirty="0">
+              <a:rPr lang="en-US" sz="1220" dirty="0">
                 <a:solidFill>
                   <a:srgbClr val="17364A"/>
                 </a:solidFill>
@@ -13143,9 +13145,9 @@
                 <a:ea typeface="Aptos" pitchFamily="34" charset="-122"/>
                 <a:cs typeface="Aptos" pitchFamily="34" charset="-120"/>
               </a:rPr>
-              <a:t>Use linked tools when your department needs a structured worksheet, template, checklist, review process, or documentation artifact.</a:t>
-            </a:r>
-            <a:endParaRPr lang="en-US" sz="1320" dirty="0"/>
+              <a:t>Use linked tools when your department needs a structured worksheet, template,.</a:t>
+            </a:r>
+            <a:endParaRPr lang="en-US" sz="1220" dirty="0"/>
           </a:p>
         </p:txBody>
       </p:sp>
@@ -13184,8 +13186,8 @@
         </p:nvSpPr>
         <p:spPr>
           <a:xfrm>
-            <a:off x="8211312" y="3941064"/>
-            <a:ext cx="2734056" cy="256032"/>
+            <a:off x="8211312" y="3922776"/>
+            <a:ext cx="2734056" cy="228600"/>
           </a:xfrm>
           <a:prstGeom prst="rect">
             <a:avLst/>
@@ -13201,7 +13203,7 @@
               <a:buNone/>
             </a:pPr>
             <a:r>
-              <a:rPr lang="en-US" sz="1300" b="1" dirty="0">
+              <a:rPr lang="en-US" sz="1220" b="1" dirty="0">
                 <a:solidFill>
                   <a:srgbClr val="0068B7"/>
                 </a:solidFill>
@@ -13211,7 +13213,7 @@
               </a:rPr>
               <a:t>Tool selection cues</a:t>
             </a:r>
-            <a:endParaRPr lang="en-US" sz="1300" dirty="0"/>
+            <a:endParaRPr lang="en-US" sz="1220" dirty="0"/>
           </a:p>
         </p:txBody>
       </p:sp>
@@ -13223,8 +13225,8 @@
         </p:nvSpPr>
         <p:spPr>
           <a:xfrm>
-            <a:off x="8229600" y="4306824"/>
-            <a:ext cx="2679192" cy="941832"/>
+            <a:off x="8229600" y="4251960"/>
+            <a:ext cx="2679192" cy="1033272"/>
           </a:xfrm>
           <a:prstGeom prst="rect">
             <a:avLst/>
@@ -13242,7 +13244,7 @@
               <a:buNone/>
             </a:pPr>
             <a:r>
-              <a:rPr lang="en-US" sz="1220" dirty="0">
+              <a:rPr lang="en-US" sz="1140" dirty="0">
                 <a:solidFill>
                   <a:srgbClr val="17364A"/>
                 </a:solidFill>
@@ -13252,14 +13254,14 @@
               </a:rPr>
               <a:t>Use a tool when no comparable local process exists.</a:t>
             </a:r>
-            <a:endParaRPr lang="en-US" sz="1220" dirty="0"/>
-          </a:p>
-          <a:p>
-            <a:pPr indent="0" marL="0">
-              <a:buNone/>
-            </a:pPr>
-            <a:r>
-              <a:rPr lang="en-US" sz="1220" dirty="0">
+            <a:endParaRPr lang="en-US" sz="1140" dirty="0"/>
+          </a:p>
+          <a:p>
+            <a:pPr indent="0" marL="0">
+              <a:buNone/>
+            </a:pPr>
+            <a:r>
+              <a:rPr lang="en-US" sz="1140" dirty="0">
                 <a:solidFill>
                   <a:srgbClr val="17364A"/>
                 </a:solidFill>
@@ -13267,16 +13269,16 @@
                 <a:ea typeface="Aptos" pitchFamily="34" charset="-122"/>
                 <a:cs typeface="Aptos" pitchFamily="34" charset="-120"/>
               </a:rPr>
-              <a:t>Adapt existing department templates when they already fit the.</a:t>
-            </a:r>
-            <a:endParaRPr lang="en-US" sz="1220" dirty="0"/>
-          </a:p>
-          <a:p>
-            <a:pPr indent="0" marL="0">
-              <a:buNone/>
-            </a:pPr>
-            <a:r>
-              <a:rPr lang="en-US" sz="1220" dirty="0">
+              <a:t>Adapt existing department templates when they.</a:t>
+            </a:r>
+            <a:endParaRPr lang="en-US" sz="1140" dirty="0"/>
+          </a:p>
+          <a:p>
+            <a:pPr indent="0" marL="0">
+              <a:buNone/>
+            </a:pPr>
+            <a:r>
+              <a:rPr lang="en-US" sz="1140" dirty="0">
                 <a:solidFill>
                   <a:srgbClr val="17364A"/>
                 </a:solidFill>
@@ -13284,9 +13286,9 @@
                 <a:ea typeface="Aptos" pitchFamily="34" charset="-122"/>
                 <a:cs typeface="Aptos" pitchFamily="34" charset="-120"/>
               </a:rPr>
-              <a:t>Save the completed artifact as evidence of the decision.</a:t>
-            </a:r>
-            <a:endParaRPr lang="en-US" sz="1220" dirty="0"/>
+              <a:t>Save the completed artifact as evidence of the.</a:t>
+            </a:r>
+            <a:endParaRPr lang="en-US" sz="1140" dirty="0"/>
           </a:p>
         </p:txBody>
       </p:sp>
@@ -13577,8 +13579,8 @@
         </p:nvSpPr>
         <p:spPr>
           <a:xfrm>
-            <a:off x="868680" y="1508760"/>
-            <a:ext cx="6309360" cy="4160520"/>
+            <a:off x="822960" y="1463040"/>
+            <a:ext cx="6565392" cy="4343400"/>
           </a:xfrm>
           <a:prstGeom prst="rect">
             <a:avLst/>
@@ -13596,7 +13598,7 @@
               <a:buNone/>
             </a:pPr>
             <a:r>
-              <a:rPr lang="en-US" sz="2100" dirty="0">
+              <a:rPr lang="en-US" sz="1920" dirty="0">
                 <a:solidFill>
                   <a:srgbClr val="003A63"/>
                 </a:solidFill>
@@ -13606,14 +13608,14 @@
               </a:rPr>
               <a:t>• Explain model results in plain language for nontechnical audiences.</a:t>
             </a:r>
-            <a:endParaRPr lang="en-US" sz="2100" dirty="0"/>
-          </a:p>
-          <a:p>
-            <a:pPr indent="0" marL="0">
-              <a:buNone/>
-            </a:pPr>
-            <a:r>
-              <a:rPr lang="en-US" sz="2100" dirty="0">
+            <a:endParaRPr lang="en-US" sz="1920" dirty="0"/>
+          </a:p>
+          <a:p>
+            <a:pPr indent="0" marL="0">
+              <a:buNone/>
+            </a:pPr>
+            <a:r>
+              <a:rPr lang="en-US" sz="1920" dirty="0">
                 <a:solidFill>
                   <a:srgbClr val="003A63"/>
                 </a:solidFill>
@@ -13623,14 +13625,14 @@
               </a:rPr>
               <a:t>• Distinguish uncertainty, variability, error, bias, and data limitations.</a:t>
             </a:r>
-            <a:endParaRPr lang="en-US" sz="2100" dirty="0"/>
-          </a:p>
-          <a:p>
-            <a:pPr indent="0" marL="0">
-              <a:buNone/>
-            </a:pPr>
-            <a:r>
-              <a:rPr lang="en-US" sz="2100" dirty="0">
+            <a:endParaRPr lang="en-US" sz="1920" dirty="0"/>
+          </a:p>
+          <a:p>
+            <a:pPr indent="0" marL="0">
+              <a:buNone/>
+            </a:pPr>
+            <a:r>
+              <a:rPr lang="en-US" sz="1920" dirty="0">
                 <a:solidFill>
                   <a:srgbClr val="003A63"/>
                 </a:solidFill>
@@ -13638,9 +13640,9 @@
                 <a:ea typeface="Aptos" pitchFamily="34" charset="-122"/>
                 <a:cs typeface="Aptos" pitchFamily="34" charset="-120"/>
               </a:rPr>
-              <a:t>• Identify when model results should include confidence intervals, prediction intervals,.</a:t>
-            </a:r>
-            <a:endParaRPr lang="en-US" sz="2100" dirty="0"/>
+              <a:t>• Identify when model results should include confidence intervals, prediction.</a:t>
+            </a:r>
+            <a:endParaRPr lang="en-US" sz="1920" dirty="0"/>
           </a:p>
         </p:txBody>
       </p:sp>
@@ -13652,12 +13654,12 @@
         </p:nvSpPr>
         <p:spPr>
           <a:xfrm>
-            <a:off x="7635240" y="1325880"/>
-            <a:ext cx="3474720" cy="1207008"/>
+            <a:off x="7543800" y="1325880"/>
+            <a:ext cx="3611880" cy="1261872"/>
           </a:xfrm>
           <a:prstGeom prst="roundRect">
             <a:avLst>
-              <a:gd name="adj" fmla="val 9091"/>
+              <a:gd name="adj" fmla="val 8696"/>
             </a:avLst>
           </a:prstGeom>
           <a:solidFill>
@@ -13679,8 +13681,8 @@
         </p:nvSpPr>
         <p:spPr>
           <a:xfrm>
-            <a:off x="7799832" y="1472184"/>
-            <a:ext cx="3145536" cy="256032"/>
+            <a:off x="7708392" y="1453896"/>
+            <a:ext cx="3282696" cy="228600"/>
           </a:xfrm>
           <a:prstGeom prst="rect">
             <a:avLst/>
@@ -13696,7 +13698,7 @@
               <a:buNone/>
             </a:pPr>
             <a:r>
-              <a:rPr lang="en-US" sz="1300" b="1" dirty="0">
+              <a:rPr lang="en-US" sz="1220" b="1" dirty="0">
                 <a:solidFill>
                   <a:srgbClr val="0068B7"/>
                 </a:solidFill>
@@ -13706,7 +13708,7 @@
               </a:rPr>
               <a:t>Data decision</a:t>
             </a:r>
-            <a:endParaRPr lang="en-US" sz="1300" dirty="0"/>
+            <a:endParaRPr lang="en-US" sz="1220" dirty="0"/>
           </a:p>
         </p:txBody>
       </p:sp>
@@ -13718,8 +13720,8 @@
         </p:nvSpPr>
         <p:spPr>
           <a:xfrm>
-            <a:off x="7799832" y="1801368"/>
-            <a:ext cx="3145536" cy="640080"/>
+            <a:off x="7708392" y="1764792"/>
+            <a:ext cx="3282696" cy="749808"/>
           </a:xfrm>
           <a:prstGeom prst="rect">
             <a:avLst/>
@@ -13737,7 +13739,7 @@
               <a:buNone/>
             </a:pPr>
             <a:r>
-              <a:rPr lang="en-US" sz="1320" dirty="0">
+              <a:rPr lang="en-US" sz="1220" dirty="0">
                 <a:solidFill>
                   <a:srgbClr val="17364A"/>
                 </a:solidFill>
@@ -13747,7 +13749,7 @@
               </a:rPr>
               <a:t>Explain model results in plain language for nontechnical audiences.</a:t>
             </a:r>
-            <a:endParaRPr lang="en-US" sz="1320" dirty="0"/>
+            <a:endParaRPr lang="en-US" sz="1220" dirty="0"/>
           </a:p>
         </p:txBody>
       </p:sp>
@@ -13759,12 +13761,12 @@
         </p:nvSpPr>
         <p:spPr>
           <a:xfrm>
-            <a:off x="7635240" y="2670048"/>
-            <a:ext cx="3474720" cy="1377086"/>
+            <a:off x="7543800" y="2724912"/>
+            <a:ext cx="3611880" cy="1527048"/>
           </a:xfrm>
           <a:prstGeom prst="roundRect">
             <a:avLst>
-              <a:gd name="adj" fmla="val 7968"/>
+              <a:gd name="adj" fmla="val 7186"/>
             </a:avLst>
           </a:prstGeom>
           <a:solidFill>
@@ -13786,8 +13788,8 @@
         </p:nvSpPr>
         <p:spPr>
           <a:xfrm>
-            <a:off x="7799832" y="2816352"/>
-            <a:ext cx="3145536" cy="256032"/>
+            <a:off x="7708392" y="2852928"/>
+            <a:ext cx="3282696" cy="228600"/>
           </a:xfrm>
           <a:prstGeom prst="rect">
             <a:avLst/>
@@ -13803,7 +13805,7 @@
               <a:buNone/>
             </a:pPr>
             <a:r>
-              <a:rPr lang="en-US" sz="1300" b="1" dirty="0">
+              <a:rPr lang="en-US" sz="1220" b="1" dirty="0">
                 <a:solidFill>
                   <a:srgbClr val="0068B7"/>
                 </a:solidFill>
@@ -13813,7 +13815,7 @@
               </a:rPr>
               <a:t>Concept checkpoints</a:t>
             </a:r>
-            <a:endParaRPr lang="en-US" sz="1300" dirty="0"/>
+            <a:endParaRPr lang="en-US" sz="1220" dirty="0"/>
           </a:p>
         </p:txBody>
       </p:sp>
@@ -13825,8 +13827,8 @@
         </p:nvSpPr>
         <p:spPr>
           <a:xfrm>
-            <a:off x="7818120" y="3182112"/>
-            <a:ext cx="3090672" cy="718718"/>
+            <a:off x="7726680" y="3182112"/>
+            <a:ext cx="3227832" cy="960120"/>
           </a:xfrm>
           <a:prstGeom prst="rect">
             <a:avLst/>
@@ -13844,7 +13846,7 @@
               <a:buNone/>
             </a:pPr>
             <a:r>
-              <a:rPr lang="en-US" sz="1220" dirty="0">
+              <a:rPr lang="en-US" sz="1140" dirty="0">
                 <a:solidFill>
                   <a:srgbClr val="17364A"/>
                 </a:solidFill>
@@ -13852,16 +13854,16 @@
                 <a:ea typeface="Aptos" pitchFamily="34" charset="-122"/>
                 <a:cs typeface="Aptos" pitchFamily="34" charset="-120"/>
               </a:rPr>
-              <a:t>Identify when model results should include confidence intervals,.</a:t>
-            </a:r>
-            <a:endParaRPr lang="en-US" sz="1220" dirty="0"/>
-          </a:p>
-          <a:p>
-            <a:pPr indent="0" marL="0">
-              <a:buNone/>
-            </a:pPr>
-            <a:r>
-              <a:rPr lang="en-US" sz="1220" dirty="0">
+              <a:t>Identify when model results should include.</a:t>
+            </a:r>
+            <a:endParaRPr lang="en-US" sz="1140" dirty="0"/>
+          </a:p>
+          <a:p>
+            <a:pPr indent="0" marL="0">
+              <a:buNone/>
+            </a:pPr>
+            <a:r>
+              <a:rPr lang="en-US" sz="1140" dirty="0">
                 <a:solidFill>
                   <a:srgbClr val="17364A"/>
                 </a:solidFill>
@@ -13869,16 +13871,16 @@
                 <a:ea typeface="Aptos" pitchFamily="34" charset="-122"/>
                 <a:cs typeface="Aptos" pitchFamily="34" charset="-120"/>
               </a:rPr>
-              <a:t>Avoid overclaiming, causal overreach, and false precision in AI.</a:t>
-            </a:r>
-            <a:endParaRPr lang="en-US" sz="1220" dirty="0"/>
-          </a:p>
-          <a:p>
-            <a:pPr indent="0" marL="0">
-              <a:buNone/>
-            </a:pPr>
-            <a:r>
-              <a:rPr lang="en-US" sz="1220" dirty="0">
+              <a:t>Avoid overclaiming, causal overreach, and false.</a:t>
+            </a:r>
+            <a:endParaRPr lang="en-US" sz="1140" dirty="0"/>
+          </a:p>
+          <a:p>
+            <a:pPr indent="0" marL="0">
+              <a:buNone/>
+            </a:pPr>
+            <a:r>
+              <a:rPr lang="en-US" sz="1140" dirty="0">
                 <a:solidFill>
                   <a:srgbClr val="17364A"/>
                 </a:solidFill>
@@ -13886,9 +13888,9 @@
                 <a:ea typeface="Aptos" pitchFamily="34" charset="-122"/>
                 <a:cs typeface="Aptos" pitchFamily="34" charset="-120"/>
               </a:rPr>
-              <a:t>Create a model communication brief for a public health.</a:t>
-            </a:r>
-            <a:endParaRPr lang="en-US" sz="1220" dirty="0"/>
+              <a:t>Create a model communication brief for a public.</a:t>
+            </a:r>
+            <a:endParaRPr lang="en-US" sz="1140" dirty="0"/>
           </a:p>
         </p:txBody>
       </p:sp>
@@ -13900,12 +13902,12 @@
         </p:nvSpPr>
         <p:spPr>
           <a:xfrm>
-            <a:off x="7635240" y="4184294"/>
-            <a:ext cx="3474720" cy="1466698"/>
+            <a:off x="7543800" y="4389120"/>
+            <a:ext cx="3611880" cy="1261872"/>
           </a:xfrm>
           <a:prstGeom prst="roundRect">
             <a:avLst>
-              <a:gd name="adj" fmla="val 7481"/>
+              <a:gd name="adj" fmla="val 8696"/>
             </a:avLst>
           </a:prstGeom>
           <a:solidFill>
@@ -13927,8 +13929,8 @@
         </p:nvSpPr>
         <p:spPr>
           <a:xfrm>
-            <a:off x="7799832" y="4330598"/>
-            <a:ext cx="3145536" cy="256032"/>
+            <a:off x="7708392" y="4517136"/>
+            <a:ext cx="3282696" cy="228600"/>
           </a:xfrm>
           <a:prstGeom prst="rect">
             <a:avLst/>
@@ -13944,7 +13946,7 @@
               <a:buNone/>
             </a:pPr>
             <a:r>
-              <a:rPr lang="en-US" sz="1300" b="1" dirty="0">
+              <a:rPr lang="en-US" sz="1220" b="1" dirty="0">
                 <a:solidFill>
                   <a:srgbClr val="0068B7"/>
                 </a:solidFill>
@@ -13954,7 +13956,7 @@
               </a:rPr>
               <a:t>How to validate</a:t>
             </a:r>
-            <a:endParaRPr lang="en-US" sz="1300" dirty="0"/>
+            <a:endParaRPr lang="en-US" sz="1220" dirty="0"/>
           </a:p>
         </p:txBody>
       </p:sp>
@@ -13966,8 +13968,8 @@
         </p:nvSpPr>
         <p:spPr>
           <a:xfrm>
-            <a:off x="7799832" y="4659782"/>
-            <a:ext cx="3145536" cy="899770"/>
+            <a:off x="7708392" y="4828032"/>
+            <a:ext cx="3282696" cy="749808"/>
           </a:xfrm>
           <a:prstGeom prst="rect">
             <a:avLst/>
@@ -13985,7 +13987,7 @@
               <a:buNone/>
             </a:pPr>
             <a:r>
-              <a:rPr lang="en-US" sz="1320" dirty="0">
+              <a:rPr lang="en-US" sz="1220" dirty="0">
                 <a:solidFill>
                   <a:srgbClr val="17364A"/>
                 </a:solidFill>
@@ -13993,9 +13995,9 @@
                 <a:ea typeface="Aptos" pitchFamily="34" charset="-122"/>
                 <a:cs typeface="Aptos" pitchFamily="34" charset="-120"/>
               </a:rPr>
-              <a:t>Use the assignment to test whether you can explain the concept, apply it to a realistic public health situation, and identify what would need review before the work moves forward.</a:t>
-            </a:r>
-            <a:endParaRPr lang="en-US" sz="1320" dirty="0"/>
+              <a:t>Use the assignment to test whether you can explain the concept, apply it to a.</a:t>
+            </a:r>
+            <a:endParaRPr lang="en-US" sz="1220" dirty="0"/>
           </a:p>
         </p:txBody>
       </p:sp>
@@ -14286,8 +14288,8 @@
         </p:nvSpPr>
         <p:spPr>
           <a:xfrm>
-            <a:off x="868680" y="1508760"/>
-            <a:ext cx="6309360" cy="4160520"/>
+            <a:off x="822960" y="1463040"/>
+            <a:ext cx="6565392" cy="4343400"/>
           </a:xfrm>
           <a:prstGeom prst="rect">
             <a:avLst/>
@@ -14305,7 +14307,7 @@
               <a:buNone/>
             </a:pPr>
             <a:r>
-              <a:rPr lang="en-US" sz="2100" dirty="0">
+              <a:rPr lang="en-US" sz="1920" dirty="0">
                 <a:solidFill>
                   <a:srgbClr val="003A63"/>
                 </a:solidFill>
@@ -14313,16 +14315,16 @@
                 <a:ea typeface="Aptos" pitchFamily="34" charset="-122"/>
                 <a:cs typeface="Aptos" pitchFamily="34" charset="-120"/>
               </a:rPr>
-              <a:t>• Public health staff often need to communicate AI or model results to leaders, partners, the.</a:t>
-            </a:r>
-            <a:endParaRPr lang="en-US" sz="2100" dirty="0"/>
-          </a:p>
-          <a:p>
-            <a:pPr indent="0" marL="0">
-              <a:buNone/>
-            </a:pPr>
-            <a:r>
-              <a:rPr lang="en-US" sz="2100" dirty="0">
+              <a:t>• Public health staff often need to communicate AI or model results to.</a:t>
+            </a:r>
+            <a:endParaRPr lang="en-US" sz="1920" dirty="0"/>
+          </a:p>
+          <a:p>
+            <a:pPr indent="0" marL="0">
+              <a:buNone/>
+            </a:pPr>
+            <a:r>
+              <a:rPr lang="en-US" sz="1920" dirty="0">
                 <a:solidFill>
                   <a:srgbClr val="003A63"/>
                 </a:solidFill>
@@ -14330,16 +14332,16 @@
                 <a:ea typeface="Aptos" pitchFamily="34" charset="-122"/>
                 <a:cs typeface="Aptos" pitchFamily="34" charset="-120"/>
               </a:rPr>
-              <a:t>• This module teaches learners how to explain model outputs, uncertainty, limitations, and.</a:t>
-            </a:r>
-            <a:endParaRPr lang="en-US" sz="2100" dirty="0"/>
-          </a:p>
-          <a:p>
-            <a:pPr indent="0" marL="0">
-              <a:buNone/>
-            </a:pPr>
-            <a:r>
-              <a:rPr lang="en-US" sz="2100" dirty="0">
+              <a:t>• This module teaches learners how to explain model outputs, uncertainty,.</a:t>
+            </a:r>
+            <a:endParaRPr lang="en-US" sz="1920" dirty="0"/>
+          </a:p>
+          <a:p>
+            <a:pPr indent="0" marL="0">
+              <a:buNone/>
+            </a:pPr>
+            <a:r>
+              <a:rPr lang="en-US" sz="1920" dirty="0">
                 <a:solidFill>
                   <a:srgbClr val="003A63"/>
                 </a:solidFill>
@@ -14349,7 +14351,7 @@
               </a:rPr>
               <a:t>• The module focuses on practical communication.</a:t>
             </a:r>
-            <a:endParaRPr lang="en-US" sz="2100" dirty="0"/>
+            <a:endParaRPr lang="en-US" sz="1920" dirty="0"/>
           </a:p>
         </p:txBody>
       </p:sp>
@@ -14361,12 +14363,12 @@
         </p:nvSpPr>
         <p:spPr>
           <a:xfrm>
-            <a:off x="7635240" y="1325880"/>
-            <a:ext cx="3474720" cy="1255471"/>
+            <a:off x="7543800" y="1325880"/>
+            <a:ext cx="3611880" cy="1261872"/>
           </a:xfrm>
           <a:prstGeom prst="roundRect">
             <a:avLst>
-              <a:gd name="adj" fmla="val 8740"/>
+              <a:gd name="adj" fmla="val 8696"/>
             </a:avLst>
           </a:prstGeom>
           <a:solidFill>
@@ -14388,8 +14390,8 @@
         </p:nvSpPr>
         <p:spPr>
           <a:xfrm>
-            <a:off x="7799832" y="1472184"/>
-            <a:ext cx="3145536" cy="256032"/>
+            <a:off x="7708392" y="1453896"/>
+            <a:ext cx="3282696" cy="228600"/>
           </a:xfrm>
           <a:prstGeom prst="rect">
             <a:avLst/>
@@ -14405,7 +14407,7 @@
               <a:buNone/>
             </a:pPr>
             <a:r>
-              <a:rPr lang="en-US" sz="1300" b="1" dirty="0">
+              <a:rPr lang="en-US" sz="1220" b="1" dirty="0">
                 <a:solidFill>
                   <a:srgbClr val="0068B7"/>
                 </a:solidFill>
@@ -14415,7 +14417,7 @@
               </a:rPr>
               <a:t>Data decision</a:t>
             </a:r>
-            <a:endParaRPr lang="en-US" sz="1300" dirty="0"/>
+            <a:endParaRPr lang="en-US" sz="1220" dirty="0"/>
           </a:p>
         </p:txBody>
       </p:sp>
@@ -14427,8 +14429,8 @@
         </p:nvSpPr>
         <p:spPr>
           <a:xfrm>
-            <a:off x="7799832" y="1801368"/>
-            <a:ext cx="3145536" cy="688543"/>
+            <a:off x="7708392" y="1764792"/>
+            <a:ext cx="3282696" cy="749808"/>
           </a:xfrm>
           <a:prstGeom prst="rect">
             <a:avLst/>
@@ -14446,7 +14448,7 @@
               <a:buNone/>
             </a:pPr>
             <a:r>
-              <a:rPr lang="en-US" sz="1320" dirty="0">
+              <a:rPr lang="en-US" sz="1220" dirty="0">
                 <a:solidFill>
                   <a:srgbClr val="17364A"/>
                 </a:solidFill>
@@ -14454,9 +14456,9 @@
                 <a:ea typeface="Aptos" pitchFamily="34" charset="-122"/>
                 <a:cs typeface="Aptos" pitchFamily="34" charset="-120"/>
               </a:rPr>
-              <a:t>Public health staff often need to communicate AI or model results to leaders, partners, the public, or.</a:t>
-            </a:r>
-            <a:endParaRPr lang="en-US" sz="1320" dirty="0"/>
+              <a:t>Public health staff often need to communicate AI or model results to leaders,.</a:t>
+            </a:r>
+            <a:endParaRPr lang="en-US" sz="1220" dirty="0"/>
           </a:p>
         </p:txBody>
       </p:sp>
@@ -14468,12 +14470,12 @@
         </p:nvSpPr>
         <p:spPr>
           <a:xfrm>
-            <a:off x="7635240" y="2718511"/>
-            <a:ext cx="3474720" cy="1328623"/>
+            <a:off x="7543800" y="2724912"/>
+            <a:ext cx="3611880" cy="1527048"/>
           </a:xfrm>
           <a:prstGeom prst="roundRect">
             <a:avLst>
-              <a:gd name="adj" fmla="val 8259"/>
+              <a:gd name="adj" fmla="val 7186"/>
             </a:avLst>
           </a:prstGeom>
           <a:solidFill>
@@ -14495,24 +14497,26 @@
         </p:nvSpPr>
         <p:spPr>
           <a:xfrm>
-            <a:off x="7799832" y="2846527"/>
-            <a:ext cx="3145536" cy="237744"/>
-          </a:xfrm>
-          <a:prstGeom prst="rect">
-            <a:avLst/>
-          </a:prstGeom>
-          <a:noFill/>
-          <a:ln/>
-        </p:spPr>
-        <p:txBody>
-          <a:bodyPr wrap="square" lIns="0" tIns="0" rIns="0" bIns="0" rtlCol="0" anchor="ctr"/>
-          <a:lstStyle/>
-          <a:p>
-            <a:pPr indent="0" marL="0">
-              <a:buNone/>
-            </a:pPr>
-            <a:r>
-              <a:rPr lang="en-US" sz="1250" b="1" dirty="0">
+            <a:off x="7708392" y="2852928"/>
+            <a:ext cx="3282696" cy="219456"/>
+          </a:xfrm>
+          <a:prstGeom prst="rect">
+            <a:avLst/>
+          </a:prstGeom>
+          <a:noFill/>
+          <a:ln/>
+        </p:spPr>
+        <p:txBody>
+          <a:bodyPr wrap="square" lIns="0" tIns="0" rIns="0" bIns="0" rtlCol="0" anchor="ctr">
+            <a:normAutofit/>
+          </a:bodyPr>
+          <a:lstStyle/>
+          <a:p>
+            <a:pPr indent="0" marL="0">
+              <a:buNone/>
+            </a:pPr>
+            <a:r>
+              <a:rPr lang="en-US" sz="1160" b="1" dirty="0">
                 <a:solidFill>
                   <a:srgbClr val="0068B7"/>
                 </a:solidFill>
@@ -14522,7 +14526,7 @@
               </a:rPr>
               <a:t>Data-to-decision flow</a:t>
             </a:r>
-            <a:endParaRPr lang="en-US" sz="1250" dirty="0"/>
+            <a:endParaRPr lang="en-US" sz="1160" dirty="0"/>
           </a:p>
         </p:txBody>
       </p:sp>
@@ -14534,7 +14538,7 @@
         </p:nvSpPr>
         <p:spPr>
           <a:xfrm>
-            <a:off x="8763000" y="3399739"/>
+            <a:off x="8717280" y="3406140"/>
             <a:ext cx="164592" cy="0"/>
           </a:xfrm>
           <a:prstGeom prst="line">
@@ -14557,8 +14561,8 @@
         </p:nvSpPr>
         <p:spPr>
           <a:xfrm>
-            <a:off x="7872984" y="3248863"/>
-            <a:ext cx="890016" cy="301752"/>
+            <a:off x="7781544" y="3255264"/>
+            <a:ext cx="935736" cy="301752"/>
           </a:xfrm>
           <a:prstGeom prst="roundRect">
             <a:avLst>
@@ -14584,8 +14588,8 @@
         </p:nvSpPr>
         <p:spPr>
           <a:xfrm>
-            <a:off x="7909560" y="3322015"/>
-            <a:ext cx="816864" cy="146304"/>
+            <a:off x="7818120" y="3328416"/>
+            <a:ext cx="862584" cy="146304"/>
           </a:xfrm>
           <a:prstGeom prst="rect">
             <a:avLst/>
@@ -14625,7 +14629,7 @@
         </p:nvSpPr>
         <p:spPr>
           <a:xfrm>
-            <a:off x="9817608" y="3399739"/>
+            <a:off x="9817608" y="3406140"/>
             <a:ext cx="164592" cy="0"/>
           </a:xfrm>
           <a:prstGeom prst="line">
@@ -14648,8 +14652,8 @@
         </p:nvSpPr>
         <p:spPr>
           <a:xfrm>
-            <a:off x="8927592" y="3248863"/>
-            <a:ext cx="890016" cy="301752"/>
+            <a:off x="8881872" y="3255264"/>
+            <a:ext cx="935736" cy="301752"/>
           </a:xfrm>
           <a:prstGeom prst="roundRect">
             <a:avLst>
@@ -14675,8 +14679,8 @@
         </p:nvSpPr>
         <p:spPr>
           <a:xfrm>
-            <a:off x="8964168" y="3322015"/>
-            <a:ext cx="816864" cy="146304"/>
+            <a:off x="8918448" y="3328416"/>
+            <a:ext cx="862584" cy="146304"/>
           </a:xfrm>
           <a:prstGeom prst="rect">
             <a:avLst/>
@@ -14716,8 +14720,8 @@
         </p:nvSpPr>
         <p:spPr>
           <a:xfrm>
-            <a:off x="9982200" y="3248863"/>
-            <a:ext cx="890016" cy="301752"/>
+            <a:off x="9982200" y="3255264"/>
+            <a:ext cx="935736" cy="301752"/>
           </a:xfrm>
           <a:prstGeom prst="roundRect">
             <a:avLst>
@@ -14743,8 +14747,8 @@
         </p:nvSpPr>
         <p:spPr>
           <a:xfrm>
-            <a:off x="10018776" y="3322015"/>
-            <a:ext cx="816864" cy="146304"/>
+            <a:off x="10018776" y="3328416"/>
+            <a:ext cx="862584" cy="146304"/>
           </a:xfrm>
           <a:prstGeom prst="rect">
             <a:avLst/>
@@ -14784,8 +14788,8 @@
         </p:nvSpPr>
         <p:spPr>
           <a:xfrm>
-            <a:off x="7854696" y="3742639"/>
-            <a:ext cx="3035808" cy="158191"/>
+            <a:off x="7763256" y="3749040"/>
+            <a:ext cx="3172968" cy="356616"/>
           </a:xfrm>
           <a:prstGeom prst="rect">
             <a:avLst/>
@@ -14803,7 +14807,7 @@
               <a:buNone/>
             </a:pPr>
             <a:r>
-              <a:rPr lang="en-US" sz="1120" dirty="0">
+              <a:rPr lang="en-US" sz="1040" dirty="0">
                 <a:solidFill>
                   <a:srgbClr val="17364A"/>
                 </a:solidFill>
@@ -14811,9 +14815,9 @@
                 <a:ea typeface="Aptos" pitchFamily="34" charset="-122"/>
                 <a:cs typeface="Aptos" pitchFamily="34" charset="-120"/>
               </a:rPr>
-              <a:t>The important handoff is not from data to AI; it is from analysis to accountable human review.</a:t>
-            </a:r>
-            <a:endParaRPr lang="en-US" sz="1120" dirty="0"/>
+              <a:t>The important handoff is not from data to AI; it is from analysis to.</a:t>
+            </a:r>
+            <a:endParaRPr lang="en-US" sz="1040" dirty="0"/>
           </a:p>
         </p:txBody>
       </p:sp>
@@ -14825,12 +14829,12 @@
         </p:nvSpPr>
         <p:spPr>
           <a:xfrm>
-            <a:off x="7635240" y="4184294"/>
-            <a:ext cx="3474720" cy="1466698"/>
+            <a:off x="7543800" y="4389120"/>
+            <a:ext cx="3611880" cy="1261872"/>
           </a:xfrm>
           <a:prstGeom prst="roundRect">
             <a:avLst>
-              <a:gd name="adj" fmla="val 7481"/>
+              <a:gd name="adj" fmla="val 8696"/>
             </a:avLst>
           </a:prstGeom>
           <a:solidFill>
@@ -14852,8 +14856,8 @@
         </p:nvSpPr>
         <p:spPr>
           <a:xfrm>
-            <a:off x="7799832" y="4330598"/>
-            <a:ext cx="3145536" cy="256032"/>
+            <a:off x="7708392" y="4517136"/>
+            <a:ext cx="3282696" cy="228600"/>
           </a:xfrm>
           <a:prstGeom prst="rect">
             <a:avLst/>
@@ -14869,7 +14873,7 @@
               <a:buNone/>
             </a:pPr>
             <a:r>
-              <a:rPr lang="en-US" sz="1300" b="1" dirty="0">
+              <a:rPr lang="en-US" sz="1220" b="1" dirty="0">
                 <a:solidFill>
                   <a:srgbClr val="0068B7"/>
                 </a:solidFill>
@@ -14879,7 +14883,7 @@
               </a:rPr>
               <a:t>How to validate</a:t>
             </a:r>
-            <a:endParaRPr lang="en-US" sz="1300" dirty="0"/>
+            <a:endParaRPr lang="en-US" sz="1220" dirty="0"/>
           </a:p>
         </p:txBody>
       </p:sp>
@@ -14891,8 +14895,8 @@
         </p:nvSpPr>
         <p:spPr>
           <a:xfrm>
-            <a:off x="7799832" y="4659782"/>
-            <a:ext cx="3145536" cy="899770"/>
+            <a:off x="7708392" y="4828032"/>
+            <a:ext cx="3282696" cy="749808"/>
           </a:xfrm>
           <a:prstGeom prst="rect">
             <a:avLst/>
@@ -14910,7 +14914,7 @@
               <a:buNone/>
             </a:pPr>
             <a:r>
-              <a:rPr lang="en-US" sz="1320" dirty="0">
+              <a:rPr lang="en-US" sz="1220" dirty="0">
                 <a:solidFill>
                   <a:srgbClr val="17364A"/>
                 </a:solidFill>
@@ -14918,9 +14922,9 @@
                 <a:ea typeface="Aptos" pitchFamily="34" charset="-122"/>
                 <a:cs typeface="Aptos" pitchFamily="34" charset="-120"/>
               </a:rPr>
-              <a:t>Connect the concept to data quality, model performance, validation evidence, monitoring measures, and decisions that remain under human control.</a:t>
-            </a:r>
-            <a:endParaRPr lang="en-US" sz="1320" dirty="0"/>
+              <a:t>Connect the concept to data quality, model performance, validation evidence,.</a:t>
+            </a:r>
+            <a:endParaRPr lang="en-US" sz="1220" dirty="0"/>
           </a:p>
         </p:txBody>
       </p:sp>
@@ -15211,8 +15215,8 @@
         </p:nvSpPr>
         <p:spPr>
           <a:xfrm>
-            <a:off x="868680" y="1508760"/>
-            <a:ext cx="6309360" cy="4160520"/>
+            <a:off x="822960" y="1463040"/>
+            <a:ext cx="6565392" cy="4343400"/>
           </a:xfrm>
           <a:prstGeom prst="rect">
             <a:avLst/>
@@ -15230,7 +15234,7 @@
               <a:buNone/>
             </a:pPr>
             <a:r>
-              <a:rPr lang="en-US" sz="2100" dirty="0">
+              <a:rPr lang="en-US" sz="1920" dirty="0">
                 <a:solidFill>
                   <a:srgbClr val="003A63"/>
                 </a:solidFill>
@@ -15238,16 +15242,16 @@
                 <a:ea typeface="Aptos" pitchFamily="34" charset="-122"/>
                 <a:cs typeface="Aptos" pitchFamily="34" charset="-120"/>
               </a:rPr>
-              <a:t>• Uncertainty: The degree to which an estimate, prediction, or conclusion may be imprecise or.</a:t>
-            </a:r>
-            <a:endParaRPr lang="en-US" sz="2100" dirty="0"/>
-          </a:p>
-          <a:p>
-            <a:pPr indent="0" marL="0">
-              <a:buNone/>
-            </a:pPr>
-            <a:r>
-              <a:rPr lang="en-US" sz="2100" dirty="0">
+              <a:t>• Uncertainty: The degree to which an estimate, prediction, or conclusion may.</a:t>
+            </a:r>
+            <a:endParaRPr lang="en-US" sz="1920" dirty="0"/>
+          </a:p>
+          <a:p>
+            <a:pPr indent="0" marL="0">
+              <a:buNone/>
+            </a:pPr>
+            <a:r>
+              <a:rPr lang="en-US" sz="1920" dirty="0">
                 <a:solidFill>
                   <a:srgbClr val="003A63"/>
                 </a:solidFill>
@@ -15255,16 +15259,16 @@
                 <a:ea typeface="Aptos" pitchFamily="34" charset="-122"/>
                 <a:cs typeface="Aptos" pitchFamily="34" charset="-120"/>
               </a:rPr>
-              <a:t>• Prediction interval: A range that estimates where a future observation may fall.</a:t>
-            </a:r>
-            <a:endParaRPr lang="en-US" sz="2100" dirty="0"/>
-          </a:p>
-          <a:p>
-            <a:pPr indent="0" marL="0">
-              <a:buNone/>
-            </a:pPr>
-            <a:r>
-              <a:rPr lang="en-US" sz="2100" dirty="0">
+              <a:t>• Prediction interval: A range that estimates where a future observation may.</a:t>
+            </a:r>
+            <a:endParaRPr lang="en-US" sz="1920" dirty="0"/>
+          </a:p>
+          <a:p>
+            <a:pPr indent="0" marL="0">
+              <a:buNone/>
+            </a:pPr>
+            <a:r>
+              <a:rPr lang="en-US" sz="1920" dirty="0">
                 <a:solidFill>
                   <a:srgbClr val="003A63"/>
                 </a:solidFill>
@@ -15272,9 +15276,9 @@
                 <a:ea typeface="Aptos" pitchFamily="34" charset="-122"/>
                 <a:cs typeface="Aptos" pitchFamily="34" charset="-120"/>
               </a:rPr>
-              <a:t>• Confidence interval: A range that expresses uncertainty around an estimated parameter.</a:t>
-            </a:r>
-            <a:endParaRPr lang="en-US" sz="2100" dirty="0"/>
+              <a:t>• Confidence interval: A range that expresses uncertainty around an estimated.</a:t>
+            </a:r>
+            <a:endParaRPr lang="en-US" sz="1920" dirty="0"/>
           </a:p>
         </p:txBody>
       </p:sp>
@@ -15286,12 +15290,12 @@
         </p:nvSpPr>
         <p:spPr>
           <a:xfrm>
-            <a:off x="7635240" y="1325880"/>
-            <a:ext cx="3474720" cy="1255471"/>
+            <a:off x="7543800" y="1325880"/>
+            <a:ext cx="3611880" cy="1261872"/>
           </a:xfrm>
           <a:prstGeom prst="roundRect">
             <a:avLst>
-              <a:gd name="adj" fmla="val 8740"/>
+              <a:gd name="adj" fmla="val 8696"/>
             </a:avLst>
           </a:prstGeom>
           <a:solidFill>
@@ -15313,8 +15317,8 @@
         </p:nvSpPr>
         <p:spPr>
           <a:xfrm>
-            <a:off x="7799832" y="1472184"/>
-            <a:ext cx="3145536" cy="256032"/>
+            <a:off x="7708392" y="1453896"/>
+            <a:ext cx="3282696" cy="228600"/>
           </a:xfrm>
           <a:prstGeom prst="rect">
             <a:avLst/>
@@ -15330,7 +15334,7 @@
               <a:buNone/>
             </a:pPr>
             <a:r>
-              <a:rPr lang="en-US" sz="1300" b="1" dirty="0">
+              <a:rPr lang="en-US" sz="1220" b="1" dirty="0">
                 <a:solidFill>
                   <a:srgbClr val="0068B7"/>
                 </a:solidFill>
@@ -15340,7 +15344,7 @@
               </a:rPr>
               <a:t>Data decision</a:t>
             </a:r>
-            <a:endParaRPr lang="en-US" sz="1300" dirty="0"/>
+            <a:endParaRPr lang="en-US" sz="1220" dirty="0"/>
           </a:p>
         </p:txBody>
       </p:sp>
@@ -15352,8 +15356,8 @@
         </p:nvSpPr>
         <p:spPr>
           <a:xfrm>
-            <a:off x="7799832" y="1801368"/>
-            <a:ext cx="3145536" cy="688543"/>
+            <a:off x="7708392" y="1764792"/>
+            <a:ext cx="3282696" cy="749808"/>
           </a:xfrm>
           <a:prstGeom prst="rect">
             <a:avLst/>
@@ -15371,7 +15375,7 @@
               <a:buNone/>
             </a:pPr>
             <a:r>
-              <a:rPr lang="en-US" sz="1320" dirty="0">
+              <a:rPr lang="en-US" sz="1220" dirty="0">
                 <a:solidFill>
                   <a:srgbClr val="17364A"/>
                 </a:solidFill>
@@ -15379,9 +15383,9 @@
                 <a:ea typeface="Aptos" pitchFamily="34" charset="-122"/>
                 <a:cs typeface="Aptos" pitchFamily="34" charset="-120"/>
               </a:rPr>
-              <a:t>Uncertainty: The degree to which an estimate, prediction, or conclusion may be imprecise or incomplete.</a:t>
-            </a:r>
-            <a:endParaRPr lang="en-US" sz="1320" dirty="0"/>
+              <a:t>Uncertainty: The degree to which an estimate, prediction, or conclusion may be.</a:t>
+            </a:r>
+            <a:endParaRPr lang="en-US" sz="1220" dirty="0"/>
           </a:p>
         </p:txBody>
       </p:sp>
@@ -15393,12 +15397,12 @@
         </p:nvSpPr>
         <p:spPr>
           <a:xfrm>
-            <a:off x="7635240" y="2718511"/>
-            <a:ext cx="3474720" cy="1328623"/>
+            <a:off x="7543800" y="2724912"/>
+            <a:ext cx="3611880" cy="1527048"/>
           </a:xfrm>
           <a:prstGeom prst="roundRect">
             <a:avLst>
-              <a:gd name="adj" fmla="val 8259"/>
+              <a:gd name="adj" fmla="val 7186"/>
             </a:avLst>
           </a:prstGeom>
           <a:solidFill>
@@ -15420,8 +15424,8 @@
         </p:nvSpPr>
         <p:spPr>
           <a:xfrm>
-            <a:off x="7799832" y="2864815"/>
-            <a:ext cx="3145536" cy="256032"/>
+            <a:off x="7708392" y="2852928"/>
+            <a:ext cx="3282696" cy="228600"/>
           </a:xfrm>
           <a:prstGeom prst="rect">
             <a:avLst/>
@@ -15437,7 +15441,7 @@
               <a:buNone/>
             </a:pPr>
             <a:r>
-              <a:rPr lang="en-US" sz="1300" b="1" dirty="0">
+              <a:rPr lang="en-US" sz="1220" b="1" dirty="0">
                 <a:solidFill>
                   <a:srgbClr val="0068B7"/>
                 </a:solidFill>
@@ -15447,7 +15451,7 @@
               </a:rPr>
               <a:t>Concept checkpoints</a:t>
             </a:r>
-            <a:endParaRPr lang="en-US" sz="1300" dirty="0"/>
+            <a:endParaRPr lang="en-US" sz="1220" dirty="0"/>
           </a:p>
         </p:txBody>
       </p:sp>
@@ -15459,8 +15463,8 @@
         </p:nvSpPr>
         <p:spPr>
           <a:xfrm>
-            <a:off x="7818120" y="3230575"/>
-            <a:ext cx="3090672" cy="670255"/>
+            <a:off x="7726680" y="3182112"/>
+            <a:ext cx="3227832" cy="960120"/>
           </a:xfrm>
           <a:prstGeom prst="rect">
             <a:avLst/>
@@ -15478,7 +15482,7 @@
               <a:buNone/>
             </a:pPr>
             <a:r>
-              <a:rPr lang="en-US" sz="1220" dirty="0">
+              <a:rPr lang="en-US" sz="1140" dirty="0">
                 <a:solidFill>
                   <a:srgbClr val="17364A"/>
                 </a:solidFill>
@@ -15486,16 +15490,16 @@
                 <a:ea typeface="Aptos" pitchFamily="34" charset="-122"/>
                 <a:cs typeface="Aptos" pitchFamily="34" charset="-120"/>
               </a:rPr>
-              <a:t>Calibration: How closely predicted probabilities match observed.</a:t>
-            </a:r>
-            <a:endParaRPr lang="en-US" sz="1220" dirty="0"/>
-          </a:p>
-          <a:p>
-            <a:pPr indent="0" marL="0">
-              <a:buNone/>
-            </a:pPr>
-            <a:r>
-              <a:rPr lang="en-US" sz="1220" dirty="0">
+              <a:t>Calibration: How closely predicted probabilities.</a:t>
+            </a:r>
+            <a:endParaRPr lang="en-US" sz="1140" dirty="0"/>
+          </a:p>
+          <a:p>
+            <a:pPr indent="0" marL="0">
+              <a:buNone/>
+            </a:pPr>
+            <a:r>
+              <a:rPr lang="en-US" sz="1140" dirty="0">
                 <a:solidFill>
                   <a:srgbClr val="17364A"/>
                 </a:solidFill>
@@ -15503,9 +15507,9 @@
                 <a:ea typeface="Aptos" pitchFamily="34" charset="-122"/>
                 <a:cs typeface="Aptos" pitchFamily="34" charset="-120"/>
               </a:rPr>
-              <a:t>Caveat: A clear statement of limitation, condition, or caution.</a:t>
-            </a:r>
-            <a:endParaRPr lang="en-US" sz="1220" dirty="0"/>
+              <a:t>Caveat: A clear statement of limitation,.</a:t>
+            </a:r>
+            <a:endParaRPr lang="en-US" sz="1140" dirty="0"/>
           </a:p>
         </p:txBody>
       </p:sp>
@@ -15517,12 +15521,12 @@
         </p:nvSpPr>
         <p:spPr>
           <a:xfrm>
-            <a:off x="7635240" y="4184294"/>
-            <a:ext cx="3474720" cy="1466698"/>
+            <a:off x="7543800" y="4389120"/>
+            <a:ext cx="3611880" cy="1261872"/>
           </a:xfrm>
           <a:prstGeom prst="roundRect">
             <a:avLst>
-              <a:gd name="adj" fmla="val 7481"/>
+              <a:gd name="adj" fmla="val 8696"/>
             </a:avLst>
           </a:prstGeom>
           <a:solidFill>
@@ -15544,8 +15548,8 @@
         </p:nvSpPr>
         <p:spPr>
           <a:xfrm>
-            <a:off x="7799832" y="4330598"/>
-            <a:ext cx="3145536" cy="256032"/>
+            <a:off x="7708392" y="4517136"/>
+            <a:ext cx="3282696" cy="228600"/>
           </a:xfrm>
           <a:prstGeom prst="rect">
             <a:avLst/>
@@ -15561,7 +15565,7 @@
               <a:buNone/>
             </a:pPr>
             <a:r>
-              <a:rPr lang="en-US" sz="1300" b="1" dirty="0">
+              <a:rPr lang="en-US" sz="1220" b="1" dirty="0">
                 <a:solidFill>
                   <a:srgbClr val="0068B7"/>
                 </a:solidFill>
@@ -15571,7 +15575,7 @@
               </a:rPr>
               <a:t>How to validate</a:t>
             </a:r>
-            <a:endParaRPr lang="en-US" sz="1300" dirty="0"/>
+            <a:endParaRPr lang="en-US" sz="1220" dirty="0"/>
           </a:p>
         </p:txBody>
       </p:sp>
@@ -15583,8 +15587,8 @@
         </p:nvSpPr>
         <p:spPr>
           <a:xfrm>
-            <a:off x="7799832" y="4659782"/>
-            <a:ext cx="3145536" cy="899770"/>
+            <a:off x="7708392" y="4828032"/>
+            <a:ext cx="3282696" cy="749808"/>
           </a:xfrm>
           <a:prstGeom prst="rect">
             <a:avLst/>
@@ -15602,7 +15606,7 @@
               <a:buNone/>
             </a:pPr>
             <a:r>
-              <a:rPr lang="en-US" sz="1320" dirty="0">
+              <a:rPr lang="en-US" sz="1220" dirty="0">
                 <a:solidFill>
                   <a:srgbClr val="17364A"/>
                 </a:solidFill>
@@ -15610,9 +15614,9 @@
                 <a:ea typeface="Aptos" pitchFamily="34" charset="-122"/>
                 <a:cs typeface="Aptos" pitchFamily="34" charset="-120"/>
               </a:rPr>
-              <a:t>Connect the concept to data quality, model performance, validation evidence, monitoring measures, and decisions that remain under human control.</a:t>
-            </a:r>
-            <a:endParaRPr lang="en-US" sz="1320" dirty="0"/>
+              <a:t>Connect the concept to data quality, model performance, validation evidence,.</a:t>
+            </a:r>
+            <a:endParaRPr lang="en-US" sz="1220" dirty="0"/>
           </a:p>
         </p:txBody>
       </p:sp>
@@ -15903,8 +15907,8 @@
         </p:nvSpPr>
         <p:spPr>
           <a:xfrm>
-            <a:off x="868680" y="1508760"/>
-            <a:ext cx="6309360" cy="4160520"/>
+            <a:off x="822960" y="1463040"/>
+            <a:ext cx="6565392" cy="4343400"/>
           </a:xfrm>
           <a:prstGeom prst="rect">
             <a:avLst/>
@@ -15922,7 +15926,7 @@
               <a:buNone/>
             </a:pPr>
             <a:r>
-              <a:rPr lang="en-US" sz="2100" dirty="0">
+              <a:rPr lang="en-US" sz="1920" dirty="0">
                 <a:solidFill>
                   <a:srgbClr val="003A63"/>
                 </a:solidFill>
@@ -15932,14 +15936,14 @@
               </a:rPr>
               <a:t>• Model outputs can influence urgent decisions.</a:t>
             </a:r>
-            <a:endParaRPr lang="en-US" sz="2100" dirty="0"/>
-          </a:p>
-          <a:p>
-            <a:pPr indent="0" marL="0">
-              <a:buNone/>
-            </a:pPr>
-            <a:r>
-              <a:rPr lang="en-US" sz="2100" dirty="0">
+            <a:endParaRPr lang="en-US" sz="1920" dirty="0"/>
+          </a:p>
+          <a:p>
+            <a:pPr indent="0" marL="0">
+              <a:buNone/>
+            </a:pPr>
+            <a:r>
+              <a:rPr lang="en-US" sz="1920" dirty="0">
                 <a:solidFill>
                   <a:srgbClr val="003A63"/>
                 </a:solidFill>
@@ -15947,16 +15951,16 @@
                 <a:ea typeface="Aptos" pitchFamily="34" charset="-122"/>
                 <a:cs typeface="Aptos" pitchFamily="34" charset="-120"/>
               </a:rPr>
-              <a:t>• A forecast may affect staffing, a risk score may affect outreach, and a hotspot map may affect.</a:t>
-            </a:r>
-            <a:endParaRPr lang="en-US" sz="2100" dirty="0"/>
-          </a:p>
-          <a:p>
-            <a:pPr indent="0" marL="0">
-              <a:buNone/>
-            </a:pPr>
-            <a:r>
-              <a:rPr lang="en-US" sz="2100" dirty="0">
+              <a:t>• A forecast may affect staffing, a risk score may affect outreach, and a.</a:t>
+            </a:r>
+            <a:endParaRPr lang="en-US" sz="1920" dirty="0"/>
+          </a:p>
+          <a:p>
+            <a:pPr indent="0" marL="0">
+              <a:buNone/>
+            </a:pPr>
+            <a:r>
+              <a:rPr lang="en-US" sz="1920" dirty="0">
                 <a:solidFill>
                   <a:srgbClr val="003A63"/>
                 </a:solidFill>
@@ -15964,9 +15968,9 @@
                 <a:ea typeface="Aptos" pitchFamily="34" charset="-122"/>
                 <a:cs typeface="Aptos" pitchFamily="34" charset="-120"/>
               </a:rPr>
-              <a:t>• If uncertainty is not explained clearly, decision-makers may treat estimates as facts or ignore.</a:t>
-            </a:r>
-            <a:endParaRPr lang="en-US" sz="2100" dirty="0"/>
+              <a:t>• If uncertainty is not explained clearly, decision-makers may treat estimates.</a:t>
+            </a:r>
+            <a:endParaRPr lang="en-US" sz="1920" dirty="0"/>
           </a:p>
         </p:txBody>
       </p:sp>
@@ -15978,12 +15982,12 @@
         </p:nvSpPr>
         <p:spPr>
           <a:xfrm>
-            <a:off x="7635240" y="1325880"/>
-            <a:ext cx="3474720" cy="1207008"/>
+            <a:off x="7543800" y="1325880"/>
+            <a:ext cx="3611880" cy="1261872"/>
           </a:xfrm>
           <a:prstGeom prst="roundRect">
             <a:avLst>
-              <a:gd name="adj" fmla="val 9091"/>
+              <a:gd name="adj" fmla="val 8696"/>
             </a:avLst>
           </a:prstGeom>
           <a:solidFill>
@@ -16005,8 +16009,8 @@
         </p:nvSpPr>
         <p:spPr>
           <a:xfrm>
-            <a:off x="7799832" y="1472184"/>
-            <a:ext cx="3145536" cy="256032"/>
+            <a:off x="7708392" y="1453896"/>
+            <a:ext cx="3282696" cy="228600"/>
           </a:xfrm>
           <a:prstGeom prst="rect">
             <a:avLst/>
@@ -16022,7 +16026,7 @@
               <a:buNone/>
             </a:pPr>
             <a:r>
-              <a:rPr lang="en-US" sz="1300" b="1" dirty="0">
+              <a:rPr lang="en-US" sz="1220" b="1" dirty="0">
                 <a:solidFill>
                   <a:srgbClr val="0068B7"/>
                 </a:solidFill>
@@ -16032,7 +16036,7 @@
               </a:rPr>
               <a:t>Data decision</a:t>
             </a:r>
-            <a:endParaRPr lang="en-US" sz="1300" dirty="0"/>
+            <a:endParaRPr lang="en-US" sz="1220" dirty="0"/>
           </a:p>
         </p:txBody>
       </p:sp>
@@ -16044,8 +16048,8 @@
         </p:nvSpPr>
         <p:spPr>
           <a:xfrm>
-            <a:off x="7799832" y="1801368"/>
-            <a:ext cx="3145536" cy="640080"/>
+            <a:off x="7708392" y="1764792"/>
+            <a:ext cx="3282696" cy="749808"/>
           </a:xfrm>
           <a:prstGeom prst="rect">
             <a:avLst/>
@@ -16063,7 +16067,7 @@
               <a:buNone/>
             </a:pPr>
             <a:r>
-              <a:rPr lang="en-US" sz="1320" dirty="0">
+              <a:rPr lang="en-US" sz="1220" dirty="0">
                 <a:solidFill>
                   <a:srgbClr val="17364A"/>
                 </a:solidFill>
@@ -16073,7 +16077,7 @@
               </a:rPr>
               <a:t>Model outputs can influence urgent decisions.</a:t>
             </a:r>
-            <a:endParaRPr lang="en-US" sz="1320" dirty="0"/>
+            <a:endParaRPr lang="en-US" sz="1220" dirty="0"/>
           </a:p>
         </p:txBody>
       </p:sp>
@@ -16085,12 +16089,12 @@
         </p:nvSpPr>
         <p:spPr>
           <a:xfrm>
-            <a:off x="7635240" y="2670048"/>
-            <a:ext cx="3474720" cy="1377086"/>
+            <a:off x="7543800" y="2724912"/>
+            <a:ext cx="3611880" cy="1527048"/>
           </a:xfrm>
           <a:prstGeom prst="roundRect">
             <a:avLst>
-              <a:gd name="adj" fmla="val 7968"/>
+              <a:gd name="adj" fmla="val 7186"/>
             </a:avLst>
           </a:prstGeom>
           <a:solidFill>
@@ -16112,24 +16116,26 @@
         </p:nvSpPr>
         <p:spPr>
           <a:xfrm>
-            <a:off x="7799832" y="2798064"/>
-            <a:ext cx="3145536" cy="237744"/>
-          </a:xfrm>
-          <a:prstGeom prst="rect">
-            <a:avLst/>
-          </a:prstGeom>
-          <a:noFill/>
-          <a:ln/>
-        </p:spPr>
-        <p:txBody>
-          <a:bodyPr wrap="square" lIns="0" tIns="0" rIns="0" bIns="0" rtlCol="0" anchor="ctr"/>
-          <a:lstStyle/>
-          <a:p>
-            <a:pPr indent="0" marL="0">
-              <a:buNone/>
-            </a:pPr>
-            <a:r>
-              <a:rPr lang="en-US" sz="1250" b="1" dirty="0">
+            <a:off x="7708392" y="2852928"/>
+            <a:ext cx="3282696" cy="219456"/>
+          </a:xfrm>
+          <a:prstGeom prst="rect">
+            <a:avLst/>
+          </a:prstGeom>
+          <a:noFill/>
+          <a:ln/>
+        </p:spPr>
+        <p:txBody>
+          <a:bodyPr wrap="square" lIns="0" tIns="0" rIns="0" bIns="0" rtlCol="0" anchor="ctr">
+            <a:normAutofit/>
+          </a:bodyPr>
+          <a:lstStyle/>
+          <a:p>
+            <a:pPr indent="0" marL="0">
+              <a:buNone/>
+            </a:pPr>
+            <a:r>
+              <a:rPr lang="en-US" sz="1160" b="1" dirty="0">
                 <a:solidFill>
                   <a:srgbClr val="0068B7"/>
                 </a:solidFill>
@@ -16139,7 +16145,7 @@
               </a:rPr>
               <a:t>Data-to-decision flow</a:t>
             </a:r>
-            <a:endParaRPr lang="en-US" sz="1250" dirty="0"/>
+            <a:endParaRPr lang="en-US" sz="1160" dirty="0"/>
           </a:p>
         </p:txBody>
       </p:sp>
@@ -16151,7 +16157,7 @@
         </p:nvSpPr>
         <p:spPr>
           <a:xfrm>
-            <a:off x="8763000" y="3351276"/>
+            <a:off x="8717280" y="3406140"/>
             <a:ext cx="164592" cy="0"/>
           </a:xfrm>
           <a:prstGeom prst="line">
@@ -16174,8 +16180,8 @@
         </p:nvSpPr>
         <p:spPr>
           <a:xfrm>
-            <a:off x="7872984" y="3200400"/>
-            <a:ext cx="890016" cy="301752"/>
+            <a:off x="7781544" y="3255264"/>
+            <a:ext cx="935736" cy="301752"/>
           </a:xfrm>
           <a:prstGeom prst="roundRect">
             <a:avLst>
@@ -16201,8 +16207,8 @@
         </p:nvSpPr>
         <p:spPr>
           <a:xfrm>
-            <a:off x="7909560" y="3273552"/>
-            <a:ext cx="816864" cy="146304"/>
+            <a:off x="7818120" y="3328416"/>
+            <a:ext cx="862584" cy="146304"/>
           </a:xfrm>
           <a:prstGeom prst="rect">
             <a:avLst/>
@@ -16242,7 +16248,7 @@
         </p:nvSpPr>
         <p:spPr>
           <a:xfrm>
-            <a:off x="9817608" y="3351276"/>
+            <a:off x="9817608" y="3406140"/>
             <a:ext cx="164592" cy="0"/>
           </a:xfrm>
           <a:prstGeom prst="line">
@@ -16265,8 +16271,8 @@
         </p:nvSpPr>
         <p:spPr>
           <a:xfrm>
-            <a:off x="8927592" y="3200400"/>
-            <a:ext cx="890016" cy="301752"/>
+            <a:off x="8881872" y="3255264"/>
+            <a:ext cx="935736" cy="301752"/>
           </a:xfrm>
           <a:prstGeom prst="roundRect">
             <a:avLst>
@@ -16292,8 +16298,8 @@
         </p:nvSpPr>
         <p:spPr>
           <a:xfrm>
-            <a:off x="8964168" y="3273552"/>
-            <a:ext cx="816864" cy="146304"/>
+            <a:off x="8918448" y="3328416"/>
+            <a:ext cx="862584" cy="146304"/>
           </a:xfrm>
           <a:prstGeom prst="rect">
             <a:avLst/>
@@ -16333,8 +16339,8 @@
         </p:nvSpPr>
         <p:spPr>
           <a:xfrm>
-            <a:off x="9982200" y="3200400"/>
-            <a:ext cx="890016" cy="301752"/>
+            <a:off x="9982200" y="3255264"/>
+            <a:ext cx="935736" cy="301752"/>
           </a:xfrm>
           <a:prstGeom prst="roundRect">
             <a:avLst>
@@ -16360,8 +16366,8 @@
         </p:nvSpPr>
         <p:spPr>
           <a:xfrm>
-            <a:off x="10018776" y="3273552"/>
-            <a:ext cx="816864" cy="146304"/>
+            <a:off x="10018776" y="3328416"/>
+            <a:ext cx="862584" cy="146304"/>
           </a:xfrm>
           <a:prstGeom prst="rect">
             <a:avLst/>
@@ -16401,8 +16407,8 @@
         </p:nvSpPr>
         <p:spPr>
           <a:xfrm>
-            <a:off x="7854696" y="3694176"/>
-            <a:ext cx="3035808" cy="206654"/>
+            <a:off x="7763256" y="3749040"/>
+            <a:ext cx="3172968" cy="356616"/>
           </a:xfrm>
           <a:prstGeom prst="rect">
             <a:avLst/>
@@ -16420,7 +16426,7 @@
               <a:buNone/>
             </a:pPr>
             <a:r>
-              <a:rPr lang="en-US" sz="1120" dirty="0">
+              <a:rPr lang="en-US" sz="1040" dirty="0">
                 <a:solidFill>
                   <a:srgbClr val="17364A"/>
                 </a:solidFill>
@@ -16428,9 +16434,9 @@
                 <a:ea typeface="Aptos" pitchFamily="34" charset="-122"/>
                 <a:cs typeface="Aptos" pitchFamily="34" charset="-120"/>
               </a:rPr>
-              <a:t>The important handoff is not from data to AI; it is from analysis to accountable human review.</a:t>
-            </a:r>
-            <a:endParaRPr lang="en-US" sz="1120" dirty="0"/>
+              <a:t>The important handoff is not from data to AI; it is from analysis to.</a:t>
+            </a:r>
+            <a:endParaRPr lang="en-US" sz="1040" dirty="0"/>
           </a:p>
         </p:txBody>
       </p:sp>
@@ -16442,12 +16448,12 @@
         </p:nvSpPr>
         <p:spPr>
           <a:xfrm>
-            <a:off x="7635240" y="4184294"/>
-            <a:ext cx="3474720" cy="1466698"/>
+            <a:off x="7543800" y="4389120"/>
+            <a:ext cx="3611880" cy="1261872"/>
           </a:xfrm>
           <a:prstGeom prst="roundRect">
             <a:avLst>
-              <a:gd name="adj" fmla="val 7481"/>
+              <a:gd name="adj" fmla="val 8696"/>
             </a:avLst>
           </a:prstGeom>
           <a:solidFill>
@@ -16469,8 +16475,8 @@
         </p:nvSpPr>
         <p:spPr>
           <a:xfrm>
-            <a:off x="7799832" y="4330598"/>
-            <a:ext cx="3145536" cy="256032"/>
+            <a:off x="7708392" y="4517136"/>
+            <a:ext cx="3282696" cy="228600"/>
           </a:xfrm>
           <a:prstGeom prst="rect">
             <a:avLst/>
@@ -16486,7 +16492,7 @@
               <a:buNone/>
             </a:pPr>
             <a:r>
-              <a:rPr lang="en-US" sz="1300" b="1" dirty="0">
+              <a:rPr lang="en-US" sz="1220" b="1" dirty="0">
                 <a:solidFill>
                   <a:srgbClr val="0068B7"/>
                 </a:solidFill>
@@ -16496,7 +16502,7 @@
               </a:rPr>
               <a:t>How to validate</a:t>
             </a:r>
-            <a:endParaRPr lang="en-US" sz="1300" dirty="0"/>
+            <a:endParaRPr lang="en-US" sz="1220" dirty="0"/>
           </a:p>
         </p:txBody>
       </p:sp>
@@ -16508,8 +16514,8 @@
         </p:nvSpPr>
         <p:spPr>
           <a:xfrm>
-            <a:off x="7799832" y="4659782"/>
-            <a:ext cx="3145536" cy="899770"/>
+            <a:off x="7708392" y="4828032"/>
+            <a:ext cx="3282696" cy="749808"/>
           </a:xfrm>
           <a:prstGeom prst="rect">
             <a:avLst/>
@@ -16527,7 +16533,7 @@
               <a:buNone/>
             </a:pPr>
             <a:r>
-              <a:rPr lang="en-US" sz="1320" dirty="0">
+              <a:rPr lang="en-US" sz="1220" dirty="0">
                 <a:solidFill>
                   <a:srgbClr val="17364A"/>
                 </a:solidFill>
@@ -16535,9 +16541,9 @@
                 <a:ea typeface="Aptos" pitchFamily="34" charset="-122"/>
                 <a:cs typeface="Aptos" pitchFamily="34" charset="-120"/>
               </a:rPr>
-              <a:t>Connect the concept to data quality, model performance, validation evidence, monitoring measures, and decisions that remain under human control.</a:t>
-            </a:r>
-            <a:endParaRPr lang="en-US" sz="1320" dirty="0"/>
+              <a:t>Connect the concept to data quality, model performance, validation evidence,.</a:t>
+            </a:r>
+            <a:endParaRPr lang="en-US" sz="1220" dirty="0"/>
           </a:p>
         </p:txBody>
       </p:sp>
@@ -16828,8 +16834,8 @@
         </p:nvSpPr>
         <p:spPr>
           <a:xfrm>
-            <a:off x="868680" y="1508760"/>
-            <a:ext cx="6309360" cy="4160520"/>
+            <a:off x="822960" y="1463040"/>
+            <a:ext cx="6565392" cy="4343400"/>
           </a:xfrm>
           <a:prstGeom prst="rect">
             <a:avLst/>
@@ -16847,7 +16853,7 @@
               <a:buNone/>
             </a:pPr>
             <a:r>
-              <a:rPr lang="en-US" sz="2100" dirty="0">
+              <a:rPr lang="en-US" sz="1920" dirty="0">
                 <a:solidFill>
                   <a:srgbClr val="003A63"/>
                 </a:solidFill>
@@ -16855,16 +16861,16 @@
                 <a:ea typeface="Aptos" pitchFamily="34" charset="-122"/>
                 <a:cs typeface="Aptos" pitchFamily="34" charset="-120"/>
               </a:rPr>
-              <a:t>• An epidemiology team uses a time-series model to forecast emergency department visits for.</a:t>
-            </a:r>
-            <a:endParaRPr lang="en-US" sz="2100" dirty="0"/>
-          </a:p>
-          <a:p>
-            <a:pPr indent="0" marL="0">
-              <a:buNone/>
-            </a:pPr>
-            <a:r>
-              <a:rPr lang="en-US" sz="2100" dirty="0">
+              <a:t>• An epidemiology team uses a time-series model to forecast emergency.</a:t>
+            </a:r>
+            <a:endParaRPr lang="en-US" sz="1920" dirty="0"/>
+          </a:p>
+          <a:p>
+            <a:pPr indent="0" marL="0">
+              <a:buNone/>
+            </a:pPr>
+            <a:r>
+              <a:rPr lang="en-US" sz="1920" dirty="0">
                 <a:solidFill>
                   <a:srgbClr val="003A63"/>
                 </a:solidFill>
@@ -16872,16 +16878,16 @@
                 <a:ea typeface="Aptos" pitchFamily="34" charset="-122"/>
                 <a:cs typeface="Aptos" pitchFamily="34" charset="-120"/>
               </a:rPr>
-              <a:t>• The forecast shows a possible increase over the next two weeks, but the prediction interval is.</a:t>
-            </a:r>
-            <a:endParaRPr lang="en-US" sz="2100" dirty="0"/>
-          </a:p>
-          <a:p>
-            <a:pPr indent="0" marL="0">
-              <a:buNone/>
-            </a:pPr>
-            <a:r>
-              <a:rPr lang="en-US" sz="2100" dirty="0">
+              <a:t>• The forecast shows a possible increase over the next two weeks, but the.</a:t>
+            </a:r>
+            <a:endParaRPr lang="en-US" sz="1920" dirty="0"/>
+          </a:p>
+          <a:p>
+            <a:pPr indent="0" marL="0">
+              <a:buNone/>
+            </a:pPr>
+            <a:r>
+              <a:rPr lang="en-US" sz="1920" dirty="0">
                 <a:solidFill>
                   <a:srgbClr val="003A63"/>
                 </a:solidFill>
@@ -16889,9 +16895,9 @@
                 <a:ea typeface="Aptos" pitchFamily="34" charset="-122"/>
                 <a:cs typeface="Aptos" pitchFamily="34" charset="-120"/>
               </a:rPr>
-              <a:t>• A strong communication brief would state that visits may rise, explain the uncertainty,.</a:t>
-            </a:r>
-            <a:endParaRPr lang="en-US" sz="2100" dirty="0"/>
+              <a:t>• A strong communication brief would state that visits may rise, explain the.</a:t>
+            </a:r>
+            <a:endParaRPr lang="en-US" sz="1920" dirty="0"/>
           </a:p>
         </p:txBody>
       </p:sp>
@@ -16903,12 +16909,12 @@
         </p:nvSpPr>
         <p:spPr>
           <a:xfrm>
-            <a:off x="7635240" y="1325880"/>
-            <a:ext cx="3474720" cy="1255471"/>
+            <a:off x="7543800" y="1325880"/>
+            <a:ext cx="3611880" cy="1261872"/>
           </a:xfrm>
           <a:prstGeom prst="roundRect">
             <a:avLst>
-              <a:gd name="adj" fmla="val 8740"/>
+              <a:gd name="adj" fmla="val 8696"/>
             </a:avLst>
           </a:prstGeom>
           <a:solidFill>
@@ -16930,8 +16936,8 @@
         </p:nvSpPr>
         <p:spPr>
           <a:xfrm>
-            <a:off x="7799832" y="1472184"/>
-            <a:ext cx="3145536" cy="256032"/>
+            <a:off x="7708392" y="1453896"/>
+            <a:ext cx="3282696" cy="228600"/>
           </a:xfrm>
           <a:prstGeom prst="rect">
             <a:avLst/>
@@ -16947,7 +16953,7 @@
               <a:buNone/>
             </a:pPr>
             <a:r>
-              <a:rPr lang="en-US" sz="1300" b="1" dirty="0">
+              <a:rPr lang="en-US" sz="1220" b="1" dirty="0">
                 <a:solidFill>
                   <a:srgbClr val="0068B7"/>
                 </a:solidFill>
@@ -16957,7 +16963,7 @@
               </a:rPr>
               <a:t>Data decision</a:t>
             </a:r>
-            <a:endParaRPr lang="en-US" sz="1300" dirty="0"/>
+            <a:endParaRPr lang="en-US" sz="1220" dirty="0"/>
           </a:p>
         </p:txBody>
       </p:sp>
@@ -16969,8 +16975,8 @@
         </p:nvSpPr>
         <p:spPr>
           <a:xfrm>
-            <a:off x="7799832" y="1801368"/>
-            <a:ext cx="3145536" cy="688543"/>
+            <a:off x="7708392" y="1764792"/>
+            <a:ext cx="3282696" cy="749808"/>
           </a:xfrm>
           <a:prstGeom prst="rect">
             <a:avLst/>
@@ -16988,7 +16994,7 @@
               <a:buNone/>
             </a:pPr>
             <a:r>
-              <a:rPr lang="en-US" sz="1320" dirty="0">
+              <a:rPr lang="en-US" sz="1220" dirty="0">
                 <a:solidFill>
                   <a:srgbClr val="17364A"/>
                 </a:solidFill>
@@ -16996,9 +17002,9 @@
                 <a:ea typeface="Aptos" pitchFamily="34" charset="-122"/>
                 <a:cs typeface="Aptos" pitchFamily="34" charset="-120"/>
               </a:rPr>
-              <a:t>An epidemiology team uses a time-series model to forecast emergency department visits for respiratory.</a:t>
-            </a:r>
-            <a:endParaRPr lang="en-US" sz="1320" dirty="0"/>
+              <a:t>An epidemiology team uses a time-series model to forecast emergency department.</a:t>
+            </a:r>
+            <a:endParaRPr lang="en-US" sz="1220" dirty="0"/>
           </a:p>
         </p:txBody>
       </p:sp>
@@ -17010,12 +17016,12 @@
         </p:nvSpPr>
         <p:spPr>
           <a:xfrm>
-            <a:off x="7635240" y="2718511"/>
-            <a:ext cx="3474720" cy="1328623"/>
+            <a:off x="7543800" y="2724912"/>
+            <a:ext cx="3611880" cy="1527048"/>
           </a:xfrm>
           <a:prstGeom prst="roundRect">
             <a:avLst>
-              <a:gd name="adj" fmla="val 8259"/>
+              <a:gd name="adj" fmla="val 7186"/>
             </a:avLst>
           </a:prstGeom>
           <a:solidFill>
@@ -17037,8 +17043,8 @@
         </p:nvSpPr>
         <p:spPr>
           <a:xfrm>
-            <a:off x="7799832" y="2864815"/>
-            <a:ext cx="3145536" cy="256032"/>
+            <a:off x="7708392" y="2852928"/>
+            <a:ext cx="3282696" cy="228600"/>
           </a:xfrm>
           <a:prstGeom prst="rect">
             <a:avLst/>
@@ -17054,7 +17060,7 @@
               <a:buNone/>
             </a:pPr>
             <a:r>
-              <a:rPr lang="en-US" sz="1300" b="1" dirty="0">
+              <a:rPr lang="en-US" sz="1220" b="1" dirty="0">
                 <a:solidFill>
                   <a:srgbClr val="0068B7"/>
                 </a:solidFill>
@@ -17064,7 +17070,7 @@
               </a:rPr>
               <a:t>Concept checkpoints</a:t>
             </a:r>
-            <a:endParaRPr lang="en-US" sz="1300" dirty="0"/>
+            <a:endParaRPr lang="en-US" sz="1220" dirty="0"/>
           </a:p>
         </p:txBody>
       </p:sp>
@@ -17076,8 +17082,8 @@
         </p:nvSpPr>
         <p:spPr>
           <a:xfrm>
-            <a:off x="7818120" y="3230575"/>
-            <a:ext cx="3090672" cy="670255"/>
+            <a:off x="7726680" y="3182112"/>
+            <a:ext cx="3227832" cy="960120"/>
           </a:xfrm>
           <a:prstGeom prst="rect">
             <a:avLst/>
@@ -17095,7 +17101,7 @@
               <a:buNone/>
             </a:pPr>
             <a:r>
-              <a:rPr lang="en-US" sz="1220" dirty="0">
+              <a:rPr lang="en-US" sz="1140" dirty="0">
                 <a:solidFill>
                   <a:srgbClr val="17364A"/>
                 </a:solidFill>
@@ -17103,16 +17109,16 @@
                 <a:ea typeface="Aptos" pitchFamily="34" charset="-122"/>
                 <a:cs typeface="Aptos" pitchFamily="34" charset="-120"/>
               </a:rPr>
-              <a:t>An epidemiology team uses a time-series model to forecast.</a:t>
-            </a:r>
-            <a:endParaRPr lang="en-US" sz="1220" dirty="0"/>
-          </a:p>
-          <a:p>
-            <a:pPr indent="0" marL="0">
-              <a:buNone/>
-            </a:pPr>
-            <a:r>
-              <a:rPr lang="en-US" sz="1220" dirty="0">
+              <a:t>An epidemiology team uses a time-series model to.</a:t>
+            </a:r>
+            <a:endParaRPr lang="en-US" sz="1140" dirty="0"/>
+          </a:p>
+          <a:p>
+            <a:pPr indent="0" marL="0">
+              <a:buNone/>
+            </a:pPr>
+            <a:r>
+              <a:rPr lang="en-US" sz="1140" dirty="0">
                 <a:solidFill>
                   <a:srgbClr val="17364A"/>
                 </a:solidFill>
@@ -17120,16 +17126,16 @@
                 <a:ea typeface="Aptos" pitchFamily="34" charset="-122"/>
                 <a:cs typeface="Aptos" pitchFamily="34" charset="-120"/>
               </a:rPr>
-              <a:t>The forecast shows a possible increase over the next two weeks,.</a:t>
-            </a:r>
-            <a:endParaRPr lang="en-US" sz="1220" dirty="0"/>
-          </a:p>
-          <a:p>
-            <a:pPr indent="0" marL="0">
-              <a:buNone/>
-            </a:pPr>
-            <a:r>
-              <a:rPr lang="en-US" sz="1220" dirty="0">
+              <a:t>The forecast shows a possible increase over the.</a:t>
+            </a:r>
+            <a:endParaRPr lang="en-US" sz="1140" dirty="0"/>
+          </a:p>
+          <a:p>
+            <a:pPr indent="0" marL="0">
+              <a:buNone/>
+            </a:pPr>
+            <a:r>
+              <a:rPr lang="en-US" sz="1140" dirty="0">
                 <a:solidFill>
                   <a:srgbClr val="17364A"/>
                 </a:solidFill>
@@ -17137,9 +17143,9 @@
                 <a:ea typeface="Aptos" pitchFamily="34" charset="-122"/>
                 <a:cs typeface="Aptos" pitchFamily="34" charset="-120"/>
               </a:rPr>
-              <a:t>A strong communication brief would state that visits may rise,.</a:t>
-            </a:r>
-            <a:endParaRPr lang="en-US" sz="1220" dirty="0"/>
+              <a:t>A strong communication brief would state that.</a:t>
+            </a:r>
+            <a:endParaRPr lang="en-US" sz="1140" dirty="0"/>
           </a:p>
         </p:txBody>
       </p:sp>
@@ -17151,12 +17157,12 @@
         </p:nvSpPr>
         <p:spPr>
           <a:xfrm>
-            <a:off x="7635240" y="4184294"/>
-            <a:ext cx="3474720" cy="1466698"/>
+            <a:off x="7543800" y="4389120"/>
+            <a:ext cx="3611880" cy="1261872"/>
           </a:xfrm>
           <a:prstGeom prst="roundRect">
             <a:avLst>
-              <a:gd name="adj" fmla="val 7481"/>
+              <a:gd name="adj" fmla="val 8696"/>
             </a:avLst>
           </a:prstGeom>
           <a:solidFill>
@@ -17178,8 +17184,8 @@
         </p:nvSpPr>
         <p:spPr>
           <a:xfrm>
-            <a:off x="7799832" y="4330598"/>
-            <a:ext cx="3145536" cy="256032"/>
+            <a:off x="7708392" y="4517136"/>
+            <a:ext cx="3282696" cy="228600"/>
           </a:xfrm>
           <a:prstGeom prst="rect">
             <a:avLst/>
@@ -17195,7 +17201,7 @@
               <a:buNone/>
             </a:pPr>
             <a:r>
-              <a:rPr lang="en-US" sz="1300" b="1" dirty="0">
+              <a:rPr lang="en-US" sz="1220" b="1" dirty="0">
                 <a:solidFill>
                   <a:srgbClr val="0068B7"/>
                 </a:solidFill>
@@ -17205,7 +17211,7 @@
               </a:rPr>
               <a:t>How to validate</a:t>
             </a:r>
-            <a:endParaRPr lang="en-US" sz="1300" dirty="0"/>
+            <a:endParaRPr lang="en-US" sz="1220" dirty="0"/>
           </a:p>
         </p:txBody>
       </p:sp>
@@ -17217,8 +17223,8 @@
         </p:nvSpPr>
         <p:spPr>
           <a:xfrm>
-            <a:off x="7799832" y="4659782"/>
-            <a:ext cx="3145536" cy="899770"/>
+            <a:off x="7708392" y="4828032"/>
+            <a:ext cx="3282696" cy="749808"/>
           </a:xfrm>
           <a:prstGeom prst="rect">
             <a:avLst/>
@@ -17236,7 +17242,7 @@
               <a:buNone/>
             </a:pPr>
             <a:r>
-              <a:rPr lang="en-US" sz="1320" dirty="0">
+              <a:rPr lang="en-US" sz="1220" dirty="0">
                 <a:solidFill>
                   <a:srgbClr val="17364A"/>
                 </a:solidFill>
@@ -17244,9 +17250,9 @@
                 <a:ea typeface="Aptos" pitchFamily="34" charset="-122"/>
                 <a:cs typeface="Aptos" pitchFamily="34" charset="-120"/>
               </a:rPr>
-              <a:t>Connect the concept to data quality, model performance, validation evidence, monitoring measures, and decisions that remain under human control.</a:t>
-            </a:r>
-            <a:endParaRPr lang="en-US" sz="1320" dirty="0"/>
+              <a:t>Connect the concept to data quality, model performance, validation evidence,.</a:t>
+            </a:r>
+            <a:endParaRPr lang="en-US" sz="1220" dirty="0"/>
           </a:p>
         </p:txBody>
       </p:sp>

--- a/downloads/presentations/modules/anl-350.pptx
+++ b/downloads/presentations/modules/anl-350.pptx
@@ -9724,7 +9724,7 @@
                 <a:ea typeface="Aptos" pitchFamily="34" charset="-122"/>
                 <a:cs typeface="Aptos" pitchFamily="34" charset="-120"/>
               </a:rPr>
-              <a:t>• 1. What is the best reason to communicate uncertainty with model results?</a:t>
+              <a:t>1. What is the best reason to communicate uncertainty with model results?</a:t>
             </a:r>
             <a:endParaRPr lang="en-US" sz="1920" dirty="0"/>
           </a:p>
@@ -9741,7 +9741,7 @@
                 <a:ea typeface="Aptos" pitchFamily="34" charset="-122"/>
                 <a:cs typeface="Aptos" pitchFamily="34" charset="-120"/>
               </a:rPr>
-              <a:t>• 2. What is the best reason to assign an accountability owner?</a:t>
+              <a:t>2. What is the best reason to assign an accountability owner?</a:t>
             </a:r>
             <a:endParaRPr lang="en-US" sz="1920" dirty="0"/>
           </a:p>
@@ -9758,7 +9758,7 @@
                 <a:ea typeface="Aptos" pitchFamily="34" charset="-122"/>
                 <a:cs typeface="Aptos" pitchFamily="34" charset="-120"/>
               </a:rPr>
-              <a:t>• 3. When should an AI-supported workflow be escalated for review?</a:t>
+              <a:t>3. When should an AI-supported workflow be escalated for review?</a:t>
             </a:r>
             <a:endParaRPr lang="en-US" sz="1920" dirty="0"/>
           </a:p>
@@ -9865,7 +9865,7 @@
                 <a:ea typeface="Aptos" pitchFamily="34" charset="-122"/>
                 <a:cs typeface="Aptos" pitchFamily="34" charset="-120"/>
               </a:rPr>
-              <a:t>1. What is the best reason to communicate uncertainty with model results?</a:t>
+              <a:t>What is the best reason to communicate uncertainty with model results?</a:t>
             </a:r>
             <a:endParaRPr lang="en-US" sz="1220" dirty="0"/>
           </a:p>
@@ -9972,41 +9972,7 @@
                 <a:ea typeface="Aptos" pitchFamily="34" charset="-122"/>
                 <a:cs typeface="Aptos" pitchFamily="34" charset="-120"/>
               </a:rPr>
-              <a:t>1.</a:t>
-            </a:r>
-            <a:endParaRPr lang="en-US" sz="1140" dirty="0"/>
-          </a:p>
-          <a:p>
-            <a:pPr indent="0" marL="0">
-              <a:buNone/>
-            </a:pPr>
-            <a:r>
-              <a:rPr lang="en-US" sz="1140" dirty="0">
-                <a:solidFill>
-                  <a:srgbClr val="17364A"/>
-                </a:solidFill>
-                <a:latin typeface="Aptos" pitchFamily="34" charset="0"/>
-                <a:ea typeface="Aptos" pitchFamily="34" charset="-122"/>
-                <a:cs typeface="Aptos" pitchFamily="34" charset="-120"/>
-              </a:rPr>
               <a:t>What is the best reason to communicate uncertainty.</a:t>
-            </a:r>
-            <a:endParaRPr lang="en-US" sz="1140" dirty="0"/>
-          </a:p>
-          <a:p>
-            <a:pPr indent="0" marL="0">
-              <a:buNone/>
-            </a:pPr>
-            <a:r>
-              <a:rPr lang="en-US" sz="1140" dirty="0">
-                <a:solidFill>
-                  <a:srgbClr val="17364A"/>
-                </a:solidFill>
-                <a:latin typeface="Aptos" pitchFamily="34" charset="0"/>
-                <a:ea typeface="Aptos" pitchFamily="34" charset="-122"/>
-                <a:cs typeface="Aptos" pitchFamily="34" charset="-120"/>
-              </a:rPr>
-              <a:t>2.</a:t>
             </a:r>
             <a:endParaRPr lang="en-US" sz="1140" dirty="0"/>
           </a:p>
